--- a/course/lectures/act-1-foundations/09-engineering-decision-making-and-metrics/1-9-Engineering-Decision-Making-and-Metrics.pptx
+++ b/course/lectures/act-1-foundations/09-engineering-decision-making-and-metrics/1-9-Engineering-Decision-Making-and-Metrics.pptx
@@ -853,6 +853,12 @@
           <a:p>
             <a:r>
               <a:rPr dirty="0"/>
+              <a:t>- Build: opens with the model and its estimates (BEFORE OBSERVATION). Click 1 — use 1: measurement PARAMETERIZES the model (the observed values and line 1). Click 2 — use 2: measurement TESTS the model’s prediction against reality (line 2 and the footer). Keep the two uses distinct; they are different operations.</a:t>
+            </a:r>
+          </a:p>
+          <a:p>
+            <a:r>
+              <a:rPr dirty="0"/>
               <a:t>- The footer corrects any older phrasing: the metric embodies the modeling choice; the measurement supplies observations. Do not soften it.</a:t>
             </a:r>
           </a:p>
@@ -1432,6 +1438,12 @@
           <a:p>
             <a:r>
               <a:rPr dirty="0"/>
+              <a:t>- In industry, you will hear this whole family of problems called Goodhart’s Law. That’s useful vernacular. Harris and Tayler give us another distinction worth having: surrogation can happen even before anyone deliberately games or optimizes the metric.</a:t>
+            </a:r>
+          </a:p>
+          <a:p>
+            <a:r>
+              <a:rPr dirty="0"/>
               <a:t>- State the law once, briefly; do not build a slogan slide.</a:t>
             </a:r>
           </a:p>
@@ -1648,7 +1660,7 @@
           <a:p/>
           <a:p>
             <a:r>
-              <a:t>- Build: chain first, then the claim, then the header and first three table rows, then the remaining rows, then the closing line.</a:t>
+              <a:t>- Build: table first — header and first three rows, then the remaining rows, then the closing claim line. Students should recognise that every previous unit created a claim BEFORE the chain appears. Only then the chain — the same structure spans all of them — and finally “A number does not decide what to do.”</a:t>
             </a:r>
           </a:p>
           <a:p>
@@ -2028,6 +2040,12 @@
             <a:r>
               <a:rPr dirty="0"/>
               <a:t>- Run the TPS briefly; the answer is No, and the converse (luck) matters equally.</a:t>
+            </a:r>
+          </a:p>
+          <a:p>
+            <a:r>
+              <a:rPr dirty="0"/>
+              <a:t>- Build: the scenario and the TPS question are on screen from the start; nothing else. Run the TPS first. One click then reveals the definition, the answer, and the footer.</a:t>
             </a:r>
           </a:p>
           <a:p>
@@ -6036,7 +6054,7 @@
                   <a:srgbClr val="555960"/>
                 </a:solidFill>
               </a:rPr>
-              <a:t>Today: the chain that turns what we observe into what we decide.</a:t>
+              <a:t>Today: how observations become evidence for engineering decisions.</a:t>
             </a:r>
           </a:p>
         </p:txBody>
@@ -8255,6 +8273,266 @@
   <p:clrMapOvr>
     <a:masterClrMapping/>
   </p:clrMapOvr>
+  <p:timing>
+    <p:tnLst>
+      <p:par>
+        <p:cTn id="1" dur="indefinite" restart="never" nodeType="tmRoot">
+          <p:childTnLst>
+            <p:seq concurrent="1" nextAc="seek">
+              <p:cTn id="2" dur="indefinite" nodeType="mainSeq">
+                <p:childTnLst>
+                  <p:par>
+                    <p:cTn id="3" fill="hold">
+                      <p:stCondLst>
+                        <p:cond delay="indefinite"/>
+                      </p:stCondLst>
+                      <p:childTnLst>
+                        <p:par>
+                          <p:cTn id="4" fill="hold">
+                            <p:stCondLst>
+                              <p:cond delay="0"/>
+                            </p:stCondLst>
+                            <p:childTnLst>
+                              <p:par>
+                                <p:cTn id="5" presetID="10" presetClass="entr" presetSubtype="0" fill="hold" grpId="0" nodeType="clickEffect">
+                                  <p:stCondLst>
+                                    <p:cond delay="0"/>
+                                  </p:stCondLst>
+                                  <p:childTnLst>
+                                    <p:set>
+                                      <p:cBhvr>
+                                        <p:cTn id="6" dur="1" fill="hold">
+                                          <p:stCondLst>
+                                            <p:cond delay="0"/>
+                                          </p:stCondLst>
+                                        </p:cTn>
+                                        <p:tgtEl>
+                                          <p:spTgt spid="104"/>
+                                        </p:tgtEl>
+                                        <p:attrNameLst>
+                                          <p:attrName>style.visibility</p:attrName>
+                                        </p:attrNameLst>
+                                      </p:cBhvr>
+                                      <p:to>
+                                        <p:strVal val="visible"/>
+                                      </p:to>
+                                    </p:set>
+                                    <p:animEffect transition="in" filter="fade">
+                                      <p:cBhvr>
+                                        <p:cTn id="7" dur="500"/>
+                                        <p:tgtEl>
+                                          <p:spTgt spid="104"/>
+                                        </p:tgtEl>
+                                      </p:cBhvr>
+                                    </p:animEffect>
+                                  </p:childTnLst>
+                                </p:cTn>
+                              </p:par>
+                              <p:par>
+                                <p:cTn id="8" presetID="10" presetClass="entr" presetSubtype="0" fill="hold" grpId="0" nodeType="withEffect">
+                                  <p:stCondLst>
+                                    <p:cond delay="0"/>
+                                  </p:stCondLst>
+                                  <p:childTnLst>
+                                    <p:set>
+                                      <p:cBhvr>
+                                        <p:cTn id="9" dur="1" fill="hold">
+                                          <p:stCondLst>
+                                            <p:cond delay="0"/>
+                                          </p:stCondLst>
+                                        </p:cTn>
+                                        <p:tgtEl>
+                                          <p:spTgt spid="105"/>
+                                        </p:tgtEl>
+                                        <p:attrNameLst>
+                                          <p:attrName>style.visibility</p:attrName>
+                                        </p:attrNameLst>
+                                      </p:cBhvr>
+                                      <p:to>
+                                        <p:strVal val="visible"/>
+                                      </p:to>
+                                    </p:set>
+                                    <p:animEffect transition="in" filter="fade">
+                                      <p:cBhvr>
+                                        <p:cTn id="10" dur="500"/>
+                                        <p:tgtEl>
+                                          <p:spTgt spid="105"/>
+                                        </p:tgtEl>
+                                      </p:cBhvr>
+                                    </p:animEffect>
+                                  </p:childTnLst>
+                                </p:cTn>
+                              </p:par>
+                              <p:par>
+                                <p:cTn id="11" presetID="10" presetClass="entr" presetSubtype="0" fill="hold" grpId="0" nodeType="withEffect">
+                                  <p:stCondLst>
+                                    <p:cond delay="0"/>
+                                  </p:stCondLst>
+                                  <p:childTnLst>
+                                    <p:set>
+                                      <p:cBhvr>
+                                        <p:cTn id="12" dur="1" fill="hold">
+                                          <p:stCondLst>
+                                            <p:cond delay="0"/>
+                                          </p:stCondLst>
+                                        </p:cTn>
+                                        <p:tgtEl>
+                                          <p:spTgt spid="106">
+                                            <p:txEl>
+                                              <p:pRg st="0" end="0"/>
+                                            </p:txEl>
+                                          </p:spTgt>
+                                        </p:tgtEl>
+                                        <p:attrNameLst>
+                                          <p:attrName>style.visibility</p:attrName>
+                                        </p:attrNameLst>
+                                      </p:cBhvr>
+                                      <p:to>
+                                        <p:strVal val="visible"/>
+                                      </p:to>
+                                    </p:set>
+                                    <p:animEffect transition="in" filter="fade">
+                                      <p:cBhvr>
+                                        <p:cTn id="13" dur="500"/>
+                                        <p:tgtEl>
+                                          <p:spTgt spid="106">
+                                            <p:txEl>
+                                              <p:pRg st="0" end="0"/>
+                                            </p:txEl>
+                                          </p:spTgt>
+                                        </p:tgtEl>
+                                      </p:cBhvr>
+                                    </p:animEffect>
+                                  </p:childTnLst>
+                                </p:cTn>
+                              </p:par>
+                            </p:childTnLst>
+                          </p:cTn>
+                        </p:par>
+                      </p:childTnLst>
+                    </p:cTn>
+                  </p:par>
+                  <p:par>
+                    <p:cTn id="14" fill="hold">
+                      <p:stCondLst>
+                        <p:cond delay="indefinite"/>
+                      </p:stCondLst>
+                      <p:childTnLst>
+                        <p:par>
+                          <p:cTn id="15" fill="hold">
+                            <p:stCondLst>
+                              <p:cond delay="0"/>
+                            </p:stCondLst>
+                            <p:childTnLst>
+                              <p:par>
+                                <p:cTn id="16" presetID="10" presetClass="entr" presetSubtype="0" fill="hold" grpId="0" nodeType="clickEffect">
+                                  <p:stCondLst>
+                                    <p:cond delay="0"/>
+                                  </p:stCondLst>
+                                  <p:childTnLst>
+                                    <p:set>
+                                      <p:cBhvr>
+                                        <p:cTn id="17" dur="1" fill="hold">
+                                          <p:stCondLst>
+                                            <p:cond delay="0"/>
+                                          </p:stCondLst>
+                                        </p:cTn>
+                                        <p:tgtEl>
+                                          <p:spTgt spid="106">
+                                            <p:txEl>
+                                              <p:pRg st="1" end="1"/>
+                                            </p:txEl>
+                                          </p:spTgt>
+                                        </p:tgtEl>
+                                        <p:attrNameLst>
+                                          <p:attrName>style.visibility</p:attrName>
+                                        </p:attrNameLst>
+                                      </p:cBhvr>
+                                      <p:to>
+                                        <p:strVal val="visible"/>
+                                      </p:to>
+                                    </p:set>
+                                    <p:animEffect transition="in" filter="fade">
+                                      <p:cBhvr>
+                                        <p:cTn id="18" dur="500"/>
+                                        <p:tgtEl>
+                                          <p:spTgt spid="106">
+                                            <p:txEl>
+                                              <p:pRg st="1" end="1"/>
+                                            </p:txEl>
+                                          </p:spTgt>
+                                        </p:tgtEl>
+                                      </p:cBhvr>
+                                    </p:animEffect>
+                                  </p:childTnLst>
+                                </p:cTn>
+                              </p:par>
+                              <p:par>
+                                <p:cTn id="19" presetID="10" presetClass="entr" presetSubtype="0" fill="hold" grpId="0" nodeType="withEffect">
+                                  <p:stCondLst>
+                                    <p:cond delay="0"/>
+                                  </p:stCondLst>
+                                  <p:childTnLst>
+                                    <p:set>
+                                      <p:cBhvr>
+                                        <p:cTn id="20" dur="1" fill="hold">
+                                          <p:stCondLst>
+                                            <p:cond delay="0"/>
+                                          </p:stCondLst>
+                                        </p:cTn>
+                                        <p:tgtEl>
+                                          <p:spTgt spid="107"/>
+                                        </p:tgtEl>
+                                        <p:attrNameLst>
+                                          <p:attrName>style.visibility</p:attrName>
+                                        </p:attrNameLst>
+                                      </p:cBhvr>
+                                      <p:to>
+                                        <p:strVal val="visible"/>
+                                      </p:to>
+                                    </p:set>
+                                    <p:animEffect transition="in" filter="fade">
+                                      <p:cBhvr>
+                                        <p:cTn id="21" dur="500"/>
+                                        <p:tgtEl>
+                                          <p:spTgt spid="107"/>
+                                        </p:tgtEl>
+                                      </p:cBhvr>
+                                    </p:animEffect>
+                                  </p:childTnLst>
+                                </p:cTn>
+                              </p:par>
+                            </p:childTnLst>
+                          </p:cTn>
+                        </p:par>
+                      </p:childTnLst>
+                    </p:cTn>
+                  </p:par>
+                </p:childTnLst>
+              </p:cTn>
+              <p:prevCondLst>
+                <p:cond evt="onPrev" delay="0">
+                  <p:tgtEl>
+                    <p:sldTgt/>
+                  </p:tgtEl>
+                </p:cond>
+              </p:prevCondLst>
+              <p:nextCondLst>
+                <p:cond evt="onNext" delay="0">
+                  <p:tgtEl>
+                    <p:sldTgt/>
+                  </p:tgtEl>
+                </p:cond>
+              </p:nextCondLst>
+            </p:seq>
+          </p:childTnLst>
+        </p:cTn>
+      </p:par>
+    </p:tnLst>
+    <p:bldLst>
+      <p:bldP spid="106" grpId="0" build="p"/>
+    </p:bldLst>
+  </p:timing>
 </p:sld>
 </file>
 
@@ -12562,7 +12840,7 @@
                   <a:srgbClr val="000000"/>
                 </a:solidFill>
               </a:rPr>
-              <a:t>Goodhart’s Law</a:t>
+              <a:t>Goodhart’s Law and surrogation</a:t>
             </a:r>
           </a:p>
         </p:txBody>
@@ -12636,7 +12914,7 @@
         <p:spPr>
           <a:xfrm>
             <a:off x="310896" y="1389888"/>
-            <a:ext cx="3959352" cy="1965960"/>
+            <a:ext cx="3959352" cy="2377440"/>
           </a:xfrm>
           <a:prstGeom prst="rect">
             <a:avLst/>
@@ -12679,7 +12957,47 @@
                   <a:srgbClr val="555960"/>
                 </a:solidFill>
               </a:rPr>
-              <a:t>an empirical relationship — it can hold</a:t>
+              <a:t>an empirical relationship — it can hold</a:t>
+            </a:r>
+          </a:p>
+          <a:p>
+            <a:pPr algn="ctr">
+              <a:spcBef>
+                <a:spcPts val="160"/>
+              </a:spcBef>
+              <a:buNone/>
+            </a:pPr>
+            <a:r>
+              <a:rPr lang="en-US" sz="2000" b="1" i="1" dirty="0">
+                <a:solidFill>
+                  <a:srgbClr val="555960"/>
+                </a:solidFill>
+              </a:rPr>
+              <a:t xml:space="preserve">Surrogation: </a:t>
+            </a:r>
+            <a:r>
+              <a:rPr lang="en-US" sz="2000" b="0" i="1" dirty="0">
+                <a:solidFill>
+                  <a:srgbClr val="555960"/>
+                </a:solidFill>
+              </a:rPr>
+              <a:t xml:space="preserve">we begin treating commits as though they </a:t>
+            </a:r>
+            <a:r>
+              <a:rPr lang="en-US" sz="2000" b="1" i="1" dirty="0">
+                <a:solidFill>
+                  <a:srgbClr val="555960"/>
+                </a:solidFill>
+              </a:rPr>
+              <a:t>are</a:t>
+            </a:r>
+            <a:r>
+              <a:rPr lang="en-US" sz="2000" b="0" i="1" dirty="0">
+                <a:solidFill>
+                  <a:srgbClr val="555960"/>
+                </a:solidFill>
+              </a:rPr>
+              <a:t xml:space="preserve"> useful output</a:t>
             </a:r>
           </a:p>
         </p:txBody>
@@ -12730,7 +13048,7 @@
         <p:spPr>
           <a:xfrm>
             <a:off x="4873752" y="1389888"/>
-            <a:ext cx="3959352" cy="1965960"/>
+            <a:ext cx="3959352" cy="2377440"/>
           </a:xfrm>
           <a:prstGeom prst="rect">
             <a:avLst/>
@@ -12766,29 +13084,28 @@
                   <a:srgbClr val="5C4826"/>
                 </a:solidFill>
               </a:rPr>
-              <a:t>commits rise —</a:t>
-            </a:r>
-          </a:p>
-          <a:p>
-            <a:pPr algn="ctr"/>
-            <a:r>
-              <a:rPr sz="2000" b="0" i="0">
-                <a:solidFill>
-                  <a:srgbClr val="5C4826"/>
-                </a:solidFill>
-              </a:rPr>
-              <a:t>useful output need not</a:t>
-            </a:r>
-          </a:p>
-          <a:p>
-            <a:pPr algn="ctr"/>
-            <a:r>
-              <a:rPr sz="2000" b="0" i="1">
+              <a:t>commits rise — useful output need not</a:t>
+            </a:r>
+          </a:p>
+          <a:p>
+            <a:pPr algn="ctr">
+              <a:buNone/>
+            </a:pPr>
+            <a:r>
+              <a:rPr lang="en-US" sz="2000" b="1" i="1" dirty="0">
                 <a:solidFill>
                   <a:srgbClr val="555960"/>
                 </a:solidFill>
               </a:rPr>
-              <a:t>the informative practice itself changed</a:t>
+              <a:t xml:space="preserve">Goodhart: </a:t>
+            </a:r>
+            <a:r>
+              <a:rPr lang="en-US" sz="2000" b="0" i="1" dirty="0">
+                <a:solidFill>
+                  <a:srgbClr val="555960"/>
+                </a:solidFill>
+              </a:rPr>
+              <a:t>once commits become the target, the empirical relationship itself can change</a:t>
             </a:r>
           </a:p>
         </p:txBody>
@@ -12801,8 +13118,8 @@
         </p:nvSpPr>
         <p:spPr>
           <a:xfrm>
-            <a:off x="274320" y="3657600"/>
-            <a:ext cx="8595360" cy="658368"/>
+            <a:off x="274320" y="4457700"/>
+            <a:ext cx="8595360" cy="800100"/>
           </a:xfrm>
           <a:prstGeom prst="rect">
             <a:avLst/>
@@ -12820,62 +13137,48 @@
           <a:bodyPr wrap="square" lIns="91440" tIns="45720" rIns="91440" bIns="45720" anchor="ctr"/>
           <a:lstStyle/>
           <a:p>
-            <a:pPr algn="ctr"/>
-            <a:r>
-              <a:rPr sz="2000" b="0" i="0">
+            <a:pPr algn="ctr">
+              <a:buNone/>
+            </a:pPr>
+            <a:r>
+              <a:rPr lang="en-US" sz="2000" b="1" i="0" dirty="0">
                 <a:solidFill>
                   <a:srgbClr val="5C4826"/>
                 </a:solidFill>
               </a:rPr>
-              <a:t>Goodhart’s Law: when a measure becomes a target,</a:t>
-            </a:r>
-          </a:p>
-          <a:p>
-            <a:pPr algn="ctr"/>
-            <a:r>
-              <a:rPr sz="2000" b="0" i="0">
+              <a:t xml:space="preserve">Surrogation: </a:t>
+            </a:r>
+            <a:r>
+              <a:rPr lang="en-US" sz="2000" b="0" i="0" dirty="0">
                 <a:solidFill>
                   <a:srgbClr val="5C4826"/>
                 </a:solidFill>
               </a:rPr>
-              <a:t>it ceases to be a good measure.</a:t>
-            </a:r>
-          </a:p>
-        </p:txBody>
-      </p:sp>
-      <p:sp>
-        <p:nvSpPr>
-          <p:cNvPr id="105" name="Ital"/>
-          <p:cNvSpPr txBox="1"/>
-          <p:nvPr/>
-        </p:nvSpPr>
-        <p:spPr>
-          <a:xfrm>
-            <a:off x="274320" y="4617720"/>
-            <a:ext cx="8595360" cy="457200"/>
-          </a:xfrm>
-          <a:prstGeom prst="rect">
-            <a:avLst/>
-          </a:prstGeom>
-          <a:noFill/>
-          <a:ln>
-            <a:noFill/>
-          </a:ln>
-        </p:spPr>
-        <p:txBody>
-          <a:bodyPr wrap="square" lIns="0" tIns="0" rIns="0" bIns="0" anchor="t"/>
-          <a:lstStyle/>
+              <a:t>the measure becomes confused with the property</a:t>
+            </a:r>
+          </a:p>
           <a:p>
             <a:pPr algn="ctr">
+              <a:spcBef>
+                <a:spcPts val="140"/>
+              </a:spcBef>
               <a:buNone/>
             </a:pPr>
             <a:r>
-              <a:rPr lang="en-US" sz="2000" b="0" i="1" dirty="0">
-                <a:solidFill>
-                  <a:srgbClr val="000000"/>
-                </a:solidFill>
-              </a:rPr>
-              <a:t>No bad faith required — attention migrates to what is visible.</a:t>
+              <a:rPr lang="en-US" sz="2000" b="1" i="0" dirty="0">
+                <a:solidFill>
+                  <a:srgbClr val="5C4826"/>
+                </a:solidFill>
+              </a:rPr>
+              <a:t xml:space="preserve">Goodhart’s Law: </a:t>
+            </a:r>
+            <a:r>
+              <a:rPr lang="en-US" sz="2000" b="0" i="0" dirty="0">
+                <a:solidFill>
+                  <a:srgbClr val="5C4826"/>
+                </a:solidFill>
+              </a:rPr>
+              <a:t>targeting the measure can change the relationship</a:t>
             </a:r>
           </a:p>
         </p:txBody>
@@ -15127,462 +15430,6 @@
             <p:seq concurrent="1" nextAc="seek">
               <p:cTn id="2" dur="indefinite" nodeType="mainSeq">
                 <p:childTnLst>
-                  <p:par>
-                    <p:cTn id="3" fill="hold">
-                      <p:stCondLst>
-                        <p:cond delay="indefinite"/>
-                      </p:stCondLst>
-                      <p:childTnLst>
-                        <p:par>
-                          <p:cTn id="4" fill="hold">
-                            <p:stCondLst>
-                              <p:cond delay="0"/>
-                            </p:stCondLst>
-                            <p:childTnLst>
-                              <p:par>
-                                <p:cTn id="5" presetID="10" presetClass="entr" presetSubtype="0" fill="hold" grpId="0" nodeType="clickEffect">
-                                  <p:stCondLst>
-                                    <p:cond delay="0"/>
-                                  </p:stCondLst>
-                                  <p:childTnLst>
-                                    <p:set>
-                                      <p:cBhvr>
-                                        <p:cTn id="6" dur="1" fill="hold">
-                                          <p:stCondLst>
-                                            <p:cond delay="0"/>
-                                          </p:stCondLst>
-                                        </p:cTn>
-                                        <p:tgtEl>
-                                          <p:spTgt spid="94"/>
-                                        </p:tgtEl>
-                                        <p:attrNameLst>
-                                          <p:attrName>style.visibility</p:attrName>
-                                        </p:attrNameLst>
-                                      </p:cBhvr>
-                                      <p:to>
-                                        <p:strVal val="visible"/>
-                                      </p:to>
-                                    </p:set>
-                                    <p:animEffect transition="in" filter="fade">
-                                      <p:cBhvr>
-                                        <p:cTn id="7" dur="500"/>
-                                        <p:tgtEl>
-                                          <p:spTgt spid="94"/>
-                                        </p:tgtEl>
-                                      </p:cBhvr>
-                                    </p:animEffect>
-                                  </p:childTnLst>
-                                </p:cTn>
-                              </p:par>
-                              <p:par>
-                                <p:cTn id="8" presetID="10" presetClass="entr" presetSubtype="0" fill="hold" grpId="0" nodeType="withEffect">
-                                  <p:stCondLst>
-                                    <p:cond delay="0"/>
-                                  </p:stCondLst>
-                                  <p:childTnLst>
-                                    <p:set>
-                                      <p:cBhvr>
-                                        <p:cTn id="9" dur="1" fill="hold">
-                                          <p:stCondLst>
-                                            <p:cond delay="0"/>
-                                          </p:stCondLst>
-                                        </p:cTn>
-                                        <p:tgtEl>
-                                          <p:spTgt spid="95"/>
-                                        </p:tgtEl>
-                                        <p:attrNameLst>
-                                          <p:attrName>style.visibility</p:attrName>
-                                        </p:attrNameLst>
-                                      </p:cBhvr>
-                                      <p:to>
-                                        <p:strVal val="visible"/>
-                                      </p:to>
-                                    </p:set>
-                                    <p:animEffect transition="in" filter="fade">
-                                      <p:cBhvr>
-                                        <p:cTn id="10" dur="500"/>
-                                        <p:tgtEl>
-                                          <p:spTgt spid="95"/>
-                                        </p:tgtEl>
-                                      </p:cBhvr>
-                                    </p:animEffect>
-                                  </p:childTnLst>
-                                </p:cTn>
-                              </p:par>
-                              <p:par>
-                                <p:cTn id="11" presetID="10" presetClass="entr" presetSubtype="0" fill="hold" grpId="0" nodeType="withEffect">
-                                  <p:stCondLst>
-                                    <p:cond delay="0"/>
-                                  </p:stCondLst>
-                                  <p:childTnLst>
-                                    <p:set>
-                                      <p:cBhvr>
-                                        <p:cTn id="12" dur="1" fill="hold">
-                                          <p:stCondLst>
-                                            <p:cond delay="0"/>
-                                          </p:stCondLst>
-                                        </p:cTn>
-                                        <p:tgtEl>
-                                          <p:spTgt spid="96"/>
-                                        </p:tgtEl>
-                                        <p:attrNameLst>
-                                          <p:attrName>style.visibility</p:attrName>
-                                        </p:attrNameLst>
-                                      </p:cBhvr>
-                                      <p:to>
-                                        <p:strVal val="visible"/>
-                                      </p:to>
-                                    </p:set>
-                                    <p:animEffect transition="in" filter="fade">
-                                      <p:cBhvr>
-                                        <p:cTn id="13" dur="500"/>
-                                        <p:tgtEl>
-                                          <p:spTgt spid="96"/>
-                                        </p:tgtEl>
-                                      </p:cBhvr>
-                                    </p:animEffect>
-                                  </p:childTnLst>
-                                </p:cTn>
-                              </p:par>
-                              <p:par>
-                                <p:cTn id="14" presetID="10" presetClass="entr" presetSubtype="0" fill="hold" grpId="0" nodeType="withEffect">
-                                  <p:stCondLst>
-                                    <p:cond delay="0"/>
-                                  </p:stCondLst>
-                                  <p:childTnLst>
-                                    <p:set>
-                                      <p:cBhvr>
-                                        <p:cTn id="15" dur="1" fill="hold">
-                                          <p:stCondLst>
-                                            <p:cond delay="0"/>
-                                          </p:stCondLst>
-                                        </p:cTn>
-                                        <p:tgtEl>
-                                          <p:spTgt spid="97"/>
-                                        </p:tgtEl>
-                                        <p:attrNameLst>
-                                          <p:attrName>style.visibility</p:attrName>
-                                        </p:attrNameLst>
-                                      </p:cBhvr>
-                                      <p:to>
-                                        <p:strVal val="visible"/>
-                                      </p:to>
-                                    </p:set>
-                                    <p:animEffect transition="in" filter="fade">
-                                      <p:cBhvr>
-                                        <p:cTn id="16" dur="500"/>
-                                        <p:tgtEl>
-                                          <p:spTgt spid="97"/>
-                                        </p:tgtEl>
-                                      </p:cBhvr>
-                                    </p:animEffect>
-                                  </p:childTnLst>
-                                </p:cTn>
-                              </p:par>
-                              <p:par>
-                                <p:cTn id="17" presetID="10" presetClass="entr" presetSubtype="0" fill="hold" grpId="0" nodeType="withEffect">
-                                  <p:stCondLst>
-                                    <p:cond delay="0"/>
-                                  </p:stCondLst>
-                                  <p:childTnLst>
-                                    <p:set>
-                                      <p:cBhvr>
-                                        <p:cTn id="18" dur="1" fill="hold">
-                                          <p:stCondLst>
-                                            <p:cond delay="0"/>
-                                          </p:stCondLst>
-                                        </p:cTn>
-                                        <p:tgtEl>
-                                          <p:spTgt spid="98"/>
-                                        </p:tgtEl>
-                                        <p:attrNameLst>
-                                          <p:attrName>style.visibility</p:attrName>
-                                        </p:attrNameLst>
-                                      </p:cBhvr>
-                                      <p:to>
-                                        <p:strVal val="visible"/>
-                                      </p:to>
-                                    </p:set>
-                                    <p:animEffect transition="in" filter="fade">
-                                      <p:cBhvr>
-                                        <p:cTn id="19" dur="500"/>
-                                        <p:tgtEl>
-                                          <p:spTgt spid="98"/>
-                                        </p:tgtEl>
-                                      </p:cBhvr>
-                                    </p:animEffect>
-                                  </p:childTnLst>
-                                </p:cTn>
-                              </p:par>
-                              <p:par>
-                                <p:cTn id="20" presetID="10" presetClass="entr" presetSubtype="0" fill="hold" grpId="0" nodeType="withEffect">
-                                  <p:stCondLst>
-                                    <p:cond delay="0"/>
-                                  </p:stCondLst>
-                                  <p:childTnLst>
-                                    <p:set>
-                                      <p:cBhvr>
-                                        <p:cTn id="21" dur="1" fill="hold">
-                                          <p:stCondLst>
-                                            <p:cond delay="0"/>
-                                          </p:stCondLst>
-                                        </p:cTn>
-                                        <p:tgtEl>
-                                          <p:spTgt spid="99"/>
-                                        </p:tgtEl>
-                                        <p:attrNameLst>
-                                          <p:attrName>style.visibility</p:attrName>
-                                        </p:attrNameLst>
-                                      </p:cBhvr>
-                                      <p:to>
-                                        <p:strVal val="visible"/>
-                                      </p:to>
-                                    </p:set>
-                                    <p:animEffect transition="in" filter="fade">
-                                      <p:cBhvr>
-                                        <p:cTn id="22" dur="500"/>
-                                        <p:tgtEl>
-                                          <p:spTgt spid="99"/>
-                                        </p:tgtEl>
-                                      </p:cBhvr>
-                                    </p:animEffect>
-                                  </p:childTnLst>
-                                </p:cTn>
-                              </p:par>
-                              <p:par>
-                                <p:cTn id="23" presetID="10" presetClass="entr" presetSubtype="0" fill="hold" grpId="0" nodeType="withEffect">
-                                  <p:stCondLst>
-                                    <p:cond delay="0"/>
-                                  </p:stCondLst>
-                                  <p:childTnLst>
-                                    <p:set>
-                                      <p:cBhvr>
-                                        <p:cTn id="24" dur="1" fill="hold">
-                                          <p:stCondLst>
-                                            <p:cond delay="0"/>
-                                          </p:stCondLst>
-                                        </p:cTn>
-                                        <p:tgtEl>
-                                          <p:spTgt spid="100"/>
-                                        </p:tgtEl>
-                                        <p:attrNameLst>
-                                          <p:attrName>style.visibility</p:attrName>
-                                        </p:attrNameLst>
-                                      </p:cBhvr>
-                                      <p:to>
-                                        <p:strVal val="visible"/>
-                                      </p:to>
-                                    </p:set>
-                                    <p:animEffect transition="in" filter="fade">
-                                      <p:cBhvr>
-                                        <p:cTn id="25" dur="500"/>
-                                        <p:tgtEl>
-                                          <p:spTgt spid="100"/>
-                                        </p:tgtEl>
-                                      </p:cBhvr>
-                                    </p:animEffect>
-                                  </p:childTnLst>
-                                </p:cTn>
-                              </p:par>
-                              <p:par>
-                                <p:cTn id="26" presetID="10" presetClass="entr" presetSubtype="0" fill="hold" grpId="0" nodeType="withEffect">
-                                  <p:stCondLst>
-                                    <p:cond delay="0"/>
-                                  </p:stCondLst>
-                                  <p:childTnLst>
-                                    <p:set>
-                                      <p:cBhvr>
-                                        <p:cTn id="27" dur="1" fill="hold">
-                                          <p:stCondLst>
-                                            <p:cond delay="0"/>
-                                          </p:stCondLst>
-                                        </p:cTn>
-                                        <p:tgtEl>
-                                          <p:spTgt spid="101"/>
-                                        </p:tgtEl>
-                                        <p:attrNameLst>
-                                          <p:attrName>style.visibility</p:attrName>
-                                        </p:attrNameLst>
-                                      </p:cBhvr>
-                                      <p:to>
-                                        <p:strVal val="visible"/>
-                                      </p:to>
-                                    </p:set>
-                                    <p:animEffect transition="in" filter="fade">
-                                      <p:cBhvr>
-                                        <p:cTn id="28" dur="500"/>
-                                        <p:tgtEl>
-                                          <p:spTgt spid="101"/>
-                                        </p:tgtEl>
-                                      </p:cBhvr>
-                                    </p:animEffect>
-                                  </p:childTnLst>
-                                </p:cTn>
-                              </p:par>
-                              <p:par>
-                                <p:cTn id="29" presetID="10" presetClass="entr" presetSubtype="0" fill="hold" grpId="0" nodeType="withEffect">
-                                  <p:stCondLst>
-                                    <p:cond delay="0"/>
-                                  </p:stCondLst>
-                                  <p:childTnLst>
-                                    <p:set>
-                                      <p:cBhvr>
-                                        <p:cTn id="30" dur="1" fill="hold">
-                                          <p:stCondLst>
-                                            <p:cond delay="0"/>
-                                          </p:stCondLst>
-                                        </p:cTn>
-                                        <p:tgtEl>
-                                          <p:spTgt spid="102"/>
-                                        </p:tgtEl>
-                                        <p:attrNameLst>
-                                          <p:attrName>style.visibility</p:attrName>
-                                        </p:attrNameLst>
-                                      </p:cBhvr>
-                                      <p:to>
-                                        <p:strVal val="visible"/>
-                                      </p:to>
-                                    </p:set>
-                                    <p:animEffect transition="in" filter="fade">
-                                      <p:cBhvr>
-                                        <p:cTn id="31" dur="500"/>
-                                        <p:tgtEl>
-                                          <p:spTgt spid="102"/>
-                                        </p:tgtEl>
-                                      </p:cBhvr>
-                                    </p:animEffect>
-                                  </p:childTnLst>
-                                </p:cTn>
-                              </p:par>
-                              <p:par>
-                                <p:cTn id="32" presetID="10" presetClass="entr" presetSubtype="0" fill="hold" grpId="0" nodeType="withEffect">
-                                  <p:stCondLst>
-                                    <p:cond delay="0"/>
-                                  </p:stCondLst>
-                                  <p:childTnLst>
-                                    <p:set>
-                                      <p:cBhvr>
-                                        <p:cTn id="33" dur="1" fill="hold">
-                                          <p:stCondLst>
-                                            <p:cond delay="0"/>
-                                          </p:stCondLst>
-                                        </p:cTn>
-                                        <p:tgtEl>
-                                          <p:spTgt spid="103"/>
-                                        </p:tgtEl>
-                                        <p:attrNameLst>
-                                          <p:attrName>style.visibility</p:attrName>
-                                        </p:attrNameLst>
-                                      </p:cBhvr>
-                                      <p:to>
-                                        <p:strVal val="visible"/>
-                                      </p:to>
-                                    </p:set>
-                                    <p:animEffect transition="in" filter="fade">
-                                      <p:cBhvr>
-                                        <p:cTn id="34" dur="500"/>
-                                        <p:tgtEl>
-                                          <p:spTgt spid="103"/>
-                                        </p:tgtEl>
-                                      </p:cBhvr>
-                                    </p:animEffect>
-                                  </p:childTnLst>
-                                </p:cTn>
-                              </p:par>
-                              <p:par>
-                                <p:cTn id="35" presetID="10" presetClass="entr" presetSubtype="0" fill="hold" grpId="0" nodeType="withEffect">
-                                  <p:stCondLst>
-                                    <p:cond delay="0"/>
-                                  </p:stCondLst>
-                                  <p:childTnLst>
-                                    <p:set>
-                                      <p:cBhvr>
-                                        <p:cTn id="36" dur="1" fill="hold">
-                                          <p:stCondLst>
-                                            <p:cond delay="0"/>
-                                          </p:stCondLst>
-                                        </p:cTn>
-                                        <p:tgtEl>
-                                          <p:spTgt spid="104"/>
-                                        </p:tgtEl>
-                                        <p:attrNameLst>
-                                          <p:attrName>style.visibility</p:attrName>
-                                        </p:attrNameLst>
-                                      </p:cBhvr>
-                                      <p:to>
-                                        <p:strVal val="visible"/>
-                                      </p:to>
-                                    </p:set>
-                                    <p:animEffect transition="in" filter="fade">
-                                      <p:cBhvr>
-                                        <p:cTn id="37" dur="500"/>
-                                        <p:tgtEl>
-                                          <p:spTgt spid="104"/>
-                                        </p:tgtEl>
-                                      </p:cBhvr>
-                                    </p:animEffect>
-                                  </p:childTnLst>
-                                </p:cTn>
-                              </p:par>
-                            </p:childTnLst>
-                          </p:cTn>
-                        </p:par>
-                      </p:childTnLst>
-                    </p:cTn>
-                  </p:par>
-                  <p:par>
-                    <p:cTn id="38" fill="hold">
-                      <p:stCondLst>
-                        <p:cond delay="indefinite"/>
-                      </p:stCondLst>
-                      <p:childTnLst>
-                        <p:par>
-                          <p:cTn id="39" fill="hold">
-                            <p:stCondLst>
-                              <p:cond delay="0"/>
-                            </p:stCondLst>
-                            <p:childTnLst>
-                              <p:par>
-                                <p:cTn id="40" presetID="10" presetClass="entr" presetSubtype="0" fill="hold" grpId="0" nodeType="clickEffect">
-                                  <p:stCondLst>
-                                    <p:cond delay="0"/>
-                                  </p:stCondLst>
-                                  <p:childTnLst>
-                                    <p:set>
-                                      <p:cBhvr>
-                                        <p:cTn id="41" dur="1" fill="hold">
-                                          <p:stCondLst>
-                                            <p:cond delay="0"/>
-                                          </p:stCondLst>
-                                        </p:cTn>
-                                        <p:tgtEl>
-                                          <p:spTgt spid="15"/>
-                                        </p:tgtEl>
-                                        <p:attrNameLst>
-                                          <p:attrName>style.visibility</p:attrName>
-                                        </p:attrNameLst>
-                                      </p:cBhvr>
-                                      <p:to>
-                                        <p:strVal val="visible"/>
-                                      </p:to>
-                                    </p:set>
-                                    <p:animEffect transition="in" filter="fade">
-                                      <p:cBhvr>
-                                        <p:cTn id="42" dur="500"/>
-                                        <p:tgtEl>
-                                          <p:spTgt spid="15"/>
-                                        </p:tgtEl>
-                                      </p:cBhvr>
-                                    </p:animEffect>
-                                  </p:childTnLst>
-                                </p:cTn>
-                              </p:par>
-                            </p:childTnLst>
-                          </p:cTn>
-                        </p:par>
-                      </p:childTnLst>
-                    </p:cTn>
-                  </p:par>
                   <p:par>
                     <p:cTn id="43" fill="hold">
                       <p:stCondLst>
@@ -16162,6 +16009,462 @@
                       </p:childTnLst>
                     </p:cTn>
                   </p:par>
+                  <p:par>
+                    <p:cTn id="3" fill="hold">
+                      <p:stCondLst>
+                        <p:cond delay="indefinite"/>
+                      </p:stCondLst>
+                      <p:childTnLst>
+                        <p:par>
+                          <p:cTn id="4" fill="hold">
+                            <p:stCondLst>
+                              <p:cond delay="0"/>
+                            </p:stCondLst>
+                            <p:childTnLst>
+                              <p:par>
+                                <p:cTn id="5" presetID="10" presetClass="entr" presetSubtype="0" fill="hold" grpId="0" nodeType="clickEffect">
+                                  <p:stCondLst>
+                                    <p:cond delay="0"/>
+                                  </p:stCondLst>
+                                  <p:childTnLst>
+                                    <p:set>
+                                      <p:cBhvr>
+                                        <p:cTn id="6" dur="1" fill="hold">
+                                          <p:stCondLst>
+                                            <p:cond delay="0"/>
+                                          </p:stCondLst>
+                                        </p:cTn>
+                                        <p:tgtEl>
+                                          <p:spTgt spid="94"/>
+                                        </p:tgtEl>
+                                        <p:attrNameLst>
+                                          <p:attrName>style.visibility</p:attrName>
+                                        </p:attrNameLst>
+                                      </p:cBhvr>
+                                      <p:to>
+                                        <p:strVal val="visible"/>
+                                      </p:to>
+                                    </p:set>
+                                    <p:animEffect transition="in" filter="fade">
+                                      <p:cBhvr>
+                                        <p:cTn id="7" dur="500"/>
+                                        <p:tgtEl>
+                                          <p:spTgt spid="94"/>
+                                        </p:tgtEl>
+                                      </p:cBhvr>
+                                    </p:animEffect>
+                                  </p:childTnLst>
+                                </p:cTn>
+                              </p:par>
+                              <p:par>
+                                <p:cTn id="8" presetID="10" presetClass="entr" presetSubtype="0" fill="hold" grpId="0" nodeType="withEffect">
+                                  <p:stCondLst>
+                                    <p:cond delay="0"/>
+                                  </p:stCondLst>
+                                  <p:childTnLst>
+                                    <p:set>
+                                      <p:cBhvr>
+                                        <p:cTn id="9" dur="1" fill="hold">
+                                          <p:stCondLst>
+                                            <p:cond delay="0"/>
+                                          </p:stCondLst>
+                                        </p:cTn>
+                                        <p:tgtEl>
+                                          <p:spTgt spid="95"/>
+                                        </p:tgtEl>
+                                        <p:attrNameLst>
+                                          <p:attrName>style.visibility</p:attrName>
+                                        </p:attrNameLst>
+                                      </p:cBhvr>
+                                      <p:to>
+                                        <p:strVal val="visible"/>
+                                      </p:to>
+                                    </p:set>
+                                    <p:animEffect transition="in" filter="fade">
+                                      <p:cBhvr>
+                                        <p:cTn id="10" dur="500"/>
+                                        <p:tgtEl>
+                                          <p:spTgt spid="95"/>
+                                        </p:tgtEl>
+                                      </p:cBhvr>
+                                    </p:animEffect>
+                                  </p:childTnLst>
+                                </p:cTn>
+                              </p:par>
+                              <p:par>
+                                <p:cTn id="11" presetID="10" presetClass="entr" presetSubtype="0" fill="hold" grpId="0" nodeType="withEffect">
+                                  <p:stCondLst>
+                                    <p:cond delay="0"/>
+                                  </p:stCondLst>
+                                  <p:childTnLst>
+                                    <p:set>
+                                      <p:cBhvr>
+                                        <p:cTn id="12" dur="1" fill="hold">
+                                          <p:stCondLst>
+                                            <p:cond delay="0"/>
+                                          </p:stCondLst>
+                                        </p:cTn>
+                                        <p:tgtEl>
+                                          <p:spTgt spid="96"/>
+                                        </p:tgtEl>
+                                        <p:attrNameLst>
+                                          <p:attrName>style.visibility</p:attrName>
+                                        </p:attrNameLst>
+                                      </p:cBhvr>
+                                      <p:to>
+                                        <p:strVal val="visible"/>
+                                      </p:to>
+                                    </p:set>
+                                    <p:animEffect transition="in" filter="fade">
+                                      <p:cBhvr>
+                                        <p:cTn id="13" dur="500"/>
+                                        <p:tgtEl>
+                                          <p:spTgt spid="96"/>
+                                        </p:tgtEl>
+                                      </p:cBhvr>
+                                    </p:animEffect>
+                                  </p:childTnLst>
+                                </p:cTn>
+                              </p:par>
+                              <p:par>
+                                <p:cTn id="14" presetID="10" presetClass="entr" presetSubtype="0" fill="hold" grpId="0" nodeType="withEffect">
+                                  <p:stCondLst>
+                                    <p:cond delay="0"/>
+                                  </p:stCondLst>
+                                  <p:childTnLst>
+                                    <p:set>
+                                      <p:cBhvr>
+                                        <p:cTn id="15" dur="1" fill="hold">
+                                          <p:stCondLst>
+                                            <p:cond delay="0"/>
+                                          </p:stCondLst>
+                                        </p:cTn>
+                                        <p:tgtEl>
+                                          <p:spTgt spid="97"/>
+                                        </p:tgtEl>
+                                        <p:attrNameLst>
+                                          <p:attrName>style.visibility</p:attrName>
+                                        </p:attrNameLst>
+                                      </p:cBhvr>
+                                      <p:to>
+                                        <p:strVal val="visible"/>
+                                      </p:to>
+                                    </p:set>
+                                    <p:animEffect transition="in" filter="fade">
+                                      <p:cBhvr>
+                                        <p:cTn id="16" dur="500"/>
+                                        <p:tgtEl>
+                                          <p:spTgt spid="97"/>
+                                        </p:tgtEl>
+                                      </p:cBhvr>
+                                    </p:animEffect>
+                                  </p:childTnLst>
+                                </p:cTn>
+                              </p:par>
+                              <p:par>
+                                <p:cTn id="17" presetID="10" presetClass="entr" presetSubtype="0" fill="hold" grpId="0" nodeType="withEffect">
+                                  <p:stCondLst>
+                                    <p:cond delay="0"/>
+                                  </p:stCondLst>
+                                  <p:childTnLst>
+                                    <p:set>
+                                      <p:cBhvr>
+                                        <p:cTn id="18" dur="1" fill="hold">
+                                          <p:stCondLst>
+                                            <p:cond delay="0"/>
+                                          </p:stCondLst>
+                                        </p:cTn>
+                                        <p:tgtEl>
+                                          <p:spTgt spid="98"/>
+                                        </p:tgtEl>
+                                        <p:attrNameLst>
+                                          <p:attrName>style.visibility</p:attrName>
+                                        </p:attrNameLst>
+                                      </p:cBhvr>
+                                      <p:to>
+                                        <p:strVal val="visible"/>
+                                      </p:to>
+                                    </p:set>
+                                    <p:animEffect transition="in" filter="fade">
+                                      <p:cBhvr>
+                                        <p:cTn id="19" dur="500"/>
+                                        <p:tgtEl>
+                                          <p:spTgt spid="98"/>
+                                        </p:tgtEl>
+                                      </p:cBhvr>
+                                    </p:animEffect>
+                                  </p:childTnLst>
+                                </p:cTn>
+                              </p:par>
+                              <p:par>
+                                <p:cTn id="20" presetID="10" presetClass="entr" presetSubtype="0" fill="hold" grpId="0" nodeType="withEffect">
+                                  <p:stCondLst>
+                                    <p:cond delay="0"/>
+                                  </p:stCondLst>
+                                  <p:childTnLst>
+                                    <p:set>
+                                      <p:cBhvr>
+                                        <p:cTn id="21" dur="1" fill="hold">
+                                          <p:stCondLst>
+                                            <p:cond delay="0"/>
+                                          </p:stCondLst>
+                                        </p:cTn>
+                                        <p:tgtEl>
+                                          <p:spTgt spid="99"/>
+                                        </p:tgtEl>
+                                        <p:attrNameLst>
+                                          <p:attrName>style.visibility</p:attrName>
+                                        </p:attrNameLst>
+                                      </p:cBhvr>
+                                      <p:to>
+                                        <p:strVal val="visible"/>
+                                      </p:to>
+                                    </p:set>
+                                    <p:animEffect transition="in" filter="fade">
+                                      <p:cBhvr>
+                                        <p:cTn id="22" dur="500"/>
+                                        <p:tgtEl>
+                                          <p:spTgt spid="99"/>
+                                        </p:tgtEl>
+                                      </p:cBhvr>
+                                    </p:animEffect>
+                                  </p:childTnLst>
+                                </p:cTn>
+                              </p:par>
+                              <p:par>
+                                <p:cTn id="23" presetID="10" presetClass="entr" presetSubtype="0" fill="hold" grpId="0" nodeType="withEffect">
+                                  <p:stCondLst>
+                                    <p:cond delay="0"/>
+                                  </p:stCondLst>
+                                  <p:childTnLst>
+                                    <p:set>
+                                      <p:cBhvr>
+                                        <p:cTn id="24" dur="1" fill="hold">
+                                          <p:stCondLst>
+                                            <p:cond delay="0"/>
+                                          </p:stCondLst>
+                                        </p:cTn>
+                                        <p:tgtEl>
+                                          <p:spTgt spid="100"/>
+                                        </p:tgtEl>
+                                        <p:attrNameLst>
+                                          <p:attrName>style.visibility</p:attrName>
+                                        </p:attrNameLst>
+                                      </p:cBhvr>
+                                      <p:to>
+                                        <p:strVal val="visible"/>
+                                      </p:to>
+                                    </p:set>
+                                    <p:animEffect transition="in" filter="fade">
+                                      <p:cBhvr>
+                                        <p:cTn id="25" dur="500"/>
+                                        <p:tgtEl>
+                                          <p:spTgt spid="100"/>
+                                        </p:tgtEl>
+                                      </p:cBhvr>
+                                    </p:animEffect>
+                                  </p:childTnLst>
+                                </p:cTn>
+                              </p:par>
+                              <p:par>
+                                <p:cTn id="26" presetID="10" presetClass="entr" presetSubtype="0" fill="hold" grpId="0" nodeType="withEffect">
+                                  <p:stCondLst>
+                                    <p:cond delay="0"/>
+                                  </p:stCondLst>
+                                  <p:childTnLst>
+                                    <p:set>
+                                      <p:cBhvr>
+                                        <p:cTn id="27" dur="1" fill="hold">
+                                          <p:stCondLst>
+                                            <p:cond delay="0"/>
+                                          </p:stCondLst>
+                                        </p:cTn>
+                                        <p:tgtEl>
+                                          <p:spTgt spid="101"/>
+                                        </p:tgtEl>
+                                        <p:attrNameLst>
+                                          <p:attrName>style.visibility</p:attrName>
+                                        </p:attrNameLst>
+                                      </p:cBhvr>
+                                      <p:to>
+                                        <p:strVal val="visible"/>
+                                      </p:to>
+                                    </p:set>
+                                    <p:animEffect transition="in" filter="fade">
+                                      <p:cBhvr>
+                                        <p:cTn id="28" dur="500"/>
+                                        <p:tgtEl>
+                                          <p:spTgt spid="101"/>
+                                        </p:tgtEl>
+                                      </p:cBhvr>
+                                    </p:animEffect>
+                                  </p:childTnLst>
+                                </p:cTn>
+                              </p:par>
+                              <p:par>
+                                <p:cTn id="29" presetID="10" presetClass="entr" presetSubtype="0" fill="hold" grpId="0" nodeType="withEffect">
+                                  <p:stCondLst>
+                                    <p:cond delay="0"/>
+                                  </p:stCondLst>
+                                  <p:childTnLst>
+                                    <p:set>
+                                      <p:cBhvr>
+                                        <p:cTn id="30" dur="1" fill="hold">
+                                          <p:stCondLst>
+                                            <p:cond delay="0"/>
+                                          </p:stCondLst>
+                                        </p:cTn>
+                                        <p:tgtEl>
+                                          <p:spTgt spid="102"/>
+                                        </p:tgtEl>
+                                        <p:attrNameLst>
+                                          <p:attrName>style.visibility</p:attrName>
+                                        </p:attrNameLst>
+                                      </p:cBhvr>
+                                      <p:to>
+                                        <p:strVal val="visible"/>
+                                      </p:to>
+                                    </p:set>
+                                    <p:animEffect transition="in" filter="fade">
+                                      <p:cBhvr>
+                                        <p:cTn id="31" dur="500"/>
+                                        <p:tgtEl>
+                                          <p:spTgt spid="102"/>
+                                        </p:tgtEl>
+                                      </p:cBhvr>
+                                    </p:animEffect>
+                                  </p:childTnLst>
+                                </p:cTn>
+                              </p:par>
+                              <p:par>
+                                <p:cTn id="32" presetID="10" presetClass="entr" presetSubtype="0" fill="hold" grpId="0" nodeType="withEffect">
+                                  <p:stCondLst>
+                                    <p:cond delay="0"/>
+                                  </p:stCondLst>
+                                  <p:childTnLst>
+                                    <p:set>
+                                      <p:cBhvr>
+                                        <p:cTn id="33" dur="1" fill="hold">
+                                          <p:stCondLst>
+                                            <p:cond delay="0"/>
+                                          </p:stCondLst>
+                                        </p:cTn>
+                                        <p:tgtEl>
+                                          <p:spTgt spid="103"/>
+                                        </p:tgtEl>
+                                        <p:attrNameLst>
+                                          <p:attrName>style.visibility</p:attrName>
+                                        </p:attrNameLst>
+                                      </p:cBhvr>
+                                      <p:to>
+                                        <p:strVal val="visible"/>
+                                      </p:to>
+                                    </p:set>
+                                    <p:animEffect transition="in" filter="fade">
+                                      <p:cBhvr>
+                                        <p:cTn id="34" dur="500"/>
+                                        <p:tgtEl>
+                                          <p:spTgt spid="103"/>
+                                        </p:tgtEl>
+                                      </p:cBhvr>
+                                    </p:animEffect>
+                                  </p:childTnLst>
+                                </p:cTn>
+                              </p:par>
+                              <p:par>
+                                <p:cTn id="35" presetID="10" presetClass="entr" presetSubtype="0" fill="hold" grpId="0" nodeType="withEffect">
+                                  <p:stCondLst>
+                                    <p:cond delay="0"/>
+                                  </p:stCondLst>
+                                  <p:childTnLst>
+                                    <p:set>
+                                      <p:cBhvr>
+                                        <p:cTn id="36" dur="1" fill="hold">
+                                          <p:stCondLst>
+                                            <p:cond delay="0"/>
+                                          </p:stCondLst>
+                                        </p:cTn>
+                                        <p:tgtEl>
+                                          <p:spTgt spid="104"/>
+                                        </p:tgtEl>
+                                        <p:attrNameLst>
+                                          <p:attrName>style.visibility</p:attrName>
+                                        </p:attrNameLst>
+                                      </p:cBhvr>
+                                      <p:to>
+                                        <p:strVal val="visible"/>
+                                      </p:to>
+                                    </p:set>
+                                    <p:animEffect transition="in" filter="fade">
+                                      <p:cBhvr>
+                                        <p:cTn id="37" dur="500"/>
+                                        <p:tgtEl>
+                                          <p:spTgt spid="104"/>
+                                        </p:tgtEl>
+                                      </p:cBhvr>
+                                    </p:animEffect>
+                                  </p:childTnLst>
+                                </p:cTn>
+                              </p:par>
+                            </p:childTnLst>
+                          </p:cTn>
+                        </p:par>
+                      </p:childTnLst>
+                    </p:cTn>
+                  </p:par>
+                  <p:par>
+                    <p:cTn id="38" fill="hold">
+                      <p:stCondLst>
+                        <p:cond delay="indefinite"/>
+                      </p:stCondLst>
+                      <p:childTnLst>
+                        <p:par>
+                          <p:cTn id="39" fill="hold">
+                            <p:stCondLst>
+                              <p:cond delay="0"/>
+                            </p:stCondLst>
+                            <p:childTnLst>
+                              <p:par>
+                                <p:cTn id="40" presetID="10" presetClass="entr" presetSubtype="0" fill="hold" grpId="0" nodeType="clickEffect">
+                                  <p:stCondLst>
+                                    <p:cond delay="0"/>
+                                  </p:stCondLst>
+                                  <p:childTnLst>
+                                    <p:set>
+                                      <p:cBhvr>
+                                        <p:cTn id="41" dur="1" fill="hold">
+                                          <p:stCondLst>
+                                            <p:cond delay="0"/>
+                                          </p:stCondLst>
+                                        </p:cTn>
+                                        <p:tgtEl>
+                                          <p:spTgt spid="15"/>
+                                        </p:tgtEl>
+                                        <p:attrNameLst>
+                                          <p:attrName>style.visibility</p:attrName>
+                                        </p:attrNameLst>
+                                      </p:cBhvr>
+                                      <p:to>
+                                        <p:strVal val="visible"/>
+                                      </p:to>
+                                    </p:set>
+                                    <p:animEffect transition="in" filter="fade">
+                                      <p:cBhvr>
+                                        <p:cTn id="42" dur="500"/>
+                                        <p:tgtEl>
+                                          <p:spTgt spid="15"/>
+                                        </p:tgtEl>
+                                      </p:cBhvr>
+                                    </p:animEffect>
+                                  </p:childTnLst>
+                                </p:cTn>
+                              </p:par>
+                            </p:childTnLst>
+                          </p:cTn>
+                        </p:par>
+                      </p:childTnLst>
+                    </p:cTn>
+                  </p:par>
                 </p:childTnLst>
               </p:cTn>
               <p:prevCondLst>
@@ -16783,22 +17086,6 @@
                   <a:srgbClr val="000000"/>
                 </a:solidFill>
               </a:rPr>
-              <a:t>Neither exhaustive nor always peers.</a:t>
-            </a:r>
-          </a:p>
-          <a:p>
-            <a:pPr algn="ctr">
-              <a:spcBef>
-                <a:spcPts val="140"/>
-              </a:spcBef>
-              <a:buNone/>
-            </a:pPr>
-            <a:r>
-              <a:rPr lang="en-US" sz="2000" b="0" i="1" dirty="0">
-                <a:solidFill>
-                  <a:srgbClr val="000000"/>
-                </a:solidFill>
-              </a:rPr>
               <a:t>Evidence is valuable insofar as it changes the justification for one of these.</a:t>
             </a:r>
           </a:p>
@@ -19474,6 +19761,159 @@
   <p:clrMapOvr>
     <a:masterClrMapping/>
   </p:clrMapOvr>
+  <p:timing>
+    <p:tnLst>
+      <p:par>
+        <p:cTn id="1" dur="indefinite" restart="never" nodeType="tmRoot">
+          <p:childTnLst>
+            <p:seq concurrent="1" nextAc="seek">
+              <p:cTn id="2" dur="indefinite" nodeType="mainSeq">
+                <p:childTnLst>
+                  <p:par>
+                    <p:cTn id="3" fill="hold">
+                      <p:stCondLst>
+                        <p:cond delay="indefinite"/>
+                      </p:stCondLst>
+                      <p:childTnLst>
+                        <p:par>
+                          <p:cTn id="4" fill="hold">
+                            <p:stCondLst>
+                              <p:cond delay="0"/>
+                            </p:stCondLst>
+                            <p:childTnLst>
+                              <p:par>
+                                <p:cTn id="5" presetID="10" presetClass="entr" presetSubtype="0" fill="hold" grpId="0" nodeType="clickEffect">
+                                  <p:stCondLst>
+                                    <p:cond delay="0"/>
+                                  </p:stCondLst>
+                                  <p:childTnLst>
+                                    <p:set>
+                                      <p:cBhvr>
+                                        <p:cTn id="6" dur="1" fill="hold">
+                                          <p:stCondLst>
+                                            <p:cond delay="0"/>
+                                          </p:stCondLst>
+                                        </p:cTn>
+                                        <p:tgtEl>
+                                          <p:spTgt spid="100"/>
+                                        </p:tgtEl>
+                                        <p:attrNameLst>
+                                          <p:attrName>style.visibility</p:attrName>
+                                        </p:attrNameLst>
+                                      </p:cBhvr>
+                                      <p:to>
+                                        <p:strVal val="visible"/>
+                                      </p:to>
+                                    </p:set>
+                                    <p:animEffect transition="in" filter="fade">
+                                      <p:cBhvr>
+                                        <p:cTn id="7" dur="500"/>
+                                        <p:tgtEl>
+                                          <p:spTgt spid="100"/>
+                                        </p:tgtEl>
+                                      </p:cBhvr>
+                                    </p:animEffect>
+                                  </p:childTnLst>
+                                </p:cTn>
+                              </p:par>
+                              <p:par>
+                                <p:cTn id="8" presetID="10" presetClass="entr" presetSubtype="0" fill="hold" grpId="0" nodeType="withEffect">
+                                  <p:stCondLst>
+                                    <p:cond delay="0"/>
+                                  </p:stCondLst>
+                                  <p:childTnLst>
+                                    <p:set>
+                                      <p:cBhvr>
+                                        <p:cTn id="9" dur="1" fill="hold">
+                                          <p:stCondLst>
+                                            <p:cond delay="0"/>
+                                          </p:stCondLst>
+                                        </p:cTn>
+                                        <p:tgtEl>
+                                          <p:spTgt spid="104"/>
+                                        </p:tgtEl>
+                                        <p:attrNameLst>
+                                          <p:attrName>style.visibility</p:attrName>
+                                        </p:attrNameLst>
+                                      </p:cBhvr>
+                                      <p:to>
+                                        <p:strVal val="visible"/>
+                                      </p:to>
+                                    </p:set>
+                                    <p:animEffect transition="in" filter="fade">
+                                      <p:cBhvr>
+                                        <p:cTn id="10" dur="500"/>
+                                        <p:tgtEl>
+                                          <p:spTgt spid="104"/>
+                                        </p:tgtEl>
+                                      </p:cBhvr>
+                                    </p:animEffect>
+                                  </p:childTnLst>
+                                </p:cTn>
+                              </p:par>
+                              <p:par>
+                                <p:cTn id="11" presetID="10" presetClass="entr" presetSubtype="0" fill="hold" grpId="0" nodeType="withEffect">
+                                  <p:stCondLst>
+                                    <p:cond delay="0"/>
+                                  </p:stCondLst>
+                                  <p:childTnLst>
+                                    <p:set>
+                                      <p:cBhvr>
+                                        <p:cTn id="12" dur="1" fill="hold">
+                                          <p:stCondLst>
+                                            <p:cond delay="0"/>
+                                          </p:stCondLst>
+                                        </p:cTn>
+                                        <p:tgtEl>
+                                          <p:spTgt spid="105"/>
+                                        </p:tgtEl>
+                                        <p:attrNameLst>
+                                          <p:attrName>style.visibility</p:attrName>
+                                        </p:attrNameLst>
+                                      </p:cBhvr>
+                                      <p:to>
+                                        <p:strVal val="visible"/>
+                                      </p:to>
+                                    </p:set>
+                                    <p:animEffect transition="in" filter="fade">
+                                      <p:cBhvr>
+                                        <p:cTn id="13" dur="500"/>
+                                        <p:tgtEl>
+                                          <p:spTgt spid="105"/>
+                                        </p:tgtEl>
+                                      </p:cBhvr>
+                                    </p:animEffect>
+                                  </p:childTnLst>
+                                </p:cTn>
+                              </p:par>
+                            </p:childTnLst>
+                          </p:cTn>
+                        </p:par>
+                      </p:childTnLst>
+                    </p:cTn>
+                  </p:par>
+                </p:childTnLst>
+              </p:cTn>
+              <p:prevCondLst>
+                <p:cond evt="onPrev" delay="0">
+                  <p:tgtEl>
+                    <p:sldTgt/>
+                  </p:tgtEl>
+                </p:cond>
+              </p:prevCondLst>
+              <p:nextCondLst>
+                <p:cond evt="onNext" delay="0">
+                  <p:tgtEl>
+                    <p:sldTgt/>
+                  </p:tgtEl>
+                </p:cond>
+              </p:nextCondLst>
+            </p:seq>
+          </p:childTnLst>
+        </p:cTn>
+      </p:par>
+    </p:tnLst>
+  </p:timing>
 </p:sld>
 </file>
 

--- a/course/lectures/act-1-foundations/09-engineering-decision-making-and-metrics/1-9-Engineering-Decision-Making-and-Metrics.pptx
+++ b/course/lectures/act-1-foundations/09-engineering-decision-making-and-metrics/1-9-Engineering-Decision-Making-and-Metrics.pptx
@@ -5,38 +5,38 @@
     <p:sldMasterId id="2147483708" r:id="rId1"/>
   </p:sldMasterIdLst>
   <p:notesMasterIdLst>
-    <p:notesMasterId r:id="rId38"/>
+    <p:notesMasterId r:id="rId31"/>
   </p:notesMasterIdLst>
   <p:sldIdLst>
     <p:sldId id="701" r:id="rId2"/>
     <p:sldId id="702" r:id="rId3"/>
     <p:sldId id="703" r:id="rId4"/>
     <p:sldId id="704" r:id="rId5"/>
-    <p:sldId id="706" r:id="rId7"/>
-    <p:sldId id="707" r:id="rId8"/>
-    <p:sldId id="708" r:id="rId9"/>
-    <p:sldId id="709" r:id="rId10"/>
-    <p:sldId id="710" r:id="rId11"/>
-    <p:sldId id="711" r:id="rId12"/>
-    <p:sldId id="712" r:id="rId13"/>
-    <p:sldId id="713" r:id="rId14"/>
-    <p:sldId id="714" r:id="rId15"/>
-    <p:sldId id="715" r:id="rId16"/>
-    <p:sldId id="716" r:id="rId17"/>
-    <p:sldId id="717" r:id="rId18"/>
-    <p:sldId id="718" r:id="rId19"/>
-    <p:sldId id="719" r:id="rId20"/>
-    <p:sldId id="720" r:id="rId21"/>
-    <p:sldId id="721" r:id="rId22"/>
-    <p:sldId id="722" r:id="rId23"/>
-    <p:sldId id="723" r:id="rId24"/>
-    <p:sldId id="724" r:id="rId25"/>
-    <p:sldId id="725" r:id="rId26"/>
-    <p:sldId id="726" r:id="rId27"/>
-    <p:sldId id="727" r:id="rId28"/>
-    <p:sldId id="728" r:id="rId29"/>
-    <p:sldId id="729" r:id="rId30"/>
-    <p:sldId id="730" r:id="rId31"/>
+    <p:sldId id="706" r:id="rId6"/>
+    <p:sldId id="707" r:id="rId7"/>
+    <p:sldId id="708" r:id="rId8"/>
+    <p:sldId id="709" r:id="rId9"/>
+    <p:sldId id="710" r:id="rId10"/>
+    <p:sldId id="711" r:id="rId11"/>
+    <p:sldId id="712" r:id="rId12"/>
+    <p:sldId id="713" r:id="rId13"/>
+    <p:sldId id="714" r:id="rId14"/>
+    <p:sldId id="715" r:id="rId15"/>
+    <p:sldId id="716" r:id="rId16"/>
+    <p:sldId id="717" r:id="rId17"/>
+    <p:sldId id="718" r:id="rId18"/>
+    <p:sldId id="719" r:id="rId19"/>
+    <p:sldId id="720" r:id="rId20"/>
+    <p:sldId id="721" r:id="rId21"/>
+    <p:sldId id="722" r:id="rId22"/>
+    <p:sldId id="723" r:id="rId23"/>
+    <p:sldId id="724" r:id="rId24"/>
+    <p:sldId id="725" r:id="rId25"/>
+    <p:sldId id="726" r:id="rId26"/>
+    <p:sldId id="727" r:id="rId27"/>
+    <p:sldId id="728" r:id="rId28"/>
+    <p:sldId id="729" r:id="rId29"/>
+    <p:sldId id="730" r:id="rId30"/>
   </p:sldIdLst>
   <p:sldSz cx="9144000" cy="6858000" type="screen4x3"/>
   <p:notesSz cx="6858000" cy="9144000"/>
@@ -227,7 +227,7 @@
           </a:lstStyle>
           <a:p>
             <a:fld id="{27E8B4C4-0720-F64E-9EEE-9472CF165DC6}" type="datetimeFigureOut">
-              <a:t>9/18/26</a:t>
+              <a:t>9/21/26</a:t>
             </a:fld>
             <a:endParaRPr lang="en-US"/>
           </a:p>
@@ -527,7 +527,7 @@
           <a:p>
             <a:r>
               <a:rPr dirty="0"/>
-              <a:t xml:space="preserve">0.5 minutes — </a:t>
+              <a:t>0.5 minutes — </a:t>
             </a:r>
             <a:r>
               <a:rPr i="1" dirty="0"/>
@@ -553,6 +553,9 @@
       </p:sp>
     </p:spTree>
   </p:cSld>
+  <p:clrMapOvr>
+    <a:masterClrMapping/>
+  </p:clrMapOvr>
 </p:notes>
 </file>
 
@@ -589,34 +592,30 @@
           <a:lstStyle/>
           <a:p>
             <a:r>
-              <a:t>2 minutes — Evidence gets selected because it distinguishes the alternatives.</a:t>
-            </a:r>
-          </a:p>
-          <a:p/>
-          <a:p>
-            <a:r>
-              <a:t>- Don't begin with 'what can I measure?' Begin with the uncertainty preventing the decision. If learning the answer wouldn't change what you choose, the measurement may have little decision value.</a:t>
-            </a:r>
-          </a:p>
-          <a:p>
-            <a:r>
-              <a:t>- Walk the model: both strategies fit the memory budget (KNOWN); what separates them is whether the larger cache materially improves latency under the expected workload (UNCERTAIN).</a:t>
-            </a:r>
-          </a:p>
-          <a:p>
-            <a:r>
-              <a:t>- Ask the room what evidence would actually change the choice; only then click to reveal: run both mechanisms under a representative workload and compare the latency distributions.</a:t>
-            </a:r>
-          </a:p>
-          <a:p>
-            <a:r>
-              <a:t>- Design callback, and the handbook's buy-information framing: measurement is bought to remove the uncertainty that blocks the decision.</a:t>
+              <a:rPr dirty="0"/>
+              <a:t>0.3 minutes — </a:t>
+            </a:r>
+            <a:r>
+              <a:rPr i="1" dirty="0"/>
+              <a:t>Name Section 2. The centre of the lecture begins here.</a:t>
+            </a:r>
+          </a:p>
+          <a:p>
+            <a:endParaRPr dirty="0"/>
+          </a:p>
+          <a:p>
+            <a:r>
+              <a:rPr dirty="0"/>
+              <a:t>- Do NOT title or gloss this as 'measurement is a model' — the metric holds the modeling choice.</a:t>
             </a:r>
           </a:p>
         </p:txBody>
       </p:sp>
     </p:spTree>
   </p:cSld>
+  <p:clrMapOvr>
+    <a:masterClrMapping/>
+  </p:clrMapOvr>
 </p:notes>
 </file>
 
@@ -654,11 +653,7 @@
           <a:p>
             <a:r>
               <a:rPr dirty="0"/>
-              <a:t xml:space="preserve">0.3 minutes — </a:t>
-            </a:r>
-            <a:r>
-              <a:rPr i="1" dirty="0"/>
-              <a:t>Name Section 2. The centre of the lecture begins here.</a:t>
+              <a:t>3 minutes — The canonical quantitative chain, unpacked carefully. Terminology must be exact.</a:t>
             </a:r>
           </a:p>
           <a:p>
@@ -667,13 +662,34 @@
           <a:p>
             <a:r>
               <a:rPr dirty="0"/>
-              <a:t>- Do NOT title or gloss this as 'measurement is a model' — the metric holds the modeling choice.</a:t>
+              <a:t>- Property: what we care about. Metric: a model connecting the property to observations we can obtain. Measurement: an observation from applying the metric under conditions. Evidence: what that measurement supports about the property.</a:t>
+            </a:r>
+          </a:p>
+          <a:p>
+            <a:r>
+              <a:rPr dirty="0"/>
+              <a:t>- NEVER say 'measurement is a model.' The metric contains the modeling choice; the measurement supplies values.</a:t>
+            </a:r>
+          </a:p>
+          <a:p>
+            <a:r>
+              <a:rPr dirty="0"/>
+              <a:t>- Deliberate Validation callback — same boxes, same verbs as its evidence-strength slide.</a:t>
+            </a:r>
+          </a:p>
+          <a:p>
+            <a:r>
+              <a:rPr dirty="0"/>
+              <a:t>- (from slide) You met this chain in Validation. Today we unpack each link.</a:t>
             </a:r>
           </a:p>
         </p:txBody>
       </p:sp>
     </p:spTree>
   </p:cSld>
+  <p:clrMapOvr>
+    <a:masterClrMapping/>
+  </p:clrMapOvr>
 </p:notes>
 </file>
 
@@ -710,34 +726,46 @@
           <a:lstStyle/>
           <a:p>
             <a:r>
-              <a:t>3 minutes — The canonical quantitative chain, unpacked carefully. Terminology must be exact.</a:t>
-            </a:r>
-          </a:p>
-          <a:p/>
-          <a:p>
-            <a:r>
-              <a:t>- Property: what we care about. Metric: a model connecting the property to observations we can obtain. Measurement: an observation from applying the metric under conditions. Evidence: what that measurement supports about the property.</a:t>
-            </a:r>
-          </a:p>
-          <a:p>
-            <a:r>
-              <a:t>- NEVER say 'measurement is a model.' The metric contains the modeling choice; the measurement supplies values.</a:t>
-            </a:r>
-          </a:p>
-          <a:p>
-            <a:r>
-              <a:t>- Deliberate Validation callback — same boxes, same verbs as its evidence-strength slide.</a:t>
-            </a:r>
-          </a:p>
-          <a:p>
-            <a:r>
-              <a:t>- (from slide) You met this chain in Validation. Today we unpack each link.</a:t>
+              <a:rPr dirty="0"/>
+              <a:t>3 minutes — Work one operationalization end to end; define the word once.</a:t>
+            </a:r>
+          </a:p>
+          <a:p>
+            <a:endParaRPr dirty="0"/>
+          </a:p>
+          <a:p>
+            <a:r>
+              <a:rPr dirty="0"/>
+              <a:t>- Responsiveness is abstract; p99-under-workload-W is the chosen observable aspect; 420 </a:t>
+            </a:r>
+            <a:r>
+              <a:rPr dirty="0" err="1"/>
+              <a:t>ms</a:t>
+            </a:r>
+            <a:r>
+              <a:rPr dirty="0"/>
+              <a:t> is what applying it produced.</a:t>
+            </a:r>
+          </a:p>
+          <a:p>
+            <a:r>
+              <a:rPr dirty="0"/>
+              <a:t>- Dwell on the right-hand point: the metric is a representation, not the property. Other metrics would represent other aspects.</a:t>
+            </a:r>
+          </a:p>
+          <a:p>
+            <a:r>
+              <a:rPr dirty="0"/>
+              <a:t>- (from slide) The metric chooses which aspect of the property becomes observable.</a:t>
             </a:r>
           </a:p>
         </p:txBody>
       </p:sp>
     </p:spTree>
   </p:cSld>
+  <p:clrMapOvr>
+    <a:masterClrMapping/>
+  </p:clrMapOvr>
 </p:notes>
 </file>
 
@@ -774,29 +802,42 @@
           <a:lstStyle/>
           <a:p>
             <a:r>
-              <a:t>3 minutes — Work one operationalization end to end; define the word once.</a:t>
-            </a:r>
-          </a:p>
-          <a:p/>
-          <a:p>
-            <a:r>
-              <a:t>- Responsiveness is abstract; p99-under-workload-W is the chosen observable aspect; 420 ms is what applying it produced.</a:t>
-            </a:r>
-          </a:p>
-          <a:p>
-            <a:r>
-              <a:t>- Dwell on the right-hand point: the metric is a representation, not the property. Other metrics would represent other aspects.</a:t>
-            </a:r>
-          </a:p>
-          <a:p>
-            <a:r>
-              <a:t>- (from slide) The metric chooses which aspect of the property becomes observable.</a:t>
+              <a:rPr dirty="0"/>
+              <a:t>3 minutes — </a:t>
+            </a:r>
+            <a:r>
+              <a:rPr i="1" dirty="0"/>
+              <a:t>Measurement in service of a model: it fills parameters and it tests predictions.</a:t>
+            </a:r>
+          </a:p>
+          <a:p>
+            <a:endParaRPr dirty="0"/>
+          </a:p>
+          <a:p>
+            <a:r>
+              <a:rPr dirty="0"/>
+              <a:t>- This is Architecture's quantitative-model language — the latency budget students composed there.</a:t>
+            </a:r>
+          </a:p>
+          <a:p>
+            <a:r>
+              <a:rPr dirty="0"/>
+              <a:t>- Build: opens with the model and its estimates (BEFORE OBSERVATION). Click 1 — use 1: measurement PARAMETERIZES the model (the observed values and line 1). Click 2 — use 2: measurement TESTS the model’s prediction against reality (line 2 and the footer). Keep the two uses distinct; they are different operations.</a:t>
+            </a:r>
+          </a:p>
+          <a:p>
+            <a:r>
+              <a:rPr dirty="0"/>
+              <a:t>- The footer corrects any older phrasing: the metric embodies the modeling choice; the measurement supplies observations. Do not soften it.</a:t>
             </a:r>
           </a:p>
         </p:txBody>
       </p:sp>
     </p:spTree>
   </p:cSld>
+  <p:clrMapOvr>
+    <a:masterClrMapping/>
+  </p:clrMapOvr>
 </p:notes>
 </file>
 
@@ -834,11 +875,15 @@
           <a:p>
             <a:r>
               <a:rPr dirty="0"/>
-              <a:t xml:space="preserve">3 minutes — </a:t>
-            </a:r>
-            <a:r>
-              <a:rPr i="1" dirty="0"/>
-              <a:t>Measurement in service of a model: it fills parameters and it tests predictions.</a:t>
+              <a:t>3 minutes — TPS: students generate the conditions that give 420 </a:t>
+            </a:r>
+            <a:r>
+              <a:rPr dirty="0" err="1"/>
+              <a:t>ms</a:t>
+            </a:r>
+            <a:r>
+              <a:rPr dirty="0"/>
+              <a:t> meaning.</a:t>
             </a:r>
           </a:p>
           <a:p>
@@ -847,25 +892,66 @@
           <a:p>
             <a:r>
               <a:rPr dirty="0"/>
-              <a:t>- This is Architecture's quantitative-model language — the latency budget students composed there.</a:t>
-            </a:r>
-          </a:p>
-          <a:p>
+              <a:t>- Let '420 </a:t>
+            </a:r>
+            <a:r>
+              <a:rPr dirty="0" err="1"/>
+              <a:t>ms'</a:t>
+            </a:r>
             <a:r>
               <a:rPr dirty="0"/>
-              <a:t>- Build: opens with the model and its estimates (BEFORE OBSERVATION). Click 1 — use 1: measurement PARAMETERIZES the model (the observed values and line 1). Click 2 — use 2: measurement TESTS the model’s prediction against reality (line 2 and the footer). Keep the two uses distinct; they are different operations.</a:t>
+              <a:t> sit alone for a beat; run the think-pair-share on the prompt before revealing anything.</a:t>
             </a:r>
           </a:p>
           <a:p>
             <a:r>
               <a:rPr dirty="0"/>
-              <a:t>- The footer corrects any older phrasing: the metric embodies the modeling choice; the measurement supplies observations. Do not soften it.</a:t>
+              <a:t>- Animate the six questions up as the room produces them (percentile, measured where, workload, configuration, interval, request population) — do not read them out first.</a:t>
+            </a:r>
+          </a:p>
+          <a:p>
+            <a:r>
+              <a:rPr dirty="0"/>
+              <a:t>- The final click is the deliverable form: p99 = 420 </a:t>
+            </a:r>
+            <a:r>
+              <a:rPr dirty="0" err="1"/>
+              <a:t>ms</a:t>
+            </a:r>
+            <a:r>
+              <a:rPr dirty="0"/>
+              <a:t> · end-to-end · workload W · configuration C · interval T.</a:t>
+            </a:r>
+          </a:p>
+          <a:p>
+            <a:r>
+              <a:rPr dirty="0"/>
+              <a:t>- Then stop. The students should experience the move from '420 </a:t>
+            </a:r>
+            <a:r>
+              <a:rPr dirty="0" err="1"/>
+              <a:t>ms</a:t>
+            </a:r>
+            <a:r>
+              <a:rPr dirty="0"/>
+              <a:t> is a fact' to '420 </a:t>
+            </a:r>
+            <a:r>
+              <a:rPr dirty="0" err="1"/>
+              <a:t>ms</a:t>
+            </a:r>
+            <a:r>
+              <a:rPr dirty="0"/>
+              <a:t> is an observation parameterized by conditions.'</a:t>
             </a:r>
           </a:p>
         </p:txBody>
       </p:sp>
     </p:spTree>
   </p:cSld>
+  <p:clrMapOvr>
+    <a:masterClrMapping/>
+  </p:clrMapOvr>
 </p:notes>
 </file>
 
@@ -902,34 +988,36 @@
           <a:lstStyle/>
           <a:p>
             <a:r>
-              <a:t>3 minutes — TPS: students generate the conditions that give 420 ms meaning.</a:t>
-            </a:r>
-          </a:p>
-          <a:p/>
-          <a:p>
-            <a:r>
-              <a:t>- Let '420 ms' sit alone for a beat; run the think-pair-share on the prompt before revealing anything.</a:t>
-            </a:r>
-          </a:p>
-          <a:p>
-            <a:r>
-              <a:t>- Animate the six questions up as the room produces them (percentile, measured where, workload, configuration, interval, request population) — do not read them out first.</a:t>
-            </a:r>
-          </a:p>
-          <a:p>
-            <a:r>
-              <a:t>- The final click is the deliverable form: p99 = 420 ms · end-to-end · workload W · configuration C · interval T.</a:t>
-            </a:r>
-          </a:p>
-          <a:p>
-            <a:r>
-              <a:t>- Then stop. The students should experience the move from '420 ms is a fact' to '420 ms is an observation parameterized by conditions.'</a:t>
+              <a:rPr dirty="0"/>
+              <a:t>2.5 minutes — </a:t>
+            </a:r>
+            <a:r>
+              <a:rPr i="1" dirty="0"/>
+              <a:t>The scope principle, deliberately drawn like Validation's composition slide.</a:t>
+            </a:r>
+          </a:p>
+          <a:p>
+            <a:endParaRPr dirty="0"/>
+          </a:p>
+          <a:p>
+            <a:r>
+              <a:rPr dirty="0"/>
+              <a:t>- Each component meets its local check; the composed path still fails. Students saw this shape in Validation — say so.</a:t>
+            </a:r>
+          </a:p>
+          <a:p>
+            <a:r>
+              <a:rPr dirty="0"/>
+              <a:t>- Same reasoning as the latency-budget example: 90+80+140+110+100 components can compose past the budget.</a:t>
             </a:r>
           </a:p>
         </p:txBody>
       </p:sp>
     </p:spTree>
   </p:cSld>
+  <p:clrMapOvr>
+    <a:masterClrMapping/>
+  </p:clrMapOvr>
 </p:notes>
 </file>
 
@@ -967,11 +1055,11 @@
           <a:p>
             <a:r>
               <a:rPr dirty="0"/>
-              <a:t xml:space="preserve">2.5 minutes — </a:t>
+              <a:t>2.5 minutes — </a:t>
             </a:r>
             <a:r>
               <a:rPr i="1" dirty="0"/>
-              <a:t>The scope principle, deliberately drawn like Validation's composition slide.</a:t>
+              <a:t>Direct versus proxy measurement; the proxy's metric carries a bigger modeling burden.</a:t>
             </a:r>
           </a:p>
           <a:p>
@@ -980,19 +1068,22 @@
           <a:p>
             <a:r>
               <a:rPr dirty="0"/>
-              <a:t>- Each component meets its local check; the composed path still fails. Students saw this shape in Validation — say so.</a:t>
+              <a:t>- 'Relatively direct' is deliberate: no binary distinction exists in nature.</a:t>
             </a:r>
           </a:p>
           <a:p>
             <a:r>
               <a:rPr dirty="0"/>
-              <a:t>- Same reasoning as the latency-budget example: 90+80+140+110+100 components can compose past the budget.</a:t>
+              <a:t>- Usability needs several observables, none of which IS usability — the metric models how each bears on it.</a:t>
             </a:r>
           </a:p>
         </p:txBody>
       </p:sp>
     </p:spTree>
   </p:cSld>
+  <p:clrMapOvr>
+    <a:masterClrMapping/>
+  </p:clrMapOvr>
 </p:notes>
 </file>
 
@@ -1030,11 +1121,7 @@
           <a:p>
             <a:r>
               <a:rPr dirty="0"/>
-              <a:t xml:space="preserve">2.5 minutes — </a:t>
-            </a:r>
-            <a:r>
-              <a:rPr i="1" dirty="0"/>
-              <a:t>Direct versus proxy measurement; the proxy's metric carries a bigger modeling burden.</a:t>
+              <a:t>3 minutes — Every metric omits; the omission is the price of usability, not a scandal.</a:t>
             </a:r>
           </a:p>
           <a:p>
@@ -1043,19 +1130,28 @@
           <a:p>
             <a:r>
               <a:rPr dirty="0"/>
-              <a:t>- 'Relatively direct' is deliberate: no binary distinction exists in nature.</a:t>
+              <a:t>- Do not frame as anti-metrics. Reduction is why metrics are useful; it is also why interpretation is required.</a:t>
             </a:r>
           </a:p>
           <a:p>
             <a:r>
               <a:rPr dirty="0"/>
-              <a:t>- Usability needs several observables, none of which IS usability — the metric models how each bears on it.</a:t>
+              <a:t>- The defect-count row previews context-dependence: what counts, and what gets found, are both choices.</a:t>
+            </a:r>
+          </a:p>
+          <a:p>
+            <a:r>
+              <a:rPr dirty="0"/>
+              <a:t>- (from slide) Know what the metric represents — and what it leaves unresolved.</a:t>
             </a:r>
           </a:p>
         </p:txBody>
       </p:sp>
     </p:spTree>
   </p:cSld>
+  <p:clrMapOvr>
+    <a:masterClrMapping/>
+  </p:clrMapOvr>
 </p:notes>
 </file>
 
@@ -1092,29 +1188,30 @@
           <a:lstStyle/>
           <a:p>
             <a:r>
-              <a:t>3 minutes — Every metric omits; the omission is the price of usability, not a scandal.</a:t>
-            </a:r>
-          </a:p>
-          <a:p/>
-          <a:p>
-            <a:r>
-              <a:t>- Do not frame as anti-metrics. Reduction is why metrics are useful; it is also why interpretation is required.</a:t>
-            </a:r>
-          </a:p>
-          <a:p>
-            <a:r>
-              <a:t>- The defect-count row previews context-dependence: what counts, and what gets found, are both choices.</a:t>
-            </a:r>
-          </a:p>
-          <a:p>
-            <a:r>
-              <a:t>- (from slide) Know what the metric represents — and what it leaves unresolved.</a:t>
+              <a:rPr dirty="0"/>
+              <a:t>0.3 minutes — </a:t>
+            </a:r>
+            <a:r>
+              <a:rPr i="1" dirty="0"/>
+              <a:t>Name Section 3.</a:t>
+            </a:r>
+          </a:p>
+          <a:p>
+            <a:endParaRPr dirty="0"/>
+          </a:p>
+          <a:p>
+            <a:r>
+              <a:rPr dirty="0"/>
+              <a:t>- The failure modes ahead are failures of the relationship between observable and property — not arithmetic errors.</a:t>
             </a:r>
           </a:p>
         </p:txBody>
       </p:sp>
     </p:spTree>
   </p:cSld>
+  <p:clrMapOvr>
+    <a:masterClrMapping/>
+  </p:clrMapOvr>
 </p:notes>
 </file>
 
@@ -1152,11 +1249,11 @@
           <a:p>
             <a:r>
               <a:rPr dirty="0"/>
-              <a:t xml:space="preserve">0.3 minutes — </a:t>
+              <a:t>4 minutes — </a:t>
             </a:r>
             <a:r>
               <a:rPr i="1" dirty="0"/>
-              <a:t>Name Section 3.</a:t>
+              <a:t>TPS on the enormous claim; let students generate the missing context.</a:t>
             </a:r>
           </a:p>
           <a:p>
@@ -1165,13 +1262,22 @@
           <a:p>
             <a:r>
               <a:rPr dirty="0"/>
-              <a:t>- The failure modes ahead are failures of the relationship between observable and property — not arithmetic errors.</a:t>
+              <a:t>- Expect: what does productivity mean? what metric? what conditions, population, period? compared with what? what changed? what was omitted?</a:t>
+            </a:r>
+          </a:p>
+          <a:p>
+            <a:r>
+              <a:rPr dirty="0"/>
+              <a:t>- Reveal the metric, then do NOT immediately call it bad — ask what inference is being made. The next slide does the real work.</a:t>
             </a:r>
           </a:p>
         </p:txBody>
       </p:sp>
     </p:spTree>
   </p:cSld>
+  <p:clrMapOvr>
+    <a:masterClrMapping/>
+  </p:clrMapOvr>
 </p:notes>
 </file>
 
@@ -1208,35 +1314,49 @@
           <a:lstStyle/>
           <a:p>
             <a:r>
+              <a:rPr dirty="0"/>
               <a:t>2 minutes — Establish that engineering activity repeatedly terminates in a decision. This slide now also carries old slide 5's work.</a:t>
             </a:r>
           </a:p>
-          <a:p/>
-          <a:p>
-            <a:r>
+          <a:p>
+            <a:endParaRPr dirty="0"/>
+          </a:p>
+          <a:p>
+            <a:r>
+              <a:rPr dirty="0"/>
               <a:t>We have treated these as different engineering activities because they concern different objects. Requirements decides whether to make a commitment. Specification decides where responsibility belongs and which distinctions must be constrained. Architecture decides how responsibilities and interactions should be organized. Design chooses mechanisms. Validation decides whether the available evidence justifies delivery.</a:t>
             </a:r>
           </a:p>
-          <a:p/>
-          <a:p>
-            <a:r>
+          <a:p>
+            <a:endParaRPr dirty="0"/>
+          </a:p>
+          <a:p>
+            <a:r>
+              <a:rPr dirty="0"/>
               <a:t>But notice the repeated structure. Each activity eventually reaches a consequential choice. At that point the engineer has to ask the same question: given what we know, what should we do?</a:t>
             </a:r>
           </a:p>
-          <a:p/>
-          <a:p>
-            <a:r>
+          <a:p>
+            <a:endParaRPr dirty="0"/>
+          </a:p>
+          <a:p>
+            <a:r>
+              <a:rPr dirty="0"/>
               <a:t>Today we step outside the individual activities and study that reasoning itself. What do we need to know? What evidence would actually help? When does measurement provide that evidence? And how should what we learn affect the decision?</a:t>
             </a:r>
           </a:p>
-          <a:p/>
-          <a:p>
-            <a:r>
+          <a:p>
+            <a:endParaRPr dirty="0"/>
+          </a:p>
+          <a:p>
+            <a:r>
+              <a:rPr dirty="0"/>
               <a:t>- Do not explain the five examples yet; students met each decision in its own unit.</a:t>
             </a:r>
           </a:p>
           <a:p>
             <a:r>
+              <a:rPr dirty="0"/>
               <a:t>- The next slide then explains why this recurring decision problem is hard.</a:t>
             </a:r>
           </a:p>
@@ -1244,6 +1364,9 @@
       </p:sp>
     </p:spTree>
   </p:cSld>
+  <p:clrMapOvr>
+    <a:masterClrMapping/>
+  </p:clrMapOvr>
 </p:notes>
 </file>
 
@@ -1281,11 +1404,11 @@
           <a:p>
             <a:r>
               <a:rPr dirty="0"/>
-              <a:t xml:space="preserve">4 minutes — </a:t>
+              <a:t>3 minutes — </a:t>
             </a:r>
             <a:r>
               <a:rPr i="1" dirty="0"/>
-              <a:t>TPS on the enormous claim; let students generate the missing context.</a:t>
+              <a:t>The deeper lesson than 'commit counts are dumb': the assumed relationship is the object of engineering scrutiny.</a:t>
             </a:r>
           </a:p>
           <a:p>
@@ -1294,19 +1417,28 @@
           <a:p>
             <a:r>
               <a:rPr dirty="0"/>
-              <a:t>- Expect: what does productivity mean? what metric? what conditions, population, period? compared with what? what changed? what was omitted?</a:t>
+              <a:t>- Many important properties can only be reached through proxies; that is normal, not a failure.</a:t>
             </a:r>
           </a:p>
           <a:p>
             <a:r>
               <a:rPr dirty="0"/>
-              <a:t>- Reveal the metric, then do NOT immediately call it bad — ask what inference is being made. The next slide does the real work.</a:t>
+              <a:t>- Discuss what would make the relationship valid: uniform work items? stable practices? no incentive pressure?</a:t>
+            </a:r>
+          </a:p>
+          <a:p>
+            <a:r>
+              <a:rPr dirty="0"/>
+              <a:t>- Teamwork already warned about commits and tickets — use it as a callback, not a novel claim.</a:t>
             </a:r>
           </a:p>
         </p:txBody>
       </p:sp>
     </p:spTree>
   </p:cSld>
+  <p:clrMapOvr>
+    <a:masterClrMapping/>
+  </p:clrMapOvr>
 </p:notes>
 </file>
 
@@ -1344,11 +1476,11 @@
           <a:p>
             <a:r>
               <a:rPr dirty="0"/>
-              <a:t xml:space="preserve">3 minutes — </a:t>
+              <a:t>3 minutes — </a:t>
             </a:r>
             <a:r>
               <a:rPr i="1" dirty="0"/>
-              <a:t>The deeper lesson than 'commit counts are dumb': the assumed relationship is the object of engineering scrutiny.</a:t>
+              <a:t>Goodhart as relationship-destruction, not merely cheating.</a:t>
             </a:r>
           </a:p>
           <a:p>
@@ -1357,25 +1489,34 @@
           <a:p>
             <a:r>
               <a:rPr dirty="0"/>
-              <a:t>- Many important properties can only be reached through proxies; that is normal, not a failure.</a:t>
+              <a:t>- The interesting mechanism: optimizing the observable changes the practice that made the observable informative.</a:t>
             </a:r>
           </a:p>
           <a:p>
             <a:r>
               <a:rPr dirty="0"/>
-              <a:t>- Discuss what would make the relationship valid: uniform work items? stable practices? no incentive pressure?</a:t>
+              <a:t>- Connect to the surrogation reading: the metric is visible, the property is not, so attention migrates — nobody needs to act in bad faith.</a:t>
             </a:r>
           </a:p>
           <a:p>
             <a:r>
               <a:rPr dirty="0"/>
-              <a:t>- Teamwork already warned about commits and tickets — use it as a callback, not a novel claim.</a:t>
+              <a:t>- In industry, you will hear this whole family of problems called Goodhart’s Law. That’s useful vernacular. Harris and Tayler give us another distinction worth having: surrogation can happen even before anyone deliberately games or optimizes the metric.</a:t>
+            </a:r>
+          </a:p>
+          <a:p>
+            <a:r>
+              <a:rPr dirty="0"/>
+              <a:t>- State the law once, briefly; do not build a slogan slide.</a:t>
             </a:r>
           </a:p>
         </p:txBody>
       </p:sp>
     </p:spTree>
   </p:cSld>
+  <p:clrMapOvr>
+    <a:masterClrMapping/>
+  </p:clrMapOvr>
 </p:notes>
 </file>
 
@@ -1412,45 +1553,34 @@
           <a:lstStyle/>
           <a:p>
             <a:r>
-              <a:rPr dirty="0"/>
-              <a:t xml:space="preserve">3 minutes — </a:t>
-            </a:r>
-            <a:r>
-              <a:rPr i="1" dirty="0"/>
-              <a:t>Goodhart as relationship-destruction, not merely cheating.</a:t>
-            </a:r>
-          </a:p>
-          <a:p>
-            <a:endParaRPr dirty="0"/>
-          </a:p>
-          <a:p>
-            <a:r>
-              <a:rPr dirty="0"/>
-              <a:t>- The interesting mechanism: optimizing the observable changes the practice that made the observable informative.</a:t>
-            </a:r>
-          </a:p>
-          <a:p>
-            <a:r>
-              <a:rPr dirty="0"/>
-              <a:t>- Connect to the surrogation reading: the metric is visible, the property is not, so attention migrates — nobody needs to act in bad faith.</a:t>
-            </a:r>
-          </a:p>
-          <a:p>
-            <a:r>
-              <a:rPr dirty="0"/>
-              <a:t>- In industry, you will hear this whole family of problems called Goodhart’s Law. That’s useful vernacular. Harris and Tayler give us another distinction worth having: surrogation can happen even before anyone deliberately games or optimizes the metric.</a:t>
-            </a:r>
-          </a:p>
-          <a:p>
-            <a:r>
-              <a:rPr dirty="0"/>
-              <a:t>- State the law once, briefly; do not build a slogan slide.</a:t>
+              <a:t>2 minutes — Context determines evidentiary weight; two quick examples, no new machinery.</a:t>
+            </a:r>
+          </a:p>
+          <a:p>
+            <a:endParaRPr/>
+          </a:p>
+          <a:p>
+            <a:r>
+              <a:t>- Requirements churn is the Process callback: high change rate can be productive learning or weak requirements work — the question is whether the process still fits the work.</a:t>
+            </a:r>
+          </a:p>
+          <a:p>
+            <a:r>
+              <a:t>- Accelerating out of the hazards section; keep this brisk.</a:t>
+            </a:r>
+          </a:p>
+          <a:p>
+            <a:r>
+              <a:t>- (from slide) The same metric can be strong evidence in one context and weak in another.</a:t>
             </a:r>
           </a:p>
         </p:txBody>
       </p:sp>
     </p:spTree>
   </p:cSld>
+  <p:clrMapOvr>
+    <a:masterClrMapping/>
+  </p:clrMapOvr>
 </p:notes>
 </file>
 
@@ -1487,29 +1617,30 @@
           <a:lstStyle/>
           <a:p>
             <a:r>
-              <a:t>2 minutes — Context determines evidentiary weight; two quick examples, no new machinery.</a:t>
-            </a:r>
-          </a:p>
-          <a:p/>
-          <a:p>
-            <a:r>
-              <a:t>- Requirements churn is the Process callback: high change rate can be productive learning or weak requirements work — the question is whether the process still fits the work.</a:t>
-            </a:r>
-          </a:p>
-          <a:p>
-            <a:r>
-              <a:t>- Accelerating out of the hazards section; keep this brisk.</a:t>
-            </a:r>
-          </a:p>
-          <a:p>
-            <a:r>
-              <a:t>- (from slide) The same metric can be strong evidence in one context and weak in another.</a:t>
+              <a:rPr dirty="0"/>
+              <a:t>1.5 minutes — </a:t>
+            </a:r>
+            <a:r>
+              <a:rPr i="1" dirty="0"/>
+              <a:t>The usable residue of the metrics centre: four questions, no framework.</a:t>
+            </a:r>
+          </a:p>
+          <a:p>
+            <a:endParaRPr dirty="0"/>
+          </a:p>
+          <a:p>
+            <a:r>
+              <a:rPr dirty="0"/>
+              <a:t>- Resist expansion; the value of this list is that students will actually remember it.</a:t>
             </a:r>
           </a:p>
         </p:txBody>
       </p:sp>
     </p:spTree>
   </p:cSld>
+  <p:clrMapOvr>
+    <a:masterClrMapping/>
+  </p:clrMapOvr>
 </p:notes>
 </file>
 
@@ -1547,26 +1678,23 @@
           <a:p>
             <a:r>
               <a:rPr dirty="0"/>
-              <a:t xml:space="preserve">1.5 minutes — </a:t>
+              <a:t>0.3 minutes — </a:t>
             </a:r>
             <a:r>
               <a:rPr i="1" dirty="0"/>
-              <a:t>The usable residue of the metrics centre: four questions, no framework.</a:t>
+              <a:t>Name Section 4. Accelerate: Validation taught much of the judgment material.</a:t>
             </a:r>
           </a:p>
           <a:p>
             <a:endParaRPr dirty="0"/>
-          </a:p>
-          <a:p>
-            <a:r>
-              <a:rPr dirty="0"/>
-              <a:t>- Resist expansion; the value of this list is that students will actually remember it.</a:t>
-            </a:r>
           </a:p>
         </p:txBody>
       </p:sp>
     </p:spTree>
   </p:cSld>
+  <p:clrMapOvr>
+    <a:masterClrMapping/>
+  </p:clrMapOvr>
 </p:notes>
 </file>
 
@@ -1603,21 +1731,39 @@
           <a:lstStyle/>
           <a:p>
             <a:r>
-              <a:rPr dirty="0"/>
-              <a:t xml:space="preserve">0.3 minutes — </a:t>
-            </a:r>
-            <a:r>
-              <a:rPr i="1" dirty="0"/>
-              <a:t>Name Section 4. Accelerate: Validation taught much of the judgment material.</a:t>
-            </a:r>
-          </a:p>
-          <a:p>
-            <a:endParaRPr dirty="0"/>
+              <a:t>2.5 minutes — Extend the chain to judgment and action, then teach the Act I generalization fresh — do NOT present it as recall; the lectures did not make the per-unit measurement sections prominent.</a:t>
+            </a:r>
+          </a:p>
+          <a:p>
+            <a:endParaRPr/>
+          </a:p>
+          <a:p>
+            <a:r>
+              <a:t>- Build: table first — header and first three rows, then the remaining rows, then the closing claim line. Students should recognise that every previous unit created a claim BEFORE the chain appears. Only then the chain — the same structure spans all of them — and finally “A number does not decide what to do.”</a:t>
+            </a:r>
+          </a:p>
+          <a:p>
+            <a:r>
+              <a:t>- The metric and its conditions give the number evidentiary meaning; engineering judgment connects that evidence to action.</a:t>
+            </a:r>
+          </a:p>
+          <a:p>
+            <a:r>
+              <a:t>- Here's why this matters beyond metrics. Every engineering activity we've studied makes claims about reality. Once we act, reality starts producing evidence about those claims. Process assumes something about how the work behaves. Specification makes assumptions about the environment. Architecture predicts properties of composition. Design predicts consequences of mechanisms. We can observe those things.</a:t>
+            </a:r>
+          </a:p>
+          <a:p>
+            <a:r>
+              <a:t>- This sets up the closing loop slide: outcomes produce new evidence that can update the models.</a:t>
+            </a:r>
           </a:p>
         </p:txBody>
       </p:sp>
     </p:spTree>
   </p:cSld>
+  <p:clrMapOvr>
+    <a:masterClrMapping/>
+  </p:clrMapOvr>
 </p:notes>
 </file>
 
@@ -1654,34 +1800,34 @@
           <a:lstStyle/>
           <a:p>
             <a:r>
-              <a:t>2.5 minutes — Extend the chain to judgment and action, then teach the Act I generalization fresh — do NOT present it as recall; the lectures did not make the per-unit measurement sections prominent.</a:t>
-            </a:r>
-          </a:p>
-          <a:p/>
-          <a:p>
-            <a:r>
-              <a:t>- Build: table first — header and first three rows, then the remaining rows, then the closing claim line. Students should recognise that every previous unit created a claim BEFORE the chain appears. Only then the chain — the same structure spans all of them — and finally “A number does not decide what to do.”</a:t>
-            </a:r>
-          </a:p>
-          <a:p>
-            <a:r>
-              <a:t>- The metric and its conditions give the number evidentiary meaning; engineering judgment connects that evidence to action.</a:t>
-            </a:r>
-          </a:p>
-          <a:p>
-            <a:r>
-              <a:t>- Here's why this matters beyond metrics. Every engineering activity we've studied makes claims about reality. Once we act, reality starts producing evidence about those claims. Process assumes something about how the work behaves. Specification makes assumptions about the environment. Architecture predicts properties of composition. Design predicts consequences of mechanisms. We can observe those things.</a:t>
-            </a:r>
-          </a:p>
-          <a:p>
-            <a:r>
-              <a:t>- This sets up the closing loop slide: outcomes produce new evidence that can update the models.</a:t>
+              <a:t>2 minutes — Same evidence, different rational actions; a Validation callback, not a re-teach.</a:t>
+            </a:r>
+          </a:p>
+          <a:p>
+            <a:endParaRPr/>
+          </a:p>
+          <a:p>
+            <a:r>
+              <a:t>- Two engineers with the same 420-ms measurement can rationally decide differently — consequence, uncertainty, and reversibility differ.</a:t>
+            </a:r>
+          </a:p>
+          <a:p>
+            <a:r>
+              <a:t>- Compress here under time pressure, never the metrics centre.</a:t>
+            </a:r>
+          </a:p>
+          <a:p>
+            <a:r>
+              <a:t>- (from slide) Validation asked when evidence is enough; this is that judgment, generalized.</a:t>
             </a:r>
           </a:p>
         </p:txBody>
       </p:sp>
     </p:spTree>
   </p:cSld>
+  <p:clrMapOvr>
+    <a:masterClrMapping/>
+  </p:clrMapOvr>
 </p:notes>
 </file>
 
@@ -1718,29 +1864,34 @@
           <a:lstStyle/>
           <a:p>
             <a:r>
-              <a:t>2 minutes — Same evidence, different rational actions; a Validation callback, not a re-teach.</a:t>
-            </a:r>
-          </a:p>
-          <a:p/>
-          <a:p>
-            <a:r>
-              <a:t>- Two engineers with the same 420-ms measurement can rationally decide differently — consequence, uncertainty, and reversibility differ.</a:t>
-            </a:r>
-          </a:p>
-          <a:p>
-            <a:r>
-              <a:t>- Compress here under time pressure, never the metrics centre.</a:t>
-            </a:r>
-          </a:p>
-          <a:p>
-            <a:r>
-              <a:t>- (from slide) Validation asked when evidence is enough; this is that judgment, generalized.</a:t>
+              <a:t>1.5 minutes — Return to slide 2's question with the machinery now in hand.</a:t>
+            </a:r>
+          </a:p>
+          <a:p>
+            <a:endParaRPr/>
+          </a:p>
+          <a:p>
+            <a:r>
+              <a:t>- The visual echo of slide 2 is deliberate; students should feel the loop close.</a:t>
+            </a:r>
+          </a:p>
+          <a:p>
+            <a:r>
+              <a:t>- Do not present the six actions as exhaustive or as always-available peers.</a:t>
+            </a:r>
+          </a:p>
+          <a:p>
+            <a:r>
+              <a:t>- (from slide) This is the question from the second slide, now with a theory of evidence behind it; the middle of the lecture existed to support it.</a:t>
             </a:r>
           </a:p>
         </p:txBody>
       </p:sp>
     </p:spTree>
   </p:cSld>
+  <p:clrMapOvr>
+    <a:masterClrMapping/>
+  </p:clrMapOvr>
 </p:notes>
 </file>
 
@@ -1777,29 +1928,36 @@
           <a:lstStyle/>
           <a:p>
             <a:r>
-              <a:t>1.5 minutes — Return to slide 2's question with the machinery now in hand.</a:t>
-            </a:r>
-          </a:p>
-          <a:p/>
-          <a:p>
-            <a:r>
-              <a:t>- The visual echo of slide 2 is deliberate; students should feel the loop close.</a:t>
-            </a:r>
-          </a:p>
-          <a:p>
-            <a:r>
-              <a:t>- Do not present the six actions as exhaustive or as always-available peers.</a:t>
-            </a:r>
-          </a:p>
-          <a:p>
-            <a:r>
-              <a:t>- (from slide) This is the question from the second slide, now with a theory of evidence behind it; the middle of the lecture existed to support it.</a:t>
+              <a:rPr dirty="0"/>
+              <a:t>2 minutes — </a:t>
+            </a:r>
+            <a:r>
+              <a:rPr i="1" dirty="0"/>
+              <a:t>The two questions joined into the recurring loop; the loop is the main visual.</a:t>
+            </a:r>
+          </a:p>
+          <a:p>
+            <a:endParaRPr dirty="0"/>
+          </a:p>
+          <a:p>
+            <a:r>
+              <a:rPr dirty="0"/>
+              <a:t>- The AFTER question is how experience improves the models and judgment behind future decisions.</a:t>
+            </a:r>
+          </a:p>
+          <a:p>
+            <a:r>
+              <a:rPr dirty="0"/>
+              <a:t>- The italic line quietly foreshadows Failure-Aware Engineering (reality arrives uninvited; which model should change?). Do NOT teach that lecture here.</a:t>
             </a:r>
           </a:p>
         </p:txBody>
       </p:sp>
     </p:spTree>
   </p:cSld>
+  <p:clrMapOvr>
+    <a:masterClrMapping/>
+  </p:clrMapOvr>
 </p:notes>
 </file>
 
@@ -1837,11 +1995,11 @@
           <a:p>
             <a:r>
               <a:rPr dirty="0"/>
-              <a:t xml:space="preserve">2 minutes — </a:t>
+              <a:t>1.5 minutes — </a:t>
             </a:r>
             <a:r>
               <a:rPr i="1" dirty="0"/>
-              <a:t>The two questions joined into the recurring loop; the loop is the main visual.</a:t>
+              <a:t>Close on the Day 1 definition and the course argument in one chain. End there.</a:t>
             </a:r>
           </a:p>
           <a:p>
@@ -1850,19 +2008,22 @@
           <a:p>
             <a:r>
               <a:rPr dirty="0"/>
-              <a:t>- The AFTER question is how experience improves the models and judgment behind future decisions.</a:t>
+              <a:t>- The definition is verbatim from Day 1 — do not paraphrase it.</a:t>
             </a:r>
           </a:p>
           <a:p>
             <a:r>
               <a:rPr dirty="0"/>
-              <a:t>- The italic line quietly foreshadows Failure-Aware Engineering (reality arrives uninvited; which model should change?). Do NOT teach that lecture here.</a:t>
+              <a:t>- MODEL, OBSERVE, JUDGE, ACT, LEARN. Do not add another aphorism after the chain; let it end the act.</a:t>
             </a:r>
           </a:p>
         </p:txBody>
       </p:sp>
     </p:spTree>
   </p:cSld>
+  <p:clrMapOvr>
+    <a:masterClrMapping/>
+  </p:clrMapOvr>
 </p:notes>
 </file>
 
@@ -1900,7 +2061,7 @@
           <a:p>
             <a:r>
               <a:rPr dirty="0"/>
-              <a:t xml:space="preserve">1 minute — </a:t>
+              <a:t>1 minute — </a:t>
             </a:r>
             <a:r>
               <a:rPr i="1" dirty="0"/>
@@ -1926,69 +2087,9 @@
       </p:sp>
     </p:spTree>
   </p:cSld>
-</p:notes>
-</file>
-
-<file path=ppt/notesSlides/notesSlide30.xml><?xml version="1.0" encoding="utf-8"?>
-<p:notes xmlns:a="http://schemas.openxmlformats.org/drawingml/2006/main" xmlns:r="http://schemas.openxmlformats.org/officeDocument/2006/relationships" xmlns:p="http://schemas.openxmlformats.org/presentationml/2006/main">
-  <p:cSld>
-    <p:spTree>
-      <p:nvGrpSpPr>
-        <p:cNvPr id="1" name=""/>
-        <p:cNvGrpSpPr/>
-        <p:nvPr/>
-      </p:nvGrpSpPr>
-      <p:grpSpPr>
-        <a:xfrm>
-          <a:off x="0" y="0"/>
-          <a:ext cx="0" cy="0"/>
-          <a:chOff x="0" y="0"/>
-          <a:chExt cx="0" cy="0"/>
-        </a:xfrm>
-      </p:grpSpPr>
-      <p:sp>
-        <p:nvSpPr>
-          <p:cNvPr id="2" name="Notes Placeholder 1"/>
-          <p:cNvSpPr>
-            <a:spLocks noGrp="1"/>
-          </p:cNvSpPr>
-          <p:nvPr>
-            <p:ph type="body" idx="1"/>
-          </p:nvPr>
-        </p:nvSpPr>
-        <p:spPr/>
-        <p:txBody>
-          <a:bodyPr/>
-          <a:lstStyle/>
-          <a:p>
-            <a:r>
-              <a:rPr dirty="0"/>
-              <a:t xml:space="preserve">1.5 minutes — </a:t>
-            </a:r>
-            <a:r>
-              <a:rPr i="1" dirty="0"/>
-              <a:t>Close on the Day 1 definition and the course argument in one chain. End there.</a:t>
-            </a:r>
-          </a:p>
-          <a:p>
-            <a:endParaRPr dirty="0"/>
-          </a:p>
-          <a:p>
-            <a:r>
-              <a:rPr dirty="0"/>
-              <a:t>- The definition is verbatim from Day 1 — do not paraphrase it.</a:t>
-            </a:r>
-          </a:p>
-          <a:p>
-            <a:r>
-              <a:rPr dirty="0"/>
-              <a:t>- MODEL, OBSERVE, JUDGE, ACT, LEARN. Do not add another aphorism after the chain; let it end the act.</a:t>
-            </a:r>
-          </a:p>
-        </p:txBody>
-      </p:sp>
-    </p:spTree>
-  </p:cSld>
+  <p:clrMapOvr>
+    <a:masterClrMapping/>
+  </p:clrMapOvr>
 </p:notes>
 </file>
 
@@ -2026,7 +2127,7 @@
           <a:p>
             <a:r>
               <a:rPr dirty="0"/>
-              <a:t xml:space="preserve">2 minutes — </a:t>
+              <a:t>2 minutes — </a:t>
             </a:r>
             <a:r>
               <a:rPr i="1" dirty="0"/>
@@ -2058,6 +2159,69 @@
       </p:sp>
     </p:spTree>
   </p:cSld>
+  <p:clrMapOvr>
+    <a:masterClrMapping/>
+  </p:clrMapOvr>
+</p:notes>
+</file>
+
+<file path=ppt/notesSlides/notesSlide5.xml><?xml version="1.0" encoding="utf-8"?>
+<p:notes xmlns:a="http://schemas.openxmlformats.org/drawingml/2006/main" xmlns:r="http://schemas.openxmlformats.org/officeDocument/2006/relationships" xmlns:p="http://schemas.openxmlformats.org/presentationml/2006/main">
+  <p:cSld>
+    <p:spTree>
+      <p:nvGrpSpPr>
+        <p:cNvPr id="1" name=""/>
+        <p:cNvGrpSpPr/>
+        <p:nvPr/>
+      </p:nvGrpSpPr>
+      <p:grpSpPr>
+        <a:xfrm>
+          <a:off x="0" y="0"/>
+          <a:ext cx="0" cy="0"/>
+          <a:chOff x="0" y="0"/>
+          <a:chExt cx="0" cy="0"/>
+        </a:xfrm>
+      </p:grpSpPr>
+      <p:sp>
+        <p:nvSpPr>
+          <p:cNvPr id="2" name="Notes Placeholder 1"/>
+          <p:cNvSpPr>
+            <a:spLocks noGrp="1"/>
+          </p:cNvSpPr>
+          <p:nvPr>
+            <p:ph type="body" idx="1"/>
+          </p:nvPr>
+        </p:nvSpPr>
+        <p:spPr/>
+        <p:txBody>
+          <a:bodyPr/>
+          <a:lstStyle/>
+          <a:p>
+            <a:r>
+              <a:rPr dirty="0"/>
+              <a:t>0.3 minutes — </a:t>
+            </a:r>
+            <a:r>
+              <a:rPr i="1" dirty="0"/>
+              <a:t>Name Section 1.</a:t>
+            </a:r>
+          </a:p>
+          <a:p>
+            <a:endParaRPr dirty="0"/>
+          </a:p>
+          <a:p>
+            <a:r>
+              <a:rPr dirty="0"/>
+              <a:t>- 15-20 seconds only.</a:t>
+            </a:r>
+          </a:p>
+        </p:txBody>
+      </p:sp>
+    </p:spTree>
+  </p:cSld>
+  <p:clrMapOvr>
+    <a:masterClrMapping/>
+  </p:clrMapOvr>
 </p:notes>
 </file>
 
@@ -2095,11 +2259,11 @@
           <a:p>
             <a:r>
               <a:rPr dirty="0"/>
-              <a:t xml:space="preserve">0.3 minutes — </a:t>
+              <a:t>1.5 minutes — </a:t>
             </a:r>
             <a:r>
               <a:rPr i="1" dirty="0"/>
-              <a:t>Name Section 1.</a:t>
+              <a:t>Three callbacks, one takeaway: models let us reason before consequences can be observed.</a:t>
             </a:r>
           </a:p>
           <a:p>
@@ -2108,13 +2272,28 @@
           <a:p>
             <a:r>
               <a:rPr dirty="0"/>
-              <a:t>- 15-20 seconds only.</a:t>
+              <a:t>- Pure callback material — Specification, Architecture, Design each built exactly these models. Do not re-teach them.</a:t>
+            </a:r>
+          </a:p>
+          <a:p>
+            <a:r>
+              <a:rPr dirty="0"/>
+              <a:t>- Guard the claim: the model identifies what matters; it does not decide.</a:t>
+            </a:r>
+          </a:p>
+          <a:p>
+            <a:r>
+              <a:rPr dirty="0"/>
+              <a:t>- Compress here if time pressure demands — never in the metrics centre (12-18, 20-24).</a:t>
             </a:r>
           </a:p>
         </p:txBody>
       </p:sp>
     </p:spTree>
   </p:cSld>
+  <p:clrMapOvr>
+    <a:masterClrMapping/>
+  </p:clrMapOvr>
 </p:notes>
 </file>
 
@@ -2152,11 +2331,7 @@
           <a:p>
             <a:r>
               <a:rPr dirty="0"/>
-              <a:t xml:space="preserve">1.5 minutes — </a:t>
-            </a:r>
-            <a:r>
-              <a:rPr i="1" dirty="0"/>
-              <a:t>Three callbacks, one takeaway: models let us reason before consequences can be observed.</a:t>
+              <a:t>2 minutes — Construct the organizing chain live, one element per click: decision, model, consequential property, evidence, judgment, action.</a:t>
             </a:r>
           </a:p>
           <a:p>
@@ -2165,25 +2340,40 @@
           <a:p>
             <a:r>
               <a:rPr dirty="0"/>
-              <a:t>- Pure callback material — Specification, Architecture, Design each built exactly these models. Do not re-teach them.</a:t>
+              <a:t>- Each click adds one element and its gloss; give each element one sentence, in the words on screen.</a:t>
             </a:r>
           </a:p>
           <a:p>
             <a:r>
               <a:rPr dirty="0"/>
-              <a:t>- Guard the claim: the model identifies what matters; it does not decide.</a:t>
+              <a:t>- DECISION: what are we choosing? MODEL: what relationships do we believe matter? CONSEQUENTIAL PROPERTY: what differs among alternatives in a way that matters? EVIDENCE: what do we know about that property? JUDGMENT: is that evidence sufficient given uncertainty and consequence? ACTION comes last — it follows from judgment, not from the evidence alone.</a:t>
             </a:r>
           </a:p>
           <a:p>
             <a:r>
               <a:rPr dirty="0"/>
-              <a:t>- Compress here if time pressure demands — never in the metrics centre (12-18, 20-24).</a:t>
+              <a:t>- This should feel like the instructor constructing a model, not revealing a finished flowchart.</a:t>
+            </a:r>
+          </a:p>
+          <a:p>
+            <a:r>
+              <a:rPr dirty="0"/>
+              <a:t>- This is the organizing model for the rest of the lecture; the closing slides return to it.</a:t>
+            </a:r>
+          </a:p>
+          <a:p>
+            <a:r>
+              <a:rPr dirty="0"/>
+              <a:t>- The next section is a deliberate zoom-in: we open up one part of this chain — how measurement can become evidence.</a:t>
             </a:r>
           </a:p>
         </p:txBody>
       </p:sp>
     </p:spTree>
   </p:cSld>
+  <p:clrMapOvr>
+    <a:masterClrMapping/>
+  </p:clrMapOvr>
 </p:notes>
 </file>
 
@@ -2220,39 +2410,52 @@
           <a:lstStyle/>
           <a:p>
             <a:r>
-              <a:t>2 minutes — Construct the organizing chain live, one element per click: decision, model, consequential property, evidence, judgment, action.</a:t>
-            </a:r>
-          </a:p>
-          <a:p/>
-          <a:p>
-            <a:r>
-              <a:t>- Each click adds one element and its gloss; give each element one sentence, in the words on screen.</a:t>
-            </a:r>
-          </a:p>
-          <a:p>
-            <a:r>
-              <a:t>- DECISION: what are we choosing? MODEL: what relationships do we believe matter? CONSEQUENTIAL PROPERTY: what differs among alternatives in a way that matters? EVIDENCE: what do we know about that property? JUDGMENT: is that evidence sufficient given uncertainty and consequence? ACTION comes last — it follows from judgment, not from the evidence alone.</a:t>
-            </a:r>
-          </a:p>
-          <a:p>
-            <a:r>
-              <a:t>- This should feel like the instructor constructing a model, not revealing a finished flowchart.</a:t>
-            </a:r>
-          </a:p>
-          <a:p>
-            <a:r>
-              <a:t>- This is the organizing model for the rest of the lecture; the closing slides return to it.</a:t>
-            </a:r>
-          </a:p>
-          <a:p>
-            <a:r>
-              <a:t>- The next section is a deliberate zoom-in: we open up one part of this chain — how measurement can become evidence.</a:t>
+              <a:rPr dirty="0"/>
+              <a:t>1 minute — Evidence is broader than measurement; the fan classifies forms of evidence, it does not sequence them.</a:t>
+            </a:r>
+          </a:p>
+          <a:p>
+            <a:endParaRPr dirty="0"/>
+          </a:p>
+          <a:p>
+            <a:r>
+              <a:rPr dirty="0"/>
+              <a:t>- Evidence is broader than measurement. Review, analysis, prototypes, tests, experiments, operational observation, and measurements can all bear on an engineering decision. We are about to concentrate on measurement because metrics require their own reasoning machinery. Do not mistake that focus for a claim that engineering evidence must be numerical.</a:t>
+            </a:r>
+          </a:p>
+          <a:p>
+            <a:r>
+              <a:rPr dirty="0"/>
+              <a:t>- A prototype can demonstrate feasibility; a counterexample can invalidate an assumption; a review can catch the wrong requirement.</a:t>
+            </a:r>
+          </a:p>
+          <a:p>
+            <a:r>
+              <a:rPr dirty="0"/>
+              <a:t>- The purpose of evidence is to reduce uncertainty that matters to a decision.</a:t>
+            </a:r>
+          </a:p>
+          <a:p>
+            <a:r>
+              <a:rPr dirty="0"/>
+              <a:t>- Transition on the highlighted box: measurement is the quantitative path — the </a:t>
+            </a:r>
+            <a:r>
+              <a:rPr dirty="0" err="1"/>
+              <a:t>centre</a:t>
+            </a:r>
+            <a:r>
+              <a:rPr dirty="0"/>
+              <a:t> of this lecture.</a:t>
             </a:r>
           </a:p>
         </p:txBody>
       </p:sp>
     </p:spTree>
   </p:cSld>
+  <p:clrMapOvr>
+    <a:masterClrMapping/>
+  </p:clrMapOvr>
 </p:notes>
 </file>
 
@@ -2289,34 +2492,44 @@
           <a:lstStyle/>
           <a:p>
             <a:r>
-              <a:t>1 minute — Evidence is broader than measurement; the fan classifies forms of evidence, it does not sequence them.</a:t>
-            </a:r>
-          </a:p>
-          <a:p/>
-          <a:p>
-            <a:r>
-              <a:t>- Evidence is broader than measurement. Review, analysis, prototypes, tests, experiments, operational observation, and measurements can all bear on an engineering decision. We are about to concentrate on measurement because metrics require their own reasoning machinery. Do not mistake that focus for a claim that engineering evidence must be numerical.</a:t>
-            </a:r>
-          </a:p>
-          <a:p>
-            <a:r>
-              <a:t>- A prototype can demonstrate feasibility; a counterexample can invalidate an assumption; a review can catch the wrong requirement.</a:t>
-            </a:r>
-          </a:p>
-          <a:p>
-            <a:r>
-              <a:t>- The purpose of evidence is to reduce uncertainty that matters to a decision.</a:t>
-            </a:r>
-          </a:p>
-          <a:p>
-            <a:r>
-              <a:t>- Transition on the highlighted box: measurement is the quantitative path — the centre of this lecture.</a:t>
+              <a:rPr dirty="0"/>
+              <a:t>2 minutes — Evidence gets selected because it distinguishes the alternatives.</a:t>
+            </a:r>
+          </a:p>
+          <a:p>
+            <a:endParaRPr dirty="0"/>
+          </a:p>
+          <a:p>
+            <a:r>
+              <a:rPr dirty="0"/>
+              <a:t>- Don't begin with 'what can I measure?' Begin with the uncertainty preventing the decision. If learning the answer wouldn't change what you choose, the measurement may have little decision value.</a:t>
+            </a:r>
+          </a:p>
+          <a:p>
+            <a:r>
+              <a:rPr dirty="0"/>
+              <a:t>- Walk the model: both strategies fit the memory budget (KNOWN); what separates them is whether the larger cache materially improves latency under the expected workload (UNCERTAIN).</a:t>
+            </a:r>
+          </a:p>
+          <a:p>
+            <a:r>
+              <a:rPr dirty="0"/>
+              <a:t>- Ask the room what evidence would actually change the choice; only then click to reveal: run both mechanisms under a representative workload and compare the latency distributions.</a:t>
+            </a:r>
+          </a:p>
+          <a:p>
+            <a:r>
+              <a:rPr dirty="0"/>
+              <a:t>- Design callback, and the handbook's buy-information framing: measurement is bought to remove the uncertainty that blocks the decision.</a:t>
             </a:r>
           </a:p>
         </p:txBody>
       </p:sp>
     </p:spTree>
   </p:cSld>
+  <p:clrMapOvr>
+    <a:masterClrMapping/>
+  </p:clrMapOvr>
 </p:notes>
 </file>
 
@@ -4885,7 +5098,7 @@
             </a:r>
             <a:r>
               <a:rPr lang="en-US" b="1" u="none" dirty="0"/>
-              <a:t xml:space="preserve">		Details</a:t>
+              <a:t>		Details</a:t>
             </a:r>
           </a:p>
           <a:p>
@@ -5062,7 +5275,7 @@
             </a:r>
             <a:r>
               <a:rPr lang="en-US" b="1" u="none" dirty="0"/>
-              <a:t xml:space="preserve">		Details</a:t>
+              <a:t>		Details</a:t>
             </a:r>
           </a:p>
           <a:p>
@@ -6098,7 +6311,7 @@
           </a:fontRef>
         </p:style>
         <p:txBody>
-          <a:bodyPr rtlCol="0" anchor="ctr" wrap="square" lIns="27432" tIns="22860" rIns="27432" bIns="22860"/>
+          <a:bodyPr wrap="square" lIns="27432" tIns="22860" rIns="27432" bIns="22860" rtlCol="0" anchor="ctr"/>
           <a:lstStyle/>
           <a:p>
             <a:pPr algn="ctr"/>
@@ -6189,7 +6402,7 @@
           </a:fontRef>
         </p:style>
         <p:txBody>
-          <a:bodyPr rtlCol="0" anchor="ctr" wrap="square" lIns="27432" tIns="22860" rIns="27432" bIns="22860"/>
+          <a:bodyPr wrap="square" lIns="27432" tIns="22860" rIns="27432" bIns="22860" rtlCol="0" anchor="ctr"/>
           <a:lstStyle/>
           <a:p>
             <a:pPr algn="ctr"/>
@@ -6280,7 +6493,7 @@
           </a:fontRef>
         </p:style>
         <p:txBody>
-          <a:bodyPr rtlCol="0" anchor="ctr" wrap="square" lIns="27432" tIns="22860" rIns="27432" bIns="22860"/>
+          <a:bodyPr wrap="square" lIns="27432" tIns="22860" rIns="27432" bIns="22860" rtlCol="0" anchor="ctr"/>
           <a:lstStyle/>
           <a:p>
             <a:pPr algn="ctr"/>
@@ -6371,7 +6584,7 @@
           </a:fontRef>
         </p:style>
         <p:txBody>
-          <a:bodyPr rtlCol="0" anchor="ctr" wrap="square" lIns="27432" tIns="22860" rIns="27432" bIns="22860"/>
+          <a:bodyPr wrap="square" lIns="27432" tIns="22860" rIns="27432" bIns="22860" rtlCol="0" anchor="ctr"/>
           <a:lstStyle/>
           <a:p>
             <a:pPr algn="ctr"/>
@@ -6502,7 +6715,7 @@
           <a:p>
             <a:fld id="{B7EB45DA-9A0D-DC49-8E02-F30A5DDC21C3}" type="slidenum">
               <a:rPr lang="en-US" smtClean="0"/>
-              <a:t>11</a:t>
+              <a:t>10</a:t>
             </a:fld>
             <a:endParaRPr lang="en-US"/>
           </a:p>
@@ -6616,7 +6829,7 @@
           <a:p>
             <a:fld id="{B7EB45DA-9A0D-DC49-8E02-F30A5DDC21C3}" type="slidenum">
               <a:rPr lang="en-US" smtClean="0"/>
-              <a:t>12</a:t>
+              <a:t>11</a:t>
             </a:fld>
             <a:endParaRPr lang="en-US"/>
           </a:p>
@@ -6741,7 +6954,7 @@
           </a:fontRef>
         </p:style>
         <p:txBody>
-          <a:bodyPr rtlCol="0" anchor="ctr" wrap="square" lIns="27432" tIns="22860" rIns="27432" bIns="22860"/>
+          <a:bodyPr wrap="square" lIns="27432" tIns="22860" rIns="27432" bIns="22860" rtlCol="0" anchor="ctr"/>
           <a:lstStyle/>
           <a:p>
             <a:pPr algn="ctr"/>
@@ -6795,7 +7008,7 @@
           </a:fontRef>
         </p:style>
         <p:txBody>
-          <a:bodyPr rtlCol="0" anchor="ctr" wrap="square" lIns="27432" tIns="22860" rIns="27432" bIns="22860"/>
+          <a:bodyPr wrap="square" lIns="27432" tIns="22860" rIns="27432" bIns="22860" rtlCol="0" anchor="ctr"/>
           <a:lstStyle/>
           <a:p>
             <a:pPr algn="ctr"/>
@@ -6849,7 +7062,7 @@
           </a:fontRef>
         </p:style>
         <p:txBody>
-          <a:bodyPr rtlCol="0" anchor="ctr" wrap="square" lIns="27432" tIns="22860" rIns="27432" bIns="22860"/>
+          <a:bodyPr wrap="square" lIns="27432" tIns="22860" rIns="27432" bIns="22860" rtlCol="0" anchor="ctr"/>
           <a:lstStyle/>
           <a:p>
             <a:pPr algn="ctr"/>
@@ -6903,7 +7116,7 @@
           </a:fontRef>
         </p:style>
         <p:txBody>
-          <a:bodyPr rtlCol="0" anchor="ctr" wrap="square" lIns="27432" tIns="22860" rIns="27432" bIns="22860"/>
+          <a:bodyPr wrap="square" lIns="27432" tIns="22860" rIns="27432" bIns="22860" rtlCol="0" anchor="ctr"/>
           <a:lstStyle/>
           <a:p>
             <a:pPr algn="ctr"/>
@@ -7170,7 +7383,7 @@
           </a:fontRef>
         </p:style>
         <p:txBody>
-          <a:bodyPr rtlCol="0" anchor="t" wrap="square" lIns="45720" rIns="45720"/>
+          <a:bodyPr wrap="square" lIns="45720" rIns="45720" rtlCol="0" anchor="t"/>
           <a:lstStyle/>
           <a:p>
             <a:pPr algn="ctr"/>
@@ -7224,7 +7437,7 @@
           </a:fontRef>
         </p:style>
         <p:txBody>
-          <a:bodyPr rtlCol="0" anchor="t" wrap="square" lIns="45720" rIns="45720"/>
+          <a:bodyPr wrap="square" lIns="45720" rIns="45720" rtlCol="0" anchor="t"/>
           <a:lstStyle/>
           <a:p>
             <a:pPr algn="ctr"/>
@@ -7289,7 +7502,7 @@
           </a:fontRef>
         </p:style>
         <p:txBody>
-          <a:bodyPr rtlCol="0" anchor="t" wrap="square" lIns="45720" rIns="45720"/>
+          <a:bodyPr wrap="square" lIns="45720" rIns="45720" rtlCol="0" anchor="t"/>
           <a:lstStyle/>
           <a:p>
             <a:pPr algn="ctr"/>
@@ -7343,7 +7556,7 @@
           </a:fontRef>
         </p:style>
         <p:txBody>
-          <a:bodyPr rtlCol="0" anchor="t" wrap="square" lIns="45720" rIns="45720"/>
+          <a:bodyPr wrap="square" lIns="45720" rIns="45720" rtlCol="0" anchor="t"/>
           <a:lstStyle/>
           <a:p>
             <a:pPr algn="ctr"/>
@@ -7437,7 +7650,7 @@
           <a:p>
             <a:fld id="{B7EB45DA-9A0D-DC49-8E02-F30A5DDC21C3}" type="slidenum">
               <a:rPr lang="en-US" smtClean="0"/>
-              <a:t>13</a:t>
+              <a:t>12</a:t>
             </a:fld>
             <a:endParaRPr lang="en-US"/>
           </a:p>
@@ -7847,7 +8060,7 @@
           <a:p>
             <a:fld id="{B7EB45DA-9A0D-DC49-8E02-F30A5DDC21C3}" type="slidenum">
               <a:rPr lang="en-US" smtClean="0"/>
-              <a:t>14</a:t>
+              <a:t>13</a:t>
             </a:fld>
             <a:endParaRPr lang="en-US"/>
           </a:p>
@@ -8099,7 +8312,7 @@
                   <a:srgbClr val="5C4826"/>
                 </a:solidFill>
               </a:rPr>
-              <a:t xml:space="preserve">service = 180 ms </a:t>
+              <a:t>service = 180 ms </a:t>
             </a:r>
             <a:r>
               <a:rPr lang="en-US" sz="2000" b="0" i="1" dirty="0">
@@ -8123,7 +8336,7 @@
                   <a:srgbClr val="5C4826"/>
                 </a:solidFill>
               </a:rPr>
-              <a:t xml:space="preserve">queueing = 130 ms </a:t>
+              <a:t>queueing = 130 ms </a:t>
             </a:r>
             <a:r>
               <a:rPr lang="en-US" sz="2000" b="0" i="1" dirty="0">
@@ -8147,7 +8360,7 @@
                   <a:srgbClr val="5C4826"/>
                 </a:solidFill>
               </a:rPr>
-              <a:t xml:space="preserve">communication = 90 ms </a:t>
+              <a:t>communication = 90 ms </a:t>
             </a:r>
             <a:r>
               <a:rPr lang="en-US" sz="2000" b="0" i="1" dirty="0">
@@ -8192,7 +8405,7 @@
                   <a:srgbClr val="5C4826"/>
                 </a:solidFill>
               </a:rPr>
-              <a:t xml:space="preserve">1   </a:t>
+              <a:t>1   </a:t>
             </a:r>
             <a:r>
               <a:rPr lang="en-US" sz="2000" b="0" i="0" dirty="0">
@@ -8216,7 +8429,7 @@
                   <a:srgbClr val="5C4826"/>
                 </a:solidFill>
               </a:rPr>
-              <a:t xml:space="preserve">2   </a:t>
+              <a:t>2   </a:t>
             </a:r>
             <a:r>
               <a:rPr lang="en-US" sz="2000" b="0" i="0" dirty="0">
@@ -8294,7 +8507,7 @@
                             </p:stCondLst>
                             <p:childTnLst>
                               <p:par>
-                                <p:cTn id="5" presetID="10" presetClass="entr" presetSubtype="0" fill="hold" grpId="0" nodeType="clickEffect">
+                                <p:cTn id="5" presetID="10" presetClass="entr" presetSubtype="0" fill="hold" nodeType="clickEffect">
                                   <p:stCondLst>
                                     <p:cond delay="0"/>
                                   </p:stCondLst>
@@ -8329,7 +8542,7 @@
                                 </p:cTn>
                               </p:par>
                               <p:par>
-                                <p:cTn id="8" presetID="10" presetClass="entr" presetSubtype="0" fill="hold" grpId="0" nodeType="withEffect">
+                                <p:cTn id="8" presetID="10" presetClass="entr" presetSubtype="0" fill="hold" nodeType="withEffect">
                                   <p:stCondLst>
                                     <p:cond delay="0"/>
                                   </p:stCondLst>
@@ -8468,7 +8681,7 @@
                                 </p:cTn>
                               </p:par>
                               <p:par>
-                                <p:cTn id="19" presetID="10" presetClass="entr" presetSubtype="0" fill="hold" grpId="0" nodeType="withEffect">
+                                <p:cTn id="19" presetID="10" presetClass="entr" presetSubtype="0" fill="hold" nodeType="withEffect">
                                   <p:stCondLst>
                                     <p:cond delay="0"/>
                                   </p:stCondLst>
@@ -8607,7 +8820,7 @@
           <a:p>
             <a:fld id="{B7EB45DA-9A0D-DC49-8E02-F30A5DDC21C3}" type="slidenum">
               <a:rPr lang="en-US" smtClean="0"/>
-              <a:t>15</a:t>
+              <a:t>14</a:t>
             </a:fld>
             <a:endParaRPr lang="en-US"/>
           </a:p>
@@ -8652,7 +8865,7 @@
           </a:fontRef>
         </p:style>
         <p:txBody>
-          <a:bodyPr rtlCol="0" anchor="ctr" wrap="square"/>
+          <a:bodyPr wrap="square" rtlCol="0" anchor="ctr"/>
           <a:lstStyle/>
           <a:p>
             <a:pPr algn="ctr"/>
@@ -8804,7 +9017,7 @@
           </a:fontRef>
         </p:style>
         <p:txBody>
-          <a:bodyPr rtlCol="0" anchor="ctr" wrap="square" lIns="45720" tIns="22860" rIns="45720" bIns="22860"/>
+          <a:bodyPr wrap="square" lIns="45720" tIns="22860" rIns="45720" bIns="22860" rtlCol="0" anchor="ctr"/>
           <a:lstStyle/>
           <a:p>
             <a:pPr algn="ctr"/>
@@ -8858,7 +9071,7 @@
           </a:fontRef>
         </p:style>
         <p:txBody>
-          <a:bodyPr rtlCol="0" anchor="ctr" wrap="square" lIns="45720" tIns="22860" rIns="45720" bIns="22860"/>
+          <a:bodyPr wrap="square" lIns="45720" tIns="22860" rIns="45720" bIns="22860" rtlCol="0" anchor="ctr"/>
           <a:lstStyle/>
           <a:p>
             <a:pPr algn="ctr"/>
@@ -8912,7 +9125,7 @@
           </a:fontRef>
         </p:style>
         <p:txBody>
-          <a:bodyPr rtlCol="0" anchor="ctr" wrap="square" lIns="45720" tIns="22860" rIns="45720" bIns="22860"/>
+          <a:bodyPr wrap="square" lIns="45720" tIns="22860" rIns="45720" bIns="22860" rtlCol="0" anchor="ctr"/>
           <a:lstStyle/>
           <a:p>
             <a:pPr algn="ctr"/>
@@ -8966,7 +9179,7 @@
           </a:fontRef>
         </p:style>
         <p:txBody>
-          <a:bodyPr rtlCol="0" anchor="ctr" wrap="square" lIns="45720" tIns="22860" rIns="45720" bIns="22860"/>
+          <a:bodyPr wrap="square" lIns="45720" tIns="22860" rIns="45720" bIns="22860" rtlCol="0" anchor="ctr"/>
           <a:lstStyle/>
           <a:p>
             <a:pPr algn="ctr"/>
@@ -9020,7 +9233,7 @@
           </a:fontRef>
         </p:style>
         <p:txBody>
-          <a:bodyPr rtlCol="0" anchor="ctr" wrap="square" lIns="45720" tIns="22860" rIns="45720" bIns="22860"/>
+          <a:bodyPr wrap="square" lIns="45720" tIns="22860" rIns="45720" bIns="22860" rtlCol="0" anchor="ctr"/>
           <a:lstStyle/>
           <a:p>
             <a:pPr algn="ctr"/>
@@ -9074,7 +9287,7 @@
           </a:fontRef>
         </p:style>
         <p:txBody>
-          <a:bodyPr rtlCol="0" anchor="ctr" wrap="square" lIns="45720" tIns="22860" rIns="45720" bIns="22860"/>
+          <a:bodyPr wrap="square" lIns="45720" tIns="22860" rIns="45720" bIns="22860" rtlCol="0" anchor="ctr"/>
           <a:lstStyle/>
           <a:p>
             <a:pPr algn="ctr"/>
@@ -9128,7 +9341,7 @@
           </a:fontRef>
         </p:style>
         <p:txBody>
-          <a:bodyPr rtlCol="0" anchor="ctr" wrap="square"/>
+          <a:bodyPr wrap="square" rtlCol="0" anchor="ctr"/>
           <a:lstStyle/>
           <a:p>
             <a:pPr algn="ctr"/>
@@ -9169,7 +9382,7 @@
                             </p:stCondLst>
                             <p:childTnLst>
                               <p:par>
-                                <p:cTn id="5" presetID="10" presetClass="entr" presetSubtype="0" fill="hold" grpId="0" nodeType="clickEffect">
+                                <p:cTn id="5" presetID="10" presetClass="entr" presetSubtype="0" fill="hold" nodeType="clickEffect">
                                   <p:stCondLst>
                                     <p:cond delay="0"/>
                                   </p:stCondLst>
@@ -9222,7 +9435,7 @@
                             </p:stCondLst>
                             <p:childTnLst>
                               <p:par>
-                                <p:cTn id="10" presetID="10" presetClass="entr" presetSubtype="0" fill="hold" grpId="0" nodeType="clickEffect">
+                                <p:cTn id="10" presetID="10" presetClass="entr" presetSubtype="0" fill="hold" nodeType="clickEffect">
                                   <p:stCondLst>
                                     <p:cond delay="0"/>
                                   </p:stCondLst>
@@ -9275,7 +9488,7 @@
                             </p:stCondLst>
                             <p:childTnLst>
                               <p:par>
-                                <p:cTn id="15" presetID="10" presetClass="entr" presetSubtype="0" fill="hold" grpId="0" nodeType="clickEffect">
+                                <p:cTn id="15" presetID="10" presetClass="entr" presetSubtype="0" fill="hold" nodeType="clickEffect">
                                   <p:stCondLst>
                                     <p:cond delay="0"/>
                                   </p:stCondLst>
@@ -9328,7 +9541,7 @@
                             </p:stCondLst>
                             <p:childTnLst>
                               <p:par>
-                                <p:cTn id="20" presetID="10" presetClass="entr" presetSubtype="0" fill="hold" grpId="0" nodeType="clickEffect">
+                                <p:cTn id="20" presetID="10" presetClass="entr" presetSubtype="0" fill="hold" nodeType="clickEffect">
                                   <p:stCondLst>
                                     <p:cond delay="0"/>
                                   </p:stCondLst>
@@ -9381,7 +9594,7 @@
                             </p:stCondLst>
                             <p:childTnLst>
                               <p:par>
-                                <p:cTn id="25" presetID="10" presetClass="entr" presetSubtype="0" fill="hold" grpId="0" nodeType="clickEffect">
+                                <p:cTn id="25" presetID="10" presetClass="entr" presetSubtype="0" fill="hold" nodeType="clickEffect">
                                   <p:stCondLst>
                                     <p:cond delay="0"/>
                                   </p:stCondLst>
@@ -9434,7 +9647,7 @@
                             </p:stCondLst>
                             <p:childTnLst>
                               <p:par>
-                                <p:cTn id="30" presetID="10" presetClass="entr" presetSubtype="0" fill="hold" grpId="0" nodeType="clickEffect">
+                                <p:cTn id="30" presetID="10" presetClass="entr" presetSubtype="0" fill="hold" nodeType="clickEffect">
                                   <p:stCondLst>
                                     <p:cond delay="0"/>
                                   </p:stCondLst>
@@ -9487,7 +9700,7 @@
                             </p:stCondLst>
                             <p:childTnLst>
                               <p:par>
-                                <p:cTn id="35" presetID="10" presetClass="entr" presetSubtype="0" fill="hold" grpId="0" nodeType="clickEffect">
+                                <p:cTn id="35" presetID="10" presetClass="entr" presetSubtype="0" fill="hold" nodeType="clickEffect">
                                   <p:stCondLst>
                                     <p:cond delay="0"/>
                                   </p:stCondLst>
@@ -9623,7 +9836,7 @@
           <a:p>
             <a:fld id="{B7EB45DA-9A0D-DC49-8E02-F30A5DDC21C3}" type="slidenum">
               <a:rPr lang="en-US" smtClean="0"/>
-              <a:t>16</a:t>
+              <a:t>15</a:t>
             </a:fld>
             <a:endParaRPr lang="en-US"/>
           </a:p>
@@ -9707,7 +9920,7 @@
           </a:fontRef>
         </p:style>
         <p:txBody>
-          <a:bodyPr rtlCol="0" anchor="ctr" wrap="square"/>
+          <a:bodyPr wrap="square" rtlCol="0" anchor="ctr"/>
           <a:lstStyle/>
           <a:p>
             <a:pPr algn="ctr"/>
@@ -9832,7 +10045,7 @@
           </a:fontRef>
         </p:style>
         <p:txBody>
-          <a:bodyPr rtlCol="0" anchor="ctr" wrap="square"/>
+          <a:bodyPr wrap="square" rtlCol="0" anchor="ctr"/>
           <a:lstStyle/>
           <a:p>
             <a:pPr algn="ctr"/>
@@ -9957,7 +10170,7 @@
           </a:fontRef>
         </p:style>
         <p:txBody>
-          <a:bodyPr rtlCol="0" anchor="ctr" wrap="square"/>
+          <a:bodyPr wrap="square" rtlCol="0" anchor="ctr"/>
           <a:lstStyle/>
           <a:p>
             <a:pPr algn="ctr"/>
@@ -10082,7 +10295,7 @@
           </a:fontRef>
         </p:style>
         <p:txBody>
-          <a:bodyPr rtlCol="0" anchor="ctr" wrap="square"/>
+          <a:bodyPr wrap="square" rtlCol="0" anchor="ctr"/>
           <a:lstStyle/>
           <a:p>
             <a:pPr algn="ctr"/>
@@ -10359,7 +10572,7 @@
           <a:p>
             <a:fld id="{B7EB45DA-9A0D-DC49-8E02-F30A5DDC21C3}" type="slidenum">
               <a:rPr lang="en-US" smtClean="0"/>
-              <a:t>17</a:t>
+              <a:t>16</a:t>
             </a:fld>
             <a:endParaRPr lang="en-US"/>
           </a:p>
@@ -10762,7 +10975,7 @@
                   <a:srgbClr val="FFFFFF"/>
                 </a:solidFill>
               </a:rPr>
-              <a:t>Directness is a matter of degree — not a binary found in nature.</a:t>
+              <a:t>Directness is a matter of degree.</a:t>
             </a:r>
           </a:p>
         </p:txBody>
@@ -10846,7 +11059,7 @@
           <a:p>
             <a:fld id="{B7EB45DA-9A0D-DC49-8E02-F30A5DDC21C3}" type="slidenum">
               <a:rPr lang="en-US" smtClean="0"/>
-              <a:t>18</a:t>
+              <a:t>17</a:t>
             </a:fld>
             <a:endParaRPr lang="en-US"/>
           </a:p>
@@ -11372,7 +11585,7 @@
           <a:p>
             <a:fld id="{B7EB45DA-9A0D-DC49-8E02-F30A5DDC21C3}" type="slidenum">
               <a:rPr lang="en-US" smtClean="0"/>
-              <a:t>19</a:t>
+              <a:t>18</a:t>
             </a:fld>
             <a:endParaRPr lang="en-US"/>
           </a:p>
@@ -11500,7 +11713,7 @@
           <a:p>
             <a:fld id="{B7EB45DA-9A0D-DC49-8E02-F30A5DDC21C3}" type="slidenum">
               <a:rPr lang="en-US" smtClean="0"/>
-              <a:t>20</a:t>
+              <a:t>19</a:t>
             </a:fld>
             <a:endParaRPr lang="en-US"/>
           </a:p>
@@ -11579,7 +11792,7 @@
                   <a:srgbClr val="9A9A9A"/>
                 </a:solidFill>
               </a:rPr>
-              <a:t xml:space="preserve">  ·  </a:t>
+              <a:t>  ·  </a:t>
             </a:r>
             <a:r>
               <a:rPr lang="en-US" sz="2000" b="1" i="0" dirty="0">
@@ -11595,7 +11808,7 @@
                   <a:srgbClr val="9A9A9A"/>
                 </a:solidFill>
               </a:rPr>
-              <a:t xml:space="preserve">  ·  </a:t>
+              <a:t>  ·  </a:t>
             </a:r>
             <a:r>
               <a:rPr lang="en-US" sz="2000" b="1" i="0" dirty="0">
@@ -11935,7 +12148,7 @@
           </a:fontRef>
         </p:style>
         <p:txBody>
-          <a:bodyPr rtlCol="0" anchor="ctr" wrap="square" lIns="45720" tIns="22860" rIns="45720" bIns="22860"/>
+          <a:bodyPr wrap="square" lIns="45720" tIns="22860" rIns="45720" bIns="22860" rtlCol="0" anchor="ctr"/>
           <a:lstStyle/>
           <a:p>
             <a:pPr algn="ctr"/>
@@ -11989,7 +12202,7 @@
           </a:fontRef>
         </p:style>
         <p:txBody>
-          <a:bodyPr rtlCol="0" anchor="ctr" wrap="square" lIns="45720" tIns="22860" rIns="45720" bIns="22860"/>
+          <a:bodyPr wrap="square" lIns="45720" tIns="22860" rIns="45720" bIns="22860" rtlCol="0" anchor="ctr"/>
           <a:lstStyle/>
           <a:p>
             <a:pPr algn="ctr"/>
@@ -12043,7 +12256,7 @@
           </a:fontRef>
         </p:style>
         <p:txBody>
-          <a:bodyPr rtlCol="0" anchor="ctr" wrap="square" lIns="45720" tIns="22860" rIns="45720" bIns="22860"/>
+          <a:bodyPr wrap="square" lIns="45720" tIns="22860" rIns="45720" bIns="22860" rtlCol="0" anchor="ctr"/>
           <a:lstStyle/>
           <a:p>
             <a:pPr algn="ctr"/>
@@ -12097,7 +12310,7 @@
           </a:fontRef>
         </p:style>
         <p:txBody>
-          <a:bodyPr rtlCol="0" anchor="ctr" wrap="square" lIns="45720" tIns="22860" rIns="45720" bIns="22860"/>
+          <a:bodyPr wrap="square" lIns="45720" tIns="22860" rIns="45720" bIns="22860" rtlCol="0" anchor="ctr"/>
           <a:lstStyle/>
           <a:p>
             <a:pPr algn="ctr"/>
@@ -12151,7 +12364,7 @@
           </a:fontRef>
         </p:style>
         <p:txBody>
-          <a:bodyPr rtlCol="0" anchor="ctr" wrap="square" lIns="45720" tIns="22860" rIns="45720" bIns="22860"/>
+          <a:bodyPr wrap="square" lIns="45720" tIns="22860" rIns="45720" bIns="22860" rtlCol="0" anchor="ctr"/>
           <a:lstStyle/>
           <a:p>
             <a:pPr algn="ctr"/>
@@ -12205,7 +12418,7 @@
           </a:fontRef>
         </p:style>
         <p:txBody>
-          <a:bodyPr rtlCol="0" anchor="ctr" wrap="square" lIns="45720" tIns="22860" rIns="45720" bIns="22860"/>
+          <a:bodyPr wrap="square" lIns="45720" tIns="22860" rIns="45720" bIns="22860" rtlCol="0" anchor="ctr"/>
           <a:lstStyle/>
           <a:p>
             <a:pPr algn="ctr"/>
@@ -12259,7 +12472,7 @@
           </a:fontRef>
         </p:style>
         <p:txBody>
-          <a:bodyPr rtlCol="0" anchor="ctr" wrap="square" lIns="45720" tIns="22860" rIns="45720" bIns="22860"/>
+          <a:bodyPr wrap="square" lIns="45720" tIns="22860" rIns="45720" bIns="22860" rtlCol="0" anchor="ctr"/>
           <a:lstStyle/>
           <a:p>
             <a:pPr algn="ctr"/>
@@ -12313,7 +12526,7 @@
           </a:fontRef>
         </p:style>
         <p:txBody>
-          <a:bodyPr rtlCol="0" anchor="ctr" wrap="square" lIns="45720" tIns="22860" rIns="45720" bIns="22860"/>
+          <a:bodyPr wrap="square" lIns="45720" tIns="22860" rIns="45720" bIns="22860" rtlCol="0" anchor="ctr"/>
           <a:lstStyle/>
           <a:p>
             <a:pPr algn="ctr"/>
@@ -12367,7 +12580,7 @@
           </a:fontRef>
         </p:style>
         <p:txBody>
-          <a:bodyPr rtlCol="0" anchor="ctr" wrap="square" lIns="45720" tIns="22860" rIns="45720" bIns="22860"/>
+          <a:bodyPr wrap="square" lIns="45720" tIns="22860" rIns="45720" bIns="22860" rtlCol="0" anchor="ctr"/>
           <a:lstStyle/>
           <a:p>
             <a:pPr algn="ctr"/>
@@ -12421,7 +12634,7 @@
           </a:fontRef>
         </p:style>
         <p:txBody>
-          <a:bodyPr rtlCol="0" anchor="ctr" wrap="square" lIns="45720" tIns="22860" rIns="45720" bIns="22860"/>
+          <a:bodyPr wrap="square" lIns="45720" tIns="22860" rIns="45720" bIns="22860" rtlCol="0" anchor="ctr"/>
           <a:lstStyle/>
           <a:p>
             <a:pPr algn="ctr"/>
@@ -12515,7 +12728,7 @@
           <a:p>
             <a:fld id="{B7EB45DA-9A0D-DC49-8E02-F30A5DDC21C3}" type="slidenum">
               <a:rPr lang="en-US" smtClean="0"/>
-              <a:t>21</a:t>
+              <a:t>20</a:t>
             </a:fld>
             <a:endParaRPr lang="en-US"/>
           </a:p>
@@ -12862,7 +13075,7 @@
           <a:p>
             <a:fld id="{B7EB45DA-9A0D-DC49-8E02-F30A5DDC21C3}" type="slidenum">
               <a:rPr lang="en-US" smtClean="0"/>
-              <a:t>22</a:t>
+              <a:t>21</a:t>
             </a:fld>
             <a:endParaRPr lang="en-US"/>
           </a:p>
@@ -12973,7 +13186,7 @@
                   <a:srgbClr val="555960"/>
                 </a:solidFill>
               </a:rPr>
-              <a:t xml:space="preserve">Surrogation: </a:t>
+              <a:t>Surrogation: </a:t>
             </a:r>
             <a:r>
               <a:rPr lang="en-US" sz="2000" b="0" i="1" dirty="0">
@@ -12981,7 +13194,7 @@
                   <a:srgbClr val="555960"/>
                 </a:solidFill>
               </a:rPr>
-              <a:t xml:space="preserve">we begin treating commits as though they </a:t>
+              <a:t>we begin treating commits as though they </a:t>
             </a:r>
             <a:r>
               <a:rPr lang="en-US" sz="2000" b="1" i="1" dirty="0">
@@ -12997,7 +13210,7 @@
                   <a:srgbClr val="555960"/>
                 </a:solidFill>
               </a:rPr>
-              <a:t xml:space="preserve"> useful output</a:t>
+              <a:t> useful output</a:t>
             </a:r>
           </a:p>
         </p:txBody>
@@ -13097,7 +13310,7 @@
                   <a:srgbClr val="555960"/>
                 </a:solidFill>
               </a:rPr>
-              <a:t xml:space="preserve">Goodhart: </a:t>
+              <a:t>Goodhart: </a:t>
             </a:r>
             <a:r>
               <a:rPr lang="en-US" sz="2000" b="0" i="1" dirty="0">
@@ -13146,7 +13359,7 @@
                   <a:srgbClr val="5C4826"/>
                 </a:solidFill>
               </a:rPr>
-              <a:t xml:space="preserve">Surrogation: </a:t>
+              <a:t>Surrogation: </a:t>
             </a:r>
             <a:r>
               <a:rPr lang="en-US" sz="2000" b="0" i="0" dirty="0">
@@ -13170,7 +13383,7 @@
                   <a:srgbClr val="5C4826"/>
                 </a:solidFill>
               </a:rPr>
-              <a:t xml:space="preserve">Goodhart’s Law: </a:t>
+              <a:t>Goodhart’s Law: </a:t>
             </a:r>
             <a:r>
               <a:rPr lang="en-US" sz="2000" b="0" i="0" dirty="0">
@@ -13262,7 +13475,7 @@
           <a:p>
             <a:fld id="{B7EB45DA-9A0D-DC49-8E02-F30A5DDC21C3}" type="slidenum">
               <a:rPr lang="en-US" smtClean="0"/>
-              <a:t>23</a:t>
+              <a:t>22</a:t>
             </a:fld>
             <a:endParaRPr lang="en-US"/>
           </a:p>
@@ -13668,7 +13881,7 @@
           <a:p>
             <a:fld id="{B7EB45DA-9A0D-DC49-8E02-F30A5DDC21C3}" type="slidenum">
               <a:rPr lang="en-US" smtClean="0"/>
-              <a:t>24</a:t>
+              <a:t>23</a:t>
             </a:fld>
             <a:endParaRPr lang="en-US"/>
           </a:p>
@@ -13710,7 +13923,7 @@
                   <a:srgbClr val="8E6F3E"/>
                 </a:solidFill>
               </a:rPr>
-              <a:t xml:space="preserve">1    </a:t>
+              <a:t>1    </a:t>
             </a:r>
             <a:r>
               <a:rPr lang="en-US" sz="2400" b="0" i="0" dirty="0">
@@ -13759,7 +13972,7 @@
                   <a:srgbClr val="8E6F3E"/>
                 </a:solidFill>
               </a:rPr>
-              <a:t xml:space="preserve">2    </a:t>
+              <a:t>2    </a:t>
             </a:r>
             <a:r>
               <a:rPr lang="en-US" sz="2400" b="0" i="0" dirty="0">
@@ -13808,7 +14021,7 @@
                   <a:srgbClr val="8E6F3E"/>
                 </a:solidFill>
               </a:rPr>
-              <a:t xml:space="preserve">3    </a:t>
+              <a:t>3    </a:t>
             </a:r>
             <a:r>
               <a:rPr lang="en-US" sz="2400" b="0" i="0" dirty="0">
@@ -13857,7 +14070,7 @@
                   <a:srgbClr val="8E6F3E"/>
                 </a:solidFill>
               </a:rPr>
-              <a:t xml:space="preserve">4    </a:t>
+              <a:t>4    </a:t>
             </a:r>
             <a:r>
               <a:rPr lang="en-US" sz="2400" b="0" i="0" dirty="0">
@@ -13986,7 +14199,7 @@
           <a:p>
             <a:fld id="{B7EB45DA-9A0D-DC49-8E02-F30A5DDC21C3}" type="slidenum">
               <a:rPr lang="en-US" smtClean="0"/>
-              <a:t>25</a:t>
+              <a:t>24</a:t>
             </a:fld>
             <a:endParaRPr lang="en-US"/>
           </a:p>
@@ -14100,7 +14313,7 @@
           <a:p>
             <a:fld id="{B7EB45DA-9A0D-DC49-8E02-F30A5DDC21C3}" type="slidenum">
               <a:rPr lang="en-US" smtClean="0"/>
-              <a:t>26</a:t>
+              <a:t>25</a:t>
             </a:fld>
             <a:endParaRPr lang="en-US"/>
           </a:p>
@@ -14247,7 +14460,7 @@
           </a:fontRef>
         </p:style>
         <p:txBody>
-          <a:bodyPr rtlCol="0" anchor="ctr" wrap="square" tIns="22860" bIns="22860"/>
+          <a:bodyPr wrap="square" tIns="22860" bIns="22860" rtlCol="0" anchor="ctr"/>
           <a:lstStyle/>
           <a:p>
             <a:pPr algn="l"/>
@@ -14301,7 +14514,7 @@
           </a:fontRef>
         </p:style>
         <p:txBody>
-          <a:bodyPr rtlCol="0" anchor="ctr" wrap="square" tIns="22860" bIns="22860" lIns="45720" rIns="45720"/>
+          <a:bodyPr wrap="square" lIns="45720" tIns="22860" rIns="45720" bIns="22860" rtlCol="0" anchor="ctr"/>
           <a:lstStyle/>
           <a:p>
             <a:pPr algn="l"/>
@@ -14355,7 +14568,7 @@
           </a:fontRef>
         </p:style>
         <p:txBody>
-          <a:bodyPr rtlCol="0" anchor="ctr" wrap="square" tIns="22860" bIns="22860"/>
+          <a:bodyPr wrap="square" tIns="22860" bIns="22860" rtlCol="0" anchor="ctr"/>
           <a:lstStyle/>
           <a:p>
             <a:pPr algn="l"/>
@@ -14409,7 +14622,7 @@
           </a:fontRef>
         </p:style>
         <p:txBody>
-          <a:bodyPr rtlCol="0" anchor="ctr" wrap="square" tIns="22860" bIns="22860" lIns="45720" rIns="45720"/>
+          <a:bodyPr wrap="square" lIns="45720" tIns="22860" rIns="45720" bIns="22860" rtlCol="0" anchor="ctr"/>
           <a:lstStyle/>
           <a:p>
             <a:pPr algn="l"/>
@@ -14463,7 +14676,7 @@
           </a:fontRef>
         </p:style>
         <p:txBody>
-          <a:bodyPr rtlCol="0" anchor="ctr" wrap="square" tIns="22860" bIns="22860"/>
+          <a:bodyPr wrap="square" tIns="22860" bIns="22860" rtlCol="0" anchor="ctr"/>
           <a:lstStyle/>
           <a:p>
             <a:pPr algn="l"/>
@@ -14517,7 +14730,7 @@
           </a:fontRef>
         </p:style>
         <p:txBody>
-          <a:bodyPr rtlCol="0" anchor="ctr" wrap="square" tIns="22860" bIns="22860" lIns="45720" rIns="45720"/>
+          <a:bodyPr wrap="square" lIns="45720" tIns="22860" rIns="45720" bIns="22860" rtlCol="0" anchor="ctr"/>
           <a:lstStyle/>
           <a:p>
             <a:pPr algn="l"/>
@@ -14571,7 +14784,7 @@
           </a:fontRef>
         </p:style>
         <p:txBody>
-          <a:bodyPr rtlCol="0" anchor="ctr" wrap="square" tIns="22860" bIns="22860"/>
+          <a:bodyPr wrap="square" tIns="22860" bIns="22860" rtlCol="0" anchor="ctr"/>
           <a:lstStyle/>
           <a:p>
             <a:pPr algn="l"/>
@@ -14625,7 +14838,7 @@
           </a:fontRef>
         </p:style>
         <p:txBody>
-          <a:bodyPr rtlCol="0" anchor="ctr" wrap="square" tIns="22860" bIns="22860" lIns="45720" rIns="45720"/>
+          <a:bodyPr wrap="square" lIns="45720" tIns="22860" rIns="45720" bIns="22860" rtlCol="0" anchor="ctr"/>
           <a:lstStyle/>
           <a:p>
             <a:pPr algn="l"/>
@@ -14679,7 +14892,7 @@
           </a:fontRef>
         </p:style>
         <p:txBody>
-          <a:bodyPr rtlCol="0" anchor="ctr" wrap="square" tIns="22860" bIns="22860"/>
+          <a:bodyPr wrap="square" tIns="22860" bIns="22860" rtlCol="0" anchor="ctr"/>
           <a:lstStyle/>
           <a:p>
             <a:pPr algn="l"/>
@@ -14733,7 +14946,7 @@
           </a:fontRef>
         </p:style>
         <p:txBody>
-          <a:bodyPr rtlCol="0" anchor="ctr" wrap="square" tIns="22860" bIns="22860" lIns="45720" rIns="45720"/>
+          <a:bodyPr wrap="square" lIns="45720" tIns="22860" rIns="45720" bIns="22860" rtlCol="0" anchor="ctr"/>
           <a:lstStyle/>
           <a:p>
             <a:pPr algn="l"/>
@@ -14787,7 +15000,7 @@
           </a:fontRef>
         </p:style>
         <p:txBody>
-          <a:bodyPr rtlCol="0" anchor="ctr" wrap="square" tIns="22860" bIns="22860"/>
+          <a:bodyPr wrap="square" tIns="22860" bIns="22860" rtlCol="0" anchor="ctr"/>
           <a:lstStyle/>
           <a:p>
             <a:pPr algn="l"/>
@@ -14841,7 +15054,7 @@
           </a:fontRef>
         </p:style>
         <p:txBody>
-          <a:bodyPr rtlCol="0" anchor="ctr" wrap="square" tIns="22860" bIns="22860" lIns="45720" rIns="45720"/>
+          <a:bodyPr wrap="square" lIns="45720" tIns="22860" rIns="45720" bIns="22860" rtlCol="0" anchor="ctr"/>
           <a:lstStyle/>
           <a:p>
             <a:pPr algn="l"/>
@@ -14893,7 +15106,7 @@
           </a:fontRef>
         </p:style>
         <p:txBody>
-          <a:bodyPr rtlCol="0" anchor="ctr" wrap="square"/>
+          <a:bodyPr wrap="square" rtlCol="0" anchor="ctr"/>
           <a:lstStyle/>
           <a:p>
             <a:pPr algn="ctr"/>
@@ -14947,7 +15160,7 @@
           </a:fontRef>
         </p:style>
         <p:txBody>
-          <a:bodyPr rtlCol="0" anchor="ctr" wrap="square" lIns="27432" tIns="22860" rIns="27432" bIns="22860"/>
+          <a:bodyPr wrap="square" lIns="27432" tIns="22860" rIns="27432" bIns="22860" rtlCol="0" anchor="ctr"/>
           <a:lstStyle/>
           <a:p>
             <a:pPr algn="ctr"/>
@@ -15038,7 +15251,7 @@
           </a:fontRef>
         </p:style>
         <p:txBody>
-          <a:bodyPr rtlCol="0" anchor="ctr" wrap="square" lIns="27432" tIns="22860" rIns="27432" bIns="22860"/>
+          <a:bodyPr wrap="square" lIns="27432" tIns="22860" rIns="27432" bIns="22860" rtlCol="0" anchor="ctr"/>
           <a:lstStyle/>
           <a:p>
             <a:pPr algn="ctr"/>
@@ -15129,7 +15342,7 @@
           </a:fontRef>
         </p:style>
         <p:txBody>
-          <a:bodyPr rtlCol="0" anchor="ctr" wrap="square" lIns="27432" tIns="22860" rIns="27432" bIns="22860"/>
+          <a:bodyPr wrap="square" lIns="27432" tIns="22860" rIns="27432" bIns="22860" rtlCol="0" anchor="ctr"/>
           <a:lstStyle/>
           <a:p>
             <a:pPr algn="ctr"/>
@@ -15220,7 +15433,7 @@
           </a:fontRef>
         </p:style>
         <p:txBody>
-          <a:bodyPr rtlCol="0" anchor="ctr" wrap="square" lIns="27432" tIns="22860" rIns="27432" bIns="22860"/>
+          <a:bodyPr wrap="square" lIns="27432" tIns="22860" rIns="27432" bIns="22860" rtlCol="0" anchor="ctr"/>
           <a:lstStyle/>
           <a:p>
             <a:pPr algn="ctr"/>
@@ -15311,7 +15524,7 @@
           </a:fontRef>
         </p:style>
         <p:txBody>
-          <a:bodyPr rtlCol="0" anchor="ctr" wrap="square" lIns="27432" tIns="22860" rIns="27432" bIns="22860"/>
+          <a:bodyPr wrap="square" lIns="27432" tIns="22860" rIns="27432" bIns="22860" rtlCol="0" anchor="ctr"/>
           <a:lstStyle/>
           <a:p>
             <a:pPr algn="ctr"/>
@@ -15402,7 +15615,7 @@
           </a:fontRef>
         </p:style>
         <p:txBody>
-          <a:bodyPr rtlCol="0" anchor="ctr" wrap="square" lIns="27432" tIns="22860" rIns="27432" bIns="22860"/>
+          <a:bodyPr wrap="square" lIns="27432" tIns="22860" rIns="27432" bIns="22860" rtlCol="0" anchor="ctr"/>
           <a:lstStyle/>
           <a:p>
             <a:pPr algn="ctr"/>
@@ -15431,26 +15644,26 @@
               <p:cTn id="2" dur="indefinite" nodeType="mainSeq">
                 <p:childTnLst>
                   <p:par>
-                    <p:cTn id="43" fill="hold">
+                    <p:cTn id="3" fill="hold">
                       <p:stCondLst>
                         <p:cond delay="indefinite"/>
                       </p:stCondLst>
                       <p:childTnLst>
                         <p:par>
-                          <p:cTn id="44" fill="hold">
+                          <p:cTn id="4" fill="hold">
                             <p:stCondLst>
                               <p:cond delay="0"/>
                             </p:stCondLst>
                             <p:childTnLst>
                               <p:par>
-                                <p:cTn id="45" presetID="10" presetClass="entr" presetSubtype="0" fill="hold" grpId="0" nodeType="clickEffect">
+                                <p:cTn id="5" presetID="10" presetClass="entr" presetSubtype="0" fill="hold" nodeType="clickEffect">
                                   <p:stCondLst>
                                     <p:cond delay="0"/>
                                   </p:stCondLst>
                                   <p:childTnLst>
                                     <p:set>
                                       <p:cBhvr>
-                                        <p:cTn id="46" dur="1" fill="hold">
+                                        <p:cTn id="6" dur="1" fill="hold">
                                           <p:stCondLst>
                                             <p:cond delay="0"/>
                                           </p:stCondLst>
@@ -15468,7 +15681,7 @@
                                     </p:set>
                                     <p:animEffect transition="in" filter="fade">
                                       <p:cBhvr>
-                                        <p:cTn id="47" dur="500"/>
+                                        <p:cTn id="7" dur="500"/>
                                         <p:tgtEl>
                                           <p:spTgt spid="16"/>
                                         </p:tgtEl>
@@ -15478,14 +15691,14 @@
                                 </p:cTn>
                               </p:par>
                               <p:par>
-                                <p:cTn id="48" presetID="10" presetClass="entr" presetSubtype="0" fill="hold" grpId="0" nodeType="withEffect">
+                                <p:cTn id="8" presetID="10" presetClass="entr" presetSubtype="0" fill="hold" nodeType="withEffect">
                                   <p:stCondLst>
                                     <p:cond delay="0"/>
                                   </p:stCondLst>
                                   <p:childTnLst>
                                     <p:set>
                                       <p:cBhvr>
-                                        <p:cTn id="49" dur="1" fill="hold">
+                                        <p:cTn id="9" dur="1" fill="hold">
                                           <p:stCondLst>
                                             <p:cond delay="0"/>
                                           </p:stCondLst>
@@ -15503,7 +15716,7 @@
                                     </p:set>
                                     <p:animEffect transition="in" filter="fade">
                                       <p:cBhvr>
-                                        <p:cTn id="50" dur="500"/>
+                                        <p:cTn id="10" dur="500"/>
                                         <p:tgtEl>
                                           <p:spTgt spid="17"/>
                                         </p:tgtEl>
@@ -15513,14 +15726,14 @@
                                 </p:cTn>
                               </p:par>
                               <p:par>
-                                <p:cTn id="51" presetID="10" presetClass="entr" presetSubtype="0" fill="hold" grpId="0" nodeType="withEffect">
+                                <p:cTn id="11" presetID="10" presetClass="entr" presetSubtype="0" fill="hold" nodeType="withEffect">
                                   <p:stCondLst>
                                     <p:cond delay="0"/>
                                   </p:stCondLst>
                                   <p:childTnLst>
                                     <p:set>
                                       <p:cBhvr>
-                                        <p:cTn id="52" dur="1" fill="hold">
+                                        <p:cTn id="12" dur="1" fill="hold">
                                           <p:stCondLst>
                                             <p:cond delay="0"/>
                                           </p:stCondLst>
@@ -15538,7 +15751,7 @@
                                     </p:set>
                                     <p:animEffect transition="in" filter="fade">
                                       <p:cBhvr>
-                                        <p:cTn id="53" dur="500"/>
+                                        <p:cTn id="13" dur="500"/>
                                         <p:tgtEl>
                                           <p:spTgt spid="18"/>
                                         </p:tgtEl>
@@ -15548,14 +15761,14 @@
                                 </p:cTn>
                               </p:par>
                               <p:par>
-                                <p:cTn id="54" presetID="10" presetClass="entr" presetSubtype="0" fill="hold" grpId="0" nodeType="withEffect">
+                                <p:cTn id="14" presetID="10" presetClass="entr" presetSubtype="0" fill="hold" nodeType="withEffect">
                                   <p:stCondLst>
                                     <p:cond delay="0"/>
                                   </p:stCondLst>
                                   <p:childTnLst>
                                     <p:set>
                                       <p:cBhvr>
-                                        <p:cTn id="55" dur="1" fill="hold">
+                                        <p:cTn id="15" dur="1" fill="hold">
                                           <p:stCondLst>
                                             <p:cond delay="0"/>
                                           </p:stCondLst>
@@ -15573,7 +15786,7 @@
                                     </p:set>
                                     <p:animEffect transition="in" filter="fade">
                                       <p:cBhvr>
-                                        <p:cTn id="56" dur="500"/>
+                                        <p:cTn id="16" dur="500"/>
                                         <p:tgtEl>
                                           <p:spTgt spid="19"/>
                                         </p:tgtEl>
@@ -15583,14 +15796,14 @@
                                 </p:cTn>
                               </p:par>
                               <p:par>
-                                <p:cTn id="57" presetID="10" presetClass="entr" presetSubtype="0" fill="hold" grpId="0" nodeType="withEffect">
+                                <p:cTn id="17" presetID="10" presetClass="entr" presetSubtype="0" fill="hold" nodeType="withEffect">
                                   <p:stCondLst>
                                     <p:cond delay="0"/>
                                   </p:stCondLst>
                                   <p:childTnLst>
                                     <p:set>
                                       <p:cBhvr>
-                                        <p:cTn id="58" dur="1" fill="hold">
+                                        <p:cTn id="18" dur="1" fill="hold">
                                           <p:stCondLst>
                                             <p:cond delay="0"/>
                                           </p:stCondLst>
@@ -15608,7 +15821,7 @@
                                     </p:set>
                                     <p:animEffect transition="in" filter="fade">
                                       <p:cBhvr>
-                                        <p:cTn id="59" dur="500"/>
+                                        <p:cTn id="19" dur="500"/>
                                         <p:tgtEl>
                                           <p:spTgt spid="20"/>
                                         </p:tgtEl>
@@ -15618,14 +15831,14 @@
                                 </p:cTn>
                               </p:par>
                               <p:par>
-                                <p:cTn id="60" presetID="10" presetClass="entr" presetSubtype="0" fill="hold" grpId="0" nodeType="withEffect">
+                                <p:cTn id="20" presetID="10" presetClass="entr" presetSubtype="0" fill="hold" nodeType="withEffect">
                                   <p:stCondLst>
                                     <p:cond delay="0"/>
                                   </p:stCondLst>
                                   <p:childTnLst>
                                     <p:set>
                                       <p:cBhvr>
-                                        <p:cTn id="61" dur="1" fill="hold">
+                                        <p:cTn id="21" dur="1" fill="hold">
                                           <p:stCondLst>
                                             <p:cond delay="0"/>
                                           </p:stCondLst>
@@ -15643,7 +15856,7 @@
                                     </p:set>
                                     <p:animEffect transition="in" filter="fade">
                                       <p:cBhvr>
-                                        <p:cTn id="62" dur="500"/>
+                                        <p:cTn id="22" dur="500"/>
                                         <p:tgtEl>
                                           <p:spTgt spid="21"/>
                                         </p:tgtEl>
@@ -15653,14 +15866,14 @@
                                 </p:cTn>
                               </p:par>
                               <p:par>
-                                <p:cTn id="63" presetID="10" presetClass="entr" presetSubtype="0" fill="hold" grpId="0" nodeType="withEffect">
+                                <p:cTn id="23" presetID="10" presetClass="entr" presetSubtype="0" fill="hold" nodeType="withEffect">
                                   <p:stCondLst>
                                     <p:cond delay="0"/>
                                   </p:stCondLst>
                                   <p:childTnLst>
                                     <p:set>
                                       <p:cBhvr>
-                                        <p:cTn id="64" dur="1" fill="hold">
+                                        <p:cTn id="24" dur="1" fill="hold">
                                           <p:stCondLst>
                                             <p:cond delay="0"/>
                                           </p:stCondLst>
@@ -15678,7 +15891,7 @@
                                     </p:set>
                                     <p:animEffect transition="in" filter="fade">
                                       <p:cBhvr>
-                                        <p:cTn id="65" dur="500"/>
+                                        <p:cTn id="25" dur="500"/>
                                         <p:tgtEl>
                                           <p:spTgt spid="22"/>
                                         </p:tgtEl>
@@ -15688,14 +15901,14 @@
                                 </p:cTn>
                               </p:par>
                               <p:par>
-                                <p:cTn id="66" presetID="10" presetClass="entr" presetSubtype="0" fill="hold" grpId="0" nodeType="withEffect">
+                                <p:cTn id="26" presetID="10" presetClass="entr" presetSubtype="0" fill="hold" nodeType="withEffect">
                                   <p:stCondLst>
                                     <p:cond delay="0"/>
                                   </p:stCondLst>
                                   <p:childTnLst>
                                     <p:set>
                                       <p:cBhvr>
-                                        <p:cTn id="67" dur="1" fill="hold">
+                                        <p:cTn id="27" dur="1" fill="hold">
                                           <p:stCondLst>
                                             <p:cond delay="0"/>
                                           </p:stCondLst>
@@ -15713,7 +15926,7 @@
                                     </p:set>
                                     <p:animEffect transition="in" filter="fade">
                                       <p:cBhvr>
-                                        <p:cTn id="68" dur="500"/>
+                                        <p:cTn id="28" dur="500"/>
                                         <p:tgtEl>
                                           <p:spTgt spid="23"/>
                                         </p:tgtEl>
@@ -15729,26 +15942,26 @@
                     </p:cTn>
                   </p:par>
                   <p:par>
-                    <p:cTn id="69" fill="hold">
+                    <p:cTn id="29" fill="hold">
                       <p:stCondLst>
                         <p:cond delay="indefinite"/>
                       </p:stCondLst>
                       <p:childTnLst>
                         <p:par>
-                          <p:cTn id="70" fill="hold">
+                          <p:cTn id="30" fill="hold">
                             <p:stCondLst>
                               <p:cond delay="0"/>
                             </p:stCondLst>
                             <p:childTnLst>
                               <p:par>
-                                <p:cTn id="71" presetID="10" presetClass="entr" presetSubtype="0" fill="hold" grpId="0" nodeType="clickEffect">
+                                <p:cTn id="31" presetID="10" presetClass="entr" presetSubtype="0" fill="hold" nodeType="clickEffect">
                                   <p:stCondLst>
                                     <p:cond delay="0"/>
                                   </p:stCondLst>
                                   <p:childTnLst>
                                     <p:set>
                                       <p:cBhvr>
-                                        <p:cTn id="72" dur="1" fill="hold">
+                                        <p:cTn id="32" dur="1" fill="hold">
                                           <p:stCondLst>
                                             <p:cond delay="0"/>
                                           </p:stCondLst>
@@ -15766,7 +15979,7 @@
                                     </p:set>
                                     <p:animEffect transition="in" filter="fade">
                                       <p:cBhvr>
-                                        <p:cTn id="73" dur="500"/>
+                                        <p:cTn id="33" dur="500"/>
                                         <p:tgtEl>
                                           <p:spTgt spid="24"/>
                                         </p:tgtEl>
@@ -15776,14 +15989,14 @@
                                 </p:cTn>
                               </p:par>
                               <p:par>
-                                <p:cTn id="74" presetID="10" presetClass="entr" presetSubtype="0" fill="hold" grpId="0" nodeType="withEffect">
+                                <p:cTn id="34" presetID="10" presetClass="entr" presetSubtype="0" fill="hold" nodeType="withEffect">
                                   <p:stCondLst>
                                     <p:cond delay="0"/>
                                   </p:stCondLst>
                                   <p:childTnLst>
                                     <p:set>
                                       <p:cBhvr>
-                                        <p:cTn id="75" dur="1" fill="hold">
+                                        <p:cTn id="35" dur="1" fill="hold">
                                           <p:stCondLst>
                                             <p:cond delay="0"/>
                                           </p:stCondLst>
@@ -15801,7 +16014,7 @@
                                     </p:set>
                                     <p:animEffect transition="in" filter="fade">
                                       <p:cBhvr>
-                                        <p:cTn id="76" dur="500"/>
+                                        <p:cTn id="36" dur="500"/>
                                         <p:tgtEl>
                                           <p:spTgt spid="25"/>
                                         </p:tgtEl>
@@ -15811,14 +16024,14 @@
                                 </p:cTn>
                               </p:par>
                               <p:par>
-                                <p:cTn id="77" presetID="10" presetClass="entr" presetSubtype="0" fill="hold" grpId="0" nodeType="withEffect">
+                                <p:cTn id="37" presetID="10" presetClass="entr" presetSubtype="0" fill="hold" nodeType="withEffect">
                                   <p:stCondLst>
                                     <p:cond delay="0"/>
                                   </p:stCondLst>
                                   <p:childTnLst>
                                     <p:set>
                                       <p:cBhvr>
-                                        <p:cTn id="78" dur="1" fill="hold">
+                                        <p:cTn id="38" dur="1" fill="hold">
                                           <p:stCondLst>
                                             <p:cond delay="0"/>
                                           </p:stCondLst>
@@ -15836,7 +16049,7 @@
                                     </p:set>
                                     <p:animEffect transition="in" filter="fade">
                                       <p:cBhvr>
-                                        <p:cTn id="79" dur="500"/>
+                                        <p:cTn id="39" dur="500"/>
                                         <p:tgtEl>
                                           <p:spTgt spid="26"/>
                                         </p:tgtEl>
@@ -15846,14 +16059,14 @@
                                 </p:cTn>
                               </p:par>
                               <p:par>
-                                <p:cTn id="80" presetID="10" presetClass="entr" presetSubtype="0" fill="hold" grpId="0" nodeType="withEffect">
+                                <p:cTn id="40" presetID="10" presetClass="entr" presetSubtype="0" fill="hold" nodeType="withEffect">
                                   <p:stCondLst>
                                     <p:cond delay="0"/>
                                   </p:stCondLst>
                                   <p:childTnLst>
                                     <p:set>
                                       <p:cBhvr>
-                                        <p:cTn id="81" dur="1" fill="hold">
+                                        <p:cTn id="41" dur="1" fill="hold">
                                           <p:stCondLst>
                                             <p:cond delay="0"/>
                                           </p:stCondLst>
@@ -15871,7 +16084,7 @@
                                     </p:set>
                                     <p:animEffect transition="in" filter="fade">
                                       <p:cBhvr>
-                                        <p:cTn id="82" dur="500"/>
+                                        <p:cTn id="42" dur="500"/>
                                         <p:tgtEl>
                                           <p:spTgt spid="27"/>
                                         </p:tgtEl>
@@ -15881,14 +16094,14 @@
                                 </p:cTn>
                               </p:par>
                               <p:par>
-                                <p:cTn id="83" presetID="10" presetClass="entr" presetSubtype="0" fill="hold" grpId="0" nodeType="withEffect">
+                                <p:cTn id="43" presetID="10" presetClass="entr" presetSubtype="0" fill="hold" nodeType="withEffect">
                                   <p:stCondLst>
                                     <p:cond delay="0"/>
                                   </p:stCondLst>
                                   <p:childTnLst>
                                     <p:set>
                                       <p:cBhvr>
-                                        <p:cTn id="84" dur="1" fill="hold">
+                                        <p:cTn id="44" dur="1" fill="hold">
                                           <p:stCondLst>
                                             <p:cond delay="0"/>
                                           </p:stCondLst>
@@ -15906,7 +16119,7 @@
                                     </p:set>
                                     <p:animEffect transition="in" filter="fade">
                                       <p:cBhvr>
-                                        <p:cTn id="85" dur="500"/>
+                                        <p:cTn id="45" dur="500"/>
                                         <p:tgtEl>
                                           <p:spTgt spid="28"/>
                                         </p:tgtEl>
@@ -15916,14 +16129,14 @@
                                 </p:cTn>
                               </p:par>
                               <p:par>
-                                <p:cTn id="86" presetID="10" presetClass="entr" presetSubtype="0" fill="hold" grpId="0" nodeType="withEffect">
+                                <p:cTn id="46" presetID="10" presetClass="entr" presetSubtype="0" fill="hold" nodeType="withEffect">
                                   <p:stCondLst>
                                     <p:cond delay="0"/>
                                   </p:stCondLst>
                                   <p:childTnLst>
                                     <p:set>
                                       <p:cBhvr>
-                                        <p:cTn id="87" dur="1" fill="hold">
+                                        <p:cTn id="47" dur="1" fill="hold">
                                           <p:stCondLst>
                                             <p:cond delay="0"/>
                                           </p:stCondLst>
@@ -15941,9 +16154,465 @@
                                     </p:set>
                                     <p:animEffect transition="in" filter="fade">
                                       <p:cBhvr>
+                                        <p:cTn id="48" dur="500"/>
+                                        <p:tgtEl>
+                                          <p:spTgt spid="29"/>
+                                        </p:tgtEl>
+                                      </p:cBhvr>
+                                    </p:animEffect>
+                                  </p:childTnLst>
+                                </p:cTn>
+                              </p:par>
+                            </p:childTnLst>
+                          </p:cTn>
+                        </p:par>
+                      </p:childTnLst>
+                    </p:cTn>
+                  </p:par>
+                  <p:par>
+                    <p:cTn id="49" fill="hold">
+                      <p:stCondLst>
+                        <p:cond delay="indefinite"/>
+                      </p:stCondLst>
+                      <p:childTnLst>
+                        <p:par>
+                          <p:cTn id="50" fill="hold">
+                            <p:stCondLst>
+                              <p:cond delay="0"/>
+                            </p:stCondLst>
+                            <p:childTnLst>
+                              <p:par>
+                                <p:cTn id="51" presetID="10" presetClass="entr" presetSubtype="0" fill="hold" nodeType="clickEffect">
+                                  <p:stCondLst>
+                                    <p:cond delay="0"/>
+                                  </p:stCondLst>
+                                  <p:childTnLst>
+                                    <p:set>
+                                      <p:cBhvr>
+                                        <p:cTn id="52" dur="1" fill="hold">
+                                          <p:stCondLst>
+                                            <p:cond delay="0"/>
+                                          </p:stCondLst>
+                                        </p:cTn>
+                                        <p:tgtEl>
+                                          <p:spTgt spid="30"/>
+                                        </p:tgtEl>
+                                        <p:attrNameLst>
+                                          <p:attrName>style.visibility</p:attrName>
+                                        </p:attrNameLst>
+                                      </p:cBhvr>
+                                      <p:to>
+                                        <p:strVal val="visible"/>
+                                      </p:to>
+                                    </p:set>
+                                    <p:animEffect transition="in" filter="fade">
+                                      <p:cBhvr>
+                                        <p:cTn id="53" dur="500"/>
+                                        <p:tgtEl>
+                                          <p:spTgt spid="30"/>
+                                        </p:tgtEl>
+                                      </p:cBhvr>
+                                    </p:animEffect>
+                                  </p:childTnLst>
+                                </p:cTn>
+                              </p:par>
+                            </p:childTnLst>
+                          </p:cTn>
+                        </p:par>
+                      </p:childTnLst>
+                    </p:cTn>
+                  </p:par>
+                  <p:par>
+                    <p:cTn id="54" fill="hold">
+                      <p:stCondLst>
+                        <p:cond delay="indefinite"/>
+                      </p:stCondLst>
+                      <p:childTnLst>
+                        <p:par>
+                          <p:cTn id="55" fill="hold">
+                            <p:stCondLst>
+                              <p:cond delay="0"/>
+                            </p:stCondLst>
+                            <p:childTnLst>
+                              <p:par>
+                                <p:cTn id="56" presetID="10" presetClass="entr" presetSubtype="0" fill="hold" nodeType="clickEffect">
+                                  <p:stCondLst>
+                                    <p:cond delay="0"/>
+                                  </p:stCondLst>
+                                  <p:childTnLst>
+                                    <p:set>
+                                      <p:cBhvr>
+                                        <p:cTn id="57" dur="1" fill="hold">
+                                          <p:stCondLst>
+                                            <p:cond delay="0"/>
+                                          </p:stCondLst>
+                                        </p:cTn>
+                                        <p:tgtEl>
+                                          <p:spTgt spid="94"/>
+                                        </p:tgtEl>
+                                        <p:attrNameLst>
+                                          <p:attrName>style.visibility</p:attrName>
+                                        </p:attrNameLst>
+                                      </p:cBhvr>
+                                      <p:to>
+                                        <p:strVal val="visible"/>
+                                      </p:to>
+                                    </p:set>
+                                    <p:animEffect transition="in" filter="fade">
+                                      <p:cBhvr>
+                                        <p:cTn id="58" dur="500"/>
+                                        <p:tgtEl>
+                                          <p:spTgt spid="94"/>
+                                        </p:tgtEl>
+                                      </p:cBhvr>
+                                    </p:animEffect>
+                                  </p:childTnLst>
+                                </p:cTn>
+                              </p:par>
+                              <p:par>
+                                <p:cTn id="59" presetID="10" presetClass="entr" presetSubtype="0" fill="hold" nodeType="withEffect">
+                                  <p:stCondLst>
+                                    <p:cond delay="0"/>
+                                  </p:stCondLst>
+                                  <p:childTnLst>
+                                    <p:set>
+                                      <p:cBhvr>
+                                        <p:cTn id="60" dur="1" fill="hold">
+                                          <p:stCondLst>
+                                            <p:cond delay="0"/>
+                                          </p:stCondLst>
+                                        </p:cTn>
+                                        <p:tgtEl>
+                                          <p:spTgt spid="95"/>
+                                        </p:tgtEl>
+                                        <p:attrNameLst>
+                                          <p:attrName>style.visibility</p:attrName>
+                                        </p:attrNameLst>
+                                      </p:cBhvr>
+                                      <p:to>
+                                        <p:strVal val="visible"/>
+                                      </p:to>
+                                    </p:set>
+                                    <p:animEffect transition="in" filter="fade">
+                                      <p:cBhvr>
+                                        <p:cTn id="61" dur="500"/>
+                                        <p:tgtEl>
+                                          <p:spTgt spid="95"/>
+                                        </p:tgtEl>
+                                      </p:cBhvr>
+                                    </p:animEffect>
+                                  </p:childTnLst>
+                                </p:cTn>
+                              </p:par>
+                              <p:par>
+                                <p:cTn id="62" presetID="10" presetClass="entr" presetSubtype="0" fill="hold" nodeType="withEffect">
+                                  <p:stCondLst>
+                                    <p:cond delay="0"/>
+                                  </p:stCondLst>
+                                  <p:childTnLst>
+                                    <p:set>
+                                      <p:cBhvr>
+                                        <p:cTn id="63" dur="1" fill="hold">
+                                          <p:stCondLst>
+                                            <p:cond delay="0"/>
+                                          </p:stCondLst>
+                                        </p:cTn>
+                                        <p:tgtEl>
+                                          <p:spTgt spid="96"/>
+                                        </p:tgtEl>
+                                        <p:attrNameLst>
+                                          <p:attrName>style.visibility</p:attrName>
+                                        </p:attrNameLst>
+                                      </p:cBhvr>
+                                      <p:to>
+                                        <p:strVal val="visible"/>
+                                      </p:to>
+                                    </p:set>
+                                    <p:animEffect transition="in" filter="fade">
+                                      <p:cBhvr>
+                                        <p:cTn id="64" dur="500"/>
+                                        <p:tgtEl>
+                                          <p:spTgt spid="96"/>
+                                        </p:tgtEl>
+                                      </p:cBhvr>
+                                    </p:animEffect>
+                                  </p:childTnLst>
+                                </p:cTn>
+                              </p:par>
+                              <p:par>
+                                <p:cTn id="65" presetID="10" presetClass="entr" presetSubtype="0" fill="hold" nodeType="withEffect">
+                                  <p:stCondLst>
+                                    <p:cond delay="0"/>
+                                  </p:stCondLst>
+                                  <p:childTnLst>
+                                    <p:set>
+                                      <p:cBhvr>
+                                        <p:cTn id="66" dur="1" fill="hold">
+                                          <p:stCondLst>
+                                            <p:cond delay="0"/>
+                                          </p:stCondLst>
+                                        </p:cTn>
+                                        <p:tgtEl>
+                                          <p:spTgt spid="97"/>
+                                        </p:tgtEl>
+                                        <p:attrNameLst>
+                                          <p:attrName>style.visibility</p:attrName>
+                                        </p:attrNameLst>
+                                      </p:cBhvr>
+                                      <p:to>
+                                        <p:strVal val="visible"/>
+                                      </p:to>
+                                    </p:set>
+                                    <p:animEffect transition="in" filter="fade">
+                                      <p:cBhvr>
+                                        <p:cTn id="67" dur="500"/>
+                                        <p:tgtEl>
+                                          <p:spTgt spid="97"/>
+                                        </p:tgtEl>
+                                      </p:cBhvr>
+                                    </p:animEffect>
+                                  </p:childTnLst>
+                                </p:cTn>
+                              </p:par>
+                              <p:par>
+                                <p:cTn id="68" presetID="10" presetClass="entr" presetSubtype="0" fill="hold" nodeType="withEffect">
+                                  <p:stCondLst>
+                                    <p:cond delay="0"/>
+                                  </p:stCondLst>
+                                  <p:childTnLst>
+                                    <p:set>
+                                      <p:cBhvr>
+                                        <p:cTn id="69" dur="1" fill="hold">
+                                          <p:stCondLst>
+                                            <p:cond delay="0"/>
+                                          </p:stCondLst>
+                                        </p:cTn>
+                                        <p:tgtEl>
+                                          <p:spTgt spid="98"/>
+                                        </p:tgtEl>
+                                        <p:attrNameLst>
+                                          <p:attrName>style.visibility</p:attrName>
+                                        </p:attrNameLst>
+                                      </p:cBhvr>
+                                      <p:to>
+                                        <p:strVal val="visible"/>
+                                      </p:to>
+                                    </p:set>
+                                    <p:animEffect transition="in" filter="fade">
+                                      <p:cBhvr>
+                                        <p:cTn id="70" dur="500"/>
+                                        <p:tgtEl>
+                                          <p:spTgt spid="98"/>
+                                        </p:tgtEl>
+                                      </p:cBhvr>
+                                    </p:animEffect>
+                                  </p:childTnLst>
+                                </p:cTn>
+                              </p:par>
+                              <p:par>
+                                <p:cTn id="71" presetID="10" presetClass="entr" presetSubtype="0" fill="hold" nodeType="withEffect">
+                                  <p:stCondLst>
+                                    <p:cond delay="0"/>
+                                  </p:stCondLst>
+                                  <p:childTnLst>
+                                    <p:set>
+                                      <p:cBhvr>
+                                        <p:cTn id="72" dur="1" fill="hold">
+                                          <p:stCondLst>
+                                            <p:cond delay="0"/>
+                                          </p:stCondLst>
+                                        </p:cTn>
+                                        <p:tgtEl>
+                                          <p:spTgt spid="99"/>
+                                        </p:tgtEl>
+                                        <p:attrNameLst>
+                                          <p:attrName>style.visibility</p:attrName>
+                                        </p:attrNameLst>
+                                      </p:cBhvr>
+                                      <p:to>
+                                        <p:strVal val="visible"/>
+                                      </p:to>
+                                    </p:set>
+                                    <p:animEffect transition="in" filter="fade">
+                                      <p:cBhvr>
+                                        <p:cTn id="73" dur="500"/>
+                                        <p:tgtEl>
+                                          <p:spTgt spid="99"/>
+                                        </p:tgtEl>
+                                      </p:cBhvr>
+                                    </p:animEffect>
+                                  </p:childTnLst>
+                                </p:cTn>
+                              </p:par>
+                              <p:par>
+                                <p:cTn id="74" presetID="10" presetClass="entr" presetSubtype="0" fill="hold" nodeType="withEffect">
+                                  <p:stCondLst>
+                                    <p:cond delay="0"/>
+                                  </p:stCondLst>
+                                  <p:childTnLst>
+                                    <p:set>
+                                      <p:cBhvr>
+                                        <p:cTn id="75" dur="1" fill="hold">
+                                          <p:stCondLst>
+                                            <p:cond delay="0"/>
+                                          </p:stCondLst>
+                                        </p:cTn>
+                                        <p:tgtEl>
+                                          <p:spTgt spid="100"/>
+                                        </p:tgtEl>
+                                        <p:attrNameLst>
+                                          <p:attrName>style.visibility</p:attrName>
+                                        </p:attrNameLst>
+                                      </p:cBhvr>
+                                      <p:to>
+                                        <p:strVal val="visible"/>
+                                      </p:to>
+                                    </p:set>
+                                    <p:animEffect transition="in" filter="fade">
+                                      <p:cBhvr>
+                                        <p:cTn id="76" dur="500"/>
+                                        <p:tgtEl>
+                                          <p:spTgt spid="100"/>
+                                        </p:tgtEl>
+                                      </p:cBhvr>
+                                    </p:animEffect>
+                                  </p:childTnLst>
+                                </p:cTn>
+                              </p:par>
+                              <p:par>
+                                <p:cTn id="77" presetID="10" presetClass="entr" presetSubtype="0" fill="hold" nodeType="withEffect">
+                                  <p:stCondLst>
+                                    <p:cond delay="0"/>
+                                  </p:stCondLst>
+                                  <p:childTnLst>
+                                    <p:set>
+                                      <p:cBhvr>
+                                        <p:cTn id="78" dur="1" fill="hold">
+                                          <p:stCondLst>
+                                            <p:cond delay="0"/>
+                                          </p:stCondLst>
+                                        </p:cTn>
+                                        <p:tgtEl>
+                                          <p:spTgt spid="101"/>
+                                        </p:tgtEl>
+                                        <p:attrNameLst>
+                                          <p:attrName>style.visibility</p:attrName>
+                                        </p:attrNameLst>
+                                      </p:cBhvr>
+                                      <p:to>
+                                        <p:strVal val="visible"/>
+                                      </p:to>
+                                    </p:set>
+                                    <p:animEffect transition="in" filter="fade">
+                                      <p:cBhvr>
+                                        <p:cTn id="79" dur="500"/>
+                                        <p:tgtEl>
+                                          <p:spTgt spid="101"/>
+                                        </p:tgtEl>
+                                      </p:cBhvr>
+                                    </p:animEffect>
+                                  </p:childTnLst>
+                                </p:cTn>
+                              </p:par>
+                              <p:par>
+                                <p:cTn id="80" presetID="10" presetClass="entr" presetSubtype="0" fill="hold" nodeType="withEffect">
+                                  <p:stCondLst>
+                                    <p:cond delay="0"/>
+                                  </p:stCondLst>
+                                  <p:childTnLst>
+                                    <p:set>
+                                      <p:cBhvr>
+                                        <p:cTn id="81" dur="1" fill="hold">
+                                          <p:stCondLst>
+                                            <p:cond delay="0"/>
+                                          </p:stCondLst>
+                                        </p:cTn>
+                                        <p:tgtEl>
+                                          <p:spTgt spid="102"/>
+                                        </p:tgtEl>
+                                        <p:attrNameLst>
+                                          <p:attrName>style.visibility</p:attrName>
+                                        </p:attrNameLst>
+                                      </p:cBhvr>
+                                      <p:to>
+                                        <p:strVal val="visible"/>
+                                      </p:to>
+                                    </p:set>
+                                    <p:animEffect transition="in" filter="fade">
+                                      <p:cBhvr>
+                                        <p:cTn id="82" dur="500"/>
+                                        <p:tgtEl>
+                                          <p:spTgt spid="102"/>
+                                        </p:tgtEl>
+                                      </p:cBhvr>
+                                    </p:animEffect>
+                                  </p:childTnLst>
+                                </p:cTn>
+                              </p:par>
+                              <p:par>
+                                <p:cTn id="83" presetID="10" presetClass="entr" presetSubtype="0" fill="hold" nodeType="withEffect">
+                                  <p:stCondLst>
+                                    <p:cond delay="0"/>
+                                  </p:stCondLst>
+                                  <p:childTnLst>
+                                    <p:set>
+                                      <p:cBhvr>
+                                        <p:cTn id="84" dur="1" fill="hold">
+                                          <p:stCondLst>
+                                            <p:cond delay="0"/>
+                                          </p:stCondLst>
+                                        </p:cTn>
+                                        <p:tgtEl>
+                                          <p:spTgt spid="103"/>
+                                        </p:tgtEl>
+                                        <p:attrNameLst>
+                                          <p:attrName>style.visibility</p:attrName>
+                                        </p:attrNameLst>
+                                      </p:cBhvr>
+                                      <p:to>
+                                        <p:strVal val="visible"/>
+                                      </p:to>
+                                    </p:set>
+                                    <p:animEffect transition="in" filter="fade">
+                                      <p:cBhvr>
+                                        <p:cTn id="85" dur="500"/>
+                                        <p:tgtEl>
+                                          <p:spTgt spid="103"/>
+                                        </p:tgtEl>
+                                      </p:cBhvr>
+                                    </p:animEffect>
+                                  </p:childTnLst>
+                                </p:cTn>
+                              </p:par>
+                              <p:par>
+                                <p:cTn id="86" presetID="10" presetClass="entr" presetSubtype="0" fill="hold" nodeType="withEffect">
+                                  <p:stCondLst>
+                                    <p:cond delay="0"/>
+                                  </p:stCondLst>
+                                  <p:childTnLst>
+                                    <p:set>
+                                      <p:cBhvr>
+                                        <p:cTn id="87" dur="1" fill="hold">
+                                          <p:stCondLst>
+                                            <p:cond delay="0"/>
+                                          </p:stCondLst>
+                                        </p:cTn>
+                                        <p:tgtEl>
+                                          <p:spTgt spid="104"/>
+                                        </p:tgtEl>
+                                        <p:attrNameLst>
+                                          <p:attrName>style.visibility</p:attrName>
+                                        </p:attrNameLst>
+                                      </p:cBhvr>
+                                      <p:to>
+                                        <p:strVal val="visible"/>
+                                      </p:to>
+                                    </p:set>
+                                    <p:animEffect transition="in" filter="fade">
+                                      <p:cBhvr>
                                         <p:cTn id="88" dur="500"/>
                                         <p:tgtEl>
-                                          <p:spTgt spid="29"/>
+                                          <p:spTgt spid="104"/>
                                         </p:tgtEl>
                                       </p:cBhvr>
                                     </p:animEffect>
@@ -15969,7 +16638,7 @@
                             </p:stCondLst>
                             <p:childTnLst>
                               <p:par>
-                                <p:cTn id="91" presetID="10" presetClass="entr" presetSubtype="0" fill="hold" grpId="0" nodeType="clickEffect">
+                                <p:cTn id="91" presetID="10" presetClass="entr" presetSubtype="0" fill="hold" nodeType="clickEffect">
                                   <p:stCondLst>
                                     <p:cond delay="0"/>
                                   </p:stCondLst>
@@ -15977,462 +16646,6 @@
                                     <p:set>
                                       <p:cBhvr>
                                         <p:cTn id="92" dur="1" fill="hold">
-                                          <p:stCondLst>
-                                            <p:cond delay="0"/>
-                                          </p:stCondLst>
-                                        </p:cTn>
-                                        <p:tgtEl>
-                                          <p:spTgt spid="30"/>
-                                        </p:tgtEl>
-                                        <p:attrNameLst>
-                                          <p:attrName>style.visibility</p:attrName>
-                                        </p:attrNameLst>
-                                      </p:cBhvr>
-                                      <p:to>
-                                        <p:strVal val="visible"/>
-                                      </p:to>
-                                    </p:set>
-                                    <p:animEffect transition="in" filter="fade">
-                                      <p:cBhvr>
-                                        <p:cTn id="93" dur="500"/>
-                                        <p:tgtEl>
-                                          <p:spTgt spid="30"/>
-                                        </p:tgtEl>
-                                      </p:cBhvr>
-                                    </p:animEffect>
-                                  </p:childTnLst>
-                                </p:cTn>
-                              </p:par>
-                            </p:childTnLst>
-                          </p:cTn>
-                        </p:par>
-                      </p:childTnLst>
-                    </p:cTn>
-                  </p:par>
-                  <p:par>
-                    <p:cTn id="3" fill="hold">
-                      <p:stCondLst>
-                        <p:cond delay="indefinite"/>
-                      </p:stCondLst>
-                      <p:childTnLst>
-                        <p:par>
-                          <p:cTn id="4" fill="hold">
-                            <p:stCondLst>
-                              <p:cond delay="0"/>
-                            </p:stCondLst>
-                            <p:childTnLst>
-                              <p:par>
-                                <p:cTn id="5" presetID="10" presetClass="entr" presetSubtype="0" fill="hold" grpId="0" nodeType="clickEffect">
-                                  <p:stCondLst>
-                                    <p:cond delay="0"/>
-                                  </p:stCondLst>
-                                  <p:childTnLst>
-                                    <p:set>
-                                      <p:cBhvr>
-                                        <p:cTn id="6" dur="1" fill="hold">
-                                          <p:stCondLst>
-                                            <p:cond delay="0"/>
-                                          </p:stCondLst>
-                                        </p:cTn>
-                                        <p:tgtEl>
-                                          <p:spTgt spid="94"/>
-                                        </p:tgtEl>
-                                        <p:attrNameLst>
-                                          <p:attrName>style.visibility</p:attrName>
-                                        </p:attrNameLst>
-                                      </p:cBhvr>
-                                      <p:to>
-                                        <p:strVal val="visible"/>
-                                      </p:to>
-                                    </p:set>
-                                    <p:animEffect transition="in" filter="fade">
-                                      <p:cBhvr>
-                                        <p:cTn id="7" dur="500"/>
-                                        <p:tgtEl>
-                                          <p:spTgt spid="94"/>
-                                        </p:tgtEl>
-                                      </p:cBhvr>
-                                    </p:animEffect>
-                                  </p:childTnLst>
-                                </p:cTn>
-                              </p:par>
-                              <p:par>
-                                <p:cTn id="8" presetID="10" presetClass="entr" presetSubtype="0" fill="hold" grpId="0" nodeType="withEffect">
-                                  <p:stCondLst>
-                                    <p:cond delay="0"/>
-                                  </p:stCondLst>
-                                  <p:childTnLst>
-                                    <p:set>
-                                      <p:cBhvr>
-                                        <p:cTn id="9" dur="1" fill="hold">
-                                          <p:stCondLst>
-                                            <p:cond delay="0"/>
-                                          </p:stCondLst>
-                                        </p:cTn>
-                                        <p:tgtEl>
-                                          <p:spTgt spid="95"/>
-                                        </p:tgtEl>
-                                        <p:attrNameLst>
-                                          <p:attrName>style.visibility</p:attrName>
-                                        </p:attrNameLst>
-                                      </p:cBhvr>
-                                      <p:to>
-                                        <p:strVal val="visible"/>
-                                      </p:to>
-                                    </p:set>
-                                    <p:animEffect transition="in" filter="fade">
-                                      <p:cBhvr>
-                                        <p:cTn id="10" dur="500"/>
-                                        <p:tgtEl>
-                                          <p:spTgt spid="95"/>
-                                        </p:tgtEl>
-                                      </p:cBhvr>
-                                    </p:animEffect>
-                                  </p:childTnLst>
-                                </p:cTn>
-                              </p:par>
-                              <p:par>
-                                <p:cTn id="11" presetID="10" presetClass="entr" presetSubtype="0" fill="hold" grpId="0" nodeType="withEffect">
-                                  <p:stCondLst>
-                                    <p:cond delay="0"/>
-                                  </p:stCondLst>
-                                  <p:childTnLst>
-                                    <p:set>
-                                      <p:cBhvr>
-                                        <p:cTn id="12" dur="1" fill="hold">
-                                          <p:stCondLst>
-                                            <p:cond delay="0"/>
-                                          </p:stCondLst>
-                                        </p:cTn>
-                                        <p:tgtEl>
-                                          <p:spTgt spid="96"/>
-                                        </p:tgtEl>
-                                        <p:attrNameLst>
-                                          <p:attrName>style.visibility</p:attrName>
-                                        </p:attrNameLst>
-                                      </p:cBhvr>
-                                      <p:to>
-                                        <p:strVal val="visible"/>
-                                      </p:to>
-                                    </p:set>
-                                    <p:animEffect transition="in" filter="fade">
-                                      <p:cBhvr>
-                                        <p:cTn id="13" dur="500"/>
-                                        <p:tgtEl>
-                                          <p:spTgt spid="96"/>
-                                        </p:tgtEl>
-                                      </p:cBhvr>
-                                    </p:animEffect>
-                                  </p:childTnLst>
-                                </p:cTn>
-                              </p:par>
-                              <p:par>
-                                <p:cTn id="14" presetID="10" presetClass="entr" presetSubtype="0" fill="hold" grpId="0" nodeType="withEffect">
-                                  <p:stCondLst>
-                                    <p:cond delay="0"/>
-                                  </p:stCondLst>
-                                  <p:childTnLst>
-                                    <p:set>
-                                      <p:cBhvr>
-                                        <p:cTn id="15" dur="1" fill="hold">
-                                          <p:stCondLst>
-                                            <p:cond delay="0"/>
-                                          </p:stCondLst>
-                                        </p:cTn>
-                                        <p:tgtEl>
-                                          <p:spTgt spid="97"/>
-                                        </p:tgtEl>
-                                        <p:attrNameLst>
-                                          <p:attrName>style.visibility</p:attrName>
-                                        </p:attrNameLst>
-                                      </p:cBhvr>
-                                      <p:to>
-                                        <p:strVal val="visible"/>
-                                      </p:to>
-                                    </p:set>
-                                    <p:animEffect transition="in" filter="fade">
-                                      <p:cBhvr>
-                                        <p:cTn id="16" dur="500"/>
-                                        <p:tgtEl>
-                                          <p:spTgt spid="97"/>
-                                        </p:tgtEl>
-                                      </p:cBhvr>
-                                    </p:animEffect>
-                                  </p:childTnLst>
-                                </p:cTn>
-                              </p:par>
-                              <p:par>
-                                <p:cTn id="17" presetID="10" presetClass="entr" presetSubtype="0" fill="hold" grpId="0" nodeType="withEffect">
-                                  <p:stCondLst>
-                                    <p:cond delay="0"/>
-                                  </p:stCondLst>
-                                  <p:childTnLst>
-                                    <p:set>
-                                      <p:cBhvr>
-                                        <p:cTn id="18" dur="1" fill="hold">
-                                          <p:stCondLst>
-                                            <p:cond delay="0"/>
-                                          </p:stCondLst>
-                                        </p:cTn>
-                                        <p:tgtEl>
-                                          <p:spTgt spid="98"/>
-                                        </p:tgtEl>
-                                        <p:attrNameLst>
-                                          <p:attrName>style.visibility</p:attrName>
-                                        </p:attrNameLst>
-                                      </p:cBhvr>
-                                      <p:to>
-                                        <p:strVal val="visible"/>
-                                      </p:to>
-                                    </p:set>
-                                    <p:animEffect transition="in" filter="fade">
-                                      <p:cBhvr>
-                                        <p:cTn id="19" dur="500"/>
-                                        <p:tgtEl>
-                                          <p:spTgt spid="98"/>
-                                        </p:tgtEl>
-                                      </p:cBhvr>
-                                    </p:animEffect>
-                                  </p:childTnLst>
-                                </p:cTn>
-                              </p:par>
-                              <p:par>
-                                <p:cTn id="20" presetID="10" presetClass="entr" presetSubtype="0" fill="hold" grpId="0" nodeType="withEffect">
-                                  <p:stCondLst>
-                                    <p:cond delay="0"/>
-                                  </p:stCondLst>
-                                  <p:childTnLst>
-                                    <p:set>
-                                      <p:cBhvr>
-                                        <p:cTn id="21" dur="1" fill="hold">
-                                          <p:stCondLst>
-                                            <p:cond delay="0"/>
-                                          </p:stCondLst>
-                                        </p:cTn>
-                                        <p:tgtEl>
-                                          <p:spTgt spid="99"/>
-                                        </p:tgtEl>
-                                        <p:attrNameLst>
-                                          <p:attrName>style.visibility</p:attrName>
-                                        </p:attrNameLst>
-                                      </p:cBhvr>
-                                      <p:to>
-                                        <p:strVal val="visible"/>
-                                      </p:to>
-                                    </p:set>
-                                    <p:animEffect transition="in" filter="fade">
-                                      <p:cBhvr>
-                                        <p:cTn id="22" dur="500"/>
-                                        <p:tgtEl>
-                                          <p:spTgt spid="99"/>
-                                        </p:tgtEl>
-                                      </p:cBhvr>
-                                    </p:animEffect>
-                                  </p:childTnLst>
-                                </p:cTn>
-                              </p:par>
-                              <p:par>
-                                <p:cTn id="23" presetID="10" presetClass="entr" presetSubtype="0" fill="hold" grpId="0" nodeType="withEffect">
-                                  <p:stCondLst>
-                                    <p:cond delay="0"/>
-                                  </p:stCondLst>
-                                  <p:childTnLst>
-                                    <p:set>
-                                      <p:cBhvr>
-                                        <p:cTn id="24" dur="1" fill="hold">
-                                          <p:stCondLst>
-                                            <p:cond delay="0"/>
-                                          </p:stCondLst>
-                                        </p:cTn>
-                                        <p:tgtEl>
-                                          <p:spTgt spid="100"/>
-                                        </p:tgtEl>
-                                        <p:attrNameLst>
-                                          <p:attrName>style.visibility</p:attrName>
-                                        </p:attrNameLst>
-                                      </p:cBhvr>
-                                      <p:to>
-                                        <p:strVal val="visible"/>
-                                      </p:to>
-                                    </p:set>
-                                    <p:animEffect transition="in" filter="fade">
-                                      <p:cBhvr>
-                                        <p:cTn id="25" dur="500"/>
-                                        <p:tgtEl>
-                                          <p:spTgt spid="100"/>
-                                        </p:tgtEl>
-                                      </p:cBhvr>
-                                    </p:animEffect>
-                                  </p:childTnLst>
-                                </p:cTn>
-                              </p:par>
-                              <p:par>
-                                <p:cTn id="26" presetID="10" presetClass="entr" presetSubtype="0" fill="hold" grpId="0" nodeType="withEffect">
-                                  <p:stCondLst>
-                                    <p:cond delay="0"/>
-                                  </p:stCondLst>
-                                  <p:childTnLst>
-                                    <p:set>
-                                      <p:cBhvr>
-                                        <p:cTn id="27" dur="1" fill="hold">
-                                          <p:stCondLst>
-                                            <p:cond delay="0"/>
-                                          </p:stCondLst>
-                                        </p:cTn>
-                                        <p:tgtEl>
-                                          <p:spTgt spid="101"/>
-                                        </p:tgtEl>
-                                        <p:attrNameLst>
-                                          <p:attrName>style.visibility</p:attrName>
-                                        </p:attrNameLst>
-                                      </p:cBhvr>
-                                      <p:to>
-                                        <p:strVal val="visible"/>
-                                      </p:to>
-                                    </p:set>
-                                    <p:animEffect transition="in" filter="fade">
-                                      <p:cBhvr>
-                                        <p:cTn id="28" dur="500"/>
-                                        <p:tgtEl>
-                                          <p:spTgt spid="101"/>
-                                        </p:tgtEl>
-                                      </p:cBhvr>
-                                    </p:animEffect>
-                                  </p:childTnLst>
-                                </p:cTn>
-                              </p:par>
-                              <p:par>
-                                <p:cTn id="29" presetID="10" presetClass="entr" presetSubtype="0" fill="hold" grpId="0" nodeType="withEffect">
-                                  <p:stCondLst>
-                                    <p:cond delay="0"/>
-                                  </p:stCondLst>
-                                  <p:childTnLst>
-                                    <p:set>
-                                      <p:cBhvr>
-                                        <p:cTn id="30" dur="1" fill="hold">
-                                          <p:stCondLst>
-                                            <p:cond delay="0"/>
-                                          </p:stCondLst>
-                                        </p:cTn>
-                                        <p:tgtEl>
-                                          <p:spTgt spid="102"/>
-                                        </p:tgtEl>
-                                        <p:attrNameLst>
-                                          <p:attrName>style.visibility</p:attrName>
-                                        </p:attrNameLst>
-                                      </p:cBhvr>
-                                      <p:to>
-                                        <p:strVal val="visible"/>
-                                      </p:to>
-                                    </p:set>
-                                    <p:animEffect transition="in" filter="fade">
-                                      <p:cBhvr>
-                                        <p:cTn id="31" dur="500"/>
-                                        <p:tgtEl>
-                                          <p:spTgt spid="102"/>
-                                        </p:tgtEl>
-                                      </p:cBhvr>
-                                    </p:animEffect>
-                                  </p:childTnLst>
-                                </p:cTn>
-                              </p:par>
-                              <p:par>
-                                <p:cTn id="32" presetID="10" presetClass="entr" presetSubtype="0" fill="hold" grpId="0" nodeType="withEffect">
-                                  <p:stCondLst>
-                                    <p:cond delay="0"/>
-                                  </p:stCondLst>
-                                  <p:childTnLst>
-                                    <p:set>
-                                      <p:cBhvr>
-                                        <p:cTn id="33" dur="1" fill="hold">
-                                          <p:stCondLst>
-                                            <p:cond delay="0"/>
-                                          </p:stCondLst>
-                                        </p:cTn>
-                                        <p:tgtEl>
-                                          <p:spTgt spid="103"/>
-                                        </p:tgtEl>
-                                        <p:attrNameLst>
-                                          <p:attrName>style.visibility</p:attrName>
-                                        </p:attrNameLst>
-                                      </p:cBhvr>
-                                      <p:to>
-                                        <p:strVal val="visible"/>
-                                      </p:to>
-                                    </p:set>
-                                    <p:animEffect transition="in" filter="fade">
-                                      <p:cBhvr>
-                                        <p:cTn id="34" dur="500"/>
-                                        <p:tgtEl>
-                                          <p:spTgt spid="103"/>
-                                        </p:tgtEl>
-                                      </p:cBhvr>
-                                    </p:animEffect>
-                                  </p:childTnLst>
-                                </p:cTn>
-                              </p:par>
-                              <p:par>
-                                <p:cTn id="35" presetID="10" presetClass="entr" presetSubtype="0" fill="hold" grpId="0" nodeType="withEffect">
-                                  <p:stCondLst>
-                                    <p:cond delay="0"/>
-                                  </p:stCondLst>
-                                  <p:childTnLst>
-                                    <p:set>
-                                      <p:cBhvr>
-                                        <p:cTn id="36" dur="1" fill="hold">
-                                          <p:stCondLst>
-                                            <p:cond delay="0"/>
-                                          </p:stCondLst>
-                                        </p:cTn>
-                                        <p:tgtEl>
-                                          <p:spTgt spid="104"/>
-                                        </p:tgtEl>
-                                        <p:attrNameLst>
-                                          <p:attrName>style.visibility</p:attrName>
-                                        </p:attrNameLst>
-                                      </p:cBhvr>
-                                      <p:to>
-                                        <p:strVal val="visible"/>
-                                      </p:to>
-                                    </p:set>
-                                    <p:animEffect transition="in" filter="fade">
-                                      <p:cBhvr>
-                                        <p:cTn id="37" dur="500"/>
-                                        <p:tgtEl>
-                                          <p:spTgt spid="104"/>
-                                        </p:tgtEl>
-                                      </p:cBhvr>
-                                    </p:animEffect>
-                                  </p:childTnLst>
-                                </p:cTn>
-                              </p:par>
-                            </p:childTnLst>
-                          </p:cTn>
-                        </p:par>
-                      </p:childTnLst>
-                    </p:cTn>
-                  </p:par>
-                  <p:par>
-                    <p:cTn id="38" fill="hold">
-                      <p:stCondLst>
-                        <p:cond delay="indefinite"/>
-                      </p:stCondLst>
-                      <p:childTnLst>
-                        <p:par>
-                          <p:cTn id="39" fill="hold">
-                            <p:stCondLst>
-                              <p:cond delay="0"/>
-                            </p:stCondLst>
-                            <p:childTnLst>
-                              <p:par>
-                                <p:cTn id="40" presetID="10" presetClass="entr" presetSubtype="0" fill="hold" grpId="0" nodeType="clickEffect">
-                                  <p:stCondLst>
-                                    <p:cond delay="0"/>
-                                  </p:stCondLst>
-                                  <p:childTnLst>
-                                    <p:set>
-                                      <p:cBhvr>
-                                        <p:cTn id="41" dur="1" fill="hold">
                                           <p:stCondLst>
                                             <p:cond delay="0"/>
                                           </p:stCondLst>
@@ -16450,7 +16663,7 @@
                                     </p:set>
                                     <p:animEffect transition="in" filter="fade">
                                       <p:cBhvr>
-                                        <p:cTn id="42" dur="500"/>
+                                        <p:cTn id="93" dur="500"/>
                                         <p:tgtEl>
                                           <p:spTgt spid="15"/>
                                         </p:tgtEl>
@@ -16561,7 +16774,7 @@
           <a:p>
             <a:fld id="{B7EB45DA-9A0D-DC49-8E02-F30A5DDC21C3}" type="slidenum">
               <a:rPr lang="en-US" smtClean="0"/>
-              <a:t>27</a:t>
+              <a:t>26</a:t>
             </a:fld>
             <a:endParaRPr lang="en-US"/>
           </a:p>
@@ -16611,7 +16824,7 @@
                   <a:srgbClr val="5C4826"/>
                 </a:solidFill>
               </a:rPr>
-              <a:t xml:space="preserve"> against a bound of </a:t>
+              <a:t> against a bound of </a:t>
             </a:r>
             <a:r>
               <a:rPr lang="en-US" sz="2000" b="1" i="0" dirty="0">
@@ -17011,7 +17224,7 @@
           <a:p>
             <a:fld id="{B7EB45DA-9A0D-DC49-8E02-F30A5DDC21C3}" type="slidenum">
               <a:rPr lang="en-US" smtClean="0"/>
-              <a:t>28</a:t>
+              <a:t>27</a:t>
             </a:fld>
             <a:endParaRPr lang="en-US"/>
           </a:p>
@@ -17130,7 +17343,7 @@
           </a:fontRef>
         </p:style>
         <p:txBody>
-          <a:bodyPr rtlCol="0" anchor="ctr" wrap="square" lIns="27432" tIns="22860" rIns="27432" bIns="22860"/>
+          <a:bodyPr wrap="square" lIns="27432" tIns="22860" rIns="27432" bIns="22860" rtlCol="0" anchor="ctr"/>
           <a:lstStyle/>
           <a:p>
             <a:pPr algn="ctr"/>
@@ -17184,7 +17397,7 @@
           </a:fontRef>
         </p:style>
         <p:txBody>
-          <a:bodyPr rtlCol="0" anchor="ctr" wrap="square" lIns="27432" tIns="22860" rIns="27432" bIns="22860"/>
+          <a:bodyPr wrap="square" lIns="27432" tIns="22860" rIns="27432" bIns="22860" rtlCol="0" anchor="ctr"/>
           <a:lstStyle/>
           <a:p>
             <a:pPr algn="ctr"/>
@@ -17249,7 +17462,7 @@
           </a:fontRef>
         </p:style>
         <p:txBody>
-          <a:bodyPr rtlCol="0" anchor="ctr" wrap="square" lIns="27432" tIns="22860" rIns="27432" bIns="22860"/>
+          <a:bodyPr wrap="square" lIns="27432" tIns="22860" rIns="27432" bIns="22860" rtlCol="0" anchor="ctr"/>
           <a:lstStyle/>
           <a:p>
             <a:pPr algn="ctr"/>
@@ -17314,7 +17527,7 @@
           </a:fontRef>
         </p:style>
         <p:txBody>
-          <a:bodyPr rtlCol="0" anchor="ctr" wrap="square" lIns="27432" tIns="22860" rIns="27432" bIns="22860"/>
+          <a:bodyPr wrap="square" lIns="27432" tIns="22860" rIns="27432" bIns="22860" rtlCol="0" anchor="ctr"/>
           <a:lstStyle/>
           <a:p>
             <a:pPr algn="ctr"/>
@@ -17390,7 +17603,7 @@
           </a:fontRef>
         </p:style>
         <p:txBody>
-          <a:bodyPr rtlCol="0" anchor="ctr" wrap="square" lIns="27432" tIns="22860" rIns="27432" bIns="22860"/>
+          <a:bodyPr wrap="square" lIns="27432" tIns="22860" rIns="27432" bIns="22860" rtlCol="0" anchor="ctr"/>
           <a:lstStyle/>
           <a:p>
             <a:pPr algn="ctr"/>
@@ -17466,7 +17679,7 @@
           </a:fontRef>
         </p:style>
         <p:txBody>
-          <a:bodyPr rtlCol="0" anchor="ctr" wrap="square" lIns="27432" tIns="22860" rIns="27432" bIns="22860"/>
+          <a:bodyPr wrap="square" lIns="27432" tIns="22860" rIns="27432" bIns="22860" rtlCol="0" anchor="ctr"/>
           <a:lstStyle/>
           <a:p>
             <a:pPr algn="ctr"/>
@@ -17560,7 +17773,7 @@
           <a:p>
             <a:fld id="{B7EB45DA-9A0D-DC49-8E02-F30A5DDC21C3}" type="slidenum">
               <a:rPr lang="en-US" smtClean="0"/>
-              <a:t>29</a:t>
+              <a:t>28</a:t>
             </a:fld>
             <a:endParaRPr lang="en-US"/>
           </a:p>
@@ -17788,7 +18001,7 @@
           </a:fontRef>
         </p:style>
         <p:txBody>
-          <a:bodyPr rtlCol="0" anchor="ctr" wrap="square" lIns="18288" tIns="18288" rIns="18288" bIns="18288"/>
+          <a:bodyPr wrap="square" lIns="18288" tIns="18288" rIns="18288" bIns="18288" rtlCol="0" anchor="ctr"/>
           <a:lstStyle/>
           <a:p>
             <a:pPr algn="ctr"/>
@@ -17879,7 +18092,7 @@
           </a:fontRef>
         </p:style>
         <p:txBody>
-          <a:bodyPr rtlCol="0" anchor="ctr" wrap="square" lIns="18288" tIns="18288" rIns="18288" bIns="18288"/>
+          <a:bodyPr wrap="square" lIns="18288" tIns="18288" rIns="18288" bIns="18288" rtlCol="0" anchor="ctr"/>
           <a:lstStyle/>
           <a:p>
             <a:pPr algn="ctr"/>
@@ -17970,7 +18183,7 @@
           </a:fontRef>
         </p:style>
         <p:txBody>
-          <a:bodyPr rtlCol="0" anchor="ctr" wrap="square" lIns="18288" tIns="18288" rIns="18288" bIns="18288"/>
+          <a:bodyPr wrap="square" lIns="18288" tIns="18288" rIns="18288" bIns="18288" rtlCol="0" anchor="ctr"/>
           <a:lstStyle/>
           <a:p>
             <a:pPr algn="ctr"/>
@@ -18061,7 +18274,7 @@
           </a:fontRef>
         </p:style>
         <p:txBody>
-          <a:bodyPr rtlCol="0" anchor="ctr" wrap="square" lIns="18288" tIns="18288" rIns="18288" bIns="18288"/>
+          <a:bodyPr wrap="square" lIns="18288" tIns="18288" rIns="18288" bIns="18288" rtlCol="0" anchor="ctr"/>
           <a:lstStyle/>
           <a:p>
             <a:pPr algn="ctr"/>
@@ -18152,7 +18365,7 @@
           </a:fontRef>
         </p:style>
         <p:txBody>
-          <a:bodyPr rtlCol="0" anchor="ctr" wrap="square" lIns="18288" tIns="18288" rIns="18288" bIns="18288"/>
+          <a:bodyPr wrap="square" lIns="18288" tIns="18288" rIns="18288" bIns="18288" rtlCol="0" anchor="ctr"/>
           <a:lstStyle/>
           <a:p>
             <a:pPr algn="ctr"/>
@@ -18243,7 +18456,7 @@
           </a:fontRef>
         </p:style>
         <p:txBody>
-          <a:bodyPr rtlCol="0" anchor="ctr" wrap="square" lIns="18288" tIns="18288" rIns="18288" bIns="18288"/>
+          <a:bodyPr wrap="square" lIns="18288" tIns="18288" rIns="18288" bIns="18288" rtlCol="0" anchor="ctr"/>
           <a:lstStyle/>
           <a:p>
             <a:pPr algn="ctr"/>
@@ -18334,7 +18547,7 @@
           </a:fontRef>
         </p:style>
         <p:txBody>
-          <a:bodyPr rtlCol="0" anchor="ctr" wrap="square" lIns="18288" tIns="18288" rIns="18288" bIns="18288"/>
+          <a:bodyPr wrap="square" lIns="18288" tIns="18288" rIns="18288" bIns="18288" rtlCol="0" anchor="ctr"/>
           <a:lstStyle/>
           <a:p>
             <a:pPr algn="ctr"/>
@@ -18582,7 +18795,7 @@
           <a:p>
             <a:fld id="{B7EB45DA-9A0D-DC49-8E02-F30A5DDC21C3}" type="slidenum">
               <a:rPr lang="en-US" smtClean="0"/>
-              <a:t>30</a:t>
+              <a:t>29</a:t>
             </a:fld>
             <a:endParaRPr lang="en-US"/>
           </a:p>
@@ -19484,7 +19697,7 @@
                   <a:srgbClr val="5C4826"/>
                 </a:solidFill>
               </a:rPr>
-              <a:t xml:space="preserve">A good engineering decision is the decision </a:t>
+              <a:t>A good engineering decision is the decision </a:t>
             </a:r>
             <a:r>
               <a:rPr lang="en-US" sz="2000" b="1" i="0" dirty="0">
@@ -19598,7 +19811,7 @@
                   <a:srgbClr val="9A9A9A"/>
                 </a:solidFill>
               </a:rPr>
-              <a:t xml:space="preserve">  ·  </a:t>
+              <a:t>  ·  </a:t>
             </a:r>
             <a:r>
               <a:rPr lang="en-US" sz="2000" b="1" i="0" dirty="0">
@@ -19614,7 +19827,7 @@
                   <a:srgbClr val="9A9A9A"/>
                 </a:solidFill>
               </a:rPr>
-              <a:t xml:space="preserve">  ·  </a:t>
+              <a:t>  ·  </a:t>
             </a:r>
             <a:r>
               <a:rPr lang="en-US" sz="2000" b="1" i="0" dirty="0">
@@ -19782,7 +19995,7 @@
                             </p:stCondLst>
                             <p:childTnLst>
                               <p:par>
-                                <p:cTn id="5" presetID="10" presetClass="entr" presetSubtype="0" fill="hold" grpId="0" nodeType="clickEffect">
+                                <p:cTn id="5" presetID="10" presetClass="entr" presetSubtype="0" fill="hold" nodeType="clickEffect">
                                   <p:stCondLst>
                                     <p:cond delay="0"/>
                                   </p:stCondLst>
@@ -19817,7 +20030,7 @@
                                 </p:cTn>
                               </p:par>
                               <p:par>
-                                <p:cTn id="8" presetID="10" presetClass="entr" presetSubtype="0" fill="hold" grpId="0" nodeType="withEffect">
+                                <p:cTn id="8" presetID="10" presetClass="entr" presetSubtype="0" fill="hold" nodeType="withEffect">
                                   <p:stCondLst>
                                     <p:cond delay="0"/>
                                   </p:stCondLst>
@@ -19852,7 +20065,7 @@
                                 </p:cTn>
                               </p:par>
                               <p:par>
-                                <p:cTn id="11" presetID="10" presetClass="entr" presetSubtype="0" fill="hold" grpId="0" nodeType="withEffect">
+                                <p:cTn id="11" presetID="10" presetClass="entr" presetSubtype="0" fill="hold" nodeType="withEffect">
                                   <p:stCondLst>
                                     <p:cond delay="0"/>
                                   </p:stCondLst>
@@ -20025,7 +20238,7 @@
           <a:p>
             <a:fld id="{B7EB45DA-9A0D-DC49-8E02-F30A5DDC21C3}" type="slidenum">
               <a:rPr lang="en-US" smtClean="0"/>
-              <a:t>6</a:t>
+              <a:t>5</a:t>
             </a:fld>
             <a:endParaRPr lang="en-US"/>
           </a:p>
@@ -20139,7 +20352,7 @@
           <a:p>
             <a:fld id="{B7EB45DA-9A0D-DC49-8E02-F30A5DDC21C3}" type="slidenum">
               <a:rPr lang="en-US" smtClean="0"/>
-              <a:t>7</a:t>
+              <a:t>6</a:t>
             </a:fld>
             <a:endParaRPr lang="en-US"/>
           </a:p>
@@ -20584,7 +20797,7 @@
           <a:p>
             <a:fld id="{B7EB45DA-9A0D-DC49-8E02-F30A5DDC21C3}" type="slidenum">
               <a:rPr lang="en-US" smtClean="0"/>
-              <a:t>8</a:t>
+              <a:t>7</a:t>
             </a:fld>
             <a:endParaRPr lang="en-US"/>
           </a:p>
@@ -20629,7 +20842,7 @@
           </a:fontRef>
         </p:style>
         <p:txBody>
-          <a:bodyPr rtlCol="0" anchor="ctr" wrap="square" lIns="45720" tIns="22860" rIns="45720" bIns="22860"/>
+          <a:bodyPr wrap="square" lIns="45720" tIns="22860" rIns="45720" bIns="22860" rtlCol="0" anchor="ctr"/>
           <a:lstStyle/>
           <a:p>
             <a:pPr algn="ctr"/>
@@ -20717,7 +20930,7 @@
           </a:fontRef>
         </p:style>
         <p:txBody>
-          <a:bodyPr rtlCol="0" anchor="ctr" wrap="square" lIns="45720" tIns="22860" rIns="45720" bIns="22860"/>
+          <a:bodyPr wrap="square" lIns="45720" tIns="22860" rIns="45720" bIns="22860" rtlCol="0" anchor="ctr"/>
           <a:lstStyle/>
           <a:p>
             <a:pPr algn="ctr"/>
@@ -20842,7 +21055,7 @@
           </a:fontRef>
         </p:style>
         <p:txBody>
-          <a:bodyPr rtlCol="0" anchor="ctr" wrap="square" lIns="45720" tIns="22860" rIns="45720" bIns="22860"/>
+          <a:bodyPr wrap="square" lIns="45720" tIns="22860" rIns="45720" bIns="22860" rtlCol="0" anchor="ctr"/>
           <a:lstStyle/>
           <a:p>
             <a:pPr algn="ctr"/>
@@ -20978,7 +21191,7 @@
           </a:fontRef>
         </p:style>
         <p:txBody>
-          <a:bodyPr rtlCol="0" anchor="ctr" wrap="square" lIns="45720" tIns="22860" rIns="45720" bIns="22860"/>
+          <a:bodyPr wrap="square" lIns="45720" tIns="22860" rIns="45720" bIns="22860" rtlCol="0" anchor="ctr"/>
           <a:lstStyle/>
           <a:p>
             <a:pPr algn="ctr"/>
@@ -21103,7 +21316,7 @@
           </a:fontRef>
         </p:style>
         <p:txBody>
-          <a:bodyPr rtlCol="0" anchor="ctr" wrap="square" lIns="45720" tIns="22860" rIns="45720" bIns="22860"/>
+          <a:bodyPr wrap="square" lIns="45720" tIns="22860" rIns="45720" bIns="22860" rtlCol="0" anchor="ctr"/>
           <a:lstStyle/>
           <a:p>
             <a:pPr algn="ctr"/>
@@ -21228,7 +21441,7 @@
           </a:fontRef>
         </p:style>
         <p:txBody>
-          <a:bodyPr rtlCol="0" anchor="ctr" wrap="square" lIns="45720" tIns="22860" rIns="45720" bIns="22860"/>
+          <a:bodyPr wrap="square" lIns="45720" tIns="22860" rIns="45720" bIns="22860" rtlCol="0" anchor="ctr"/>
           <a:lstStyle/>
           <a:p>
             <a:pPr algn="ctr"/>
@@ -21351,7 +21564,7 @@
                             </p:stCondLst>
                             <p:childTnLst>
                               <p:par>
-                                <p:cTn id="5" presetID="10" presetClass="entr" presetSubtype="0" fill="hold" grpId="0" nodeType="clickEffect">
+                                <p:cTn id="5" presetID="10" presetClass="entr" presetSubtype="0" fill="hold" nodeType="clickEffect">
                                   <p:stCondLst>
                                     <p:cond delay="0"/>
                                   </p:stCondLst>
@@ -21386,7 +21599,7 @@
                                 </p:cTn>
                               </p:par>
                               <p:par>
-                                <p:cTn id="8" presetID="10" presetClass="entr" presetSubtype="0" fill="hold" grpId="0" nodeType="withEffect">
+                                <p:cTn id="8" presetID="10" presetClass="entr" presetSubtype="0" fill="hold" nodeType="withEffect">
                                   <p:stCondLst>
                                     <p:cond delay="0"/>
                                   </p:stCondLst>
@@ -21439,7 +21652,7 @@
                             </p:stCondLst>
                             <p:childTnLst>
                               <p:par>
-                                <p:cTn id="13" presetID="10" presetClass="entr" presetSubtype="0" fill="hold" grpId="0" nodeType="clickEffect">
+                                <p:cTn id="13" presetID="10" presetClass="entr" presetSubtype="0" fill="hold" nodeType="clickEffect">
                                   <p:stCondLst>
                                     <p:cond delay="0"/>
                                   </p:stCondLst>
@@ -21474,7 +21687,7 @@
                                 </p:cTn>
                               </p:par>
                               <p:par>
-                                <p:cTn id="16" presetID="10" presetClass="entr" presetSubtype="0" fill="hold" grpId="0" nodeType="withEffect">
+                                <p:cTn id="16" presetID="10" presetClass="entr" presetSubtype="0" fill="hold" nodeType="withEffect">
                                   <p:stCondLst>
                                     <p:cond delay="0"/>
                                   </p:stCondLst>
@@ -21509,7 +21722,7 @@
                                 </p:cTn>
                               </p:par>
                               <p:par>
-                                <p:cTn id="19" presetID="10" presetClass="entr" presetSubtype="0" fill="hold" grpId="0" nodeType="withEffect">
+                                <p:cTn id="19" presetID="10" presetClass="entr" presetSubtype="0" fill="hold" nodeType="withEffect">
                                   <p:stCondLst>
                                     <p:cond delay="0"/>
                                   </p:stCondLst>
@@ -21562,7 +21775,7 @@
                             </p:stCondLst>
                             <p:childTnLst>
                               <p:par>
-                                <p:cTn id="24" presetID="10" presetClass="entr" presetSubtype="0" fill="hold" grpId="0" nodeType="clickEffect">
+                                <p:cTn id="24" presetID="10" presetClass="entr" presetSubtype="0" fill="hold" nodeType="clickEffect">
                                   <p:stCondLst>
                                     <p:cond delay="0"/>
                                   </p:stCondLst>
@@ -21597,7 +21810,7 @@
                                 </p:cTn>
                               </p:par>
                               <p:par>
-                                <p:cTn id="27" presetID="10" presetClass="entr" presetSubtype="0" fill="hold" grpId="0" nodeType="withEffect">
+                                <p:cTn id="27" presetID="10" presetClass="entr" presetSubtype="0" fill="hold" nodeType="withEffect">
                                   <p:stCondLst>
                                     <p:cond delay="0"/>
                                   </p:stCondLst>
@@ -21632,7 +21845,7 @@
                                 </p:cTn>
                               </p:par>
                               <p:par>
-                                <p:cTn id="30" presetID="10" presetClass="entr" presetSubtype="0" fill="hold" grpId="0" nodeType="withEffect">
+                                <p:cTn id="30" presetID="10" presetClass="entr" presetSubtype="0" fill="hold" nodeType="withEffect">
                                   <p:stCondLst>
                                     <p:cond delay="0"/>
                                   </p:stCondLst>
@@ -21685,7 +21898,7 @@
                             </p:stCondLst>
                             <p:childTnLst>
                               <p:par>
-                                <p:cTn id="35" presetID="10" presetClass="entr" presetSubtype="0" fill="hold" grpId="0" nodeType="clickEffect">
+                                <p:cTn id="35" presetID="10" presetClass="entr" presetSubtype="0" fill="hold" nodeType="clickEffect">
                                   <p:stCondLst>
                                     <p:cond delay="0"/>
                                   </p:stCondLst>
@@ -21720,7 +21933,7 @@
                                 </p:cTn>
                               </p:par>
                               <p:par>
-                                <p:cTn id="38" presetID="10" presetClass="entr" presetSubtype="0" fill="hold" grpId="0" nodeType="withEffect">
+                                <p:cTn id="38" presetID="10" presetClass="entr" presetSubtype="0" fill="hold" nodeType="withEffect">
                                   <p:stCondLst>
                                     <p:cond delay="0"/>
                                   </p:stCondLst>
@@ -21755,7 +21968,7 @@
                                 </p:cTn>
                               </p:par>
                               <p:par>
-                                <p:cTn id="41" presetID="10" presetClass="entr" presetSubtype="0" fill="hold" grpId="0" nodeType="withEffect">
+                                <p:cTn id="41" presetID="10" presetClass="entr" presetSubtype="0" fill="hold" nodeType="withEffect">
                                   <p:stCondLst>
                                     <p:cond delay="0"/>
                                   </p:stCondLst>
@@ -21808,7 +22021,7 @@
                             </p:stCondLst>
                             <p:childTnLst>
                               <p:par>
-                                <p:cTn id="46" presetID="10" presetClass="entr" presetSubtype="0" fill="hold" grpId="0" nodeType="clickEffect">
+                                <p:cTn id="46" presetID="10" presetClass="entr" presetSubtype="0" fill="hold" nodeType="clickEffect">
                                   <p:stCondLst>
                                     <p:cond delay="0"/>
                                   </p:stCondLst>
@@ -21843,7 +22056,7 @@
                                 </p:cTn>
                               </p:par>
                               <p:par>
-                                <p:cTn id="49" presetID="10" presetClass="entr" presetSubtype="0" fill="hold" grpId="0" nodeType="withEffect">
+                                <p:cTn id="49" presetID="10" presetClass="entr" presetSubtype="0" fill="hold" nodeType="withEffect">
                                   <p:stCondLst>
                                     <p:cond delay="0"/>
                                   </p:stCondLst>
@@ -21878,7 +22091,7 @@
                                 </p:cTn>
                               </p:par>
                               <p:par>
-                                <p:cTn id="52" presetID="10" presetClass="entr" presetSubtype="0" fill="hold" grpId="0" nodeType="withEffect">
+                                <p:cTn id="52" presetID="10" presetClass="entr" presetSubtype="0" fill="hold" nodeType="withEffect">
                                   <p:stCondLst>
                                     <p:cond delay="0"/>
                                   </p:stCondLst>
@@ -21931,7 +22144,7 @@
                             </p:stCondLst>
                             <p:childTnLst>
                               <p:par>
-                                <p:cTn id="57" presetID="10" presetClass="entr" presetSubtype="0" fill="hold" grpId="0" nodeType="clickEffect">
+                                <p:cTn id="57" presetID="10" presetClass="entr" presetSubtype="0" fill="hold" nodeType="clickEffect">
                                   <p:stCondLst>
                                     <p:cond delay="0"/>
                                   </p:stCondLst>
@@ -21966,7 +22179,7 @@
                                 </p:cTn>
                               </p:par>
                               <p:par>
-                                <p:cTn id="60" presetID="10" presetClass="entr" presetSubtype="0" fill="hold" grpId="0" nodeType="withEffect">
+                                <p:cTn id="60" presetID="10" presetClass="entr" presetSubtype="0" fill="hold" nodeType="withEffect">
                                   <p:stCondLst>
                                     <p:cond delay="0"/>
                                   </p:stCondLst>
@@ -22001,7 +22214,7 @@
                                 </p:cTn>
                               </p:par>
                               <p:par>
-                                <p:cTn id="63" presetID="10" presetClass="entr" presetSubtype="0" fill="hold" grpId="0" nodeType="withEffect">
+                                <p:cTn id="63" presetID="10" presetClass="entr" presetSubtype="0" fill="hold" nodeType="withEffect">
                                   <p:stCondLst>
                                     <p:cond delay="0"/>
                                   </p:stCondLst>
@@ -22137,7 +22350,7 @@
           <a:p>
             <a:fld id="{B7EB45DA-9A0D-DC49-8E02-F30A5DDC21C3}" type="slidenum">
               <a:rPr lang="en-US" smtClean="0"/>
-              <a:t>9</a:t>
+              <a:t>8</a:t>
             </a:fld>
             <a:endParaRPr lang="en-US"/>
           </a:p>
@@ -22180,7 +22393,7 @@
           </a:fontRef>
         </p:style>
         <p:txBody>
-          <a:bodyPr rtlCol="0" anchor="ctr" wrap="square"/>
+          <a:bodyPr wrap="square" rtlCol="0" anchor="ctr"/>
           <a:lstStyle/>
           <a:p>
             <a:pPr algn="ctr"/>
@@ -22232,7 +22445,7 @@
           </a:fontRef>
         </p:style>
         <p:txBody>
-          <a:bodyPr rtlCol="0" anchor="ctr" wrap="square"/>
+          <a:bodyPr wrap="square" rtlCol="0" anchor="ctr"/>
           <a:lstStyle/>
           <a:p>
             <a:pPr algn="ctr"/>
@@ -22286,7 +22499,7 @@
           </a:fontRef>
         </p:style>
         <p:txBody>
-          <a:bodyPr rtlCol="0" anchor="ctr" wrap="square" lIns="45720" tIns="22860" rIns="45720" bIns="22860"/>
+          <a:bodyPr wrap="square" lIns="45720" tIns="22860" rIns="45720" bIns="22860" rtlCol="0" anchor="ctr"/>
           <a:lstStyle/>
           <a:p>
             <a:pPr algn="ctr"/>
@@ -22376,7 +22589,7 @@
           </a:fontRef>
         </p:style>
         <p:txBody>
-          <a:bodyPr rtlCol="0" anchor="ctr" wrap="square" lIns="45720" tIns="22860" rIns="45720" bIns="22860"/>
+          <a:bodyPr wrap="square" lIns="45720" tIns="22860" rIns="45720" bIns="22860" rtlCol="0" anchor="ctr"/>
           <a:lstStyle/>
           <a:p>
             <a:pPr algn="ctr"/>
@@ -22466,7 +22679,7 @@
           </a:fontRef>
         </p:style>
         <p:txBody>
-          <a:bodyPr rtlCol="0" anchor="ctr" wrap="square" lIns="45720" tIns="22860" rIns="45720" bIns="22860"/>
+          <a:bodyPr wrap="square" lIns="45720" tIns="22860" rIns="45720" bIns="22860" rtlCol="0" anchor="ctr"/>
           <a:lstStyle/>
           <a:p>
             <a:pPr algn="ctr"/>
@@ -22556,7 +22769,7 @@
           </a:fontRef>
         </p:style>
         <p:txBody>
-          <a:bodyPr rtlCol="0" anchor="ctr" wrap="square" lIns="45720" tIns="22860" rIns="45720" bIns="22860"/>
+          <a:bodyPr wrap="square" lIns="45720" tIns="22860" rIns="45720" bIns="22860" rtlCol="0" anchor="ctr"/>
           <a:lstStyle/>
           <a:p>
             <a:pPr algn="ctr"/>
@@ -22646,7 +22859,7 @@
           </a:fontRef>
         </p:style>
         <p:txBody>
-          <a:bodyPr rtlCol="0" anchor="ctr" wrap="square" lIns="45720" tIns="22860" rIns="45720" bIns="22860"/>
+          <a:bodyPr wrap="square" lIns="45720" tIns="22860" rIns="45720" bIns="22860" rtlCol="0" anchor="ctr"/>
           <a:lstStyle/>
           <a:p>
             <a:pPr algn="ctr"/>
@@ -22736,7 +22949,7 @@
           </a:fontRef>
         </p:style>
         <p:txBody>
-          <a:bodyPr rtlCol="0" anchor="ctr" wrap="square" lIns="45720" tIns="22860" rIns="45720" bIns="22860"/>
+          <a:bodyPr wrap="square" lIns="45720" tIns="22860" rIns="45720" bIns="22860" rtlCol="0" anchor="ctr"/>
           <a:lstStyle/>
           <a:p>
             <a:pPr algn="ctr"/>
@@ -22826,7 +23039,7 @@
           </a:fontRef>
         </p:style>
         <p:txBody>
-          <a:bodyPr rtlCol="0" anchor="ctr" wrap="square" lIns="45720" tIns="22860" rIns="45720" bIns="22860"/>
+          <a:bodyPr wrap="square" lIns="45720" tIns="22860" rIns="45720" bIns="22860" rtlCol="0" anchor="ctr"/>
           <a:lstStyle/>
           <a:p>
             <a:pPr algn="ctr"/>
@@ -22956,7 +23169,7 @@
           <a:p>
             <a:fld id="{B7EB45DA-9A0D-DC49-8E02-F30A5DDC21C3}" type="slidenum">
               <a:rPr lang="en-US" smtClean="0"/>
-              <a:t>10</a:t>
+              <a:t>9</a:t>
             </a:fld>
             <a:endParaRPr lang="en-US"/>
           </a:p>
@@ -23001,7 +23214,7 @@
           </a:fontRef>
         </p:style>
         <p:txBody>
-          <a:bodyPr rtlCol="0" anchor="ctr" wrap="square"/>
+          <a:bodyPr wrap="square" rtlCol="0" anchor="ctr"/>
           <a:lstStyle/>
           <a:p>
             <a:pPr algn="l"/>
@@ -23097,7 +23310,7 @@
           </a:fontRef>
         </p:style>
         <p:txBody>
-          <a:bodyPr rtlCol="0" anchor="ctr" wrap="square"/>
+          <a:bodyPr wrap="square" rtlCol="0" anchor="ctr"/>
           <a:lstStyle/>
           <a:p>
             <a:pPr algn="l"/>
@@ -23173,7 +23386,7 @@
           </a:fontRef>
         </p:style>
         <p:txBody>
-          <a:bodyPr rtlCol="0" anchor="ctr" wrap="square"/>
+          <a:bodyPr wrap="square" rtlCol="0" anchor="ctr"/>
           <a:lstStyle/>
           <a:p>
             <a:pPr algn="l"/>
@@ -23333,7 +23546,7 @@
           </a:fontRef>
         </p:style>
         <p:txBody>
-          <a:bodyPr rtlCol="0" anchor="ctr" wrap="square"/>
+          <a:bodyPr wrap="square" rtlCol="0" anchor="ctr"/>
           <a:lstStyle/>
           <a:p>
             <a:pPr algn="ctr"/>
@@ -23387,7 +23600,7 @@
           </a:fontRef>
         </p:style>
         <p:txBody>
-          <a:bodyPr rtlCol="0" anchor="ctr" wrap="square"/>
+          <a:bodyPr wrap="square" rtlCol="0" anchor="ctr"/>
           <a:lstStyle/>
           <a:p>
             <a:pPr algn="ctr"/>
@@ -23428,7 +23641,7 @@
                             </p:stCondLst>
                             <p:childTnLst>
                               <p:par>
-                                <p:cTn id="5" presetID="10" presetClass="entr" presetSubtype="0" fill="hold" grpId="0" nodeType="clickEffect">
+                                <p:cTn id="5" presetID="10" presetClass="entr" presetSubtype="0" fill="hold" nodeType="clickEffect">
                                   <p:stCondLst>
                                     <p:cond delay="0"/>
                                   </p:stCondLst>

--- a/course/lectures/act-1-foundations/09-engineering-decision-making-and-metrics/1-9-Engineering-Decision-Making-and-Metrics.pptx
+++ b/course/lectures/act-1-foundations/09-engineering-decision-making-and-metrics/1-9-Engineering-Decision-Making-and-Metrics.pptx
@@ -988,27 +988,49 @@
           <a:lstStyle/>
           <a:p>
             <a:r>
-              <a:rPr dirty="0"/>
-              <a:t>2.5 minutes — </a:t>
-            </a:r>
-            <a:r>
-              <a:rPr i="1" dirty="0"/>
-              <a:t>The scope principle, deliberately drawn like Validation's composition slide.</a:t>
-            </a:r>
-          </a:p>
-          <a:p>
-            <a:endParaRPr dirty="0"/>
-          </a:p>
-          <a:p>
-            <a:r>
-              <a:rPr dirty="0"/>
-              <a:t>- Each component meets its local check; the composed path still fails. Students saw this shape in Validation — say so.</a:t>
-            </a:r>
-          </a:p>
-          <a:p>
-            <a:r>
-              <a:rPr dirty="0"/>
-              <a:t>- Same reasoning as the latency-budget example: 90+80+140+110+100 components can compose past the budget.</a:t>
+              <a:t>2.5 minutes — The scope principle, deliberately drawn like Validation's composition slide.</a:t>
+            </a:r>
+          </a:p>
+          <a:p/>
+          <a:p>
+            <a:r>
+              <a:t>Students met this composition shape in Validation — say so explicitly: “Every local measurement can look acceptable while the property at the scope we actually care about fails.”</a:t>
+            </a:r>
+          </a:p>
+          <a:p/>
+          <a:p>
+            <a:r>
+              <a:t>Same reasoning as the latency-budget arithmetic: 90 + 80 + 140 + 110 ms of component processing plus 100 ms of communication along the path compose to 520 ms — past a 500 ms end-to-end budget — while every local number looks acceptable.</a:t>
+            </a:r>
+          </a:p>
+          <a:p/>
+          <a:p>
+            <a:r>
+              <a:t>The point is not that local measurements are bad. They answer claims at a different scope.</a:t>
+            </a:r>
+          </a:p>
+          <a:p/>
+          <a:p>
+            <a:r>
+              <a:t>Be careful with the phrase end-to-end. The ends are relative to the property we are trying to establish. If our property is latency from an API request arriving to a response leaving, those events define the ends. If our property is the time from a user clicking “Pay” until the payment appears in account history, the ends are farther apart and may cross several services. If our property concerns a single component, its boundary may itself define the relevant ends. The scope comes from the property, not from the architecture diagram.</a:t>
+            </a:r>
+          </a:p>
+          <a:p/>
+          <a:p>
+            <a:r>
+              <a:t>EMPHASIS — say this aloud: “The scope comes from the property, not from the architecture diagram.”</a:t>
+            </a:r>
+          </a:p>
+          <a:p/>
+          <a:p>
+            <a:r>
+              <a:t>That is why “measure where the property exists” is the rule. First identify the property and the events or boundaries over which it is defined. Then measure at that scope.</a:t>
+            </a:r>
+          </a:p>
+          <a:p/>
+          <a:p>
+            <a:r>
+              <a:t>Build (5 clicks): 1 the enclosing scope and A → B → C → D; 2 local numbers and green checks — each local measurement looks acceptable; 3 the heavy end-to-end arrow and the total; 4 the red X; 5 the generalizing examples and the footer.</a:t>
             </a:r>
           </a:p>
         </p:txBody>
@@ -2410,43 +2432,25 @@
           <a:lstStyle/>
           <a:p>
             <a:r>
-              <a:rPr dirty="0"/>
-              <a:t>1 minute — Evidence is broader than measurement; the fan classifies forms of evidence, it does not sequence them.</a:t>
-            </a:r>
-          </a:p>
-          <a:p>
-            <a:endParaRPr dirty="0"/>
-          </a:p>
-          <a:p>
-            <a:r>
-              <a:rPr dirty="0"/>
-              <a:t>- Evidence is broader than measurement. Review, analysis, prototypes, tests, experiments, operational observation, and measurements can all bear on an engineering decision. We are about to concentrate on measurement because metrics require their own reasoning machinery. Do not mistake that focus for a claim that engineering evidence must be numerical.</a:t>
-            </a:r>
-          </a:p>
-          <a:p>
-            <a:r>
-              <a:rPr dirty="0"/>
-              <a:t>- A prototype can demonstrate feasibility; a counterexample can invalidate an assumption; a review can catch the wrong requirement.</a:t>
-            </a:r>
-          </a:p>
-          <a:p>
-            <a:r>
-              <a:rPr dirty="0"/>
-              <a:t>- The purpose of evidence is to reduce uncertainty that matters to a decision.</a:t>
-            </a:r>
-          </a:p>
-          <a:p>
-            <a:r>
-              <a:rPr dirty="0"/>
-              <a:t>- Transition on the highlighted box: measurement is the quantitative path — the </a:t>
-            </a:r>
-            <a:r>
-              <a:rPr dirty="0" err="1"/>
-              <a:t>centre</a:t>
-            </a:r>
-            <a:r>
-              <a:rPr dirty="0"/>
-              <a:t> of this lecture.</a:t>
+              <a:t>Evidence is broader than measurement. Review, analysis, prototypes, tests, experiments, and operational observation can all provide evidence relevant to an engineering decision.</a:t>
+            </a:r>
+          </a:p>
+          <a:p/>
+          <a:p>
+            <a:r>
+              <a:t>Measurement is not another category alongside these. We measure properties while testing, experimenting, observing operation, evaluating prototypes, and sometimes while reviewing or analyzing artifacts.</a:t>
+            </a:r>
+          </a:p>
+          <a:p/>
+          <a:p>
+            <a:r>
+              <a:t>Our concern today is measurement, so we are going to narrow into that cross-cutting activity. The important question is not simply whether we can measure something. It is how a measurement bears on a property we care about and therefore becomes evidence for a decision.</a:t>
+            </a:r>
+          </a:p>
+          <a:p/>
+          <a:p>
+            <a:r>
+              <a:t>Transition: What has to happen for an observation or number to become engineering evidence?</a:t>
             </a:r>
           </a:p>
         </p:txBody>
@@ -6837,41 +6841,72 @@
       </p:sp>
       <p:sp>
         <p:nvSpPr>
-          <p:cNvPr id="114" name="Quote"/>
+          <p:cNvPr id="114" name="MetricDef"/>
           <p:cNvSpPr/>
           <p:nvPr/>
         </p:nvSpPr>
         <p:spPr>
           <a:xfrm>
             <a:off x="274320" y="3657600"/>
-            <a:ext cx="8595360" cy="640080"/>
+            <a:ext cx="8595360" cy="1005840"/>
           </a:xfrm>
           <a:prstGeom prst="rect">
             <a:avLst/>
           </a:prstGeom>
           <a:solidFill>
-            <a:srgbClr val="F5F1E8"/>
+            <a:srgbClr val="E8F0F7"/>
           </a:solidFill>
           <a:ln w="12700">
             <a:solidFill>
-              <a:srgbClr val="C9B991"/>
+              <a:srgbClr val="A9C4DB"/>
             </a:solidFill>
           </a:ln>
-        </p:spPr>
-        <p:txBody>
-          <a:bodyPr wrap="square" lIns="91440" tIns="45720" rIns="91440" bIns="45720" anchor="ctr"/>
+          <a:effectLst/>
+        </p:spPr>
+        <p:style>
+          <a:lnRef idx="1">
+            <a:schemeClr val="accent1"/>
+          </a:lnRef>
+          <a:fillRef idx="3">
+            <a:schemeClr val="accent1"/>
+          </a:fillRef>
+          <a:effectRef idx="2">
+            <a:schemeClr val="accent1"/>
+          </a:effectRef>
+          <a:fontRef idx="minor">
+            <a:schemeClr val="lt1"/>
+          </a:fontRef>
+        </p:style>
+        <p:txBody>
+          <a:bodyPr wrap="square" lIns="91440" tIns="45720" rIns="91440" bIns="45720" rtlCol="0" anchor="ctr"/>
           <a:lstStyle/>
           <a:p>
             <a:pPr algn="ctr">
               <a:buNone/>
             </a:pPr>
             <a:r>
-              <a:rPr lang="en-US" sz="2000" b="0" i="1" dirty="0">
+              <a:rPr lang="en-US" sz="2000" b="1" i="0" dirty="0">
+                <a:solidFill>
+                  <a:srgbClr val="2E74B5"/>
+                </a:solidFill>
+              </a:rPr>
+              <a:t>METRIC</a:t>
+            </a:r>
+          </a:p>
+          <a:p>
+            <a:pPr algn="ctr">
+              <a:spcBef>
+                <a:spcPts val="140"/>
+              </a:spcBef>
+              <a:buNone/>
+            </a:pPr>
+            <a:r>
+              <a:rPr lang="en-US" sz="2000" b="0" i="0" dirty="0">
                 <a:solidFill>
                   <a:srgbClr val="5C4826"/>
                 </a:solidFill>
               </a:rPr>
-              <a:t>A metric specifies how observations will bear on some aspect of a property.</a:t>
+              <a:t>A metric specifies how observations bear on some aspect of a property.</a:t>
             </a:r>
           </a:p>
         </p:txBody>
@@ -7886,11 +7921,11 @@
             <a:avLst/>
           </a:prstGeom>
           <a:solidFill>
-            <a:srgbClr val="F5F1E8"/>
+            <a:srgbClr val="E8F0F7"/>
           </a:solidFill>
           <a:ln w="12700">
             <a:solidFill>
-              <a:srgbClr val="C9B991"/>
+              <a:srgbClr val="A9C4DB"/>
             </a:solidFill>
           </a:ln>
         </p:spPr>
@@ -7904,7 +7939,7 @@
             <a:r>
               <a:rPr lang="en-US" sz="2000" b="1" i="0" dirty="0">
                 <a:solidFill>
-                  <a:srgbClr val="8E6F3E"/>
+                  <a:srgbClr val="2E74B5"/>
                 </a:solidFill>
               </a:rPr>
               <a:t>OPERATIONALIZE</a:t>
@@ -8396,18 +8431,14 @@
           <a:bodyPr wrap="square" lIns="2011680" tIns="0" rIns="0" bIns="0" anchor="t"/>
           <a:lstStyle/>
           <a:p>
-            <a:pPr algn="l">
-              <a:buNone/>
+            <a:pPr marL="342900" indent="-342900" algn="l">
+              <a:buClr>
+                <a:srgbClr val="5C4826"/>
+              </a:buClr>
+              <a:buFont typeface="Calibri" panose="020F0502020204030204" pitchFamily="34" charset="0"/>
+              <a:buAutoNum type="arabicPlain"/>
             </a:pPr>
             <a:r>
-              <a:rPr lang="en-US" sz="2000" b="1" i="0" dirty="0">
-                <a:solidFill>
-                  <a:srgbClr val="5C4826"/>
-                </a:solidFill>
-              </a:rPr>
-              <a:t>1   </a:t>
-            </a:r>
-            <a:r>
               <a:rPr lang="en-US" sz="2000" b="0" i="0" dirty="0">
                 <a:solidFill>
                   <a:srgbClr val="555960"/>
@@ -8417,20 +8448,16 @@
             </a:r>
           </a:p>
           <a:p>
-            <a:pPr algn="l">
+            <a:pPr marL="342900" indent="-342900" algn="l">
               <a:spcBef>
                 <a:spcPts val="160"/>
               </a:spcBef>
-              <a:buNone/>
+              <a:buClr>
+                <a:srgbClr val="5C4826"/>
+              </a:buClr>
+              <a:buFont typeface="Calibri" panose="020F0502020204030204" pitchFamily="34" charset="0"/>
+              <a:buAutoNum type="arabicPlain"/>
             </a:pPr>
-            <a:r>
-              <a:rPr lang="en-US" sz="2000" b="1" i="0" dirty="0">
-                <a:solidFill>
-                  <a:srgbClr val="5C4826"/>
-                </a:solidFill>
-              </a:rPr>
-              <a:t>2   </a:t>
-            </a:r>
             <a:r>
               <a:rPr lang="en-US" sz="2000" b="0" i="0" dirty="0">
                 <a:solidFill>
@@ -9310,19 +9337,17 @@
         </p:nvSpPr>
         <p:spPr>
           <a:xfrm>
-            <a:off x="502920" y="5303520"/>
-            <a:ext cx="8138160" cy="640080"/>
+            <a:off x="274320" y="5852160"/>
+            <a:ext cx="8595360" cy="566928"/>
           </a:xfrm>
           <a:prstGeom prst="rect">
             <a:avLst/>
           </a:prstGeom>
           <a:solidFill>
-            <a:srgbClr val="FBF8F2"/>
+            <a:srgbClr val="8E6F3E"/>
           </a:solidFill>
-          <a:ln w="15875">
-            <a:solidFill>
-              <a:srgbClr val="C9B991"/>
-            </a:solidFill>
+          <a:ln>
+            <a:noFill/>
           </a:ln>
           <a:effectLst/>
         </p:spPr>
@@ -9346,9 +9371,9 @@
           <a:p>
             <a:pPr algn="ctr"/>
             <a:r>
-              <a:rPr sz="2000" b="0" i="0">
-                <a:solidFill>
-                  <a:srgbClr val="5C4826"/>
+              <a:rPr sz="2000" b="1" i="0">
+                <a:solidFill>
+                  <a:srgbClr val="FFFFFF"/>
                 </a:solidFill>
               </a:rPr>
               <a:t>p99 = 420 ms  ·  end-to-end  ·  workload W  ·  configuration C  ·  interval T</a:t>
@@ -9844,53 +9869,95 @@
       </p:sp>
       <p:sp>
         <p:nvSpPr>
-          <p:cNvPr id="116" name="FooterBand"/>
+          <p:cNvPr id="200" name="Scope"/>
           <p:cNvSpPr/>
           <p:nvPr/>
         </p:nvSpPr>
         <p:spPr>
           <a:xfrm>
-            <a:off x="274320" y="5852160"/>
-            <a:ext cx="8595360" cy="566928"/>
+            <a:off x="502920" y="1143000"/>
+            <a:ext cx="8138160" cy="2606040"/>
           </a:xfrm>
           <a:prstGeom prst="rect">
             <a:avLst/>
           </a:prstGeom>
           <a:solidFill>
-            <a:srgbClr val="8E6F3E"/>
+            <a:srgbClr val="FBF8F2"/>
           </a:solidFill>
-          <a:ln>
-            <a:noFill/>
-          </a:ln>
-        </p:spPr>
-        <p:txBody>
-          <a:bodyPr wrap="square" lIns="91440" tIns="45720" rIns="91440" bIns="45720" anchor="ctr"/>
-          <a:lstStyle/>
-          <a:p>
-            <a:pPr algn="ctr">
+          <a:ln w="9525">
+            <a:solidFill>
+              <a:srgbClr val="C9B991"/>
+            </a:solidFill>
+          </a:ln>
+          <a:effectLst/>
+        </p:spPr>
+        <p:style>
+          <a:lnRef idx="1">
+            <a:schemeClr val="accent1"/>
+          </a:lnRef>
+          <a:fillRef idx="3">
+            <a:schemeClr val="accent1"/>
+          </a:fillRef>
+          <a:effectRef idx="2">
+            <a:schemeClr val="accent1"/>
+          </a:effectRef>
+          <a:fontRef idx="minor">
+            <a:schemeClr val="lt1"/>
+          </a:fontRef>
+        </p:style>
+        <p:txBody>
+          <a:bodyPr wrap="square" lIns="91440" tIns="45720" rIns="91440" bIns="45720" rtlCol="0" anchor="ctr"/>
+          <a:lstStyle/>
+          <a:p>
+            <a:pPr algn="ctr"/>
+            <a:endParaRPr lang="en-US"/>
+          </a:p>
+        </p:txBody>
+      </p:sp>
+      <p:sp>
+        <p:nvSpPr>
+          <p:cNvPr id="201" name="ScopeLbl"/>
+          <p:cNvSpPr txBox="1"/>
+          <p:nvPr/>
+        </p:nvSpPr>
+        <p:spPr>
+          <a:xfrm>
+            <a:off x="640080" y="1216152"/>
+            <a:ext cx="3200400" cy="274320"/>
+          </a:xfrm>
+          <a:prstGeom prst="rect">
+            <a:avLst/>
+          </a:prstGeom>
+          <a:noFill/>
+        </p:spPr>
+        <p:txBody>
+          <a:bodyPr wrap="square" lIns="0" tIns="0" rIns="0" bIns="0" anchor="ctr"/>
+          <a:lstStyle/>
+          <a:p>
+            <a:pPr algn="l">
               <a:buNone/>
             </a:pPr>
             <a:r>
-              <a:rPr lang="en-US" sz="2000" b="1" i="0" dirty="0">
-                <a:solidFill>
-                  <a:srgbClr val="FFFFFF"/>
-                </a:solidFill>
-              </a:rPr>
-              <a:t>Local measurement cannot establish a composed property.</a:t>
-            </a:r>
-          </a:p>
-        </p:txBody>
-      </p:sp>
-      <p:sp>
-        <p:nvSpPr>
-          <p:cNvPr id="117" name="K0"/>
+              <a:rPr lang="en-US" sz="1200" b="1" i="0" dirty="0">
+                <a:solidFill>
+                  <a:srgbClr val="A08A5F"/>
+                </a:solidFill>
+              </a:rPr>
+              <a:t>END-TO-END SCOPE</a:t>
+            </a:r>
+          </a:p>
+        </p:txBody>
+      </p:sp>
+      <p:sp>
+        <p:nvSpPr>
+          <p:cNvPr id="210" name="K0"/>
           <p:cNvSpPr/>
           <p:nvPr/>
         </p:nvSpPr>
         <p:spPr>
           <a:xfrm>
-            <a:off x="914400" y="1417320"/>
-            <a:ext cx="1554480" cy="868680"/>
+            <a:off x="960120" y="1554480"/>
+            <a:ext cx="1417320" cy="777240"/>
           </a:xfrm>
           <a:prstGeom prst="rect">
             <a:avLst/>
@@ -9920,65 +9987,33 @@
           </a:fontRef>
         </p:style>
         <p:txBody>
-          <a:bodyPr wrap="square" rtlCol="0" anchor="ctr"/>
-          <a:lstStyle/>
-          <a:p>
-            <a:pPr algn="ctr"/>
-            <a:r>
-              <a:rPr sz="2400" b="1" i="0">
+          <a:bodyPr wrap="square" lIns="45720" tIns="45720" rIns="45720" bIns="45720" rtlCol="0" anchor="ctr"/>
+          <a:lstStyle/>
+          <a:p>
+            <a:pPr algn="ctr">
+              <a:buNone/>
+            </a:pPr>
+            <a:r>
+              <a:rPr lang="en-US" sz="2400" b="1" i="0" dirty="0">
                 <a:solidFill>
                   <a:srgbClr val="5C4826"/>
                 </a:solidFill>
               </a:rPr>
               <a:t>A</a:t>
-            </a:r>
-          </a:p>
-        </p:txBody>
-      </p:sp>
-      <p:sp>
-        <p:nvSpPr>
-          <p:cNvPr id="118" name="Chk0"/>
-          <p:cNvSpPr txBox="1"/>
-          <p:nvPr/>
-        </p:nvSpPr>
-        <p:spPr>
-          <a:xfrm>
-            <a:off x="914400" y="2377440"/>
-            <a:ext cx="1554480" cy="457200"/>
-          </a:xfrm>
-          <a:prstGeom prst="rect">
-            <a:avLst/>
-          </a:prstGeom>
-          <a:noFill/>
-        </p:spPr>
-        <p:txBody>
-          <a:bodyPr wrap="square" lIns="0" tIns="0" rIns="0" bIns="0" anchor="ctr">
-            <a:spAutoFit/>
-          </a:bodyPr>
-          <a:lstStyle/>
-          <a:p>
-            <a:pPr algn="ctr"/>
-            <a:r>
-              <a:rPr sz="2400" b="1" i="0">
-                <a:solidFill>
-                  <a:srgbClr val="5C4826"/>
-                </a:solidFill>
-              </a:rPr>
-              <a:t>✓</a:t>
             </a:r>
           </a:p>
         </p:txBody>
       </p:sp>
       <p:cxnSp>
         <p:nvCxnSpPr>
-          <p:cNvPr id="119" name="KA0"/>
+          <p:cNvPr id="220" name="KA0"/>
           <p:cNvCxnSpPr/>
           <p:nvPr/>
         </p:nvCxnSpPr>
         <p:spPr>
           <a:xfrm>
-            <a:off x="2514600" y="1851660"/>
-            <a:ext cx="274320" cy="0"/>
+            <a:off x="2423160" y="1943100"/>
+            <a:ext cx="411480" cy="0"/>
           </a:xfrm>
           <a:prstGeom prst="line">
             <a:avLst/>
@@ -10008,14 +10043,14 @@
       </p:cxnSp>
       <p:sp>
         <p:nvSpPr>
-          <p:cNvPr id="120" name="K1"/>
+          <p:cNvPr id="211" name="K1"/>
           <p:cNvSpPr/>
           <p:nvPr/>
         </p:nvSpPr>
         <p:spPr>
           <a:xfrm>
-            <a:off x="2834640" y="1417320"/>
-            <a:ext cx="1554480" cy="868680"/>
+            <a:off x="2880360" y="1554480"/>
+            <a:ext cx="1417320" cy="777240"/>
           </a:xfrm>
           <a:prstGeom prst="rect">
             <a:avLst/>
@@ -10045,65 +10080,33 @@
           </a:fontRef>
         </p:style>
         <p:txBody>
-          <a:bodyPr wrap="square" rtlCol="0" anchor="ctr"/>
-          <a:lstStyle/>
-          <a:p>
-            <a:pPr algn="ctr"/>
-            <a:r>
-              <a:rPr sz="2400" b="1" i="0">
+          <a:bodyPr wrap="square" lIns="45720" tIns="45720" rIns="45720" bIns="45720" rtlCol="0" anchor="ctr"/>
+          <a:lstStyle/>
+          <a:p>
+            <a:pPr algn="ctr">
+              <a:buNone/>
+            </a:pPr>
+            <a:r>
+              <a:rPr lang="en-US" sz="2400" b="1" i="0" dirty="0">
                 <a:solidFill>
                   <a:srgbClr val="5C4826"/>
                 </a:solidFill>
               </a:rPr>
               <a:t>B</a:t>
-            </a:r>
-          </a:p>
-        </p:txBody>
-      </p:sp>
-      <p:sp>
-        <p:nvSpPr>
-          <p:cNvPr id="121" name="Chk1"/>
-          <p:cNvSpPr txBox="1"/>
-          <p:nvPr/>
-        </p:nvSpPr>
-        <p:spPr>
-          <a:xfrm>
-            <a:off x="2834640" y="2377440"/>
-            <a:ext cx="1554480" cy="457200"/>
-          </a:xfrm>
-          <a:prstGeom prst="rect">
-            <a:avLst/>
-          </a:prstGeom>
-          <a:noFill/>
-        </p:spPr>
-        <p:txBody>
-          <a:bodyPr wrap="square" lIns="0" tIns="0" rIns="0" bIns="0" anchor="ctr">
-            <a:spAutoFit/>
-          </a:bodyPr>
-          <a:lstStyle/>
-          <a:p>
-            <a:pPr algn="ctr"/>
-            <a:r>
-              <a:rPr sz="2400" b="1" i="0">
-                <a:solidFill>
-                  <a:srgbClr val="5C4826"/>
-                </a:solidFill>
-              </a:rPr>
-              <a:t>✓</a:t>
             </a:r>
           </a:p>
         </p:txBody>
       </p:sp>
       <p:cxnSp>
         <p:nvCxnSpPr>
-          <p:cNvPr id="122" name="KA1"/>
+          <p:cNvPr id="221" name="KA1"/>
           <p:cNvCxnSpPr/>
           <p:nvPr/>
         </p:nvCxnSpPr>
         <p:spPr>
           <a:xfrm>
-            <a:off x="4434840" y="1851660"/>
-            <a:ext cx="274320" cy="0"/>
+            <a:off x="4343400" y="1943100"/>
+            <a:ext cx="411480" cy="0"/>
           </a:xfrm>
           <a:prstGeom prst="line">
             <a:avLst/>
@@ -10133,14 +10136,14 @@
       </p:cxnSp>
       <p:sp>
         <p:nvSpPr>
-          <p:cNvPr id="123" name="K2"/>
+          <p:cNvPr id="212" name="K2"/>
           <p:cNvSpPr/>
           <p:nvPr/>
         </p:nvSpPr>
         <p:spPr>
           <a:xfrm>
-            <a:off x="4754880" y="1417320"/>
-            <a:ext cx="1554480" cy="868680"/>
+            <a:off x="4800600" y="1554480"/>
+            <a:ext cx="1417320" cy="777240"/>
           </a:xfrm>
           <a:prstGeom prst="rect">
             <a:avLst/>
@@ -10170,65 +10173,33 @@
           </a:fontRef>
         </p:style>
         <p:txBody>
-          <a:bodyPr wrap="square" rtlCol="0" anchor="ctr"/>
-          <a:lstStyle/>
-          <a:p>
-            <a:pPr algn="ctr"/>
-            <a:r>
-              <a:rPr sz="2400" b="1" i="0">
+          <a:bodyPr wrap="square" lIns="45720" tIns="45720" rIns="45720" bIns="45720" rtlCol="0" anchor="ctr"/>
+          <a:lstStyle/>
+          <a:p>
+            <a:pPr algn="ctr">
+              <a:buNone/>
+            </a:pPr>
+            <a:r>
+              <a:rPr lang="en-US" sz="2400" b="1" i="0" dirty="0">
                 <a:solidFill>
                   <a:srgbClr val="5C4826"/>
                 </a:solidFill>
               </a:rPr>
               <a:t>C</a:t>
-            </a:r>
-          </a:p>
-        </p:txBody>
-      </p:sp>
-      <p:sp>
-        <p:nvSpPr>
-          <p:cNvPr id="124" name="Chk2"/>
-          <p:cNvSpPr txBox="1"/>
-          <p:nvPr/>
-        </p:nvSpPr>
-        <p:spPr>
-          <a:xfrm>
-            <a:off x="4754880" y="2377440"/>
-            <a:ext cx="1554480" cy="457200"/>
-          </a:xfrm>
-          <a:prstGeom prst="rect">
-            <a:avLst/>
-          </a:prstGeom>
-          <a:noFill/>
-        </p:spPr>
-        <p:txBody>
-          <a:bodyPr wrap="square" lIns="0" tIns="0" rIns="0" bIns="0" anchor="ctr">
-            <a:spAutoFit/>
-          </a:bodyPr>
-          <a:lstStyle/>
-          <a:p>
-            <a:pPr algn="ctr"/>
-            <a:r>
-              <a:rPr sz="2400" b="1" i="0">
-                <a:solidFill>
-                  <a:srgbClr val="5C4826"/>
-                </a:solidFill>
-              </a:rPr>
-              <a:t>✓</a:t>
             </a:r>
           </a:p>
         </p:txBody>
       </p:sp>
       <p:cxnSp>
         <p:nvCxnSpPr>
-          <p:cNvPr id="125" name="KA2"/>
+          <p:cNvPr id="222" name="KA2"/>
           <p:cNvCxnSpPr/>
           <p:nvPr/>
         </p:nvCxnSpPr>
         <p:spPr>
           <a:xfrm>
-            <a:off x="6355080" y="1851660"/>
-            <a:ext cx="274320" cy="0"/>
+            <a:off x="6263640" y="1943100"/>
+            <a:ext cx="411480" cy="0"/>
           </a:xfrm>
           <a:prstGeom prst="line">
             <a:avLst/>
@@ -10258,14 +10229,14 @@
       </p:cxnSp>
       <p:sp>
         <p:nvSpPr>
-          <p:cNvPr id="126" name="K3"/>
+          <p:cNvPr id="213" name="K3"/>
           <p:cNvSpPr/>
           <p:nvPr/>
         </p:nvSpPr>
         <p:spPr>
           <a:xfrm>
-            <a:off x="6675120" y="1417320"/>
-            <a:ext cx="1554480" cy="868680"/>
+            <a:off x="6720840" y="1554480"/>
+            <a:ext cx="1417320" cy="777240"/>
           </a:xfrm>
           <a:prstGeom prst="rect">
             <a:avLst/>
@@ -10295,12 +10266,14 @@
           </a:fontRef>
         </p:style>
         <p:txBody>
-          <a:bodyPr wrap="square" rtlCol="0" anchor="ctr"/>
-          <a:lstStyle/>
-          <a:p>
-            <a:pPr algn="ctr"/>
-            <a:r>
-              <a:rPr sz="2400" b="1" i="0">
+          <a:bodyPr wrap="square" lIns="45720" tIns="45720" rIns="45720" bIns="45720" rtlCol="0" anchor="ctr"/>
+          <a:lstStyle/>
+          <a:p>
+            <a:pPr algn="ctr">
+              <a:buNone/>
+            </a:pPr>
+            <a:r>
+              <a:rPr lang="en-US" sz="2400" b="1" i="0" dirty="0">
                 <a:solidFill>
                   <a:srgbClr val="5C4826"/>
                 </a:solidFill>
@@ -10312,14 +10285,14 @@
       </p:sp>
       <p:sp>
         <p:nvSpPr>
-          <p:cNvPr id="127" name="Chk3"/>
+          <p:cNvPr id="230" name="M0"/>
           <p:cNvSpPr txBox="1"/>
           <p:nvPr/>
         </p:nvSpPr>
         <p:spPr>
           <a:xfrm>
-            <a:off x="6675120" y="2377440"/>
-            <a:ext cx="1554480" cy="457200"/>
+            <a:off x="960120" y="2423160"/>
+            <a:ext cx="1417320" cy="365760"/>
           </a:xfrm>
           <a:prstGeom prst="rect">
             <a:avLst/>
@@ -10327,18 +10300,154 @@
           <a:noFill/>
         </p:spPr>
         <p:txBody>
-          <a:bodyPr wrap="square" lIns="0" tIns="0" rIns="0" bIns="0" anchor="ctr">
-            <a:spAutoFit/>
-          </a:bodyPr>
-          <a:lstStyle/>
-          <a:p>
-            <a:pPr algn="ctr"/>
-            <a:r>
-              <a:rPr sz="2400" b="1" i="0">
+          <a:bodyPr wrap="square" lIns="0" tIns="0" rIns="0" bIns="0" anchor="ctr"/>
+          <a:lstStyle/>
+          <a:p>
+            <a:pPr algn="ctr">
+              <a:buNone/>
+            </a:pPr>
+            <a:r>
+              <a:rPr lang="en-US" sz="2000" b="1" i="0" dirty="0">
                 <a:solidFill>
                   <a:srgbClr val="5C4826"/>
                 </a:solidFill>
               </a:rPr>
+              <a:t>90 ms</a:t>
+            </a:r>
+          </a:p>
+        </p:txBody>
+      </p:sp>
+      <p:sp>
+        <p:nvSpPr>
+          <p:cNvPr id="231" name="M1"/>
+          <p:cNvSpPr txBox="1"/>
+          <p:nvPr/>
+        </p:nvSpPr>
+        <p:spPr>
+          <a:xfrm>
+            <a:off x="2880360" y="2423160"/>
+            <a:ext cx="1417320" cy="365760"/>
+          </a:xfrm>
+          <a:prstGeom prst="rect">
+            <a:avLst/>
+          </a:prstGeom>
+          <a:noFill/>
+        </p:spPr>
+        <p:txBody>
+          <a:bodyPr wrap="square" lIns="0" tIns="0" rIns="0" bIns="0" anchor="ctr"/>
+          <a:lstStyle/>
+          <a:p>
+            <a:pPr algn="ctr">
+              <a:buNone/>
+            </a:pPr>
+            <a:r>
+              <a:rPr lang="en-US" sz="2000" b="1" i="0" dirty="0">
+                <a:solidFill>
+                  <a:srgbClr val="5C4826"/>
+                </a:solidFill>
+              </a:rPr>
+              <a:t>80 ms</a:t>
+            </a:r>
+          </a:p>
+        </p:txBody>
+      </p:sp>
+      <p:sp>
+        <p:nvSpPr>
+          <p:cNvPr id="232" name="M2"/>
+          <p:cNvSpPr txBox="1"/>
+          <p:nvPr/>
+        </p:nvSpPr>
+        <p:spPr>
+          <a:xfrm>
+            <a:off x="4800600" y="2423160"/>
+            <a:ext cx="1417320" cy="365760"/>
+          </a:xfrm>
+          <a:prstGeom prst="rect">
+            <a:avLst/>
+          </a:prstGeom>
+          <a:noFill/>
+        </p:spPr>
+        <p:txBody>
+          <a:bodyPr wrap="square" lIns="0" tIns="0" rIns="0" bIns="0" anchor="ctr"/>
+          <a:lstStyle/>
+          <a:p>
+            <a:pPr algn="ctr">
+              <a:buNone/>
+            </a:pPr>
+            <a:r>
+              <a:rPr lang="en-US" sz="2000" b="1" i="0" dirty="0">
+                <a:solidFill>
+                  <a:srgbClr val="5C4826"/>
+                </a:solidFill>
+              </a:rPr>
+              <a:t>140 ms</a:t>
+            </a:r>
+          </a:p>
+        </p:txBody>
+      </p:sp>
+      <p:sp>
+        <p:nvSpPr>
+          <p:cNvPr id="233" name="M3"/>
+          <p:cNvSpPr txBox="1"/>
+          <p:nvPr/>
+        </p:nvSpPr>
+        <p:spPr>
+          <a:xfrm>
+            <a:off x="6720840" y="2423160"/>
+            <a:ext cx="1417320" cy="365760"/>
+          </a:xfrm>
+          <a:prstGeom prst="rect">
+            <a:avLst/>
+          </a:prstGeom>
+          <a:noFill/>
+        </p:spPr>
+        <p:txBody>
+          <a:bodyPr wrap="square" lIns="0" tIns="0" rIns="0" bIns="0" anchor="ctr"/>
+          <a:lstStyle/>
+          <a:p>
+            <a:pPr algn="ctr">
+              <a:buNone/>
+            </a:pPr>
+            <a:r>
+              <a:rPr lang="en-US" sz="2000" b="1" i="0" dirty="0">
+                <a:solidFill>
+                  <a:srgbClr val="5C4826"/>
+                </a:solidFill>
+              </a:rPr>
+              <a:t>110 ms</a:t>
+            </a:r>
+          </a:p>
+        </p:txBody>
+      </p:sp>
+      <p:sp>
+        <p:nvSpPr>
+          <p:cNvPr id="240" name="Chk0"/>
+          <p:cNvSpPr txBox="1"/>
+          <p:nvPr/>
+        </p:nvSpPr>
+        <p:spPr>
+          <a:xfrm>
+            <a:off x="960120" y="2834640"/>
+            <a:ext cx="1417320" cy="411480"/>
+          </a:xfrm>
+          <a:prstGeom prst="rect">
+            <a:avLst/>
+          </a:prstGeom>
+          <a:noFill/>
+        </p:spPr>
+        <p:txBody>
+          <a:bodyPr wrap="square" lIns="0" tIns="0" rIns="0" bIns="0" anchor="ctr"/>
+          <a:lstStyle/>
+          <a:p>
+            <a:pPr algn="ctr">
+              <a:buNone/>
+            </a:pPr>
+            <a:r>
+              <a:rPr lang="en-US" sz="2400" b="1" i="0" dirty="0">
+                <a:solidFill>
+                  <a:srgbClr val="1F7A4D"/>
+                </a:solidFill>
+              </a:rPr>
               <a:t>✓</a:t>
             </a:r>
           </a:p>
@@ -10346,14 +10455,14 @@
       </p:sp>
       <p:sp>
         <p:nvSpPr>
-          <p:cNvPr id="129" name="Cross"/>
+          <p:cNvPr id="241" name="Chk1"/>
           <p:cNvSpPr txBox="1"/>
           <p:nvPr/>
         </p:nvSpPr>
         <p:spPr>
           <a:xfrm>
-            <a:off x="4160520" y="3261360"/>
-            <a:ext cx="822960" cy="457200"/>
+            <a:off x="2880360" y="2834640"/>
+            <a:ext cx="1417320" cy="411480"/>
           </a:xfrm>
           <a:prstGeom prst="rect">
             <a:avLst/>
@@ -10361,33 +10470,33 @@
           <a:noFill/>
         </p:spPr>
         <p:txBody>
-          <a:bodyPr wrap="square" lIns="0" tIns="0" rIns="0" bIns="0" anchor="ctr">
-            <a:spAutoFit/>
-          </a:bodyPr>
-          <a:lstStyle/>
-          <a:p>
-            <a:pPr algn="ctr"/>
-            <a:r>
-              <a:rPr sz="3200" b="1" i="0">
-                <a:solidFill>
-                  <a:srgbClr val="C0392B"/>
-                </a:solidFill>
-              </a:rPr>
-              <a:t>✗</a:t>
-            </a:r>
-          </a:p>
-        </p:txBody>
-      </p:sp>
-      <p:sp>
-        <p:nvSpPr>
-          <p:cNvPr id="130" name="PathLbl"/>
+          <a:bodyPr wrap="square" lIns="0" tIns="0" rIns="0" bIns="0" anchor="ctr"/>
+          <a:lstStyle/>
+          <a:p>
+            <a:pPr algn="ctr">
+              <a:buNone/>
+            </a:pPr>
+            <a:r>
+              <a:rPr lang="en-US" sz="2400" b="1" i="0" dirty="0">
+                <a:solidFill>
+                  <a:srgbClr val="1F7A4D"/>
+                </a:solidFill>
+              </a:rPr>
+              <a:t>✓</a:t>
+            </a:r>
+          </a:p>
+        </p:txBody>
+      </p:sp>
+      <p:sp>
+        <p:nvSpPr>
+          <p:cNvPr id="242" name="Chk2"/>
           <p:cNvSpPr txBox="1"/>
           <p:nvPr/>
         </p:nvSpPr>
         <p:spPr>
           <a:xfrm>
-            <a:off x="274320" y="3776472"/>
-            <a:ext cx="8595360" cy="365760"/>
+            <a:off x="4800600" y="2834640"/>
+            <a:ext cx="1417320" cy="411480"/>
           </a:xfrm>
           <a:prstGeom prst="rect">
             <a:avLst/>
@@ -10395,33 +10504,33 @@
           <a:noFill/>
         </p:spPr>
         <p:txBody>
-          <a:bodyPr wrap="square" lIns="0" tIns="0" rIns="0" bIns="0" anchor="ctr">
-            <a:spAutoFit/>
-          </a:bodyPr>
-          <a:lstStyle/>
-          <a:p>
-            <a:pPr algn="ctr"/>
-            <a:r>
-              <a:rPr sz="2000" b="0" i="1">
-                <a:solidFill>
-                  <a:srgbClr val="555960"/>
-                </a:solidFill>
-              </a:rPr>
-              <a:t>the composed path — where the end-to-end property lives</a:t>
-            </a:r>
-          </a:p>
-        </p:txBody>
-      </p:sp>
-      <p:sp>
-        <p:nvSpPr>
-          <p:cNvPr id="131" name="Ex"/>
+          <a:bodyPr wrap="square" lIns="0" tIns="0" rIns="0" bIns="0" anchor="ctr"/>
+          <a:lstStyle/>
+          <a:p>
+            <a:pPr algn="ctr">
+              <a:buNone/>
+            </a:pPr>
+            <a:r>
+              <a:rPr lang="en-US" sz="2400" b="1" i="0" dirty="0">
+                <a:solidFill>
+                  <a:srgbClr val="1F7A4D"/>
+                </a:solidFill>
+              </a:rPr>
+              <a:t>✓</a:t>
+            </a:r>
+          </a:p>
+        </p:txBody>
+      </p:sp>
+      <p:sp>
+        <p:nvSpPr>
+          <p:cNvPr id="243" name="Chk3"/>
           <p:cNvSpPr txBox="1"/>
           <p:nvPr/>
         </p:nvSpPr>
         <p:spPr>
           <a:xfrm>
-            <a:off x="274320" y="4343400"/>
-            <a:ext cx="8595360" cy="822960"/>
+            <a:off x="6720840" y="2834640"/>
+            <a:ext cx="1417320" cy="411480"/>
           </a:xfrm>
           <a:prstGeom prst="rect">
             <a:avLst/>
@@ -10429,52 +10538,84 @@
           <a:noFill/>
         </p:spPr>
         <p:txBody>
-          <a:bodyPr wrap="square" lIns="0" tIns="0" rIns="0" bIns="0" anchor="ctr">
-            <a:spAutoFit/>
-          </a:bodyPr>
-          <a:lstStyle/>
-          <a:p>
-            <a:pPr algn="ctr"/>
-            <a:r>
-              <a:rPr sz="2000" b="0" i="0">
-                <a:solidFill>
-                  <a:srgbClr val="555960"/>
-                </a:solidFill>
-              </a:rPr>
-              <a:t>component latency  ≠  end-to-end latency</a:t>
-            </a:r>
-          </a:p>
-          <a:p>
-            <a:pPr algn="ctr"/>
-            <a:r>
-              <a:rPr sz="2000" b="0" i="0">
-                <a:solidFill>
-                  <a:srgbClr val="555960"/>
-                </a:solidFill>
-              </a:rPr>
-              <a:t>service availability  ≠  system availability when dependencies fail together</a:t>
+          <a:bodyPr wrap="square" lIns="0" tIns="0" rIns="0" bIns="0" anchor="ctr"/>
+          <a:lstStyle/>
+          <a:p>
+            <a:pPr algn="ctr">
+              <a:buNone/>
+            </a:pPr>
+            <a:r>
+              <a:rPr lang="en-US" sz="2400" b="1" i="0" dirty="0">
+                <a:solidFill>
+                  <a:srgbClr val="1F7A4D"/>
+                </a:solidFill>
+              </a:rPr>
+              <a:t>✓</a:t>
+            </a:r>
+          </a:p>
+        </p:txBody>
+      </p:sp>
+      <p:sp>
+        <p:nvSpPr>
+          <p:cNvPr id="250" name="CommLbl"/>
+          <p:cNvSpPr txBox="1"/>
+          <p:nvPr/>
+        </p:nvSpPr>
+        <p:spPr>
+          <a:xfrm>
+            <a:off x="502920" y="3291840"/>
+            <a:ext cx="8138160" cy="365760"/>
+          </a:xfrm>
+          <a:prstGeom prst="rect">
+            <a:avLst/>
+          </a:prstGeom>
+          <a:noFill/>
+        </p:spPr>
+        <p:txBody>
+          <a:bodyPr wrap="square" lIns="0" tIns="0" rIns="0" bIns="0" anchor="ctr"/>
+          <a:lstStyle/>
+          <a:p>
+            <a:pPr algn="ctr">
+              <a:buNone/>
+            </a:pPr>
+            <a:r>
+              <a:rPr lang="en-US" sz="2000" b="0" i="0" dirty="0">
+                <a:solidFill>
+                  <a:srgbClr val="5C4826"/>
+                </a:solidFill>
+              </a:rPr>
+              <a:t>+ 100 ms communication along the path</a:t>
+            </a:r>
+            <a:r>
+              <a:rPr lang="en-US" sz="2000" b="1" i="0" dirty="0">
+                <a:solidFill>
+                  <a:srgbClr val="1F7A4D"/>
+                </a:solidFill>
+              </a:rPr>
+              <a:t>  ✓</a:t>
             </a:r>
           </a:p>
         </p:txBody>
       </p:sp>
       <p:cxnSp>
         <p:nvCxnSpPr>
-          <p:cNvPr id="132" name="Path"/>
+          <p:cNvPr id="260" name="HeavyArrow"/>
           <p:cNvCxnSpPr/>
           <p:nvPr/>
         </p:nvCxnSpPr>
         <p:spPr>
           <a:xfrm>
-            <a:off x="914400" y="3170280"/>
-            <a:ext cx="7315200" cy="0"/>
+            <a:off x="960120" y="4069080"/>
+            <a:ext cx="7178040" cy="0"/>
           </a:xfrm>
           <a:prstGeom prst="line">
             <a:avLst/>
           </a:prstGeom>
-          <a:ln w="19050">
+          <a:ln w="57150">
             <a:solidFill>
-              <a:srgbClr val="8E6F3E"/>
+              <a:srgbClr val="5C4826"/>
             </a:solidFill>
+            <a:tailEnd type="triangle" w="lg" len="lg"/>
           </a:ln>
           <a:effectLst/>
         </p:spPr>
@@ -10493,11 +10634,1088 @@
           </a:fontRef>
         </p:style>
       </p:cxnSp>
+      <p:sp>
+        <p:nvSpPr>
+          <p:cNvPr id="261" name="TotalLbl"/>
+          <p:cNvSpPr txBox="1"/>
+          <p:nvPr/>
+        </p:nvSpPr>
+        <p:spPr>
+          <a:xfrm>
+            <a:off x="274320" y="4206240"/>
+            <a:ext cx="8595360" cy="457200"/>
+          </a:xfrm>
+          <a:prstGeom prst="rect">
+            <a:avLst/>
+          </a:prstGeom>
+          <a:noFill/>
+        </p:spPr>
+        <p:txBody>
+          <a:bodyPr wrap="square" lIns="0" tIns="0" rIns="0" bIns="0" anchor="ctr"/>
+          <a:lstStyle/>
+          <a:p>
+            <a:pPr algn="ctr">
+              <a:buNone/>
+            </a:pPr>
+            <a:r>
+              <a:rPr lang="en-US" sz="2000" b="1" i="0" dirty="0">
+                <a:solidFill>
+                  <a:srgbClr val="5C4826"/>
+                </a:solidFill>
+              </a:rPr>
+              <a:t>END-TO-END MEASUREMENT: 520 ms</a:t>
+            </a:r>
+          </a:p>
+        </p:txBody>
+      </p:sp>
+      <p:sp>
+        <p:nvSpPr>
+          <p:cNvPr id="262" name="RedX"/>
+          <p:cNvSpPr txBox="1"/>
+          <p:nvPr/>
+        </p:nvSpPr>
+        <p:spPr>
+          <a:xfrm>
+            <a:off x="6492240" y="4183380"/>
+            <a:ext cx="548640" cy="502920"/>
+          </a:xfrm>
+          <a:prstGeom prst="rect">
+            <a:avLst/>
+          </a:prstGeom>
+          <a:noFill/>
+        </p:spPr>
+        <p:txBody>
+          <a:bodyPr wrap="square" lIns="0" tIns="0" rIns="0" bIns="0" anchor="ctr"/>
+          <a:lstStyle/>
+          <a:p>
+            <a:pPr algn="ctr">
+              <a:buNone/>
+            </a:pPr>
+            <a:r>
+              <a:rPr lang="en-US" sz="3200" b="1" i="0" dirty="0">
+                <a:solidFill>
+                  <a:srgbClr val="C0392B"/>
+                </a:solidFill>
+              </a:rPr>
+              <a:t>✗</a:t>
+            </a:r>
+          </a:p>
+        </p:txBody>
+      </p:sp>
+      <p:sp>
+        <p:nvSpPr>
+          <p:cNvPr id="131" name="Ex"/>
+          <p:cNvSpPr txBox="1"/>
+          <p:nvPr/>
+        </p:nvSpPr>
+        <p:spPr>
+          <a:xfrm>
+            <a:off x="274320" y="4846320"/>
+            <a:ext cx="8595360" cy="822960"/>
+          </a:xfrm>
+          <a:prstGeom prst="rect">
+            <a:avLst/>
+          </a:prstGeom>
+          <a:noFill/>
+        </p:spPr>
+        <p:txBody>
+          <a:bodyPr wrap="square" lIns="0" tIns="0" rIns="0" bIns="0" anchor="ctr">
+            <a:spAutoFit/>
+          </a:bodyPr>
+          <a:lstStyle/>
+          <a:p>
+            <a:pPr algn="ctr"/>
+            <a:r>
+              <a:rPr sz="2000" b="0" i="0">
+                <a:solidFill>
+                  <a:srgbClr val="555960"/>
+                </a:solidFill>
+              </a:rPr>
+              <a:t>component latency  ≠  end-to-end latency</a:t>
+            </a:r>
+          </a:p>
+          <a:p>
+            <a:pPr algn="ctr"/>
+            <a:r>
+              <a:rPr sz="2000" b="0" i="0">
+                <a:solidFill>
+                  <a:srgbClr val="555960"/>
+                </a:solidFill>
+              </a:rPr>
+              <a:t>service availability  ≠  system availability when dependencies fail together</a:t>
+            </a:r>
+          </a:p>
+        </p:txBody>
+      </p:sp>
+      <p:sp>
+        <p:nvSpPr>
+          <p:cNvPr id="116" name="FooterBand"/>
+          <p:cNvSpPr/>
+          <p:nvPr/>
+        </p:nvSpPr>
+        <p:spPr>
+          <a:xfrm>
+            <a:off x="274320" y="5852160"/>
+            <a:ext cx="8595360" cy="566928"/>
+          </a:xfrm>
+          <a:prstGeom prst="rect">
+            <a:avLst/>
+          </a:prstGeom>
+          <a:solidFill>
+            <a:srgbClr val="8E6F3E"/>
+          </a:solidFill>
+          <a:ln>
+            <a:noFill/>
+          </a:ln>
+        </p:spPr>
+        <p:txBody>
+          <a:bodyPr wrap="square" lIns="91440" tIns="45720" rIns="91440" bIns="45720" anchor="ctr"/>
+          <a:lstStyle/>
+          <a:p>
+            <a:pPr algn="ctr">
+              <a:buNone/>
+            </a:pPr>
+            <a:r>
+              <a:rPr lang="en-US" sz="2000" b="1" i="0" dirty="0">
+                <a:solidFill>
+                  <a:srgbClr val="FFFFFF"/>
+                </a:solidFill>
+              </a:rPr>
+              <a:t>Local measurement cannot establish a composed property.</a:t>
+            </a:r>
+          </a:p>
+        </p:txBody>
+      </p:sp>
     </p:spTree>
   </p:cSld>
   <p:clrMapOvr>
     <a:masterClrMapping/>
   </p:clrMapOvr>
+  <p:timing>
+    <p:tnLst>
+      <p:par>
+        <p:cTn id="1" dur="indefinite" restart="never" nodeType="tmRoot">
+          <p:childTnLst>
+            <p:seq concurrent="1" nextAc="seek">
+              <p:cTn id="2" dur="indefinite" nodeType="mainSeq">
+                <p:childTnLst>
+                  <p:par>
+                    <p:cTn id="30" fill="hold">
+                      <p:stCondLst>
+                        <p:cond delay="indefinite"/>
+                      </p:stCondLst>
+                      <p:childTnLst>
+                        <p:par>
+                          <p:cTn id="31" fill="hold">
+                            <p:stCondLst>
+                              <p:cond delay="0"/>
+                            </p:stCondLst>
+                            <p:childTnLst>
+                              <p:par>
+                                <p:cTn id="3" presetID="10" presetClass="entr" presetSubtype="0" fill="hold" nodeType="clickEffect">
+                                  <p:stCondLst>
+                                    <p:cond delay="0"/>
+                                  </p:stCondLst>
+                                  <p:childTnLst>
+                                    <p:set>
+                                      <p:cBhvr>
+                                        <p:cTn id="4" dur="1" fill="hold">
+                                          <p:stCondLst>
+                                            <p:cond delay="0"/>
+                                          </p:stCondLst>
+                                        </p:cTn>
+                                        <p:tgtEl>
+                                          <p:spTgt spid="200"/>
+                                        </p:tgtEl>
+                                        <p:attrNameLst>
+                                          <p:attrName>style.visibility</p:attrName>
+                                        </p:attrNameLst>
+                                      </p:cBhvr>
+                                      <p:to>
+                                        <p:strVal val="visible"/>
+                                      </p:to>
+                                    </p:set>
+                                    <p:animEffect transition="in" filter="fade">
+                                      <p:cBhvr>
+                                        <p:cTn id="5" dur="500"/>
+                                        <p:tgtEl>
+                                          <p:spTgt spid="200"/>
+                                        </p:tgtEl>
+                                      </p:cBhvr>
+                                    </p:animEffect>
+                                  </p:childTnLst>
+                                </p:cTn>
+                              </p:par>
+                              <p:par>
+                                <p:cTn id="6" presetID="10" presetClass="entr" presetSubtype="0" fill="hold" nodeType="withEffect">
+                                  <p:stCondLst>
+                                    <p:cond delay="0"/>
+                                  </p:stCondLst>
+                                  <p:childTnLst>
+                                    <p:set>
+                                      <p:cBhvr>
+                                        <p:cTn id="7" dur="1" fill="hold">
+                                          <p:stCondLst>
+                                            <p:cond delay="0"/>
+                                          </p:stCondLst>
+                                        </p:cTn>
+                                        <p:tgtEl>
+                                          <p:spTgt spid="201"/>
+                                        </p:tgtEl>
+                                        <p:attrNameLst>
+                                          <p:attrName>style.visibility</p:attrName>
+                                        </p:attrNameLst>
+                                      </p:cBhvr>
+                                      <p:to>
+                                        <p:strVal val="visible"/>
+                                      </p:to>
+                                    </p:set>
+                                    <p:animEffect transition="in" filter="fade">
+                                      <p:cBhvr>
+                                        <p:cTn id="8" dur="500"/>
+                                        <p:tgtEl>
+                                          <p:spTgt spid="201"/>
+                                        </p:tgtEl>
+                                      </p:cBhvr>
+                                    </p:animEffect>
+                                  </p:childTnLst>
+                                </p:cTn>
+                              </p:par>
+                              <p:par>
+                                <p:cTn id="9" presetID="10" presetClass="entr" presetSubtype="0" fill="hold" nodeType="withEffect">
+                                  <p:stCondLst>
+                                    <p:cond delay="0"/>
+                                  </p:stCondLst>
+                                  <p:childTnLst>
+                                    <p:set>
+                                      <p:cBhvr>
+                                        <p:cTn id="10" dur="1" fill="hold">
+                                          <p:stCondLst>
+                                            <p:cond delay="0"/>
+                                          </p:stCondLst>
+                                        </p:cTn>
+                                        <p:tgtEl>
+                                          <p:spTgt spid="210"/>
+                                        </p:tgtEl>
+                                        <p:attrNameLst>
+                                          <p:attrName>style.visibility</p:attrName>
+                                        </p:attrNameLst>
+                                      </p:cBhvr>
+                                      <p:to>
+                                        <p:strVal val="visible"/>
+                                      </p:to>
+                                    </p:set>
+                                    <p:animEffect transition="in" filter="fade">
+                                      <p:cBhvr>
+                                        <p:cTn id="11" dur="500"/>
+                                        <p:tgtEl>
+                                          <p:spTgt spid="210"/>
+                                        </p:tgtEl>
+                                      </p:cBhvr>
+                                    </p:animEffect>
+                                  </p:childTnLst>
+                                </p:cTn>
+                              </p:par>
+                              <p:par>
+                                <p:cTn id="12" presetID="10" presetClass="entr" presetSubtype="0" fill="hold" nodeType="withEffect">
+                                  <p:stCondLst>
+                                    <p:cond delay="0"/>
+                                  </p:stCondLst>
+                                  <p:childTnLst>
+                                    <p:set>
+                                      <p:cBhvr>
+                                        <p:cTn id="13" dur="1" fill="hold">
+                                          <p:stCondLst>
+                                            <p:cond delay="0"/>
+                                          </p:stCondLst>
+                                        </p:cTn>
+                                        <p:tgtEl>
+                                          <p:spTgt spid="220"/>
+                                        </p:tgtEl>
+                                        <p:attrNameLst>
+                                          <p:attrName>style.visibility</p:attrName>
+                                        </p:attrNameLst>
+                                      </p:cBhvr>
+                                      <p:to>
+                                        <p:strVal val="visible"/>
+                                      </p:to>
+                                    </p:set>
+                                    <p:animEffect transition="in" filter="fade">
+                                      <p:cBhvr>
+                                        <p:cTn id="14" dur="500"/>
+                                        <p:tgtEl>
+                                          <p:spTgt spid="220"/>
+                                        </p:tgtEl>
+                                      </p:cBhvr>
+                                    </p:animEffect>
+                                  </p:childTnLst>
+                                </p:cTn>
+                              </p:par>
+                              <p:par>
+                                <p:cTn id="15" presetID="10" presetClass="entr" presetSubtype="0" fill="hold" nodeType="withEffect">
+                                  <p:stCondLst>
+                                    <p:cond delay="0"/>
+                                  </p:stCondLst>
+                                  <p:childTnLst>
+                                    <p:set>
+                                      <p:cBhvr>
+                                        <p:cTn id="16" dur="1" fill="hold">
+                                          <p:stCondLst>
+                                            <p:cond delay="0"/>
+                                          </p:stCondLst>
+                                        </p:cTn>
+                                        <p:tgtEl>
+                                          <p:spTgt spid="211"/>
+                                        </p:tgtEl>
+                                        <p:attrNameLst>
+                                          <p:attrName>style.visibility</p:attrName>
+                                        </p:attrNameLst>
+                                      </p:cBhvr>
+                                      <p:to>
+                                        <p:strVal val="visible"/>
+                                      </p:to>
+                                    </p:set>
+                                    <p:animEffect transition="in" filter="fade">
+                                      <p:cBhvr>
+                                        <p:cTn id="17" dur="500"/>
+                                        <p:tgtEl>
+                                          <p:spTgt spid="211"/>
+                                        </p:tgtEl>
+                                      </p:cBhvr>
+                                    </p:animEffect>
+                                  </p:childTnLst>
+                                </p:cTn>
+                              </p:par>
+                              <p:par>
+                                <p:cTn id="18" presetID="10" presetClass="entr" presetSubtype="0" fill="hold" nodeType="withEffect">
+                                  <p:stCondLst>
+                                    <p:cond delay="0"/>
+                                  </p:stCondLst>
+                                  <p:childTnLst>
+                                    <p:set>
+                                      <p:cBhvr>
+                                        <p:cTn id="19" dur="1" fill="hold">
+                                          <p:stCondLst>
+                                            <p:cond delay="0"/>
+                                          </p:stCondLst>
+                                        </p:cTn>
+                                        <p:tgtEl>
+                                          <p:spTgt spid="221"/>
+                                        </p:tgtEl>
+                                        <p:attrNameLst>
+                                          <p:attrName>style.visibility</p:attrName>
+                                        </p:attrNameLst>
+                                      </p:cBhvr>
+                                      <p:to>
+                                        <p:strVal val="visible"/>
+                                      </p:to>
+                                    </p:set>
+                                    <p:animEffect transition="in" filter="fade">
+                                      <p:cBhvr>
+                                        <p:cTn id="20" dur="500"/>
+                                        <p:tgtEl>
+                                          <p:spTgt spid="221"/>
+                                        </p:tgtEl>
+                                      </p:cBhvr>
+                                    </p:animEffect>
+                                  </p:childTnLst>
+                                </p:cTn>
+                              </p:par>
+                              <p:par>
+                                <p:cTn id="21" presetID="10" presetClass="entr" presetSubtype="0" fill="hold" nodeType="withEffect">
+                                  <p:stCondLst>
+                                    <p:cond delay="0"/>
+                                  </p:stCondLst>
+                                  <p:childTnLst>
+                                    <p:set>
+                                      <p:cBhvr>
+                                        <p:cTn id="22" dur="1" fill="hold">
+                                          <p:stCondLst>
+                                            <p:cond delay="0"/>
+                                          </p:stCondLst>
+                                        </p:cTn>
+                                        <p:tgtEl>
+                                          <p:spTgt spid="212"/>
+                                        </p:tgtEl>
+                                        <p:attrNameLst>
+                                          <p:attrName>style.visibility</p:attrName>
+                                        </p:attrNameLst>
+                                      </p:cBhvr>
+                                      <p:to>
+                                        <p:strVal val="visible"/>
+                                      </p:to>
+                                    </p:set>
+                                    <p:animEffect transition="in" filter="fade">
+                                      <p:cBhvr>
+                                        <p:cTn id="23" dur="500"/>
+                                        <p:tgtEl>
+                                          <p:spTgt spid="212"/>
+                                        </p:tgtEl>
+                                      </p:cBhvr>
+                                    </p:animEffect>
+                                  </p:childTnLst>
+                                </p:cTn>
+                              </p:par>
+                              <p:par>
+                                <p:cTn id="24" presetID="10" presetClass="entr" presetSubtype="0" fill="hold" nodeType="withEffect">
+                                  <p:stCondLst>
+                                    <p:cond delay="0"/>
+                                  </p:stCondLst>
+                                  <p:childTnLst>
+                                    <p:set>
+                                      <p:cBhvr>
+                                        <p:cTn id="25" dur="1" fill="hold">
+                                          <p:stCondLst>
+                                            <p:cond delay="0"/>
+                                          </p:stCondLst>
+                                        </p:cTn>
+                                        <p:tgtEl>
+                                          <p:spTgt spid="222"/>
+                                        </p:tgtEl>
+                                        <p:attrNameLst>
+                                          <p:attrName>style.visibility</p:attrName>
+                                        </p:attrNameLst>
+                                      </p:cBhvr>
+                                      <p:to>
+                                        <p:strVal val="visible"/>
+                                      </p:to>
+                                    </p:set>
+                                    <p:animEffect transition="in" filter="fade">
+                                      <p:cBhvr>
+                                        <p:cTn id="26" dur="500"/>
+                                        <p:tgtEl>
+                                          <p:spTgt spid="222"/>
+                                        </p:tgtEl>
+                                      </p:cBhvr>
+                                    </p:animEffect>
+                                  </p:childTnLst>
+                                </p:cTn>
+                              </p:par>
+                              <p:par>
+                                <p:cTn id="27" presetID="10" presetClass="entr" presetSubtype="0" fill="hold" nodeType="withEffect">
+                                  <p:stCondLst>
+                                    <p:cond delay="0"/>
+                                  </p:stCondLst>
+                                  <p:childTnLst>
+                                    <p:set>
+                                      <p:cBhvr>
+                                        <p:cTn id="28" dur="1" fill="hold">
+                                          <p:stCondLst>
+                                            <p:cond delay="0"/>
+                                          </p:stCondLst>
+                                        </p:cTn>
+                                        <p:tgtEl>
+                                          <p:spTgt spid="213"/>
+                                        </p:tgtEl>
+                                        <p:attrNameLst>
+                                          <p:attrName>style.visibility</p:attrName>
+                                        </p:attrNameLst>
+                                      </p:cBhvr>
+                                      <p:to>
+                                        <p:strVal val="visible"/>
+                                      </p:to>
+                                    </p:set>
+                                    <p:animEffect transition="in" filter="fade">
+                                      <p:cBhvr>
+                                        <p:cTn id="29" dur="500"/>
+                                        <p:tgtEl>
+                                          <p:spTgt spid="213"/>
+                                        </p:tgtEl>
+                                      </p:cBhvr>
+                                    </p:animEffect>
+                                  </p:childTnLst>
+                                </p:cTn>
+                              </p:par>
+                            </p:childTnLst>
+                          </p:cTn>
+                        </p:par>
+                      </p:childTnLst>
+                    </p:cTn>
+                  </p:par>
+                  <p:par>
+                    <p:cTn id="59" fill="hold">
+                      <p:stCondLst>
+                        <p:cond delay="indefinite"/>
+                      </p:stCondLst>
+                      <p:childTnLst>
+                        <p:par>
+                          <p:cTn id="60" fill="hold">
+                            <p:stCondLst>
+                              <p:cond delay="0"/>
+                            </p:stCondLst>
+                            <p:childTnLst>
+                              <p:par>
+                                <p:cTn id="32" presetID="10" presetClass="entr" presetSubtype="0" fill="hold" nodeType="clickEffect">
+                                  <p:stCondLst>
+                                    <p:cond delay="0"/>
+                                  </p:stCondLst>
+                                  <p:childTnLst>
+                                    <p:set>
+                                      <p:cBhvr>
+                                        <p:cTn id="33" dur="1" fill="hold">
+                                          <p:stCondLst>
+                                            <p:cond delay="0"/>
+                                          </p:stCondLst>
+                                        </p:cTn>
+                                        <p:tgtEl>
+                                          <p:spTgt spid="230"/>
+                                        </p:tgtEl>
+                                        <p:attrNameLst>
+                                          <p:attrName>style.visibility</p:attrName>
+                                        </p:attrNameLst>
+                                      </p:cBhvr>
+                                      <p:to>
+                                        <p:strVal val="visible"/>
+                                      </p:to>
+                                    </p:set>
+                                    <p:animEffect transition="in" filter="fade">
+                                      <p:cBhvr>
+                                        <p:cTn id="34" dur="500"/>
+                                        <p:tgtEl>
+                                          <p:spTgt spid="230"/>
+                                        </p:tgtEl>
+                                      </p:cBhvr>
+                                    </p:animEffect>
+                                  </p:childTnLst>
+                                </p:cTn>
+                              </p:par>
+                              <p:par>
+                                <p:cTn id="35" presetID="10" presetClass="entr" presetSubtype="0" fill="hold" nodeType="withEffect">
+                                  <p:stCondLst>
+                                    <p:cond delay="0"/>
+                                  </p:stCondLst>
+                                  <p:childTnLst>
+                                    <p:set>
+                                      <p:cBhvr>
+                                        <p:cTn id="36" dur="1" fill="hold">
+                                          <p:stCondLst>
+                                            <p:cond delay="0"/>
+                                          </p:stCondLst>
+                                        </p:cTn>
+                                        <p:tgtEl>
+                                          <p:spTgt spid="240"/>
+                                        </p:tgtEl>
+                                        <p:attrNameLst>
+                                          <p:attrName>style.visibility</p:attrName>
+                                        </p:attrNameLst>
+                                      </p:cBhvr>
+                                      <p:to>
+                                        <p:strVal val="visible"/>
+                                      </p:to>
+                                    </p:set>
+                                    <p:animEffect transition="in" filter="fade">
+                                      <p:cBhvr>
+                                        <p:cTn id="37" dur="500"/>
+                                        <p:tgtEl>
+                                          <p:spTgt spid="240"/>
+                                        </p:tgtEl>
+                                      </p:cBhvr>
+                                    </p:animEffect>
+                                  </p:childTnLst>
+                                </p:cTn>
+                              </p:par>
+                              <p:par>
+                                <p:cTn id="38" presetID="10" presetClass="entr" presetSubtype="0" fill="hold" nodeType="withEffect">
+                                  <p:stCondLst>
+                                    <p:cond delay="0"/>
+                                  </p:stCondLst>
+                                  <p:childTnLst>
+                                    <p:set>
+                                      <p:cBhvr>
+                                        <p:cTn id="39" dur="1" fill="hold">
+                                          <p:stCondLst>
+                                            <p:cond delay="0"/>
+                                          </p:stCondLst>
+                                        </p:cTn>
+                                        <p:tgtEl>
+                                          <p:spTgt spid="231"/>
+                                        </p:tgtEl>
+                                        <p:attrNameLst>
+                                          <p:attrName>style.visibility</p:attrName>
+                                        </p:attrNameLst>
+                                      </p:cBhvr>
+                                      <p:to>
+                                        <p:strVal val="visible"/>
+                                      </p:to>
+                                    </p:set>
+                                    <p:animEffect transition="in" filter="fade">
+                                      <p:cBhvr>
+                                        <p:cTn id="40" dur="500"/>
+                                        <p:tgtEl>
+                                          <p:spTgt spid="231"/>
+                                        </p:tgtEl>
+                                      </p:cBhvr>
+                                    </p:animEffect>
+                                  </p:childTnLst>
+                                </p:cTn>
+                              </p:par>
+                              <p:par>
+                                <p:cTn id="41" presetID="10" presetClass="entr" presetSubtype="0" fill="hold" nodeType="withEffect">
+                                  <p:stCondLst>
+                                    <p:cond delay="0"/>
+                                  </p:stCondLst>
+                                  <p:childTnLst>
+                                    <p:set>
+                                      <p:cBhvr>
+                                        <p:cTn id="42" dur="1" fill="hold">
+                                          <p:stCondLst>
+                                            <p:cond delay="0"/>
+                                          </p:stCondLst>
+                                        </p:cTn>
+                                        <p:tgtEl>
+                                          <p:spTgt spid="241"/>
+                                        </p:tgtEl>
+                                        <p:attrNameLst>
+                                          <p:attrName>style.visibility</p:attrName>
+                                        </p:attrNameLst>
+                                      </p:cBhvr>
+                                      <p:to>
+                                        <p:strVal val="visible"/>
+                                      </p:to>
+                                    </p:set>
+                                    <p:animEffect transition="in" filter="fade">
+                                      <p:cBhvr>
+                                        <p:cTn id="43" dur="500"/>
+                                        <p:tgtEl>
+                                          <p:spTgt spid="241"/>
+                                        </p:tgtEl>
+                                      </p:cBhvr>
+                                    </p:animEffect>
+                                  </p:childTnLst>
+                                </p:cTn>
+                              </p:par>
+                              <p:par>
+                                <p:cTn id="44" presetID="10" presetClass="entr" presetSubtype="0" fill="hold" nodeType="withEffect">
+                                  <p:stCondLst>
+                                    <p:cond delay="0"/>
+                                  </p:stCondLst>
+                                  <p:childTnLst>
+                                    <p:set>
+                                      <p:cBhvr>
+                                        <p:cTn id="45" dur="1" fill="hold">
+                                          <p:stCondLst>
+                                            <p:cond delay="0"/>
+                                          </p:stCondLst>
+                                        </p:cTn>
+                                        <p:tgtEl>
+                                          <p:spTgt spid="232"/>
+                                        </p:tgtEl>
+                                        <p:attrNameLst>
+                                          <p:attrName>style.visibility</p:attrName>
+                                        </p:attrNameLst>
+                                      </p:cBhvr>
+                                      <p:to>
+                                        <p:strVal val="visible"/>
+                                      </p:to>
+                                    </p:set>
+                                    <p:animEffect transition="in" filter="fade">
+                                      <p:cBhvr>
+                                        <p:cTn id="46" dur="500"/>
+                                        <p:tgtEl>
+                                          <p:spTgt spid="232"/>
+                                        </p:tgtEl>
+                                      </p:cBhvr>
+                                    </p:animEffect>
+                                  </p:childTnLst>
+                                </p:cTn>
+                              </p:par>
+                              <p:par>
+                                <p:cTn id="47" presetID="10" presetClass="entr" presetSubtype="0" fill="hold" nodeType="withEffect">
+                                  <p:stCondLst>
+                                    <p:cond delay="0"/>
+                                  </p:stCondLst>
+                                  <p:childTnLst>
+                                    <p:set>
+                                      <p:cBhvr>
+                                        <p:cTn id="48" dur="1" fill="hold">
+                                          <p:stCondLst>
+                                            <p:cond delay="0"/>
+                                          </p:stCondLst>
+                                        </p:cTn>
+                                        <p:tgtEl>
+                                          <p:spTgt spid="242"/>
+                                        </p:tgtEl>
+                                        <p:attrNameLst>
+                                          <p:attrName>style.visibility</p:attrName>
+                                        </p:attrNameLst>
+                                      </p:cBhvr>
+                                      <p:to>
+                                        <p:strVal val="visible"/>
+                                      </p:to>
+                                    </p:set>
+                                    <p:animEffect transition="in" filter="fade">
+                                      <p:cBhvr>
+                                        <p:cTn id="49" dur="500"/>
+                                        <p:tgtEl>
+                                          <p:spTgt spid="242"/>
+                                        </p:tgtEl>
+                                      </p:cBhvr>
+                                    </p:animEffect>
+                                  </p:childTnLst>
+                                </p:cTn>
+                              </p:par>
+                              <p:par>
+                                <p:cTn id="50" presetID="10" presetClass="entr" presetSubtype="0" fill="hold" nodeType="withEffect">
+                                  <p:stCondLst>
+                                    <p:cond delay="0"/>
+                                  </p:stCondLst>
+                                  <p:childTnLst>
+                                    <p:set>
+                                      <p:cBhvr>
+                                        <p:cTn id="51" dur="1" fill="hold">
+                                          <p:stCondLst>
+                                            <p:cond delay="0"/>
+                                          </p:stCondLst>
+                                        </p:cTn>
+                                        <p:tgtEl>
+                                          <p:spTgt spid="233"/>
+                                        </p:tgtEl>
+                                        <p:attrNameLst>
+                                          <p:attrName>style.visibility</p:attrName>
+                                        </p:attrNameLst>
+                                      </p:cBhvr>
+                                      <p:to>
+                                        <p:strVal val="visible"/>
+                                      </p:to>
+                                    </p:set>
+                                    <p:animEffect transition="in" filter="fade">
+                                      <p:cBhvr>
+                                        <p:cTn id="52" dur="500"/>
+                                        <p:tgtEl>
+                                          <p:spTgt spid="233"/>
+                                        </p:tgtEl>
+                                      </p:cBhvr>
+                                    </p:animEffect>
+                                  </p:childTnLst>
+                                </p:cTn>
+                              </p:par>
+                              <p:par>
+                                <p:cTn id="53" presetID="10" presetClass="entr" presetSubtype="0" fill="hold" nodeType="withEffect">
+                                  <p:stCondLst>
+                                    <p:cond delay="0"/>
+                                  </p:stCondLst>
+                                  <p:childTnLst>
+                                    <p:set>
+                                      <p:cBhvr>
+                                        <p:cTn id="54" dur="1" fill="hold">
+                                          <p:stCondLst>
+                                            <p:cond delay="0"/>
+                                          </p:stCondLst>
+                                        </p:cTn>
+                                        <p:tgtEl>
+                                          <p:spTgt spid="243"/>
+                                        </p:tgtEl>
+                                        <p:attrNameLst>
+                                          <p:attrName>style.visibility</p:attrName>
+                                        </p:attrNameLst>
+                                      </p:cBhvr>
+                                      <p:to>
+                                        <p:strVal val="visible"/>
+                                      </p:to>
+                                    </p:set>
+                                    <p:animEffect transition="in" filter="fade">
+                                      <p:cBhvr>
+                                        <p:cTn id="55" dur="500"/>
+                                        <p:tgtEl>
+                                          <p:spTgt spid="243"/>
+                                        </p:tgtEl>
+                                      </p:cBhvr>
+                                    </p:animEffect>
+                                  </p:childTnLst>
+                                </p:cTn>
+                              </p:par>
+                              <p:par>
+                                <p:cTn id="56" presetID="10" presetClass="entr" presetSubtype="0" fill="hold" nodeType="withEffect">
+                                  <p:stCondLst>
+                                    <p:cond delay="0"/>
+                                  </p:stCondLst>
+                                  <p:childTnLst>
+                                    <p:set>
+                                      <p:cBhvr>
+                                        <p:cTn id="57" dur="1" fill="hold">
+                                          <p:stCondLst>
+                                            <p:cond delay="0"/>
+                                          </p:stCondLst>
+                                        </p:cTn>
+                                        <p:tgtEl>
+                                          <p:spTgt spid="250"/>
+                                        </p:tgtEl>
+                                        <p:attrNameLst>
+                                          <p:attrName>style.visibility</p:attrName>
+                                        </p:attrNameLst>
+                                      </p:cBhvr>
+                                      <p:to>
+                                        <p:strVal val="visible"/>
+                                      </p:to>
+                                    </p:set>
+                                    <p:animEffect transition="in" filter="fade">
+                                      <p:cBhvr>
+                                        <p:cTn id="58" dur="500"/>
+                                        <p:tgtEl>
+                                          <p:spTgt spid="250"/>
+                                        </p:tgtEl>
+                                      </p:cBhvr>
+                                    </p:animEffect>
+                                  </p:childTnLst>
+                                </p:cTn>
+                              </p:par>
+                            </p:childTnLst>
+                          </p:cTn>
+                        </p:par>
+                      </p:childTnLst>
+                    </p:cTn>
+                  </p:par>
+                  <p:par>
+                    <p:cTn id="67" fill="hold">
+                      <p:stCondLst>
+                        <p:cond delay="indefinite"/>
+                      </p:stCondLst>
+                      <p:childTnLst>
+                        <p:par>
+                          <p:cTn id="68" fill="hold">
+                            <p:stCondLst>
+                              <p:cond delay="0"/>
+                            </p:stCondLst>
+                            <p:childTnLst>
+                              <p:par>
+                                <p:cTn id="61" presetID="10" presetClass="entr" presetSubtype="0" fill="hold" nodeType="clickEffect">
+                                  <p:stCondLst>
+                                    <p:cond delay="0"/>
+                                  </p:stCondLst>
+                                  <p:childTnLst>
+                                    <p:set>
+                                      <p:cBhvr>
+                                        <p:cTn id="62" dur="1" fill="hold">
+                                          <p:stCondLst>
+                                            <p:cond delay="0"/>
+                                          </p:stCondLst>
+                                        </p:cTn>
+                                        <p:tgtEl>
+                                          <p:spTgt spid="260"/>
+                                        </p:tgtEl>
+                                        <p:attrNameLst>
+                                          <p:attrName>style.visibility</p:attrName>
+                                        </p:attrNameLst>
+                                      </p:cBhvr>
+                                      <p:to>
+                                        <p:strVal val="visible"/>
+                                      </p:to>
+                                    </p:set>
+                                    <p:animEffect transition="in" filter="fade">
+                                      <p:cBhvr>
+                                        <p:cTn id="63" dur="500"/>
+                                        <p:tgtEl>
+                                          <p:spTgt spid="260"/>
+                                        </p:tgtEl>
+                                      </p:cBhvr>
+                                    </p:animEffect>
+                                  </p:childTnLst>
+                                </p:cTn>
+                              </p:par>
+                              <p:par>
+                                <p:cTn id="64" presetID="10" presetClass="entr" presetSubtype="0" fill="hold" nodeType="withEffect">
+                                  <p:stCondLst>
+                                    <p:cond delay="0"/>
+                                  </p:stCondLst>
+                                  <p:childTnLst>
+                                    <p:set>
+                                      <p:cBhvr>
+                                        <p:cTn id="65" dur="1" fill="hold">
+                                          <p:stCondLst>
+                                            <p:cond delay="0"/>
+                                          </p:stCondLst>
+                                        </p:cTn>
+                                        <p:tgtEl>
+                                          <p:spTgt spid="261"/>
+                                        </p:tgtEl>
+                                        <p:attrNameLst>
+                                          <p:attrName>style.visibility</p:attrName>
+                                        </p:attrNameLst>
+                                      </p:cBhvr>
+                                      <p:to>
+                                        <p:strVal val="visible"/>
+                                      </p:to>
+                                    </p:set>
+                                    <p:animEffect transition="in" filter="fade">
+                                      <p:cBhvr>
+                                        <p:cTn id="66" dur="500"/>
+                                        <p:tgtEl>
+                                          <p:spTgt spid="261"/>
+                                        </p:tgtEl>
+                                      </p:cBhvr>
+                                    </p:animEffect>
+                                  </p:childTnLst>
+                                </p:cTn>
+                              </p:par>
+                            </p:childTnLst>
+                          </p:cTn>
+                        </p:par>
+                      </p:childTnLst>
+                    </p:cTn>
+                  </p:par>
+                  <p:par>
+                    <p:cTn id="72" fill="hold">
+                      <p:stCondLst>
+                        <p:cond delay="indefinite"/>
+                      </p:stCondLst>
+                      <p:childTnLst>
+                        <p:par>
+                          <p:cTn id="73" fill="hold">
+                            <p:stCondLst>
+                              <p:cond delay="0"/>
+                            </p:stCondLst>
+                            <p:childTnLst>
+                              <p:par>
+                                <p:cTn id="69" presetID="10" presetClass="entr" presetSubtype="0" fill="hold" nodeType="clickEffect">
+                                  <p:stCondLst>
+                                    <p:cond delay="0"/>
+                                  </p:stCondLst>
+                                  <p:childTnLst>
+                                    <p:set>
+                                      <p:cBhvr>
+                                        <p:cTn id="70" dur="1" fill="hold">
+                                          <p:stCondLst>
+                                            <p:cond delay="0"/>
+                                          </p:stCondLst>
+                                        </p:cTn>
+                                        <p:tgtEl>
+                                          <p:spTgt spid="262"/>
+                                        </p:tgtEl>
+                                        <p:attrNameLst>
+                                          <p:attrName>style.visibility</p:attrName>
+                                        </p:attrNameLst>
+                                      </p:cBhvr>
+                                      <p:to>
+                                        <p:strVal val="visible"/>
+                                      </p:to>
+                                    </p:set>
+                                    <p:animEffect transition="in" filter="fade">
+                                      <p:cBhvr>
+                                        <p:cTn id="71" dur="500"/>
+                                        <p:tgtEl>
+                                          <p:spTgt spid="262"/>
+                                        </p:tgtEl>
+                                      </p:cBhvr>
+                                    </p:animEffect>
+                                  </p:childTnLst>
+                                </p:cTn>
+                              </p:par>
+                            </p:childTnLst>
+                          </p:cTn>
+                        </p:par>
+                      </p:childTnLst>
+                    </p:cTn>
+                  </p:par>
+                  <p:par>
+                    <p:cTn id="80" fill="hold">
+                      <p:stCondLst>
+                        <p:cond delay="indefinite"/>
+                      </p:stCondLst>
+                      <p:childTnLst>
+                        <p:par>
+                          <p:cTn id="81" fill="hold">
+                            <p:stCondLst>
+                              <p:cond delay="0"/>
+                            </p:stCondLst>
+                            <p:childTnLst>
+                              <p:par>
+                                <p:cTn id="74" presetID="10" presetClass="entr" presetSubtype="0" fill="hold" nodeType="clickEffect">
+                                  <p:stCondLst>
+                                    <p:cond delay="0"/>
+                                  </p:stCondLst>
+                                  <p:childTnLst>
+                                    <p:set>
+                                      <p:cBhvr>
+                                        <p:cTn id="75" dur="1" fill="hold">
+                                          <p:stCondLst>
+                                            <p:cond delay="0"/>
+                                          </p:stCondLst>
+                                        </p:cTn>
+                                        <p:tgtEl>
+                                          <p:spTgt spid="131"/>
+                                        </p:tgtEl>
+                                        <p:attrNameLst>
+                                          <p:attrName>style.visibility</p:attrName>
+                                        </p:attrNameLst>
+                                      </p:cBhvr>
+                                      <p:to>
+                                        <p:strVal val="visible"/>
+                                      </p:to>
+                                    </p:set>
+                                    <p:animEffect transition="in" filter="fade">
+                                      <p:cBhvr>
+                                        <p:cTn id="76" dur="500"/>
+                                        <p:tgtEl>
+                                          <p:spTgt spid="131"/>
+                                        </p:tgtEl>
+                                      </p:cBhvr>
+                                    </p:animEffect>
+                                  </p:childTnLst>
+                                </p:cTn>
+                              </p:par>
+                              <p:par>
+                                <p:cTn id="77" presetID="10" presetClass="entr" presetSubtype="0" fill="hold" nodeType="withEffect">
+                                  <p:stCondLst>
+                                    <p:cond delay="0"/>
+                                  </p:stCondLst>
+                                  <p:childTnLst>
+                                    <p:set>
+                                      <p:cBhvr>
+                                        <p:cTn id="78" dur="1" fill="hold">
+                                          <p:stCondLst>
+                                            <p:cond delay="0"/>
+                                          </p:stCondLst>
+                                        </p:cTn>
+                                        <p:tgtEl>
+                                          <p:spTgt spid="116"/>
+                                        </p:tgtEl>
+                                        <p:attrNameLst>
+                                          <p:attrName>style.visibility</p:attrName>
+                                        </p:attrNameLst>
+                                      </p:cBhvr>
+                                      <p:to>
+                                        <p:strVal val="visible"/>
+                                      </p:to>
+                                    </p:set>
+                                    <p:animEffect transition="in" filter="fade">
+                                      <p:cBhvr>
+                                        <p:cTn id="79" dur="500"/>
+                                        <p:tgtEl>
+                                          <p:spTgt spid="116"/>
+                                        </p:tgtEl>
+                                      </p:cBhvr>
+                                    </p:animEffect>
+                                  </p:childTnLst>
+                                </p:cTn>
+                              </p:par>
+                            </p:childTnLst>
+                          </p:cTn>
+                        </p:par>
+                      </p:childTnLst>
+                    </p:cTn>
+                  </p:par>
+                </p:childTnLst>
+              </p:cTn>
+              <p:prevCondLst>
+                <p:cond evt="onPrev" delay="0">
+                  <p:tgtEl>
+                    <p:sldTgt/>
+                  </p:tgtEl>
+                </p:cond>
+              </p:prevCondLst>
+              <p:nextCondLst>
+                <p:cond evt="onNext" delay="0">
+                  <p:tgtEl>
+                    <p:sldTgt/>
+                  </p:tgtEl>
+                </p:cond>
+              </p:nextCondLst>
+            </p:seq>
+          </p:childTnLst>
+        </p:cTn>
+      </p:par>
+    </p:tnLst>
+  </p:timing>
 </p:sld>
 </file>
 
@@ -10916,13 +12134,9 @@
           <a:prstGeom prst="rect">
             <a:avLst/>
           </a:prstGeom>
-          <a:solidFill>
-            <a:srgbClr val="F5F1E8"/>
-          </a:solidFill>
-          <a:ln w="12700">
-            <a:solidFill>
-              <a:srgbClr val="C9B991"/>
-            </a:solidFill>
+          <a:noFill/>
+          <a:ln>
+            <a:noFill/>
           </a:ln>
         </p:spPr>
         <p:txBody>
@@ -12921,13 +14135,9 @@
           <a:prstGeom prst="rect">
             <a:avLst/>
           </a:prstGeom>
-          <a:solidFill>
-            <a:srgbClr val="FBF8F2"/>
-          </a:solidFill>
-          <a:ln w="15875">
-            <a:solidFill>
-              <a:srgbClr val="C9B991"/>
-            </a:solidFill>
+          <a:noFill/>
+          <a:ln>
+            <a:noFill/>
           </a:ln>
         </p:spPr>
         <p:txBody>
@@ -13338,11 +14548,11 @@
             <a:avLst/>
           </a:prstGeom>
           <a:solidFill>
-            <a:srgbClr val="FBF8F2"/>
+            <a:srgbClr val="E8F0F7"/>
           </a:solidFill>
           <a:ln w="15875">
             <a:solidFill>
-              <a:srgbClr val="C9B991"/>
+              <a:srgbClr val="A9C4DB"/>
             </a:solidFill>
           </a:ln>
         </p:spPr>
@@ -13356,7 +14566,7 @@
             <a:r>
               <a:rPr lang="en-US" sz="2000" b="1" i="0" dirty="0">
                 <a:solidFill>
-                  <a:srgbClr val="5C4826"/>
+                  <a:srgbClr val="2E74B5"/>
                 </a:solidFill>
               </a:rPr>
               <a:t>Surrogation: </a:t>
@@ -13380,7 +14590,7 @@
             <a:r>
               <a:rPr lang="en-US" sz="2000" b="1" i="0" dirty="0">
                 <a:solidFill>
-                  <a:srgbClr val="5C4826"/>
+                  <a:srgbClr val="2E74B5"/>
                 </a:solidFill>
               </a:rPr>
               <a:t>Goodhart’s Law: </a:t>
@@ -13759,13 +14969,9 @@
           <a:prstGeom prst="rect">
             <a:avLst/>
           </a:prstGeom>
-          <a:solidFill>
-            <a:srgbClr val="F5F1E8"/>
-          </a:solidFill>
-          <a:ln w="12700">
-            <a:solidFill>
-              <a:srgbClr val="C9B991"/>
-            </a:solidFill>
+          <a:noFill/>
+          <a:ln>
+            <a:noFill/>
           </a:ln>
         </p:spPr>
         <p:txBody>
@@ -18853,11 +20059,11 @@
             <a:avLst/>
           </a:prstGeom>
           <a:solidFill>
-            <a:srgbClr val="F5F1E8"/>
+            <a:srgbClr val="E8F0F7"/>
           </a:solidFill>
           <a:ln w="12700">
             <a:solidFill>
-              <a:srgbClr val="C9B991"/>
+              <a:srgbClr val="A9C4DB"/>
             </a:solidFill>
           </a:ln>
         </p:spPr>
@@ -19676,11 +20882,11 @@
             <a:avLst/>
           </a:prstGeom>
           <a:solidFill>
-            <a:srgbClr val="F5F1E8"/>
+            <a:srgbClr val="E8F0F7"/>
           </a:solidFill>
           <a:ln w="12700">
             <a:solidFill>
-              <a:srgbClr val="C9B991"/>
+              <a:srgbClr val="A9C4DB"/>
             </a:solidFill>
           </a:ln>
         </p:spPr>
@@ -22393,17 +23599,19 @@
           </a:fontRef>
         </p:style>
         <p:txBody>
-          <a:bodyPr wrap="square" rtlCol="0" anchor="ctr"/>
-          <a:lstStyle/>
-          <a:p>
-            <a:pPr algn="ctr"/>
-            <a:r>
-              <a:rPr sz="2000" b="0" i="0">
+          <a:bodyPr wrap="square" lIns="91440" tIns="45720" rIns="91440" bIns="45720" rtlCol="0" anchor="ctr"/>
+          <a:lstStyle/>
+          <a:p>
+            <a:pPr algn="ctr">
+              <a:buNone/>
+            </a:pPr>
+            <a:r>
+              <a:rPr lang="en-US" sz="2000" b="1" i="0" dirty="0">
                 <a:solidFill>
                   <a:srgbClr val="FFFFFF"/>
                 </a:solidFill>
               </a:rPr>
-              <a:t>Measurement is one source of engineering evidence.</a:t>
+              <a:t>A measurement becomes evidence only relative to a claim.</a:t>
             </a:r>
           </a:p>
         </p:txBody>
@@ -22416,7 +23624,7 @@
         </p:nvSpPr>
         <p:spPr>
           <a:xfrm>
-            <a:off x="685800" y="2910300"/>
+            <a:off x="685800" y="2354580"/>
             <a:ext cx="2377440" cy="731520"/>
           </a:xfrm>
           <a:prstGeom prst="rect">
@@ -22445,12 +23653,14 @@
           </a:fontRef>
         </p:style>
         <p:txBody>
-          <a:bodyPr wrap="square" rtlCol="0" anchor="ctr"/>
-          <a:lstStyle/>
-          <a:p>
-            <a:pPr algn="ctr"/>
-            <a:r>
-              <a:rPr sz="2400" b="1" i="0">
+          <a:bodyPr wrap="square" lIns="91440" tIns="45720" rIns="91440" bIns="45720" rtlCol="0" anchor="ctr"/>
+          <a:lstStyle/>
+          <a:p>
+            <a:pPr algn="ctr">
+              <a:buNone/>
+            </a:pPr>
+            <a:r>
+              <a:rPr lang="en-US" sz="2400" b="1" i="0" dirty="0">
                 <a:solidFill>
                   <a:srgbClr val="FFFFFF"/>
                 </a:solidFill>
@@ -22460,6 +23670,42 @@
           </a:p>
         </p:txBody>
       </p:sp>
+      <p:cxnSp>
+        <p:nvCxnSpPr>
+          <p:cNvPr id="22" name="Fan0"/>
+          <p:cNvCxnSpPr/>
+          <p:nvPr/>
+        </p:nvCxnSpPr>
+        <p:spPr>
+          <a:xfrm flipV="1">
+            <a:off x="3063240" y="1257300"/>
+            <a:ext cx="1691640" cy="1463040"/>
+          </a:xfrm>
+          <a:prstGeom prst="line">
+            <a:avLst/>
+          </a:prstGeom>
+          <a:ln w="9525">
+            <a:solidFill>
+              <a:srgbClr val="C9B991"/>
+            </a:solidFill>
+          </a:ln>
+          <a:effectLst/>
+        </p:spPr>
+        <p:style>
+          <a:lnRef idx="2">
+            <a:schemeClr val="accent1"/>
+          </a:lnRef>
+          <a:fillRef idx="0">
+            <a:schemeClr val="accent1"/>
+          </a:fillRef>
+          <a:effectRef idx="1">
+            <a:schemeClr val="accent1"/>
+          </a:effectRef>
+          <a:fontRef idx="minor">
+            <a:schemeClr val="tx1"/>
+          </a:fontRef>
+        </p:style>
+      </p:cxnSp>
       <p:sp>
         <p:nvSpPr>
           <p:cNvPr id="21" name="Mech0"/>
@@ -22502,9 +23748,11 @@
           <a:bodyPr wrap="square" lIns="45720" tIns="22860" rIns="45720" bIns="22860" rtlCol="0" anchor="ctr"/>
           <a:lstStyle/>
           <a:p>
-            <a:pPr algn="ctr"/>
-            <a:r>
-              <a:rPr sz="2000" b="0" i="0">
+            <a:pPr algn="ctr">
+              <a:buNone/>
+            </a:pPr>
+            <a:r>
+              <a:rPr lang="en-US" sz="2000" b="0" i="0" dirty="0">
                 <a:solidFill>
                   <a:srgbClr val="5C4826"/>
                 </a:solidFill>
@@ -22516,14 +23764,14 @@
       </p:sp>
       <p:cxnSp>
         <p:nvCxnSpPr>
-          <p:cNvPr id="22" name="Fan0"/>
+          <p:cNvPr id="24" name="Fan1"/>
           <p:cNvCxnSpPr/>
           <p:nvPr/>
         </p:nvCxnSpPr>
         <p:spPr>
           <a:xfrm flipV="1">
-            <a:off x="3063240" y="1257300"/>
-            <a:ext cx="1691640" cy="2018760"/>
+            <a:off x="3063240" y="1842516"/>
+            <a:ext cx="1691640" cy="877824"/>
           </a:xfrm>
           <a:prstGeom prst="line">
             <a:avLst/>
@@ -22558,7 +23806,7 @@
         </p:nvSpPr>
         <p:spPr>
           <a:xfrm>
-            <a:off x="4754880" y="1678760"/>
+            <a:off x="4754880" y="1591056"/>
             <a:ext cx="3200400" cy="502920"/>
           </a:xfrm>
           <a:prstGeom prst="rect">
@@ -22592,9 +23840,11 @@
           <a:bodyPr wrap="square" lIns="45720" tIns="22860" rIns="45720" bIns="22860" rtlCol="0" anchor="ctr"/>
           <a:lstStyle/>
           <a:p>
-            <a:pPr algn="ctr"/>
-            <a:r>
-              <a:rPr sz="2000" b="0" i="0">
+            <a:pPr algn="ctr">
+              <a:buNone/>
+            </a:pPr>
+            <a:r>
+              <a:rPr lang="en-US" sz="2000" b="0" i="0" dirty="0">
                 <a:solidFill>
                   <a:srgbClr val="5C4826"/>
                 </a:solidFill>
@@ -22606,14 +23856,14 @@
       </p:sp>
       <p:cxnSp>
         <p:nvCxnSpPr>
-          <p:cNvPr id="24" name="Fan1"/>
+          <p:cNvPr id="26" name="Fan2"/>
           <p:cNvCxnSpPr/>
           <p:nvPr/>
         </p:nvCxnSpPr>
         <p:spPr>
           <a:xfrm flipV="1">
-            <a:off x="3063240" y="1930220"/>
-            <a:ext cx="1691640" cy="1345840"/>
+            <a:off x="3063240" y="2427732"/>
+            <a:ext cx="1691640" cy="292608"/>
           </a:xfrm>
           <a:prstGeom prst="line">
             <a:avLst/>
@@ -22648,7 +23898,7 @@
         </p:nvSpPr>
         <p:spPr>
           <a:xfrm>
-            <a:off x="4754880" y="2351680"/>
+            <a:off x="4754880" y="2176272"/>
             <a:ext cx="3200400" cy="502920"/>
           </a:xfrm>
           <a:prstGeom prst="rect">
@@ -22682,9 +23932,11 @@
           <a:bodyPr wrap="square" lIns="45720" tIns="22860" rIns="45720" bIns="22860" rtlCol="0" anchor="ctr"/>
           <a:lstStyle/>
           <a:p>
-            <a:pPr algn="ctr"/>
-            <a:r>
-              <a:rPr sz="2000" b="0" i="0">
+            <a:pPr algn="ctr">
+              <a:buNone/>
+            </a:pPr>
+            <a:r>
+              <a:rPr lang="en-US" sz="2000" b="0" i="0" dirty="0">
                 <a:solidFill>
                   <a:srgbClr val="5C4826"/>
                 </a:solidFill>
@@ -22696,14 +23948,14 @@
       </p:sp>
       <p:cxnSp>
         <p:nvCxnSpPr>
-          <p:cNvPr id="26" name="Fan2"/>
+          <p:cNvPr id="28" name="Fan3"/>
           <p:cNvCxnSpPr/>
           <p:nvPr/>
         </p:nvCxnSpPr>
         <p:spPr>
-          <a:xfrm flipV="1">
-            <a:off x="3063240" y="2603140"/>
-            <a:ext cx="1691640" cy="672920"/>
+          <a:xfrm>
+            <a:off x="3063240" y="2720340"/>
+            <a:ext cx="1691640" cy="292608"/>
           </a:xfrm>
           <a:prstGeom prst="line">
             <a:avLst/>
@@ -22738,7 +23990,7 @@
         </p:nvSpPr>
         <p:spPr>
           <a:xfrm>
-            <a:off x="4754880" y="3024600"/>
+            <a:off x="4754880" y="2761488"/>
             <a:ext cx="3200400" cy="502920"/>
           </a:xfrm>
           <a:prstGeom prst="rect">
@@ -22772,9 +24024,11 @@
           <a:bodyPr wrap="square" lIns="45720" tIns="22860" rIns="45720" bIns="22860" rtlCol="0" anchor="ctr"/>
           <a:lstStyle/>
           <a:p>
-            <a:pPr algn="ctr"/>
-            <a:r>
-              <a:rPr sz="2000" b="0" i="0">
+            <a:pPr algn="ctr">
+              <a:buNone/>
+            </a:pPr>
+            <a:r>
+              <a:rPr lang="en-US" sz="2000" b="0" i="0" dirty="0">
                 <a:solidFill>
                   <a:srgbClr val="5C4826"/>
                 </a:solidFill>
@@ -22786,14 +24040,14 @@
       </p:sp>
       <p:cxnSp>
         <p:nvCxnSpPr>
-          <p:cNvPr id="28" name="Fan3"/>
+          <p:cNvPr id="30" name="Fan4"/>
           <p:cNvCxnSpPr/>
           <p:nvPr/>
         </p:nvCxnSpPr>
         <p:spPr>
           <a:xfrm>
-            <a:off x="3063240" y="3276060"/>
-            <a:ext cx="1691640" cy="0"/>
+            <a:off x="3063240" y="2720340"/>
+            <a:ext cx="1691640" cy="877824"/>
           </a:xfrm>
           <a:prstGeom prst="line">
             <a:avLst/>
@@ -22828,7 +24082,7 @@
         </p:nvSpPr>
         <p:spPr>
           <a:xfrm>
-            <a:off x="4754880" y="3697520"/>
+            <a:off x="4754880" y="3346704"/>
             <a:ext cx="3200400" cy="502920"/>
           </a:xfrm>
           <a:prstGeom prst="rect">
@@ -22862,9 +24116,11 @@
           <a:bodyPr wrap="square" lIns="45720" tIns="22860" rIns="45720" bIns="22860" rtlCol="0" anchor="ctr"/>
           <a:lstStyle/>
           <a:p>
-            <a:pPr algn="ctr"/>
-            <a:r>
-              <a:rPr sz="2000" b="0" i="0">
+            <a:pPr algn="ctr">
+              <a:buNone/>
+            </a:pPr>
+            <a:r>
+              <a:rPr lang="en-US" sz="2000" b="0" i="0" dirty="0">
                 <a:solidFill>
                   <a:srgbClr val="5C4826"/>
                 </a:solidFill>
@@ -22876,14 +24132,14 @@
       </p:sp>
       <p:cxnSp>
         <p:nvCxnSpPr>
-          <p:cNvPr id="30" name="Fan4"/>
+          <p:cNvPr id="32" name="Fan5"/>
           <p:cNvCxnSpPr/>
           <p:nvPr/>
         </p:nvCxnSpPr>
         <p:spPr>
           <a:xfrm>
-            <a:off x="3063240" y="3276060"/>
-            <a:ext cx="1691640" cy="672920"/>
+            <a:off x="3063240" y="2720340"/>
+            <a:ext cx="1691640" cy="1463040"/>
           </a:xfrm>
           <a:prstGeom prst="line">
             <a:avLst/>
@@ -22918,7 +24174,7 @@
         </p:nvSpPr>
         <p:spPr>
           <a:xfrm>
-            <a:off x="4754880" y="4370440"/>
+            <a:off x="4754880" y="3931920"/>
             <a:ext cx="3200400" cy="502920"/>
           </a:xfrm>
           <a:prstGeom prst="rect">
@@ -22952,9 +24208,11 @@
           <a:bodyPr wrap="square" lIns="45720" tIns="22860" rIns="45720" bIns="22860" rtlCol="0" anchor="ctr"/>
           <a:lstStyle/>
           <a:p>
-            <a:pPr algn="ctr"/>
-            <a:r>
-              <a:rPr sz="2000" b="0" i="0">
+            <a:pPr algn="ctr">
+              <a:buNone/>
+            </a:pPr>
+            <a:r>
+              <a:rPr lang="en-US" sz="2000" b="0" i="0" dirty="0">
                 <a:solidFill>
                   <a:srgbClr val="5C4826"/>
                 </a:solidFill>
@@ -22964,63 +24222,26 @@
           </a:p>
         </p:txBody>
       </p:sp>
-      <p:cxnSp>
-        <p:nvCxnSpPr>
-          <p:cNvPr id="32" name="Fan5"/>
-          <p:cNvCxnSpPr/>
-          <p:nvPr/>
-        </p:nvCxnSpPr>
-        <p:spPr>
-          <a:xfrm>
-            <a:off x="3063240" y="3276060"/>
-            <a:ext cx="1691640" cy="1345840"/>
-          </a:xfrm>
-          <a:prstGeom prst="line">
-            <a:avLst/>
-          </a:prstGeom>
-          <a:ln w="9525">
+      <p:sp>
+        <p:nvSpPr>
+          <p:cNvPr id="35" name="CrossBand"/>
+          <p:cNvSpPr/>
+          <p:nvPr/>
+        </p:nvSpPr>
+        <p:spPr>
+          <a:xfrm>
+            <a:off x="685800" y="4800600"/>
+            <a:ext cx="7269480" cy="731520"/>
+          </a:xfrm>
+          <a:prstGeom prst="rect">
+            <a:avLst/>
+          </a:prstGeom>
+          <a:noFill/>
+          <a:ln w="15875">
             <a:solidFill>
               <a:srgbClr val="C9B991"/>
             </a:solidFill>
-          </a:ln>
-          <a:effectLst/>
-        </p:spPr>
-        <p:style>
-          <a:lnRef idx="2">
-            <a:schemeClr val="accent1"/>
-          </a:lnRef>
-          <a:fillRef idx="0">
-            <a:schemeClr val="accent1"/>
-          </a:fillRef>
-          <a:effectRef idx="1">
-            <a:schemeClr val="accent1"/>
-          </a:effectRef>
-          <a:fontRef idx="minor">
-            <a:schemeClr val="tx1"/>
-          </a:fontRef>
-        </p:style>
-      </p:cxnSp>
-      <p:sp>
-        <p:nvSpPr>
-          <p:cNvPr id="33" name="Mech6"/>
-          <p:cNvSpPr/>
-          <p:nvPr/>
-        </p:nvSpPr>
-        <p:spPr>
-          <a:xfrm>
-            <a:off x="4754880" y="5043360"/>
-            <a:ext cx="3200400" cy="502920"/>
-          </a:xfrm>
-          <a:prstGeom prst="rect">
-            <a:avLst/>
-          </a:prstGeom>
-          <a:solidFill>
-            <a:srgbClr val="F5F1E8"/>
-          </a:solidFill>
-          <a:ln w="19050">
-            <a:solidFill>
-              <a:srgbClr val="8E6F3E"/>
-            </a:solidFill>
+            <a:prstDash val="dash"/>
           </a:ln>
           <a:effectLst/>
         </p:spPr>
@@ -23042,59 +24263,642 @@
           <a:bodyPr wrap="square" lIns="45720" tIns="22860" rIns="45720" bIns="22860" rtlCol="0" anchor="ctr"/>
           <a:lstStyle/>
           <a:p>
-            <a:pPr algn="ctr"/>
-            <a:r>
-              <a:rPr sz="2000" b="1" i="0">
-                <a:solidFill>
-                  <a:srgbClr val="5C4826"/>
-                </a:solidFill>
-              </a:rPr>
-              <a:t>Measurement</a:t>
-            </a:r>
-          </a:p>
-        </p:txBody>
-      </p:sp>
-      <p:cxnSp>
-        <p:nvCxnSpPr>
-          <p:cNvPr id="34" name="Fan6"/>
-          <p:cNvCxnSpPr/>
-          <p:nvPr/>
-        </p:nvCxnSpPr>
-        <p:spPr>
-          <a:xfrm>
-            <a:off x="3063240" y="3276060"/>
-            <a:ext cx="1691640" cy="2018760"/>
-          </a:xfrm>
-          <a:prstGeom prst="line">
-            <a:avLst/>
-          </a:prstGeom>
-          <a:ln w="9525">
-            <a:solidFill>
-              <a:srgbClr val="C9B991"/>
-            </a:solidFill>
-          </a:ln>
-          <a:effectLst/>
-        </p:spPr>
-        <p:style>
-          <a:lnRef idx="2">
-            <a:schemeClr val="accent1"/>
-          </a:lnRef>
-          <a:fillRef idx="0">
-            <a:schemeClr val="accent1"/>
-          </a:fillRef>
-          <a:effectRef idx="1">
-            <a:schemeClr val="accent1"/>
-          </a:effectRef>
-          <a:fontRef idx="minor">
-            <a:schemeClr val="tx1"/>
-          </a:fontRef>
-        </p:style>
-      </p:cxnSp>
+            <a:pPr algn="ctr">
+              <a:buNone/>
+            </a:pPr>
+            <a:r>
+              <a:rPr lang="en-US" sz="2000" b="1" i="0" dirty="0">
+                <a:solidFill>
+                  <a:srgbClr val="8E6F3E"/>
+                </a:solidFill>
+              </a:rPr>
+              <a:t>MEASUREMENT CAN OCCUR</a:t>
+            </a:r>
+            <a:r>
+              <a:rPr lang="en-US" sz="2000" b="1" i="0" dirty="0">
+                <a:solidFill>
+                  <a:srgbClr val="8E6F3E"/>
+                </a:solidFill>
+              </a:rPr>
+              <a:t> WITHIN ANY OF THESE</a:t>
+            </a:r>
+          </a:p>
+        </p:txBody>
+      </p:sp>
     </p:spTree>
   </p:cSld>
   <p:clrMapOvr>
     <a:masterClrMapping/>
   </p:clrMapOvr>
+  <p:timing>
+    <p:tnLst>
+      <p:par>
+        <p:cTn id="1" dur="indefinite" restart="never" nodeType="tmRoot">
+          <p:childTnLst>
+            <p:seq concurrent="1" nextAc="seek">
+              <p:cTn id="2" dur="indefinite" nodeType="mainSeq">
+                <p:childTnLst>
+                  <p:par>
+                    <p:cTn id="42" fill="hold">
+                      <p:stCondLst>
+                        <p:cond delay="indefinite"/>
+                      </p:stCondLst>
+                      <p:childTnLst>
+                        <p:par>
+                          <p:cTn id="43" fill="hold">
+                            <p:stCondLst>
+                              <p:cond delay="0"/>
+                            </p:stCondLst>
+                            <p:childTnLst>
+                              <p:par>
+                                <p:cTn id="3" presetID="10" presetClass="entr" presetSubtype="0" fill="hold" nodeType="clickEffect">
+                                  <p:stCondLst>
+                                    <p:cond delay="0"/>
+                                  </p:stCondLst>
+                                  <p:childTnLst>
+                                    <p:set>
+                                      <p:cBhvr>
+                                        <p:cTn id="4" dur="1" fill="hold">
+                                          <p:stCondLst>
+                                            <p:cond delay="0"/>
+                                          </p:stCondLst>
+                                        </p:cTn>
+                                        <p:tgtEl>
+                                          <p:spTgt spid="20"/>
+                                        </p:tgtEl>
+                                        <p:attrNameLst>
+                                          <p:attrName>style.visibility</p:attrName>
+                                        </p:attrNameLst>
+                                      </p:cBhvr>
+                                      <p:to>
+                                        <p:strVal val="visible"/>
+                                      </p:to>
+                                    </p:set>
+                                    <p:animEffect transition="in" filter="fade">
+                                      <p:cBhvr>
+                                        <p:cTn id="5" dur="500"/>
+                                        <p:tgtEl>
+                                          <p:spTgt spid="20"/>
+                                        </p:tgtEl>
+                                      </p:cBhvr>
+                                    </p:animEffect>
+                                  </p:childTnLst>
+                                </p:cTn>
+                              </p:par>
+                              <p:par>
+                                <p:cTn id="6" presetID="10" presetClass="entr" presetSubtype="0" fill="hold" nodeType="withEffect">
+                                  <p:stCondLst>
+                                    <p:cond delay="0"/>
+                                  </p:stCondLst>
+                                  <p:childTnLst>
+                                    <p:set>
+                                      <p:cBhvr>
+                                        <p:cTn id="7" dur="1" fill="hold">
+                                          <p:stCondLst>
+                                            <p:cond delay="0"/>
+                                          </p:stCondLst>
+                                        </p:cTn>
+                                        <p:tgtEl>
+                                          <p:spTgt spid="22"/>
+                                        </p:tgtEl>
+                                        <p:attrNameLst>
+                                          <p:attrName>style.visibility</p:attrName>
+                                        </p:attrNameLst>
+                                      </p:cBhvr>
+                                      <p:to>
+                                        <p:strVal val="visible"/>
+                                      </p:to>
+                                    </p:set>
+                                    <p:animEffect transition="in" filter="fade">
+                                      <p:cBhvr>
+                                        <p:cTn id="8" dur="500"/>
+                                        <p:tgtEl>
+                                          <p:spTgt spid="22"/>
+                                        </p:tgtEl>
+                                      </p:cBhvr>
+                                    </p:animEffect>
+                                  </p:childTnLst>
+                                </p:cTn>
+                              </p:par>
+                              <p:par>
+                                <p:cTn id="9" presetID="10" presetClass="entr" presetSubtype="0" fill="hold" nodeType="withEffect">
+                                  <p:stCondLst>
+                                    <p:cond delay="0"/>
+                                  </p:stCondLst>
+                                  <p:childTnLst>
+                                    <p:set>
+                                      <p:cBhvr>
+                                        <p:cTn id="10" dur="1" fill="hold">
+                                          <p:stCondLst>
+                                            <p:cond delay="0"/>
+                                          </p:stCondLst>
+                                        </p:cTn>
+                                        <p:tgtEl>
+                                          <p:spTgt spid="21"/>
+                                        </p:tgtEl>
+                                        <p:attrNameLst>
+                                          <p:attrName>style.visibility</p:attrName>
+                                        </p:attrNameLst>
+                                      </p:cBhvr>
+                                      <p:to>
+                                        <p:strVal val="visible"/>
+                                      </p:to>
+                                    </p:set>
+                                    <p:animEffect transition="in" filter="fade">
+                                      <p:cBhvr>
+                                        <p:cTn id="11" dur="500"/>
+                                        <p:tgtEl>
+                                          <p:spTgt spid="21"/>
+                                        </p:tgtEl>
+                                      </p:cBhvr>
+                                    </p:animEffect>
+                                  </p:childTnLst>
+                                </p:cTn>
+                              </p:par>
+                              <p:par>
+                                <p:cTn id="12" presetID="10" presetClass="entr" presetSubtype="0" fill="hold" nodeType="withEffect">
+                                  <p:stCondLst>
+                                    <p:cond delay="0"/>
+                                  </p:stCondLst>
+                                  <p:childTnLst>
+                                    <p:set>
+                                      <p:cBhvr>
+                                        <p:cTn id="13" dur="1" fill="hold">
+                                          <p:stCondLst>
+                                            <p:cond delay="0"/>
+                                          </p:stCondLst>
+                                        </p:cTn>
+                                        <p:tgtEl>
+                                          <p:spTgt spid="24"/>
+                                        </p:tgtEl>
+                                        <p:attrNameLst>
+                                          <p:attrName>style.visibility</p:attrName>
+                                        </p:attrNameLst>
+                                      </p:cBhvr>
+                                      <p:to>
+                                        <p:strVal val="visible"/>
+                                      </p:to>
+                                    </p:set>
+                                    <p:animEffect transition="in" filter="fade">
+                                      <p:cBhvr>
+                                        <p:cTn id="14" dur="500"/>
+                                        <p:tgtEl>
+                                          <p:spTgt spid="24"/>
+                                        </p:tgtEl>
+                                      </p:cBhvr>
+                                    </p:animEffect>
+                                  </p:childTnLst>
+                                </p:cTn>
+                              </p:par>
+                              <p:par>
+                                <p:cTn id="15" presetID="10" presetClass="entr" presetSubtype="0" fill="hold" nodeType="withEffect">
+                                  <p:stCondLst>
+                                    <p:cond delay="0"/>
+                                  </p:stCondLst>
+                                  <p:childTnLst>
+                                    <p:set>
+                                      <p:cBhvr>
+                                        <p:cTn id="16" dur="1" fill="hold">
+                                          <p:stCondLst>
+                                            <p:cond delay="0"/>
+                                          </p:stCondLst>
+                                        </p:cTn>
+                                        <p:tgtEl>
+                                          <p:spTgt spid="23"/>
+                                        </p:tgtEl>
+                                        <p:attrNameLst>
+                                          <p:attrName>style.visibility</p:attrName>
+                                        </p:attrNameLst>
+                                      </p:cBhvr>
+                                      <p:to>
+                                        <p:strVal val="visible"/>
+                                      </p:to>
+                                    </p:set>
+                                    <p:animEffect transition="in" filter="fade">
+                                      <p:cBhvr>
+                                        <p:cTn id="17" dur="500"/>
+                                        <p:tgtEl>
+                                          <p:spTgt spid="23"/>
+                                        </p:tgtEl>
+                                      </p:cBhvr>
+                                    </p:animEffect>
+                                  </p:childTnLst>
+                                </p:cTn>
+                              </p:par>
+                              <p:par>
+                                <p:cTn id="18" presetID="10" presetClass="entr" presetSubtype="0" fill="hold" nodeType="withEffect">
+                                  <p:stCondLst>
+                                    <p:cond delay="0"/>
+                                  </p:stCondLst>
+                                  <p:childTnLst>
+                                    <p:set>
+                                      <p:cBhvr>
+                                        <p:cTn id="19" dur="1" fill="hold">
+                                          <p:stCondLst>
+                                            <p:cond delay="0"/>
+                                          </p:stCondLst>
+                                        </p:cTn>
+                                        <p:tgtEl>
+                                          <p:spTgt spid="26"/>
+                                        </p:tgtEl>
+                                        <p:attrNameLst>
+                                          <p:attrName>style.visibility</p:attrName>
+                                        </p:attrNameLst>
+                                      </p:cBhvr>
+                                      <p:to>
+                                        <p:strVal val="visible"/>
+                                      </p:to>
+                                    </p:set>
+                                    <p:animEffect transition="in" filter="fade">
+                                      <p:cBhvr>
+                                        <p:cTn id="20" dur="500"/>
+                                        <p:tgtEl>
+                                          <p:spTgt spid="26"/>
+                                        </p:tgtEl>
+                                      </p:cBhvr>
+                                    </p:animEffect>
+                                  </p:childTnLst>
+                                </p:cTn>
+                              </p:par>
+                              <p:par>
+                                <p:cTn id="21" presetID="10" presetClass="entr" presetSubtype="0" fill="hold" nodeType="withEffect">
+                                  <p:stCondLst>
+                                    <p:cond delay="0"/>
+                                  </p:stCondLst>
+                                  <p:childTnLst>
+                                    <p:set>
+                                      <p:cBhvr>
+                                        <p:cTn id="22" dur="1" fill="hold">
+                                          <p:stCondLst>
+                                            <p:cond delay="0"/>
+                                          </p:stCondLst>
+                                        </p:cTn>
+                                        <p:tgtEl>
+                                          <p:spTgt spid="25"/>
+                                        </p:tgtEl>
+                                        <p:attrNameLst>
+                                          <p:attrName>style.visibility</p:attrName>
+                                        </p:attrNameLst>
+                                      </p:cBhvr>
+                                      <p:to>
+                                        <p:strVal val="visible"/>
+                                      </p:to>
+                                    </p:set>
+                                    <p:animEffect transition="in" filter="fade">
+                                      <p:cBhvr>
+                                        <p:cTn id="23" dur="500"/>
+                                        <p:tgtEl>
+                                          <p:spTgt spid="25"/>
+                                        </p:tgtEl>
+                                      </p:cBhvr>
+                                    </p:animEffect>
+                                  </p:childTnLst>
+                                </p:cTn>
+                              </p:par>
+                              <p:par>
+                                <p:cTn id="24" presetID="10" presetClass="entr" presetSubtype="0" fill="hold" nodeType="withEffect">
+                                  <p:stCondLst>
+                                    <p:cond delay="0"/>
+                                  </p:stCondLst>
+                                  <p:childTnLst>
+                                    <p:set>
+                                      <p:cBhvr>
+                                        <p:cTn id="25" dur="1" fill="hold">
+                                          <p:stCondLst>
+                                            <p:cond delay="0"/>
+                                          </p:stCondLst>
+                                        </p:cTn>
+                                        <p:tgtEl>
+                                          <p:spTgt spid="28"/>
+                                        </p:tgtEl>
+                                        <p:attrNameLst>
+                                          <p:attrName>style.visibility</p:attrName>
+                                        </p:attrNameLst>
+                                      </p:cBhvr>
+                                      <p:to>
+                                        <p:strVal val="visible"/>
+                                      </p:to>
+                                    </p:set>
+                                    <p:animEffect transition="in" filter="fade">
+                                      <p:cBhvr>
+                                        <p:cTn id="26" dur="500"/>
+                                        <p:tgtEl>
+                                          <p:spTgt spid="28"/>
+                                        </p:tgtEl>
+                                      </p:cBhvr>
+                                    </p:animEffect>
+                                  </p:childTnLst>
+                                </p:cTn>
+                              </p:par>
+                              <p:par>
+                                <p:cTn id="27" presetID="10" presetClass="entr" presetSubtype="0" fill="hold" nodeType="withEffect">
+                                  <p:stCondLst>
+                                    <p:cond delay="0"/>
+                                  </p:stCondLst>
+                                  <p:childTnLst>
+                                    <p:set>
+                                      <p:cBhvr>
+                                        <p:cTn id="28" dur="1" fill="hold">
+                                          <p:stCondLst>
+                                            <p:cond delay="0"/>
+                                          </p:stCondLst>
+                                        </p:cTn>
+                                        <p:tgtEl>
+                                          <p:spTgt spid="27"/>
+                                        </p:tgtEl>
+                                        <p:attrNameLst>
+                                          <p:attrName>style.visibility</p:attrName>
+                                        </p:attrNameLst>
+                                      </p:cBhvr>
+                                      <p:to>
+                                        <p:strVal val="visible"/>
+                                      </p:to>
+                                    </p:set>
+                                    <p:animEffect transition="in" filter="fade">
+                                      <p:cBhvr>
+                                        <p:cTn id="29" dur="500"/>
+                                        <p:tgtEl>
+                                          <p:spTgt spid="27"/>
+                                        </p:tgtEl>
+                                      </p:cBhvr>
+                                    </p:animEffect>
+                                  </p:childTnLst>
+                                </p:cTn>
+                              </p:par>
+                              <p:par>
+                                <p:cTn id="30" presetID="10" presetClass="entr" presetSubtype="0" fill="hold" nodeType="withEffect">
+                                  <p:stCondLst>
+                                    <p:cond delay="0"/>
+                                  </p:stCondLst>
+                                  <p:childTnLst>
+                                    <p:set>
+                                      <p:cBhvr>
+                                        <p:cTn id="31" dur="1" fill="hold">
+                                          <p:stCondLst>
+                                            <p:cond delay="0"/>
+                                          </p:stCondLst>
+                                        </p:cTn>
+                                        <p:tgtEl>
+                                          <p:spTgt spid="30"/>
+                                        </p:tgtEl>
+                                        <p:attrNameLst>
+                                          <p:attrName>style.visibility</p:attrName>
+                                        </p:attrNameLst>
+                                      </p:cBhvr>
+                                      <p:to>
+                                        <p:strVal val="visible"/>
+                                      </p:to>
+                                    </p:set>
+                                    <p:animEffect transition="in" filter="fade">
+                                      <p:cBhvr>
+                                        <p:cTn id="32" dur="500"/>
+                                        <p:tgtEl>
+                                          <p:spTgt spid="30"/>
+                                        </p:tgtEl>
+                                      </p:cBhvr>
+                                    </p:animEffect>
+                                  </p:childTnLst>
+                                </p:cTn>
+                              </p:par>
+                              <p:par>
+                                <p:cTn id="33" presetID="10" presetClass="entr" presetSubtype="0" fill="hold" nodeType="withEffect">
+                                  <p:stCondLst>
+                                    <p:cond delay="0"/>
+                                  </p:stCondLst>
+                                  <p:childTnLst>
+                                    <p:set>
+                                      <p:cBhvr>
+                                        <p:cTn id="34" dur="1" fill="hold">
+                                          <p:stCondLst>
+                                            <p:cond delay="0"/>
+                                          </p:stCondLst>
+                                        </p:cTn>
+                                        <p:tgtEl>
+                                          <p:spTgt spid="29"/>
+                                        </p:tgtEl>
+                                        <p:attrNameLst>
+                                          <p:attrName>style.visibility</p:attrName>
+                                        </p:attrNameLst>
+                                      </p:cBhvr>
+                                      <p:to>
+                                        <p:strVal val="visible"/>
+                                      </p:to>
+                                    </p:set>
+                                    <p:animEffect transition="in" filter="fade">
+                                      <p:cBhvr>
+                                        <p:cTn id="35" dur="500"/>
+                                        <p:tgtEl>
+                                          <p:spTgt spid="29"/>
+                                        </p:tgtEl>
+                                      </p:cBhvr>
+                                    </p:animEffect>
+                                  </p:childTnLst>
+                                </p:cTn>
+                              </p:par>
+                              <p:par>
+                                <p:cTn id="36" presetID="10" presetClass="entr" presetSubtype="0" fill="hold" nodeType="withEffect">
+                                  <p:stCondLst>
+                                    <p:cond delay="0"/>
+                                  </p:stCondLst>
+                                  <p:childTnLst>
+                                    <p:set>
+                                      <p:cBhvr>
+                                        <p:cTn id="37" dur="1" fill="hold">
+                                          <p:stCondLst>
+                                            <p:cond delay="0"/>
+                                          </p:stCondLst>
+                                        </p:cTn>
+                                        <p:tgtEl>
+                                          <p:spTgt spid="32"/>
+                                        </p:tgtEl>
+                                        <p:attrNameLst>
+                                          <p:attrName>style.visibility</p:attrName>
+                                        </p:attrNameLst>
+                                      </p:cBhvr>
+                                      <p:to>
+                                        <p:strVal val="visible"/>
+                                      </p:to>
+                                    </p:set>
+                                    <p:animEffect transition="in" filter="fade">
+                                      <p:cBhvr>
+                                        <p:cTn id="38" dur="500"/>
+                                        <p:tgtEl>
+                                          <p:spTgt spid="32"/>
+                                        </p:tgtEl>
+                                      </p:cBhvr>
+                                    </p:animEffect>
+                                  </p:childTnLst>
+                                </p:cTn>
+                              </p:par>
+                              <p:par>
+                                <p:cTn id="39" presetID="10" presetClass="entr" presetSubtype="0" fill="hold" nodeType="withEffect">
+                                  <p:stCondLst>
+                                    <p:cond delay="0"/>
+                                  </p:stCondLst>
+                                  <p:childTnLst>
+                                    <p:set>
+                                      <p:cBhvr>
+                                        <p:cTn id="40" dur="1" fill="hold">
+                                          <p:stCondLst>
+                                            <p:cond delay="0"/>
+                                          </p:stCondLst>
+                                        </p:cTn>
+                                        <p:tgtEl>
+                                          <p:spTgt spid="31"/>
+                                        </p:tgtEl>
+                                        <p:attrNameLst>
+                                          <p:attrName>style.visibility</p:attrName>
+                                        </p:attrNameLst>
+                                      </p:cBhvr>
+                                      <p:to>
+                                        <p:strVal val="visible"/>
+                                      </p:to>
+                                    </p:set>
+                                    <p:animEffect transition="in" filter="fade">
+                                      <p:cBhvr>
+                                        <p:cTn id="41" dur="500"/>
+                                        <p:tgtEl>
+                                          <p:spTgt spid="31"/>
+                                        </p:tgtEl>
+                                      </p:cBhvr>
+                                    </p:animEffect>
+                                  </p:childTnLst>
+                                </p:cTn>
+                              </p:par>
+                            </p:childTnLst>
+                          </p:cTn>
+                        </p:par>
+                      </p:childTnLst>
+                    </p:cTn>
+                  </p:par>
+                  <p:par>
+                    <p:cTn id="47" fill="hold">
+                      <p:stCondLst>
+                        <p:cond delay="indefinite"/>
+                      </p:stCondLst>
+                      <p:childTnLst>
+                        <p:par>
+                          <p:cTn id="48" fill="hold">
+                            <p:stCondLst>
+                              <p:cond delay="0"/>
+                            </p:stCondLst>
+                            <p:childTnLst>
+                              <p:par>
+                                <p:cTn id="44" presetID="10" presetClass="entr" presetSubtype="0" fill="hold" nodeType="clickEffect">
+                                  <p:stCondLst>
+                                    <p:cond delay="0"/>
+                                  </p:stCondLst>
+                                  <p:childTnLst>
+                                    <p:set>
+                                      <p:cBhvr>
+                                        <p:cTn id="45" dur="1" fill="hold">
+                                          <p:stCondLst>
+                                            <p:cond delay="0"/>
+                                          </p:stCondLst>
+                                        </p:cTn>
+                                        <p:tgtEl>
+                                          <p:spTgt spid="35"/>
+                                        </p:tgtEl>
+                                        <p:attrNameLst>
+                                          <p:attrName>style.visibility</p:attrName>
+                                        </p:attrNameLst>
+                                      </p:cBhvr>
+                                      <p:to>
+                                        <p:strVal val="visible"/>
+                                      </p:to>
+                                    </p:set>
+                                    <p:animEffect transition="in" filter="fade">
+                                      <p:cBhvr>
+                                        <p:cTn id="46" dur="500"/>
+                                        <p:tgtEl>
+                                          <p:spTgt spid="35"/>
+                                        </p:tgtEl>
+                                      </p:cBhvr>
+                                    </p:animEffect>
+                                  </p:childTnLst>
+                                </p:cTn>
+                              </p:par>
+                            </p:childTnLst>
+                          </p:cTn>
+                        </p:par>
+                      </p:childTnLst>
+                    </p:cTn>
+                  </p:par>
+                  <p:par>
+                    <p:cTn id="52" fill="hold">
+                      <p:stCondLst>
+                        <p:cond delay="indefinite"/>
+                      </p:stCondLst>
+                      <p:childTnLst>
+                        <p:par>
+                          <p:cTn id="53" fill="hold">
+                            <p:stCondLst>
+                              <p:cond delay="0"/>
+                            </p:stCondLst>
+                            <p:childTnLst>
+                              <p:par>
+                                <p:cTn id="49" presetID="10" presetClass="entr" presetSubtype="0" fill="hold" nodeType="clickEffect">
+                                  <p:stCondLst>
+                                    <p:cond delay="0"/>
+                                  </p:stCondLst>
+                                  <p:childTnLst>
+                                    <p:set>
+                                      <p:cBhvr>
+                                        <p:cTn id="50" dur="1" fill="hold">
+                                          <p:stCondLst>
+                                            <p:cond delay="0"/>
+                                          </p:stCondLst>
+                                        </p:cTn>
+                                        <p:tgtEl>
+                                          <p:spTgt spid="19"/>
+                                        </p:tgtEl>
+                                        <p:attrNameLst>
+                                          <p:attrName>style.visibility</p:attrName>
+                                        </p:attrNameLst>
+                                      </p:cBhvr>
+                                      <p:to>
+                                        <p:strVal val="visible"/>
+                                      </p:to>
+                                    </p:set>
+                                    <p:animEffect transition="in" filter="fade">
+                                      <p:cBhvr>
+                                        <p:cTn id="51" dur="500"/>
+                                        <p:tgtEl>
+                                          <p:spTgt spid="19"/>
+                                        </p:tgtEl>
+                                      </p:cBhvr>
+                                    </p:animEffect>
+                                  </p:childTnLst>
+                                </p:cTn>
+                              </p:par>
+                            </p:childTnLst>
+                          </p:cTn>
+                        </p:par>
+                      </p:childTnLst>
+                    </p:cTn>
+                  </p:par>
+                </p:childTnLst>
+              </p:cTn>
+              <p:prevCondLst>
+                <p:cond evt="onPrev" delay="0">
+                  <p:tgtEl>
+                    <p:sldTgt/>
+                  </p:tgtEl>
+                </p:cond>
+              </p:prevCondLst>
+              <p:nextCondLst>
+                <p:cond evt="onNext" delay="0">
+                  <p:tgtEl>
+                    <p:sldTgt/>
+                  </p:tgtEl>
+                </p:cond>
+              </p:nextCondLst>
+            </p:seq>
+          </p:childTnLst>
+        </p:cTn>
+      </p:par>
+    </p:tnLst>
+  </p:timing>
 </p:sld>
 </file>
 

--- a/course/lectures/act-1-foundations/09-engineering-decision-making-and-metrics/1-9-Engineering-Decision-Making-and-Metrics.pptx
+++ b/course/lectures/act-1-foundations/09-engineering-decision-making-and-metrics/1-9-Engineering-Decision-Making-and-Metrics.pptx
@@ -227,7 +227,7 @@
           </a:lstStyle>
           <a:p>
             <a:fld id="{27E8B4C4-0720-F64E-9EEE-9472CF165DC6}" type="datetimeFigureOut">
-              <a:t>9/21/26</a:t>
+              <a:t>9/23/26</a:t>
             </a:fld>
             <a:endParaRPr lang="en-US"/>
           </a:p>
@@ -527,7 +527,7 @@
           <a:p>
             <a:r>
               <a:rPr dirty="0"/>
-              <a:t>0.5 minutes — </a:t>
+              <a:t xml:space="preserve">0.5 minutes — </a:t>
             </a:r>
             <a:r>
               <a:rPr i="1" dirty="0"/>
@@ -593,7 +593,7 @@
           <a:p>
             <a:r>
               <a:rPr dirty="0"/>
-              <a:t>0.3 minutes — </a:t>
+              <a:t xml:space="preserve">0.3 minutes — </a:t>
             </a:r>
             <a:r>
               <a:rPr i="1" dirty="0"/>
@@ -736,7 +736,7 @@
           <a:p>
             <a:r>
               <a:rPr dirty="0"/>
-              <a:t>- Responsiveness is abstract; p99-under-workload-W is the chosen observable aspect; 420 </a:t>
+              <a:t xml:space="preserve">- Responsiveness is abstract; p99-under-workload-W is the chosen observable aspect; 420 </a:t>
             </a:r>
             <a:r>
               <a:rPr dirty="0" err="1"/>
@@ -744,7 +744,7 @@
             </a:r>
             <a:r>
               <a:rPr dirty="0"/>
-              <a:t> is what applying it produced.</a:t>
+              <a:t xml:space="preserve"> is what applying it produced.</a:t>
             </a:r>
           </a:p>
           <a:p>
@@ -803,7 +803,7 @@
           <a:p>
             <a:r>
               <a:rPr dirty="0"/>
-              <a:t>3 minutes — </a:t>
+              <a:t xml:space="preserve">3 minutes — </a:t>
             </a:r>
             <a:r>
               <a:rPr i="1" dirty="0"/>
@@ -875,7 +875,7 @@
           <a:p>
             <a:r>
               <a:rPr dirty="0"/>
-              <a:t>3 minutes — TPS: students generate the conditions that give 420 </a:t>
+              <a:t xml:space="preserve">3 minutes — TPS: students generate the conditions that give 420 </a:t>
             </a:r>
             <a:r>
               <a:rPr dirty="0" err="1"/>
@@ -883,7 +883,7 @@
             </a:r>
             <a:r>
               <a:rPr dirty="0"/>
-              <a:t> meaning.</a:t>
+              <a:t xml:space="preserve"> meaning.</a:t>
             </a:r>
           </a:p>
           <a:p>
@@ -892,7 +892,7 @@
           <a:p>
             <a:r>
               <a:rPr dirty="0"/>
-              <a:t>- Let '420 </a:t>
+              <a:t xml:space="preserve">- Let '420 </a:t>
             </a:r>
             <a:r>
               <a:rPr dirty="0" err="1"/>
@@ -900,7 +900,7 @@
             </a:r>
             <a:r>
               <a:rPr dirty="0"/>
-              <a:t> sit alone for a beat; run the think-pair-share on the prompt before revealing anything.</a:t>
+              <a:t xml:space="preserve"> sit alone for a beat; run the think-pair-share on the prompt before revealing anything.</a:t>
             </a:r>
           </a:p>
           <a:p>
@@ -912,7 +912,7 @@
           <a:p>
             <a:r>
               <a:rPr dirty="0"/>
-              <a:t>- The final click is the deliverable form: p99 = 420 </a:t>
+              <a:t xml:space="preserve">- The final click is the deliverable form: p99 = 420 </a:t>
             </a:r>
             <a:r>
               <a:rPr dirty="0" err="1"/>
@@ -920,13 +920,13 @@
             </a:r>
             <a:r>
               <a:rPr dirty="0"/>
-              <a:t> · end-to-end · workload W · configuration C · interval T.</a:t>
+              <a:t xml:space="preserve"> · end-to-end · workload W · configuration C · interval T.</a:t>
             </a:r>
           </a:p>
           <a:p>
             <a:r>
               <a:rPr dirty="0"/>
-              <a:t>- Then stop. The students should experience the move from '420 </a:t>
+              <a:t xml:space="preserve">- Then stop. The students should experience the move from '420 </a:t>
             </a:r>
             <a:r>
               <a:rPr dirty="0" err="1"/>
@@ -934,7 +934,7 @@
             </a:r>
             <a:r>
               <a:rPr dirty="0"/>
-              <a:t> is a fact' to '420 </a:t>
+              <a:t xml:space="preserve"> is a fact' to '420 </a:t>
             </a:r>
             <a:r>
               <a:rPr dirty="0" err="1"/>
@@ -942,7 +942,7 @@
             </a:r>
             <a:r>
               <a:rPr dirty="0"/>
-              <a:t> is an observation parameterized by conditions.'</a:t>
+              <a:t xml:space="preserve"> is an observation parameterized by conditions.'</a:t>
             </a:r>
           </a:p>
         </p:txBody>
@@ -988,48 +988,70 @@
           <a:lstStyle/>
           <a:p>
             <a:r>
+              <a:rPr dirty="0"/>
               <a:t>2.5 minutes — The scope principle, deliberately drawn like Validation's composition slide.</a:t>
             </a:r>
           </a:p>
-          <a:p/>
-          <a:p>
-            <a:r>
+          <a:p>
+            <a:endParaRPr dirty="0"/>
+          </a:p>
+          <a:p>
+            <a:r>
+              <a:rPr dirty="0"/>
               <a:t>Students met this composition shape in Validation — say so explicitly: “Every local measurement can look acceptable while the property at the scope we actually care about fails.”</a:t>
             </a:r>
           </a:p>
-          <a:p/>
-          <a:p>
-            <a:r>
+          <a:p>
+            <a:endParaRPr dirty="0"/>
+          </a:p>
+          <a:p>
+            <a:r>
+              <a:rPr dirty="0"/>
               <a:t>Same reasoning as the latency-budget arithmetic: 90 + 80 + 140 + 110 ms of component processing plus 100 ms of communication along the path compose to 520 ms — past a 500 ms end-to-end budget — while every local number looks acceptable.</a:t>
             </a:r>
           </a:p>
-          <a:p/>
-          <a:p>
-            <a:r>
+          <a:p>
+            <a:endParaRPr dirty="0"/>
+          </a:p>
+          <a:p>
+            <a:r>
+              <a:rPr dirty="0"/>
               <a:t>The point is not that local measurements are bad. They answer claims at a different scope.</a:t>
             </a:r>
           </a:p>
-          <a:p/>
-          <a:p>
-            <a:r>
+          <a:p>
+            <a:endParaRPr dirty="0"/>
+          </a:p>
+          <a:p>
+            <a:r>
+              <a:rPr dirty="0"/>
               <a:t>Be careful with the phrase end-to-end. The ends are relative to the property we are trying to establish. If our property is latency from an API request arriving to a response leaving, those events define the ends. If our property is the time from a user clicking “Pay” until the payment appears in account history, the ends are farther apart and may cross several services. If our property concerns a single component, its boundary may itself define the relevant ends. The scope comes from the property, not from the architecture diagram.</a:t>
             </a:r>
           </a:p>
-          <a:p/>
-          <a:p>
-            <a:r>
+          <a:p>
+            <a:endParaRPr dirty="0"/>
+          </a:p>
+          <a:p>
+            <a:r>
+              <a:rPr dirty="0"/>
               <a:t>EMPHASIS — say this aloud: “The scope comes from the property, not from the architecture diagram.”</a:t>
             </a:r>
           </a:p>
-          <a:p/>
-          <a:p>
-            <a:r>
+          <a:p>
+            <a:endParaRPr dirty="0"/>
+          </a:p>
+          <a:p>
+            <a:r>
+              <a:rPr dirty="0"/>
               <a:t>That is why “measure where the property exists” is the rule. First identify the property and the events or boundaries over which it is defined. Then measure at that scope.</a:t>
             </a:r>
           </a:p>
-          <a:p/>
-          <a:p>
-            <a:r>
+          <a:p>
+            <a:endParaRPr dirty="0"/>
+          </a:p>
+          <a:p>
+            <a:r>
+              <a:rPr dirty="0"/>
               <a:t>Build (5 clicks): 1 the enclosing scope and A → B → C → D; 2 local numbers and green checks — each local measurement looks acceptable; 3 the heavy end-to-end arrow and the total; 4 the red X; 5 the generalizing examples and the footer.</a:t>
             </a:r>
           </a:p>
@@ -1077,7 +1099,7 @@
           <a:p>
             <a:r>
               <a:rPr dirty="0"/>
-              <a:t>2.5 minutes — </a:t>
+              <a:t xml:space="preserve">2.5 minutes — </a:t>
             </a:r>
             <a:r>
               <a:rPr i="1" dirty="0"/>
@@ -1211,7 +1233,7 @@
           <a:p>
             <a:r>
               <a:rPr dirty="0"/>
-              <a:t>0.3 minutes — </a:t>
+              <a:t xml:space="preserve">0.3 minutes — </a:t>
             </a:r>
             <a:r>
               <a:rPr i="1" dirty="0"/>
@@ -1271,7 +1293,7 @@
           <a:p>
             <a:r>
               <a:rPr dirty="0"/>
-              <a:t>4 minutes — </a:t>
+              <a:t xml:space="preserve">4 minutes — </a:t>
             </a:r>
             <a:r>
               <a:rPr i="1" dirty="0"/>
@@ -1426,7 +1448,7 @@
           <a:p>
             <a:r>
               <a:rPr dirty="0"/>
-              <a:t>3 minutes — </a:t>
+              <a:t xml:space="preserve">3 minutes — </a:t>
             </a:r>
             <a:r>
               <a:rPr i="1" dirty="0"/>
@@ -1498,7 +1520,7 @@
           <a:p>
             <a:r>
               <a:rPr dirty="0"/>
-              <a:t>3 minutes — </a:t>
+              <a:t xml:space="preserve">3 minutes — </a:t>
             </a:r>
             <a:r>
               <a:rPr i="1" dirty="0"/>
@@ -1575,24 +1597,28 @@
           <a:lstStyle/>
           <a:p>
             <a:r>
+              <a:rPr dirty="0"/>
               <a:t>2 minutes — Context determines evidentiary weight; two quick examples, no new machinery.</a:t>
             </a:r>
           </a:p>
           <a:p>
-            <a:endParaRPr/>
-          </a:p>
-          <a:p>
-            <a:r>
+            <a:endParaRPr dirty="0"/>
+          </a:p>
+          <a:p>
+            <a:r>
+              <a:rPr dirty="0"/>
               <a:t>- Requirements churn is the Process callback: high change rate can be productive learning or weak requirements work — the question is whether the process still fits the work.</a:t>
             </a:r>
           </a:p>
           <a:p>
             <a:r>
+              <a:rPr dirty="0"/>
               <a:t>- Accelerating out of the hazards section; keep this brisk.</a:t>
             </a:r>
           </a:p>
           <a:p>
             <a:r>
+              <a:rPr dirty="0"/>
               <a:t>- (from slide) The same metric can be strong evidence in one context and weak in another.</a:t>
             </a:r>
           </a:p>
@@ -1640,7 +1666,7 @@
           <a:p>
             <a:r>
               <a:rPr dirty="0"/>
-              <a:t>1.5 minutes — </a:t>
+              <a:t xml:space="preserve">1.5 minutes — </a:t>
             </a:r>
             <a:r>
               <a:rPr i="1" dirty="0"/>
@@ -1700,7 +1726,7 @@
           <a:p>
             <a:r>
               <a:rPr dirty="0"/>
-              <a:t>0.3 minutes — </a:t>
+              <a:t xml:space="preserve">0.3 minutes — </a:t>
             </a:r>
             <a:r>
               <a:rPr i="1" dirty="0"/>
@@ -1951,7 +1977,7 @@
           <a:p>
             <a:r>
               <a:rPr dirty="0"/>
-              <a:t>2 minutes — </a:t>
+              <a:t xml:space="preserve">2 minutes — </a:t>
             </a:r>
             <a:r>
               <a:rPr i="1" dirty="0"/>
@@ -2017,7 +2043,7 @@
           <a:p>
             <a:r>
               <a:rPr dirty="0"/>
-              <a:t>1.5 minutes — </a:t>
+              <a:t xml:space="preserve">1.5 minutes — </a:t>
             </a:r>
             <a:r>
               <a:rPr i="1" dirty="0"/>
@@ -2083,7 +2109,7 @@
           <a:p>
             <a:r>
               <a:rPr dirty="0"/>
-              <a:t>1 minute — </a:t>
+              <a:t xml:space="preserve">1 minute — </a:t>
             </a:r>
             <a:r>
               <a:rPr i="1" dirty="0"/>
@@ -2149,7 +2175,7 @@
           <a:p>
             <a:r>
               <a:rPr dirty="0"/>
-              <a:t>2 minutes — </a:t>
+              <a:t xml:space="preserve">2 minutes — </a:t>
             </a:r>
             <a:r>
               <a:rPr i="1" dirty="0"/>
@@ -2168,13 +2194,25 @@
           <a:p>
             <a:r>
               <a:rPr dirty="0"/>
-              <a:t>- Build: the scenario and the TPS question are on screen from the start; nothing else. Run the TPS first. One click then reveals the definition, the answer, and the footer.</a:t>
+              <a:t>- Build: the scenario and the TPS question are on screen from the start; nothing else. Run the TPS first. One click then reveals the definition, the answer, the risk-management callout, and the footer.</a:t>
             </a:r>
           </a:p>
           <a:p>
             <a:r>
               <a:rPr dirty="0"/>
-              <a:t>- Do NOT expand into probability, utility, or expected value. Slide 4 carries the entire decision-quality burden of the lecture.</a:t>
+              <a:t>- “Evidence available” does not mean “evidence somebody happened to look at.” A defensible decision includes asking what consequential information is missing, what could go wrong because it is missing, whether more evidence is worth acquiring, and what residual risk is being accepted. Ignoring a recognizable hazard is not excused merely because the bad outcome had not yet occurred.</a:t>
+            </a:r>
+          </a:p>
+          <a:p>
+            <a:r>
+              <a:rPr dirty="0"/>
+              <a:t>- Organizational point: evidence can be technically available while organizational incentives, hierarchy, or schedule pressure prevent it from receiving appropriate weight — that is a real engineering-decision failure, not merely bad luck.</a:t>
+            </a:r>
+          </a:p>
+          <a:p>
+            <a:r>
+              <a:rPr dirty="0"/>
+              <a:t>- Do NOT expand into probability, utility, or expected value, and do NOT turn this into a risk-management lecture. Slide 4 carries the entire decision-quality burden of the lecture.</a:t>
             </a:r>
           </a:p>
         </p:txBody>
@@ -2221,7 +2259,7 @@
           <a:p>
             <a:r>
               <a:rPr dirty="0"/>
-              <a:t>0.3 minutes — </a:t>
+              <a:t xml:space="preserve">0.3 minutes — </a:t>
             </a:r>
             <a:r>
               <a:rPr i="1" dirty="0"/>
@@ -2281,7 +2319,7 @@
           <a:p>
             <a:r>
               <a:rPr dirty="0"/>
-              <a:t>1.5 minutes — </a:t>
+              <a:t xml:space="preserve">1.5 minutes — </a:t>
             </a:r>
             <a:r>
               <a:rPr i="1" dirty="0"/>
@@ -2432,24 +2470,34 @@
           <a:lstStyle/>
           <a:p>
             <a:r>
+              <a:rPr dirty="0"/>
               <a:t>Evidence is broader than measurement. Review, analysis, prototypes, tests, experiments, and operational observation can all provide evidence relevant to an engineering decision.</a:t>
             </a:r>
           </a:p>
-          <a:p/>
-          <a:p>
-            <a:r>
+          <a:p>
+            <a:endParaRPr dirty="0"/>
+          </a:p>
+          <a:p>
+            <a:r>
+              <a:rPr dirty="0"/>
               <a:t>Measurement is not another category alongside these. We measure properties while testing, experimenting, observing operation, evaluating prototypes, and sometimes while reviewing or analyzing artifacts.</a:t>
             </a:r>
           </a:p>
-          <a:p/>
-          <a:p>
-            <a:r>
+          <a:p>
+            <a:endParaRPr dirty="0"/>
+          </a:p>
+          <a:p>
+            <a:r>
+              <a:rPr dirty="0"/>
               <a:t>Our concern today is measurement, so we are going to narrow into that cross-cutting activity. The important question is not simply whether we can measure something. It is how a measurement bears on a property we care about and therefore becomes evidence for a decision.</a:t>
             </a:r>
           </a:p>
-          <a:p/>
-          <a:p>
-            <a:r>
+          <a:p>
+            <a:endParaRPr dirty="0"/>
+          </a:p>
+          <a:p>
+            <a:r>
+              <a:rPr dirty="0"/>
               <a:t>Transition: What has to happen for an observation or number to become engineering evidence?</a:t>
             </a:r>
           </a:p>
@@ -5102,7 +5150,7 @@
             </a:r>
             <a:r>
               <a:rPr lang="en-US" b="1" u="none" dirty="0"/>
-              <a:t>		Details</a:t>
+              <a:t xml:space="preserve">		Details</a:t>
             </a:r>
           </a:p>
           <a:p>
@@ -5279,7 +5327,7 @@
             </a:r>
             <a:r>
               <a:rPr lang="en-US" b="1" u="none" dirty="0"/>
-              <a:t>		Details</a:t>
+              <a:t xml:space="preserve">		Details</a:t>
             </a:r>
           </a:p>
           <a:p>
@@ -6797,7 +6845,7 @@
         </p:spPr>
         <p:txBody>
           <a:bodyPr>
-            <a:normAutofit/>
+            <a:normAutofit fontScale="90000"/>
           </a:bodyPr>
           <a:lstStyle/>
           <a:p>
@@ -6847,8 +6895,8 @@
         </p:nvSpPr>
         <p:spPr>
           <a:xfrm>
-            <a:off x="274320" y="3657600"/>
-            <a:ext cx="8595360" cy="1005840"/>
+            <a:off x="274320" y="3739897"/>
+            <a:ext cx="8595360" cy="566924"/>
           </a:xfrm>
           <a:prstGeom prst="rect">
             <a:avLst/>
@@ -6882,19 +6930,6 @@
           <a:lstStyle/>
           <a:p>
             <a:pPr algn="ctr">
-              <a:buNone/>
-            </a:pPr>
-            <a:r>
-              <a:rPr lang="en-US" sz="2000" b="1" i="0" dirty="0">
-                <a:solidFill>
-                  <a:srgbClr val="2E74B5"/>
-                </a:solidFill>
-              </a:rPr>
-              <a:t>METRIC</a:t>
-            </a:r>
-          </a:p>
-          <a:p>
-            <a:pPr algn="ctr">
               <a:spcBef>
                 <a:spcPts val="140"/>
               </a:spcBef>
@@ -7282,8 +7317,8 @@
         </p:nvSpPr>
         <p:spPr>
           <a:xfrm>
-            <a:off x="3432780" y="810000"/>
-            <a:ext cx="1828800" cy="365760"/>
+            <a:off x="3432780" y="838991"/>
+            <a:ext cx="1828800" cy="307777"/>
           </a:xfrm>
           <a:prstGeom prst="rect">
             <a:avLst/>
@@ -7298,13 +7333,26 @@
           <a:p>
             <a:pPr algn="ctr"/>
             <a:r>
-              <a:rPr sz="2000" b="0" i="1">
+              <a:rPr lang="en-US" sz="2000" i="1" dirty="0">
                 <a:solidFill>
                   <a:srgbClr val="555960"/>
                 </a:solidFill>
               </a:rPr>
-              <a:t>applied</a:t>
-            </a:r>
+              <a:t>q</a:t>
+            </a:r>
+            <a:r>
+              <a:rPr lang="en-US" sz="2000" b="0" i="1" dirty="0">
+                <a:solidFill>
+                  <a:srgbClr val="555960"/>
+                </a:solidFill>
+              </a:rPr>
+              <a:t>uantified by</a:t>
+            </a:r>
+            <a:endParaRPr sz="2000" b="0" i="1" dirty="0">
+              <a:solidFill>
+                <a:srgbClr val="555960"/>
+              </a:solidFill>
+            </a:endParaRPr>
           </a:p>
         </p:txBody>
       </p:sp>
@@ -7477,24 +7525,26 @@
           <a:p>
             <a:pPr algn="ctr"/>
             <a:r>
-              <a:rPr sz="2000" b="0" i="0">
+              <a:rPr lang="en-US" sz="2000" dirty="0">
                 <a:solidFill>
                   <a:srgbClr val="5C4826"/>
                 </a:solidFill>
               </a:rPr>
-              <a:t>how observations bear on it</a:t>
-            </a:r>
-          </a:p>
-          <a:p>
-            <a:pPr algn="ctr"/>
-            <a:r>
-              <a:rPr sz="2000" b="0" i="0">
+              <a:t>m</a:t>
+            </a:r>
+            <a:r>
+              <a:rPr lang="en-US" sz="2000" b="0" i="0" dirty="0">
                 <a:solidFill>
                   <a:srgbClr val="5C4826"/>
                 </a:solidFill>
               </a:rPr>
-              <a:t>— the modeling choice</a:t>
-            </a:r>
+              <a:t>odel that connects property to observation</a:t>
+            </a:r>
+            <a:endParaRPr sz="2000" b="0" i="0" dirty="0">
+              <a:solidFill>
+                <a:srgbClr val="5C4826"/>
+              </a:solidFill>
+            </a:endParaRPr>
           </a:p>
         </p:txBody>
       </p:sp>
@@ -7542,7 +7592,7 @@
           <a:p>
             <a:pPr algn="ctr"/>
             <a:r>
-              <a:rPr sz="2000" b="0" i="0">
+              <a:rPr sz="2000" b="0" i="0" dirty="0">
                 <a:solidFill>
                   <a:srgbClr val="5C4826"/>
                 </a:solidFill>
@@ -7611,6 +7661,84 @@
   <p:clrMapOvr>
     <a:masterClrMapping/>
   </p:clrMapOvr>
+  <p:timing>
+    <p:tnLst>
+      <p:par>
+        <p:cTn id="1" dur="indefinite" restart="never" nodeType="tmRoot">
+          <p:childTnLst>
+            <p:seq concurrent="1" nextAc="seek">
+              <p:cTn id="2" dur="indefinite" nodeType="mainSeq">
+                <p:childTnLst>
+                  <p:par>
+                    <p:cTn id="3" fill="hold">
+                      <p:stCondLst>
+                        <p:cond delay="indefinite"/>
+                      </p:stCondLst>
+                      <p:childTnLst>
+                        <p:par>
+                          <p:cTn id="4" fill="hold">
+                            <p:stCondLst>
+                              <p:cond delay="0"/>
+                            </p:stCondLst>
+                            <p:childTnLst>
+                              <p:par>
+                                <p:cTn id="5" presetID="1" presetClass="entr" presetSubtype="0" fill="hold" grpId="0" nodeType="clickEffect">
+                                  <p:stCondLst>
+                                    <p:cond delay="0"/>
+                                  </p:stCondLst>
+                                  <p:childTnLst>
+                                    <p:set>
+                                      <p:cBhvr>
+                                        <p:cTn id="6" dur="1" fill="hold">
+                                          <p:stCondLst>
+                                            <p:cond delay="0"/>
+                                          </p:stCondLst>
+                                        </p:cTn>
+                                        <p:tgtEl>
+                                          <p:spTgt spid="116"/>
+                                        </p:tgtEl>
+                                        <p:attrNameLst>
+                                          <p:attrName>style.visibility</p:attrName>
+                                        </p:attrNameLst>
+                                      </p:cBhvr>
+                                      <p:to>
+                                        <p:strVal val="visible"/>
+                                      </p:to>
+                                    </p:set>
+                                  </p:childTnLst>
+                                </p:cTn>
+                              </p:par>
+                            </p:childTnLst>
+                          </p:cTn>
+                        </p:par>
+                      </p:childTnLst>
+                    </p:cTn>
+                  </p:par>
+                </p:childTnLst>
+              </p:cTn>
+              <p:prevCondLst>
+                <p:cond evt="onPrev" delay="0">
+                  <p:tgtEl>
+                    <p:sldTgt/>
+                  </p:tgtEl>
+                </p:cond>
+              </p:prevCondLst>
+              <p:nextCondLst>
+                <p:cond evt="onNext" delay="0">
+                  <p:tgtEl>
+                    <p:sldTgt/>
+                  </p:tgtEl>
+                </p:cond>
+              </p:nextCondLst>
+            </p:seq>
+          </p:childTnLst>
+        </p:cTn>
+      </p:par>
+    </p:tnLst>
+    <p:bldLst>
+      <p:bldP spid="116" grpId="0" animBg="1"/>
+    </p:bldLst>
+  </p:timing>
 </p:sld>
 </file>
 
@@ -7649,7 +7777,7 @@
         </p:spPr>
         <p:txBody>
           <a:bodyPr>
-            <a:normAutofit/>
+            <a:normAutofit fontScale="90000"/>
           </a:bodyPr>
           <a:lstStyle/>
           <a:p>
@@ -7700,7 +7828,7 @@
         <p:spPr>
           <a:xfrm>
             <a:off x="502920" y="1234440"/>
-            <a:ext cx="3611880" cy="896112"/>
+            <a:ext cx="3611880" cy="1020526"/>
           </a:xfrm>
           <a:prstGeom prst="rect">
             <a:avLst/>
@@ -7756,7 +7884,7 @@
         </p:nvCxnSpPr>
         <p:spPr>
           <a:xfrm>
-            <a:off x="2304288" y="2130552"/>
+            <a:off x="2304288" y="2254966"/>
             <a:ext cx="0" cy="310896"/>
           </a:xfrm>
           <a:prstGeom prst="straightConnector1">
@@ -7778,8 +7906,8 @@
         </p:nvSpPr>
         <p:spPr>
           <a:xfrm>
-            <a:off x="502920" y="2441448"/>
-            <a:ext cx="3611880" cy="896112"/>
+            <a:off x="502920" y="2565862"/>
+            <a:ext cx="3611880" cy="1020526"/>
           </a:xfrm>
           <a:prstGeom prst="rect">
             <a:avLst/>
@@ -7835,7 +7963,7 @@
         </p:nvCxnSpPr>
         <p:spPr>
           <a:xfrm>
-            <a:off x="2304288" y="3337560"/>
+            <a:off x="2304288" y="3567961"/>
             <a:ext cx="0" cy="310896"/>
           </a:xfrm>
           <a:prstGeom prst="straightConnector1">
@@ -7857,8 +7985,8 @@
         </p:nvSpPr>
         <p:spPr>
           <a:xfrm>
-            <a:off x="502920" y="3648456"/>
-            <a:ext cx="3611880" cy="896112"/>
+            <a:off x="502920" y="3878857"/>
+            <a:ext cx="3611880" cy="1020526"/>
           </a:xfrm>
           <a:prstGeom prst="rect">
             <a:avLst/>
@@ -8059,7 +8187,7 @@
         </p:spPr>
         <p:txBody>
           <a:bodyPr>
-            <a:normAutofit/>
+            <a:normAutofit fontScale="90000"/>
           </a:bodyPr>
           <a:lstStyle/>
           <a:p>
@@ -8347,7 +8475,7 @@
                   <a:srgbClr val="5C4826"/>
                 </a:solidFill>
               </a:rPr>
-              <a:t>service = 180 ms </a:t>
+              <a:t xml:space="preserve">service = 180 ms </a:t>
             </a:r>
             <a:r>
               <a:rPr lang="en-US" sz="2000" b="0" i="1" dirty="0">
@@ -8371,7 +8499,7 @@
                   <a:srgbClr val="5C4826"/>
                 </a:solidFill>
               </a:rPr>
-              <a:t>queueing = 130 ms </a:t>
+              <a:t xml:space="preserve">queueing = 130 ms </a:t>
             </a:r>
             <a:r>
               <a:rPr lang="en-US" sz="2000" b="0" i="1" dirty="0">
@@ -8395,7 +8523,7 @@
                   <a:srgbClr val="5C4826"/>
                 </a:solidFill>
               </a:rPr>
-              <a:t>communication = 90 ms </a:t>
+              <a:t xml:space="preserve">communication = 90 ms </a:t>
             </a:r>
             <a:r>
               <a:rPr lang="en-US" sz="2000" b="0" i="1" dirty="0">
@@ -8503,7 +8631,7 @@
                   <a:srgbClr val="FFFFFF"/>
                 </a:solidFill>
               </a:rPr>
-              <a:t>Measurement supplies observations to a model; it is not itself the model.</a:t>
+              <a:t>Measurement supplies observations to a model; it is not the model.</a:t>
             </a:r>
           </a:p>
         </p:txBody>
@@ -8604,7 +8732,7 @@
                                 </p:cTn>
                               </p:par>
                               <p:par>
-                                <p:cTn id="11" presetID="10" presetClass="entr" presetSubtype="0" fill="hold" grpId="0" nodeType="withEffect">
+                                <p:cTn id="11" presetID="1" presetClass="entr" presetSubtype="0" fill="hold" grpId="0" nodeType="withEffect">
                                   <p:stCondLst>
                                     <p:cond delay="0"/>
                                   </p:stCondLst>
@@ -8631,18 +8759,6 @@
                                         <p:strVal val="visible"/>
                                       </p:to>
                                     </p:set>
-                                    <p:animEffect transition="in" filter="fade">
-                                      <p:cBhvr>
-                                        <p:cTn id="13" dur="500"/>
-                                        <p:tgtEl>
-                                          <p:spTgt spid="106">
-                                            <p:txEl>
-                                              <p:pRg st="0" end="0"/>
-                                            </p:txEl>
-                                          </p:spTgt>
-                                        </p:tgtEl>
-                                      </p:cBhvr>
-                                    </p:animEffect>
                                   </p:childTnLst>
                                 </p:cTn>
                               </p:par>
@@ -8653,26 +8769,26 @@
                     </p:cTn>
                   </p:par>
                   <p:par>
-                    <p:cTn id="14" fill="hold">
+                    <p:cTn id="13" fill="hold">
                       <p:stCondLst>
                         <p:cond delay="indefinite"/>
                       </p:stCondLst>
                       <p:childTnLst>
                         <p:par>
-                          <p:cTn id="15" fill="hold">
+                          <p:cTn id="14" fill="hold">
                             <p:stCondLst>
                               <p:cond delay="0"/>
                             </p:stCondLst>
                             <p:childTnLst>
                               <p:par>
-                                <p:cTn id="16" presetID="10" presetClass="entr" presetSubtype="0" fill="hold" grpId="0" nodeType="clickEffect">
+                                <p:cTn id="15" presetID="1" presetClass="entr" presetSubtype="0" fill="hold" grpId="0" nodeType="clickEffect">
                                   <p:stCondLst>
                                     <p:cond delay="0"/>
                                   </p:stCondLst>
                                   <p:childTnLst>
                                     <p:set>
                                       <p:cBhvr>
-                                        <p:cTn id="17" dur="1" fill="hold">
+                                        <p:cTn id="16" dur="1" fill="hold">
                                           <p:stCondLst>
                                             <p:cond delay="0"/>
                                           </p:stCondLst>
@@ -8692,23 +8808,29 @@
                                         <p:strVal val="visible"/>
                                       </p:to>
                                     </p:set>
-                                    <p:animEffect transition="in" filter="fade">
-                                      <p:cBhvr>
-                                        <p:cTn id="18" dur="500"/>
-                                        <p:tgtEl>
-                                          <p:spTgt spid="106">
-                                            <p:txEl>
-                                              <p:pRg st="1" end="1"/>
-                                            </p:txEl>
-                                          </p:spTgt>
-                                        </p:tgtEl>
-                                      </p:cBhvr>
-                                    </p:animEffect>
                                   </p:childTnLst>
                                 </p:cTn>
                               </p:par>
+                            </p:childTnLst>
+                          </p:cTn>
+                        </p:par>
+                      </p:childTnLst>
+                    </p:cTn>
+                  </p:par>
+                  <p:par>
+                    <p:cTn id="17" fill="hold">
+                      <p:stCondLst>
+                        <p:cond delay="indefinite"/>
+                      </p:stCondLst>
+                      <p:childTnLst>
+                        <p:par>
+                          <p:cTn id="18" fill="hold">
+                            <p:stCondLst>
+                              <p:cond delay="0"/>
+                            </p:stCondLst>
+                            <p:childTnLst>
                               <p:par>
-                                <p:cTn id="19" presetID="10" presetClass="entr" presetSubtype="0" fill="hold" nodeType="withEffect">
+                                <p:cTn id="19" presetID="1" presetClass="entr" presetSubtype="0" fill="hold" grpId="0" nodeType="clickEffect">
                                   <p:stCondLst>
                                     <p:cond delay="0"/>
                                   </p:stCondLst>
@@ -8731,14 +8853,6 @@
                                         <p:strVal val="visible"/>
                                       </p:to>
                                     </p:set>
-                                    <p:animEffect transition="in" filter="fade">
-                                      <p:cBhvr>
-                                        <p:cTn id="21" dur="500"/>
-                                        <p:tgtEl>
-                                          <p:spTgt spid="107"/>
-                                        </p:tgtEl>
-                                      </p:cBhvr>
-                                    </p:animEffect>
                                   </p:childTnLst>
                                 </p:cTn>
                               </p:par>
@@ -8771,6 +8885,7 @@
     </p:tnLst>
     <p:bldLst>
       <p:bldP spid="106" grpId="0" build="p"/>
+      <p:bldP spid="107" grpId="0" animBg="1"/>
     </p:bldLst>
   </p:timing>
 </p:sld>
@@ -8811,7 +8926,7 @@
         </p:spPr>
         <p:txBody>
           <a:bodyPr>
-            <a:normAutofit/>
+            <a:normAutofit fontScale="90000"/>
           </a:bodyPr>
           <a:lstStyle/>
           <a:p>
@@ -8910,7 +9025,7 @@
                   <a:srgbClr val="9A9A9A"/>
                 </a:solidFill>
               </a:rPr>
-              <a:t>  ·  </a:t>
+              <a:t xml:space="preserve">  ·  </a:t>
             </a:r>
             <a:r>
               <a:rPr sz="2000" b="1" i="0">
@@ -8926,7 +9041,7 @@
                   <a:srgbClr val="9A9A9A"/>
                 </a:solidFill>
               </a:rPr>
-              <a:t>  ·  </a:t>
+              <a:t xml:space="preserve">  ·  </a:t>
             </a:r>
             <a:r>
               <a:rPr sz="2000" b="1" i="0">
@@ -9825,7 +9940,7 @@
         </p:spPr>
         <p:txBody>
           <a:bodyPr>
-            <a:normAutofit/>
+            <a:normAutofit fontScale="90000"/>
           </a:bodyPr>
           <a:lstStyle/>
           <a:p>
@@ -10800,26 +10915,26 @@
               <p:cTn id="2" dur="indefinite" nodeType="mainSeq">
                 <p:childTnLst>
                   <p:par>
-                    <p:cTn id="30" fill="hold">
+                    <p:cTn id="3" fill="hold">
                       <p:stCondLst>
                         <p:cond delay="indefinite"/>
                       </p:stCondLst>
                       <p:childTnLst>
                         <p:par>
-                          <p:cTn id="31" fill="hold">
+                          <p:cTn id="4" fill="hold">
                             <p:stCondLst>
                               <p:cond delay="0"/>
                             </p:stCondLst>
                             <p:childTnLst>
                               <p:par>
-                                <p:cTn id="3" presetID="10" presetClass="entr" presetSubtype="0" fill="hold" nodeType="clickEffect">
+                                <p:cTn id="5" presetID="10" presetClass="entr" presetSubtype="0" fill="hold" nodeType="clickEffect">
                                   <p:stCondLst>
                                     <p:cond delay="0"/>
                                   </p:stCondLst>
                                   <p:childTnLst>
                                     <p:set>
                                       <p:cBhvr>
-                                        <p:cTn id="4" dur="1" fill="hold">
+                                        <p:cTn id="6" dur="1" fill="hold">
                                           <p:stCondLst>
                                             <p:cond delay="0"/>
                                           </p:stCondLst>
@@ -10837,7 +10952,7 @@
                                     </p:set>
                                     <p:animEffect transition="in" filter="fade">
                                       <p:cBhvr>
-                                        <p:cTn id="5" dur="500"/>
+                                        <p:cTn id="7" dur="500"/>
                                         <p:tgtEl>
                                           <p:spTgt spid="200"/>
                                         </p:tgtEl>
@@ -10847,14 +10962,14 @@
                                 </p:cTn>
                               </p:par>
                               <p:par>
-                                <p:cTn id="6" presetID="10" presetClass="entr" presetSubtype="0" fill="hold" nodeType="withEffect">
+                                <p:cTn id="8" presetID="10" presetClass="entr" presetSubtype="0" fill="hold" nodeType="withEffect">
                                   <p:stCondLst>
                                     <p:cond delay="0"/>
                                   </p:stCondLst>
                                   <p:childTnLst>
                                     <p:set>
                                       <p:cBhvr>
-                                        <p:cTn id="7" dur="1" fill="hold">
+                                        <p:cTn id="9" dur="1" fill="hold">
                                           <p:stCondLst>
                                             <p:cond delay="0"/>
                                           </p:stCondLst>
@@ -10872,7 +10987,7 @@
                                     </p:set>
                                     <p:animEffect transition="in" filter="fade">
                                       <p:cBhvr>
-                                        <p:cTn id="8" dur="500"/>
+                                        <p:cTn id="10" dur="500"/>
                                         <p:tgtEl>
                                           <p:spTgt spid="201"/>
                                         </p:tgtEl>
@@ -10882,14 +10997,14 @@
                                 </p:cTn>
                               </p:par>
                               <p:par>
-                                <p:cTn id="9" presetID="10" presetClass="entr" presetSubtype="0" fill="hold" nodeType="withEffect">
+                                <p:cTn id="11" presetID="10" presetClass="entr" presetSubtype="0" fill="hold" nodeType="withEffect">
                                   <p:stCondLst>
                                     <p:cond delay="0"/>
                                   </p:stCondLst>
                                   <p:childTnLst>
                                     <p:set>
                                       <p:cBhvr>
-                                        <p:cTn id="10" dur="1" fill="hold">
+                                        <p:cTn id="12" dur="1" fill="hold">
                                           <p:stCondLst>
                                             <p:cond delay="0"/>
                                           </p:stCondLst>
@@ -10907,7 +11022,7 @@
                                     </p:set>
                                     <p:animEffect transition="in" filter="fade">
                                       <p:cBhvr>
-                                        <p:cTn id="11" dur="500"/>
+                                        <p:cTn id="13" dur="500"/>
                                         <p:tgtEl>
                                           <p:spTgt spid="210"/>
                                         </p:tgtEl>
@@ -10917,14 +11032,14 @@
                                 </p:cTn>
                               </p:par>
                               <p:par>
-                                <p:cTn id="12" presetID="10" presetClass="entr" presetSubtype="0" fill="hold" nodeType="withEffect">
+                                <p:cTn id="14" presetID="10" presetClass="entr" presetSubtype="0" fill="hold" nodeType="withEffect">
                                   <p:stCondLst>
                                     <p:cond delay="0"/>
                                   </p:stCondLst>
                                   <p:childTnLst>
                                     <p:set>
                                       <p:cBhvr>
-                                        <p:cTn id="13" dur="1" fill="hold">
+                                        <p:cTn id="15" dur="1" fill="hold">
                                           <p:stCondLst>
                                             <p:cond delay="0"/>
                                           </p:stCondLst>
@@ -10942,7 +11057,7 @@
                                     </p:set>
                                     <p:animEffect transition="in" filter="fade">
                                       <p:cBhvr>
-                                        <p:cTn id="14" dur="500"/>
+                                        <p:cTn id="16" dur="500"/>
                                         <p:tgtEl>
                                           <p:spTgt spid="220"/>
                                         </p:tgtEl>
@@ -10952,14 +11067,14 @@
                                 </p:cTn>
                               </p:par>
                               <p:par>
-                                <p:cTn id="15" presetID="10" presetClass="entr" presetSubtype="0" fill="hold" nodeType="withEffect">
+                                <p:cTn id="17" presetID="10" presetClass="entr" presetSubtype="0" fill="hold" nodeType="withEffect">
                                   <p:stCondLst>
                                     <p:cond delay="0"/>
                                   </p:stCondLst>
                                   <p:childTnLst>
                                     <p:set>
                                       <p:cBhvr>
-                                        <p:cTn id="16" dur="1" fill="hold">
+                                        <p:cTn id="18" dur="1" fill="hold">
                                           <p:stCondLst>
                                             <p:cond delay="0"/>
                                           </p:stCondLst>
@@ -10977,7 +11092,7 @@
                                     </p:set>
                                     <p:animEffect transition="in" filter="fade">
                                       <p:cBhvr>
-                                        <p:cTn id="17" dur="500"/>
+                                        <p:cTn id="19" dur="500"/>
                                         <p:tgtEl>
                                           <p:spTgt spid="211"/>
                                         </p:tgtEl>
@@ -10987,14 +11102,14 @@
                                 </p:cTn>
                               </p:par>
                               <p:par>
-                                <p:cTn id="18" presetID="10" presetClass="entr" presetSubtype="0" fill="hold" nodeType="withEffect">
+                                <p:cTn id="20" presetID="10" presetClass="entr" presetSubtype="0" fill="hold" nodeType="withEffect">
                                   <p:stCondLst>
                                     <p:cond delay="0"/>
                                   </p:stCondLst>
                                   <p:childTnLst>
                                     <p:set>
                                       <p:cBhvr>
-                                        <p:cTn id="19" dur="1" fill="hold">
+                                        <p:cTn id="21" dur="1" fill="hold">
                                           <p:stCondLst>
                                             <p:cond delay="0"/>
                                           </p:stCondLst>
@@ -11012,7 +11127,7 @@
                                     </p:set>
                                     <p:animEffect transition="in" filter="fade">
                                       <p:cBhvr>
-                                        <p:cTn id="20" dur="500"/>
+                                        <p:cTn id="22" dur="500"/>
                                         <p:tgtEl>
                                           <p:spTgt spid="221"/>
                                         </p:tgtEl>
@@ -11022,14 +11137,14 @@
                                 </p:cTn>
                               </p:par>
                               <p:par>
-                                <p:cTn id="21" presetID="10" presetClass="entr" presetSubtype="0" fill="hold" nodeType="withEffect">
+                                <p:cTn id="23" presetID="10" presetClass="entr" presetSubtype="0" fill="hold" nodeType="withEffect">
                                   <p:stCondLst>
                                     <p:cond delay="0"/>
                                   </p:stCondLst>
                                   <p:childTnLst>
                                     <p:set>
                                       <p:cBhvr>
-                                        <p:cTn id="22" dur="1" fill="hold">
+                                        <p:cTn id="24" dur="1" fill="hold">
                                           <p:stCondLst>
                                             <p:cond delay="0"/>
                                           </p:stCondLst>
@@ -11047,7 +11162,7 @@
                                     </p:set>
                                     <p:animEffect transition="in" filter="fade">
                                       <p:cBhvr>
-                                        <p:cTn id="23" dur="500"/>
+                                        <p:cTn id="25" dur="500"/>
                                         <p:tgtEl>
                                           <p:spTgt spid="212"/>
                                         </p:tgtEl>
@@ -11057,14 +11172,14 @@
                                 </p:cTn>
                               </p:par>
                               <p:par>
-                                <p:cTn id="24" presetID="10" presetClass="entr" presetSubtype="0" fill="hold" nodeType="withEffect">
+                                <p:cTn id="26" presetID="10" presetClass="entr" presetSubtype="0" fill="hold" nodeType="withEffect">
                                   <p:stCondLst>
                                     <p:cond delay="0"/>
                                   </p:stCondLst>
                                   <p:childTnLst>
                                     <p:set>
                                       <p:cBhvr>
-                                        <p:cTn id="25" dur="1" fill="hold">
+                                        <p:cTn id="27" dur="1" fill="hold">
                                           <p:stCondLst>
                                             <p:cond delay="0"/>
                                           </p:stCondLst>
@@ -11082,7 +11197,7 @@
                                     </p:set>
                                     <p:animEffect transition="in" filter="fade">
                                       <p:cBhvr>
-                                        <p:cTn id="26" dur="500"/>
+                                        <p:cTn id="28" dur="500"/>
                                         <p:tgtEl>
                                           <p:spTgt spid="222"/>
                                         </p:tgtEl>
@@ -11092,14 +11207,14 @@
                                 </p:cTn>
                               </p:par>
                               <p:par>
-                                <p:cTn id="27" presetID="10" presetClass="entr" presetSubtype="0" fill="hold" nodeType="withEffect">
+                                <p:cTn id="29" presetID="10" presetClass="entr" presetSubtype="0" fill="hold" nodeType="withEffect">
                                   <p:stCondLst>
                                     <p:cond delay="0"/>
                                   </p:stCondLst>
                                   <p:childTnLst>
                                     <p:set>
                                       <p:cBhvr>
-                                        <p:cTn id="28" dur="1" fill="hold">
+                                        <p:cTn id="30" dur="1" fill="hold">
                                           <p:stCondLst>
                                             <p:cond delay="0"/>
                                           </p:stCondLst>
@@ -11117,7 +11232,7 @@
                                     </p:set>
                                     <p:animEffect transition="in" filter="fade">
                                       <p:cBhvr>
-                                        <p:cTn id="29" dur="500"/>
+                                        <p:cTn id="31" dur="500"/>
                                         <p:tgtEl>
                                           <p:spTgt spid="213"/>
                                         </p:tgtEl>
@@ -11133,26 +11248,26 @@
                     </p:cTn>
                   </p:par>
                   <p:par>
-                    <p:cTn id="59" fill="hold">
+                    <p:cTn id="32" fill="hold">
                       <p:stCondLst>
                         <p:cond delay="indefinite"/>
                       </p:stCondLst>
                       <p:childTnLst>
                         <p:par>
-                          <p:cTn id="60" fill="hold">
+                          <p:cTn id="33" fill="hold">
                             <p:stCondLst>
                               <p:cond delay="0"/>
                             </p:stCondLst>
                             <p:childTnLst>
                               <p:par>
-                                <p:cTn id="32" presetID="10" presetClass="entr" presetSubtype="0" fill="hold" nodeType="clickEffect">
+                                <p:cTn id="34" presetID="10" presetClass="entr" presetSubtype="0" fill="hold" nodeType="clickEffect">
                                   <p:stCondLst>
                                     <p:cond delay="0"/>
                                   </p:stCondLst>
                                   <p:childTnLst>
                                     <p:set>
                                       <p:cBhvr>
-                                        <p:cTn id="33" dur="1" fill="hold">
+                                        <p:cTn id="35" dur="1" fill="hold">
                                           <p:stCondLst>
                                             <p:cond delay="0"/>
                                           </p:stCondLst>
@@ -11170,7 +11285,7 @@
                                     </p:set>
                                     <p:animEffect transition="in" filter="fade">
                                       <p:cBhvr>
-                                        <p:cTn id="34" dur="500"/>
+                                        <p:cTn id="36" dur="500"/>
                                         <p:tgtEl>
                                           <p:spTgt spid="230"/>
                                         </p:tgtEl>
@@ -11180,14 +11295,14 @@
                                 </p:cTn>
                               </p:par>
                               <p:par>
-                                <p:cTn id="35" presetID="10" presetClass="entr" presetSubtype="0" fill="hold" nodeType="withEffect">
+                                <p:cTn id="37" presetID="10" presetClass="entr" presetSubtype="0" fill="hold" nodeType="withEffect">
                                   <p:stCondLst>
                                     <p:cond delay="0"/>
                                   </p:stCondLst>
                                   <p:childTnLst>
                                     <p:set>
                                       <p:cBhvr>
-                                        <p:cTn id="36" dur="1" fill="hold">
+                                        <p:cTn id="38" dur="1" fill="hold">
                                           <p:stCondLst>
                                             <p:cond delay="0"/>
                                           </p:stCondLst>
@@ -11205,7 +11320,7 @@
                                     </p:set>
                                     <p:animEffect transition="in" filter="fade">
                                       <p:cBhvr>
-                                        <p:cTn id="37" dur="500"/>
+                                        <p:cTn id="39" dur="500"/>
                                         <p:tgtEl>
                                           <p:spTgt spid="240"/>
                                         </p:tgtEl>
@@ -11215,14 +11330,14 @@
                                 </p:cTn>
                               </p:par>
                               <p:par>
-                                <p:cTn id="38" presetID="10" presetClass="entr" presetSubtype="0" fill="hold" nodeType="withEffect">
+                                <p:cTn id="40" presetID="10" presetClass="entr" presetSubtype="0" fill="hold" nodeType="withEffect">
                                   <p:stCondLst>
                                     <p:cond delay="0"/>
                                   </p:stCondLst>
                                   <p:childTnLst>
                                     <p:set>
                                       <p:cBhvr>
-                                        <p:cTn id="39" dur="1" fill="hold">
+                                        <p:cTn id="41" dur="1" fill="hold">
                                           <p:stCondLst>
                                             <p:cond delay="0"/>
                                           </p:stCondLst>
@@ -11240,7 +11355,7 @@
                                     </p:set>
                                     <p:animEffect transition="in" filter="fade">
                                       <p:cBhvr>
-                                        <p:cTn id="40" dur="500"/>
+                                        <p:cTn id="42" dur="500"/>
                                         <p:tgtEl>
                                           <p:spTgt spid="231"/>
                                         </p:tgtEl>
@@ -11250,14 +11365,14 @@
                                 </p:cTn>
                               </p:par>
                               <p:par>
-                                <p:cTn id="41" presetID="10" presetClass="entr" presetSubtype="0" fill="hold" nodeType="withEffect">
+                                <p:cTn id="43" presetID="10" presetClass="entr" presetSubtype="0" fill="hold" nodeType="withEffect">
                                   <p:stCondLst>
                                     <p:cond delay="0"/>
                                   </p:stCondLst>
                                   <p:childTnLst>
                                     <p:set>
                                       <p:cBhvr>
-                                        <p:cTn id="42" dur="1" fill="hold">
+                                        <p:cTn id="44" dur="1" fill="hold">
                                           <p:stCondLst>
                                             <p:cond delay="0"/>
                                           </p:stCondLst>
@@ -11275,7 +11390,7 @@
                                     </p:set>
                                     <p:animEffect transition="in" filter="fade">
                                       <p:cBhvr>
-                                        <p:cTn id="43" dur="500"/>
+                                        <p:cTn id="45" dur="500"/>
                                         <p:tgtEl>
                                           <p:spTgt spid="241"/>
                                         </p:tgtEl>
@@ -11285,14 +11400,14 @@
                                 </p:cTn>
                               </p:par>
                               <p:par>
-                                <p:cTn id="44" presetID="10" presetClass="entr" presetSubtype="0" fill="hold" nodeType="withEffect">
+                                <p:cTn id="46" presetID="10" presetClass="entr" presetSubtype="0" fill="hold" nodeType="withEffect">
                                   <p:stCondLst>
                                     <p:cond delay="0"/>
                                   </p:stCondLst>
                                   <p:childTnLst>
                                     <p:set>
                                       <p:cBhvr>
-                                        <p:cTn id="45" dur="1" fill="hold">
+                                        <p:cTn id="47" dur="1" fill="hold">
                                           <p:stCondLst>
                                             <p:cond delay="0"/>
                                           </p:stCondLst>
@@ -11310,7 +11425,7 @@
                                     </p:set>
                                     <p:animEffect transition="in" filter="fade">
                                       <p:cBhvr>
-                                        <p:cTn id="46" dur="500"/>
+                                        <p:cTn id="48" dur="500"/>
                                         <p:tgtEl>
                                           <p:spTgt spid="232"/>
                                         </p:tgtEl>
@@ -11320,14 +11435,14 @@
                                 </p:cTn>
                               </p:par>
                               <p:par>
-                                <p:cTn id="47" presetID="10" presetClass="entr" presetSubtype="0" fill="hold" nodeType="withEffect">
+                                <p:cTn id="49" presetID="10" presetClass="entr" presetSubtype="0" fill="hold" nodeType="withEffect">
                                   <p:stCondLst>
                                     <p:cond delay="0"/>
                                   </p:stCondLst>
                                   <p:childTnLst>
                                     <p:set>
                                       <p:cBhvr>
-                                        <p:cTn id="48" dur="1" fill="hold">
+                                        <p:cTn id="50" dur="1" fill="hold">
                                           <p:stCondLst>
                                             <p:cond delay="0"/>
                                           </p:stCondLst>
@@ -11345,7 +11460,7 @@
                                     </p:set>
                                     <p:animEffect transition="in" filter="fade">
                                       <p:cBhvr>
-                                        <p:cTn id="49" dur="500"/>
+                                        <p:cTn id="51" dur="500"/>
                                         <p:tgtEl>
                                           <p:spTgt spid="242"/>
                                         </p:tgtEl>
@@ -11355,14 +11470,14 @@
                                 </p:cTn>
                               </p:par>
                               <p:par>
-                                <p:cTn id="50" presetID="10" presetClass="entr" presetSubtype="0" fill="hold" nodeType="withEffect">
+                                <p:cTn id="52" presetID="10" presetClass="entr" presetSubtype="0" fill="hold" nodeType="withEffect">
                                   <p:stCondLst>
                                     <p:cond delay="0"/>
                                   </p:stCondLst>
                                   <p:childTnLst>
                                     <p:set>
                                       <p:cBhvr>
-                                        <p:cTn id="51" dur="1" fill="hold">
+                                        <p:cTn id="53" dur="1" fill="hold">
                                           <p:stCondLst>
                                             <p:cond delay="0"/>
                                           </p:stCondLst>
@@ -11380,7 +11495,7 @@
                                     </p:set>
                                     <p:animEffect transition="in" filter="fade">
                                       <p:cBhvr>
-                                        <p:cTn id="52" dur="500"/>
+                                        <p:cTn id="54" dur="500"/>
                                         <p:tgtEl>
                                           <p:spTgt spid="233"/>
                                         </p:tgtEl>
@@ -11390,14 +11505,14 @@
                                 </p:cTn>
                               </p:par>
                               <p:par>
-                                <p:cTn id="53" presetID="10" presetClass="entr" presetSubtype="0" fill="hold" nodeType="withEffect">
+                                <p:cTn id="55" presetID="10" presetClass="entr" presetSubtype="0" fill="hold" nodeType="withEffect">
                                   <p:stCondLst>
                                     <p:cond delay="0"/>
                                   </p:stCondLst>
                                   <p:childTnLst>
                                     <p:set>
                                       <p:cBhvr>
-                                        <p:cTn id="54" dur="1" fill="hold">
+                                        <p:cTn id="56" dur="1" fill="hold">
                                           <p:stCondLst>
                                             <p:cond delay="0"/>
                                           </p:stCondLst>
@@ -11415,7 +11530,7 @@
                                     </p:set>
                                     <p:animEffect transition="in" filter="fade">
                                       <p:cBhvr>
-                                        <p:cTn id="55" dur="500"/>
+                                        <p:cTn id="57" dur="500"/>
                                         <p:tgtEl>
                                           <p:spTgt spid="243"/>
                                         </p:tgtEl>
@@ -11425,14 +11540,14 @@
                                 </p:cTn>
                               </p:par>
                               <p:par>
-                                <p:cTn id="56" presetID="10" presetClass="entr" presetSubtype="0" fill="hold" nodeType="withEffect">
+                                <p:cTn id="58" presetID="10" presetClass="entr" presetSubtype="0" fill="hold" nodeType="withEffect">
                                   <p:stCondLst>
                                     <p:cond delay="0"/>
                                   </p:stCondLst>
                                   <p:childTnLst>
                                     <p:set>
                                       <p:cBhvr>
-                                        <p:cTn id="57" dur="1" fill="hold">
+                                        <p:cTn id="59" dur="1" fill="hold">
                                           <p:stCondLst>
                                             <p:cond delay="0"/>
                                           </p:stCondLst>
@@ -11450,7 +11565,7 @@
                                     </p:set>
                                     <p:animEffect transition="in" filter="fade">
                                       <p:cBhvr>
-                                        <p:cTn id="58" dur="500"/>
+                                        <p:cTn id="60" dur="500"/>
                                         <p:tgtEl>
                                           <p:spTgt spid="250"/>
                                         </p:tgtEl>
@@ -11466,26 +11581,26 @@
                     </p:cTn>
                   </p:par>
                   <p:par>
-                    <p:cTn id="67" fill="hold">
+                    <p:cTn id="61" fill="hold">
                       <p:stCondLst>
                         <p:cond delay="indefinite"/>
                       </p:stCondLst>
                       <p:childTnLst>
                         <p:par>
-                          <p:cTn id="68" fill="hold">
+                          <p:cTn id="62" fill="hold">
                             <p:stCondLst>
                               <p:cond delay="0"/>
                             </p:stCondLst>
                             <p:childTnLst>
                               <p:par>
-                                <p:cTn id="61" presetID="10" presetClass="entr" presetSubtype="0" fill="hold" nodeType="clickEffect">
+                                <p:cTn id="63" presetID="10" presetClass="entr" presetSubtype="0" fill="hold" nodeType="clickEffect">
                                   <p:stCondLst>
                                     <p:cond delay="0"/>
                                   </p:stCondLst>
                                   <p:childTnLst>
                                     <p:set>
                                       <p:cBhvr>
-                                        <p:cTn id="62" dur="1" fill="hold">
+                                        <p:cTn id="64" dur="1" fill="hold">
                                           <p:stCondLst>
                                             <p:cond delay="0"/>
                                           </p:stCondLst>
@@ -11503,7 +11618,7 @@
                                     </p:set>
                                     <p:animEffect transition="in" filter="fade">
                                       <p:cBhvr>
-                                        <p:cTn id="63" dur="500"/>
+                                        <p:cTn id="65" dur="500"/>
                                         <p:tgtEl>
                                           <p:spTgt spid="260"/>
                                         </p:tgtEl>
@@ -11513,14 +11628,14 @@
                                 </p:cTn>
                               </p:par>
                               <p:par>
-                                <p:cTn id="64" presetID="10" presetClass="entr" presetSubtype="0" fill="hold" nodeType="withEffect">
+                                <p:cTn id="66" presetID="10" presetClass="entr" presetSubtype="0" fill="hold" nodeType="withEffect">
                                   <p:stCondLst>
                                     <p:cond delay="0"/>
                                   </p:stCondLst>
                                   <p:childTnLst>
                                     <p:set>
                                       <p:cBhvr>
-                                        <p:cTn id="65" dur="1" fill="hold">
+                                        <p:cTn id="67" dur="1" fill="hold">
                                           <p:stCondLst>
                                             <p:cond delay="0"/>
                                           </p:stCondLst>
@@ -11538,7 +11653,7 @@
                                     </p:set>
                                     <p:animEffect transition="in" filter="fade">
                                       <p:cBhvr>
-                                        <p:cTn id="66" dur="500"/>
+                                        <p:cTn id="68" dur="500"/>
                                         <p:tgtEl>
                                           <p:spTgt spid="261"/>
                                         </p:tgtEl>
@@ -11554,26 +11669,26 @@
                     </p:cTn>
                   </p:par>
                   <p:par>
-                    <p:cTn id="72" fill="hold">
+                    <p:cTn id="69" fill="hold">
                       <p:stCondLst>
                         <p:cond delay="indefinite"/>
                       </p:stCondLst>
                       <p:childTnLst>
                         <p:par>
-                          <p:cTn id="73" fill="hold">
+                          <p:cTn id="70" fill="hold">
                             <p:stCondLst>
                               <p:cond delay="0"/>
                             </p:stCondLst>
                             <p:childTnLst>
                               <p:par>
-                                <p:cTn id="69" presetID="10" presetClass="entr" presetSubtype="0" fill="hold" nodeType="clickEffect">
+                                <p:cTn id="71" presetID="10" presetClass="entr" presetSubtype="0" fill="hold" nodeType="clickEffect">
                                   <p:stCondLst>
                                     <p:cond delay="0"/>
                                   </p:stCondLst>
                                   <p:childTnLst>
                                     <p:set>
                                       <p:cBhvr>
-                                        <p:cTn id="70" dur="1" fill="hold">
+                                        <p:cTn id="72" dur="1" fill="hold">
                                           <p:stCondLst>
                                             <p:cond delay="0"/>
                                           </p:stCondLst>
@@ -11591,7 +11706,7 @@
                                     </p:set>
                                     <p:animEffect transition="in" filter="fade">
                                       <p:cBhvr>
-                                        <p:cTn id="71" dur="500"/>
+                                        <p:cTn id="73" dur="500"/>
                                         <p:tgtEl>
                                           <p:spTgt spid="262"/>
                                         </p:tgtEl>
@@ -11607,26 +11722,26 @@
                     </p:cTn>
                   </p:par>
                   <p:par>
-                    <p:cTn id="80" fill="hold">
+                    <p:cTn id="74" fill="hold">
                       <p:stCondLst>
                         <p:cond delay="indefinite"/>
                       </p:stCondLst>
                       <p:childTnLst>
                         <p:par>
-                          <p:cTn id="81" fill="hold">
+                          <p:cTn id="75" fill="hold">
                             <p:stCondLst>
                               <p:cond delay="0"/>
                             </p:stCondLst>
                             <p:childTnLst>
                               <p:par>
-                                <p:cTn id="74" presetID="10" presetClass="entr" presetSubtype="0" fill="hold" nodeType="clickEffect">
+                                <p:cTn id="76" presetID="10" presetClass="entr" presetSubtype="0" fill="hold" nodeType="clickEffect">
                                   <p:stCondLst>
                                     <p:cond delay="0"/>
                                   </p:stCondLst>
                                   <p:childTnLst>
                                     <p:set>
                                       <p:cBhvr>
-                                        <p:cTn id="75" dur="1" fill="hold">
+                                        <p:cTn id="77" dur="1" fill="hold">
                                           <p:stCondLst>
                                             <p:cond delay="0"/>
                                           </p:stCondLst>
@@ -11644,7 +11759,7 @@
                                     </p:set>
                                     <p:animEffect transition="in" filter="fade">
                                       <p:cBhvr>
-                                        <p:cTn id="76" dur="500"/>
+                                        <p:cTn id="78" dur="500"/>
                                         <p:tgtEl>
                                           <p:spTgt spid="131"/>
                                         </p:tgtEl>
@@ -11654,14 +11769,14 @@
                                 </p:cTn>
                               </p:par>
                               <p:par>
-                                <p:cTn id="77" presetID="10" presetClass="entr" presetSubtype="0" fill="hold" nodeType="withEffect">
+                                <p:cTn id="79" presetID="10" presetClass="entr" presetSubtype="0" fill="hold" nodeType="withEffect">
                                   <p:stCondLst>
                                     <p:cond delay="0"/>
                                   </p:stCondLst>
                                   <p:childTnLst>
                                     <p:set>
                                       <p:cBhvr>
-                                        <p:cTn id="78" dur="1" fill="hold">
+                                        <p:cTn id="80" dur="1" fill="hold">
                                           <p:stCondLst>
                                             <p:cond delay="0"/>
                                           </p:stCondLst>
@@ -11679,7 +11794,7 @@
                                     </p:set>
                                     <p:animEffect transition="in" filter="fade">
                                       <p:cBhvr>
-                                        <p:cTn id="79" dur="500"/>
+                                        <p:cTn id="81" dur="500"/>
                                         <p:tgtEl>
                                           <p:spTgt spid="116"/>
                                         </p:tgtEl>
@@ -11754,7 +11869,7 @@
         </p:spPr>
         <p:txBody>
           <a:bodyPr>
-            <a:normAutofit/>
+            <a:normAutofit fontScale="90000"/>
           </a:bodyPr>
           <a:lstStyle/>
           <a:p>
@@ -11982,7 +12097,23 @@
                   <a:srgbClr val="8E6F3E"/>
                 </a:solidFill>
               </a:rPr>
-              <a:t>INDIRECT — A PROXY</a:t>
+              <a:t xml:space="preserve">INDIRECT </a:t>
+            </a:r>
+            <a:r>
+              <a:rPr lang="en-US" sz="2000" b="1" dirty="0">
+                <a:solidFill>
+                  <a:srgbClr val="8E6F3E"/>
+                </a:solidFill>
+              </a:rPr>
+              <a:t>(</a:t>
+            </a:r>
+            <a:r>
+              <a:rPr lang="en-US" sz="2000" b="1" i="0" dirty="0">
+                <a:solidFill>
+                  <a:srgbClr val="8E6F3E"/>
+                </a:solidFill>
+              </a:rPr>
+              <a:t>A PROXY)</a:t>
             </a:r>
           </a:p>
         </p:txBody>
@@ -12237,7 +12368,7 @@
         </p:spPr>
         <p:txBody>
           <a:bodyPr>
-            <a:normAutofit/>
+            <a:normAutofit fontScale="90000"/>
           </a:bodyPr>
           <a:lstStyle/>
           <a:p>
@@ -12602,7 +12733,7 @@
                   <a:srgbClr val="5C4826"/>
                 </a:solidFill>
               </a:rPr>
-              <a:t>depends on what counts — and what gets found</a:t>
+              <a:t>depends on what counts, and what gets found</a:t>
             </a:r>
           </a:p>
         </p:txBody>
@@ -12678,7 +12809,7 @@
                   <a:srgbClr val="FFFFFF"/>
                 </a:solidFill>
               </a:rPr>
-              <a:t>Reduction is why metrics are useful — and why interpretation is required.</a:t>
+              <a:t>Reduction is why metrics are useful and why interpretation is required.</a:t>
             </a:r>
           </a:p>
         </p:txBody>
@@ -12877,7 +13008,7 @@
         </p:spPr>
         <p:txBody>
           <a:bodyPr>
-            <a:normAutofit/>
+            <a:normAutofit fontScale="90000"/>
           </a:bodyPr>
           <a:lstStyle/>
           <a:p>
@@ -13006,7 +13137,7 @@
                   <a:srgbClr val="9A9A9A"/>
                 </a:solidFill>
               </a:rPr>
-              <a:t>  ·  </a:t>
+              <a:t xml:space="preserve">  ·  </a:t>
             </a:r>
             <a:r>
               <a:rPr lang="en-US" sz="2000" b="1" i="0" dirty="0">
@@ -13022,7 +13153,7 @@
                   <a:srgbClr val="9A9A9A"/>
                 </a:solidFill>
               </a:rPr>
-              <a:t>  ·  </a:t>
+              <a:t xml:space="preserve">  ·  </a:t>
             </a:r>
             <a:r>
               <a:rPr lang="en-US" sz="2000" b="1" i="0" dirty="0">
@@ -13130,6 +13261,84 @@
   <p:clrMapOvr>
     <a:masterClrMapping/>
   </p:clrMapOvr>
+  <p:timing>
+    <p:tnLst>
+      <p:par>
+        <p:cTn id="1" dur="indefinite" restart="never" nodeType="tmRoot">
+          <p:childTnLst>
+            <p:seq concurrent="1" nextAc="seek">
+              <p:cTn id="2" dur="indefinite" nodeType="mainSeq">
+                <p:childTnLst>
+                  <p:par>
+                    <p:cTn id="3" fill="hold">
+                      <p:stCondLst>
+                        <p:cond delay="indefinite"/>
+                      </p:stCondLst>
+                      <p:childTnLst>
+                        <p:par>
+                          <p:cTn id="4" fill="hold">
+                            <p:stCondLst>
+                              <p:cond delay="0"/>
+                            </p:stCondLst>
+                            <p:childTnLst>
+                              <p:par>
+                                <p:cTn id="5" presetID="1" presetClass="entr" presetSubtype="0" fill="hold" grpId="0" nodeType="clickEffect">
+                                  <p:stCondLst>
+                                    <p:cond delay="0"/>
+                                  </p:stCondLst>
+                                  <p:childTnLst>
+                                    <p:set>
+                                      <p:cBhvr>
+                                        <p:cTn id="6" dur="1" fill="hold">
+                                          <p:stCondLst>
+                                            <p:cond delay="0"/>
+                                          </p:stCondLst>
+                                        </p:cTn>
+                                        <p:tgtEl>
+                                          <p:spTgt spid="103"/>
+                                        </p:tgtEl>
+                                        <p:attrNameLst>
+                                          <p:attrName>style.visibility</p:attrName>
+                                        </p:attrNameLst>
+                                      </p:cBhvr>
+                                      <p:to>
+                                        <p:strVal val="visible"/>
+                                      </p:to>
+                                    </p:set>
+                                  </p:childTnLst>
+                                </p:cTn>
+                              </p:par>
+                            </p:childTnLst>
+                          </p:cTn>
+                        </p:par>
+                      </p:childTnLst>
+                    </p:cTn>
+                  </p:par>
+                </p:childTnLst>
+              </p:cTn>
+              <p:prevCondLst>
+                <p:cond evt="onPrev" delay="0">
+                  <p:tgtEl>
+                    <p:sldTgt/>
+                  </p:tgtEl>
+                </p:cond>
+              </p:prevCondLst>
+              <p:nextCondLst>
+                <p:cond evt="onNext" delay="0">
+                  <p:tgtEl>
+                    <p:sldTgt/>
+                  </p:tgtEl>
+                </p:cond>
+              </p:nextCondLst>
+            </p:seq>
+          </p:childTnLst>
+        </p:cTn>
+      </p:par>
+    </p:tnLst>
+    <p:bldLst>
+      <p:bldP spid="103" grpId="0"/>
+    </p:bldLst>
+  </p:timing>
 </p:sld>
 </file>
 
@@ -13168,7 +13377,7 @@
         </p:spPr>
         <p:txBody>
           <a:bodyPr>
-            <a:normAutofit/>
+            <a:normAutofit fontScale="90000"/>
           </a:bodyPr>
           <a:lstStyle/>
           <a:p>
@@ -13182,7 +13391,7 @@
                   <a:srgbClr val="000000"/>
                 </a:solidFill>
               </a:rPr>
-              <a:t>We need to make a decision</a:t>
+              <a:t>Engineers need to make decisions</a:t>
             </a:r>
           </a:p>
         </p:txBody>
@@ -13243,43 +13452,6 @@
                 </a:solidFill>
               </a:rPr>
               <a:t>Given what we know, what should we do?</a:t>
-            </a:r>
-          </a:p>
-        </p:txBody>
-      </p:sp>
-      <p:sp>
-        <p:nvSpPr>
-          <p:cNvPr id="109" name="Ital"/>
-          <p:cNvSpPr txBox="1"/>
-          <p:nvPr/>
-        </p:nvSpPr>
-        <p:spPr>
-          <a:xfrm>
-            <a:off x="274320" y="5303520"/>
-            <a:ext cx="8595360" cy="411480"/>
-          </a:xfrm>
-          <a:prstGeom prst="rect">
-            <a:avLst/>
-          </a:prstGeom>
-          <a:noFill/>
-          <a:ln>
-            <a:noFill/>
-          </a:ln>
-        </p:spPr>
-        <p:txBody>
-          <a:bodyPr wrap="square" lIns="0" tIns="0" rIns="0" bIns="0" anchor="t"/>
-          <a:lstStyle/>
-          <a:p>
-            <a:pPr algn="ctr">
-              <a:buNone/>
-            </a:pPr>
-            <a:r>
-              <a:rPr lang="en-US" sz="2000" b="0" i="1" dirty="0">
-                <a:solidFill>
-                  <a:srgbClr val="000000"/>
-                </a:solidFill>
-              </a:rPr>
-              <a:t>Different units. The same question.</a:t>
             </a:r>
           </a:p>
         </p:txBody>
@@ -13906,7 +14078,7 @@
         </p:spPr>
         <p:txBody>
           <a:bodyPr>
-            <a:normAutofit/>
+            <a:normAutofit fontScale="90000"/>
           </a:bodyPr>
           <a:lstStyle/>
           <a:p>
@@ -14201,7 +14373,7 @@
                   <a:srgbClr val="FFFFFF"/>
                 </a:solidFill>
               </a:rPr>
-              <a:t>A proxy is not inherently bad. Understand — and defend — the relationship.</a:t>
+              <a:t>A proxy is not inherently bad. Understand and defend the relationship.</a:t>
             </a:r>
           </a:p>
         </p:txBody>
@@ -14249,7 +14421,7 @@
         </p:spPr>
         <p:txBody>
           <a:bodyPr>
-            <a:normAutofit/>
+            <a:normAutofit fontScale="90000"/>
           </a:bodyPr>
           <a:lstStyle/>
           <a:p>
@@ -14364,7 +14536,24 @@
                   <a:srgbClr val="5C4826"/>
                 </a:solidFill>
               </a:rPr>
-              <a:t>commits  ──►  useful output</a:t>
+              <a:t xml:space="preserve">commits </a:t>
+            </a:r>
+            <a:r>
+              <a:rPr lang="en-US" sz="2000" dirty="0">
+                <a:solidFill>
+                  <a:srgbClr val="5C4826"/>
+                </a:solidFill>
+                <a:sym typeface="Wingdings" pitchFamily="2" charset="2"/>
+              </a:rPr>
+              <a:t xml:space="preserve"> </a:t>
+            </a:r>
+            <a:r>
+              <a:rPr lang="en-US" sz="2000" b="0" i="0" dirty="0">
+                <a:solidFill>
+                  <a:srgbClr val="5C4826"/>
+                </a:solidFill>
+              </a:rPr>
+              <a:t>useful output</a:t>
             </a:r>
           </a:p>
           <a:p>
@@ -14380,7 +14569,7 @@
                   <a:srgbClr val="555960"/>
                 </a:solidFill>
               </a:rPr>
-              <a:t>an empirical relationship — it can hold</a:t>
+              <a:t>an empirical relationship; it can hold</a:t>
             </a:r>
           </a:p>
           <a:p>
@@ -14390,13 +14579,26 @@
               </a:spcBef>
               <a:buNone/>
             </a:pPr>
+            <a:endParaRPr lang="en-US" sz="2000" b="0" i="1" dirty="0">
+              <a:solidFill>
+                <a:srgbClr val="555960"/>
+              </a:solidFill>
+            </a:endParaRPr>
+          </a:p>
+          <a:p>
+            <a:pPr algn="ctr">
+              <a:spcBef>
+                <a:spcPts val="160"/>
+              </a:spcBef>
+              <a:buNone/>
+            </a:pPr>
             <a:r>
               <a:rPr lang="en-US" sz="2000" b="1" i="1" dirty="0">
                 <a:solidFill>
                   <a:srgbClr val="555960"/>
                 </a:solidFill>
               </a:rPr>
-              <a:t>Surrogation: </a:t>
+              <a:t xml:space="preserve">Surrogation: </a:t>
             </a:r>
             <a:r>
               <a:rPr lang="en-US" sz="2000" b="0" i="1" dirty="0">
@@ -14404,8 +14606,16 @@
                   <a:srgbClr val="555960"/>
                 </a:solidFill>
               </a:rPr>
-              <a:t>we begin treating commits as though they </a:t>
-            </a:r>
+              <a:t xml:space="preserve">we begin treating commits as though they </a:t>
+            </a:r>
+          </a:p>
+          <a:p>
+            <a:pPr algn="ctr">
+              <a:spcBef>
+                <a:spcPts val="160"/>
+              </a:spcBef>
+              <a:buNone/>
+            </a:pPr>
             <a:r>
               <a:rPr lang="en-US" sz="2000" b="1" i="1" dirty="0">
                 <a:solidFill>
@@ -14420,7 +14630,7 @@
                   <a:srgbClr val="555960"/>
                 </a:solidFill>
               </a:rPr>
-              <a:t> useful output</a:t>
+              <a:t xml:space="preserve"> useful output</a:t>
             </a:r>
           </a:p>
         </p:txBody>
@@ -14470,8 +14680,8 @@
         </p:nvSpPr>
         <p:spPr>
           <a:xfrm>
-            <a:off x="4873752" y="1389888"/>
-            <a:ext cx="3959352" cy="2377440"/>
+            <a:off x="4572000" y="1389888"/>
+            <a:ext cx="4261104" cy="2377440"/>
           </a:xfrm>
           <a:prstGeom prst="rect">
             <a:avLst/>
@@ -14491,24 +14701,69 @@
           <a:p>
             <a:pPr algn="ctr"/>
             <a:r>
-              <a:rPr sz="2000" b="1" i="0">
+              <a:rPr sz="2000" b="1" i="0" dirty="0">
                 <a:solidFill>
                   <a:srgbClr val="5C4826"/>
                 </a:solidFill>
               </a:rPr>
-              <a:t>Target: increase commits / engineer / week</a:t>
-            </a:r>
+              <a:t xml:space="preserve">Target: increase </a:t>
+            </a:r>
+            <a:endParaRPr lang="en-US" sz="2000" b="1" dirty="0">
+              <a:solidFill>
+                <a:srgbClr val="5C4826"/>
+              </a:solidFill>
+            </a:endParaRPr>
           </a:p>
           <a:p>
             <a:pPr algn="ctr"/>
             <a:r>
-              <a:rPr sz="2000" b="0" i="0">
+              <a:rPr sz="2000" b="1" i="0" dirty="0">
                 <a:solidFill>
                   <a:srgbClr val="5C4826"/>
                 </a:solidFill>
               </a:rPr>
-              <a:t>commits rise — useful output need not</a:t>
-            </a:r>
+              <a:t>commits / engineer / week</a:t>
+            </a:r>
+          </a:p>
+          <a:p>
+            <a:pPr algn="ctr"/>
+            <a:r>
+              <a:rPr sz="2000" b="0" i="0" dirty="0">
+                <a:solidFill>
+                  <a:srgbClr val="5C4826"/>
+                </a:solidFill>
+              </a:rPr>
+              <a:t>commits rise</a:t>
+            </a:r>
+            <a:r>
+              <a:rPr lang="en-US" sz="2000" b="0" i="0" dirty="0">
+                <a:solidFill>
+                  <a:srgbClr val="5C4826"/>
+                </a:solidFill>
+              </a:rPr>
+              <a:t xml:space="preserve">; </a:t>
+            </a:r>
+            <a:r>
+              <a:rPr sz="2000" b="0" i="0" dirty="0">
+                <a:solidFill>
+                  <a:srgbClr val="5C4826"/>
+                </a:solidFill>
+              </a:rPr>
+              <a:t>useful output need not</a:t>
+            </a:r>
+            <a:endParaRPr lang="en-US" sz="2000" b="0" i="0" dirty="0">
+              <a:solidFill>
+                <a:srgbClr val="5C4826"/>
+              </a:solidFill>
+            </a:endParaRPr>
+          </a:p>
+          <a:p>
+            <a:pPr algn="ctr"/>
+            <a:endParaRPr sz="2000" b="0" i="0" dirty="0">
+              <a:solidFill>
+                <a:srgbClr val="5C4826"/>
+              </a:solidFill>
+            </a:endParaRPr>
           </a:p>
           <a:p>
             <a:pPr algn="ctr">
@@ -14520,7 +14775,7 @@
                   <a:srgbClr val="555960"/>
                 </a:solidFill>
               </a:rPr>
-              <a:t>Goodhart: </a:t>
+              <a:t xml:space="preserve">Goodhart: </a:t>
             </a:r>
             <a:r>
               <a:rPr lang="en-US" sz="2000" b="0" i="1" dirty="0">
@@ -14528,7 +14783,33 @@
                   <a:srgbClr val="555960"/>
                 </a:solidFill>
               </a:rPr>
-              <a:t>once commits become the target, the empirical relationship itself can change</a:t>
+              <a:t xml:space="preserve">once commits become </a:t>
+            </a:r>
+          </a:p>
+          <a:p>
+            <a:pPr algn="ctr">
+              <a:buNone/>
+            </a:pPr>
+            <a:r>
+              <a:rPr lang="en-US" sz="2000" b="0" i="1" dirty="0">
+                <a:solidFill>
+                  <a:srgbClr val="555960"/>
+                </a:solidFill>
+              </a:rPr>
+              <a:t xml:space="preserve">the target, the empirical </a:t>
+            </a:r>
+          </a:p>
+          <a:p>
+            <a:pPr algn="ctr">
+              <a:buNone/>
+            </a:pPr>
+            <a:r>
+              <a:rPr lang="en-US" sz="2000" b="0" i="1" dirty="0">
+                <a:solidFill>
+                  <a:srgbClr val="555960"/>
+                </a:solidFill>
+              </a:rPr>
+              <a:t>relationship itself can change</a:t>
             </a:r>
           </a:p>
         </p:txBody>
@@ -14569,7 +14850,7 @@
                   <a:srgbClr val="2E74B5"/>
                 </a:solidFill>
               </a:rPr>
-              <a:t>Surrogation: </a:t>
+              <a:t xml:space="preserve">Surrogation: </a:t>
             </a:r>
             <a:r>
               <a:rPr lang="en-US" sz="2000" b="0" i="0" dirty="0">
@@ -14593,7 +14874,7 @@
                   <a:srgbClr val="2E74B5"/>
                 </a:solidFill>
               </a:rPr>
-              <a:t>Goodhart’s Law: </a:t>
+              <a:t xml:space="preserve">Goodhart’s Law: </a:t>
             </a:r>
             <a:r>
               <a:rPr lang="en-US" sz="2000" b="0" i="0" dirty="0">
@@ -14611,6 +14892,84 @@
   <p:clrMapOvr>
     <a:masterClrMapping/>
   </p:clrMapOvr>
+  <p:timing>
+    <p:tnLst>
+      <p:par>
+        <p:cTn id="1" dur="indefinite" restart="never" nodeType="tmRoot">
+          <p:childTnLst>
+            <p:seq concurrent="1" nextAc="seek">
+              <p:cTn id="2" dur="indefinite" nodeType="mainSeq">
+                <p:childTnLst>
+                  <p:par>
+                    <p:cTn id="3" fill="hold">
+                      <p:stCondLst>
+                        <p:cond delay="indefinite"/>
+                      </p:stCondLst>
+                      <p:childTnLst>
+                        <p:par>
+                          <p:cTn id="4" fill="hold">
+                            <p:stCondLst>
+                              <p:cond delay="0"/>
+                            </p:stCondLst>
+                            <p:childTnLst>
+                              <p:par>
+                                <p:cTn id="5" presetID="1" presetClass="entr" presetSubtype="0" fill="hold" grpId="0" nodeType="clickEffect">
+                                  <p:stCondLst>
+                                    <p:cond delay="0"/>
+                                  </p:stCondLst>
+                                  <p:childTnLst>
+                                    <p:set>
+                                      <p:cBhvr>
+                                        <p:cTn id="6" dur="1" fill="hold">
+                                          <p:stCondLst>
+                                            <p:cond delay="0"/>
+                                          </p:stCondLst>
+                                        </p:cTn>
+                                        <p:tgtEl>
+                                          <p:spTgt spid="104"/>
+                                        </p:tgtEl>
+                                        <p:attrNameLst>
+                                          <p:attrName>style.visibility</p:attrName>
+                                        </p:attrNameLst>
+                                      </p:cBhvr>
+                                      <p:to>
+                                        <p:strVal val="visible"/>
+                                      </p:to>
+                                    </p:set>
+                                  </p:childTnLst>
+                                </p:cTn>
+                              </p:par>
+                            </p:childTnLst>
+                          </p:cTn>
+                        </p:par>
+                      </p:childTnLst>
+                    </p:cTn>
+                  </p:par>
+                </p:childTnLst>
+              </p:cTn>
+              <p:prevCondLst>
+                <p:cond evt="onPrev" delay="0">
+                  <p:tgtEl>
+                    <p:sldTgt/>
+                  </p:tgtEl>
+                </p:cond>
+              </p:prevCondLst>
+              <p:nextCondLst>
+                <p:cond evt="onNext" delay="0">
+                  <p:tgtEl>
+                    <p:sldTgt/>
+                  </p:tgtEl>
+                </p:cond>
+              </p:nextCondLst>
+            </p:seq>
+          </p:childTnLst>
+        </p:cTn>
+      </p:par>
+    </p:tnLst>
+    <p:bldLst>
+      <p:bldP spid="104" grpId="0" animBg="1"/>
+    </p:bldLst>
+  </p:timing>
 </p:sld>
 </file>
 
@@ -14649,7 +15008,7 @@
         </p:spPr>
         <p:txBody>
           <a:bodyPr>
-            <a:normAutofit/>
+            <a:normAutofit fontScale="90000"/>
           </a:bodyPr>
           <a:lstStyle/>
           <a:p>
@@ -14987,14 +15346,11 @@
                   <a:srgbClr val="5C4826"/>
                 </a:solidFill>
               </a:rPr>
-              <a:t>A metric acquires meaning through the property, conditions, and decision</a:t>
+              <a:t xml:space="preserve">A metric acquires meaning through the property, </a:t>
             </a:r>
           </a:p>
           <a:p>
             <a:pPr algn="ctr">
-              <a:spcBef>
-                <a:spcPts val="60"/>
-              </a:spcBef>
               <a:buNone/>
             </a:pPr>
             <a:r>
@@ -15003,7 +15359,7 @@
                   <a:srgbClr val="5C4826"/>
                 </a:solidFill>
               </a:rPr>
-              <a:t>for which it is being used.</a:t>
+              <a:t>conditions, and decision for which it is being used.</a:t>
             </a:r>
           </a:p>
         </p:txBody>
@@ -15051,7 +15407,7 @@
         </p:spPr>
         <p:txBody>
           <a:bodyPr>
-            <a:normAutofit/>
+            <a:normAutofit fontScale="90000"/>
           </a:bodyPr>
           <a:lstStyle/>
           <a:p>
@@ -15129,7 +15485,7 @@
                   <a:srgbClr val="8E6F3E"/>
                 </a:solidFill>
               </a:rPr>
-              <a:t>1    </a:t>
+              <a:t xml:space="preserve">1    </a:t>
             </a:r>
             <a:r>
               <a:rPr lang="en-US" sz="2400" b="0" i="0" dirty="0">
@@ -15178,7 +15534,7 @@
                   <a:srgbClr val="8E6F3E"/>
                 </a:solidFill>
               </a:rPr>
-              <a:t>2    </a:t>
+              <a:t xml:space="preserve">2    </a:t>
             </a:r>
             <a:r>
               <a:rPr lang="en-US" sz="2400" b="0" i="0" dirty="0">
@@ -15227,7 +15583,7 @@
                   <a:srgbClr val="8E6F3E"/>
                 </a:solidFill>
               </a:rPr>
-              <a:t>3    </a:t>
+              <a:t xml:space="preserve">3    </a:t>
             </a:r>
             <a:r>
               <a:rPr lang="en-US" sz="2400" b="0" i="0" dirty="0">
@@ -15276,7 +15632,7 @@
                   <a:srgbClr val="8E6F3E"/>
                 </a:solidFill>
               </a:rPr>
-              <a:t>4    </a:t>
+              <a:t xml:space="preserve">4    </a:t>
             </a:r>
             <a:r>
               <a:rPr lang="en-US" sz="2400" b="0" i="0" dirty="0">
@@ -15483,7 +15839,7 @@
         </p:spPr>
         <p:txBody>
           <a:bodyPr>
-            <a:normAutofit/>
+            <a:normAutofit fontScale="90000"/>
           </a:bodyPr>
           <a:lstStyle/>
           <a:p>
@@ -17944,7 +18300,7 @@
         </p:spPr>
         <p:txBody>
           <a:bodyPr>
-            <a:normAutofit/>
+            <a:normAutofit fontScale="90000"/>
           </a:bodyPr>
           <a:lstStyle/>
           <a:p>
@@ -18030,7 +18386,7 @@
                   <a:srgbClr val="5C4826"/>
                 </a:solidFill>
               </a:rPr>
-              <a:t> against a bound of </a:t>
+              <a:t xml:space="preserve"> against a bound of </a:t>
             </a:r>
             <a:r>
               <a:rPr lang="en-US" sz="2000" b="1" i="0" dirty="0">
@@ -18116,7 +18472,25 @@
                   <a:srgbClr val="5C4826"/>
                 </a:solidFill>
               </a:rPr>
-              <a:t>What happens if we’re wrong?</a:t>
+              <a:t xml:space="preserve">What happens if </a:t>
+            </a:r>
+            <a:endParaRPr lang="en-US" sz="2000" dirty="0">
+              <a:solidFill>
+                <a:srgbClr val="5C4826"/>
+              </a:solidFill>
+            </a:endParaRPr>
+          </a:p>
+          <a:p>
+            <a:pPr algn="ctr">
+              <a:buNone/>
+            </a:pPr>
+            <a:r>
+              <a:rPr lang="en-US" sz="2000" b="0" i="0" dirty="0">
+                <a:solidFill>
+                  <a:srgbClr val="5C4826"/>
+                </a:solidFill>
+              </a:rPr>
+              <a:t>we’re wrong?</a:t>
             </a:r>
           </a:p>
         </p:txBody>
@@ -18194,7 +18568,7 @@
                   <a:srgbClr val="5C4826"/>
                 </a:solidFill>
               </a:rPr>
-              <a:t>How representative — how confident — is the evidence?</a:t>
+              <a:t>How representative (confident) is the evidence?</a:t>
             </a:r>
           </a:p>
         </p:txBody>
@@ -18272,7 +18646,20 @@
                   <a:srgbClr val="5C4826"/>
                 </a:solidFill>
               </a:rPr>
-              <a:t>Can consequences be repaired?</a:t>
+              <a:t xml:space="preserve">Can consequences </a:t>
+            </a:r>
+          </a:p>
+          <a:p>
+            <a:pPr algn="ctr">
+              <a:buNone/>
+            </a:pPr>
+            <a:r>
+              <a:rPr lang="en-US" sz="2000" b="0" i="0" dirty="0">
+                <a:solidFill>
+                  <a:srgbClr val="5C4826"/>
+                </a:solidFill>
+              </a:rPr>
+              <a:t>be repaired?</a:t>
             </a:r>
           </a:p>
         </p:txBody>
@@ -18302,12 +18689,28 @@
           <a:p>
             <a:pPr algn="ctr"/>
             <a:r>
-              <a:rPr sz="2000" b="0" i="1">
+              <a:rPr sz="2000" b="0" i="1" dirty="0">
                 <a:solidFill>
                   <a:srgbClr val="555960"/>
                 </a:solidFill>
               </a:rPr>
-              <a:t>The same margin may be comfortable in a game and unacceptable in a medical device.</a:t>
+              <a:t xml:space="preserve">The same margin may be comfortable in a game </a:t>
+            </a:r>
+            <a:endParaRPr lang="en-US" sz="2000" b="0" i="1" dirty="0">
+              <a:solidFill>
+                <a:srgbClr val="555960"/>
+              </a:solidFill>
+            </a:endParaRPr>
+          </a:p>
+          <a:p>
+            <a:pPr algn="ctr"/>
+            <a:r>
+              <a:rPr sz="2000" b="0" i="1" dirty="0">
+                <a:solidFill>
+                  <a:srgbClr val="555960"/>
+                </a:solidFill>
+              </a:rPr>
+              <a:t>and unacceptable in a medical device.</a:t>
             </a:r>
           </a:p>
         </p:txBody>
@@ -18356,6 +18759,112 @@
   <p:clrMapOvr>
     <a:masterClrMapping/>
   </p:clrMapOvr>
+  <p:timing>
+    <p:tnLst>
+      <p:par>
+        <p:cTn id="1" dur="indefinite" restart="never" nodeType="tmRoot">
+          <p:childTnLst>
+            <p:seq concurrent="1" nextAc="seek">
+              <p:cTn id="2" dur="indefinite" nodeType="mainSeq">
+                <p:childTnLst>
+                  <p:par>
+                    <p:cTn id="3" fill="hold">
+                      <p:stCondLst>
+                        <p:cond delay="indefinite"/>
+                      </p:stCondLst>
+                      <p:childTnLst>
+                        <p:par>
+                          <p:cTn id="4" fill="hold">
+                            <p:stCondLst>
+                              <p:cond delay="0"/>
+                            </p:stCondLst>
+                            <p:childTnLst>
+                              <p:par>
+                                <p:cTn id="5" presetID="1" presetClass="entr" presetSubtype="0" fill="hold" grpId="0" nodeType="clickEffect">
+                                  <p:stCondLst>
+                                    <p:cond delay="0"/>
+                                  </p:stCondLst>
+                                  <p:childTnLst>
+                                    <p:set>
+                                      <p:cBhvr>
+                                        <p:cTn id="6" dur="1" fill="hold">
+                                          <p:stCondLst>
+                                            <p:cond delay="0"/>
+                                          </p:stCondLst>
+                                        </p:cTn>
+                                        <p:tgtEl>
+                                          <p:spTgt spid="107"/>
+                                        </p:tgtEl>
+                                        <p:attrNameLst>
+                                          <p:attrName>style.visibility</p:attrName>
+                                        </p:attrNameLst>
+                                      </p:cBhvr>
+                                      <p:to>
+                                        <p:strVal val="visible"/>
+                                      </p:to>
+                                    </p:set>
+                                  </p:childTnLst>
+                                </p:cTn>
+                              </p:par>
+                              <p:par>
+                                <p:cTn id="7" presetID="1" presetClass="entr" presetSubtype="0" fill="hold" grpId="0" nodeType="withEffect">
+                                  <p:stCondLst>
+                                    <p:cond delay="0"/>
+                                  </p:stCondLst>
+                                  <p:childTnLst>
+                                    <p:set>
+                                      <p:cBhvr>
+                                        <p:cTn id="8" dur="1" fill="hold">
+                                          <p:stCondLst>
+                                            <p:cond delay="0"/>
+                                          </p:stCondLst>
+                                        </p:cTn>
+                                        <p:tgtEl>
+                                          <p:spTgt spid="108"/>
+                                        </p:tgtEl>
+                                        <p:attrNameLst>
+                                          <p:attrName>style.visibility</p:attrName>
+                                        </p:attrNameLst>
+                                      </p:cBhvr>
+                                      <p:to>
+                                        <p:strVal val="visible"/>
+                                      </p:to>
+                                    </p:set>
+                                  </p:childTnLst>
+                                </p:cTn>
+                              </p:par>
+                            </p:childTnLst>
+                          </p:cTn>
+                        </p:par>
+                      </p:childTnLst>
+                    </p:cTn>
+                  </p:par>
+                </p:childTnLst>
+              </p:cTn>
+              <p:prevCondLst>
+                <p:cond evt="onPrev" delay="0">
+                  <p:tgtEl>
+                    <p:sldTgt/>
+                  </p:tgtEl>
+                </p:cond>
+              </p:prevCondLst>
+              <p:nextCondLst>
+                <p:cond evt="onNext" delay="0">
+                  <p:tgtEl>
+                    <p:sldTgt/>
+                  </p:tgtEl>
+                </p:cond>
+              </p:nextCondLst>
+            </p:seq>
+          </p:childTnLst>
+        </p:cTn>
+      </p:par>
+    </p:tnLst>
+    <p:bldLst>
+      <p:bldP spid="107" grpId="0"/>
+      <p:bldP spid="108" grpId="0" animBg="1"/>
+    </p:bldLst>
+  </p:timing>
 </p:sld>
 </file>
 
@@ -18394,7 +18903,7 @@
         </p:spPr>
         <p:txBody>
           <a:bodyPr>
-            <a:normAutofit/>
+            <a:normAutofit fontScale="90000"/>
           </a:bodyPr>
           <a:lstStyle/>
           <a:p>
@@ -18943,7 +19452,7 @@
         </p:spPr>
         <p:txBody>
           <a:bodyPr>
-            <a:normAutofit/>
+            <a:normAutofit fontScale="90000"/>
           </a:bodyPr>
           <a:lstStyle/>
           <a:p>
@@ -19965,7 +20474,7 @@
         </p:spPr>
         <p:txBody>
           <a:bodyPr>
-            <a:normAutofit/>
+            <a:normAutofit fontScale="90000"/>
           </a:bodyPr>
           <a:lstStyle/>
           <a:p>
@@ -20080,7 +20589,20 @@
                   <a:srgbClr val="5C4826"/>
                 </a:solidFill>
               </a:rPr>
-              <a:t>Engineering is the discipline of exercising informed control over consequential systems.</a:t>
+              <a:t xml:space="preserve">Engineering is the discipline of exercising </a:t>
+            </a:r>
+          </a:p>
+          <a:p>
+            <a:pPr algn="ctr">
+              <a:buNone/>
+            </a:pPr>
+            <a:r>
+              <a:rPr lang="en-US" sz="2000" b="0" i="0" dirty="0">
+                <a:solidFill>
+                  <a:srgbClr val="5C4826"/>
+                </a:solidFill>
+              </a:rPr>
+              <a:t>informed control over consequential systems.</a:t>
             </a:r>
           </a:p>
         </p:txBody>
@@ -20094,7 +20616,7 @@
         <p:spPr>
           <a:xfrm>
             <a:off x="685800" y="3108960"/>
-            <a:ext cx="7772400" cy="914400"/>
+            <a:ext cx="7772400" cy="1041010"/>
           </a:xfrm>
           <a:prstGeom prst="rect">
             <a:avLst/>
@@ -20133,13 +20655,13 @@
                   <a:srgbClr val="555960"/>
                 </a:solidFill>
               </a:rPr>
-              <a:t>Engineering judgment determines what those observations</a:t>
+              <a:t xml:space="preserve">Engineering judgment determines what </a:t>
             </a:r>
           </a:p>
           <a:p>
             <a:pPr algn="ctr">
               <a:spcBef>
-                <a:spcPts val="60"/>
+                <a:spcPts val="160"/>
               </a:spcBef>
               <a:buNone/>
             </a:pPr>
@@ -20149,7 +20671,7 @@
                   <a:srgbClr val="555960"/>
                 </a:solidFill>
               </a:rPr>
-              <a:t>mean for the decision.</a:t>
+              <a:t>those observations mean for the decision.</a:t>
             </a:r>
           </a:p>
         </p:txBody>
@@ -20490,7 +21012,7 @@
         </p:spPr>
         <p:txBody>
           <a:bodyPr>
-            <a:normAutofit/>
+            <a:normAutofit fontScale="90000"/>
           </a:bodyPr>
           <a:lstStyle/>
           <a:p>
@@ -20504,7 +21026,7 @@
                   <a:srgbClr val="000000"/>
                 </a:solidFill>
               </a:rPr>
-              <a:t>We have to decide before we know</a:t>
+              <a:t>We must decide before we know</a:t>
             </a:r>
           </a:p>
         </p:txBody>
@@ -20701,12 +21223,20 @@
               <a:buNone/>
             </a:pPr>
             <a:r>
+              <a:rPr lang="en-US" sz="2000" dirty="0">
+                <a:solidFill>
+                  <a:srgbClr val="555960"/>
+                </a:solidFill>
+              </a:rPr>
+              <a:t>m</a:t>
+            </a:r>
+            <a:r>
               <a:rPr lang="en-US" sz="2000" b="0" i="0" dirty="0">
                 <a:solidFill>
                   <a:srgbClr val="555960"/>
                 </a:solidFill>
               </a:rPr>
-              <a:t>models incomplete</a:t>
+              <a:t>odels are incomplete</a:t>
             </a:r>
           </a:p>
           <a:p>
@@ -20722,7 +21252,7 @@
                   <a:srgbClr val="555960"/>
                 </a:solidFill>
               </a:rPr>
-              <a:t>evidence finite</a:t>
+              <a:t>evidence is finite</a:t>
             </a:r>
           </a:p>
           <a:p>
@@ -20738,7 +21268,23 @@
                   <a:srgbClr val="555960"/>
                 </a:solidFill>
               </a:rPr>
-              <a:t>outcomes future</a:t>
+              <a:t xml:space="preserve">outcomes </a:t>
+            </a:r>
+            <a:r>
+              <a:rPr lang="en-US" sz="2000" dirty="0">
+                <a:solidFill>
+                  <a:srgbClr val="555960"/>
+                </a:solidFill>
+              </a:rPr>
+              <a:t xml:space="preserve">are a </a:t>
+            </a:r>
+            <a:r>
+              <a:rPr lang="en-US" sz="2000" b="0" i="0" dirty="0">
+                <a:solidFill>
+                  <a:srgbClr val="555960"/>
+                </a:solidFill>
+              </a:rPr>
+              <a:t>future state</a:t>
             </a:r>
           </a:p>
         </p:txBody>
@@ -20825,7 +21371,7 @@
         </p:spPr>
         <p:txBody>
           <a:bodyPr>
-            <a:normAutofit/>
+            <a:normAutofit fontScale="90000"/>
           </a:bodyPr>
           <a:lstStyle/>
           <a:p>
@@ -20875,8 +21421,8 @@
         </p:nvSpPr>
         <p:spPr>
           <a:xfrm>
-            <a:off x="274320" y="932688"/>
-            <a:ext cx="8595360" cy="868680"/>
+            <a:off x="274320" y="880000"/>
+            <a:ext cx="8595360" cy="800000"/>
           </a:xfrm>
           <a:prstGeom prst="rect">
             <a:avLst/>
@@ -20903,7 +21449,7 @@
                   <a:srgbClr val="5C4826"/>
                 </a:solidFill>
               </a:rPr>
-              <a:t>A good engineering decision is the decision </a:t>
+              <a:t xml:space="preserve">A good engineering decision is the decision </a:t>
             </a:r>
             <a:r>
               <a:rPr lang="en-US" sz="2000" b="1" i="0" dirty="0">
@@ -20911,7 +21457,20 @@
                   <a:srgbClr val="5C4826"/>
                 </a:solidFill>
               </a:rPr>
-              <a:t>best justified by the evidence available when it must be made.</a:t>
+              <a:t xml:space="preserve">best justified </a:t>
+            </a:r>
+          </a:p>
+          <a:p>
+            <a:pPr algn="ctr">
+              <a:buNone/>
+            </a:pPr>
+            <a:r>
+              <a:rPr lang="en-US" sz="2000" b="1" i="0" dirty="0">
+                <a:solidFill>
+                  <a:srgbClr val="5C4826"/>
+                </a:solidFill>
+              </a:rPr>
+              <a:t>by the evidence available when it must be made.</a:t>
             </a:r>
           </a:p>
         </p:txBody>
@@ -20924,8 +21483,8 @@
         </p:nvSpPr>
         <p:spPr>
           <a:xfrm>
-            <a:off x="274320" y="2029968"/>
-            <a:ext cx="8595360" cy="1051560"/>
+            <a:off x="274320" y="1860000"/>
+            <a:ext cx="8595360" cy="980000"/>
           </a:xfrm>
           <a:prstGeom prst="rect">
             <a:avLst/>
@@ -20981,7 +21540,7 @@
         </p:nvSpPr>
         <p:spPr>
           <a:xfrm>
-            <a:off x="393192" y="3310128"/>
+            <a:off x="393192" y="3060000"/>
             <a:ext cx="3108960" cy="512064"/>
           </a:xfrm>
           <a:prstGeom prst="roundRect">
@@ -21017,7 +21576,7 @@
                   <a:srgbClr val="9A9A9A"/>
                 </a:solidFill>
               </a:rPr>
-              <a:t>  ·  </a:t>
+              <a:t xml:space="preserve">  ·  </a:t>
             </a:r>
             <a:r>
               <a:rPr lang="en-US" sz="2000" b="1" i="0" dirty="0">
@@ -21033,7 +21592,7 @@
                   <a:srgbClr val="9A9A9A"/>
                 </a:solidFill>
               </a:rPr>
-              <a:t>  ·  </a:t>
+              <a:t xml:space="preserve">  ·  </a:t>
             </a:r>
             <a:r>
               <a:rPr lang="en-US" sz="2000" b="1" i="0" dirty="0">
@@ -21054,7 +21613,7 @@
         </p:nvSpPr>
         <p:spPr>
           <a:xfrm>
-            <a:off x="3685032" y="3310128"/>
+            <a:off x="3685032" y="3060000"/>
             <a:ext cx="4727448" cy="512064"/>
           </a:xfrm>
           <a:prstGeom prst="rect">
@@ -21091,8 +21650,8 @@
         </p:nvSpPr>
         <p:spPr>
           <a:xfrm>
-            <a:off x="274320" y="4114800"/>
-            <a:ext cx="8595360" cy="868680"/>
+            <a:off x="274320" y="3790000"/>
+            <a:ext cx="8595360" cy="740000"/>
           </a:xfrm>
           <a:prstGeom prst="rect">
             <a:avLst/>
@@ -21115,7 +21674,23 @@
                   <a:srgbClr val="000000"/>
                 </a:solidFill>
               </a:rPr>
-              <a:t>No — judge it by the justification available at the time.</a:t>
+              <a:t xml:space="preserve">No. </a:t>
+            </a:r>
+            <a:r>
+              <a:rPr lang="en-US" sz="2000" i="1" dirty="0">
+                <a:solidFill>
+                  <a:srgbClr val="000000"/>
+                </a:solidFill>
+              </a:rPr>
+              <a:t>J</a:t>
+            </a:r>
+            <a:r>
+              <a:rPr lang="en-US" sz="2000" b="0" i="1" dirty="0">
+                <a:solidFill>
+                  <a:srgbClr val="000000"/>
+                </a:solidFill>
+              </a:rPr>
+              <a:t>udge it by the justification available at the time.</a:t>
             </a:r>
           </a:p>
           <a:p>
@@ -21138,14 +21713,105 @@
       </p:sp>
       <p:sp>
         <p:nvSpPr>
+          <p:cNvPr id="106" name="RiskBadge"/>
+          <p:cNvSpPr/>
+          <p:nvPr/>
+        </p:nvSpPr>
+        <p:spPr>
+          <a:xfrm>
+            <a:off x="274320" y="4700000"/>
+            <a:ext cx="2560320" cy="640080"/>
+          </a:xfrm>
+          <a:prstGeom prst="roundRect">
+            <a:avLst/>
+          </a:prstGeom>
+          <a:solidFill>
+            <a:srgbClr val="FBF8F2"/>
+          </a:solidFill>
+          <a:ln w="15875">
+            <a:solidFill>
+              <a:srgbClr val="8E6F3E"/>
+            </a:solidFill>
+          </a:ln>
+        </p:spPr>
+        <p:txBody>
+          <a:bodyPr wrap="square" lIns="91440" tIns="45720" rIns="91440" bIns="45720" anchor="ctr"/>
+          <a:lstStyle/>
+          <a:p>
+            <a:pPr algn="ctr">
+              <a:buNone/>
+            </a:pPr>
+            <a:r>
+              <a:rPr lang="en-US" sz="2000" b="1" i="0" dirty="0">
+                <a:solidFill>
+                  <a:srgbClr val="8E6F3E"/>
+                </a:solidFill>
+              </a:rPr>
+              <a:t>RISK MANAGEMENT</a:t>
+            </a:r>
+          </a:p>
+        </p:txBody>
+      </p:sp>
+      <p:sp>
+        <p:nvSpPr>
+          <p:cNvPr id="107" name="RiskNote"/>
+          <p:cNvSpPr txBox="1"/>
+          <p:nvPr/>
+        </p:nvSpPr>
+        <p:spPr>
+          <a:xfrm>
+            <a:off x="2971800" y="4700000"/>
+            <a:ext cx="5897880" cy="640080"/>
+          </a:xfrm>
+          <a:prstGeom prst="rect">
+            <a:avLst/>
+          </a:prstGeom>
+          <a:noFill/>
+          <a:ln>
+            <a:noFill/>
+          </a:ln>
+        </p:spPr>
+        <p:txBody>
+          <a:bodyPr wrap="square" lIns="0" tIns="0" rIns="0" bIns="0" anchor="ctr"/>
+          <a:lstStyle/>
+          <a:p>
+            <a:pPr algn="l">
+              <a:buNone/>
+            </a:pPr>
+            <a:r>
+              <a:rPr lang="en-US" sz="2000" b="0" i="0" dirty="0">
+                <a:solidFill>
+                  <a:srgbClr val="5C4826"/>
+                </a:solidFill>
+              </a:rPr>
+              <a:t>Identify consequential uncertainty and decide</a:t>
+            </a:r>
+          </a:p>
+          <a:p>
+            <a:pPr algn="l">
+              <a:buNone/>
+            </a:pPr>
+            <a:r>
+              <a:rPr lang="en-US" sz="2000" b="0" i="0" dirty="0">
+                <a:solidFill>
+                  <a:srgbClr val="5C4826"/>
+                </a:solidFill>
+              </a:rPr>
+              <a:t>what risk can responsibly remain.</a:t>
+            </a:r>
+          </a:p>
+        </p:txBody>
+      </p:sp>
+      <p:sp>
+        <p:nvSpPr>
           <p:cNvPr id="105" name="FooterBand"/>
           <p:cNvSpPr/>
           <p:nvPr/>
         </p:nvSpPr>
         <p:spPr>
           <a:xfrm>
-            <a:off x="274320" y="5852160"/>
-            <a:ext cx="8595360" cy="566928"/>
+            <a:off x="274320" y="5687568"/>
+            <a:ext cx="8595360" cy="768096"/>
           </a:xfrm>
           <a:prstGeom prst="rect">
             <a:avLst/>
@@ -21170,7 +21836,20 @@
                   <a:srgbClr val="FFFFFF"/>
                 </a:solidFill>
               </a:rPr>
-              <a:t>Learn from outcomes; judge decisions by their justification.</a:t>
+              <a:t>Learn from outcomes; judge decisions by their justification</a:t>
+            </a:r>
+          </a:p>
+          <a:p>
+            <a:pPr algn="ctr">
+              <a:buNone/>
+            </a:pPr>
+            <a:r>
+              <a:rPr lang="en-US" sz="2000" b="1" i="0" dirty="0">
+                <a:solidFill>
+                  <a:srgbClr val="FFFFFF"/>
+                </a:solidFill>
+              </a:rPr>
+              <a:t>and treatment of uncertainty.</a:t>
             </a:r>
           </a:p>
         </p:txBody>
@@ -21305,6 +21984,76 @@
                                   </p:childTnLst>
                                 </p:cTn>
                               </p:par>
+                              <p:par>
+                                <p:cTn id="14" presetID="10" presetClass="entr" presetSubtype="0" fill="hold" nodeType="withEffect">
+                                  <p:stCondLst>
+                                    <p:cond delay="0"/>
+                                  </p:stCondLst>
+                                  <p:childTnLst>
+                                    <p:set>
+                                      <p:cBhvr>
+                                        <p:cTn id="15" dur="1" fill="hold">
+                                          <p:stCondLst>
+                                            <p:cond delay="0"/>
+                                          </p:stCondLst>
+                                        </p:cTn>
+                                        <p:tgtEl>
+                                          <p:spTgt spid="106"/>
+                                        </p:tgtEl>
+                                        <p:attrNameLst>
+                                          <p:attrName>style.visibility</p:attrName>
+                                        </p:attrNameLst>
+                                      </p:cBhvr>
+                                      <p:to>
+                                        <p:strVal val="visible"/>
+                                      </p:to>
+                                    </p:set>
+                                    <p:animEffect transition="in" filter="fade">
+                                      <p:cBhvr>
+                                        <p:cTn id="16" dur="500"/>
+                                        <p:tgtEl>
+                                          <p:spTgt spid="106"/>
+                                        </p:tgtEl>
+                                      </p:cBhvr>
+                                    </p:animEffect>
+                                  </p:childTnLst>
+                                </p:cTn>
+                              </p:par>
+                              <p:par>
+                                <p:cTn id="17" presetID="10" presetClass="entr" presetSubtype="0" fill="hold" nodeType="withEffect">
+                                  <p:stCondLst>
+                                    <p:cond delay="0"/>
+                                  </p:stCondLst>
+                                  <p:childTnLst>
+                                    <p:set>
+                                      <p:cBhvr>
+                                        <p:cTn id="18" dur="1" fill="hold">
+                                          <p:stCondLst>
+                                            <p:cond delay="0"/>
+                                          </p:stCondLst>
+                                        </p:cTn>
+                                        <p:tgtEl>
+                                          <p:spTgt spid="107"/>
+                                        </p:tgtEl>
+                                        <p:attrNameLst>
+                                          <p:attrName>style.visibility</p:attrName>
+                                        </p:attrNameLst>
+                                      </p:cBhvr>
+                                      <p:to>
+                                        <p:strVal val="visible"/>
+                                      </p:to>
+                                    </p:set>
+                                    <p:animEffect transition="in" filter="fade">
+                                      <p:cBhvr>
+                                        <p:cTn id="19" dur="500"/>
+                                        <p:tgtEl>
+                                          <p:spTgt spid="107"/>
+                                        </p:tgtEl>
+                                      </p:cBhvr>
+                                    </p:animEffect>
+                                  </p:childTnLst>
+                                </p:cTn>
+                              </p:par>
                             </p:childTnLst>
                           </p:cTn>
                         </p:par>
@@ -21522,7 +22271,7 @@
         </p:spPr>
         <p:txBody>
           <a:bodyPr>
-            <a:normAutofit/>
+            <a:normAutofit fontScale="90000"/>
           </a:bodyPr>
           <a:lstStyle/>
           <a:p>
@@ -21882,41 +22631,70 @@
                   <a:srgbClr val="5C4826"/>
                 </a:solidFill>
               </a:rPr>
-              <a:t>A model identifies relationships we believe matter — before their consequences can be fully observed.</a:t>
-            </a:r>
-          </a:p>
-        </p:txBody>
-      </p:sp>
-      <p:sp>
-        <p:nvSpPr>
-          <p:cNvPr id="107" name="Ital"/>
-          <p:cNvSpPr txBox="1"/>
-          <p:nvPr/>
-        </p:nvSpPr>
-        <p:spPr>
-          <a:xfrm>
-            <a:off x="274320" y="4900000"/>
-            <a:ext cx="8595360" cy="411480"/>
+              <a:t xml:space="preserve">A model identifies relationships we believe matter, </a:t>
+            </a:r>
+          </a:p>
+          <a:p>
+            <a:pPr algn="ctr">
+              <a:buNone/>
+            </a:pPr>
+            <a:r>
+              <a:rPr lang="en-US" sz="2000" b="0" i="1" dirty="0">
+                <a:solidFill>
+                  <a:srgbClr val="5C4826"/>
+                </a:solidFill>
+              </a:rPr>
+              <a:t>before</a:t>
+            </a:r>
+            <a:r>
+              <a:rPr lang="en-US" sz="2000" b="0" i="0" dirty="0">
+                <a:solidFill>
+                  <a:srgbClr val="5C4826"/>
+                </a:solidFill>
+              </a:rPr>
+              <a:t xml:space="preserve"> their consequences can be fully observed.</a:t>
+            </a:r>
+          </a:p>
+        </p:txBody>
+      </p:sp>
+      <p:sp>
+        <p:nvSpPr>
+          <p:cNvPr id="4" name="FooterBand">
+            <a:extLst>
+              <a:ext uri="{FF2B5EF4-FFF2-40B4-BE49-F238E27FC236}">
+                <a16:creationId xmlns:a16="http://schemas.microsoft.com/office/drawing/2014/main" id="{16B68A1E-77D9-B3CF-C4E9-6B4ED3EA2F00}"/>
+              </a:ext>
+            </a:extLst>
+          </p:cNvPr>
+          <p:cNvSpPr/>
+          <p:nvPr/>
+        </p:nvSpPr>
+        <p:spPr>
+          <a:xfrm>
+            <a:off x="274320" y="5852160"/>
+            <a:ext cx="8595360" cy="566928"/>
           </a:xfrm>
           <a:prstGeom prst="rect">
             <a:avLst/>
           </a:prstGeom>
-          <a:noFill/>
+          <a:solidFill>
+            <a:srgbClr val="8E6F3E"/>
+          </a:solidFill>
           <a:ln>
             <a:noFill/>
           </a:ln>
         </p:spPr>
         <p:txBody>
-          <a:bodyPr wrap="square" lIns="0" tIns="0" rIns="0" bIns="0" anchor="t"/>
+          <a:bodyPr wrap="square" lIns="91440" tIns="45720" rIns="91440" bIns="45720" anchor="ctr"/>
           <a:lstStyle/>
           <a:p>
             <a:pPr algn="ctr">
               <a:buNone/>
             </a:pPr>
             <a:r>
-              <a:rPr lang="en-US" sz="2000" b="0" i="1" dirty="0">
-                <a:solidFill>
-                  <a:srgbClr val="000000"/>
+              <a:rPr lang="en-US" sz="2000" b="1" i="0" dirty="0">
+                <a:solidFill>
+                  <a:srgbClr val="FFFFFF"/>
                 </a:solidFill>
               </a:rPr>
               <a:t>The model does not make the decision.</a:t>
@@ -21929,6 +22707,92 @@
   <p:clrMapOvr>
     <a:masterClrMapping/>
   </p:clrMapOvr>
+  <p:timing>
+    <p:tnLst>
+      <p:par>
+        <p:cTn id="1" dur="indefinite" restart="never" nodeType="tmRoot">
+          <p:childTnLst>
+            <p:seq concurrent="1" nextAc="seek">
+              <p:cTn id="2" dur="indefinite" nodeType="mainSeq">
+                <p:childTnLst>
+                  <p:par>
+                    <p:cTn id="3" fill="hold">
+                      <p:stCondLst>
+                        <p:cond delay="indefinite"/>
+                        <p:cond evt="onBegin" delay="0">
+                          <p:tn val="2"/>
+                        </p:cond>
+                      </p:stCondLst>
+                      <p:childTnLst>
+                        <p:par>
+                          <p:cTn id="4" fill="hold">
+                            <p:stCondLst>
+                              <p:cond delay="0"/>
+                            </p:stCondLst>
+                            <p:childTnLst>
+                              <p:par>
+                                <p:cTn id="5" presetID="10" presetClass="entr" presetSubtype="0" fill="hold" nodeType="withEffect">
+                                  <p:stCondLst>
+                                    <p:cond delay="0"/>
+                                  </p:stCondLst>
+                                  <p:childTnLst>
+                                    <p:set>
+                                      <p:cBhvr>
+                                        <p:cTn id="6" dur="1" fill="hold">
+                                          <p:stCondLst>
+                                            <p:cond delay="0"/>
+                                          </p:stCondLst>
+                                        </p:cTn>
+                                        <p:tgtEl>
+                                          <p:spTgt spid="4"/>
+                                        </p:tgtEl>
+                                        <p:attrNameLst>
+                                          <p:attrName>style.visibility</p:attrName>
+                                        </p:attrNameLst>
+                                      </p:cBhvr>
+                                      <p:to>
+                                        <p:strVal val="visible"/>
+                                      </p:to>
+                                    </p:set>
+                                    <p:animEffect transition="in" filter="fade">
+                                      <p:cBhvr>
+                                        <p:cTn id="7" dur="500"/>
+                                        <p:tgtEl>
+                                          <p:spTgt spid="4"/>
+                                        </p:tgtEl>
+                                      </p:cBhvr>
+                                    </p:animEffect>
+                                  </p:childTnLst>
+                                </p:cTn>
+                              </p:par>
+                            </p:childTnLst>
+                          </p:cTn>
+                        </p:par>
+                      </p:childTnLst>
+                    </p:cTn>
+                  </p:par>
+                </p:childTnLst>
+              </p:cTn>
+              <p:prevCondLst>
+                <p:cond evt="onPrev" delay="0">
+                  <p:tgtEl>
+                    <p:sldTgt/>
+                  </p:tgtEl>
+                </p:cond>
+              </p:prevCondLst>
+              <p:nextCondLst>
+                <p:cond evt="onNext" delay="0">
+                  <p:tgtEl>
+                    <p:sldTgt/>
+                  </p:tgtEl>
+                </p:cond>
+              </p:nextCondLst>
+            </p:seq>
+          </p:childTnLst>
+        </p:cTn>
+      </p:par>
+    </p:tnLst>
+  </p:timing>
 </p:sld>
 </file>
 
@@ -21967,7 +22831,7 @@
         </p:spPr>
         <p:txBody>
           <a:bodyPr>
-            <a:normAutofit/>
+            <a:normAutofit fontScale="90000"/>
           </a:bodyPr>
           <a:lstStyle/>
           <a:p>
@@ -22686,18 +23550,31 @@
           <a:p>
             <a:pPr algn="l"/>
             <a:r>
-              <a:rPr sz="2000" b="0" i="0">
+              <a:rPr sz="2000" b="0" i="0" dirty="0">
                 <a:solidFill>
                   <a:srgbClr val="555960"/>
                 </a:solidFill>
               </a:rPr>
-              <a:t>follows from judgment —</a:t>
-            </a:r>
+              <a:t>follows from judgment</a:t>
+            </a:r>
+            <a:r>
+              <a:rPr lang="en-US" sz="2000" b="0" i="0" dirty="0">
+                <a:solidFill>
+                  <a:srgbClr val="555960"/>
+                </a:solidFill>
+              </a:rPr>
+              <a:t>,</a:t>
+            </a:r>
+            <a:endParaRPr sz="2000" b="0" i="0" dirty="0">
+              <a:solidFill>
+                <a:srgbClr val="555960"/>
+              </a:solidFill>
+            </a:endParaRPr>
           </a:p>
           <a:p>
             <a:pPr algn="l"/>
             <a:r>
-              <a:rPr sz="2000" b="0" i="0">
+              <a:rPr sz="2000" b="0" i="0" dirty="0">
                 <a:solidFill>
                   <a:srgbClr val="555960"/>
                 </a:solidFill>
@@ -23520,7 +24397,7 @@
         </p:spPr>
         <p:txBody>
           <a:bodyPr>
-            <a:normAutofit/>
+            <a:normAutofit fontScale="90000"/>
           </a:bodyPr>
           <a:lstStyle/>
           <a:p>
@@ -24212,12 +25089,20 @@
               <a:buNone/>
             </a:pPr>
             <a:r>
+              <a:rPr lang="en-US" sz="2000" dirty="0">
+                <a:solidFill>
+                  <a:srgbClr val="5C4826"/>
+                </a:solidFill>
+              </a:rPr>
+              <a:t>O</a:t>
+            </a:r>
+            <a:r>
               <a:rPr lang="en-US" sz="2000" b="0" i="0" dirty="0">
                 <a:solidFill>
                   <a:srgbClr val="5C4826"/>
                 </a:solidFill>
               </a:rPr>
-              <a:t>Operational observation</a:t>
+              <a:t>bservation</a:t>
             </a:r>
           </a:p>
         </p:txBody>
@@ -24272,15 +25157,7 @@
                   <a:srgbClr val="8E6F3E"/>
                 </a:solidFill>
               </a:rPr>
-              <a:t>MEASUREMENT CAN OCCUR</a:t>
-            </a:r>
-            <a:r>
-              <a:rPr lang="en-US" sz="2000" b="1" i="0" dirty="0">
-                <a:solidFill>
-                  <a:srgbClr val="8E6F3E"/>
-                </a:solidFill>
-              </a:rPr>
-              <a:t> WITHIN ANY OF THESE</a:t>
+              <a:t>MEASUREMENT CAN OCCUR WITHIN ANY OF THESE</a:t>
             </a:r>
           </a:p>
         </p:txBody>
@@ -24299,26 +25176,26 @@
               <p:cTn id="2" dur="indefinite" nodeType="mainSeq">
                 <p:childTnLst>
                   <p:par>
-                    <p:cTn id="42" fill="hold">
+                    <p:cTn id="3" fill="hold">
                       <p:stCondLst>
                         <p:cond delay="indefinite"/>
                       </p:stCondLst>
                       <p:childTnLst>
                         <p:par>
-                          <p:cTn id="43" fill="hold">
+                          <p:cTn id="4" fill="hold">
                             <p:stCondLst>
                               <p:cond delay="0"/>
                             </p:stCondLst>
                             <p:childTnLst>
                               <p:par>
-                                <p:cTn id="3" presetID="10" presetClass="entr" presetSubtype="0" fill="hold" nodeType="clickEffect">
+                                <p:cTn id="5" presetID="10" presetClass="entr" presetSubtype="0" fill="hold" nodeType="clickEffect">
                                   <p:stCondLst>
                                     <p:cond delay="0"/>
                                   </p:stCondLst>
                                   <p:childTnLst>
                                     <p:set>
                                       <p:cBhvr>
-                                        <p:cTn id="4" dur="1" fill="hold">
+                                        <p:cTn id="6" dur="1" fill="hold">
                                           <p:stCondLst>
                                             <p:cond delay="0"/>
                                           </p:stCondLst>
@@ -24336,7 +25213,7 @@
                                     </p:set>
                                     <p:animEffect transition="in" filter="fade">
                                       <p:cBhvr>
-                                        <p:cTn id="5" dur="500"/>
+                                        <p:cTn id="7" dur="500"/>
                                         <p:tgtEl>
                                           <p:spTgt spid="20"/>
                                         </p:tgtEl>
@@ -24346,14 +25223,14 @@
                                 </p:cTn>
                               </p:par>
                               <p:par>
-                                <p:cTn id="6" presetID="10" presetClass="entr" presetSubtype="0" fill="hold" nodeType="withEffect">
+                                <p:cTn id="8" presetID="10" presetClass="entr" presetSubtype="0" fill="hold" nodeType="withEffect">
                                   <p:stCondLst>
                                     <p:cond delay="0"/>
                                   </p:stCondLst>
                                   <p:childTnLst>
                                     <p:set>
                                       <p:cBhvr>
-                                        <p:cTn id="7" dur="1" fill="hold">
+                                        <p:cTn id="9" dur="1" fill="hold">
                                           <p:stCondLst>
                                             <p:cond delay="0"/>
                                           </p:stCondLst>
@@ -24371,7 +25248,7 @@
                                     </p:set>
                                     <p:animEffect transition="in" filter="fade">
                                       <p:cBhvr>
-                                        <p:cTn id="8" dur="500"/>
+                                        <p:cTn id="10" dur="500"/>
                                         <p:tgtEl>
                                           <p:spTgt spid="22"/>
                                         </p:tgtEl>
@@ -24381,14 +25258,14 @@
                                 </p:cTn>
                               </p:par>
                               <p:par>
-                                <p:cTn id="9" presetID="10" presetClass="entr" presetSubtype="0" fill="hold" nodeType="withEffect">
+                                <p:cTn id="11" presetID="10" presetClass="entr" presetSubtype="0" fill="hold" nodeType="withEffect">
                                   <p:stCondLst>
                                     <p:cond delay="0"/>
                                   </p:stCondLst>
                                   <p:childTnLst>
                                     <p:set>
                                       <p:cBhvr>
-                                        <p:cTn id="10" dur="1" fill="hold">
+                                        <p:cTn id="12" dur="1" fill="hold">
                                           <p:stCondLst>
                                             <p:cond delay="0"/>
                                           </p:stCondLst>
@@ -24406,7 +25283,7 @@
                                     </p:set>
                                     <p:animEffect transition="in" filter="fade">
                                       <p:cBhvr>
-                                        <p:cTn id="11" dur="500"/>
+                                        <p:cTn id="13" dur="500"/>
                                         <p:tgtEl>
                                           <p:spTgt spid="21"/>
                                         </p:tgtEl>
@@ -24416,14 +25293,14 @@
                                 </p:cTn>
                               </p:par>
                               <p:par>
-                                <p:cTn id="12" presetID="10" presetClass="entr" presetSubtype="0" fill="hold" nodeType="withEffect">
+                                <p:cTn id="14" presetID="10" presetClass="entr" presetSubtype="0" fill="hold" nodeType="withEffect">
                                   <p:stCondLst>
                                     <p:cond delay="0"/>
                                   </p:stCondLst>
                                   <p:childTnLst>
                                     <p:set>
                                       <p:cBhvr>
-                                        <p:cTn id="13" dur="1" fill="hold">
+                                        <p:cTn id="15" dur="1" fill="hold">
                                           <p:stCondLst>
                                             <p:cond delay="0"/>
                                           </p:stCondLst>
@@ -24441,7 +25318,7 @@
                                     </p:set>
                                     <p:animEffect transition="in" filter="fade">
                                       <p:cBhvr>
-                                        <p:cTn id="14" dur="500"/>
+                                        <p:cTn id="16" dur="500"/>
                                         <p:tgtEl>
                                           <p:spTgt spid="24"/>
                                         </p:tgtEl>
@@ -24451,14 +25328,14 @@
                                 </p:cTn>
                               </p:par>
                               <p:par>
-                                <p:cTn id="15" presetID="10" presetClass="entr" presetSubtype="0" fill="hold" nodeType="withEffect">
+                                <p:cTn id="17" presetID="10" presetClass="entr" presetSubtype="0" fill="hold" nodeType="withEffect">
                                   <p:stCondLst>
                                     <p:cond delay="0"/>
                                   </p:stCondLst>
                                   <p:childTnLst>
                                     <p:set>
                                       <p:cBhvr>
-                                        <p:cTn id="16" dur="1" fill="hold">
+                                        <p:cTn id="18" dur="1" fill="hold">
                                           <p:stCondLst>
                                             <p:cond delay="0"/>
                                           </p:stCondLst>
@@ -24476,7 +25353,7 @@
                                     </p:set>
                                     <p:animEffect transition="in" filter="fade">
                                       <p:cBhvr>
-                                        <p:cTn id="17" dur="500"/>
+                                        <p:cTn id="19" dur="500"/>
                                         <p:tgtEl>
                                           <p:spTgt spid="23"/>
                                         </p:tgtEl>
@@ -24486,14 +25363,14 @@
                                 </p:cTn>
                               </p:par>
                               <p:par>
-                                <p:cTn id="18" presetID="10" presetClass="entr" presetSubtype="0" fill="hold" nodeType="withEffect">
+                                <p:cTn id="20" presetID="10" presetClass="entr" presetSubtype="0" fill="hold" nodeType="withEffect">
                                   <p:stCondLst>
                                     <p:cond delay="0"/>
                                   </p:stCondLst>
                                   <p:childTnLst>
                                     <p:set>
                                       <p:cBhvr>
-                                        <p:cTn id="19" dur="1" fill="hold">
+                                        <p:cTn id="21" dur="1" fill="hold">
                                           <p:stCondLst>
                                             <p:cond delay="0"/>
                                           </p:stCondLst>
@@ -24511,7 +25388,7 @@
                                     </p:set>
                                     <p:animEffect transition="in" filter="fade">
                                       <p:cBhvr>
-                                        <p:cTn id="20" dur="500"/>
+                                        <p:cTn id="22" dur="500"/>
                                         <p:tgtEl>
                                           <p:spTgt spid="26"/>
                                         </p:tgtEl>
@@ -24521,14 +25398,14 @@
                                 </p:cTn>
                               </p:par>
                               <p:par>
-                                <p:cTn id="21" presetID="10" presetClass="entr" presetSubtype="0" fill="hold" nodeType="withEffect">
+                                <p:cTn id="23" presetID="10" presetClass="entr" presetSubtype="0" fill="hold" nodeType="withEffect">
                                   <p:stCondLst>
                                     <p:cond delay="0"/>
                                   </p:stCondLst>
                                   <p:childTnLst>
                                     <p:set>
                                       <p:cBhvr>
-                                        <p:cTn id="22" dur="1" fill="hold">
+                                        <p:cTn id="24" dur="1" fill="hold">
                                           <p:stCondLst>
                                             <p:cond delay="0"/>
                                           </p:stCondLst>
@@ -24546,7 +25423,7 @@
                                     </p:set>
                                     <p:animEffect transition="in" filter="fade">
                                       <p:cBhvr>
-                                        <p:cTn id="23" dur="500"/>
+                                        <p:cTn id="25" dur="500"/>
                                         <p:tgtEl>
                                           <p:spTgt spid="25"/>
                                         </p:tgtEl>
@@ -24556,14 +25433,14 @@
                                 </p:cTn>
                               </p:par>
                               <p:par>
-                                <p:cTn id="24" presetID="10" presetClass="entr" presetSubtype="0" fill="hold" nodeType="withEffect">
+                                <p:cTn id="26" presetID="10" presetClass="entr" presetSubtype="0" fill="hold" nodeType="withEffect">
                                   <p:stCondLst>
                                     <p:cond delay="0"/>
                                   </p:stCondLst>
                                   <p:childTnLst>
                                     <p:set>
                                       <p:cBhvr>
-                                        <p:cTn id="25" dur="1" fill="hold">
+                                        <p:cTn id="27" dur="1" fill="hold">
                                           <p:stCondLst>
                                             <p:cond delay="0"/>
                                           </p:stCondLst>
@@ -24581,7 +25458,7 @@
                                     </p:set>
                                     <p:animEffect transition="in" filter="fade">
                                       <p:cBhvr>
-                                        <p:cTn id="26" dur="500"/>
+                                        <p:cTn id="28" dur="500"/>
                                         <p:tgtEl>
                                           <p:spTgt spid="28"/>
                                         </p:tgtEl>
@@ -24591,14 +25468,14 @@
                                 </p:cTn>
                               </p:par>
                               <p:par>
-                                <p:cTn id="27" presetID="10" presetClass="entr" presetSubtype="0" fill="hold" nodeType="withEffect">
+                                <p:cTn id="29" presetID="10" presetClass="entr" presetSubtype="0" fill="hold" nodeType="withEffect">
                                   <p:stCondLst>
                                     <p:cond delay="0"/>
                                   </p:stCondLst>
                                   <p:childTnLst>
                                     <p:set>
                                       <p:cBhvr>
-                                        <p:cTn id="28" dur="1" fill="hold">
+                                        <p:cTn id="30" dur="1" fill="hold">
                                           <p:stCondLst>
                                             <p:cond delay="0"/>
                                           </p:stCondLst>
@@ -24616,7 +25493,7 @@
                                     </p:set>
                                     <p:animEffect transition="in" filter="fade">
                                       <p:cBhvr>
-                                        <p:cTn id="29" dur="500"/>
+                                        <p:cTn id="31" dur="500"/>
                                         <p:tgtEl>
                                           <p:spTgt spid="27"/>
                                         </p:tgtEl>
@@ -24626,14 +25503,14 @@
                                 </p:cTn>
                               </p:par>
                               <p:par>
-                                <p:cTn id="30" presetID="10" presetClass="entr" presetSubtype="0" fill="hold" nodeType="withEffect">
+                                <p:cTn id="32" presetID="10" presetClass="entr" presetSubtype="0" fill="hold" nodeType="withEffect">
                                   <p:stCondLst>
                                     <p:cond delay="0"/>
                                   </p:stCondLst>
                                   <p:childTnLst>
                                     <p:set>
                                       <p:cBhvr>
-                                        <p:cTn id="31" dur="1" fill="hold">
+                                        <p:cTn id="33" dur="1" fill="hold">
                                           <p:stCondLst>
                                             <p:cond delay="0"/>
                                           </p:stCondLst>
@@ -24651,7 +25528,7 @@
                                     </p:set>
                                     <p:animEffect transition="in" filter="fade">
                                       <p:cBhvr>
-                                        <p:cTn id="32" dur="500"/>
+                                        <p:cTn id="34" dur="500"/>
                                         <p:tgtEl>
                                           <p:spTgt spid="30"/>
                                         </p:tgtEl>
@@ -24661,14 +25538,14 @@
                                 </p:cTn>
                               </p:par>
                               <p:par>
-                                <p:cTn id="33" presetID="10" presetClass="entr" presetSubtype="0" fill="hold" nodeType="withEffect">
+                                <p:cTn id="35" presetID="10" presetClass="entr" presetSubtype="0" fill="hold" nodeType="withEffect">
                                   <p:stCondLst>
                                     <p:cond delay="0"/>
                                   </p:stCondLst>
                                   <p:childTnLst>
                                     <p:set>
                                       <p:cBhvr>
-                                        <p:cTn id="34" dur="1" fill="hold">
+                                        <p:cTn id="36" dur="1" fill="hold">
                                           <p:stCondLst>
                                             <p:cond delay="0"/>
                                           </p:stCondLst>
@@ -24686,7 +25563,7 @@
                                     </p:set>
                                     <p:animEffect transition="in" filter="fade">
                                       <p:cBhvr>
-                                        <p:cTn id="35" dur="500"/>
+                                        <p:cTn id="37" dur="500"/>
                                         <p:tgtEl>
                                           <p:spTgt spid="29"/>
                                         </p:tgtEl>
@@ -24696,14 +25573,14 @@
                                 </p:cTn>
                               </p:par>
                               <p:par>
-                                <p:cTn id="36" presetID="10" presetClass="entr" presetSubtype="0" fill="hold" nodeType="withEffect">
+                                <p:cTn id="38" presetID="10" presetClass="entr" presetSubtype="0" fill="hold" nodeType="withEffect">
                                   <p:stCondLst>
                                     <p:cond delay="0"/>
                                   </p:stCondLst>
                                   <p:childTnLst>
                                     <p:set>
                                       <p:cBhvr>
-                                        <p:cTn id="37" dur="1" fill="hold">
+                                        <p:cTn id="39" dur="1" fill="hold">
                                           <p:stCondLst>
                                             <p:cond delay="0"/>
                                           </p:stCondLst>
@@ -24721,7 +25598,7 @@
                                     </p:set>
                                     <p:animEffect transition="in" filter="fade">
                                       <p:cBhvr>
-                                        <p:cTn id="38" dur="500"/>
+                                        <p:cTn id="40" dur="500"/>
                                         <p:tgtEl>
                                           <p:spTgt spid="32"/>
                                         </p:tgtEl>
@@ -24731,14 +25608,14 @@
                                 </p:cTn>
                               </p:par>
                               <p:par>
-                                <p:cTn id="39" presetID="10" presetClass="entr" presetSubtype="0" fill="hold" nodeType="withEffect">
+                                <p:cTn id="41" presetID="10" presetClass="entr" presetSubtype="0" fill="hold" nodeType="withEffect">
                                   <p:stCondLst>
                                     <p:cond delay="0"/>
                                   </p:stCondLst>
                                   <p:childTnLst>
                                     <p:set>
                                       <p:cBhvr>
-                                        <p:cTn id="40" dur="1" fill="hold">
+                                        <p:cTn id="42" dur="1" fill="hold">
                                           <p:stCondLst>
                                             <p:cond delay="0"/>
                                           </p:stCondLst>
@@ -24756,7 +25633,7 @@
                                     </p:set>
                                     <p:animEffect transition="in" filter="fade">
                                       <p:cBhvr>
-                                        <p:cTn id="41" dur="500"/>
+                                        <p:cTn id="43" dur="500"/>
                                         <p:tgtEl>
                                           <p:spTgt spid="31"/>
                                         </p:tgtEl>
@@ -24772,26 +25649,26 @@
                     </p:cTn>
                   </p:par>
                   <p:par>
-                    <p:cTn id="47" fill="hold">
+                    <p:cTn id="44" fill="hold">
                       <p:stCondLst>
                         <p:cond delay="indefinite"/>
                       </p:stCondLst>
                       <p:childTnLst>
                         <p:par>
-                          <p:cTn id="48" fill="hold">
+                          <p:cTn id="45" fill="hold">
                             <p:stCondLst>
                               <p:cond delay="0"/>
                             </p:stCondLst>
                             <p:childTnLst>
                               <p:par>
-                                <p:cTn id="44" presetID="10" presetClass="entr" presetSubtype="0" fill="hold" nodeType="clickEffect">
+                                <p:cTn id="46" presetID="10" presetClass="entr" presetSubtype="0" fill="hold" nodeType="clickEffect">
                                   <p:stCondLst>
                                     <p:cond delay="0"/>
                                   </p:stCondLst>
                                   <p:childTnLst>
                                     <p:set>
                                       <p:cBhvr>
-                                        <p:cTn id="45" dur="1" fill="hold">
+                                        <p:cTn id="47" dur="1" fill="hold">
                                           <p:stCondLst>
                                             <p:cond delay="0"/>
                                           </p:stCondLst>
@@ -24809,7 +25686,7 @@
                                     </p:set>
                                     <p:animEffect transition="in" filter="fade">
                                       <p:cBhvr>
-                                        <p:cTn id="46" dur="500"/>
+                                        <p:cTn id="48" dur="500"/>
                                         <p:tgtEl>
                                           <p:spTgt spid="35"/>
                                         </p:tgtEl>
@@ -24825,26 +25702,26 @@
                     </p:cTn>
                   </p:par>
                   <p:par>
-                    <p:cTn id="52" fill="hold">
+                    <p:cTn id="49" fill="hold">
                       <p:stCondLst>
                         <p:cond delay="indefinite"/>
                       </p:stCondLst>
                       <p:childTnLst>
                         <p:par>
-                          <p:cTn id="53" fill="hold">
+                          <p:cTn id="50" fill="hold">
                             <p:stCondLst>
                               <p:cond delay="0"/>
                             </p:stCondLst>
                             <p:childTnLst>
                               <p:par>
-                                <p:cTn id="49" presetID="10" presetClass="entr" presetSubtype="0" fill="hold" nodeType="clickEffect">
+                                <p:cTn id="51" presetID="10" presetClass="entr" presetSubtype="0" fill="hold" nodeType="clickEffect">
                                   <p:stCondLst>
                                     <p:cond delay="0"/>
                                   </p:stCondLst>
                                   <p:childTnLst>
                                     <p:set>
                                       <p:cBhvr>
-                                        <p:cTn id="50" dur="1" fill="hold">
+                                        <p:cTn id="52" dur="1" fill="hold">
                                           <p:stCondLst>
                                             <p:cond delay="0"/>
                                           </p:stCondLst>
@@ -24862,7 +25739,7 @@
                                     </p:set>
                                     <p:animEffect transition="in" filter="fade">
                                       <p:cBhvr>
-                                        <p:cTn id="51" dur="500"/>
+                                        <p:cTn id="53" dur="500"/>
                                         <p:tgtEl>
                                           <p:spTgt spid="19"/>
                                         </p:tgtEl>
@@ -24937,7 +25814,7 @@
         </p:spPr>
         <p:txBody>
           <a:bodyPr>
-            <a:normAutofit/>
+            <a:normAutofit fontScale="90000"/>
           </a:bodyPr>
           <a:lstStyle/>
           <a:p>
@@ -25028,7 +25905,7 @@
                   <a:srgbClr val="8E6F3E"/>
                 </a:solidFill>
               </a:rPr>
-              <a:t>DECISION      </a:t>
+              <a:t xml:space="preserve">DECISION      </a:t>
             </a:r>
             <a:r>
               <a:rPr sz="2000" b="0" i="0">
@@ -25256,7 +26133,7 @@
                   <a:srgbClr val="8E6F3E"/>
                 </a:solidFill>
               </a:rPr>
-              <a:t>KNOWN      </a:t>
+              <a:t xml:space="preserve">KNOWN      </a:t>
             </a:r>
             <a:r>
               <a:rPr sz="2000" b="0" i="0">
@@ -25298,7 +26175,7 @@
                   <a:srgbClr val="8E6F3E"/>
                 </a:solidFill>
               </a:rPr>
-              <a:t>UNCERTAIN      </a:t>
+              <a:t xml:space="preserve">UNCERTAIN      </a:t>
             </a:r>
             <a:r>
               <a:rPr sz="2000" b="0" i="0">
@@ -25355,12 +26232,12 @@
           <a:p>
             <a:pPr algn="ctr"/>
             <a:r>
-              <a:rPr sz="2000" b="1" i="0">
+              <a:rPr sz="2000" b="1" i="0" dirty="0">
                 <a:solidFill>
                   <a:srgbClr val="5C4826"/>
                 </a:solidFill>
               </a:rPr>
-              <a:t>What evidence would actually change the choice?</a:t>
+              <a:t>What evidence would change the choice?</a:t>
             </a:r>
           </a:p>
         </p:txBody>

--- a/course/lectures/act-1-foundations/09-engineering-decision-making-and-metrics/1-9-Engineering-Decision-Making-and-Metrics.pptx
+++ b/course/lectures/act-1-foundations/09-engineering-decision-making-and-metrics/1-9-Engineering-Decision-Making-and-Metrics.pptx
@@ -17,6 +17,7 @@
     <p:sldId id="708" r:id="rId8"/>
     <p:sldId id="709" r:id="rId9"/>
     <p:sldId id="710" r:id="rId10"/>
+    <p:sldId id="731" r:id="rId36"/>
     <p:sldId id="711" r:id="rId11"/>
     <p:sldId id="712" r:id="rId12"/>
     <p:sldId id="713" r:id="rId13"/>
@@ -25,6 +26,8 @@
     <p:sldId id="716" r:id="rId16"/>
     <p:sldId id="717" r:id="rId17"/>
     <p:sldId id="718" r:id="rId18"/>
+    <p:sldId id="732" r:id="rId37"/>
+    <p:sldId id="733" r:id="rId38"/>
     <p:sldId id="719" r:id="rId19"/>
     <p:sldId id="720" r:id="rId20"/>
     <p:sldId id="721" r:id="rId21"/>
@@ -989,7 +992,7 @@
           <a:p>
             <a:r>
               <a:rPr dirty="0"/>
-              <a:t>2.5 minutes — The scope principle, deliberately drawn like Validation's composition slide.</a:t>
+              <a:t>2.5 minutes — The scope principle, on a real industrial property, deliberately drawn like Validation's composition slide.</a:t>
             </a:r>
           </a:p>
           <a:p>
@@ -1007,7 +1010,7 @@
           <a:p>
             <a:r>
               <a:rPr dirty="0"/>
-              <a:t>Same reasoning as the latency-budget arithmetic: 90 + 80 + 140 + 110 ms of component processing plus 100 ms of communication along the path compose to 520 ms — past a 500 ms end-to-end budget — while every local number looks acceptable.</a:t>
+              <a:t>The property is stick-to-glass latency: the interval from the pilot moving a control until the HUD changes. Same reasoning as the latency-budget arithmetic: 90 + 80 + 140 + 110 ms across sensing, computation, communication, and rendering, plus 100 ms of queueing and scheduling along the path, compose to 520 ms — past a 500 ms end-to-end budget — while every local number looks acceptable.</a:t>
             </a:r>
           </a:p>
           <a:p>
@@ -1016,7 +1019,7 @@
           <a:p>
             <a:r>
               <a:rPr dirty="0"/>
-              <a:t>The point is not that local measurements are bad. They answer claims at a different scope.</a:t>
+              <a:t>The point is not that local measurements are bad. They answer claims at a different scope. No one of the four stage teams can establish stick-to-glass latency from its own instrument.</a:t>
             </a:r>
           </a:p>
           <a:p>
@@ -1052,7 +1055,7 @@
           <a:p>
             <a:r>
               <a:rPr dirty="0"/>
-              <a:t>Build (5 clicks): 1 the enclosing scope and A → B → C → D; 2 local numbers and green checks — each local measurement looks acceptable; 3 the heavy end-to-end arrow and the total; 4 the red X; 5 the generalizing examples and the footer.</a:t>
+              <a:t>Build (5 clicks): 1 the enclosing scope and sensing → computation → communication → rendering; 2 local numbers and green checks — each local measurement looks acceptable; 3 the heavy end-to-end arrow and the total; 4 the red X; 5 the two closing lines and the footer.</a:t>
             </a:r>
           </a:p>
         </p:txBody>
@@ -1467,6 +1470,12 @@
           <a:p>
             <a:r>
               <a:rPr dirty="0"/>
+              <a:t>- Human and organizational properties are especially likely to require proxies because the property itself is rarely directly observable.</a:t>
+            </a:r>
+          </a:p>
+          <a:p>
+            <a:r>
+              <a:rPr dirty="0"/>
               <a:t>- Discuss what would make the relationship valid: uniform work items? stable practices? no incentive pressure?</a:t>
             </a:r>
           </a:p>
@@ -1787,7 +1796,7 @@
           </a:p>
           <a:p>
             <a:r>
-              <a:t>- Build: table first — header and first three rows, then the remaining rows, then the closing claim line. Students should recognise that every previous unit created a claim BEFORE the chain appears. Only then the chain — the same structure spans all of them — and finally “A number does not decide what to do.”</a:t>
+              <a:t>- Build: the table row by row, and each row lands as a PAIR — engineering decision, then the property or claim requiring evidence — so students see decision, then claim to test, six times over. Header first, then one click per row. Then the closing claim line: engineering decisions create claims that later evidence can test. Then “A number does not decide what to do.” The chain comes LAST, as the generalization: the same structure spans all six rows. Do not animate top-to-bottom merely because that matches the layout.</a:t>
             </a:r>
           </a:p>
           <a:p>
@@ -1925,7 +1934,13 @@
           </a:p>
           <a:p>
             <a:r>
-              <a:t>- Do not present the six actions as exhaustive or as always-available peers.</a:t>
+              <a:t>- Do not present the five actions as exhaustive or as always-available peers.</a:t>
+            </a:r>
+          </a:p>
+          <a:p>
+            <a:r>
+              <a:rPr dirty="0"/>
+              <a:t>- The vocabulary is Validation’s, deliberately: deliver, gather more evidence, change, revisit upstream, refuse. Act I is being synthesized here, so no new action vocabulary is introduced. CHANGE covers changing the candidate system; REVISIT UPSTREAM covers discovering that the model, specification, or requirements framing needs revision.</a:t>
             </a:r>
           </a:p>
           <a:p>
@@ -2141,6 +2156,240 @@
 </p:notes>
 </file>
 
+<file path=ppt/notesSlides/notesSlide30.xml><?xml version="1.0" encoding="utf-8"?>
+<p:notes xmlns:a="http://schemas.openxmlformats.org/drawingml/2006/main" xmlns:r="http://schemas.openxmlformats.org/officeDocument/2006/relationships" xmlns:p="http://schemas.openxmlformats.org/presentationml/2006/main">
+  <p:cSld>
+    <p:spTree>
+      <p:nvGrpSpPr>
+        <p:cNvPr id="1" name=""/>
+        <p:cNvGrpSpPr/>
+        <p:nvPr/>
+      </p:nvGrpSpPr>
+      <p:grpSpPr>
+        <a:xfrm>
+          <a:off x="0" y="0"/>
+          <a:ext cx="0" cy="0"/>
+          <a:chOff x="0" y="0"/>
+          <a:chExt cx="0" cy="0"/>
+        </a:xfrm>
+      </p:grpSpPr>
+      <p:sp>
+        <p:nvSpPr>
+          <p:cNvPr id="2" name="Notes Placeholder 1"/>
+          <p:cNvSpPr>
+            <a:spLocks noGrp="1"/>
+          </p:cNvSpPr>
+          <p:nvPr>
+            <p:ph type="body" idx="1"/>
+          </p:nvPr>
+        </p:nvSpPr>
+        <p:spPr/>
+        <p:txBody>
+          <a:bodyPr/>
+          <a:lstStyle/>
+          <a:p>
+            <a:r>
+              <a:rPr dirty="0"/>
+              <a:t xml:space="preserve">1.5 minutes — </a:t>
+            </a:r>
+            <a:r>
+              <a:rPr i="1" dirty="0"/>
+              <a:t>Section 1’s own question, answered as a procedure students can perform.</a:t>
+            </a:r>
+          </a:p>
+          <a:p>
+            <a:endParaRPr dirty="0"/>
+          </a:p>
+          <a:p>
+            <a:r>
+              <a:rPr dirty="0"/>
+              <a:t>- Slide 7 gave the conceptual chain. This slide is the checklist: five things to identify before an engineering decision is well posed.</a:t>
+            </a:r>
+          </a:p>
+          <a:p>
+            <a:r>
+              <a:rPr dirty="0"/>
+              <a:t>- Nothing here is new. 1 and 2 are the model slides; 3 is the consequential-property idea from the chain; 4 and 5 are the caching example restated as a procedure.</a:t>
+            </a:r>
+          </a:p>
+          <a:p>
+            <a:r>
+              <a:rPr dirty="0"/>
+              <a:t>- Walk 4 and 5 together: the uncertainty names what blocks the decision, and the evidence needed is whatever would remove it. That pairing is the doorway into Section 2.</a:t>
+            </a:r>
+          </a:p>
+          <a:p>
+            <a:r>
+              <a:rPr dirty="0"/>
+              <a:t>- Build: one click per item, then the footer. Do not read all five and then explain; name each as it lands.</a:t>
+            </a:r>
+          </a:p>
+          <a:p>
+            <a:r>
+              <a:rPr dirty="0"/>
+              <a:t>- Section 1 must not end without this. The section asked the question; this answers it.</a:t>
+            </a:r>
+          </a:p>
+        </p:txBody>
+      </p:sp>
+    </p:spTree>
+  </p:cSld>
+  <p:clrMapOvr>
+    <a:masterClrMapping/>
+  </p:clrMapOvr>
+</p:notes>
+</file>
+
+<file path=ppt/notesSlides/notesSlide31.xml><?xml version="1.0" encoding="utf-8"?>
+<p:notes xmlns:a="http://schemas.openxmlformats.org/drawingml/2006/main" xmlns:r="http://schemas.openxmlformats.org/officeDocument/2006/relationships" xmlns:p="http://schemas.openxmlformats.org/presentationml/2006/main">
+  <p:cSld>
+    <p:spTree>
+      <p:nvGrpSpPr>
+        <p:cNvPr id="1" name=""/>
+        <p:cNvGrpSpPr/>
+        <p:nvPr/>
+      </p:nvGrpSpPr>
+      <p:grpSpPr>
+        <a:xfrm>
+          <a:off x="0" y="0"/>
+          <a:ext cx="0" cy="0"/>
+          <a:chOff x="0" y="0"/>
+          <a:chExt cx="0" cy="0"/>
+        </a:xfrm>
+      </p:grpSpPr>
+      <p:sp>
+        <p:nvSpPr>
+          <p:cNvPr id="2" name="Notes Placeholder 1"/>
+          <p:cNvSpPr>
+            <a:spLocks noGrp="1"/>
+          </p:cNvSpPr>
+          <p:nvPr>
+            <p:ph type="body" idx="1"/>
+          </p:nvPr>
+        </p:nvSpPr>
+        <p:spPr/>
+        <p:txBody>
+          <a:bodyPr/>
+          <a:lstStyle/>
+          <a:p>
+            <a:r>
+              <a:rPr dirty="0"/>
+              <a:t xml:space="preserve">2.5 minutes — </a:t>
+            </a:r>
+            <a:r>
+              <a:rPr i="1" dirty="0"/>
+              <a:t>One property, several metrics: the point is complementary evidence, not more evidence.</a:t>
+            </a:r>
+          </a:p>
+          <a:p>
+            <a:endParaRPr dirty="0"/>
+          </a:p>
+          <a:p>
+            <a:r>
+              <a:rPr dirty="0"/>
+              <a:t>- The chain on slide 12 invites students to infer one property, one metric. It is not so. A property usually has several observable aspects, and each metric chooses one.</a:t>
+            </a:r>
+          </a:p>
+          <a:p>
+            <a:r>
+              <a:rPr dirty="0"/>
+              <a:t>- State the guard explicitly and do not soften it: this is NOT “more metrics are better.” Three correlated proxies that share one blind spot are not three independent reasons — they are one reason counted three times.</a:t>
+            </a:r>
+          </a:p>
+          <a:p>
+            <a:r>
+              <a:rPr dirty="0"/>
+              <a:t>- The useful question is therefore not how many metrics, but whether their blind spots differ.</a:t>
+            </a:r>
+          </a:p>
+          <a:p>
+            <a:r>
+              <a:rPr dirty="0"/>
+              <a:t>- Worked example: defect count is falling, issues found during test observation remain, and integration escapes keep occurring. Each speaks to integration readiness from a different direction; they disagree, and the disagreement is the information.</a:t>
+            </a:r>
+          </a:p>
+          <a:p>
+            <a:r>
+              <a:rPr dirty="0"/>
+              <a:t>- Ask the room which of the three could be wrong for the same reason. That is the blind-spot question.</a:t>
+            </a:r>
+          </a:p>
+        </p:txBody>
+      </p:sp>
+    </p:spTree>
+  </p:cSld>
+  <p:clrMapOvr>
+    <a:masterClrMapping/>
+  </p:clrMapOvr>
+</p:notes>
+</file>
+
+<file path=ppt/notesSlides/notesSlide32.xml><?xml version="1.0" encoding="utf-8"?>
+<p:notes xmlns:a="http://schemas.openxmlformats.org/drawingml/2006/main" xmlns:r="http://schemas.openxmlformats.org/officeDocument/2006/relationships" xmlns:p="http://schemas.openxmlformats.org/presentationml/2006/main">
+  <p:cSld>
+    <p:spTree>
+      <p:nvGrpSpPr>
+        <p:cNvPr id="1" name=""/>
+        <p:cNvGrpSpPr/>
+        <p:nvPr/>
+      </p:nvGrpSpPr>
+      <p:grpSpPr>
+        <a:xfrm>
+          <a:off x="0" y="0"/>
+          <a:ext cx="0" cy="0"/>
+          <a:chOff x="0" y="0"/>
+          <a:chExt cx="0" cy="0"/>
+        </a:xfrm>
+      </p:grpSpPr>
+      <p:sp>
+        <p:nvSpPr>
+          <p:cNvPr id="2" name="Notes Placeholder 1"/>
+          <p:cNvSpPr>
+            <a:spLocks noGrp="1"/>
+          </p:cNvSpPr>
+          <p:nvPr>
+            <p:ph type="body" idx="1"/>
+          </p:nvPr>
+        </p:nvSpPr>
+        <p:spPr/>
+        <p:txBody>
+          <a:bodyPr/>
+          <a:lstStyle/>
+          <a:p>
+            <a:r>
+              <a:rPr dirty="0"/>
+              <a:t xml:space="preserve">5 minutes — </a:t>
+            </a:r>
+            <a:r>
+              <a:rPr i="1" dirty="0"/>
+              <a:t>Stretch break.</a:t>
+            </a:r>
+          </a:p>
+          <a:p>
+            <a:endParaRPr dirty="0"/>
+          </a:p>
+          <a:p>
+            <a:r>
+              <a:rPr dirty="0"/>
+              <a:t>- The constructive account is complete: property, metric, measurement, evidence. Section 3 turns adversarial.</a:t>
+            </a:r>
+          </a:p>
+          <a:p>
+            <a:r>
+              <a:rPr dirty="0"/>
+              <a:t>- Resume on the Section 3 divider.</a:t>
+            </a:r>
+          </a:p>
+        </p:txBody>
+      </p:sp>
+    </p:spTree>
+  </p:cSld>
+  <p:clrMapOvr>
+    <a:masterClrMapping/>
+  </p:clrMapOvr>
+</p:notes>
+</file>
+
 <file path=ppt/notesSlides/notesSlide4.xml><?xml version="1.0" encoding="utf-8"?>
 <p:notes xmlns:a="http://schemas.openxmlformats.org/drawingml/2006/main" xmlns:r="http://schemas.openxmlformats.org/officeDocument/2006/relationships" xmlns:p="http://schemas.openxmlformats.org/presentationml/2006/main">
   <p:cSld>
@@ -2339,6 +2588,18 @@
             <a:r>
               <a:rPr dirty="0"/>
               <a:t>- Guard the claim: the model identifies what matters; it does not decide.</a:t>
+            </a:r>
+          </a:p>
+          <a:p>
+            <a:r>
+              <a:rPr dirty="0"/>
+              <a:t>- Expect the objection “we didn’t call this a model.” Industrial engineers may never call it a model. But if we believe changing X affects Y, and use that relationship to interpret evidence, we are relying on one.</a:t>
+            </a:r>
+          </a:p>
+          <a:p>
+            <a:r>
+              <a:rPr dirty="0"/>
+              <a:t>- This sets up Act II, where Modeling defines a model as a purposeful reduction: models are already everywhere; later we learn to externalize and engineer them deliberately.</a:t>
             </a:r>
           </a:p>
           <a:p>
@@ -9990,8 +10251,8 @@
         </p:nvSpPr>
         <p:spPr>
           <a:xfrm>
-            <a:off x="502920" y="1143000"/>
-            <a:ext cx="8138160" cy="2606040"/>
+            <a:off x="274320" y="1143000"/>
+            <a:ext cx="8595360" cy="2606040"/>
           </a:xfrm>
           <a:prstGeom prst="rect">
             <a:avLst/>
@@ -10037,8 +10298,8 @@
         </p:nvSpPr>
         <p:spPr>
           <a:xfrm>
-            <a:off x="640080" y="1216152"/>
-            <a:ext cx="3200400" cy="274320"/>
+            <a:off x="411480" y="1216152"/>
+            <a:ext cx="5486400" cy="274320"/>
           </a:xfrm>
           <a:prstGeom prst="rect">
             <a:avLst/>
@@ -10058,7 +10319,7 @@
                   <a:srgbClr val="A08A5F"/>
                 </a:solidFill>
               </a:rPr>
-              <a:t>END-TO-END SCOPE</a:t>
+              <a:t>STICK-TO-GLASS LATENCY  ·  PILOT MOVES CONTROL → HUD CHANGES</a:t>
             </a:r>
           </a:p>
         </p:txBody>
@@ -10071,8 +10332,8 @@
         </p:nvSpPr>
         <p:spPr>
           <a:xfrm>
-            <a:off x="960120" y="1554480"/>
-            <a:ext cx="1417320" cy="777240"/>
+            <a:off x="411480" y="1554480"/>
+            <a:ext cx="1828800" cy="777240"/>
           </a:xfrm>
           <a:prstGeom prst="rect">
             <a:avLst/>
@@ -10109,12 +10370,12 @@
               <a:buNone/>
             </a:pPr>
             <a:r>
-              <a:rPr lang="en-US" sz="2400" b="1" i="0" dirty="0">
+              <a:rPr lang="en-US" sz="2000" b="1" i="0" dirty="0">
                 <a:solidFill>
                   <a:srgbClr val="5C4826"/>
                 </a:solidFill>
               </a:rPr>
-              <a:t>A</a:t>
+              <a:t>Sensing</a:t>
             </a:r>
           </a:p>
         </p:txBody>
@@ -10127,8 +10388,8 @@
         </p:nvCxnSpPr>
         <p:spPr>
           <a:xfrm>
-            <a:off x="2423160" y="1943100"/>
-            <a:ext cx="411480" cy="0"/>
+            <a:off x="2286000" y="1943100"/>
+            <a:ext cx="243840" cy="0"/>
           </a:xfrm>
           <a:prstGeom prst="line">
             <a:avLst/>
@@ -10164,8 +10425,8 @@
         </p:nvSpPr>
         <p:spPr>
           <a:xfrm>
-            <a:off x="2880360" y="1554480"/>
-            <a:ext cx="1417320" cy="777240"/>
+            <a:off x="2575560" y="1554480"/>
+            <a:ext cx="1828800" cy="777240"/>
           </a:xfrm>
           <a:prstGeom prst="rect">
             <a:avLst/>
@@ -10202,12 +10463,12 @@
               <a:buNone/>
             </a:pPr>
             <a:r>
-              <a:rPr lang="en-US" sz="2400" b="1" i="0" dirty="0">
+              <a:rPr lang="en-US" sz="2000" b="1" i="0" dirty="0">
                 <a:solidFill>
                   <a:srgbClr val="5C4826"/>
                 </a:solidFill>
               </a:rPr>
-              <a:t>B</a:t>
+              <a:t>Computation</a:t>
             </a:r>
           </a:p>
         </p:txBody>
@@ -10220,8 +10481,8 @@
         </p:nvCxnSpPr>
         <p:spPr>
           <a:xfrm>
-            <a:off x="4343400" y="1943100"/>
-            <a:ext cx="411480" cy="0"/>
+            <a:off x="4450080" y="1943100"/>
+            <a:ext cx="243840" cy="0"/>
           </a:xfrm>
           <a:prstGeom prst="line">
             <a:avLst/>
@@ -10257,8 +10518,8 @@
         </p:nvSpPr>
         <p:spPr>
           <a:xfrm>
-            <a:off x="4800600" y="1554480"/>
-            <a:ext cx="1417320" cy="777240"/>
+            <a:off x="4739640" y="1554480"/>
+            <a:ext cx="1828800" cy="777240"/>
           </a:xfrm>
           <a:prstGeom prst="rect">
             <a:avLst/>
@@ -10295,12 +10556,12 @@
               <a:buNone/>
             </a:pPr>
             <a:r>
-              <a:rPr lang="en-US" sz="2400" b="1" i="0" dirty="0">
+              <a:rPr lang="en-US" sz="2000" b="1" i="0" dirty="0">
                 <a:solidFill>
                   <a:srgbClr val="5C4826"/>
                 </a:solidFill>
               </a:rPr>
-              <a:t>C</a:t>
+              <a:t>Communication</a:t>
             </a:r>
           </a:p>
         </p:txBody>
@@ -10313,8 +10574,8 @@
         </p:nvCxnSpPr>
         <p:spPr>
           <a:xfrm>
-            <a:off x="6263640" y="1943100"/>
-            <a:ext cx="411480" cy="0"/>
+            <a:off x="6614160" y="1943100"/>
+            <a:ext cx="243840" cy="0"/>
           </a:xfrm>
           <a:prstGeom prst="line">
             <a:avLst/>
@@ -10350,8 +10611,8 @@
         </p:nvSpPr>
         <p:spPr>
           <a:xfrm>
-            <a:off x="6720840" y="1554480"/>
-            <a:ext cx="1417320" cy="777240"/>
+            <a:off x="6903720" y="1554480"/>
+            <a:ext cx="1828800" cy="777240"/>
           </a:xfrm>
           <a:prstGeom prst="rect">
             <a:avLst/>
@@ -10388,12 +10649,12 @@
               <a:buNone/>
             </a:pPr>
             <a:r>
-              <a:rPr lang="en-US" sz="2400" b="1" i="0" dirty="0">
+              <a:rPr lang="en-US" sz="2000" b="1" i="0" dirty="0">
                 <a:solidFill>
                   <a:srgbClr val="5C4826"/>
                 </a:solidFill>
               </a:rPr>
-              <a:t>D</a:t>
+              <a:t>Rendering</a:t>
             </a:r>
           </a:p>
         </p:txBody>
@@ -10406,8 +10667,8 @@
         </p:nvSpPr>
         <p:spPr>
           <a:xfrm>
-            <a:off x="960120" y="2423160"/>
-            <a:ext cx="1417320" cy="365760"/>
+            <a:off x="411480" y="2423160"/>
+            <a:ext cx="1828800" cy="365760"/>
           </a:xfrm>
           <a:prstGeom prst="rect">
             <a:avLst/>
@@ -10440,8 +10701,8 @@
         </p:nvSpPr>
         <p:spPr>
           <a:xfrm>
-            <a:off x="2880360" y="2423160"/>
-            <a:ext cx="1417320" cy="365760"/>
+            <a:off x="2575560" y="2423160"/>
+            <a:ext cx="1828800" cy="365760"/>
           </a:xfrm>
           <a:prstGeom prst="rect">
             <a:avLst/>
@@ -10474,8 +10735,8 @@
         </p:nvSpPr>
         <p:spPr>
           <a:xfrm>
-            <a:off x="4800600" y="2423160"/>
-            <a:ext cx="1417320" cy="365760"/>
+            <a:off x="4739640" y="2423160"/>
+            <a:ext cx="1828800" cy="365760"/>
           </a:xfrm>
           <a:prstGeom prst="rect">
             <a:avLst/>
@@ -10508,8 +10769,8 @@
         </p:nvSpPr>
         <p:spPr>
           <a:xfrm>
-            <a:off x="6720840" y="2423160"/>
-            <a:ext cx="1417320" cy="365760"/>
+            <a:off x="6903720" y="2423160"/>
+            <a:ext cx="1828800" cy="365760"/>
           </a:xfrm>
           <a:prstGeom prst="rect">
             <a:avLst/>
@@ -10542,8 +10803,8 @@
         </p:nvSpPr>
         <p:spPr>
           <a:xfrm>
-            <a:off x="960120" y="2834640"/>
-            <a:ext cx="1417320" cy="411480"/>
+            <a:off x="411480" y="2834640"/>
+            <a:ext cx="1828800" cy="411480"/>
           </a:xfrm>
           <a:prstGeom prst="rect">
             <a:avLst/>
@@ -10576,8 +10837,8 @@
         </p:nvSpPr>
         <p:spPr>
           <a:xfrm>
-            <a:off x="2880360" y="2834640"/>
-            <a:ext cx="1417320" cy="411480"/>
+            <a:off x="2575560" y="2834640"/>
+            <a:ext cx="1828800" cy="411480"/>
           </a:xfrm>
           <a:prstGeom prst="rect">
             <a:avLst/>
@@ -10610,8 +10871,8 @@
         </p:nvSpPr>
         <p:spPr>
           <a:xfrm>
-            <a:off x="4800600" y="2834640"/>
-            <a:ext cx="1417320" cy="411480"/>
+            <a:off x="4739640" y="2834640"/>
+            <a:ext cx="1828800" cy="411480"/>
           </a:xfrm>
           <a:prstGeom prst="rect">
             <a:avLst/>
@@ -10644,8 +10905,8 @@
         </p:nvSpPr>
         <p:spPr>
           <a:xfrm>
-            <a:off x="6720840" y="2834640"/>
-            <a:ext cx="1417320" cy="411480"/>
+            <a:off x="6903720" y="2834640"/>
+            <a:ext cx="1828800" cy="411480"/>
           </a:xfrm>
           <a:prstGeom prst="rect">
             <a:avLst/>
@@ -10678,8 +10939,8 @@
         </p:nvSpPr>
         <p:spPr>
           <a:xfrm>
-            <a:off x="502920" y="3291840"/>
-            <a:ext cx="8138160" cy="365760"/>
+            <a:off x="274320" y="3291840"/>
+            <a:ext cx="8595360" cy="365760"/>
           </a:xfrm>
           <a:prstGeom prst="rect">
             <a:avLst/>
@@ -10699,7 +10960,7 @@
                   <a:srgbClr val="5C4826"/>
                 </a:solidFill>
               </a:rPr>
-              <a:t>+ 100 ms communication along the path</a:t>
+              <a:t>+ 100 ms queueing and scheduling along the path</a:t>
             </a:r>
             <a:r>
               <a:rPr lang="en-US" sz="2000" b="1" i="0" dirty="0">
@@ -10720,8 +10981,8 @@
         </p:nvCxnSpPr>
         <p:spPr>
           <a:xfrm>
-            <a:off x="960120" y="4069080"/>
-            <a:ext cx="7178040" cy="0"/>
+            <a:off x="411480" y="4069080"/>
+            <a:ext cx="8321040" cy="0"/>
           </a:xfrm>
           <a:prstGeom prst="line">
             <a:avLst/>
@@ -10846,7 +11107,7 @@
                   <a:srgbClr val="555960"/>
                 </a:solidFill>
               </a:rPr>
-              <a:t>component latency  ≠  end-to-end latency</a:t>
+              <a:t>The property exists across the path.</a:t>
             </a:r>
           </a:p>
           <a:p>
@@ -10857,7 +11118,7 @@
                   <a:srgbClr val="555960"/>
                 </a:solidFill>
               </a:rPr>
-              <a:t>service availability  ≠  system availability when dependencies fail together</a:t>
+              <a:t>No component measurement establishes it.</a:t>
             </a:r>
           </a:p>
         </p:txBody>
@@ -14816,14 +15077,14 @@
       </p:sp>
       <p:sp>
         <p:nvSpPr>
-          <p:cNvPr id="104" name="Law"/>
+          <p:cNvPr id="104" name="SurrogationDef"/>
           <p:cNvSpPr/>
           <p:nvPr/>
         </p:nvSpPr>
         <p:spPr>
           <a:xfrm>
-            <a:off x="274320" y="4457700"/>
-            <a:ext cx="8595360" cy="800100"/>
+            <a:off x="310896" y="4343400"/>
+            <a:ext cx="3959352" cy="1188720"/>
           </a:xfrm>
           <a:prstGeom prst="rect">
             <a:avLst/>
@@ -14850,15 +15111,7 @@
                   <a:srgbClr val="2E74B5"/>
                 </a:solidFill>
               </a:rPr>
-              <a:t xml:space="preserve">Surrogation: </a:t>
-            </a:r>
-            <a:r>
-              <a:rPr lang="en-US" sz="2000" b="0" i="0" dirty="0">
-                <a:solidFill>
-                  <a:srgbClr val="5C4826"/>
-                </a:solidFill>
-              </a:rPr>
-              <a:t>the measure becomes confused with the property</a:t>
+              <a:t>SURROGATION</a:t>
             </a:r>
           </a:p>
           <a:p>
@@ -14869,20 +15122,95 @@
               <a:buNone/>
             </a:pPr>
             <a:r>
+              <a:rPr lang="en-US" sz="2000" b="0" i="0" dirty="0">
+                <a:solidFill>
+                  <a:srgbClr val="5C4826"/>
+                </a:solidFill>
+              </a:rPr>
+              <a:t>We mistake the measure</a:t>
+            </a:r>
+          </a:p>
+          <a:p>
+            <a:pPr algn="ctr">
+              <a:buNone/>
+            </a:pPr>
+            <a:r>
+              <a:rPr lang="en-US" sz="2000" b="0" i="0" dirty="0">
+                <a:solidFill>
+                  <a:srgbClr val="5C4826"/>
+                </a:solidFill>
+              </a:rPr>
+              <a:t>for the property.</a:t>
+            </a:r>
+          </a:p>
+        </p:txBody>
+      </p:sp>
+      <p:sp>
+        <p:nvSpPr>
+          <p:cNvPr id="105" name="GoodhartDef"/>
+          <p:cNvSpPr/>
+          <p:nvPr/>
+        </p:nvSpPr>
+        <p:spPr>
+          <a:xfrm>
+            <a:off x="4572000" y="4343400"/>
+            <a:ext cx="4261104" cy="1188720"/>
+          </a:xfrm>
+          <a:prstGeom prst="rect">
+            <a:avLst/>
+          </a:prstGeom>
+          <a:solidFill>
+            <a:srgbClr val="E8F0F7"/>
+          </a:solidFill>
+          <a:ln w="15875">
+            <a:solidFill>
+              <a:srgbClr val="A9C4DB"/>
+            </a:solidFill>
+          </a:ln>
+        </p:spPr>
+        <p:txBody>
+          <a:bodyPr wrap="square" lIns="91440" tIns="45720" rIns="91440" bIns="45720" anchor="ctr"/>
+          <a:lstStyle/>
+          <a:p>
+            <a:pPr algn="ctr">
+              <a:buNone/>
+            </a:pPr>
+            <a:r>
               <a:rPr lang="en-US" sz="2000" b="1" i="0" dirty="0">
                 <a:solidFill>
                   <a:srgbClr val="2E74B5"/>
                 </a:solidFill>
               </a:rPr>
-              <a:t xml:space="preserve">Goodhart’s Law: </a:t>
-            </a:r>
+              <a:t>GOODHART</a:t>
+            </a:r>
+          </a:p>
+          <a:p>
+            <a:pPr algn="ctr">
+              <a:spcBef>
+                <a:spcPts val="140"/>
+              </a:spcBef>
+              <a:buNone/>
+            </a:pPr>
             <a:r>
               <a:rPr lang="en-US" sz="2000" b="0" i="0" dirty="0">
                 <a:solidFill>
                   <a:srgbClr val="5C4826"/>
                 </a:solidFill>
               </a:rPr>
-              <a:t>targeting the measure can change the relationship</a:t>
+              <a:t>Targeting the measure changes</a:t>
+            </a:r>
+          </a:p>
+          <a:p>
+            <a:pPr algn="ctr">
+              <a:buNone/>
+            </a:pPr>
+            <a:r>
+              <a:rPr lang="en-US" sz="2000" b="0" i="0" dirty="0">
+                <a:solidFill>
+                  <a:srgbClr val="5C4826"/>
+                </a:solidFill>
+              </a:rPr>
+              <a:t>the relationship that made it useful.</a:t>
             </a:r>
           </a:p>
         </p:txBody>
@@ -14913,7 +15241,7 @@
                             </p:stCondLst>
                             <p:childTnLst>
                               <p:par>
-                                <p:cTn id="5" presetID="1" presetClass="entr" presetSubtype="0" fill="hold" grpId="0" nodeType="clickEffect">
+                                <p:cTn id="5" presetID="10" presetClass="entr" presetSubtype="0" fill="hold" nodeType="clickEffect">
                                   <p:stCondLst>
                                     <p:cond delay="0"/>
                                   </p:stCondLst>
@@ -14936,6 +15264,49 @@
                                         <p:strVal val="visible"/>
                                       </p:to>
                                     </p:set>
+                                    <p:animEffect transition="in" filter="fade">
+                                      <p:cBhvr>
+                                        <p:cTn id="7" dur="500"/>
+                                        <p:tgtEl>
+                                          <p:spTgt spid="104"/>
+                                        </p:tgtEl>
+                                      </p:cBhvr>
+                                    </p:animEffect>
+                                  </p:childTnLst>
+                                </p:cTn>
+                              </p:par>
+                              <p:par>
+                                <p:cTn id="8" presetID="10" presetClass="entr" presetSubtype="0" fill="hold" nodeType="withEffect">
+                                  <p:stCondLst>
+                                    <p:cond delay="0"/>
+                                  </p:stCondLst>
+                                  <p:childTnLst>
+                                    <p:set>
+                                      <p:cBhvr>
+                                        <p:cTn id="9" dur="1" fill="hold">
+                                          <p:stCondLst>
+                                            <p:cond delay="0"/>
+                                          </p:stCondLst>
+                                        </p:cTn>
+                                        <p:tgtEl>
+                                          <p:spTgt spid="105"/>
+                                        </p:tgtEl>
+                                        <p:attrNameLst>
+                                          <p:attrName>style.visibility</p:attrName>
+                                        </p:attrNameLst>
+                                      </p:cBhvr>
+                                      <p:to>
+                                        <p:strVal val="visible"/>
+                                      </p:to>
+                                    </p:set>
+                                    <p:animEffect transition="in" filter="fade">
+                                      <p:cBhvr>
+                                        <p:cTn id="10" dur="500"/>
+                                        <p:tgtEl>
+                                          <p:spTgt spid="105"/>
+                                        </p:tgtEl>
+                                      </p:cBhvr>
+                                    </p:animEffect>
                                   </p:childTnLst>
                                 </p:cTn>
                               </p:par>
@@ -14966,9 +15337,6 @@
         </p:cTn>
       </p:par>
     </p:tnLst>
-    <p:bldLst>
-      <p:bldP spid="104" grpId="0" animBg="1"/>
-    </p:bldLst>
   </p:timing>
 </p:sld>
 </file>
@@ -17287,15 +17655,33 @@
                                   </p:childTnLst>
                                 </p:cTn>
                               </p:par>
+                            </p:childTnLst>
+                          </p:cTn>
+                        </p:par>
+                      </p:childTnLst>
+                    </p:cTn>
+                  </p:par>
+                  <p:par>
+                    <p:cTn id="11" fill="hold">
+                      <p:stCondLst>
+                        <p:cond delay="indefinite"/>
+                      </p:stCondLst>
+                      <p:childTnLst>
+                        <p:par>
+                          <p:cTn id="12" fill="hold">
+                            <p:stCondLst>
+                              <p:cond delay="0"/>
+                            </p:stCondLst>
+                            <p:childTnLst>
                               <p:par>
-                                <p:cTn id="11" presetID="10" presetClass="entr" presetSubtype="0" fill="hold" nodeType="withEffect">
+                                <p:cTn id="13" presetID="10" presetClass="entr" presetSubtype="0" fill="hold" nodeType="clickEffect">
                                   <p:stCondLst>
                                     <p:cond delay="0"/>
                                   </p:stCondLst>
                                   <p:childTnLst>
                                     <p:set>
                                       <p:cBhvr>
-                                        <p:cTn id="12" dur="1" fill="hold">
+                                        <p:cTn id="14" dur="1" fill="hold">
                                           <p:stCondLst>
                                             <p:cond delay="0"/>
                                           </p:stCondLst>
@@ -17313,7 +17699,7 @@
                                     </p:set>
                                     <p:animEffect transition="in" filter="fade">
                                       <p:cBhvr>
-                                        <p:cTn id="13" dur="500"/>
+                                        <p:cTn id="15" dur="500"/>
                                         <p:tgtEl>
                                           <p:spTgt spid="18"/>
                                         </p:tgtEl>
@@ -17323,14 +17709,14 @@
                                 </p:cTn>
                               </p:par>
                               <p:par>
-                                <p:cTn id="14" presetID="10" presetClass="entr" presetSubtype="0" fill="hold" nodeType="withEffect">
+                                <p:cTn id="16" presetID="10" presetClass="entr" presetSubtype="0" fill="hold" nodeType="withEffect">
                                   <p:stCondLst>
                                     <p:cond delay="0"/>
                                   </p:stCondLst>
                                   <p:childTnLst>
                                     <p:set>
                                       <p:cBhvr>
-                                        <p:cTn id="15" dur="1" fill="hold">
+                                        <p:cTn id="17" dur="1" fill="hold">
                                           <p:stCondLst>
                                             <p:cond delay="0"/>
                                           </p:stCondLst>
@@ -17348,7 +17734,7 @@
                                     </p:set>
                                     <p:animEffect transition="in" filter="fade">
                                       <p:cBhvr>
-                                        <p:cTn id="16" dur="500"/>
+                                        <p:cTn id="18" dur="500"/>
                                         <p:tgtEl>
                                           <p:spTgt spid="19"/>
                                         </p:tgtEl>
@@ -17357,15 +17743,33 @@
                                   </p:childTnLst>
                                 </p:cTn>
                               </p:par>
+                            </p:childTnLst>
+                          </p:cTn>
+                        </p:par>
+                      </p:childTnLst>
+                    </p:cTn>
+                  </p:par>
+                  <p:par>
+                    <p:cTn id="19" fill="hold">
+                      <p:stCondLst>
+                        <p:cond delay="indefinite"/>
+                      </p:stCondLst>
+                      <p:childTnLst>
+                        <p:par>
+                          <p:cTn id="20" fill="hold">
+                            <p:stCondLst>
+                              <p:cond delay="0"/>
+                            </p:stCondLst>
+                            <p:childTnLst>
                               <p:par>
-                                <p:cTn id="17" presetID="10" presetClass="entr" presetSubtype="0" fill="hold" nodeType="withEffect">
+                                <p:cTn id="21" presetID="10" presetClass="entr" presetSubtype="0" fill="hold" nodeType="clickEffect">
                                   <p:stCondLst>
                                     <p:cond delay="0"/>
                                   </p:stCondLst>
                                   <p:childTnLst>
                                     <p:set>
                                       <p:cBhvr>
-                                        <p:cTn id="18" dur="1" fill="hold">
+                                        <p:cTn id="22" dur="1" fill="hold">
                                           <p:stCondLst>
                                             <p:cond delay="0"/>
                                           </p:stCondLst>
@@ -17383,7 +17787,7 @@
                                     </p:set>
                                     <p:animEffect transition="in" filter="fade">
                                       <p:cBhvr>
-                                        <p:cTn id="19" dur="500"/>
+                                        <p:cTn id="23" dur="500"/>
                                         <p:tgtEl>
                                           <p:spTgt spid="20"/>
                                         </p:tgtEl>
@@ -17393,14 +17797,14 @@
                                 </p:cTn>
                               </p:par>
                               <p:par>
-                                <p:cTn id="20" presetID="10" presetClass="entr" presetSubtype="0" fill="hold" nodeType="withEffect">
+                                <p:cTn id="24" presetID="10" presetClass="entr" presetSubtype="0" fill="hold" nodeType="withEffect">
                                   <p:stCondLst>
                                     <p:cond delay="0"/>
                                   </p:stCondLst>
                                   <p:childTnLst>
                                     <p:set>
                                       <p:cBhvr>
-                                        <p:cTn id="21" dur="1" fill="hold">
+                                        <p:cTn id="25" dur="1" fill="hold">
                                           <p:stCondLst>
                                             <p:cond delay="0"/>
                                           </p:stCondLst>
@@ -17418,7 +17822,7 @@
                                     </p:set>
                                     <p:animEffect transition="in" filter="fade">
                                       <p:cBhvr>
-                                        <p:cTn id="22" dur="500"/>
+                                        <p:cTn id="26" dur="500"/>
                                         <p:tgtEl>
                                           <p:spTgt spid="21"/>
                                         </p:tgtEl>
@@ -17427,15 +17831,33 @@
                                   </p:childTnLst>
                                 </p:cTn>
                               </p:par>
+                            </p:childTnLst>
+                          </p:cTn>
+                        </p:par>
+                      </p:childTnLst>
+                    </p:cTn>
+                  </p:par>
+                  <p:par>
+                    <p:cTn id="27" fill="hold">
+                      <p:stCondLst>
+                        <p:cond delay="indefinite"/>
+                      </p:stCondLst>
+                      <p:childTnLst>
+                        <p:par>
+                          <p:cTn id="28" fill="hold">
+                            <p:stCondLst>
+                              <p:cond delay="0"/>
+                            </p:stCondLst>
+                            <p:childTnLst>
                               <p:par>
-                                <p:cTn id="23" presetID="10" presetClass="entr" presetSubtype="0" fill="hold" nodeType="withEffect">
+                                <p:cTn id="29" presetID="10" presetClass="entr" presetSubtype="0" fill="hold" nodeType="clickEffect">
                                   <p:stCondLst>
                                     <p:cond delay="0"/>
                                   </p:stCondLst>
                                   <p:childTnLst>
                                     <p:set>
                                       <p:cBhvr>
-                                        <p:cTn id="24" dur="1" fill="hold">
+                                        <p:cTn id="30" dur="1" fill="hold">
                                           <p:stCondLst>
                                             <p:cond delay="0"/>
                                           </p:stCondLst>
@@ -17453,7 +17875,7 @@
                                     </p:set>
                                     <p:animEffect transition="in" filter="fade">
                                       <p:cBhvr>
-                                        <p:cTn id="25" dur="500"/>
+                                        <p:cTn id="31" dur="500"/>
                                         <p:tgtEl>
                                           <p:spTgt spid="22"/>
                                         </p:tgtEl>
@@ -17463,14 +17885,14 @@
                                 </p:cTn>
                               </p:par>
                               <p:par>
-                                <p:cTn id="26" presetID="10" presetClass="entr" presetSubtype="0" fill="hold" nodeType="withEffect">
+                                <p:cTn id="32" presetID="10" presetClass="entr" presetSubtype="0" fill="hold" nodeType="withEffect">
                                   <p:stCondLst>
                                     <p:cond delay="0"/>
                                   </p:stCondLst>
                                   <p:childTnLst>
                                     <p:set>
                                       <p:cBhvr>
-                                        <p:cTn id="27" dur="1" fill="hold">
+                                        <p:cTn id="33" dur="1" fill="hold">
                                           <p:stCondLst>
                                             <p:cond delay="0"/>
                                           </p:stCondLst>
@@ -17488,7 +17910,7 @@
                                     </p:set>
                                     <p:animEffect transition="in" filter="fade">
                                       <p:cBhvr>
-                                        <p:cTn id="28" dur="500"/>
+                                        <p:cTn id="34" dur="500"/>
                                         <p:tgtEl>
                                           <p:spTgt spid="23"/>
                                         </p:tgtEl>
@@ -17504,26 +17926,26 @@
                     </p:cTn>
                   </p:par>
                   <p:par>
-                    <p:cTn id="29" fill="hold">
+                    <p:cTn id="35" fill="hold">
                       <p:stCondLst>
                         <p:cond delay="indefinite"/>
                       </p:stCondLst>
                       <p:childTnLst>
                         <p:par>
-                          <p:cTn id="30" fill="hold">
+                          <p:cTn id="36" fill="hold">
                             <p:stCondLst>
                               <p:cond delay="0"/>
                             </p:stCondLst>
                             <p:childTnLst>
                               <p:par>
-                                <p:cTn id="31" presetID="10" presetClass="entr" presetSubtype="0" fill="hold" nodeType="clickEffect">
+                                <p:cTn id="37" presetID="10" presetClass="entr" presetSubtype="0" fill="hold" nodeType="clickEffect">
                                   <p:stCondLst>
                                     <p:cond delay="0"/>
                                   </p:stCondLst>
                                   <p:childTnLst>
                                     <p:set>
                                       <p:cBhvr>
-                                        <p:cTn id="32" dur="1" fill="hold">
+                                        <p:cTn id="38" dur="1" fill="hold">
                                           <p:stCondLst>
                                             <p:cond delay="0"/>
                                           </p:stCondLst>
@@ -17541,79 +17963,9 @@
                                     </p:set>
                                     <p:animEffect transition="in" filter="fade">
                                       <p:cBhvr>
-                                        <p:cTn id="33" dur="500"/>
+                                        <p:cTn id="39" dur="500"/>
                                         <p:tgtEl>
                                           <p:spTgt spid="24"/>
-                                        </p:tgtEl>
-                                      </p:cBhvr>
-                                    </p:animEffect>
-                                  </p:childTnLst>
-                                </p:cTn>
-                              </p:par>
-                              <p:par>
-                                <p:cTn id="34" presetID="10" presetClass="entr" presetSubtype="0" fill="hold" nodeType="withEffect">
-                                  <p:stCondLst>
-                                    <p:cond delay="0"/>
-                                  </p:stCondLst>
-                                  <p:childTnLst>
-                                    <p:set>
-                                      <p:cBhvr>
-                                        <p:cTn id="35" dur="1" fill="hold">
-                                          <p:stCondLst>
-                                            <p:cond delay="0"/>
-                                          </p:stCondLst>
-                                        </p:cTn>
-                                        <p:tgtEl>
-                                          <p:spTgt spid="25"/>
-                                        </p:tgtEl>
-                                        <p:attrNameLst>
-                                          <p:attrName>style.visibility</p:attrName>
-                                        </p:attrNameLst>
-                                      </p:cBhvr>
-                                      <p:to>
-                                        <p:strVal val="visible"/>
-                                      </p:to>
-                                    </p:set>
-                                    <p:animEffect transition="in" filter="fade">
-                                      <p:cBhvr>
-                                        <p:cTn id="36" dur="500"/>
-                                        <p:tgtEl>
-                                          <p:spTgt spid="25"/>
-                                        </p:tgtEl>
-                                      </p:cBhvr>
-                                    </p:animEffect>
-                                  </p:childTnLst>
-                                </p:cTn>
-                              </p:par>
-                              <p:par>
-                                <p:cTn id="37" presetID="10" presetClass="entr" presetSubtype="0" fill="hold" nodeType="withEffect">
-                                  <p:stCondLst>
-                                    <p:cond delay="0"/>
-                                  </p:stCondLst>
-                                  <p:childTnLst>
-                                    <p:set>
-                                      <p:cBhvr>
-                                        <p:cTn id="38" dur="1" fill="hold">
-                                          <p:stCondLst>
-                                            <p:cond delay="0"/>
-                                          </p:stCondLst>
-                                        </p:cTn>
-                                        <p:tgtEl>
-                                          <p:spTgt spid="26"/>
-                                        </p:tgtEl>
-                                        <p:attrNameLst>
-                                          <p:attrName>style.visibility</p:attrName>
-                                        </p:attrNameLst>
-                                      </p:cBhvr>
-                                      <p:to>
-                                        <p:strVal val="visible"/>
-                                      </p:to>
-                                    </p:set>
-                                    <p:animEffect transition="in" filter="fade">
-                                      <p:cBhvr>
-                                        <p:cTn id="39" dur="500"/>
-                                        <p:tgtEl>
-                                          <p:spTgt spid="26"/>
                                         </p:tgtEl>
                                       </p:cBhvr>
                                     </p:animEffect>
@@ -17634,7 +17986,7 @@
                                           </p:stCondLst>
                                         </p:cTn>
                                         <p:tgtEl>
-                                          <p:spTgt spid="27"/>
+                                          <p:spTgt spid="25"/>
                                         </p:tgtEl>
                                         <p:attrNameLst>
                                           <p:attrName>style.visibility</p:attrName>
@@ -17648,6 +18000,94 @@
                                       <p:cBhvr>
                                         <p:cTn id="42" dur="500"/>
                                         <p:tgtEl>
+                                          <p:spTgt spid="25"/>
+                                        </p:tgtEl>
+                                      </p:cBhvr>
+                                    </p:animEffect>
+                                  </p:childTnLst>
+                                </p:cTn>
+                              </p:par>
+                            </p:childTnLst>
+                          </p:cTn>
+                        </p:par>
+                      </p:childTnLst>
+                    </p:cTn>
+                  </p:par>
+                  <p:par>
+                    <p:cTn id="43" fill="hold">
+                      <p:stCondLst>
+                        <p:cond delay="indefinite"/>
+                      </p:stCondLst>
+                      <p:childTnLst>
+                        <p:par>
+                          <p:cTn id="44" fill="hold">
+                            <p:stCondLst>
+                              <p:cond delay="0"/>
+                            </p:stCondLst>
+                            <p:childTnLst>
+                              <p:par>
+                                <p:cTn id="45" presetID="10" presetClass="entr" presetSubtype="0" fill="hold" nodeType="clickEffect">
+                                  <p:stCondLst>
+                                    <p:cond delay="0"/>
+                                  </p:stCondLst>
+                                  <p:childTnLst>
+                                    <p:set>
+                                      <p:cBhvr>
+                                        <p:cTn id="46" dur="1" fill="hold">
+                                          <p:stCondLst>
+                                            <p:cond delay="0"/>
+                                          </p:stCondLst>
+                                        </p:cTn>
+                                        <p:tgtEl>
+                                          <p:spTgt spid="26"/>
+                                        </p:tgtEl>
+                                        <p:attrNameLst>
+                                          <p:attrName>style.visibility</p:attrName>
+                                        </p:attrNameLst>
+                                      </p:cBhvr>
+                                      <p:to>
+                                        <p:strVal val="visible"/>
+                                      </p:to>
+                                    </p:set>
+                                    <p:animEffect transition="in" filter="fade">
+                                      <p:cBhvr>
+                                        <p:cTn id="47" dur="500"/>
+                                        <p:tgtEl>
+                                          <p:spTgt spid="26"/>
+                                        </p:tgtEl>
+                                      </p:cBhvr>
+                                    </p:animEffect>
+                                  </p:childTnLst>
+                                </p:cTn>
+                              </p:par>
+                              <p:par>
+                                <p:cTn id="48" presetID="10" presetClass="entr" presetSubtype="0" fill="hold" nodeType="withEffect">
+                                  <p:stCondLst>
+                                    <p:cond delay="0"/>
+                                  </p:stCondLst>
+                                  <p:childTnLst>
+                                    <p:set>
+                                      <p:cBhvr>
+                                        <p:cTn id="49" dur="1" fill="hold">
+                                          <p:stCondLst>
+                                            <p:cond delay="0"/>
+                                          </p:stCondLst>
+                                        </p:cTn>
+                                        <p:tgtEl>
+                                          <p:spTgt spid="27"/>
+                                        </p:tgtEl>
+                                        <p:attrNameLst>
+                                          <p:attrName>style.visibility</p:attrName>
+                                        </p:attrNameLst>
+                                      </p:cBhvr>
+                                      <p:to>
+                                        <p:strVal val="visible"/>
+                                      </p:to>
+                                    </p:set>
+                                    <p:animEffect transition="in" filter="fade">
+                                      <p:cBhvr>
+                                        <p:cTn id="50" dur="500"/>
+                                        <p:tgtEl>
                                           <p:spTgt spid="27"/>
                                         </p:tgtEl>
                                       </p:cBhvr>
@@ -17655,15 +18095,33 @@
                                   </p:childTnLst>
                                 </p:cTn>
                               </p:par>
+                            </p:childTnLst>
+                          </p:cTn>
+                        </p:par>
+                      </p:childTnLst>
+                    </p:cTn>
+                  </p:par>
+                  <p:par>
+                    <p:cTn id="51" fill="hold">
+                      <p:stCondLst>
+                        <p:cond delay="indefinite"/>
+                      </p:stCondLst>
+                      <p:childTnLst>
+                        <p:par>
+                          <p:cTn id="52" fill="hold">
+                            <p:stCondLst>
+                              <p:cond delay="0"/>
+                            </p:stCondLst>
+                            <p:childTnLst>
                               <p:par>
-                                <p:cTn id="43" presetID="10" presetClass="entr" presetSubtype="0" fill="hold" nodeType="withEffect">
+                                <p:cTn id="53" presetID="10" presetClass="entr" presetSubtype="0" fill="hold" nodeType="clickEffect">
                                   <p:stCondLst>
                                     <p:cond delay="0"/>
                                   </p:stCondLst>
                                   <p:childTnLst>
                                     <p:set>
                                       <p:cBhvr>
-                                        <p:cTn id="44" dur="1" fill="hold">
+                                        <p:cTn id="54" dur="1" fill="hold">
                                           <p:stCondLst>
                                             <p:cond delay="0"/>
                                           </p:stCondLst>
@@ -17681,7 +18139,7 @@
                                     </p:set>
                                     <p:animEffect transition="in" filter="fade">
                                       <p:cBhvr>
-                                        <p:cTn id="45" dur="500"/>
+                                        <p:cTn id="55" dur="500"/>
                                         <p:tgtEl>
                                           <p:spTgt spid="28"/>
                                         </p:tgtEl>
@@ -17691,14 +18149,14 @@
                                 </p:cTn>
                               </p:par>
                               <p:par>
-                                <p:cTn id="46" presetID="10" presetClass="entr" presetSubtype="0" fill="hold" nodeType="withEffect">
+                                <p:cTn id="56" presetID="10" presetClass="entr" presetSubtype="0" fill="hold" nodeType="withEffect">
                                   <p:stCondLst>
                                     <p:cond delay="0"/>
                                   </p:stCondLst>
                                   <p:childTnLst>
                                     <p:set>
                                       <p:cBhvr>
-                                        <p:cTn id="47" dur="1" fill="hold">
+                                        <p:cTn id="57" dur="1" fill="hold">
                                           <p:stCondLst>
                                             <p:cond delay="0"/>
                                           </p:stCondLst>
@@ -17716,7 +18174,7 @@
                                     </p:set>
                                     <p:animEffect transition="in" filter="fade">
                                       <p:cBhvr>
-                                        <p:cTn id="48" dur="500"/>
+                                        <p:cTn id="58" dur="500"/>
                                         <p:tgtEl>
                                           <p:spTgt spid="29"/>
                                         </p:tgtEl>
@@ -17732,26 +18190,26 @@
                     </p:cTn>
                   </p:par>
                   <p:par>
-                    <p:cTn id="49" fill="hold">
+                    <p:cTn id="59" fill="hold">
                       <p:stCondLst>
                         <p:cond delay="indefinite"/>
                       </p:stCondLst>
                       <p:childTnLst>
                         <p:par>
-                          <p:cTn id="50" fill="hold">
+                          <p:cTn id="60" fill="hold">
                             <p:stCondLst>
                               <p:cond delay="0"/>
                             </p:stCondLst>
                             <p:childTnLst>
                               <p:par>
-                                <p:cTn id="51" presetID="10" presetClass="entr" presetSubtype="0" fill="hold" nodeType="clickEffect">
+                                <p:cTn id="61" presetID="10" presetClass="entr" presetSubtype="0" fill="hold" nodeType="clickEffect">
                                   <p:stCondLst>
                                     <p:cond delay="0"/>
                                   </p:stCondLst>
                                   <p:childTnLst>
                                     <p:set>
                                       <p:cBhvr>
-                                        <p:cTn id="52" dur="1" fill="hold">
+                                        <p:cTn id="62" dur="1" fill="hold">
                                           <p:stCondLst>
                                             <p:cond delay="0"/>
                                           </p:stCondLst>
@@ -17769,7 +18227,7 @@
                                     </p:set>
                                     <p:animEffect transition="in" filter="fade">
                                       <p:cBhvr>
-                                        <p:cTn id="53" dur="500"/>
+                                        <p:cTn id="63" dur="500"/>
                                         <p:tgtEl>
                                           <p:spTgt spid="30"/>
                                         </p:tgtEl>
@@ -17785,26 +18243,79 @@
                     </p:cTn>
                   </p:par>
                   <p:par>
-                    <p:cTn id="54" fill="hold">
+                    <p:cTn id="64" fill="hold">
                       <p:stCondLst>
                         <p:cond delay="indefinite"/>
                       </p:stCondLst>
                       <p:childTnLst>
                         <p:par>
-                          <p:cTn id="55" fill="hold">
+                          <p:cTn id="65" fill="hold">
                             <p:stCondLst>
                               <p:cond delay="0"/>
                             </p:stCondLst>
                             <p:childTnLst>
                               <p:par>
-                                <p:cTn id="56" presetID="10" presetClass="entr" presetSubtype="0" fill="hold" nodeType="clickEffect">
+                                <p:cTn id="66" presetID="10" presetClass="entr" presetSubtype="0" fill="hold" nodeType="clickEffect">
                                   <p:stCondLst>
                                     <p:cond delay="0"/>
                                   </p:stCondLst>
                                   <p:childTnLst>
                                     <p:set>
                                       <p:cBhvr>
-                                        <p:cTn id="57" dur="1" fill="hold">
+                                        <p:cTn id="67" dur="1" fill="hold">
+                                          <p:stCondLst>
+                                            <p:cond delay="0"/>
+                                          </p:stCondLst>
+                                        </p:cTn>
+                                        <p:tgtEl>
+                                          <p:spTgt spid="15"/>
+                                        </p:tgtEl>
+                                        <p:attrNameLst>
+                                          <p:attrName>style.visibility</p:attrName>
+                                        </p:attrNameLst>
+                                      </p:cBhvr>
+                                      <p:to>
+                                        <p:strVal val="visible"/>
+                                      </p:to>
+                                    </p:set>
+                                    <p:animEffect transition="in" filter="fade">
+                                      <p:cBhvr>
+                                        <p:cTn id="68" dur="500"/>
+                                        <p:tgtEl>
+                                          <p:spTgt spid="15"/>
+                                        </p:tgtEl>
+                                      </p:cBhvr>
+                                    </p:animEffect>
+                                  </p:childTnLst>
+                                </p:cTn>
+                              </p:par>
+                            </p:childTnLst>
+                          </p:cTn>
+                        </p:par>
+                      </p:childTnLst>
+                    </p:cTn>
+                  </p:par>
+                  <p:par>
+                    <p:cTn id="69" fill="hold">
+                      <p:stCondLst>
+                        <p:cond delay="indefinite"/>
+                      </p:stCondLst>
+                      <p:childTnLst>
+                        <p:par>
+                          <p:cTn id="70" fill="hold">
+                            <p:stCondLst>
+                              <p:cond delay="0"/>
+                            </p:stCondLst>
+                            <p:childTnLst>
+                              <p:par>
+                                <p:cTn id="71" presetID="10" presetClass="entr" presetSubtype="0" fill="hold" nodeType="clickEffect">
+                                  <p:stCondLst>
+                                    <p:cond delay="0"/>
+                                  </p:stCondLst>
+                                  <p:childTnLst>
+                                    <p:set>
+                                      <p:cBhvr>
+                                        <p:cTn id="72" dur="1" fill="hold">
                                           <p:stCondLst>
                                             <p:cond delay="0"/>
                                           </p:stCondLst>
@@ -17822,184 +18333,9 @@
                                     </p:set>
                                     <p:animEffect transition="in" filter="fade">
                                       <p:cBhvr>
-                                        <p:cTn id="58" dur="500"/>
+                                        <p:cTn id="73" dur="500"/>
                                         <p:tgtEl>
                                           <p:spTgt spid="94"/>
-                                        </p:tgtEl>
-                                      </p:cBhvr>
-                                    </p:animEffect>
-                                  </p:childTnLst>
-                                </p:cTn>
-                              </p:par>
-                              <p:par>
-                                <p:cTn id="59" presetID="10" presetClass="entr" presetSubtype="0" fill="hold" nodeType="withEffect">
-                                  <p:stCondLst>
-                                    <p:cond delay="0"/>
-                                  </p:stCondLst>
-                                  <p:childTnLst>
-                                    <p:set>
-                                      <p:cBhvr>
-                                        <p:cTn id="60" dur="1" fill="hold">
-                                          <p:stCondLst>
-                                            <p:cond delay="0"/>
-                                          </p:stCondLst>
-                                        </p:cTn>
-                                        <p:tgtEl>
-                                          <p:spTgt spid="95"/>
-                                        </p:tgtEl>
-                                        <p:attrNameLst>
-                                          <p:attrName>style.visibility</p:attrName>
-                                        </p:attrNameLst>
-                                      </p:cBhvr>
-                                      <p:to>
-                                        <p:strVal val="visible"/>
-                                      </p:to>
-                                    </p:set>
-                                    <p:animEffect transition="in" filter="fade">
-                                      <p:cBhvr>
-                                        <p:cTn id="61" dur="500"/>
-                                        <p:tgtEl>
-                                          <p:spTgt spid="95"/>
-                                        </p:tgtEl>
-                                      </p:cBhvr>
-                                    </p:animEffect>
-                                  </p:childTnLst>
-                                </p:cTn>
-                              </p:par>
-                              <p:par>
-                                <p:cTn id="62" presetID="10" presetClass="entr" presetSubtype="0" fill="hold" nodeType="withEffect">
-                                  <p:stCondLst>
-                                    <p:cond delay="0"/>
-                                  </p:stCondLst>
-                                  <p:childTnLst>
-                                    <p:set>
-                                      <p:cBhvr>
-                                        <p:cTn id="63" dur="1" fill="hold">
-                                          <p:stCondLst>
-                                            <p:cond delay="0"/>
-                                          </p:stCondLst>
-                                        </p:cTn>
-                                        <p:tgtEl>
-                                          <p:spTgt spid="96"/>
-                                        </p:tgtEl>
-                                        <p:attrNameLst>
-                                          <p:attrName>style.visibility</p:attrName>
-                                        </p:attrNameLst>
-                                      </p:cBhvr>
-                                      <p:to>
-                                        <p:strVal val="visible"/>
-                                      </p:to>
-                                    </p:set>
-                                    <p:animEffect transition="in" filter="fade">
-                                      <p:cBhvr>
-                                        <p:cTn id="64" dur="500"/>
-                                        <p:tgtEl>
-                                          <p:spTgt spid="96"/>
-                                        </p:tgtEl>
-                                      </p:cBhvr>
-                                    </p:animEffect>
-                                  </p:childTnLst>
-                                </p:cTn>
-                              </p:par>
-                              <p:par>
-                                <p:cTn id="65" presetID="10" presetClass="entr" presetSubtype="0" fill="hold" nodeType="withEffect">
-                                  <p:stCondLst>
-                                    <p:cond delay="0"/>
-                                  </p:stCondLst>
-                                  <p:childTnLst>
-                                    <p:set>
-                                      <p:cBhvr>
-                                        <p:cTn id="66" dur="1" fill="hold">
-                                          <p:stCondLst>
-                                            <p:cond delay="0"/>
-                                          </p:stCondLst>
-                                        </p:cTn>
-                                        <p:tgtEl>
-                                          <p:spTgt spid="97"/>
-                                        </p:tgtEl>
-                                        <p:attrNameLst>
-                                          <p:attrName>style.visibility</p:attrName>
-                                        </p:attrNameLst>
-                                      </p:cBhvr>
-                                      <p:to>
-                                        <p:strVal val="visible"/>
-                                      </p:to>
-                                    </p:set>
-                                    <p:animEffect transition="in" filter="fade">
-                                      <p:cBhvr>
-                                        <p:cTn id="67" dur="500"/>
-                                        <p:tgtEl>
-                                          <p:spTgt spid="97"/>
-                                        </p:tgtEl>
-                                      </p:cBhvr>
-                                    </p:animEffect>
-                                  </p:childTnLst>
-                                </p:cTn>
-                              </p:par>
-                              <p:par>
-                                <p:cTn id="68" presetID="10" presetClass="entr" presetSubtype="0" fill="hold" nodeType="withEffect">
-                                  <p:stCondLst>
-                                    <p:cond delay="0"/>
-                                  </p:stCondLst>
-                                  <p:childTnLst>
-                                    <p:set>
-                                      <p:cBhvr>
-                                        <p:cTn id="69" dur="1" fill="hold">
-                                          <p:stCondLst>
-                                            <p:cond delay="0"/>
-                                          </p:stCondLst>
-                                        </p:cTn>
-                                        <p:tgtEl>
-                                          <p:spTgt spid="98"/>
-                                        </p:tgtEl>
-                                        <p:attrNameLst>
-                                          <p:attrName>style.visibility</p:attrName>
-                                        </p:attrNameLst>
-                                      </p:cBhvr>
-                                      <p:to>
-                                        <p:strVal val="visible"/>
-                                      </p:to>
-                                    </p:set>
-                                    <p:animEffect transition="in" filter="fade">
-                                      <p:cBhvr>
-                                        <p:cTn id="70" dur="500"/>
-                                        <p:tgtEl>
-                                          <p:spTgt spid="98"/>
-                                        </p:tgtEl>
-                                      </p:cBhvr>
-                                    </p:animEffect>
-                                  </p:childTnLst>
-                                </p:cTn>
-                              </p:par>
-                              <p:par>
-                                <p:cTn id="71" presetID="10" presetClass="entr" presetSubtype="0" fill="hold" nodeType="withEffect">
-                                  <p:stCondLst>
-                                    <p:cond delay="0"/>
-                                  </p:stCondLst>
-                                  <p:childTnLst>
-                                    <p:set>
-                                      <p:cBhvr>
-                                        <p:cTn id="72" dur="1" fill="hold">
-                                          <p:stCondLst>
-                                            <p:cond delay="0"/>
-                                          </p:stCondLst>
-                                        </p:cTn>
-                                        <p:tgtEl>
-                                          <p:spTgt spid="99"/>
-                                        </p:tgtEl>
-                                        <p:attrNameLst>
-                                          <p:attrName>style.visibility</p:attrName>
-                                        </p:attrNameLst>
-                                      </p:cBhvr>
-                                      <p:to>
-                                        <p:strVal val="visible"/>
-                                      </p:to>
-                                    </p:set>
-                                    <p:animEffect transition="in" filter="fade">
-                                      <p:cBhvr>
-                                        <p:cTn id="73" dur="500"/>
-                                        <p:tgtEl>
-                                          <p:spTgt spid="99"/>
                                         </p:tgtEl>
                                       </p:cBhvr>
                                     </p:animEffect>
@@ -18020,7 +18356,7 @@
                                           </p:stCondLst>
                                         </p:cTn>
                                         <p:tgtEl>
-                                          <p:spTgt spid="100"/>
+                                          <p:spTgt spid="95"/>
                                         </p:tgtEl>
                                         <p:attrNameLst>
                                           <p:attrName>style.visibility</p:attrName>
@@ -18034,7 +18370,7 @@
                                       <p:cBhvr>
                                         <p:cTn id="76" dur="500"/>
                                         <p:tgtEl>
-                                          <p:spTgt spid="100"/>
+                                          <p:spTgt spid="95"/>
                                         </p:tgtEl>
                                       </p:cBhvr>
                                     </p:animEffect>
@@ -18055,7 +18391,7 @@
                                           </p:stCondLst>
                                         </p:cTn>
                                         <p:tgtEl>
-                                          <p:spTgt spid="101"/>
+                                          <p:spTgt spid="96"/>
                                         </p:tgtEl>
                                         <p:attrNameLst>
                                           <p:attrName>style.visibility</p:attrName>
@@ -18069,7 +18405,7 @@
                                       <p:cBhvr>
                                         <p:cTn id="79" dur="500"/>
                                         <p:tgtEl>
-                                          <p:spTgt spid="101"/>
+                                          <p:spTgt spid="96"/>
                                         </p:tgtEl>
                                       </p:cBhvr>
                                     </p:animEffect>
@@ -18090,7 +18426,7 @@
                                           </p:stCondLst>
                                         </p:cTn>
                                         <p:tgtEl>
-                                          <p:spTgt spid="102"/>
+                                          <p:spTgt spid="97"/>
                                         </p:tgtEl>
                                         <p:attrNameLst>
                                           <p:attrName>style.visibility</p:attrName>
@@ -18104,7 +18440,7 @@
                                       <p:cBhvr>
                                         <p:cTn id="82" dur="500"/>
                                         <p:tgtEl>
-                                          <p:spTgt spid="102"/>
+                                          <p:spTgt spid="97"/>
                                         </p:tgtEl>
                                       </p:cBhvr>
                                     </p:animEffect>
@@ -18125,7 +18461,7 @@
                                           </p:stCondLst>
                                         </p:cTn>
                                         <p:tgtEl>
-                                          <p:spTgt spid="103"/>
+                                          <p:spTgt spid="98"/>
                                         </p:tgtEl>
                                         <p:attrNameLst>
                                           <p:attrName>style.visibility</p:attrName>
@@ -18139,7 +18475,7 @@
                                       <p:cBhvr>
                                         <p:cTn id="85" dur="500"/>
                                         <p:tgtEl>
-                                          <p:spTgt spid="103"/>
+                                          <p:spTgt spid="98"/>
                                         </p:tgtEl>
                                       </p:cBhvr>
                                     </p:animEffect>
@@ -18160,7 +18496,7 @@
                                           </p:stCondLst>
                                         </p:cTn>
                                         <p:tgtEl>
-                                          <p:spTgt spid="104"/>
+                                          <p:spTgt spid="99"/>
                                         </p:tgtEl>
                                         <p:attrNameLst>
                                           <p:attrName>style.visibility</p:attrName>
@@ -18174,46 +18510,28 @@
                                       <p:cBhvr>
                                         <p:cTn id="88" dur="500"/>
                                         <p:tgtEl>
-                                          <p:spTgt spid="104"/>
+                                          <p:spTgt spid="99"/>
                                         </p:tgtEl>
                                       </p:cBhvr>
                                     </p:animEffect>
                                   </p:childTnLst>
                                 </p:cTn>
                               </p:par>
-                            </p:childTnLst>
-                          </p:cTn>
-                        </p:par>
-                      </p:childTnLst>
-                    </p:cTn>
-                  </p:par>
-                  <p:par>
-                    <p:cTn id="89" fill="hold">
-                      <p:stCondLst>
-                        <p:cond delay="indefinite"/>
-                      </p:stCondLst>
-                      <p:childTnLst>
-                        <p:par>
-                          <p:cTn id="90" fill="hold">
-                            <p:stCondLst>
-                              <p:cond delay="0"/>
-                            </p:stCondLst>
-                            <p:childTnLst>
                               <p:par>
-                                <p:cTn id="91" presetID="10" presetClass="entr" presetSubtype="0" fill="hold" nodeType="clickEffect">
+                                <p:cTn id="89" presetID="10" presetClass="entr" presetSubtype="0" fill="hold" nodeType="withEffect">
                                   <p:stCondLst>
                                     <p:cond delay="0"/>
                                   </p:stCondLst>
                                   <p:childTnLst>
                                     <p:set>
                                       <p:cBhvr>
-                                        <p:cTn id="92" dur="1" fill="hold">
+                                        <p:cTn id="90" dur="1" fill="hold">
                                           <p:stCondLst>
                                             <p:cond delay="0"/>
                                           </p:stCondLst>
                                         </p:cTn>
                                         <p:tgtEl>
-                                          <p:spTgt spid="15"/>
+                                          <p:spTgt spid="100"/>
                                         </p:tgtEl>
                                         <p:attrNameLst>
                                           <p:attrName>style.visibility</p:attrName>
@@ -18225,9 +18543,149 @@
                                     </p:set>
                                     <p:animEffect transition="in" filter="fade">
                                       <p:cBhvr>
-                                        <p:cTn id="93" dur="500"/>
+                                        <p:cTn id="91" dur="500"/>
                                         <p:tgtEl>
-                                          <p:spTgt spid="15"/>
+                                          <p:spTgt spid="100"/>
+                                        </p:tgtEl>
+                                      </p:cBhvr>
+                                    </p:animEffect>
+                                  </p:childTnLst>
+                                </p:cTn>
+                              </p:par>
+                              <p:par>
+                                <p:cTn id="92" presetID="10" presetClass="entr" presetSubtype="0" fill="hold" nodeType="withEffect">
+                                  <p:stCondLst>
+                                    <p:cond delay="0"/>
+                                  </p:stCondLst>
+                                  <p:childTnLst>
+                                    <p:set>
+                                      <p:cBhvr>
+                                        <p:cTn id="93" dur="1" fill="hold">
+                                          <p:stCondLst>
+                                            <p:cond delay="0"/>
+                                          </p:stCondLst>
+                                        </p:cTn>
+                                        <p:tgtEl>
+                                          <p:spTgt spid="101"/>
+                                        </p:tgtEl>
+                                        <p:attrNameLst>
+                                          <p:attrName>style.visibility</p:attrName>
+                                        </p:attrNameLst>
+                                      </p:cBhvr>
+                                      <p:to>
+                                        <p:strVal val="visible"/>
+                                      </p:to>
+                                    </p:set>
+                                    <p:animEffect transition="in" filter="fade">
+                                      <p:cBhvr>
+                                        <p:cTn id="94" dur="500"/>
+                                        <p:tgtEl>
+                                          <p:spTgt spid="101"/>
+                                        </p:tgtEl>
+                                      </p:cBhvr>
+                                    </p:animEffect>
+                                  </p:childTnLst>
+                                </p:cTn>
+                              </p:par>
+                              <p:par>
+                                <p:cTn id="95" presetID="10" presetClass="entr" presetSubtype="0" fill="hold" nodeType="withEffect">
+                                  <p:stCondLst>
+                                    <p:cond delay="0"/>
+                                  </p:stCondLst>
+                                  <p:childTnLst>
+                                    <p:set>
+                                      <p:cBhvr>
+                                        <p:cTn id="96" dur="1" fill="hold">
+                                          <p:stCondLst>
+                                            <p:cond delay="0"/>
+                                          </p:stCondLst>
+                                        </p:cTn>
+                                        <p:tgtEl>
+                                          <p:spTgt spid="102"/>
+                                        </p:tgtEl>
+                                        <p:attrNameLst>
+                                          <p:attrName>style.visibility</p:attrName>
+                                        </p:attrNameLst>
+                                      </p:cBhvr>
+                                      <p:to>
+                                        <p:strVal val="visible"/>
+                                      </p:to>
+                                    </p:set>
+                                    <p:animEffect transition="in" filter="fade">
+                                      <p:cBhvr>
+                                        <p:cTn id="97" dur="500"/>
+                                        <p:tgtEl>
+                                          <p:spTgt spid="102"/>
+                                        </p:tgtEl>
+                                      </p:cBhvr>
+                                    </p:animEffect>
+                                  </p:childTnLst>
+                                </p:cTn>
+                              </p:par>
+                              <p:par>
+                                <p:cTn id="98" presetID="10" presetClass="entr" presetSubtype="0" fill="hold" nodeType="withEffect">
+                                  <p:stCondLst>
+                                    <p:cond delay="0"/>
+                                  </p:stCondLst>
+                                  <p:childTnLst>
+                                    <p:set>
+                                      <p:cBhvr>
+                                        <p:cTn id="99" dur="1" fill="hold">
+                                          <p:stCondLst>
+                                            <p:cond delay="0"/>
+                                          </p:stCondLst>
+                                        </p:cTn>
+                                        <p:tgtEl>
+                                          <p:spTgt spid="103"/>
+                                        </p:tgtEl>
+                                        <p:attrNameLst>
+                                          <p:attrName>style.visibility</p:attrName>
+                                        </p:attrNameLst>
+                                      </p:cBhvr>
+                                      <p:to>
+                                        <p:strVal val="visible"/>
+                                      </p:to>
+                                    </p:set>
+                                    <p:animEffect transition="in" filter="fade">
+                                      <p:cBhvr>
+                                        <p:cTn id="100" dur="500"/>
+                                        <p:tgtEl>
+                                          <p:spTgt spid="103"/>
+                                        </p:tgtEl>
+                                      </p:cBhvr>
+                                    </p:animEffect>
+                                  </p:childTnLst>
+                                </p:cTn>
+                              </p:par>
+                              <p:par>
+                                <p:cTn id="101" presetID="10" presetClass="entr" presetSubtype="0" fill="hold" nodeType="withEffect">
+                                  <p:stCondLst>
+                                    <p:cond delay="0"/>
+                                  </p:stCondLst>
+                                  <p:childTnLst>
+                                    <p:set>
+                                      <p:cBhvr>
+                                        <p:cTn id="102" dur="1" fill="hold">
+                                          <p:stCondLst>
+                                            <p:cond delay="0"/>
+                                          </p:stCondLst>
+                                        </p:cTn>
+                                        <p:tgtEl>
+                                          <p:spTgt spid="104"/>
+                                        </p:tgtEl>
+                                        <p:attrNameLst>
+                                          <p:attrName>style.visibility</p:attrName>
+                                        </p:attrNameLst>
+                                      </p:cBhvr>
+                                      <p:to>
+                                        <p:strVal val="visible"/>
+                                      </p:to>
+                                    </p:set>
+                                    <p:animEffect transition="in" filter="fade">
+                                      <p:cBhvr>
+                                        <p:cTn id="103" dur="500"/>
+                                        <p:tgtEl>
+                                          <p:spTgt spid="104"/>
                                         </p:tgtEl>
                                       </p:cBhvr>
                                     </p:animEffect>
@@ -19028,7 +19486,7 @@
         <p:spPr>
           <a:xfrm>
             <a:off x="274320" y="2651760"/>
-            <a:ext cx="1316736" cy="1005840"/>
+            <a:ext cx="1609344" cy="1005840"/>
           </a:xfrm>
           <a:prstGeom prst="rect">
             <a:avLst/>
@@ -19068,7 +19526,7 @@
                   <a:srgbClr val="5C4826"/>
                 </a:solidFill>
               </a:rPr>
-              <a:t>PROCEED</a:t>
+              <a:t>DELIVER</a:t>
             </a:r>
           </a:p>
         </p:txBody>
@@ -19081,8 +19539,8 @@
         </p:nvSpPr>
         <p:spPr>
           <a:xfrm>
-            <a:off x="1730044" y="2651760"/>
-            <a:ext cx="1316736" cy="1005840"/>
+            <a:off x="2020824" y="2651760"/>
+            <a:ext cx="1609344" cy="1005840"/>
           </a:xfrm>
           <a:prstGeom prst="rect">
             <a:avLst/>
@@ -19122,7 +19580,7 @@
                   <a:srgbClr val="5C4826"/>
                 </a:solidFill>
               </a:rPr>
-              <a:t>CHOOSE</a:t>
+              <a:t>GATHER</a:t>
             </a:r>
           </a:p>
           <a:p>
@@ -19133,7 +19591,18 @@
                   <a:srgbClr val="5C4826"/>
                 </a:solidFill>
               </a:rPr>
-              <a:t>ANOTHER</a:t>
+              <a:t>MORE</a:t>
+            </a:r>
+          </a:p>
+          <a:p>
+            <a:pPr algn="ctr"/>
+            <a:r>
+              <a:rPr sz="2000" b="1" i="0">
+                <a:solidFill>
+                  <a:srgbClr val="5C4826"/>
+                </a:solidFill>
+              </a:rPr>
+              <a:t>EVIDENCE</a:t>
             </a:r>
           </a:p>
         </p:txBody>
@@ -19146,8 +19615,8 @@
         </p:nvSpPr>
         <p:spPr>
           <a:xfrm>
-            <a:off x="3185768" y="2651760"/>
-            <a:ext cx="1316736" cy="1005840"/>
+            <a:off x="3767328" y="2651760"/>
+            <a:ext cx="1609344" cy="1005840"/>
           </a:xfrm>
           <a:prstGeom prst="rect">
             <a:avLst/>
@@ -19187,18 +19656,7 @@
                   <a:srgbClr val="5C4826"/>
                 </a:solidFill>
               </a:rPr>
-              <a:t>GATHER</a:t>
-            </a:r>
-          </a:p>
-          <a:p>
-            <a:pPr algn="ctr"/>
-            <a:r>
-              <a:rPr sz="2000" b="1" i="0">
-                <a:solidFill>
-                  <a:srgbClr val="5C4826"/>
-                </a:solidFill>
-              </a:rPr>
-              <a:t>EVIDENCE</a:t>
+              <a:t>CHANGE</a:t>
             </a:r>
           </a:p>
         </p:txBody>
@@ -19211,8 +19669,8 @@
         </p:nvSpPr>
         <p:spPr>
           <a:xfrm>
-            <a:off x="4641492" y="2651760"/>
-            <a:ext cx="1316736" cy="1005840"/>
+            <a:off x="5513832" y="2651760"/>
+            <a:ext cx="1609344" cy="1005840"/>
           </a:xfrm>
           <a:prstGeom prst="rect">
             <a:avLst/>
@@ -19252,7 +19710,7 @@
                   <a:srgbClr val="5C4826"/>
                 </a:solidFill>
               </a:rPr>
-              <a:t>CHANGE</a:t>
+              <a:t>REVISIT</a:t>
             </a:r>
           </a:p>
           <a:p>
@@ -19263,18 +19721,7 @@
                   <a:srgbClr val="5C4826"/>
                 </a:solidFill>
               </a:rPr>
-              <a:t>THE</a:t>
-            </a:r>
-          </a:p>
-          <a:p>
-            <a:pPr algn="ctr"/>
-            <a:r>
-              <a:rPr sz="2000" b="1" i="0">
-                <a:solidFill>
-                  <a:srgbClr val="5C4826"/>
-                </a:solidFill>
-              </a:rPr>
-              <a:t>SYSTEM</a:t>
+              <a:t>UPSTREAM</a:t>
             </a:r>
           </a:p>
         </p:txBody>
@@ -19287,8 +19734,8 @@
         </p:nvSpPr>
         <p:spPr>
           <a:xfrm>
-            <a:off x="6097216" y="2651760"/>
-            <a:ext cx="1316736" cy="1005840"/>
+            <a:off x="7260336" y="2651760"/>
+            <a:ext cx="1609344" cy="1005840"/>
           </a:xfrm>
           <a:prstGeom prst="rect">
             <a:avLst/>
@@ -19328,83 +19775,7 @@
                   <a:srgbClr val="5C4826"/>
                 </a:solidFill>
               </a:rPr>
-              <a:t>REVISE</a:t>
-            </a:r>
-          </a:p>
-          <a:p>
-            <a:pPr algn="ctr"/>
-            <a:r>
-              <a:rPr sz="2000" b="1" i="0">
-                <a:solidFill>
-                  <a:srgbClr val="5C4826"/>
-                </a:solidFill>
-              </a:rPr>
-              <a:t>THE</a:t>
-            </a:r>
-          </a:p>
-          <a:p>
-            <a:pPr algn="ctr"/>
-            <a:r>
-              <a:rPr sz="2000" b="1" i="0">
-                <a:solidFill>
-                  <a:srgbClr val="5C4826"/>
-                </a:solidFill>
-              </a:rPr>
-              <a:t>MODEL</a:t>
-            </a:r>
-          </a:p>
-        </p:txBody>
-      </p:sp>
-      <p:sp>
-        <p:nvSpPr>
-          <p:cNvPr id="114" name="A5"/>
-          <p:cNvSpPr/>
-          <p:nvPr/>
-        </p:nvSpPr>
-        <p:spPr>
-          <a:xfrm>
-            <a:off x="7552940" y="2651760"/>
-            <a:ext cx="1316736" cy="1005840"/>
-          </a:xfrm>
-          <a:prstGeom prst="rect">
-            <a:avLst/>
-          </a:prstGeom>
-          <a:solidFill>
-            <a:srgbClr val="F5F1E8"/>
-          </a:solidFill>
-          <a:ln w="12700">
-            <a:solidFill>
-              <a:srgbClr val="C9B991"/>
-            </a:solidFill>
-          </a:ln>
-          <a:effectLst/>
-        </p:spPr>
-        <p:style>
-          <a:lnRef idx="1">
-            <a:schemeClr val="accent1"/>
-          </a:lnRef>
-          <a:fillRef idx="3">
-            <a:schemeClr val="accent1"/>
-          </a:fillRef>
-          <a:effectRef idx="2">
-            <a:schemeClr val="accent1"/>
-          </a:effectRef>
-          <a:fontRef idx="minor">
-            <a:schemeClr val="lt1"/>
-          </a:fontRef>
-        </p:style>
-        <p:txBody>
-          <a:bodyPr wrap="square" lIns="27432" tIns="22860" rIns="27432" bIns="22860" rtlCol="0" anchor="ctr"/>
-          <a:lstStyle/>
-          <a:p>
-            <a:pPr algn="ctr"/>
-            <a:r>
-              <a:rPr sz="2000" b="1" i="0">
-                <a:solidFill>
-                  <a:srgbClr val="5C4826"/>
-                </a:solidFill>
-              </a:rPr>
-              <a:t>DECLINE</a:t>
+              <a:t>REFUSE</a:t>
             </a:r>
           </a:p>
         </p:txBody>
@@ -21336,6 +21707,2557 @@
 </p:sld>
 </file>
 
+<file path=ppt/slides/slide30.xml><?xml version="1.0" encoding="utf-8"?>
+<p:sld xmlns:a="http://schemas.openxmlformats.org/drawingml/2006/main" xmlns:r="http://schemas.openxmlformats.org/officeDocument/2006/relationships" xmlns:p="http://schemas.openxmlformats.org/presentationml/2006/main">
+  <p:cSld>
+    <p:spTree>
+      <p:nvGrpSpPr>
+        <p:cNvPr id="1" name=""/>
+        <p:cNvGrpSpPr/>
+        <p:nvPr/>
+      </p:nvGrpSpPr>
+      <p:grpSpPr>
+        <a:xfrm>
+          <a:off x="0" y="0"/>
+          <a:ext cx="0" cy="0"/>
+          <a:chOff x="0" y="0"/>
+          <a:chExt cx="0" cy="0"/>
+        </a:xfrm>
+      </p:grpSpPr>
+      <p:sp>
+        <p:nvSpPr>
+          <p:cNvPr id="2" name="Title 1"/>
+          <p:cNvSpPr>
+            <a:spLocks noGrp="1"/>
+          </p:cNvSpPr>
+          <p:nvPr>
+            <p:ph type="title"/>
+          </p:nvPr>
+        </p:nvSpPr>
+        <p:spPr>
+          <a:xfrm>
+            <a:off x="277148" y="118428"/>
+            <a:ext cx="8590000" cy="638175"/>
+          </a:xfrm>
+        </p:spPr>
+        <p:txBody>
+          <a:bodyPr>
+            <a:normAutofit fontScale="90000"/>
+          </a:bodyPr>
+          <a:lstStyle/>
+          <a:p>
+            <a:pPr>
+              <a:buNone/>
+              <a:defRPr b="0"/>
+            </a:pPr>
+            <a:r>
+              <a:rPr lang="en-US" sz="2400" b="0" i="0" dirty="0">
+                <a:solidFill>
+                  <a:srgbClr val="000000"/>
+                </a:solidFill>
+              </a:rPr>
+              <a:t>What do we need to know?</a:t>
+            </a:r>
+          </a:p>
+        </p:txBody>
+      </p:sp>
+      <p:sp>
+        <p:nvSpPr>
+          <p:cNvPr id="3" name="Slide Number Placeholder 3"/>
+          <p:cNvSpPr>
+            <a:spLocks noGrp="1"/>
+          </p:cNvSpPr>
+          <p:nvPr>
+            <p:ph type="sldNum" sz="quarter" idx="4"/>
+          </p:nvPr>
+        </p:nvSpPr>
+        <p:spPr/>
+        <p:txBody>
+          <a:bodyPr/>
+          <a:lstStyle/>
+          <a:p>
+            <a:fld id="{B7EB45DA-9A0D-DC49-8E02-F30A5DDC21C3}" type="slidenum">
+              <a:rPr lang="en-US" smtClean="0"/>
+              <a:t>10</a:t>
+            </a:fld>
+            <a:endParaRPr lang="en-US"/>
+          </a:p>
+        </p:txBody>
+      </p:sp>
+      <p:sp>
+        <p:nvSpPr>
+          <p:cNvPr id="100" name="Lead"/>
+          <p:cNvSpPr txBox="1"/>
+          <p:nvPr/>
+        </p:nvSpPr>
+        <p:spPr>
+          <a:xfrm>
+            <a:off x="274320" y="850392"/>
+            <a:ext cx="8595360" cy="411480"/>
+          </a:xfrm>
+          <a:prstGeom prst="rect">
+            <a:avLst/>
+          </a:prstGeom>
+          <a:noFill/>
+          <a:ln>
+            <a:noFill/>
+          </a:ln>
+        </p:spPr>
+        <p:txBody>
+          <a:bodyPr wrap="square" lIns="0" tIns="45720" rIns="0" bIns="45720" anchor="ctr"/>
+          <a:lstStyle/>
+          <a:p>
+            <a:pPr algn="ctr">
+              <a:buNone/>
+            </a:pPr>
+            <a:r>
+              <a:rPr lang="en-US" sz="2000" b="0" i="0" dirty="0">
+                <a:solidFill>
+                  <a:srgbClr val="5C4826"/>
+                </a:solidFill>
+              </a:rPr>
+              <a:t xml:space="preserve">To make an engineering decision, identify:</a:t>
+            </a:r>
+          </a:p>
+        </p:txBody>
+      </p:sp>
+      <p:sp>
+        <p:nvSpPr>
+          <p:cNvPr id="110" name="R0"/>
+          <p:cNvSpPr/>
+          <p:nvPr/>
+        </p:nvSpPr>
+        <p:spPr>
+          <a:xfrm>
+            <a:off x="274320" y="1417320"/>
+            <a:ext cx="8595360" cy="731520"/>
+          </a:xfrm>
+          <a:prstGeom prst="rect">
+            <a:avLst/>
+          </a:prstGeom>
+          <a:solidFill>
+            <a:srgbClr val="F5F1E8"/>
+          </a:solidFill>
+          <a:ln w="12700">
+            <a:solidFill>
+              <a:srgbClr val="C9B991"/>
+            </a:solidFill>
+          </a:ln>
+        </p:spPr>
+        <p:txBody>
+          <a:bodyPr wrap="square" lIns="91440" tIns="45720" rIns="45720" bIns="45720" anchor="ctr"/>
+          <a:lstStyle/>
+          <a:p>
+            <a:pPr marL="457200" indent="-457200" algn="l">
+              <a:buNone/>
+            </a:pPr>
+            <a:r>
+              <a:rPr lang="en-US" sz="2000" b="1" i="0" dirty="0">
+                <a:solidFill>
+                  <a:srgbClr val="8E6F3E"/>
+                </a:solidFill>
+              </a:rPr>
+              <a:t xml:space="preserve">1   </a:t>
+            </a:r>
+            <a:r>
+              <a:rPr lang="en-US" sz="2000" b="1" i="0" dirty="0">
+                <a:solidFill>
+                  <a:srgbClr val="5C4826"/>
+                </a:solidFill>
+              </a:rPr>
+              <a:t xml:space="preserve">The decision</a:t>
+            </a:r>
+            <a:r>
+              <a:rPr lang="en-US" sz="2000" b="0" i="0" dirty="0">
+                <a:solidFill>
+                  <a:srgbClr val="9A9A9A"/>
+                </a:solidFill>
+              </a:rPr>
+              <a:t xml:space="preserve"> — </a:t>
+            </a:r>
+            <a:r>
+              <a:rPr lang="en-US" sz="2000" b="0" i="0" dirty="0">
+                <a:solidFill>
+                  <a:srgbClr val="5C4826"/>
+                </a:solidFill>
+              </a:rPr>
+              <a:t xml:space="preserve">what are we choosing?</a:t>
+            </a:r>
+          </a:p>
+        </p:txBody>
+      </p:sp>
+      <p:sp>
+        <p:nvSpPr>
+          <p:cNvPr id="111" name="R1"/>
+          <p:cNvSpPr/>
+          <p:nvPr/>
+        </p:nvSpPr>
+        <p:spPr>
+          <a:xfrm>
+            <a:off x="274320" y="2240280"/>
+            <a:ext cx="8595360" cy="731520"/>
+          </a:xfrm>
+          <a:prstGeom prst="rect">
+            <a:avLst/>
+          </a:prstGeom>
+          <a:solidFill>
+            <a:srgbClr val="F5F1E8"/>
+          </a:solidFill>
+          <a:ln w="12700">
+            <a:solidFill>
+              <a:srgbClr val="C9B991"/>
+            </a:solidFill>
+          </a:ln>
+        </p:spPr>
+        <p:txBody>
+          <a:bodyPr wrap="square" lIns="91440" tIns="45720" rIns="45720" bIns="45720" anchor="ctr"/>
+          <a:lstStyle/>
+          <a:p>
+            <a:pPr marL="457200" indent="-457200" algn="l">
+              <a:buNone/>
+            </a:pPr>
+            <a:r>
+              <a:rPr lang="en-US" sz="2000" b="1" i="0" dirty="0">
+                <a:solidFill>
+                  <a:srgbClr val="8E6F3E"/>
+                </a:solidFill>
+              </a:rPr>
+              <a:t xml:space="preserve">2   </a:t>
+            </a:r>
+            <a:r>
+              <a:rPr lang="en-US" sz="2000" b="1" i="0" dirty="0">
+                <a:solidFill>
+                  <a:srgbClr val="5C4826"/>
+                </a:solidFill>
+              </a:rPr>
+              <a:t xml:space="preserve">The model</a:t>
+            </a:r>
+            <a:r>
+              <a:rPr lang="en-US" sz="2000" b="0" i="0" dirty="0">
+                <a:solidFill>
+                  <a:srgbClr val="9A9A9A"/>
+                </a:solidFill>
+              </a:rPr>
+              <a:t xml:space="preserve"> — </a:t>
+            </a:r>
+            <a:r>
+              <a:rPr lang="en-US" sz="2000" b="0" i="0" dirty="0">
+                <a:solidFill>
+                  <a:srgbClr val="5C4826"/>
+                </a:solidFill>
+              </a:rPr>
+              <a:t xml:space="preserve">what relationships do we believe matter?</a:t>
+            </a:r>
+          </a:p>
+        </p:txBody>
+      </p:sp>
+      <p:sp>
+        <p:nvSpPr>
+          <p:cNvPr id="112" name="R2"/>
+          <p:cNvSpPr/>
+          <p:nvPr/>
+        </p:nvSpPr>
+        <p:spPr>
+          <a:xfrm>
+            <a:off x="274320" y="3063240"/>
+            <a:ext cx="8595360" cy="731520"/>
+          </a:xfrm>
+          <a:prstGeom prst="rect">
+            <a:avLst/>
+          </a:prstGeom>
+          <a:solidFill>
+            <a:srgbClr val="F5F1E8"/>
+          </a:solidFill>
+          <a:ln w="12700">
+            <a:solidFill>
+              <a:srgbClr val="C9B991"/>
+            </a:solidFill>
+          </a:ln>
+        </p:spPr>
+        <p:txBody>
+          <a:bodyPr wrap="square" lIns="91440" tIns="45720" rIns="45720" bIns="45720" anchor="ctr"/>
+          <a:lstStyle/>
+          <a:p>
+            <a:pPr marL="457200" indent="-457200" algn="l">
+              <a:buNone/>
+            </a:pPr>
+            <a:r>
+              <a:rPr lang="en-US" sz="2000" b="1" i="0" dirty="0">
+                <a:solidFill>
+                  <a:srgbClr val="8E6F3E"/>
+                </a:solidFill>
+              </a:rPr>
+              <a:t xml:space="preserve">3   </a:t>
+            </a:r>
+            <a:r>
+              <a:rPr lang="en-US" sz="2000" b="1" i="0" dirty="0">
+                <a:solidFill>
+                  <a:srgbClr val="5C4826"/>
+                </a:solidFill>
+              </a:rPr>
+              <a:t xml:space="preserve">The consequential properties</a:t>
+            </a:r>
+            <a:r>
+              <a:rPr lang="en-US" sz="2000" b="0" i="0" dirty="0">
+                <a:solidFill>
+                  <a:srgbClr val="9A9A9A"/>
+                </a:solidFill>
+              </a:rPr>
+              <a:t xml:space="preserve"> — </a:t>
+            </a:r>
+            <a:r>
+              <a:rPr lang="en-US" sz="2000" b="0" i="0" dirty="0">
+                <a:solidFill>
+                  <a:srgbClr val="5C4826"/>
+                </a:solidFill>
+              </a:rPr>
+              <a:t xml:space="preserve">what differences among alternatives matter?</a:t>
+            </a:r>
+          </a:p>
+        </p:txBody>
+      </p:sp>
+      <p:sp>
+        <p:nvSpPr>
+          <p:cNvPr id="113" name="R3"/>
+          <p:cNvSpPr/>
+          <p:nvPr/>
+        </p:nvSpPr>
+        <p:spPr>
+          <a:xfrm>
+            <a:off x="274320" y="3886200"/>
+            <a:ext cx="8595360" cy="731520"/>
+          </a:xfrm>
+          <a:prstGeom prst="rect">
+            <a:avLst/>
+          </a:prstGeom>
+          <a:solidFill>
+            <a:srgbClr val="F5F1E8"/>
+          </a:solidFill>
+          <a:ln w="12700">
+            <a:solidFill>
+              <a:srgbClr val="C9B991"/>
+            </a:solidFill>
+          </a:ln>
+        </p:spPr>
+        <p:txBody>
+          <a:bodyPr wrap="square" lIns="91440" tIns="45720" rIns="45720" bIns="45720" anchor="ctr"/>
+          <a:lstStyle/>
+          <a:p>
+            <a:pPr marL="457200" indent="-457200" algn="l">
+              <a:buNone/>
+            </a:pPr>
+            <a:r>
+              <a:rPr lang="en-US" sz="2000" b="1" i="0" dirty="0">
+                <a:solidFill>
+                  <a:srgbClr val="8E6F3E"/>
+                </a:solidFill>
+              </a:rPr>
+              <a:t xml:space="preserve">4   </a:t>
+            </a:r>
+            <a:r>
+              <a:rPr lang="en-US" sz="2000" b="1" i="0" dirty="0">
+                <a:solidFill>
+                  <a:srgbClr val="5C4826"/>
+                </a:solidFill>
+              </a:rPr>
+              <a:t xml:space="preserve">The uncertainty</a:t>
+            </a:r>
+            <a:r>
+              <a:rPr lang="en-US" sz="2000" b="0" i="0" dirty="0">
+                <a:solidFill>
+                  <a:srgbClr val="9A9A9A"/>
+                </a:solidFill>
+              </a:rPr>
+              <a:t xml:space="preserve"> — </a:t>
+            </a:r>
+            <a:r>
+              <a:rPr lang="en-US" sz="2000" b="0" i="0" dirty="0">
+                <a:solidFill>
+                  <a:srgbClr val="5C4826"/>
+                </a:solidFill>
+              </a:rPr>
+              <a:t xml:space="preserve">what do we not yet know that could change the decision?</a:t>
+            </a:r>
+          </a:p>
+        </p:txBody>
+      </p:sp>
+      <p:sp>
+        <p:nvSpPr>
+          <p:cNvPr id="114" name="R4"/>
+          <p:cNvSpPr/>
+          <p:nvPr/>
+        </p:nvSpPr>
+        <p:spPr>
+          <a:xfrm>
+            <a:off x="274320" y="4709160"/>
+            <a:ext cx="8595360" cy="731520"/>
+          </a:xfrm>
+          <a:prstGeom prst="rect">
+            <a:avLst/>
+          </a:prstGeom>
+          <a:solidFill>
+            <a:srgbClr val="F5F1E8"/>
+          </a:solidFill>
+          <a:ln w="12700">
+            <a:solidFill>
+              <a:srgbClr val="C9B991"/>
+            </a:solidFill>
+          </a:ln>
+        </p:spPr>
+        <p:txBody>
+          <a:bodyPr wrap="square" lIns="91440" tIns="45720" rIns="45720" bIns="45720" anchor="ctr"/>
+          <a:lstStyle/>
+          <a:p>
+            <a:pPr marL="457200" indent="-457200" algn="l">
+              <a:buNone/>
+            </a:pPr>
+            <a:r>
+              <a:rPr lang="en-US" sz="2000" b="1" i="0" dirty="0">
+                <a:solidFill>
+                  <a:srgbClr val="8E6F3E"/>
+                </a:solidFill>
+              </a:rPr>
+              <a:t xml:space="preserve">5   </a:t>
+            </a:r>
+            <a:r>
+              <a:rPr lang="en-US" sz="2000" b="1" i="0" dirty="0">
+                <a:solidFill>
+                  <a:srgbClr val="5C4826"/>
+                </a:solidFill>
+              </a:rPr>
+              <a:t xml:space="preserve">The evidence needed</a:t>
+            </a:r>
+            <a:r>
+              <a:rPr lang="en-US" sz="2000" b="0" i="0" dirty="0">
+                <a:solidFill>
+                  <a:srgbClr val="9A9A9A"/>
+                </a:solidFill>
+              </a:rPr>
+              <a:t xml:space="preserve"> — </a:t>
+            </a:r>
+            <a:r>
+              <a:rPr lang="en-US" sz="2000" b="0" i="0" dirty="0">
+                <a:solidFill>
+                  <a:srgbClr val="5C4826"/>
+                </a:solidFill>
+              </a:rPr>
+              <a:t xml:space="preserve">what observation would reduce that uncertainty?</a:t>
+            </a:r>
+          </a:p>
+        </p:txBody>
+      </p:sp>
+      <p:sp>
+        <p:nvSpPr>
+          <p:cNvPr id="120" name="FooterBand"/>
+          <p:cNvSpPr/>
+          <p:nvPr/>
+        </p:nvSpPr>
+        <p:spPr>
+          <a:xfrm>
+            <a:off x="274320" y="5687568"/>
+            <a:ext cx="8595360" cy="768096"/>
+          </a:xfrm>
+          <a:prstGeom prst="rect">
+            <a:avLst/>
+          </a:prstGeom>
+          <a:solidFill>
+            <a:srgbClr val="8E6F3E"/>
+          </a:solidFill>
+          <a:ln>
+            <a:noFill/>
+          </a:ln>
+        </p:spPr>
+        <p:txBody>
+          <a:bodyPr wrap="square" lIns="91440" tIns="45720" rIns="91440" bIns="45720" anchor="ctr"/>
+          <a:lstStyle/>
+          <a:p>
+            <a:pPr algn="ctr">
+              <a:buNone/>
+            </a:pPr>
+            <a:r>
+              <a:rPr lang="en-US" sz="2000" b="1" i="0" dirty="0">
+                <a:solidFill>
+                  <a:srgbClr val="FFFFFF"/>
+                </a:solidFill>
+              </a:rPr>
+              <a:t xml:space="preserve">Next question: How do we turn a property we care about</a:t>
+            </a:r>
+          </a:p>
+          <a:p>
+            <a:pPr algn="ctr">
+              <a:buNone/>
+            </a:pPr>
+            <a:r>
+              <a:rPr lang="en-US" sz="2000" b="1" i="0" dirty="0">
+                <a:solidFill>
+                  <a:srgbClr val="FFFFFF"/>
+                </a:solidFill>
+              </a:rPr>
+              <a:t xml:space="preserve">into something we can observe?</a:t>
+            </a:r>
+          </a:p>
+        </p:txBody>
+      </p:sp>
+    </p:spTree>
+  </p:cSld>
+  <p:clrMapOvr>
+    <a:masterClrMapping/>
+  </p:clrMapOvr>
+  <p:timing>
+    <p:tnLst>
+      <p:par>
+        <p:cTn id="1" dur="indefinite" restart="never" nodeType="tmRoot">
+          <p:childTnLst>
+            <p:seq concurrent="1" nextAc="seek">
+              <p:cTn id="2" dur="indefinite" nodeType="mainSeq">
+                <p:childTnLst>
+                  <p:par>
+                    <p:cTn id="3" fill="hold">
+                      <p:stCondLst>
+                        <p:cond delay="indefinite"/>
+                      </p:stCondLst>
+                      <p:childTnLst>
+                        <p:par>
+                          <p:cTn id="4" fill="hold">
+                            <p:stCondLst>
+                              <p:cond delay="0"/>
+                            </p:stCondLst>
+                            <p:childTnLst>
+                              <p:par>
+                                <p:cTn id="5" presetID="10" presetClass="entr" presetSubtype="0" fill="hold" nodeType="clickEffect">
+                                  <p:stCondLst>
+                                    <p:cond delay="0"/>
+                                  </p:stCondLst>
+                                  <p:childTnLst>
+                                    <p:set>
+                                      <p:cBhvr>
+                                        <p:cTn id="6" dur="1" fill="hold">
+                                          <p:stCondLst>
+                                            <p:cond delay="0"/>
+                                          </p:stCondLst>
+                                        </p:cTn>
+                                        <p:tgtEl>
+                                          <p:spTgt spid="110"/>
+                                        </p:tgtEl>
+                                        <p:attrNameLst>
+                                          <p:attrName>style.visibility</p:attrName>
+                                        </p:attrNameLst>
+                                      </p:cBhvr>
+                                      <p:to>
+                                        <p:strVal val="visible"/>
+                                      </p:to>
+                                    </p:set>
+                                    <p:animEffect transition="in" filter="fade">
+                                      <p:cBhvr>
+                                        <p:cTn id="7" dur="500"/>
+                                        <p:tgtEl>
+                                          <p:spTgt spid="110"/>
+                                        </p:tgtEl>
+                                      </p:cBhvr>
+                                    </p:animEffect>
+                                  </p:childTnLst>
+                                </p:cTn>
+                              </p:par>
+                            </p:childTnLst>
+                          </p:cTn>
+                        </p:par>
+                      </p:childTnLst>
+                    </p:cTn>
+                  </p:par>
+                  <p:par>
+                    <p:cTn id="9" fill="hold">
+                      <p:stCondLst>
+                        <p:cond delay="indefinite"/>
+                      </p:stCondLst>
+                      <p:childTnLst>
+                        <p:par>
+                          <p:cTn id="10" fill="hold">
+                            <p:stCondLst>
+                              <p:cond delay="0"/>
+                            </p:stCondLst>
+                            <p:childTnLst>
+                              <p:par>
+                                <p:cTn id="11" presetID="10" presetClass="entr" presetSubtype="0" fill="hold" nodeType="clickEffect">
+                                  <p:stCondLst>
+                                    <p:cond delay="0"/>
+                                  </p:stCondLst>
+                                  <p:childTnLst>
+                                    <p:set>
+                                      <p:cBhvr>
+                                        <p:cTn id="12" dur="1" fill="hold">
+                                          <p:stCondLst>
+                                            <p:cond delay="0"/>
+                                          </p:stCondLst>
+                                        </p:cTn>
+                                        <p:tgtEl>
+                                          <p:spTgt spid="111"/>
+                                        </p:tgtEl>
+                                        <p:attrNameLst>
+                                          <p:attrName>style.visibility</p:attrName>
+                                        </p:attrNameLst>
+                                      </p:cBhvr>
+                                      <p:to>
+                                        <p:strVal val="visible"/>
+                                      </p:to>
+                                    </p:set>
+                                    <p:animEffect transition="in" filter="fade">
+                                      <p:cBhvr>
+                                        <p:cTn id="13" dur="500"/>
+                                        <p:tgtEl>
+                                          <p:spTgt spid="111"/>
+                                        </p:tgtEl>
+                                      </p:cBhvr>
+                                    </p:animEffect>
+                                  </p:childTnLst>
+                                </p:cTn>
+                              </p:par>
+                            </p:childTnLst>
+                          </p:cTn>
+                        </p:par>
+                      </p:childTnLst>
+                    </p:cTn>
+                  </p:par>
+                  <p:par>
+                    <p:cTn id="15" fill="hold">
+                      <p:stCondLst>
+                        <p:cond delay="indefinite"/>
+                      </p:stCondLst>
+                      <p:childTnLst>
+                        <p:par>
+                          <p:cTn id="16" fill="hold">
+                            <p:stCondLst>
+                              <p:cond delay="0"/>
+                            </p:stCondLst>
+                            <p:childTnLst>
+                              <p:par>
+                                <p:cTn id="17" presetID="10" presetClass="entr" presetSubtype="0" fill="hold" nodeType="clickEffect">
+                                  <p:stCondLst>
+                                    <p:cond delay="0"/>
+                                  </p:stCondLst>
+                                  <p:childTnLst>
+                                    <p:set>
+                                      <p:cBhvr>
+                                        <p:cTn id="18" dur="1" fill="hold">
+                                          <p:stCondLst>
+                                            <p:cond delay="0"/>
+                                          </p:stCondLst>
+                                        </p:cTn>
+                                        <p:tgtEl>
+                                          <p:spTgt spid="112"/>
+                                        </p:tgtEl>
+                                        <p:attrNameLst>
+                                          <p:attrName>style.visibility</p:attrName>
+                                        </p:attrNameLst>
+                                      </p:cBhvr>
+                                      <p:to>
+                                        <p:strVal val="visible"/>
+                                      </p:to>
+                                    </p:set>
+                                    <p:animEffect transition="in" filter="fade">
+                                      <p:cBhvr>
+                                        <p:cTn id="19" dur="500"/>
+                                        <p:tgtEl>
+                                          <p:spTgt spid="112"/>
+                                        </p:tgtEl>
+                                      </p:cBhvr>
+                                    </p:animEffect>
+                                  </p:childTnLst>
+                                </p:cTn>
+                              </p:par>
+                            </p:childTnLst>
+                          </p:cTn>
+                        </p:par>
+                      </p:childTnLst>
+                    </p:cTn>
+                  </p:par>
+                  <p:par>
+                    <p:cTn id="21" fill="hold">
+                      <p:stCondLst>
+                        <p:cond delay="indefinite"/>
+                      </p:stCondLst>
+                      <p:childTnLst>
+                        <p:par>
+                          <p:cTn id="22" fill="hold">
+                            <p:stCondLst>
+                              <p:cond delay="0"/>
+                            </p:stCondLst>
+                            <p:childTnLst>
+                              <p:par>
+                                <p:cTn id="23" presetID="10" presetClass="entr" presetSubtype="0" fill="hold" nodeType="clickEffect">
+                                  <p:stCondLst>
+                                    <p:cond delay="0"/>
+                                  </p:stCondLst>
+                                  <p:childTnLst>
+                                    <p:set>
+                                      <p:cBhvr>
+                                        <p:cTn id="24" dur="1" fill="hold">
+                                          <p:stCondLst>
+                                            <p:cond delay="0"/>
+                                          </p:stCondLst>
+                                        </p:cTn>
+                                        <p:tgtEl>
+                                          <p:spTgt spid="113"/>
+                                        </p:tgtEl>
+                                        <p:attrNameLst>
+                                          <p:attrName>style.visibility</p:attrName>
+                                        </p:attrNameLst>
+                                      </p:cBhvr>
+                                      <p:to>
+                                        <p:strVal val="visible"/>
+                                      </p:to>
+                                    </p:set>
+                                    <p:animEffect transition="in" filter="fade">
+                                      <p:cBhvr>
+                                        <p:cTn id="25" dur="500"/>
+                                        <p:tgtEl>
+                                          <p:spTgt spid="113"/>
+                                        </p:tgtEl>
+                                      </p:cBhvr>
+                                    </p:animEffect>
+                                  </p:childTnLst>
+                                </p:cTn>
+                              </p:par>
+                            </p:childTnLst>
+                          </p:cTn>
+                        </p:par>
+                      </p:childTnLst>
+                    </p:cTn>
+                  </p:par>
+                  <p:par>
+                    <p:cTn id="27" fill="hold">
+                      <p:stCondLst>
+                        <p:cond delay="indefinite"/>
+                      </p:stCondLst>
+                      <p:childTnLst>
+                        <p:par>
+                          <p:cTn id="28" fill="hold">
+                            <p:stCondLst>
+                              <p:cond delay="0"/>
+                            </p:stCondLst>
+                            <p:childTnLst>
+                              <p:par>
+                                <p:cTn id="29" presetID="10" presetClass="entr" presetSubtype="0" fill="hold" nodeType="clickEffect">
+                                  <p:stCondLst>
+                                    <p:cond delay="0"/>
+                                  </p:stCondLst>
+                                  <p:childTnLst>
+                                    <p:set>
+                                      <p:cBhvr>
+                                        <p:cTn id="30" dur="1" fill="hold">
+                                          <p:stCondLst>
+                                            <p:cond delay="0"/>
+                                          </p:stCondLst>
+                                        </p:cTn>
+                                        <p:tgtEl>
+                                          <p:spTgt spid="114"/>
+                                        </p:tgtEl>
+                                        <p:attrNameLst>
+                                          <p:attrName>style.visibility</p:attrName>
+                                        </p:attrNameLst>
+                                      </p:cBhvr>
+                                      <p:to>
+                                        <p:strVal val="visible"/>
+                                      </p:to>
+                                    </p:set>
+                                    <p:animEffect transition="in" filter="fade">
+                                      <p:cBhvr>
+                                        <p:cTn id="31" dur="500"/>
+                                        <p:tgtEl>
+                                          <p:spTgt spid="114"/>
+                                        </p:tgtEl>
+                                      </p:cBhvr>
+                                    </p:animEffect>
+                                  </p:childTnLst>
+                                </p:cTn>
+                              </p:par>
+                            </p:childTnLst>
+                          </p:cTn>
+                        </p:par>
+                      </p:childTnLst>
+                    </p:cTn>
+                  </p:par>
+                  <p:par>
+                    <p:cTn id="33" fill="hold">
+                      <p:stCondLst>
+                        <p:cond delay="indefinite"/>
+                      </p:stCondLst>
+                      <p:childTnLst>
+                        <p:par>
+                          <p:cTn id="34" fill="hold">
+                            <p:stCondLst>
+                              <p:cond delay="0"/>
+                            </p:stCondLst>
+                            <p:childTnLst>
+                              <p:par>
+                                <p:cTn id="35" presetID="10" presetClass="entr" presetSubtype="0" fill="hold" nodeType="clickEffect">
+                                  <p:stCondLst>
+                                    <p:cond delay="0"/>
+                                  </p:stCondLst>
+                                  <p:childTnLst>
+                                    <p:set>
+                                      <p:cBhvr>
+                                        <p:cTn id="36" dur="1" fill="hold">
+                                          <p:stCondLst>
+                                            <p:cond delay="0"/>
+                                          </p:stCondLst>
+                                        </p:cTn>
+                                        <p:tgtEl>
+                                          <p:spTgt spid="120"/>
+                                        </p:tgtEl>
+                                        <p:attrNameLst>
+                                          <p:attrName>style.visibility</p:attrName>
+                                        </p:attrNameLst>
+                                      </p:cBhvr>
+                                      <p:to>
+                                        <p:strVal val="visible"/>
+                                      </p:to>
+                                    </p:set>
+                                    <p:animEffect transition="in" filter="fade">
+                                      <p:cBhvr>
+                                        <p:cTn id="37" dur="500"/>
+                                        <p:tgtEl>
+                                          <p:spTgt spid="120"/>
+                                        </p:tgtEl>
+                                      </p:cBhvr>
+                                    </p:animEffect>
+                                  </p:childTnLst>
+                                </p:cTn>
+                              </p:par>
+                            </p:childTnLst>
+                          </p:cTn>
+                        </p:par>
+                      </p:childTnLst>
+                    </p:cTn>
+                  </p:par>
+                </p:childTnLst>
+              </p:cTn>
+              <p:prevCondLst>
+                <p:cond evt="onPrev" delay="0">
+                  <p:tgtEl>
+                    <p:sldTgt/>
+                  </p:tgtEl>
+                </p:cond>
+              </p:prevCondLst>
+              <p:nextCondLst>
+                <p:cond evt="onNext" delay="0">
+                  <p:tgtEl>
+                    <p:sldTgt/>
+                  </p:tgtEl>
+                </p:cond>
+              </p:nextCondLst>
+            </p:seq>
+          </p:childTnLst>
+        </p:cTn>
+      </p:par>
+    </p:tnLst>
+  </p:timing>
+</p:sld>
+</file>
+
+<file path=ppt/slides/slide31.xml><?xml version="1.0" encoding="utf-8"?>
+<p:sld xmlns:a="http://schemas.openxmlformats.org/drawingml/2006/main" xmlns:r="http://schemas.openxmlformats.org/officeDocument/2006/relationships" xmlns:p="http://schemas.openxmlformats.org/presentationml/2006/main">
+  <p:cSld>
+    <p:spTree>
+      <p:nvGrpSpPr>
+        <p:cNvPr id="1" name=""/>
+        <p:cNvGrpSpPr/>
+        <p:nvPr/>
+      </p:nvGrpSpPr>
+      <p:grpSpPr>
+        <a:xfrm>
+          <a:off x="0" y="0"/>
+          <a:ext cx="0" cy="0"/>
+          <a:chOff x="0" y="0"/>
+          <a:chExt cx="0" cy="0"/>
+        </a:xfrm>
+      </p:grpSpPr>
+      <p:sp>
+        <p:nvSpPr>
+          <p:cNvPr id="2" name="Title 1"/>
+          <p:cNvSpPr>
+            <a:spLocks noGrp="1"/>
+          </p:cNvSpPr>
+          <p:nvPr>
+            <p:ph type="title"/>
+          </p:nvPr>
+        </p:nvSpPr>
+        <p:spPr>
+          <a:xfrm>
+            <a:off x="277148" y="118428"/>
+            <a:ext cx="8590000" cy="638175"/>
+          </a:xfrm>
+        </p:spPr>
+        <p:txBody>
+          <a:bodyPr>
+            <a:normAutofit fontScale="90000"/>
+          </a:bodyPr>
+          <a:lstStyle/>
+          <a:p>
+            <a:pPr>
+              <a:buNone/>
+              <a:defRPr b="0"/>
+            </a:pPr>
+            <a:r>
+              <a:rPr lang="en-US" sz="2400" b="0" i="0" dirty="0">
+                <a:solidFill>
+                  <a:srgbClr val="000000"/>
+                </a:solidFill>
+              </a:rPr>
+              <a:t>One property may need several views</a:t>
+            </a:r>
+          </a:p>
+        </p:txBody>
+      </p:sp>
+      <p:sp>
+        <p:nvSpPr>
+          <p:cNvPr id="3" name="Slide Number Placeholder 3"/>
+          <p:cNvSpPr>
+            <a:spLocks noGrp="1"/>
+          </p:cNvSpPr>
+          <p:nvPr>
+            <p:ph type="sldNum" sz="quarter" idx="4"/>
+          </p:nvPr>
+        </p:nvSpPr>
+        <p:spPr/>
+        <p:txBody>
+          <a:bodyPr/>
+          <a:lstStyle/>
+          <a:p>
+            <a:fld id="{B7EB45DA-9A0D-DC49-8E02-F30A5DDC21C3}" type="slidenum">
+              <a:rPr lang="en-US" smtClean="0"/>
+              <a:t>19</a:t>
+            </a:fld>
+            <a:endParaRPr lang="en-US"/>
+          </a:p>
+        </p:txBody>
+      </p:sp>
+      <p:sp>
+        <p:nvSpPr>
+          <p:cNvPr id="100" name="Prop"/>
+          <p:cNvSpPr/>
+          <p:nvPr/>
+        </p:nvSpPr>
+        <p:spPr>
+          <a:xfrm>
+            <a:off x="274320" y="1783080"/>
+            <a:ext cx="2377440" cy="640080"/>
+          </a:xfrm>
+          <a:prstGeom prst="rect">
+            <a:avLst/>
+          </a:prstGeom>
+          <a:solidFill>
+            <a:srgbClr val="8E6F3E"/>
+          </a:solidFill>
+          <a:ln>
+            <a:noFill/>
+          </a:ln>
+        </p:spPr>
+        <p:txBody>
+          <a:bodyPr wrap="square" lIns="137160" tIns="45720" rIns="137160" bIns="45720" anchor="ctr"/>
+          <a:lstStyle/>
+          <a:p>
+            <a:pPr algn="ctr">
+              <a:buNone/>
+            </a:pPr>
+            <a:r>
+              <a:rPr lang="en-US" sz="2000" b="1" i="0" dirty="0">
+                <a:solidFill>
+                  <a:srgbClr val="FFFFFF"/>
+                </a:solidFill>
+              </a:rPr>
+              <a:t xml:space="preserve">PROPERTY / CLAIM</a:t>
+            </a:r>
+          </a:p>
+        </p:txBody>
+      </p:sp>
+      <p:sp>
+        <p:nvSpPr>
+          <p:cNvPr id="110" name="Metric0"/>
+          <p:cNvSpPr/>
+          <p:nvPr/>
+        </p:nvSpPr>
+        <p:spPr>
+          <a:xfrm>
+            <a:off x="2926080" y="1188720"/>
+            <a:ext cx="3383280" cy="548640"/>
+          </a:xfrm>
+          <a:prstGeom prst="rect">
+            <a:avLst/>
+          </a:prstGeom>
+          <a:solidFill>
+            <a:srgbClr val="F5F1E8"/>
+          </a:solidFill>
+          <a:ln w="12700">
+            <a:solidFill>
+              <a:srgbClr val="C9B991"/>
+            </a:solidFill>
+          </a:ln>
+        </p:spPr>
+        <p:txBody>
+          <a:bodyPr wrap="square" lIns="137160" tIns="45720" rIns="137160" bIns="45720" anchor="ctr"/>
+          <a:lstStyle/>
+          <a:p>
+            <a:pPr algn="ctr">
+              <a:buNone/>
+            </a:pPr>
+            <a:r>
+              <a:rPr lang="en-US" sz="2000" b="1" i="0" dirty="0">
+                <a:solidFill>
+                  <a:srgbClr val="5C4826"/>
+                </a:solidFill>
+              </a:rPr>
+              <a:t xml:space="preserve">Metric A</a:t>
+            </a:r>
+            <a:r>
+              <a:rPr lang="en-US" sz="2000" b="0" i="0" dirty="0">
+                <a:solidFill>
+                  <a:srgbClr val="9A9A9A"/>
+                </a:solidFill>
+              </a:rPr>
+              <a:t xml:space="preserve">  →  </a:t>
+            </a:r>
+            <a:r>
+              <a:rPr lang="en-US" sz="2000" b="0" i="0" dirty="0">
+                <a:solidFill>
+                  <a:srgbClr val="5C4826"/>
+                </a:solidFill>
+              </a:rPr>
+              <a:t xml:space="preserve">Measurement</a:t>
+            </a:r>
+          </a:p>
+        </p:txBody>
+      </p:sp>
+      <p:sp>
+        <p:nvSpPr>
+          <p:cNvPr id="111" name="Metric1"/>
+          <p:cNvSpPr/>
+          <p:nvPr/>
+        </p:nvSpPr>
+        <p:spPr>
+          <a:xfrm>
+            <a:off x="2926080" y="1828800"/>
+            <a:ext cx="3383280" cy="548640"/>
+          </a:xfrm>
+          <a:prstGeom prst="rect">
+            <a:avLst/>
+          </a:prstGeom>
+          <a:solidFill>
+            <a:srgbClr val="F5F1E8"/>
+          </a:solidFill>
+          <a:ln w="12700">
+            <a:solidFill>
+              <a:srgbClr val="C9B991"/>
+            </a:solidFill>
+          </a:ln>
+        </p:spPr>
+        <p:txBody>
+          <a:bodyPr wrap="square" lIns="137160" tIns="45720" rIns="137160" bIns="45720" anchor="ctr"/>
+          <a:lstStyle/>
+          <a:p>
+            <a:pPr algn="ctr">
+              <a:buNone/>
+            </a:pPr>
+            <a:r>
+              <a:rPr lang="en-US" sz="2000" b="1" i="0" dirty="0">
+                <a:solidFill>
+                  <a:srgbClr val="5C4826"/>
+                </a:solidFill>
+              </a:rPr>
+              <a:t xml:space="preserve">Metric B</a:t>
+            </a:r>
+            <a:r>
+              <a:rPr lang="en-US" sz="2000" b="0" i="0" dirty="0">
+                <a:solidFill>
+                  <a:srgbClr val="9A9A9A"/>
+                </a:solidFill>
+              </a:rPr>
+              <a:t xml:space="preserve">  →  </a:t>
+            </a:r>
+            <a:r>
+              <a:rPr lang="en-US" sz="2000" b="0" i="0" dirty="0">
+                <a:solidFill>
+                  <a:srgbClr val="5C4826"/>
+                </a:solidFill>
+              </a:rPr>
+              <a:t xml:space="preserve">Measurement</a:t>
+            </a:r>
+          </a:p>
+        </p:txBody>
+      </p:sp>
+      <p:sp>
+        <p:nvSpPr>
+          <p:cNvPr id="112" name="Metric2"/>
+          <p:cNvSpPr/>
+          <p:nvPr/>
+        </p:nvSpPr>
+        <p:spPr>
+          <a:xfrm>
+            <a:off x="2926080" y="2468880"/>
+            <a:ext cx="3383280" cy="548640"/>
+          </a:xfrm>
+          <a:prstGeom prst="rect">
+            <a:avLst/>
+          </a:prstGeom>
+          <a:solidFill>
+            <a:srgbClr val="F5F1E8"/>
+          </a:solidFill>
+          <a:ln w="12700">
+            <a:solidFill>
+              <a:srgbClr val="C9B991"/>
+            </a:solidFill>
+          </a:ln>
+        </p:spPr>
+        <p:txBody>
+          <a:bodyPr wrap="square" lIns="137160" tIns="45720" rIns="137160" bIns="45720" anchor="ctr"/>
+          <a:lstStyle/>
+          <a:p>
+            <a:pPr algn="ctr">
+              <a:buNone/>
+            </a:pPr>
+            <a:r>
+              <a:rPr lang="en-US" sz="2000" b="1" i="0" dirty="0">
+                <a:solidFill>
+                  <a:srgbClr val="5C4826"/>
+                </a:solidFill>
+              </a:rPr>
+              <a:t xml:space="preserve">Metric C</a:t>
+            </a:r>
+            <a:r>
+              <a:rPr lang="en-US" sz="2000" b="0" i="0" dirty="0">
+                <a:solidFill>
+                  <a:srgbClr val="9A9A9A"/>
+                </a:solidFill>
+              </a:rPr>
+              <a:t xml:space="preserve">  →  </a:t>
+            </a:r>
+            <a:r>
+              <a:rPr lang="en-US" sz="2000" b="0" i="0" dirty="0">
+                <a:solidFill>
+                  <a:srgbClr val="5C4826"/>
+                </a:solidFill>
+              </a:rPr>
+              <a:t xml:space="preserve">Measurement</a:t>
+            </a:r>
+          </a:p>
+        </p:txBody>
+      </p:sp>
+      <p:sp>
+        <p:nvSpPr>
+          <p:cNvPr id="120" name="Evid"/>
+          <p:cNvSpPr/>
+          <p:nvPr/>
+        </p:nvSpPr>
+        <p:spPr>
+          <a:xfrm>
+            <a:off x="6583680" y="1783080"/>
+            <a:ext cx="2286000" cy="640080"/>
+          </a:xfrm>
+          <a:prstGeom prst="rect">
+            <a:avLst/>
+          </a:prstGeom>
+          <a:solidFill>
+            <a:srgbClr val="8E6F3E"/>
+          </a:solidFill>
+          <a:ln>
+            <a:noFill/>
+          </a:ln>
+        </p:spPr>
+        <p:txBody>
+          <a:bodyPr wrap="square" lIns="137160" tIns="45720" rIns="137160" bIns="45720" anchor="ctr"/>
+          <a:lstStyle/>
+          <a:p>
+            <a:pPr algn="ctr">
+              <a:buNone/>
+            </a:pPr>
+            <a:r>
+              <a:rPr lang="en-US" sz="2000" b="1" i="0" dirty="0">
+                <a:solidFill>
+                  <a:srgbClr val="FFFFFF"/>
+                </a:solidFill>
+              </a:rPr>
+              <a:t xml:space="preserve">EVIDENCE</a:t>
+            </a:r>
+          </a:p>
+        </p:txBody>
+      </p:sp>
+      <p:cxnSp>
+        <p:nvCxnSpPr>
+          <p:cNvPr id="130" name="L0"/>
+          <p:cNvCxnSpPr/>
+          <p:nvPr/>
+        </p:nvCxnSpPr>
+        <p:spPr>
+          <a:xfrm flipV="1">
+            <a:off x="2651760" y="1463040"/>
+            <a:ext cx="274320" cy="640080"/>
+          </a:xfrm>
+          <a:prstGeom prst="line">
+            <a:avLst/>
+          </a:prstGeom>
+          <a:ln w="9525">
+            <a:solidFill>
+              <a:srgbClr val="C9B991"/>
+            </a:solidFill>
+          </a:ln>
+          <a:effectLst/>
+        </p:spPr>
+        <p:style>
+          <a:lnRef idx="2">
+            <a:schemeClr val="accent1"/>
+          </a:lnRef>
+          <a:fillRef idx="0">
+            <a:schemeClr val="accent1"/>
+          </a:fillRef>
+          <a:effectRef idx="1">
+            <a:schemeClr val="accent1"/>
+          </a:effectRef>
+          <a:fontRef idx="minor">
+            <a:schemeClr val="tx1"/>
+          </a:fontRef>
+        </p:style>
+      </p:cxnSp>
+      <p:cxnSp>
+        <p:nvCxnSpPr>
+          <p:cNvPr id="131" name="L1"/>
+          <p:cNvCxnSpPr/>
+          <p:nvPr/>
+        </p:nvCxnSpPr>
+        <p:spPr>
+          <a:xfrm>
+            <a:off x="2651760" y="2103120"/>
+            <a:ext cx="274320" cy="0"/>
+          </a:xfrm>
+          <a:prstGeom prst="line">
+            <a:avLst/>
+          </a:prstGeom>
+          <a:ln w="9525">
+            <a:solidFill>
+              <a:srgbClr val="C9B991"/>
+            </a:solidFill>
+          </a:ln>
+          <a:effectLst/>
+        </p:spPr>
+        <p:style>
+          <a:lnRef idx="2">
+            <a:schemeClr val="accent1"/>
+          </a:lnRef>
+          <a:fillRef idx="0">
+            <a:schemeClr val="accent1"/>
+          </a:fillRef>
+          <a:effectRef idx="1">
+            <a:schemeClr val="accent1"/>
+          </a:effectRef>
+          <a:fontRef idx="minor">
+            <a:schemeClr val="tx1"/>
+          </a:fontRef>
+        </p:style>
+      </p:cxnSp>
+      <p:cxnSp>
+        <p:nvCxnSpPr>
+          <p:cNvPr id="132" name="L2"/>
+          <p:cNvCxnSpPr/>
+          <p:nvPr/>
+        </p:nvCxnSpPr>
+        <p:spPr>
+          <a:xfrm>
+            <a:off x="2651760" y="2103120"/>
+            <a:ext cx="274320" cy="640080"/>
+          </a:xfrm>
+          <a:prstGeom prst="line">
+            <a:avLst/>
+          </a:prstGeom>
+          <a:ln w="9525">
+            <a:solidFill>
+              <a:srgbClr val="C9B991"/>
+            </a:solidFill>
+          </a:ln>
+          <a:effectLst/>
+        </p:spPr>
+        <p:style>
+          <a:lnRef idx="2">
+            <a:schemeClr val="accent1"/>
+          </a:lnRef>
+          <a:fillRef idx="0">
+            <a:schemeClr val="accent1"/>
+          </a:fillRef>
+          <a:effectRef idx="1">
+            <a:schemeClr val="accent1"/>
+          </a:effectRef>
+          <a:fontRef idx="minor">
+            <a:schemeClr val="tx1"/>
+          </a:fontRef>
+        </p:style>
+      </p:cxnSp>
+      <p:cxnSp>
+        <p:nvCxnSpPr>
+          <p:cNvPr id="140" name="R0"/>
+          <p:cNvCxnSpPr/>
+          <p:nvPr/>
+        </p:nvCxnSpPr>
+        <p:spPr>
+          <a:xfrm>
+            <a:off x="6309360" y="1463040"/>
+            <a:ext cx="274320" cy="640080"/>
+          </a:xfrm>
+          <a:prstGeom prst="line">
+            <a:avLst/>
+          </a:prstGeom>
+          <a:ln w="12700">
+            <a:solidFill>
+              <a:srgbClr val="8E6F3E"/>
+            </a:solidFill>
+            <a:tailEnd type="triangle" w="med" len="med"/>
+          </a:ln>
+          <a:effectLst/>
+        </p:spPr>
+        <p:style>
+          <a:lnRef idx="2">
+            <a:schemeClr val="accent1"/>
+          </a:lnRef>
+          <a:fillRef idx="0">
+            <a:schemeClr val="accent1"/>
+          </a:fillRef>
+          <a:effectRef idx="1">
+            <a:schemeClr val="accent1"/>
+          </a:effectRef>
+          <a:fontRef idx="minor">
+            <a:schemeClr val="tx1"/>
+          </a:fontRef>
+        </p:style>
+      </p:cxnSp>
+      <p:cxnSp>
+        <p:nvCxnSpPr>
+          <p:cNvPr id="141" name="R1"/>
+          <p:cNvCxnSpPr/>
+          <p:nvPr/>
+        </p:nvCxnSpPr>
+        <p:spPr>
+          <a:xfrm>
+            <a:off x="6309360" y="2103120"/>
+            <a:ext cx="274320" cy="0"/>
+          </a:xfrm>
+          <a:prstGeom prst="line">
+            <a:avLst/>
+          </a:prstGeom>
+          <a:ln w="12700">
+            <a:solidFill>
+              <a:srgbClr val="8E6F3E"/>
+            </a:solidFill>
+            <a:tailEnd type="triangle" w="med" len="med"/>
+          </a:ln>
+          <a:effectLst/>
+        </p:spPr>
+        <p:style>
+          <a:lnRef idx="2">
+            <a:schemeClr val="accent1"/>
+          </a:lnRef>
+          <a:fillRef idx="0">
+            <a:schemeClr val="accent1"/>
+          </a:fillRef>
+          <a:effectRef idx="1">
+            <a:schemeClr val="accent1"/>
+          </a:effectRef>
+          <a:fontRef idx="minor">
+            <a:schemeClr val="tx1"/>
+          </a:fontRef>
+        </p:style>
+      </p:cxnSp>
+      <p:cxnSp>
+        <p:nvCxnSpPr>
+          <p:cNvPr id="142" name="R2"/>
+          <p:cNvCxnSpPr/>
+          <p:nvPr/>
+        </p:nvCxnSpPr>
+        <p:spPr>
+          <a:xfrm flipV="1">
+            <a:off x="6309360" y="2103120"/>
+            <a:ext cx="274320" cy="640080"/>
+          </a:xfrm>
+          <a:prstGeom prst="line">
+            <a:avLst/>
+          </a:prstGeom>
+          <a:ln w="12700">
+            <a:solidFill>
+              <a:srgbClr val="8E6F3E"/>
+            </a:solidFill>
+            <a:tailEnd type="triangle" w="med" len="med"/>
+          </a:ln>
+          <a:effectLst/>
+        </p:spPr>
+        <p:style>
+          <a:lnRef idx="2">
+            <a:schemeClr val="accent1"/>
+          </a:lnRef>
+          <a:fillRef idx="0">
+            <a:schemeClr val="accent1"/>
+          </a:fillRef>
+          <a:effectRef idx="1">
+            <a:schemeClr val="accent1"/>
+          </a:effectRef>
+          <a:fontRef idx="minor">
+            <a:schemeClr val="tx1"/>
+          </a:fontRef>
+        </p:style>
+      </p:cxnSp>
+      <p:sp>
+        <p:nvSpPr>
+          <p:cNvPr id="150" name="Ideas"/>
+          <p:cNvSpPr txBox="1"/>
+          <p:nvPr/>
+        </p:nvSpPr>
+        <p:spPr>
+          <a:xfrm>
+            <a:off x="274320" y="3200400"/>
+            <a:ext cx="8595360" cy="1005840"/>
+          </a:xfrm>
+          <a:prstGeom prst="rect">
+            <a:avLst/>
+          </a:prstGeom>
+          <a:noFill/>
+          <a:ln>
+            <a:noFill/>
+          </a:ln>
+        </p:spPr>
+        <p:txBody>
+          <a:bodyPr wrap="square" lIns="0" tIns="45720" rIns="0" bIns="45720" anchor="ctr"/>
+          <a:lstStyle/>
+          <a:p>
+            <a:pPr algn="ctr">
+              <a:buNone/>
+            </a:pPr>
+            <a:r>
+              <a:rPr lang="en-US" sz="2000" b="0" i="0" dirty="0">
+                <a:solidFill>
+                  <a:srgbClr val="5C4826"/>
+                </a:solidFill>
+              </a:rPr>
+              <a:t xml:space="preserve">Different metrics expose different aspects of the property.</a:t>
+            </a:r>
+          </a:p>
+          <a:p>
+            <a:pPr algn="ctr">
+              <a:spcBef>
+                <a:spcPts val="140"/>
+              </a:spcBef>
+              <a:buNone/>
+            </a:pPr>
+            <a:r>
+              <a:rPr lang="en-US" sz="2000" b="1" i="0" dirty="0">
+                <a:solidFill>
+                  <a:srgbClr val="5C4826"/>
+                </a:solidFill>
+              </a:rPr>
+              <a:t xml:space="preserve">Agreement is stronger when the measurements</a:t>
+            </a:r>
+          </a:p>
+          <a:p>
+            <a:pPr algn="ctr">
+              <a:buNone/>
+            </a:pPr>
+            <a:r>
+              <a:rPr lang="en-US" sz="2000" b="1" i="0" dirty="0">
+                <a:solidFill>
+                  <a:srgbClr val="5C4826"/>
+                </a:solidFill>
+              </a:rPr>
+              <a:t xml:space="preserve">do not share the same blind spot.</a:t>
+            </a:r>
+          </a:p>
+        </p:txBody>
+      </p:sp>
+      <p:sp>
+        <p:nvSpPr>
+          <p:cNvPr id="160" name="ExLbl"/>
+          <p:cNvSpPr txBox="1"/>
+          <p:nvPr/>
+        </p:nvSpPr>
+        <p:spPr>
+          <a:xfrm>
+            <a:off x="274320" y="4389120"/>
+            <a:ext cx="8595360" cy="365760"/>
+          </a:xfrm>
+          <a:prstGeom prst="rect">
+            <a:avLst/>
+          </a:prstGeom>
+          <a:noFill/>
+          <a:ln>
+            <a:noFill/>
+          </a:ln>
+        </p:spPr>
+        <p:txBody>
+          <a:bodyPr wrap="square" lIns="0" tIns="45720" rIns="0" bIns="45720" anchor="ctr"/>
+          <a:lstStyle/>
+          <a:p>
+            <a:pPr algn="ctr">
+              <a:buNone/>
+            </a:pPr>
+            <a:r>
+              <a:rPr lang="en-US" sz="2000" b="1" i="0" dirty="0">
+                <a:solidFill>
+                  <a:srgbClr val="8E6F3E"/>
+                </a:solidFill>
+              </a:rPr>
+              <a:t xml:space="preserve">WORKED EXAMPLE  ·  INTEGRATION READINESS</a:t>
+            </a:r>
+          </a:p>
+        </p:txBody>
+      </p:sp>
+      <p:sp>
+        <p:nvSpPr>
+          <p:cNvPr id="170" name="Ex0"/>
+          <p:cNvSpPr/>
+          <p:nvPr/>
+        </p:nvSpPr>
+        <p:spPr>
+          <a:xfrm>
+            <a:off x="274320" y="4800600"/>
+            <a:ext cx="2765808" cy="640080"/>
+          </a:xfrm>
+          <a:prstGeom prst="rect">
+            <a:avLst/>
+          </a:prstGeom>
+          <a:solidFill>
+            <a:srgbClr val="F5F1E8"/>
+          </a:solidFill>
+          <a:ln w="12700">
+            <a:solidFill>
+              <a:srgbClr val="C9B991"/>
+            </a:solidFill>
+          </a:ln>
+        </p:spPr>
+        <p:txBody>
+          <a:bodyPr wrap="square" lIns="137160" tIns="45720" rIns="137160" bIns="45720" anchor="ctr"/>
+          <a:lstStyle/>
+          <a:p>
+            <a:pPr algn="ctr">
+              <a:buNone/>
+            </a:pPr>
+            <a:r>
+              <a:rPr lang="en-US" sz="2000" b="0" i="0" dirty="0">
+                <a:solidFill>
+                  <a:srgbClr val="5C4826"/>
+                </a:solidFill>
+              </a:rPr>
+              <a:t xml:space="preserve">defect count falling</a:t>
+            </a:r>
+          </a:p>
+        </p:txBody>
+      </p:sp>
+      <p:sp>
+        <p:nvSpPr>
+          <p:cNvPr id="171" name="Ex1"/>
+          <p:cNvSpPr/>
+          <p:nvPr/>
+        </p:nvSpPr>
+        <p:spPr>
+          <a:xfrm>
+            <a:off x="3188808" y="4800600"/>
+            <a:ext cx="2765808" cy="640080"/>
+          </a:xfrm>
+          <a:prstGeom prst="rect">
+            <a:avLst/>
+          </a:prstGeom>
+          <a:solidFill>
+            <a:srgbClr val="F5F1E8"/>
+          </a:solidFill>
+          <a:ln w="12700">
+            <a:solidFill>
+              <a:srgbClr val="C9B991"/>
+            </a:solidFill>
+          </a:ln>
+        </p:spPr>
+        <p:txBody>
+          <a:bodyPr wrap="square" lIns="137160" tIns="45720" rIns="137160" bIns="45720" anchor="ctr"/>
+          <a:lstStyle/>
+          <a:p>
+            <a:pPr algn="ctr">
+              <a:buNone/>
+            </a:pPr>
+            <a:r>
+              <a:rPr lang="en-US" sz="2000" b="0" i="0" dirty="0">
+                <a:solidFill>
+                  <a:srgbClr val="5C4826"/>
+                </a:solidFill>
+              </a:rPr>
+              <a:t xml:space="preserve">test-observation issues remaining</a:t>
+            </a:r>
+          </a:p>
+        </p:txBody>
+      </p:sp>
+      <p:sp>
+        <p:nvSpPr>
+          <p:cNvPr id="172" name="Ex2"/>
+          <p:cNvSpPr/>
+          <p:nvPr/>
+        </p:nvSpPr>
+        <p:spPr>
+          <a:xfrm>
+            <a:off x="6103296" y="4800600"/>
+            <a:ext cx="2765808" cy="640080"/>
+          </a:xfrm>
+          <a:prstGeom prst="rect">
+            <a:avLst/>
+          </a:prstGeom>
+          <a:solidFill>
+            <a:srgbClr val="F5F1E8"/>
+          </a:solidFill>
+          <a:ln w="12700">
+            <a:solidFill>
+              <a:srgbClr val="C9B991"/>
+            </a:solidFill>
+          </a:ln>
+        </p:spPr>
+        <p:txBody>
+          <a:bodyPr wrap="square" lIns="137160" tIns="45720" rIns="137160" bIns="45720" anchor="ctr"/>
+          <a:lstStyle/>
+          <a:p>
+            <a:pPr algn="ctr">
+              <a:buNone/>
+            </a:pPr>
+            <a:r>
+              <a:rPr lang="en-US" sz="2000" b="0" i="0" dirty="0">
+                <a:solidFill>
+                  <a:srgbClr val="5C4826"/>
+                </a:solidFill>
+              </a:rPr>
+              <a:t xml:space="preserve">integration escapes continuing</a:t>
+            </a:r>
+          </a:p>
+        </p:txBody>
+      </p:sp>
+      <p:sp>
+        <p:nvSpPr>
+          <p:cNvPr id="180" name="FooterBand"/>
+          <p:cNvSpPr/>
+          <p:nvPr/>
+        </p:nvSpPr>
+        <p:spPr>
+          <a:xfrm>
+            <a:off x="274320" y="5852160"/>
+            <a:ext cx="8595360" cy="566928"/>
+          </a:xfrm>
+          <a:prstGeom prst="rect">
+            <a:avLst/>
+          </a:prstGeom>
+          <a:solidFill>
+            <a:srgbClr val="8E6F3E"/>
+          </a:solidFill>
+          <a:ln>
+            <a:noFill/>
+          </a:ln>
+        </p:spPr>
+        <p:txBody>
+          <a:bodyPr wrap="square" lIns="91440" tIns="45720" rIns="91440" bIns="45720" anchor="ctr"/>
+          <a:lstStyle/>
+          <a:p>
+            <a:pPr algn="ctr">
+              <a:buNone/>
+            </a:pPr>
+            <a:r>
+              <a:rPr lang="en-US" sz="2000" b="1" i="0" dirty="0">
+                <a:solidFill>
+                  <a:srgbClr val="FFFFFF"/>
+                </a:solidFill>
+              </a:rPr>
+              <a:t xml:space="preserve">Three proxies sharing one blind spot are not three independent reasons.</a:t>
+            </a:r>
+          </a:p>
+        </p:txBody>
+      </p:sp>
+    </p:spTree>
+  </p:cSld>
+  <p:clrMapOvr>
+    <a:masterClrMapping/>
+  </p:clrMapOvr>
+  <p:timing>
+    <p:tnLst>
+      <p:par>
+        <p:cTn id="1" dur="indefinite" restart="never" nodeType="tmRoot">
+          <p:childTnLst>
+            <p:seq concurrent="1" nextAc="seek">
+              <p:cTn id="2" dur="indefinite" nodeType="mainSeq">
+                <p:childTnLst>
+                  <p:par>
+                    <p:cTn id="3" fill="hold">
+                      <p:stCondLst>
+                        <p:cond delay="indefinite"/>
+                      </p:stCondLst>
+                      <p:childTnLst>
+                        <p:par>
+                          <p:cTn id="4" fill="hold">
+                            <p:stCondLst>
+                              <p:cond delay="0"/>
+                            </p:stCondLst>
+                            <p:childTnLst>
+                              <p:par>
+                                <p:cTn id="5" presetID="10" presetClass="entr" presetSubtype="0" fill="hold" nodeType="clickEffect">
+                                  <p:stCondLst>
+                                    <p:cond delay="0"/>
+                                  </p:stCondLst>
+                                  <p:childTnLst>
+                                    <p:set>
+                                      <p:cBhvr>
+                                        <p:cTn id="6" dur="1" fill="hold">
+                                          <p:stCondLst>
+                                            <p:cond delay="0"/>
+                                          </p:stCondLst>
+                                        </p:cTn>
+                                        <p:tgtEl>
+                                          <p:spTgt spid="100"/>
+                                        </p:tgtEl>
+                                        <p:attrNameLst>
+                                          <p:attrName>style.visibility</p:attrName>
+                                        </p:attrNameLst>
+                                      </p:cBhvr>
+                                      <p:to>
+                                        <p:strVal val="visible"/>
+                                      </p:to>
+                                    </p:set>
+                                    <p:animEffect transition="in" filter="fade">
+                                      <p:cBhvr>
+                                        <p:cTn id="7" dur="500"/>
+                                        <p:tgtEl>
+                                          <p:spTgt spid="100"/>
+                                        </p:tgtEl>
+                                      </p:cBhvr>
+                                    </p:animEffect>
+                                  </p:childTnLst>
+                                </p:cTn>
+                              </p:par>
+                              <p:par>
+                                <p:cTn id="8" presetID="10" presetClass="entr" presetSubtype="0" fill="hold" nodeType="withEffect">
+                                  <p:stCondLst>
+                                    <p:cond delay="0"/>
+                                  </p:stCondLst>
+                                  <p:childTnLst>
+                                    <p:set>
+                                      <p:cBhvr>
+                                        <p:cTn id="9" dur="1" fill="hold">
+                                          <p:stCondLst>
+                                            <p:cond delay="0"/>
+                                          </p:stCondLst>
+                                        </p:cTn>
+                                        <p:tgtEl>
+                                          <p:spTgt spid="130"/>
+                                        </p:tgtEl>
+                                        <p:attrNameLst>
+                                          <p:attrName>style.visibility</p:attrName>
+                                        </p:attrNameLst>
+                                      </p:cBhvr>
+                                      <p:to>
+                                        <p:strVal val="visible"/>
+                                      </p:to>
+                                    </p:set>
+                                    <p:animEffect transition="in" filter="fade">
+                                      <p:cBhvr>
+                                        <p:cTn id="10" dur="500"/>
+                                        <p:tgtEl>
+                                          <p:spTgt spid="130"/>
+                                        </p:tgtEl>
+                                      </p:cBhvr>
+                                    </p:animEffect>
+                                  </p:childTnLst>
+                                </p:cTn>
+                              </p:par>
+                              <p:par>
+                                <p:cTn id="11" presetID="10" presetClass="entr" presetSubtype="0" fill="hold" nodeType="withEffect">
+                                  <p:stCondLst>
+                                    <p:cond delay="0"/>
+                                  </p:stCondLst>
+                                  <p:childTnLst>
+                                    <p:set>
+                                      <p:cBhvr>
+                                        <p:cTn id="12" dur="1" fill="hold">
+                                          <p:stCondLst>
+                                            <p:cond delay="0"/>
+                                          </p:stCondLst>
+                                        </p:cTn>
+                                        <p:tgtEl>
+                                          <p:spTgt spid="131"/>
+                                        </p:tgtEl>
+                                        <p:attrNameLst>
+                                          <p:attrName>style.visibility</p:attrName>
+                                        </p:attrNameLst>
+                                      </p:cBhvr>
+                                      <p:to>
+                                        <p:strVal val="visible"/>
+                                      </p:to>
+                                    </p:set>
+                                    <p:animEffect transition="in" filter="fade">
+                                      <p:cBhvr>
+                                        <p:cTn id="13" dur="500"/>
+                                        <p:tgtEl>
+                                          <p:spTgt spid="131"/>
+                                        </p:tgtEl>
+                                      </p:cBhvr>
+                                    </p:animEffect>
+                                  </p:childTnLst>
+                                </p:cTn>
+                              </p:par>
+                              <p:par>
+                                <p:cTn id="14" presetID="10" presetClass="entr" presetSubtype="0" fill="hold" nodeType="withEffect">
+                                  <p:stCondLst>
+                                    <p:cond delay="0"/>
+                                  </p:stCondLst>
+                                  <p:childTnLst>
+                                    <p:set>
+                                      <p:cBhvr>
+                                        <p:cTn id="15" dur="1" fill="hold">
+                                          <p:stCondLst>
+                                            <p:cond delay="0"/>
+                                          </p:stCondLst>
+                                        </p:cTn>
+                                        <p:tgtEl>
+                                          <p:spTgt spid="132"/>
+                                        </p:tgtEl>
+                                        <p:attrNameLst>
+                                          <p:attrName>style.visibility</p:attrName>
+                                        </p:attrNameLst>
+                                      </p:cBhvr>
+                                      <p:to>
+                                        <p:strVal val="visible"/>
+                                      </p:to>
+                                    </p:set>
+                                    <p:animEffect transition="in" filter="fade">
+                                      <p:cBhvr>
+                                        <p:cTn id="16" dur="500"/>
+                                        <p:tgtEl>
+                                          <p:spTgt spid="132"/>
+                                        </p:tgtEl>
+                                      </p:cBhvr>
+                                    </p:animEffect>
+                                  </p:childTnLst>
+                                </p:cTn>
+                              </p:par>
+                            </p:childTnLst>
+                          </p:cTn>
+                        </p:par>
+                      </p:childTnLst>
+                    </p:cTn>
+                  </p:par>
+                  <p:par>
+                    <p:cTn id="18" fill="hold">
+                      <p:stCondLst>
+                        <p:cond delay="indefinite"/>
+                      </p:stCondLst>
+                      <p:childTnLst>
+                        <p:par>
+                          <p:cTn id="19" fill="hold">
+                            <p:stCondLst>
+                              <p:cond delay="0"/>
+                            </p:stCondLst>
+                            <p:childTnLst>
+                              <p:par>
+                                <p:cTn id="20" presetID="10" presetClass="entr" presetSubtype="0" fill="hold" nodeType="clickEffect">
+                                  <p:stCondLst>
+                                    <p:cond delay="0"/>
+                                  </p:stCondLst>
+                                  <p:childTnLst>
+                                    <p:set>
+                                      <p:cBhvr>
+                                        <p:cTn id="21" dur="1" fill="hold">
+                                          <p:stCondLst>
+                                            <p:cond delay="0"/>
+                                          </p:stCondLst>
+                                        </p:cTn>
+                                        <p:tgtEl>
+                                          <p:spTgt spid="110"/>
+                                        </p:tgtEl>
+                                        <p:attrNameLst>
+                                          <p:attrName>style.visibility</p:attrName>
+                                        </p:attrNameLst>
+                                      </p:cBhvr>
+                                      <p:to>
+                                        <p:strVal val="visible"/>
+                                      </p:to>
+                                    </p:set>
+                                    <p:animEffect transition="in" filter="fade">
+                                      <p:cBhvr>
+                                        <p:cTn id="22" dur="500"/>
+                                        <p:tgtEl>
+                                          <p:spTgt spid="110"/>
+                                        </p:tgtEl>
+                                      </p:cBhvr>
+                                    </p:animEffect>
+                                  </p:childTnLst>
+                                </p:cTn>
+                              </p:par>
+                            </p:childTnLst>
+                          </p:cTn>
+                        </p:par>
+                      </p:childTnLst>
+                    </p:cTn>
+                  </p:par>
+                  <p:par>
+                    <p:cTn id="24" fill="hold">
+                      <p:stCondLst>
+                        <p:cond delay="indefinite"/>
+                      </p:stCondLst>
+                      <p:childTnLst>
+                        <p:par>
+                          <p:cTn id="25" fill="hold">
+                            <p:stCondLst>
+                              <p:cond delay="0"/>
+                            </p:stCondLst>
+                            <p:childTnLst>
+                              <p:par>
+                                <p:cTn id="26" presetID="10" presetClass="entr" presetSubtype="0" fill="hold" nodeType="clickEffect">
+                                  <p:stCondLst>
+                                    <p:cond delay="0"/>
+                                  </p:stCondLst>
+                                  <p:childTnLst>
+                                    <p:set>
+                                      <p:cBhvr>
+                                        <p:cTn id="27" dur="1" fill="hold">
+                                          <p:stCondLst>
+                                            <p:cond delay="0"/>
+                                          </p:stCondLst>
+                                        </p:cTn>
+                                        <p:tgtEl>
+                                          <p:spTgt spid="111"/>
+                                        </p:tgtEl>
+                                        <p:attrNameLst>
+                                          <p:attrName>style.visibility</p:attrName>
+                                        </p:attrNameLst>
+                                      </p:cBhvr>
+                                      <p:to>
+                                        <p:strVal val="visible"/>
+                                      </p:to>
+                                    </p:set>
+                                    <p:animEffect transition="in" filter="fade">
+                                      <p:cBhvr>
+                                        <p:cTn id="28" dur="500"/>
+                                        <p:tgtEl>
+                                          <p:spTgt spid="111"/>
+                                        </p:tgtEl>
+                                      </p:cBhvr>
+                                    </p:animEffect>
+                                  </p:childTnLst>
+                                </p:cTn>
+                              </p:par>
+                            </p:childTnLst>
+                          </p:cTn>
+                        </p:par>
+                      </p:childTnLst>
+                    </p:cTn>
+                  </p:par>
+                  <p:par>
+                    <p:cTn id="30" fill="hold">
+                      <p:stCondLst>
+                        <p:cond delay="indefinite"/>
+                      </p:stCondLst>
+                      <p:childTnLst>
+                        <p:par>
+                          <p:cTn id="31" fill="hold">
+                            <p:stCondLst>
+                              <p:cond delay="0"/>
+                            </p:stCondLst>
+                            <p:childTnLst>
+                              <p:par>
+                                <p:cTn id="32" presetID="10" presetClass="entr" presetSubtype="0" fill="hold" nodeType="clickEffect">
+                                  <p:stCondLst>
+                                    <p:cond delay="0"/>
+                                  </p:stCondLst>
+                                  <p:childTnLst>
+                                    <p:set>
+                                      <p:cBhvr>
+                                        <p:cTn id="33" dur="1" fill="hold">
+                                          <p:stCondLst>
+                                            <p:cond delay="0"/>
+                                          </p:stCondLst>
+                                        </p:cTn>
+                                        <p:tgtEl>
+                                          <p:spTgt spid="112"/>
+                                        </p:tgtEl>
+                                        <p:attrNameLst>
+                                          <p:attrName>style.visibility</p:attrName>
+                                        </p:attrNameLst>
+                                      </p:cBhvr>
+                                      <p:to>
+                                        <p:strVal val="visible"/>
+                                      </p:to>
+                                    </p:set>
+                                    <p:animEffect transition="in" filter="fade">
+                                      <p:cBhvr>
+                                        <p:cTn id="34" dur="500"/>
+                                        <p:tgtEl>
+                                          <p:spTgt spid="112"/>
+                                        </p:tgtEl>
+                                      </p:cBhvr>
+                                    </p:animEffect>
+                                  </p:childTnLst>
+                                </p:cTn>
+                              </p:par>
+                            </p:childTnLst>
+                          </p:cTn>
+                        </p:par>
+                      </p:childTnLst>
+                    </p:cTn>
+                  </p:par>
+                  <p:par>
+                    <p:cTn id="36" fill="hold">
+                      <p:stCondLst>
+                        <p:cond delay="indefinite"/>
+                      </p:stCondLst>
+                      <p:childTnLst>
+                        <p:par>
+                          <p:cTn id="37" fill="hold">
+                            <p:stCondLst>
+                              <p:cond delay="0"/>
+                            </p:stCondLst>
+                            <p:childTnLst>
+                              <p:par>
+                                <p:cTn id="38" presetID="10" presetClass="entr" presetSubtype="0" fill="hold" nodeType="clickEffect">
+                                  <p:stCondLst>
+                                    <p:cond delay="0"/>
+                                  </p:stCondLst>
+                                  <p:childTnLst>
+                                    <p:set>
+                                      <p:cBhvr>
+                                        <p:cTn id="39" dur="1" fill="hold">
+                                          <p:stCondLst>
+                                            <p:cond delay="0"/>
+                                          </p:stCondLst>
+                                        </p:cTn>
+                                        <p:tgtEl>
+                                          <p:spTgt spid="120"/>
+                                        </p:tgtEl>
+                                        <p:attrNameLst>
+                                          <p:attrName>style.visibility</p:attrName>
+                                        </p:attrNameLst>
+                                      </p:cBhvr>
+                                      <p:to>
+                                        <p:strVal val="visible"/>
+                                      </p:to>
+                                    </p:set>
+                                    <p:animEffect transition="in" filter="fade">
+                                      <p:cBhvr>
+                                        <p:cTn id="40" dur="500"/>
+                                        <p:tgtEl>
+                                          <p:spTgt spid="120"/>
+                                        </p:tgtEl>
+                                      </p:cBhvr>
+                                    </p:animEffect>
+                                  </p:childTnLst>
+                                </p:cTn>
+                              </p:par>
+                              <p:par>
+                                <p:cTn id="41" presetID="10" presetClass="entr" presetSubtype="0" fill="hold" nodeType="withEffect">
+                                  <p:stCondLst>
+                                    <p:cond delay="0"/>
+                                  </p:stCondLst>
+                                  <p:childTnLst>
+                                    <p:set>
+                                      <p:cBhvr>
+                                        <p:cTn id="42" dur="1" fill="hold">
+                                          <p:stCondLst>
+                                            <p:cond delay="0"/>
+                                          </p:stCondLst>
+                                        </p:cTn>
+                                        <p:tgtEl>
+                                          <p:spTgt spid="140"/>
+                                        </p:tgtEl>
+                                        <p:attrNameLst>
+                                          <p:attrName>style.visibility</p:attrName>
+                                        </p:attrNameLst>
+                                      </p:cBhvr>
+                                      <p:to>
+                                        <p:strVal val="visible"/>
+                                      </p:to>
+                                    </p:set>
+                                    <p:animEffect transition="in" filter="fade">
+                                      <p:cBhvr>
+                                        <p:cTn id="43" dur="500"/>
+                                        <p:tgtEl>
+                                          <p:spTgt spid="140"/>
+                                        </p:tgtEl>
+                                      </p:cBhvr>
+                                    </p:animEffect>
+                                  </p:childTnLst>
+                                </p:cTn>
+                              </p:par>
+                              <p:par>
+                                <p:cTn id="44" presetID="10" presetClass="entr" presetSubtype="0" fill="hold" nodeType="withEffect">
+                                  <p:stCondLst>
+                                    <p:cond delay="0"/>
+                                  </p:stCondLst>
+                                  <p:childTnLst>
+                                    <p:set>
+                                      <p:cBhvr>
+                                        <p:cTn id="45" dur="1" fill="hold">
+                                          <p:stCondLst>
+                                            <p:cond delay="0"/>
+                                          </p:stCondLst>
+                                        </p:cTn>
+                                        <p:tgtEl>
+                                          <p:spTgt spid="141"/>
+                                        </p:tgtEl>
+                                        <p:attrNameLst>
+                                          <p:attrName>style.visibility</p:attrName>
+                                        </p:attrNameLst>
+                                      </p:cBhvr>
+                                      <p:to>
+                                        <p:strVal val="visible"/>
+                                      </p:to>
+                                    </p:set>
+                                    <p:animEffect transition="in" filter="fade">
+                                      <p:cBhvr>
+                                        <p:cTn id="46" dur="500"/>
+                                        <p:tgtEl>
+                                          <p:spTgt spid="141"/>
+                                        </p:tgtEl>
+                                      </p:cBhvr>
+                                    </p:animEffect>
+                                  </p:childTnLst>
+                                </p:cTn>
+                              </p:par>
+                              <p:par>
+                                <p:cTn id="47" presetID="10" presetClass="entr" presetSubtype="0" fill="hold" nodeType="withEffect">
+                                  <p:stCondLst>
+                                    <p:cond delay="0"/>
+                                  </p:stCondLst>
+                                  <p:childTnLst>
+                                    <p:set>
+                                      <p:cBhvr>
+                                        <p:cTn id="48" dur="1" fill="hold">
+                                          <p:stCondLst>
+                                            <p:cond delay="0"/>
+                                          </p:stCondLst>
+                                        </p:cTn>
+                                        <p:tgtEl>
+                                          <p:spTgt spid="142"/>
+                                        </p:tgtEl>
+                                        <p:attrNameLst>
+                                          <p:attrName>style.visibility</p:attrName>
+                                        </p:attrNameLst>
+                                      </p:cBhvr>
+                                      <p:to>
+                                        <p:strVal val="visible"/>
+                                      </p:to>
+                                    </p:set>
+                                    <p:animEffect transition="in" filter="fade">
+                                      <p:cBhvr>
+                                        <p:cTn id="49" dur="500"/>
+                                        <p:tgtEl>
+                                          <p:spTgt spid="142"/>
+                                        </p:tgtEl>
+                                      </p:cBhvr>
+                                    </p:animEffect>
+                                  </p:childTnLst>
+                                </p:cTn>
+                              </p:par>
+                            </p:childTnLst>
+                          </p:cTn>
+                        </p:par>
+                      </p:childTnLst>
+                    </p:cTn>
+                  </p:par>
+                  <p:par>
+                    <p:cTn id="51" fill="hold">
+                      <p:stCondLst>
+                        <p:cond delay="indefinite"/>
+                      </p:stCondLst>
+                      <p:childTnLst>
+                        <p:par>
+                          <p:cTn id="52" fill="hold">
+                            <p:stCondLst>
+                              <p:cond delay="0"/>
+                            </p:stCondLst>
+                            <p:childTnLst>
+                              <p:par>
+                                <p:cTn id="53" presetID="10" presetClass="entr" presetSubtype="0" fill="hold" nodeType="clickEffect">
+                                  <p:stCondLst>
+                                    <p:cond delay="0"/>
+                                  </p:stCondLst>
+                                  <p:childTnLst>
+                                    <p:set>
+                                      <p:cBhvr>
+                                        <p:cTn id="54" dur="1" fill="hold">
+                                          <p:stCondLst>
+                                            <p:cond delay="0"/>
+                                          </p:stCondLst>
+                                        </p:cTn>
+                                        <p:tgtEl>
+                                          <p:spTgt spid="150"/>
+                                        </p:tgtEl>
+                                        <p:attrNameLst>
+                                          <p:attrName>style.visibility</p:attrName>
+                                        </p:attrNameLst>
+                                      </p:cBhvr>
+                                      <p:to>
+                                        <p:strVal val="visible"/>
+                                      </p:to>
+                                    </p:set>
+                                    <p:animEffect transition="in" filter="fade">
+                                      <p:cBhvr>
+                                        <p:cTn id="55" dur="500"/>
+                                        <p:tgtEl>
+                                          <p:spTgt spid="150"/>
+                                        </p:tgtEl>
+                                      </p:cBhvr>
+                                    </p:animEffect>
+                                  </p:childTnLst>
+                                </p:cTn>
+                              </p:par>
+                            </p:childTnLst>
+                          </p:cTn>
+                        </p:par>
+                      </p:childTnLst>
+                    </p:cTn>
+                  </p:par>
+                  <p:par>
+                    <p:cTn id="57" fill="hold">
+                      <p:stCondLst>
+                        <p:cond delay="indefinite"/>
+                      </p:stCondLst>
+                      <p:childTnLst>
+                        <p:par>
+                          <p:cTn id="58" fill="hold">
+                            <p:stCondLst>
+                              <p:cond delay="0"/>
+                            </p:stCondLst>
+                            <p:childTnLst>
+                              <p:par>
+                                <p:cTn id="59" presetID="10" presetClass="entr" presetSubtype="0" fill="hold" nodeType="clickEffect">
+                                  <p:stCondLst>
+                                    <p:cond delay="0"/>
+                                  </p:stCondLst>
+                                  <p:childTnLst>
+                                    <p:set>
+                                      <p:cBhvr>
+                                        <p:cTn id="60" dur="1" fill="hold">
+                                          <p:stCondLst>
+                                            <p:cond delay="0"/>
+                                          </p:stCondLst>
+                                        </p:cTn>
+                                        <p:tgtEl>
+                                          <p:spTgt spid="160"/>
+                                        </p:tgtEl>
+                                        <p:attrNameLst>
+                                          <p:attrName>style.visibility</p:attrName>
+                                        </p:attrNameLst>
+                                      </p:cBhvr>
+                                      <p:to>
+                                        <p:strVal val="visible"/>
+                                      </p:to>
+                                    </p:set>
+                                    <p:animEffect transition="in" filter="fade">
+                                      <p:cBhvr>
+                                        <p:cTn id="61" dur="500"/>
+                                        <p:tgtEl>
+                                          <p:spTgt spid="160"/>
+                                        </p:tgtEl>
+                                      </p:cBhvr>
+                                    </p:animEffect>
+                                  </p:childTnLst>
+                                </p:cTn>
+                              </p:par>
+                              <p:par>
+                                <p:cTn id="62" presetID="10" presetClass="entr" presetSubtype="0" fill="hold" nodeType="withEffect">
+                                  <p:stCondLst>
+                                    <p:cond delay="0"/>
+                                  </p:stCondLst>
+                                  <p:childTnLst>
+                                    <p:set>
+                                      <p:cBhvr>
+                                        <p:cTn id="63" dur="1" fill="hold">
+                                          <p:stCondLst>
+                                            <p:cond delay="0"/>
+                                          </p:stCondLst>
+                                        </p:cTn>
+                                        <p:tgtEl>
+                                          <p:spTgt spid="170"/>
+                                        </p:tgtEl>
+                                        <p:attrNameLst>
+                                          <p:attrName>style.visibility</p:attrName>
+                                        </p:attrNameLst>
+                                      </p:cBhvr>
+                                      <p:to>
+                                        <p:strVal val="visible"/>
+                                      </p:to>
+                                    </p:set>
+                                    <p:animEffect transition="in" filter="fade">
+                                      <p:cBhvr>
+                                        <p:cTn id="64" dur="500"/>
+                                        <p:tgtEl>
+                                          <p:spTgt spid="170"/>
+                                        </p:tgtEl>
+                                      </p:cBhvr>
+                                    </p:animEffect>
+                                  </p:childTnLst>
+                                </p:cTn>
+                              </p:par>
+                              <p:par>
+                                <p:cTn id="65" presetID="10" presetClass="entr" presetSubtype="0" fill="hold" nodeType="withEffect">
+                                  <p:stCondLst>
+                                    <p:cond delay="0"/>
+                                  </p:stCondLst>
+                                  <p:childTnLst>
+                                    <p:set>
+                                      <p:cBhvr>
+                                        <p:cTn id="66" dur="1" fill="hold">
+                                          <p:stCondLst>
+                                            <p:cond delay="0"/>
+                                          </p:stCondLst>
+                                        </p:cTn>
+                                        <p:tgtEl>
+                                          <p:spTgt spid="171"/>
+                                        </p:tgtEl>
+                                        <p:attrNameLst>
+                                          <p:attrName>style.visibility</p:attrName>
+                                        </p:attrNameLst>
+                                      </p:cBhvr>
+                                      <p:to>
+                                        <p:strVal val="visible"/>
+                                      </p:to>
+                                    </p:set>
+                                    <p:animEffect transition="in" filter="fade">
+                                      <p:cBhvr>
+                                        <p:cTn id="67" dur="500"/>
+                                        <p:tgtEl>
+                                          <p:spTgt spid="171"/>
+                                        </p:tgtEl>
+                                      </p:cBhvr>
+                                    </p:animEffect>
+                                  </p:childTnLst>
+                                </p:cTn>
+                              </p:par>
+                              <p:par>
+                                <p:cTn id="68" presetID="10" presetClass="entr" presetSubtype="0" fill="hold" nodeType="withEffect">
+                                  <p:stCondLst>
+                                    <p:cond delay="0"/>
+                                  </p:stCondLst>
+                                  <p:childTnLst>
+                                    <p:set>
+                                      <p:cBhvr>
+                                        <p:cTn id="69" dur="1" fill="hold">
+                                          <p:stCondLst>
+                                            <p:cond delay="0"/>
+                                          </p:stCondLst>
+                                        </p:cTn>
+                                        <p:tgtEl>
+                                          <p:spTgt spid="172"/>
+                                        </p:tgtEl>
+                                        <p:attrNameLst>
+                                          <p:attrName>style.visibility</p:attrName>
+                                        </p:attrNameLst>
+                                      </p:cBhvr>
+                                      <p:to>
+                                        <p:strVal val="visible"/>
+                                      </p:to>
+                                    </p:set>
+                                    <p:animEffect transition="in" filter="fade">
+                                      <p:cBhvr>
+                                        <p:cTn id="70" dur="500"/>
+                                        <p:tgtEl>
+                                          <p:spTgt spid="172"/>
+                                        </p:tgtEl>
+                                      </p:cBhvr>
+                                    </p:animEffect>
+                                  </p:childTnLst>
+                                </p:cTn>
+                              </p:par>
+                            </p:childTnLst>
+                          </p:cTn>
+                        </p:par>
+                      </p:childTnLst>
+                    </p:cTn>
+                  </p:par>
+                  <p:par>
+                    <p:cTn id="72" fill="hold">
+                      <p:stCondLst>
+                        <p:cond delay="indefinite"/>
+                      </p:stCondLst>
+                      <p:childTnLst>
+                        <p:par>
+                          <p:cTn id="73" fill="hold">
+                            <p:stCondLst>
+                              <p:cond delay="0"/>
+                            </p:stCondLst>
+                            <p:childTnLst>
+                              <p:par>
+                                <p:cTn id="74" presetID="10" presetClass="entr" presetSubtype="0" fill="hold" nodeType="clickEffect">
+                                  <p:stCondLst>
+                                    <p:cond delay="0"/>
+                                  </p:stCondLst>
+                                  <p:childTnLst>
+                                    <p:set>
+                                      <p:cBhvr>
+                                        <p:cTn id="75" dur="1" fill="hold">
+                                          <p:stCondLst>
+                                            <p:cond delay="0"/>
+                                          </p:stCondLst>
+                                        </p:cTn>
+                                        <p:tgtEl>
+                                          <p:spTgt spid="180"/>
+                                        </p:tgtEl>
+                                        <p:attrNameLst>
+                                          <p:attrName>style.visibility</p:attrName>
+                                        </p:attrNameLst>
+                                      </p:cBhvr>
+                                      <p:to>
+                                        <p:strVal val="visible"/>
+                                      </p:to>
+                                    </p:set>
+                                    <p:animEffect transition="in" filter="fade">
+                                      <p:cBhvr>
+                                        <p:cTn id="76" dur="500"/>
+                                        <p:tgtEl>
+                                          <p:spTgt spid="180"/>
+                                        </p:tgtEl>
+                                      </p:cBhvr>
+                                    </p:animEffect>
+                                  </p:childTnLst>
+                                </p:cTn>
+                              </p:par>
+                            </p:childTnLst>
+                          </p:cTn>
+                        </p:par>
+                      </p:childTnLst>
+                    </p:cTn>
+                  </p:par>
+                </p:childTnLst>
+              </p:cTn>
+              <p:prevCondLst>
+                <p:cond evt="onPrev" delay="0">
+                  <p:tgtEl>
+                    <p:sldTgt/>
+                  </p:tgtEl>
+                </p:cond>
+              </p:prevCondLst>
+              <p:nextCondLst>
+                <p:cond evt="onNext" delay="0">
+                  <p:tgtEl>
+                    <p:sldTgt/>
+                  </p:tgtEl>
+                </p:cond>
+              </p:nextCondLst>
+            </p:seq>
+          </p:childTnLst>
+        </p:cTn>
+      </p:par>
+    </p:tnLst>
+  </p:timing>
+</p:sld>
+</file>
+
+<file path=ppt/slides/slide32.xml><?xml version="1.0" encoding="utf-8"?>
+<p:sld xmlns:a="http://schemas.openxmlformats.org/drawingml/2006/main" xmlns:r="http://schemas.openxmlformats.org/officeDocument/2006/relationships" xmlns:p="http://schemas.openxmlformats.org/presentationml/2006/main">
+  <p:cSld>
+    <p:spTree>
+      <p:nvGrpSpPr>
+        <p:cNvPr id="1" name=""/>
+        <p:cNvGrpSpPr/>
+        <p:nvPr/>
+      </p:nvGrpSpPr>
+      <p:grpSpPr>
+        <a:xfrm>
+          <a:off x="0" y="0"/>
+          <a:ext cx="0" cy="0"/>
+          <a:chOff x="0" y="0"/>
+          <a:chExt cx="0" cy="0"/>
+        </a:xfrm>
+      </p:grpSpPr>
+      <p:sp>
+        <p:nvSpPr>
+          <p:cNvPr id="2" name="Title 1"/>
+          <p:cNvSpPr>
+            <a:spLocks noGrp="1"/>
+          </p:cNvSpPr>
+          <p:nvPr>
+            <p:ph type="title"/>
+          </p:nvPr>
+        </p:nvSpPr>
+        <p:spPr>
+          <a:xfrm>
+            <a:off x="685800" y="2140000"/>
+            <a:ext cx="7772400" cy="1450000"/>
+          </a:xfrm>
+        </p:spPr>
+        <p:txBody>
+          <a:bodyPr>
+            <a:normAutofit/>
+          </a:bodyPr>
+          <a:lstStyle/>
+          <a:p>
+            <a:pPr algn="ctr">
+              <a:buNone/>
+              <a:defRPr b="0"/>
+            </a:pPr>
+            <a:r>
+              <a:rPr lang="en-US" sz="3400" b="0" i="0" dirty="0">
+                <a:solidFill>
+                  <a:srgbClr val="000000"/>
+                </a:solidFill>
+              </a:rPr>
+              <a:t>Stretch break</a:t>
+            </a:r>
+          </a:p>
+        </p:txBody>
+      </p:sp>
+      <p:sp>
+        <p:nvSpPr>
+          <p:cNvPr id="3" name="Slide Number Placeholder 3"/>
+          <p:cNvSpPr>
+            <a:spLocks noGrp="1"/>
+          </p:cNvSpPr>
+          <p:nvPr>
+            <p:ph type="sldNum" sz="quarter" idx="4"/>
+          </p:nvPr>
+        </p:nvSpPr>
+        <p:spPr/>
+        <p:txBody>
+          <a:bodyPr/>
+          <a:lstStyle/>
+          <a:p>
+            <a:fld id="{B7EB45DA-9A0D-DC49-8E02-F30A5DDC21C3}" type="slidenum">
+              <a:rPr lang="en-US" smtClean="0"/>
+              <a:t>20</a:t>
+            </a:fld>
+            <a:endParaRPr lang="en-US"/>
+          </a:p>
+        </p:txBody>
+      </p:sp>
+      <p:sp>
+        <p:nvSpPr>
+          <p:cNvPr id="101" name="Rule"/>
+          <p:cNvSpPr/>
+          <p:nvPr/>
+        </p:nvSpPr>
+        <p:spPr>
+          <a:xfrm>
+            <a:off x="3429000" y="3383280"/>
+            <a:ext cx="2286000" cy="50800"/>
+          </a:xfrm>
+          <a:prstGeom prst="rect">
+            <a:avLst/>
+          </a:prstGeom>
+          <a:solidFill>
+            <a:srgbClr val="8E6F3E"/>
+          </a:solidFill>
+          <a:ln>
+            <a:noFill/>
+          </a:ln>
+        </p:spPr>
+        <p:txBody>
+          <a:bodyPr wrap="square" lIns="91440" tIns="45720" rIns="91440" bIns="45720" anchor="ctr"/>
+          <a:lstStyle/>
+          <a:p>
+            <a:pPr algn="ctr">
+              <a:buNone/>
+            </a:pPr>
+            <a:endParaRPr/>
+          </a:p>
+        </p:txBody>
+      </p:sp>
+    </p:spTree>
+  </p:cSld>
+  <p:clrMapOvr>
+    <a:masterClrMapping/>
+  </p:clrMapOvr>
+</p:sld>
+</file>
+
 <file path=ppt/slides/slide4.xml><?xml version="1.0" encoding="utf-8"?>
 <p:sld xmlns:a="http://schemas.openxmlformats.org/drawingml/2006/main" xmlns:r="http://schemas.openxmlformats.org/officeDocument/2006/relationships" xmlns:p="http://schemas.openxmlformats.org/presentationml/2006/main">
   <p:cSld>
@@ -21760,8 +24682,8 @@
         </p:nvSpPr>
         <p:spPr>
           <a:xfrm>
-            <a:off x="2971800" y="4700000"/>
-            <a:ext cx="5897880" cy="640080"/>
+            <a:off x="3017520" y="4700000"/>
+            <a:ext cx="5852160" cy="640080"/>
           </a:xfrm>
           <a:prstGeom prst="rect">
             <a:avLst/>
@@ -22603,7 +25525,7 @@
         </p:nvSpPr>
         <p:spPr>
           <a:xfrm>
-            <a:off x="274320" y="3700000"/>
+            <a:off x="274320" y="3383280"/>
             <a:ext cx="8595360" cy="868680"/>
           </a:xfrm>
           <a:prstGeom prst="rect">
@@ -22653,6 +25575,72 @@
                 </a:solidFill>
               </a:rPr>
               <a:t xml:space="preserve"> their consequences can be fully observed.</a:t>
+            </a:r>
+          </a:p>
+        </p:txBody>
+      </p:sp>
+      <p:sp>
+        <p:nvSpPr>
+          <p:cNvPr id="107" name="Implicit"/>
+          <p:cNvSpPr txBox="1"/>
+          <p:nvPr/>
+        </p:nvSpPr>
+        <p:spPr>
+          <a:xfrm>
+            <a:off x="274320" y="4480560"/>
+            <a:ext cx="8595360" cy="1005840"/>
+          </a:xfrm>
+          <a:prstGeom prst="rect">
+            <a:avLst/>
+          </a:prstGeom>
+          <a:noFill/>
+          <a:ln>
+            <a:noFill/>
+          </a:ln>
+        </p:spPr>
+        <p:txBody>
+          <a:bodyPr wrap="square" lIns="0" tIns="0" rIns="0" bIns="0" anchor="ctr"/>
+          <a:lstStyle/>
+          <a:p>
+            <a:pPr algn="ctr">
+              <a:buNone/>
+            </a:pPr>
+            <a:r>
+              <a:rPr lang="en-US" sz="2000" b="1" i="0" dirty="0">
+                <a:solidFill>
+                  <a:srgbClr val="5C4826"/>
+                </a:solidFill>
+              </a:rPr>
+              <a:t>The model may be explicit or implicit.</a:t>
+            </a:r>
+          </a:p>
+          <a:p>
+            <a:pPr algn="ctr">
+              <a:spcBef>
+                <a:spcPts val="140"/>
+              </a:spcBef>
+              <a:buNone/>
+            </a:pPr>
+            <a:r>
+              <a:rPr lang="en-US" sz="2000" b="0" i="0" dirty="0">
+                <a:solidFill>
+                  <a:srgbClr val="5C4826"/>
+                </a:solidFill>
+              </a:rPr>
+              <a:t>An equation, diagram, rule of thumb, causal belief, or assumed relationship</a:t>
+            </a:r>
+          </a:p>
+          <a:p>
+            <a:pPr algn="ctr">
+              <a:buNone/>
+            </a:pPr>
+            <a:r>
+              <a:rPr lang="en-US" sz="2000" b="0" i="0" dirty="0">
+                <a:solidFill>
+                  <a:srgbClr val="5C4826"/>
+                </a:solidFill>
+              </a:rPr>
+              <a:t>can all supply the model behind a decision.</a:t>
             </a:r>
           </a:p>
         </p:txBody>
@@ -24501,7 +27489,7 @@
         </p:nvSpPr>
         <p:spPr>
           <a:xfrm>
-            <a:off x="685800" y="2354580"/>
+            <a:off x="685800" y="1932432"/>
             <a:ext cx="2377440" cy="731520"/>
           </a:xfrm>
           <a:prstGeom prst="rect">
@@ -24555,8 +27543,8 @@
         </p:nvCxnSpPr>
         <p:spPr>
           <a:xfrm flipV="1">
-            <a:off x="3063240" y="1257300"/>
-            <a:ext cx="1691640" cy="1463040"/>
+            <a:off x="3063240" y="1078992"/>
+            <a:ext cx="1691640" cy="1219200"/>
           </a:xfrm>
           <a:prstGeom prst="line">
             <a:avLst/>
@@ -24591,8 +27579,8 @@
         </p:nvSpPr>
         <p:spPr>
           <a:xfrm>
-            <a:off x="4754880" y="1005840"/>
-            <a:ext cx="3200400" cy="502920"/>
+            <a:off x="4754880" y="850392"/>
+            <a:ext cx="3200400" cy="457200"/>
           </a:xfrm>
           <a:prstGeom prst="rect">
             <a:avLst/>
@@ -24647,8 +27635,8 @@
         </p:nvCxnSpPr>
         <p:spPr>
           <a:xfrm flipV="1">
-            <a:off x="3063240" y="1842516"/>
-            <a:ext cx="1691640" cy="877824"/>
+            <a:off x="3063240" y="1566672"/>
+            <a:ext cx="1691640" cy="731520"/>
           </a:xfrm>
           <a:prstGeom prst="line">
             <a:avLst/>
@@ -24683,8 +27671,8 @@
         </p:nvSpPr>
         <p:spPr>
           <a:xfrm>
-            <a:off x="4754880" y="1591056"/>
-            <a:ext cx="3200400" cy="502920"/>
+            <a:off x="4754880" y="1338072"/>
+            <a:ext cx="3200400" cy="457200"/>
           </a:xfrm>
           <a:prstGeom prst="rect">
             <a:avLst/>
@@ -24739,8 +27727,8 @@
         </p:nvCxnSpPr>
         <p:spPr>
           <a:xfrm flipV="1">
-            <a:off x="3063240" y="2427732"/>
-            <a:ext cx="1691640" cy="292608"/>
+            <a:off x="3063240" y="2054352"/>
+            <a:ext cx="1691640" cy="243840"/>
           </a:xfrm>
           <a:prstGeom prst="line">
             <a:avLst/>
@@ -24775,8 +27763,8 @@
         </p:nvSpPr>
         <p:spPr>
           <a:xfrm>
-            <a:off x="4754880" y="2176272"/>
-            <a:ext cx="3200400" cy="502920"/>
+            <a:off x="4754880" y="1825752"/>
+            <a:ext cx="3200400" cy="457200"/>
           </a:xfrm>
           <a:prstGeom prst="rect">
             <a:avLst/>
@@ -24831,8 +27819,8 @@
         </p:nvCxnSpPr>
         <p:spPr>
           <a:xfrm>
-            <a:off x="3063240" y="2720340"/>
-            <a:ext cx="1691640" cy="292608"/>
+            <a:off x="3063240" y="2298192"/>
+            <a:ext cx="1691640" cy="243840"/>
           </a:xfrm>
           <a:prstGeom prst="line">
             <a:avLst/>
@@ -24867,8 +27855,8 @@
         </p:nvSpPr>
         <p:spPr>
           <a:xfrm>
-            <a:off x="4754880" y="2761488"/>
-            <a:ext cx="3200400" cy="502920"/>
+            <a:off x="4754880" y="2313432"/>
+            <a:ext cx="3200400" cy="457200"/>
           </a:xfrm>
           <a:prstGeom prst="rect">
             <a:avLst/>
@@ -24923,8 +27911,8 @@
         </p:nvCxnSpPr>
         <p:spPr>
           <a:xfrm>
-            <a:off x="3063240" y="2720340"/>
-            <a:ext cx="1691640" cy="877824"/>
+            <a:off x="3063240" y="2298192"/>
+            <a:ext cx="1691640" cy="731520"/>
           </a:xfrm>
           <a:prstGeom prst="line">
             <a:avLst/>
@@ -24959,8 +27947,8 @@
         </p:nvSpPr>
         <p:spPr>
           <a:xfrm>
-            <a:off x="4754880" y="3346704"/>
-            <a:ext cx="3200400" cy="502920"/>
+            <a:off x="4754880" y="2801112"/>
+            <a:ext cx="3200400" cy="457200"/>
           </a:xfrm>
           <a:prstGeom prst="rect">
             <a:avLst/>
@@ -25015,8 +28003,8 @@
         </p:nvCxnSpPr>
         <p:spPr>
           <a:xfrm>
-            <a:off x="3063240" y="2720340"/>
-            <a:ext cx="1691640" cy="1463040"/>
+            <a:off x="3063240" y="2298192"/>
+            <a:ext cx="1691640" cy="1219200"/>
           </a:xfrm>
           <a:prstGeom prst="line">
             <a:avLst/>
@@ -25051,8 +28039,8 @@
         </p:nvSpPr>
         <p:spPr>
           <a:xfrm>
-            <a:off x="4754880" y="3931920"/>
-            <a:ext cx="3200400" cy="502920"/>
+            <a:off x="4754880" y="3288792"/>
+            <a:ext cx="3200400" cy="457200"/>
           </a:xfrm>
           <a:prstGeom prst="rect">
             <a:avLst/>
@@ -25115,8 +28103,8 @@
         </p:nvSpPr>
         <p:spPr>
           <a:xfrm>
-            <a:off x="685800" y="4800600"/>
-            <a:ext cx="7269480" cy="731520"/>
+            <a:off x="685800" y="3931920"/>
+            <a:ext cx="7269480" cy="457200"/>
           </a:xfrm>
           <a:prstGeom prst="rect">
             <a:avLst/>
@@ -25162,6 +28150,207 @@
           </a:p>
         </p:txBody>
       </p:sp>
+      <p:sp>
+        <p:nvSpPr>
+          <p:cNvPr id="40" name="ClaimBox"/>
+          <p:cNvSpPr/>
+          <p:nvPr/>
+        </p:nvSpPr>
+        <p:spPr>
+          <a:xfrm>
+            <a:off x="685800" y="4572000"/>
+            <a:ext cx="3383280" cy="1097280"/>
+          </a:xfrm>
+          <a:prstGeom prst="rect">
+            <a:avLst/>
+          </a:prstGeom>
+          <a:solidFill>
+            <a:srgbClr val="F5F1E8"/>
+          </a:solidFill>
+          <a:ln w="12700">
+            <a:solidFill>
+              <a:srgbClr val="C9B991"/>
+            </a:solidFill>
+          </a:ln>
+        </p:spPr>
+        <p:txBody>
+          <a:bodyPr wrap="square" lIns="91440" tIns="45720" rIns="91440" bIns="45720" anchor="ctr"/>
+          <a:lstStyle/>
+          <a:p>
+            <a:pPr algn="ctr">
+              <a:buNone/>
+            </a:pPr>
+            <a:r>
+              <a:rPr lang="en-US" sz="2000" b="1" i="0" dirty="0">
+                <a:solidFill>
+                  <a:srgbClr val="8E6F3E"/>
+                </a:solidFill>
+              </a:rPr>
+              <a:t>CLAIM</a:t>
+            </a:r>
+          </a:p>
+          <a:p>
+            <a:pPr algn="ctr">
+              <a:spcBef>
+                <a:spcPts val="140"/>
+              </a:spcBef>
+              <a:buNone/>
+            </a:pPr>
+            <a:r>
+              <a:rPr lang="en-US" sz="2000" b="0" i="0" dirty="0">
+                <a:solidFill>
+                  <a:srgbClr val="5C4826"/>
+                </a:solidFill>
+              </a:rPr>
+              <a:t>system meets the 500 ms</a:t>
+            </a:r>
+          </a:p>
+          <a:p>
+            <a:pPr algn="ctr">
+              <a:buNone/>
+            </a:pPr>
+            <a:r>
+              <a:rPr lang="en-US" sz="2000" b="0" i="0" dirty="0">
+                <a:solidFill>
+                  <a:srgbClr val="5C4826"/>
+                </a:solidFill>
+              </a:rPr>
+              <a:t>responsiveness requirement</a:t>
+            </a:r>
+          </a:p>
+        </p:txBody>
+      </p:sp>
+      <p:sp>
+        <p:nvSpPr>
+          <p:cNvPr id="43" name="MeasBox"/>
+          <p:cNvSpPr/>
+          <p:nvPr/>
+        </p:nvSpPr>
+        <p:spPr>
+          <a:xfrm>
+            <a:off x="5577840" y="4572000"/>
+            <a:ext cx="2377440" cy="1097280"/>
+          </a:xfrm>
+          <a:prstGeom prst="rect">
+            <a:avLst/>
+          </a:prstGeom>
+          <a:solidFill>
+            <a:srgbClr val="F5F1E8"/>
+          </a:solidFill>
+          <a:ln w="12700">
+            <a:solidFill>
+              <a:srgbClr val="C9B991"/>
+            </a:solidFill>
+          </a:ln>
+        </p:spPr>
+        <p:txBody>
+          <a:bodyPr wrap="square" lIns="91440" tIns="45720" rIns="91440" bIns="45720" anchor="ctr"/>
+          <a:lstStyle/>
+          <a:p>
+            <a:pPr algn="ctr">
+              <a:buNone/>
+            </a:pPr>
+            <a:r>
+              <a:rPr lang="en-US" sz="2000" b="1" i="0" dirty="0">
+                <a:solidFill>
+                  <a:srgbClr val="8E6F3E"/>
+                </a:solidFill>
+              </a:rPr>
+              <a:t>MEASUREMENT</a:t>
+            </a:r>
+          </a:p>
+          <a:p>
+            <a:pPr algn="ctr">
+              <a:spcBef>
+                <a:spcPts val="140"/>
+              </a:spcBef>
+              <a:buNone/>
+            </a:pPr>
+            <a:r>
+              <a:rPr lang="en-US" sz="2000" b="0" i="0" dirty="0">
+                <a:solidFill>
+                  <a:srgbClr val="5C4826"/>
+                </a:solidFill>
+              </a:rPr>
+              <a:t>p99 = 420 ms</a:t>
+            </a:r>
+          </a:p>
+        </p:txBody>
+      </p:sp>
+      <p:sp>
+        <p:nvSpPr>
+          <p:cNvPr id="41" name="EvidenceLbl"/>
+          <p:cNvSpPr txBox="1"/>
+          <p:nvPr/>
+        </p:nvSpPr>
+        <p:spPr>
+          <a:xfrm>
+            <a:off x="4206240" y="4663440"/>
+            <a:ext cx="1234440" cy="365760"/>
+          </a:xfrm>
+          <a:prstGeom prst="rect">
+            <a:avLst/>
+          </a:prstGeom>
+          <a:noFill/>
+          <a:ln>
+            <a:noFill/>
+          </a:ln>
+        </p:spPr>
+        <p:txBody>
+          <a:bodyPr wrap="square" lIns="0" tIns="0" rIns="0" bIns="0" anchor="ctr"/>
+          <a:lstStyle/>
+          <a:p>
+            <a:pPr algn="ctr">
+              <a:buNone/>
+            </a:pPr>
+            <a:r>
+              <a:rPr lang="en-US" sz="2000" b="1" i="0" dirty="0">
+                <a:solidFill>
+                  <a:srgbClr val="8E6F3E"/>
+                </a:solidFill>
+              </a:rPr>
+              <a:t>EVIDENCE</a:t>
+            </a:r>
+          </a:p>
+        </p:txBody>
+      </p:sp>
+      <p:cxnSp>
+        <p:nvCxnSpPr>
+          <p:cNvPr id="42" name="EvidenceArrow"/>
+          <p:cNvCxnSpPr/>
+          <p:nvPr/>
+        </p:nvCxnSpPr>
+        <p:spPr>
+          <a:xfrm flipH="1">
+            <a:off x="4206240" y="5120640"/>
+            <a:ext cx="1234440" cy="0"/>
+          </a:xfrm>
+          <a:prstGeom prst="line">
+            <a:avLst/>
+          </a:prstGeom>
+          <a:ln w="22225">
+            <a:solidFill>
+              <a:srgbClr val="8E6F3E"/>
+            </a:solidFill>
+            <a:tailEnd type="triangle" w="med" len="med"/>
+          </a:ln>
+          <a:effectLst/>
+        </p:spPr>
+        <p:style>
+          <a:lnRef idx="2">
+            <a:schemeClr val="accent1"/>
+          </a:lnRef>
+          <a:fillRef idx="0">
+            <a:schemeClr val="accent1"/>
+          </a:fillRef>
+          <a:effectRef idx="1">
+            <a:schemeClr val="accent1"/>
+          </a:effectRef>
+          <a:fontRef idx="minor">
+            <a:schemeClr val="tx1"/>
+          </a:fontRef>
+        </p:style>
+      </p:cxnSp>
     </p:spTree>
   </p:cSld>
   <p:clrMapOvr>
@@ -25742,6 +28931,164 @@
                                         <p:cTn id="53" dur="500"/>
                                         <p:tgtEl>
                                           <p:spTgt spid="19"/>
+                                        </p:tgtEl>
+                                      </p:cBhvr>
+                                    </p:animEffect>
+                                  </p:childTnLst>
+                                </p:cTn>
+                              </p:par>
+                            </p:childTnLst>
+                          </p:cTn>
+                        </p:par>
+                      </p:childTnLst>
+                    </p:cTn>
+                  </p:par>
+                  <p:par>
+                    <p:cTn id="61" fill="hold">
+                      <p:stCondLst>
+                        <p:cond delay="indefinite"/>
+                      </p:stCondLst>
+                      <p:childTnLst>
+                        <p:par>
+                          <p:cTn id="62" fill="hold">
+                            <p:stCondLst>
+                              <p:cond delay="0"/>
+                            </p:stCondLst>
+                            <p:childTnLst>
+                              <p:par>
+                                <p:cTn id="63" presetID="10" presetClass="entr" presetSubtype="0" fill="hold" nodeType="clickEffect">
+                                  <p:stCondLst>
+                                    <p:cond delay="0"/>
+                                  </p:stCondLst>
+                                  <p:childTnLst>
+                                    <p:set>
+                                      <p:cBhvr>
+                                        <p:cTn id="64" dur="1" fill="hold">
+                                          <p:stCondLst>
+                                            <p:cond delay="0"/>
+                                          </p:stCondLst>
+                                        </p:cTn>
+                                        <p:tgtEl>
+                                          <p:spTgt spid="40"/>
+                                        </p:tgtEl>
+                                        <p:attrNameLst>
+                                          <p:attrName>style.visibility</p:attrName>
+                                        </p:attrNameLst>
+                                      </p:cBhvr>
+                                      <p:to>
+                                        <p:strVal val="visible"/>
+                                      </p:to>
+                                    </p:set>
+                                    <p:animEffect transition="in" filter="fade">
+                                      <p:cBhvr>
+                                        <p:cTn id="65" dur="500"/>
+                                        <p:tgtEl>
+                                          <p:spTgt spid="40"/>
+                                        </p:tgtEl>
+                                      </p:cBhvr>
+                                    </p:animEffect>
+                                  </p:childTnLst>
+                                </p:cTn>
+                              </p:par>
+                              <p:par>
+                                <p:cTn id="66" presetID="10" presetClass="entr" presetSubtype="0" fill="hold" nodeType="withEffect">
+                                  <p:stCondLst>
+                                    <p:cond delay="0"/>
+                                  </p:stCondLst>
+                                  <p:childTnLst>
+                                    <p:set>
+                                      <p:cBhvr>
+                                        <p:cTn id="67" dur="1" fill="hold">
+                                          <p:stCondLst>
+                                            <p:cond delay="0"/>
+                                          </p:stCondLst>
+                                        </p:cTn>
+                                        <p:tgtEl>
+                                          <p:spTgt spid="43"/>
+                                        </p:tgtEl>
+                                        <p:attrNameLst>
+                                          <p:attrName>style.visibility</p:attrName>
+                                        </p:attrNameLst>
+                                      </p:cBhvr>
+                                      <p:to>
+                                        <p:strVal val="visible"/>
+                                      </p:to>
+                                    </p:set>
+                                    <p:animEffect transition="in" filter="fade">
+                                      <p:cBhvr>
+                                        <p:cTn id="68" dur="500"/>
+                                        <p:tgtEl>
+                                          <p:spTgt spid="43"/>
+                                        </p:tgtEl>
+                                      </p:cBhvr>
+                                    </p:animEffect>
+                                  </p:childTnLst>
+                                </p:cTn>
+                              </p:par>
+                              <p:par>
+                                <p:cTn id="69" presetID="10" presetClass="entr" presetSubtype="0" fill="hold" nodeType="withEffect">
+                                  <p:stCondLst>
+                                    <p:cond delay="0"/>
+                                  </p:stCondLst>
+                                  <p:childTnLst>
+                                    <p:set>
+                                      <p:cBhvr>
+                                        <p:cTn id="70" dur="1" fill="hold">
+                                          <p:stCondLst>
+                                            <p:cond delay="0"/>
+                                          </p:stCondLst>
+                                        </p:cTn>
+                                        <p:tgtEl>
+                                          <p:spTgt spid="42"/>
+                                        </p:tgtEl>
+                                        <p:attrNameLst>
+                                          <p:attrName>style.visibility</p:attrName>
+                                        </p:attrNameLst>
+                                      </p:cBhvr>
+                                      <p:to>
+                                        <p:strVal val="visible"/>
+                                      </p:to>
+                                    </p:set>
+                                    <p:animEffect transition="in" filter="fade">
+                                      <p:cBhvr>
+                                        <p:cTn id="71" dur="500"/>
+                                        <p:tgtEl>
+                                          <p:spTgt spid="42"/>
+                                        </p:tgtEl>
+                                      </p:cBhvr>
+                                    </p:animEffect>
+                                  </p:childTnLst>
+                                </p:cTn>
+                              </p:par>
+                              <p:par>
+                                <p:cTn id="72" presetID="10" presetClass="entr" presetSubtype="0" fill="hold" nodeType="withEffect">
+                                  <p:stCondLst>
+                                    <p:cond delay="0"/>
+                                  </p:stCondLst>
+                                  <p:childTnLst>
+                                    <p:set>
+                                      <p:cBhvr>
+                                        <p:cTn id="73" dur="1" fill="hold">
+                                          <p:stCondLst>
+                                            <p:cond delay="0"/>
+                                          </p:stCondLst>
+                                        </p:cTn>
+                                        <p:tgtEl>
+                                          <p:spTgt spid="41"/>
+                                        </p:tgtEl>
+                                        <p:attrNameLst>
+                                          <p:attrName>style.visibility</p:attrName>
+                                        </p:attrNameLst>
+                                      </p:cBhvr>
+                                      <p:to>
+                                        <p:strVal val="visible"/>
+                                      </p:to>
+                                    </p:set>
+                                    <p:animEffect transition="in" filter="fade">
+                                      <p:cBhvr>
+                                        <p:cTn id="74" dur="500"/>
+                                        <p:tgtEl>
+                                          <p:spTgt spid="41"/>
                                         </p:tgtEl>
                                       </p:cBhvr>
                                     </p:animEffect>

--- a/course/lectures/act-1-foundations/09-engineering-decision-making-and-metrics/1-9-Engineering-Decision-Making-and-Metrics.pptx
+++ b/course/lectures/act-1-foundations/09-engineering-decision-making-and-metrics/1-9-Engineering-Decision-Making-and-Metrics.pptx
@@ -741,7 +741,7 @@
           <a:p>
             <a:r>
               <a:rPr dirty="0"/>
-              <a:t>3 minutes — The canonical quantitative chain, unpacked carefully. Terminology must be exact.</a:t>
+              <a:t>2 minutes — The canonical quantitative chain, unpacked carefully. Terminology must be exact.</a:t>
             </a:r>
           </a:p>
           <a:p>
@@ -769,6 +769,12 @@
             <a:r>
               <a:rPr dirty="0"/>
               <a:t>- (from slide) You met this chain in Validation. Today we unpack each link.</a:t>
+            </a:r>
+          </a:p>
+          <a:p>
+            <a:r>
+              <a:rPr dirty="0"/>
+              <a:t>- Pace (2:00): the boxes do the work. Define each term once and move; later slides point back here rather than re-explaining the chain.</a:t>
             </a:r>
           </a:p>
         </p:txBody>
@@ -815,7 +821,7 @@
           <a:p>
             <a:r>
               <a:rPr dirty="0"/>
-              <a:t>3 minutes — Work one operationalization end to end; define the word once.</a:t>
+              <a:t>2 minutes — Work one operationalization end to end; define the word once.</a:t>
             </a:r>
           </a:p>
           <a:p>
@@ -845,6 +851,12 @@
             <a:r>
               <a:rPr dirty="0"/>
               <a:t>- (from slide) The metric chooses which aspect of the property becomes observable.</a:t>
+            </a:r>
+          </a:p>
+          <a:p>
+            <a:r>
+              <a:rPr dirty="0"/>
+              <a:t>- Pace (2:00): land “p99 latency is not responsiveness itself” and move on. Do not linger.</a:t>
             </a:r>
           </a:p>
         </p:txBody>
@@ -891,7 +903,7 @@
           <a:p>
             <a:r>
               <a:rPr dirty="0"/>
-              <a:t xml:space="preserve">3 minutes — </a:t>
+              <a:t xml:space="preserve">2 minutes — </a:t>
             </a:r>
             <a:r>
               <a:rPr i="1" dirty="0"/>
@@ -917,6 +929,12 @@
             <a:r>
               <a:rPr dirty="0"/>
               <a:t>- The footer corrects any older phrasing: the metric embodies the modeling choice; the measurement supplies observations. Do not soften it.</a:t>
+            </a:r>
+          </a:p>
+          <a:p>
+            <a:r>
+              <a:rPr dirty="0"/>
+              <a:t>- Pace (2:00): two clicks, two sentences, move on.</a:t>
             </a:r>
           </a:p>
         </p:txBody>
@@ -963,7 +981,7 @@
           <a:p>
             <a:r>
               <a:rPr dirty="0"/>
-              <a:t xml:space="preserve">3 minutes — TPS: students generate the conditions that give 420 </a:t>
+              <a:t xml:space="preserve">2 minutes — TPS: students generate the conditions that give 420 </a:t>
             </a:r>
             <a:r>
               <a:rPr dirty="0" err="1"/>
@@ -1031,6 +1049,12 @@
             <a:r>
               <a:rPr dirty="0"/>
               <a:t xml:space="preserve"> is an observation parameterized by conditions.'</a:t>
+            </a:r>
+          </a:p>
+          <a:p>
+            <a:r>
+              <a:rPr dirty="0"/>
+              <a:t>- Pace (2:00): keep the TPS brisk — about 45 seconds of pair discussion, two or three answers, then reveal.</a:t>
             </a:r>
           </a:p>
         </p:txBody>
@@ -1077,7 +1101,7 @@
           <a:p>
             <a:r>
               <a:rPr dirty="0"/>
-              <a:t>2.5 minutes — The scope principle, on a real industrial property, deliberately drawn like Validation's composition slide.</a:t>
+              <a:t>2 minutes — The scope principle, on a real industrial property, deliberately drawn like Validation's composition slide.</a:t>
             </a:r>
           </a:p>
           <a:p>
@@ -1141,6 +1165,12 @@
             <a:r>
               <a:rPr dirty="0"/>
               <a:t>Build (5 clicks): 1 the enclosing scope and sensing → computation → communication → rendering; 2 local numbers and green checks — each local measurement looks acceptable; 3 the heavy end-to-end arrow and the total; 4 the red X; 5 the two closing lines and the footer.</a:t>
+            </a:r>
+          </a:p>
+          <a:p>
+            <a:r>
+              <a:rPr dirty="0"/>
+              <a:t>- Pace (2:00): Validation callback, the arithmetic, the conclusion. The end-to-end caveat is one sentence, not a digression.</a:t>
             </a:r>
           </a:p>
         </p:txBody>
@@ -1187,7 +1217,7 @@
           <a:p>
             <a:r>
               <a:rPr dirty="0"/>
-              <a:t xml:space="preserve">2.5 minutes — </a:t>
+              <a:t xml:space="preserve">1.5 minutes — </a:t>
             </a:r>
             <a:r>
               <a:rPr i="1" dirty="0"/>
@@ -1207,6 +1237,12 @@
             <a:r>
               <a:rPr dirty="0"/>
               <a:t>- Usability needs several observables, none of which IS usability — the metric models how each bears on it.</a:t>
+            </a:r>
+          </a:p>
+          <a:p>
+            <a:r>
+              <a:rPr dirty="0"/>
+              <a:t>- Pace (1:30): straightforward once metric-as-model has landed. State the contrast and move.</a:t>
             </a:r>
           </a:p>
         </p:txBody>
@@ -1253,7 +1289,7 @@
           <a:p>
             <a:r>
               <a:rPr dirty="0"/>
-              <a:t>3 minutes — Every metric omits; the omission is the price of usability, not a scandal.</a:t>
+              <a:t>1.5 minutes — Every metric omits; the omission is the price of usability, not a scandal.</a:t>
             </a:r>
           </a:p>
           <a:p>
@@ -1275,6 +1311,12 @@
             <a:r>
               <a:rPr dirty="0"/>
               <a:t>- (from slide) Know what the metric represents — and what it leaves unresolved.</a:t>
+            </a:r>
+          </a:p>
+          <a:p>
+            <a:r>
+              <a:rPr dirty="0"/>
+              <a:t>- Pace (1:30): the examples are self-explanatory. Land the line and leave.</a:t>
             </a:r>
           </a:p>
         </p:txBody>
@@ -1321,7 +1363,7 @@
           <a:p>
             <a:r>
               <a:rPr dirty="0"/>
-              <a:t xml:space="preserve">2.5 minutes — </a:t>
+              <a:t xml:space="preserve">2 minutes — </a:t>
             </a:r>
             <a:r>
               <a:rPr i="1" dirty="0"/>
@@ -1359,6 +1401,12 @@
             <a:r>
               <a:rPr dirty="0"/>
               <a:t>- Ask the room which of the three could be wrong for the same reason. That is the blind-spot question.</a:t>
+            </a:r>
+          </a:p>
+          <a:p>
+            <a:r>
+              <a:rPr dirty="0"/>
+              <a:t>- Pace (2:00): substantive — preserve this one. It is not a compression target.</a:t>
             </a:r>
           </a:p>
         </p:txBody>
@@ -1620,7 +1668,7 @@
           <a:p>
             <a:r>
               <a:rPr dirty="0"/>
-              <a:t xml:space="preserve">4 minutes — </a:t>
+              <a:t xml:space="preserve">2.5 minutes — </a:t>
             </a:r>
             <a:r>
               <a:rPr i="1" dirty="0"/>
@@ -1640,6 +1688,12 @@
             <a:r>
               <a:rPr dirty="0"/>
               <a:t>- Reveal the metric, then do NOT immediately call it bad — ask what inference is being made. The next slide does the real work.</a:t>
+            </a:r>
+          </a:p>
+          <a:p>
+            <a:r>
+              <a:rPr dirty="0"/>
+              <a:t>- Pace (2:30): run it briskly. The team activity now does the serious application work.</a:t>
             </a:r>
           </a:p>
         </p:txBody>
@@ -1686,7 +1740,7 @@
           <a:p>
             <a:r>
               <a:rPr dirty="0"/>
-              <a:t xml:space="preserve">3 minutes — </a:t>
+              <a:t xml:space="preserve">2 minutes — </a:t>
             </a:r>
             <a:r>
               <a:rPr i="1" dirty="0"/>
@@ -1718,6 +1772,12 @@
             <a:r>
               <a:rPr dirty="0"/>
               <a:t>- Teamwork already warned about commits and tickets — use it as a callback, not a novel claim.</a:t>
+            </a:r>
+          </a:p>
+          <a:p>
+            <a:r>
+              <a:rPr dirty="0"/>
+              <a:t>- Pace (2:00): name one or two validity conditions; do not enumerate them exhaustively.</a:t>
             </a:r>
           </a:p>
         </p:txBody>
@@ -1764,7 +1824,7 @@
           <a:p>
             <a:r>
               <a:rPr dirty="0"/>
-              <a:t xml:space="preserve">3 minutes — </a:t>
+              <a:t xml:space="preserve">2.5 minutes — </a:t>
             </a:r>
             <a:r>
               <a:rPr i="1" dirty="0"/>
@@ -1796,6 +1856,12 @@
             <a:r>
               <a:rPr dirty="0"/>
               <a:t>- State the law once, briefly; do not build a slogan slide.</a:t>
+            </a:r>
+          </a:p>
+          <a:p>
+            <a:r>
+              <a:rPr dirty="0"/>
+              <a:t>- Pace (2:30): genuinely new vocabulary — keep the time this one needs.</a:t>
             </a:r>
           </a:p>
         </p:txBody>
@@ -1842,7 +1908,7 @@
           <a:p>
             <a:r>
               <a:rPr dirty="0"/>
-              <a:t>2 minutes — Context determines evidentiary weight; two quick examples, no new machinery.</a:t>
+              <a:t>1 minute — Context determines evidentiary weight; two quick examples, no new machinery.</a:t>
             </a:r>
           </a:p>
           <a:p>
@@ -1864,6 +1930,12 @@
             <a:r>
               <a:rPr dirty="0"/>
               <a:t>- (from slide) The same metric can be strong evidence in one context and weak in another.</a:t>
+            </a:r>
+          </a:p>
+          <a:p>
+            <a:r>
+              <a:rPr dirty="0"/>
+              <a:t>- Pace (1:00): these are essentially captions. Read them and move.</a:t>
             </a:r>
           </a:p>
         </p:txBody>
@@ -1910,7 +1982,7 @@
           <a:p>
             <a:r>
               <a:rPr dirty="0"/>
-              <a:t xml:space="preserve">1.5 minutes — </a:t>
+              <a:t xml:space="preserve">1 minute — </a:t>
             </a:r>
             <a:r>
               <a:rPr i="1" dirty="0"/>
@@ -1924,6 +1996,21 @@
             <a:r>
               <a:rPr dirty="0"/>
               <a:t>- Resist expansion; the value of this list is that students will actually remember it.</a:t>
+            </a:r>
+          </a:p>
+          <a:p>
+            <a:r>
+              <a:rPr dirty="0"/>
+              <a:t>- Pace (1:00): read the four as setup for the activity, not as a mini-lecture.</a:t>
+            </a:r>
+          </a:p>
+          <a:p>
+            <a:endParaRPr dirty="0"/>
+          </a:p>
+          <a:p>
+            <a:r>
+              <a:rPr dirty="0"/>
+              <a:t>Transition: “Those four questions are enough to criticize somebody else’s metric. Now you have to make an engineering decision with imperfect evidence.”</a:t>
             </a:r>
           </a:p>
         </p:txBody>
@@ -1970,7 +2057,7 @@
           <a:p>
             <a:r>
               <a:rPr dirty="0"/>
-              <a:t xml:space="preserve">0.3 minutes — </a:t>
+              <a:t xml:space="preserve">0.25 minutes — </a:t>
             </a:r>
             <a:r>
               <a:rPr i="1" dirty="0"/>
@@ -1979,6 +2066,12 @@
           </a:p>
           <a:p>
             <a:endParaRPr dirty="0"/>
+          </a:p>
+          <a:p>
+            <a:r>
+              <a:rPr dirty="0"/>
+              <a:t>- Pace (0:15): divider only. Name the section and go.</a:t>
+            </a:r>
           </a:p>
         </p:txBody>
       </p:sp>
@@ -2023,7 +2116,7 @@
           <a:lstStyle/>
           <a:p>
             <a:r>
-              <a:t>2.5 minutes — Extend the chain to judgment and action, then teach the Act I generalization fresh — do NOT present it as recall; the lectures did not make the per-unit measurement sections prominent.</a:t>
+              <a:t>1.5 minutes — Extend the chain to judgment and action, then teach the Act I generalization fresh — do NOT present it as recall; the lectures did not make the per-unit measurement sections prominent.</a:t>
             </a:r>
           </a:p>
           <a:p>
@@ -2047,6 +2140,12 @@
           <a:p>
             <a:r>
               <a:t>- This sets up the closing loop slide: outcomes produce new evidence that can update the models.</a:t>
+            </a:r>
+          </a:p>
+          <a:p>
+            <a:r>
+              <a:rPr dirty="0"/>
+              <a:t>- Pace (1:30): generalize across Act I; do not walk every row aloud.</a:t>
             </a:r>
           </a:p>
         </p:txBody>
@@ -2092,7 +2191,7 @@
           <a:lstStyle/>
           <a:p>
             <a:r>
-              <a:t>2 minutes — Same evidence, different rational actions; a Validation callback, not a re-teach.</a:t>
+              <a:t>1.5 minutes — Same evidence, different rational actions; a Validation callback, not a re-teach.</a:t>
             </a:r>
           </a:p>
           <a:p>
@@ -2111,6 +2210,12 @@
           <a:p>
             <a:r>
               <a:t>- (from slide) Validation asked when evidence is enough; this is that judgment, generalized.</a:t>
+            </a:r>
+          </a:p>
+          <a:p>
+            <a:r>
+              <a:rPr dirty="0"/>
+              <a:t>- Pace (1:30): this now names what the room just experienced in the activity, so it lands faster.</a:t>
             </a:r>
           </a:p>
         </p:txBody>

--- a/course/lectures/act-1-foundations/09-engineering-decision-making-and-metrics/1-9-Engineering-Decision-Making-and-Metrics.pptx
+++ b/course/lectures/act-1-foundations/09-engineering-decision-making-and-metrics/1-9-Engineering-Decision-Making-and-Metrics.pptx
@@ -5,7 +5,7 @@
     <p:sldMasterId id="2147483708" r:id="rId1"/>
   </p:sldMasterIdLst>
   <p:notesMasterIdLst>
-    <p:notesMasterId r:id="rId34"/>
+    <p:notesMasterId r:id="rId35"/>
   </p:notesMasterIdLst>
   <p:sldIdLst>
     <p:sldId id="701" r:id="rId2"/>
@@ -34,13 +34,13 @@
     <p:sldId id="722" r:id="rId25"/>
     <p:sldId id="723" r:id="rId26"/>
     <p:sldId id="724" r:id="rId27"/>
-    <p:sldId id="734" r:id="rId39"/>
-    <p:sldId id="725" r:id="rId28"/>
-    <p:sldId id="726" r:id="rId29"/>
-    <p:sldId id="727" r:id="rId30"/>
-    <p:sldId id="728" r:id="rId31"/>
-    <p:sldId id="729" r:id="rId32"/>
-    <p:sldId id="730" r:id="rId33"/>
+    <p:sldId id="734" r:id="rId28"/>
+    <p:sldId id="725" r:id="rId29"/>
+    <p:sldId id="726" r:id="rId30"/>
+    <p:sldId id="727" r:id="rId31"/>
+    <p:sldId id="728" r:id="rId32"/>
+    <p:sldId id="729" r:id="rId33"/>
+    <p:sldId id="730" r:id="rId34"/>
   </p:sldIdLst>
   <p:sldSz cx="9144000" cy="6858000" type="screen4x3"/>
   <p:notesSz cx="6858000" cy="9144000"/>
@@ -2057,11 +2057,11 @@
           <a:p>
             <a:r>
               <a:rPr dirty="0"/>
-              <a:t xml:space="preserve">0.25 minutes — </a:t>
+              <a:t xml:space="preserve">10 minutes — </a:t>
             </a:r>
             <a:r>
               <a:rPr i="1" dirty="0"/>
-              <a:t>Name Section 4. Accelerate: Validation taught much of the judgment material.</a:t>
+              <a:t>6 minutes team work, 4 minutes comparison.</a:t>
             </a:r>
           </a:p>
           <a:p>
@@ -2070,7 +2070,82 @@
           <a:p>
             <a:r>
               <a:rPr dirty="0"/>
-              <a:t>- Pace (0:15): divider only. Name the section and go.</a:t>
+              <a:t>Setup: teams of 3–5. Do not interpret the evidence for them. Their task is not to discover the instructor’s preferred action; it is to make and defend a decision. Point out the deliverable: they must fill every blank. The sentence forces evidence to bear on a claim rather than merely reporting a number.</a:t>
+            </a:r>
+          </a:p>
+          <a:p>
+            <a:endParaRPr dirty="0"/>
+          </a:p>
+          <a:p>
+            <a:r>
+              <a:rPr dirty="0"/>
+              <a:t>Circulate. When a team answers quickly, push on the justification: Which properties did you decide matter, and why those? What is not in the table that should be? What does “20–50 jobs/min with substantial uncertainty” do to A’s demonstrated 35? Are you asking for more information because it has decision value, or because more evidence feels safer?</a:t>
+            </a:r>
+          </a:p>
+          <a:p>
+            <a:endParaRPr dirty="0"/>
+          </a:p>
+          <a:p>
+            <a:r>
+              <a:rPr dirty="0"/>
+              <a:t>Do not tell teams which action is correct. Both are defensible. A team may reasonably choose A because observed demand sits mostly within its capacity, it is cheap, and migration remains possible. Another may reasonably choose B because the upper end of expected demand exceeds A’s demonstrated capacity and automatic recovery is consequential.</a:t>
+            </a:r>
+          </a:p>
+          <a:p>
+            <a:endParaRPr dirty="0"/>
+          </a:p>
+          <a:p>
+            <a:r>
+              <a:rPr dirty="0"/>
+              <a:t xml:space="preserve">Comparison: ask for one team choosing A and one choosing B. Put their deliverables against each other. The interesting question is not </a:t>
+            </a:r>
+            <a:r>
+              <a:rPr i="1" dirty="0"/>
+              <a:t>who read the measurements correctly</a:t>
+            </a:r>
+            <a:r>
+              <a:rPr dirty="0"/>
+              <a:t xml:space="preserve"> but </a:t>
+            </a:r>
+            <a:r>
+              <a:rPr i="1" dirty="0"/>
+              <a:t>what model of the decision did each team construct?</a:t>
+            </a:r>
+          </a:p>
+          <a:p>
+            <a:endParaRPr dirty="0"/>
+          </a:p>
+          <a:p>
+            <a:r>
+              <a:rPr dirty="0"/>
+              <a:t>Transition: “You all received exactly the same observations. Why did you make different decisions?”</a:t>
+            </a:r>
+          </a:p>
+          <a:p>
+            <a:endParaRPr dirty="0"/>
+          </a:p>
+          <a:p>
+            <a:r>
+              <a:rPr dirty="0"/>
+              <a:t>- Drive the debrief toward: different properties selected → different importance assigned → different uncertainty tolerated → different action. The next slide gives that experience its name.</a:t>
+            </a:r>
+          </a:p>
+          <a:p>
+            <a:r>
+              <a:rPr dirty="0"/>
+              <a:t>- Let students name consequence, uncertainty and reversibility if they can, rather than supplying all three immediately.</a:t>
+            </a:r>
+          </a:p>
+          <a:p>
+            <a:r>
+              <a:rPr dirty="0"/>
+              <a:t>- The conceptual difficulty here is judgment, not analysis. If teams need 13 minutes, the case has been made too complicated.</a:t>
+            </a:r>
+          </a:p>
+          <a:p>
+            <a:r>
+              <a:rPr dirty="0"/>
+              <a:t>- No staged animation: the whole slide is on screen from the start so teams can work without the instructor talking.</a:t>
             </a:r>
           </a:p>
         </p:txBody>
@@ -2116,36 +2191,21 @@
           <a:lstStyle/>
           <a:p>
             <a:r>
-              <a:t>1.5 minutes — Extend the chain to judgment and action, then teach the Act I generalization fresh — do NOT present it as recall; the lectures did not make the per-unit measurement sections prominent.</a:t>
-            </a:r>
-          </a:p>
-          <a:p>
-            <a:endParaRPr/>
-          </a:p>
-          <a:p>
-            <a:r>
-              <a:t>- Build: the table row by row, and each row lands as a PAIR — engineering decision, then the property or claim requiring evidence — so students see decision, then claim to test, six times over. Header first, then one click per row. Then the closing claim line: engineering decisions create claims that later evidence can test. Then “A number does not decide what to do.” The chain comes LAST, as the generalization: the same structure spans all six rows. Do not animate top-to-bottom merely because that matches the layout.</a:t>
-            </a:r>
-          </a:p>
-          <a:p>
-            <a:r>
-              <a:t>- The metric and its conditions give the number evidentiary meaning; engineering judgment connects that evidence to action.</a:t>
-            </a:r>
-          </a:p>
-          <a:p>
-            <a:r>
-              <a:t>- Here's why this matters beyond metrics. Every engineering activity we've studied makes claims about reality. Once we act, reality starts producing evidence about those claims. Process assumes something about how the work behaves. Specification makes assumptions about the environment. Architecture predicts properties of composition. Design predicts consequences of mechanisms. We can observe those things.</a:t>
-            </a:r>
-          </a:p>
-          <a:p>
-            <a:r>
-              <a:t>- This sets up the closing loop slide: outcomes produce new evidence that can update the models.</a:t>
-            </a:r>
-          </a:p>
-          <a:p>
-            <a:r>
               <a:rPr dirty="0"/>
-              <a:t>- Pace (1:30): generalize across Act I; do not walk every row aloud.</a:t>
+              <a:t xml:space="preserve">0.25 minutes — </a:t>
+            </a:r>
+            <a:r>
+              <a:rPr i="1" dirty="0"/>
+              <a:t>Name Section 4. Accelerate: Validation taught much of the judgment material.</a:t>
+            </a:r>
+          </a:p>
+          <a:p>
+            <a:endParaRPr dirty="0"/>
+          </a:p>
+          <a:p>
+            <a:r>
+              <a:rPr dirty="0"/>
+              <a:t>- Pace (0:15): divider only. Name the section and go.</a:t>
             </a:r>
           </a:p>
         </p:txBody>
@@ -2191,7 +2251,7 @@
           <a:lstStyle/>
           <a:p>
             <a:r>
-              <a:t>1.5 minutes — Same evidence, different rational actions; a Validation callback, not a re-teach.</a:t>
+              <a:t>1.5 minutes — Extend the chain to judgment and action, then teach the Act I generalization fresh — do NOT present it as recall; the lectures did not make the per-unit measurement sections prominent.</a:t>
             </a:r>
           </a:p>
           <a:p>
@@ -2199,23 +2259,28 @@
           </a:p>
           <a:p>
             <a:r>
-              <a:t>- Two engineers with the same 420-ms measurement can rationally decide differently — consequence, uncertainty, and reversibility differ.</a:t>
-            </a:r>
-          </a:p>
-          <a:p>
-            <a:r>
-              <a:t>- Compress here under time pressure, never the metrics centre.</a:t>
-            </a:r>
-          </a:p>
-          <a:p>
-            <a:r>
-              <a:t>- (from slide) Validation asked when evidence is enough; this is that judgment, generalized.</a:t>
+              <a:t>- Build: the table row by row, and each row lands as a PAIR — engineering decision, then the property or claim requiring evidence — so students see decision, then claim to test, six times over. Header first, then one click per row. Then the closing claim line: engineering decisions create claims that later evidence can test. Then “A number does not decide what to do.” The chain comes LAST, as the generalization: the same structure spans all six rows. Do not animate top-to-bottom merely because that matches the layout.</a:t>
+            </a:r>
+          </a:p>
+          <a:p>
+            <a:r>
+              <a:t>- The metric and its conditions give the number evidentiary meaning; engineering judgment connects that evidence to action.</a:t>
+            </a:r>
+          </a:p>
+          <a:p>
+            <a:r>
+              <a:t>- Here's why this matters beyond metrics. Every engineering activity we've studied makes claims about reality. Once we act, reality starts producing evidence about those claims. Process assumes something about how the work behaves. Specification makes assumptions about the environment. Architecture predicts properties of composition. Design predicts consequences of mechanisms. We can observe those things.</a:t>
+            </a:r>
+          </a:p>
+          <a:p>
+            <a:r>
+              <a:t>- This sets up the closing loop slide: outcomes produce new evidence that can update the models.</a:t>
             </a:r>
           </a:p>
           <a:p>
             <a:r>
               <a:rPr dirty="0"/>
-              <a:t>- Pace (1:30): this now names what the room just experienced in the activity, so it lands faster.</a:t>
+              <a:t>- Pace (1:30): generalize across Act I; do not walk every row aloud.</a:t>
             </a:r>
           </a:p>
         </p:txBody>
@@ -2327,7 +2392,7 @@
           <a:lstStyle/>
           <a:p>
             <a:r>
-              <a:t>1.5 minutes — Return to slide 2's question with the machinery now in hand.</a:t>
+              <a:t>1.5 minutes — Same evidence, different rational actions; a Validation callback, not a re-teach.</a:t>
             </a:r>
           </a:p>
           <a:p>
@@ -2335,23 +2400,23 @@
           </a:p>
           <a:p>
             <a:r>
-              <a:t>- The visual echo of slide 2 is deliberate; students should feel the loop close.</a:t>
-            </a:r>
-          </a:p>
-          <a:p>
-            <a:r>
-              <a:t>- Do not present the five actions as exhaustive or as always-available peers.</a:t>
+              <a:t>- Two engineers with the same 420-ms measurement can rationally decide differently — consequence, uncertainty, and reversibility differ.</a:t>
+            </a:r>
+          </a:p>
+          <a:p>
+            <a:r>
+              <a:t>- Compress here under time pressure, never the metrics centre.</a:t>
+            </a:r>
+          </a:p>
+          <a:p>
+            <a:r>
+              <a:t>- (from slide) Validation asked when evidence is enough; this is that judgment, generalized.</a:t>
             </a:r>
           </a:p>
           <a:p>
             <a:r>
               <a:rPr dirty="0"/>
-              <a:t>- The vocabulary is Validation’s, deliberately: deliver, gather more evidence, change, revisit upstream, refuse. Act I is being synthesized here, so no new action vocabulary is introduced. CHANGE covers changing the candidate system; REVISIT UPSTREAM covers discovering that the model, specification, or requirements framing needs revision.</a:t>
-            </a:r>
-          </a:p>
-          <a:p>
-            <a:r>
-              <a:t>- (from slide) This is the question from the second slide, now with a theory of evidence behind it; the middle of the lecture existed to support it.</a:t>
+              <a:t>- Pace (1:30): this now names what the room just experienced in the activity, so it lands faster.</a:t>
             </a:r>
           </a:p>
         </p:txBody>
@@ -2397,27 +2462,31 @@
           <a:lstStyle/>
           <a:p>
             <a:r>
+              <a:t>1.5 minutes — Return to slide 2's question with the machinery now in hand.</a:t>
+            </a:r>
+          </a:p>
+          <a:p>
+            <a:endParaRPr/>
+          </a:p>
+          <a:p>
+            <a:r>
+              <a:t>- The visual echo of slide 2 is deliberate; students should feel the loop close.</a:t>
+            </a:r>
+          </a:p>
+          <a:p>
+            <a:r>
+              <a:t>- Do not present the five actions as exhaustive or as always-available peers.</a:t>
+            </a:r>
+          </a:p>
+          <a:p>
+            <a:r>
               <a:rPr dirty="0"/>
-              <a:t xml:space="preserve">2 minutes — </a:t>
-            </a:r>
-            <a:r>
-              <a:rPr i="1" dirty="0"/>
-              <a:t>The two questions joined into the recurring loop; the loop is the main visual.</a:t>
-            </a:r>
-          </a:p>
-          <a:p>
-            <a:endParaRPr dirty="0"/>
-          </a:p>
-          <a:p>
-            <a:r>
-              <a:rPr dirty="0"/>
-              <a:t>- The AFTER question is how experience improves the models and judgment behind future decisions.</a:t>
-            </a:r>
-          </a:p>
-          <a:p>
-            <a:r>
-              <a:rPr dirty="0"/>
-              <a:t>- The italic line quietly foreshadows Failure-Aware Engineering (reality arrives uninvited; which model should change?). Do NOT teach that lecture here.</a:t>
+              <a:t>- The vocabulary is Validation’s, deliberately: deliver, gather more evidence, change, revisit upstream, refuse. Act I is being synthesized here, so no new action vocabulary is introduced. CHANGE covers changing the candidate system; REVISIT UPSTREAM covers discovering that the model, specification, or requirements framing needs revision.</a:t>
+            </a:r>
+          </a:p>
+          <a:p>
+            <a:r>
+              <a:t>- (from slide) This is the question from the second slide, now with a theory of evidence behind it; the middle of the lecture existed to support it.</a:t>
             </a:r>
           </a:p>
         </p:txBody>
@@ -2464,11 +2533,11 @@
           <a:p>
             <a:r>
               <a:rPr dirty="0"/>
-              <a:t xml:space="preserve">1.5 minutes — </a:t>
+              <a:t xml:space="preserve">2 minutes — </a:t>
             </a:r>
             <a:r>
               <a:rPr i="1" dirty="0"/>
-              <a:t>Close on the Day 1 definition and the course argument in one chain. End there.</a:t>
+              <a:t>The two questions joined into the recurring loop; the loop is the main visual.</a:t>
             </a:r>
           </a:p>
           <a:p>
@@ -2477,13 +2546,13 @@
           <a:p>
             <a:r>
               <a:rPr dirty="0"/>
-              <a:t>- The definition is verbatim from Day 1 — do not paraphrase it.</a:t>
+              <a:t>- The AFTER question is how experience improves the models and judgment behind future decisions.</a:t>
             </a:r>
           </a:p>
           <a:p>
             <a:r>
               <a:rPr dirty="0"/>
-              <a:t>- MODEL, OBSERVE, JUDGE, ACT, LEARN. Do not add another aphorism after the chain; let it end the act.</a:t>
+              <a:t>- The italic line quietly foreshadows Failure-Aware Engineering (reality arrives uninvited; which model should change?). Do NOT teach that lecture here.</a:t>
             </a:r>
           </a:p>
         </p:txBody>
@@ -2530,11 +2599,11 @@
           <a:p>
             <a:r>
               <a:rPr dirty="0"/>
-              <a:t xml:space="preserve">10 minutes — </a:t>
+              <a:t xml:space="preserve">1.5 minutes — </a:t>
             </a:r>
             <a:r>
               <a:rPr i="1" dirty="0"/>
-              <a:t>6 minutes team work, 4 minutes comparison.</a:t>
+              <a:t>Close on the Day 1 definition and the course argument in one chain. End there.</a:t>
             </a:r>
           </a:p>
           <a:p>
@@ -2543,82 +2612,13 @@
           <a:p>
             <a:r>
               <a:rPr dirty="0"/>
-              <a:t>Setup: teams of 3–5. Do not interpret the evidence for them. Their task is not to discover the instructor’s preferred action; it is to make and defend a decision. Point out the deliverable: they must fill every blank. The sentence forces evidence to bear on a claim rather than merely reporting a number.</a:t>
-            </a:r>
-          </a:p>
-          <a:p>
-            <a:endParaRPr dirty="0"/>
+              <a:t>- The definition is verbatim from Day 1 — do not paraphrase it.</a:t>
+            </a:r>
           </a:p>
           <a:p>
             <a:r>
               <a:rPr dirty="0"/>
-              <a:t>Circulate. When a team answers quickly, push on the justification: Which properties did you decide matter, and why those? What is not in the table that should be? What does “20–50 jobs/min with substantial uncertainty” do to A’s demonstrated 35? Are you asking for more information because it has decision value, or because more evidence feels safer?</a:t>
-            </a:r>
-          </a:p>
-          <a:p>
-            <a:endParaRPr dirty="0"/>
-          </a:p>
-          <a:p>
-            <a:r>
-              <a:rPr dirty="0"/>
-              <a:t>Do not tell teams which action is correct. Both are defensible. A team may reasonably choose A because observed demand sits mostly within its capacity, it is cheap, and migration remains possible. Another may reasonably choose B because the upper end of expected demand exceeds A’s demonstrated capacity and automatic recovery is consequential.</a:t>
-            </a:r>
-          </a:p>
-          <a:p>
-            <a:endParaRPr dirty="0"/>
-          </a:p>
-          <a:p>
-            <a:r>
-              <a:rPr dirty="0"/>
-              <a:t xml:space="preserve">Comparison: ask for one team choosing A and one choosing B. Put their deliverables against each other. The interesting question is not </a:t>
-            </a:r>
-            <a:r>
-              <a:rPr i="1" dirty="0"/>
-              <a:t>who read the measurements correctly</a:t>
-            </a:r>
-            <a:r>
-              <a:rPr dirty="0"/>
-              <a:t xml:space="preserve"> but </a:t>
-            </a:r>
-            <a:r>
-              <a:rPr i="1" dirty="0"/>
-              <a:t>what model of the decision did each team construct?</a:t>
-            </a:r>
-          </a:p>
-          <a:p>
-            <a:endParaRPr dirty="0"/>
-          </a:p>
-          <a:p>
-            <a:r>
-              <a:rPr dirty="0"/>
-              <a:t>Transition: “You all received exactly the same observations. Why did you make different decisions?”</a:t>
-            </a:r>
-          </a:p>
-          <a:p>
-            <a:endParaRPr dirty="0"/>
-          </a:p>
-          <a:p>
-            <a:r>
-              <a:rPr dirty="0"/>
-              <a:t>- Drive the debrief toward: different properties selected → different importance assigned → different uncertainty tolerated → different action. The next slide gives that experience its name.</a:t>
-            </a:r>
-          </a:p>
-          <a:p>
-            <a:r>
-              <a:rPr dirty="0"/>
-              <a:t>- Let students name consequence, uncertainty and reversibility if they can, rather than supplying all three immediately.</a:t>
-            </a:r>
-          </a:p>
-          <a:p>
-            <a:r>
-              <a:rPr dirty="0"/>
-              <a:t>- The conceptual difficulty here is judgment, not analysis. If teams need 13 minutes, the case has been made too complicated.</a:t>
-            </a:r>
-          </a:p>
-          <a:p>
-            <a:r>
-              <a:rPr dirty="0"/>
-              <a:t>- No staged animation: the whole slide is on screen from the start so teams can work without the instructor talking.</a:t>
+              <a:t>- MODEL, OBSERVE, JUDGE, ACT, LEARN. Do not add another aphorism after the chain; let it end the act.</a:t>
             </a:r>
           </a:p>
         </p:txBody>
@@ -18872,64 +18872,27 @@
         </p:nvSpPr>
         <p:spPr>
           <a:xfrm>
-            <a:off x="685800" y="2240280"/>
-            <a:ext cx="7772400" cy="914400"/>
+            <a:off x="277148" y="118428"/>
+            <a:ext cx="5150000" cy="638175"/>
           </a:xfrm>
         </p:spPr>
         <p:txBody>
           <a:bodyPr>
-            <a:normAutofit/>
+            <a:normAutofit fontScale="90000"/>
           </a:bodyPr>
           <a:lstStyle/>
           <a:p>
-            <a:pPr algn="ctr">
+            <a:pPr>
               <a:buNone/>
               <a:defRPr b="0"/>
             </a:pPr>
             <a:r>
-              <a:rPr lang="en-US" sz="3600" b="0" i="0" dirty="0">
+              <a:rPr lang="en-US" sz="2400" b="0" i="0" dirty="0">
                 <a:solidFill>
                   <a:srgbClr val="000000"/>
                 </a:solidFill>
               </a:rPr>
-              <a:t>From measurement to action</a:t>
-            </a:r>
-          </a:p>
-        </p:txBody>
-      </p:sp>
-      <p:sp>
-        <p:nvSpPr>
-          <p:cNvPr id="100" name="SectionLabel"/>
-          <p:cNvSpPr txBox="1"/>
-          <p:nvPr/>
-        </p:nvSpPr>
-        <p:spPr>
-          <a:xfrm>
-            <a:off x="685800" y="1737360"/>
-            <a:ext cx="7772400" cy="356616"/>
-          </a:xfrm>
-          <a:prstGeom prst="rect">
-            <a:avLst/>
-          </a:prstGeom>
-          <a:noFill/>
-          <a:ln>
-            <a:noFill/>
-          </a:ln>
-        </p:spPr>
-        <p:txBody>
-          <a:bodyPr wrap="square" lIns="0" tIns="0" rIns="0" bIns="0" anchor="t"/>
-          <a:lstStyle/>
-          <a:p>
-            <a:pPr algn="ctr">
-              <a:buNone/>
-            </a:pPr>
-            <a:r>
-              <a:rPr lang="en-US" sz="2200" b="1" i="0" dirty="0">
-                <a:solidFill>
-                  <a:srgbClr val="8E6F3E"/>
-                </a:solidFill>
-              </a:rPr>
-              <a:t>SECTION 4</a:t>
+              <a:t>You have to choose</a:t>
             </a:r>
           </a:p>
         </p:txBody>
@@ -18951,7 +18914,7 @@
           <a:p>
             <a:fld id="{B7EB45DA-9A0D-DC49-8E02-F30A5DDC21C3}" type="slidenum">
               <a:rPr lang="en-US" smtClean="0"/>
-              <a:t>28</a:t>
+              <a:t>27</a:t>
             </a:fld>
             <a:endParaRPr lang="en-US"/>
           </a:p>
@@ -18959,14 +18922,988 @@
       </p:sp>
       <p:sp>
         <p:nvSpPr>
-          <p:cNvPr id="101" name="Rule"/>
+          <p:cNvPr id="100" name="KickerBadge"/>
           <p:cNvSpPr/>
           <p:nvPr/>
         </p:nvSpPr>
         <p:spPr>
           <a:xfrm>
-            <a:off x="3429000" y="3383280"/>
-            <a:ext cx="2286000" cy="51206"/>
+            <a:off x="5620000" y="205000"/>
+            <a:ext cx="3249680" cy="470000"/>
+          </a:xfrm>
+          <a:prstGeom prst="roundRect">
+            <a:avLst/>
+          </a:prstGeom>
+          <a:solidFill>
+            <a:srgbClr val="FBF8F2"/>
+          </a:solidFill>
+          <a:ln w="15875">
+            <a:solidFill>
+              <a:srgbClr val="8E6F3E"/>
+            </a:solidFill>
+          </a:ln>
+        </p:spPr>
+        <p:txBody>
+          <a:bodyPr wrap="square" lIns="91440" tIns="27432" rIns="91440" bIns="27432" anchor="ctr"/>
+          <a:lstStyle/>
+          <a:p>
+            <a:pPr algn="ctr">
+              <a:buNone/>
+            </a:pPr>
+            <a:r>
+              <a:rPr lang="en-US" sz="1500" b="1" i="0" dirty="0">
+                <a:solidFill>
+                  <a:srgbClr val="8E6F3E"/>
+                </a:solidFill>
+              </a:rPr>
+              <a:t>TEAM ACTIVITY  ·  10 MINUTES</a:t>
+            </a:r>
+          </a:p>
+        </p:txBody>
+      </p:sp>
+      <p:sp>
+        <p:nvSpPr>
+          <p:cNvPr id="101" name="Premise"/>
+          <p:cNvSpPr txBox="1"/>
+          <p:nvPr/>
+        </p:nvSpPr>
+        <p:spPr>
+          <a:xfrm>
+            <a:off x="274320" y="770000"/>
+            <a:ext cx="8595360" cy="430000"/>
+          </a:xfrm>
+          <a:prstGeom prst="rect">
+            <a:avLst/>
+          </a:prstGeom>
+          <a:noFill/>
+          <a:ln>
+            <a:noFill/>
+          </a:ln>
+        </p:spPr>
+        <p:txBody>
+          <a:bodyPr wrap="square" lIns="0" tIns="0" rIns="0" bIns="0" anchor="ctr"/>
+          <a:lstStyle/>
+          <a:p>
+            <a:pPr algn="l">
+              <a:buNone/>
+            </a:pPr>
+            <a:r>
+              <a:rPr lang="en-US" sz="1400" b="0" i="0" dirty="0">
+                <a:solidFill>
+                  <a:srgbClr val="5C4826"/>
+                </a:solidFill>
+              </a:rPr>
+              <a:t>Your team is adding a document-processing operation to a production service. The feature is ready to build, but the team must choose between two viable designs.</a:t>
+            </a:r>
+          </a:p>
+        </p:txBody>
+      </p:sp>
+      <p:sp>
+        <p:nvSpPr>
+          <p:cNvPr id="110" name="HdrA"/>
+          <p:cNvSpPr/>
+          <p:nvPr/>
+        </p:nvSpPr>
+        <p:spPr>
+          <a:xfrm>
+            <a:off x="4174320" y="1250000"/>
+            <a:ext cx="2347680" cy="420000"/>
+          </a:xfrm>
+          <a:prstGeom prst="rect">
+            <a:avLst/>
+          </a:prstGeom>
+          <a:solidFill>
+            <a:srgbClr val="8E6F3E"/>
+          </a:solidFill>
+          <a:ln w="12700">
+            <a:solidFill>
+              <a:srgbClr val="8E6F3E"/>
+            </a:solidFill>
+          </a:ln>
+        </p:spPr>
+        <p:txBody>
+          <a:bodyPr wrap="square" lIns="45720" tIns="27432" rIns="45720" bIns="27432" anchor="ctr"/>
+          <a:lstStyle/>
+          <a:p>
+            <a:pPr algn="ctr">
+              <a:buNone/>
+            </a:pPr>
+            <a:r>
+              <a:rPr lang="en-US" sz="1600" b="1" i="0" dirty="0">
+                <a:solidFill>
+                  <a:srgbClr val="FFFFFF"/>
+                </a:solidFill>
+              </a:rPr>
+              <a:t>A</a:t>
+            </a:r>
+          </a:p>
+          <a:p>
+            <a:pPr algn="ctr">
+              <a:buNone/>
+            </a:pPr>
+            <a:r>
+              <a:rPr lang="en-US" sz="1300" b="1" i="0" dirty="0">
+                <a:solidFill>
+                  <a:srgbClr val="FFFFFF"/>
+                </a:solidFill>
+              </a:rPr>
+              <a:t>Process synchronously</a:t>
+            </a:r>
+          </a:p>
+        </p:txBody>
+      </p:sp>
+      <p:sp>
+        <p:nvSpPr>
+          <p:cNvPr id="111" name="HdrB"/>
+          <p:cNvSpPr/>
+          <p:nvPr/>
+        </p:nvSpPr>
+        <p:spPr>
+          <a:xfrm>
+            <a:off x="6522000" y="1250000"/>
+            <a:ext cx="2347680" cy="420000"/>
+          </a:xfrm>
+          <a:prstGeom prst="rect">
+            <a:avLst/>
+          </a:prstGeom>
+          <a:solidFill>
+            <a:srgbClr val="8E6F3E"/>
+          </a:solidFill>
+          <a:ln w="12700">
+            <a:solidFill>
+              <a:srgbClr val="8E6F3E"/>
+            </a:solidFill>
+          </a:ln>
+        </p:spPr>
+        <p:txBody>
+          <a:bodyPr wrap="square" lIns="45720" tIns="27432" rIns="45720" bIns="27432" anchor="ctr"/>
+          <a:lstStyle/>
+          <a:p>
+            <a:pPr algn="ctr">
+              <a:buNone/>
+            </a:pPr>
+            <a:r>
+              <a:rPr lang="en-US" sz="1600" b="1" i="0" dirty="0">
+                <a:solidFill>
+                  <a:srgbClr val="FFFFFF"/>
+                </a:solidFill>
+              </a:rPr>
+              <a:t>B</a:t>
+            </a:r>
+          </a:p>
+          <a:p>
+            <a:pPr algn="ctr">
+              <a:buNone/>
+            </a:pPr>
+            <a:r>
+              <a:rPr lang="en-US" sz="1300" b="1" i="0" dirty="0">
+                <a:solidFill>
+                  <a:srgbClr val="FFFFFF"/>
+                </a:solidFill>
+              </a:rPr>
+              <a:t>Queue the work</a:t>
+            </a:r>
+          </a:p>
+        </p:txBody>
+      </p:sp>
+      <p:sp>
+        <p:nvSpPr>
+          <p:cNvPr id="120" name="R1L"/>
+          <p:cNvSpPr/>
+          <p:nvPr/>
+        </p:nvSpPr>
+        <p:spPr>
+          <a:xfrm>
+            <a:off x="274320" y="1670000"/>
+            <a:ext cx="3900000" cy="245000"/>
+          </a:xfrm>
+          <a:prstGeom prst="rect">
+            <a:avLst/>
+          </a:prstGeom>
+          <a:solidFill>
+            <a:srgbClr val="F5F1E8"/>
+          </a:solidFill>
+          <a:ln w="12700">
+            <a:solidFill>
+              <a:srgbClr val="C9B991"/>
+            </a:solidFill>
+          </a:ln>
+        </p:spPr>
+        <p:txBody>
+          <a:bodyPr wrap="square" lIns="137160" tIns="18288" rIns="45720" bIns="18288" anchor="ctr"/>
+          <a:lstStyle/>
+          <a:p>
+            <a:pPr algn="l">
+              <a:buNone/>
+            </a:pPr>
+            <a:r>
+              <a:rPr lang="en-US" sz="1400" b="0" i="0" dirty="0">
+                <a:solidFill>
+                  <a:srgbClr val="5C4826"/>
+                </a:solidFill>
+              </a:rPr>
+              <a:t>Implementation effort</a:t>
+            </a:r>
+          </a:p>
+        </p:txBody>
+      </p:sp>
+      <p:sp>
+        <p:nvSpPr>
+          <p:cNvPr id="121" name="R1A"/>
+          <p:cNvSpPr/>
+          <p:nvPr/>
+        </p:nvSpPr>
+        <p:spPr>
+          <a:xfrm>
+            <a:off x="4174320" y="1670000"/>
+            <a:ext cx="2347680" cy="245000"/>
+          </a:xfrm>
+          <a:prstGeom prst="rect">
+            <a:avLst/>
+          </a:prstGeom>
+          <a:solidFill>
+            <a:srgbClr val="FBF8F2"/>
+          </a:solidFill>
+          <a:ln w="12700">
+            <a:solidFill>
+              <a:srgbClr val="C9B991"/>
+            </a:solidFill>
+          </a:ln>
+        </p:spPr>
+        <p:txBody>
+          <a:bodyPr wrap="square" lIns="45720" tIns="18288" rIns="45720" bIns="18288" anchor="ctr"/>
+          <a:lstStyle/>
+          <a:p>
+            <a:pPr algn="ctr">
+              <a:buNone/>
+            </a:pPr>
+            <a:r>
+              <a:rPr lang="en-US" sz="1400" b="1" i="0" dirty="0">
+                <a:solidFill>
+                  <a:srgbClr val="5C4826"/>
+                </a:solidFill>
+              </a:rPr>
+              <a:t>2 engineer-days</a:t>
+            </a:r>
+          </a:p>
+        </p:txBody>
+      </p:sp>
+      <p:sp>
+        <p:nvSpPr>
+          <p:cNvPr id="122" name="R1B"/>
+          <p:cNvSpPr/>
+          <p:nvPr/>
+        </p:nvSpPr>
+        <p:spPr>
+          <a:xfrm>
+            <a:off x="6522000" y="1670000"/>
+            <a:ext cx="2347680" cy="245000"/>
+          </a:xfrm>
+          <a:prstGeom prst="rect">
+            <a:avLst/>
+          </a:prstGeom>
+          <a:solidFill>
+            <a:srgbClr val="FBF8F2"/>
+          </a:solidFill>
+          <a:ln w="12700">
+            <a:solidFill>
+              <a:srgbClr val="C9B991"/>
+            </a:solidFill>
+          </a:ln>
+        </p:spPr>
+        <p:txBody>
+          <a:bodyPr wrap="square" lIns="45720" tIns="18288" rIns="45720" bIns="18288" anchor="ctr"/>
+          <a:lstStyle/>
+          <a:p>
+            <a:pPr algn="ctr">
+              <a:buNone/>
+            </a:pPr>
+            <a:r>
+              <a:rPr lang="en-US" sz="1400" b="1" i="0" dirty="0">
+                <a:solidFill>
+                  <a:srgbClr val="5C4826"/>
+                </a:solidFill>
+              </a:rPr>
+              <a:t>7 engineer-days</a:t>
+            </a:r>
+          </a:p>
+        </p:txBody>
+      </p:sp>
+      <p:sp>
+        <p:nvSpPr>
+          <p:cNvPr id="130" name="R2L"/>
+          <p:cNvSpPr/>
+          <p:nvPr/>
+        </p:nvSpPr>
+        <p:spPr>
+          <a:xfrm>
+            <a:off x="274320" y="1915000"/>
+            <a:ext cx="3900000" cy="245000"/>
+          </a:xfrm>
+          <a:prstGeom prst="rect">
+            <a:avLst/>
+          </a:prstGeom>
+          <a:solidFill>
+            <a:srgbClr val="F5F1E8"/>
+          </a:solidFill>
+          <a:ln w="12700">
+            <a:solidFill>
+              <a:srgbClr val="C9B991"/>
+            </a:solidFill>
+          </a:ln>
+        </p:spPr>
+        <p:txBody>
+          <a:bodyPr wrap="square" lIns="137160" tIns="18288" rIns="45720" bIns="18288" anchor="ctr"/>
+          <a:lstStyle/>
+          <a:p>
+            <a:pPr algn="l">
+              <a:buNone/>
+            </a:pPr>
+            <a:r>
+              <a:rPr lang="en-US" sz="1400" b="0" i="0" dirty="0">
+                <a:solidFill>
+                  <a:srgbClr val="5C4826"/>
+                </a:solidFill>
+              </a:rPr>
+              <a:t>Typical completion time</a:t>
+            </a:r>
+          </a:p>
+        </p:txBody>
+      </p:sp>
+      <p:sp>
+        <p:nvSpPr>
+          <p:cNvPr id="131" name="R2A"/>
+          <p:cNvSpPr/>
+          <p:nvPr/>
+        </p:nvSpPr>
+        <p:spPr>
+          <a:xfrm>
+            <a:off x="4174320" y="1915000"/>
+            <a:ext cx="2347680" cy="245000"/>
+          </a:xfrm>
+          <a:prstGeom prst="rect">
+            <a:avLst/>
+          </a:prstGeom>
+          <a:solidFill>
+            <a:srgbClr val="FBF8F2"/>
+          </a:solidFill>
+          <a:ln w="12700">
+            <a:solidFill>
+              <a:srgbClr val="C9B991"/>
+            </a:solidFill>
+          </a:ln>
+        </p:spPr>
+        <p:txBody>
+          <a:bodyPr wrap="square" lIns="45720" tIns="18288" rIns="45720" bIns="18288" anchor="ctr"/>
+          <a:lstStyle/>
+          <a:p>
+            <a:pPr algn="ctr">
+              <a:buNone/>
+            </a:pPr>
+            <a:r>
+              <a:rPr lang="en-US" sz="1400" b="1" i="0" dirty="0">
+                <a:solidFill>
+                  <a:srgbClr val="5C4826"/>
+                </a:solidFill>
+              </a:rPr>
+              <a:t>4 s</a:t>
+            </a:r>
+          </a:p>
+        </p:txBody>
+      </p:sp>
+      <p:sp>
+        <p:nvSpPr>
+          <p:cNvPr id="132" name="R2B"/>
+          <p:cNvSpPr/>
+          <p:nvPr/>
+        </p:nvSpPr>
+        <p:spPr>
+          <a:xfrm>
+            <a:off x="6522000" y="1915000"/>
+            <a:ext cx="2347680" cy="245000"/>
+          </a:xfrm>
+          <a:prstGeom prst="rect">
+            <a:avLst/>
+          </a:prstGeom>
+          <a:solidFill>
+            <a:srgbClr val="FBF8F2"/>
+          </a:solidFill>
+          <a:ln w="12700">
+            <a:solidFill>
+              <a:srgbClr val="C9B991"/>
+            </a:solidFill>
+          </a:ln>
+        </p:spPr>
+        <p:txBody>
+          <a:bodyPr wrap="square" lIns="45720" tIns="18288" rIns="45720" bIns="18288" anchor="ctr"/>
+          <a:lstStyle/>
+          <a:p>
+            <a:pPr algn="ctr">
+              <a:buNone/>
+            </a:pPr>
+            <a:r>
+              <a:rPr lang="en-US" sz="1400" b="1" i="0" dirty="0">
+                <a:solidFill>
+                  <a:srgbClr val="5C4826"/>
+                </a:solidFill>
+              </a:rPr>
+              <a:t>9 s</a:t>
+            </a:r>
+          </a:p>
+        </p:txBody>
+      </p:sp>
+      <p:sp>
+        <p:nvSpPr>
+          <p:cNvPr id="140" name="R3L"/>
+          <p:cNvSpPr/>
+          <p:nvPr/>
+        </p:nvSpPr>
+        <p:spPr>
+          <a:xfrm>
+            <a:off x="274320" y="2160000"/>
+            <a:ext cx="3900000" cy="245000"/>
+          </a:xfrm>
+          <a:prstGeom prst="rect">
+            <a:avLst/>
+          </a:prstGeom>
+          <a:solidFill>
+            <a:srgbClr val="F5F1E8"/>
+          </a:solidFill>
+          <a:ln w="12700">
+            <a:solidFill>
+              <a:srgbClr val="C9B991"/>
+            </a:solidFill>
+          </a:ln>
+        </p:spPr>
+        <p:txBody>
+          <a:bodyPr wrap="square" lIns="137160" tIns="18288" rIns="45720" bIns="18288" anchor="ctr"/>
+          <a:lstStyle/>
+          <a:p>
+            <a:pPr algn="l">
+              <a:buNone/>
+            </a:pPr>
+            <a:r>
+              <a:rPr lang="en-US" sz="1400" b="0" i="0" dirty="0">
+                <a:solidFill>
+                  <a:srgbClr val="5C4826"/>
+                </a:solidFill>
+              </a:rPr>
+              <a:t>Failed jobs recovered automatically</a:t>
+            </a:r>
+          </a:p>
+        </p:txBody>
+      </p:sp>
+      <p:sp>
+        <p:nvSpPr>
+          <p:cNvPr id="141" name="R3A"/>
+          <p:cNvSpPr/>
+          <p:nvPr/>
+        </p:nvSpPr>
+        <p:spPr>
+          <a:xfrm>
+            <a:off x="4174320" y="2160000"/>
+            <a:ext cx="2347680" cy="245000"/>
+          </a:xfrm>
+          <a:prstGeom prst="rect">
+            <a:avLst/>
+          </a:prstGeom>
+          <a:solidFill>
+            <a:srgbClr val="FBF8F2"/>
+          </a:solidFill>
+          <a:ln w="12700">
+            <a:solidFill>
+              <a:srgbClr val="C9B991"/>
+            </a:solidFill>
+          </a:ln>
+        </p:spPr>
+        <p:txBody>
+          <a:bodyPr wrap="square" lIns="45720" tIns="18288" rIns="45720" bIns="18288" anchor="ctr"/>
+          <a:lstStyle/>
+          <a:p>
+            <a:pPr algn="ctr">
+              <a:buNone/>
+            </a:pPr>
+            <a:r>
+              <a:rPr lang="en-US" sz="1400" b="1" i="0" dirty="0">
+                <a:solidFill>
+                  <a:srgbClr val="5C4826"/>
+                </a:solidFill>
+              </a:rPr>
+              <a:t>No</a:t>
+            </a:r>
+          </a:p>
+        </p:txBody>
+      </p:sp>
+      <p:sp>
+        <p:nvSpPr>
+          <p:cNvPr id="142" name="R3B"/>
+          <p:cNvSpPr/>
+          <p:nvPr/>
+        </p:nvSpPr>
+        <p:spPr>
+          <a:xfrm>
+            <a:off x="6522000" y="2160000"/>
+            <a:ext cx="2347680" cy="245000"/>
+          </a:xfrm>
+          <a:prstGeom prst="rect">
+            <a:avLst/>
+          </a:prstGeom>
+          <a:solidFill>
+            <a:srgbClr val="FBF8F2"/>
+          </a:solidFill>
+          <a:ln w="12700">
+            <a:solidFill>
+              <a:srgbClr val="C9B991"/>
+            </a:solidFill>
+          </a:ln>
+        </p:spPr>
+        <p:txBody>
+          <a:bodyPr wrap="square" lIns="45720" tIns="18288" rIns="45720" bIns="18288" anchor="ctr"/>
+          <a:lstStyle/>
+          <a:p>
+            <a:pPr algn="ctr">
+              <a:buNone/>
+            </a:pPr>
+            <a:r>
+              <a:rPr lang="en-US" sz="1400" b="1" i="0" dirty="0">
+                <a:solidFill>
+                  <a:srgbClr val="5C4826"/>
+                </a:solidFill>
+              </a:rPr>
+              <a:t>Yes</a:t>
+            </a:r>
+          </a:p>
+        </p:txBody>
+      </p:sp>
+      <p:sp>
+        <p:nvSpPr>
+          <p:cNvPr id="150" name="R4L"/>
+          <p:cNvSpPr/>
+          <p:nvPr/>
+        </p:nvSpPr>
+        <p:spPr>
+          <a:xfrm>
+            <a:off x="274320" y="2405000"/>
+            <a:ext cx="3900000" cy="245000"/>
+          </a:xfrm>
+          <a:prstGeom prst="rect">
+            <a:avLst/>
+          </a:prstGeom>
+          <a:solidFill>
+            <a:srgbClr val="F5F1E8"/>
+          </a:solidFill>
+          <a:ln w="12700">
+            <a:solidFill>
+              <a:srgbClr val="C9B991"/>
+            </a:solidFill>
+          </a:ln>
+        </p:spPr>
+        <p:txBody>
+          <a:bodyPr wrap="square" lIns="137160" tIns="18288" rIns="45720" bIns="18288" anchor="ctr"/>
+          <a:lstStyle/>
+          <a:p>
+            <a:pPr algn="l">
+              <a:buNone/>
+            </a:pPr>
+            <a:r>
+              <a:rPr lang="en-US" sz="1400" b="0" i="0" dirty="0">
+                <a:solidFill>
+                  <a:srgbClr val="5C4826"/>
+                </a:solidFill>
+              </a:rPr>
+              <a:t>Peak load handled in experiment</a:t>
+            </a:r>
+          </a:p>
+        </p:txBody>
+      </p:sp>
+      <p:sp>
+        <p:nvSpPr>
+          <p:cNvPr id="151" name="R4A"/>
+          <p:cNvSpPr/>
+          <p:nvPr/>
+        </p:nvSpPr>
+        <p:spPr>
+          <a:xfrm>
+            <a:off x="4174320" y="2405000"/>
+            <a:ext cx="2347680" cy="245000"/>
+          </a:xfrm>
+          <a:prstGeom prst="rect">
+            <a:avLst/>
+          </a:prstGeom>
+          <a:solidFill>
+            <a:srgbClr val="FBF8F2"/>
+          </a:solidFill>
+          <a:ln w="12700">
+            <a:solidFill>
+              <a:srgbClr val="C9B991"/>
+            </a:solidFill>
+          </a:ln>
+        </p:spPr>
+        <p:txBody>
+          <a:bodyPr wrap="square" lIns="45720" tIns="18288" rIns="45720" bIns="18288" anchor="ctr"/>
+          <a:lstStyle/>
+          <a:p>
+            <a:pPr algn="ctr">
+              <a:buNone/>
+            </a:pPr>
+            <a:r>
+              <a:rPr lang="en-US" sz="1400" b="1" i="0" dirty="0">
+                <a:solidFill>
+                  <a:srgbClr val="5C4826"/>
+                </a:solidFill>
+              </a:rPr>
+              <a:t>35 jobs/min</a:t>
+            </a:r>
+          </a:p>
+        </p:txBody>
+      </p:sp>
+      <p:sp>
+        <p:nvSpPr>
+          <p:cNvPr id="152" name="R4B"/>
+          <p:cNvSpPr/>
+          <p:nvPr/>
+        </p:nvSpPr>
+        <p:spPr>
+          <a:xfrm>
+            <a:off x="6522000" y="2405000"/>
+            <a:ext cx="2347680" cy="245000"/>
+          </a:xfrm>
+          <a:prstGeom prst="rect">
+            <a:avLst/>
+          </a:prstGeom>
+          <a:solidFill>
+            <a:srgbClr val="FBF8F2"/>
+          </a:solidFill>
+          <a:ln w="12700">
+            <a:solidFill>
+              <a:srgbClr val="C9B991"/>
+            </a:solidFill>
+          </a:ln>
+        </p:spPr>
+        <p:txBody>
+          <a:bodyPr wrap="square" lIns="45720" tIns="18288" rIns="45720" bIns="18288" anchor="ctr"/>
+          <a:lstStyle/>
+          <a:p>
+            <a:pPr algn="ctr">
+              <a:buNone/>
+            </a:pPr>
+            <a:r>
+              <a:rPr lang="en-US" sz="1400" b="1" i="0" dirty="0">
+                <a:solidFill>
+                  <a:srgbClr val="5C4826"/>
+                </a:solidFill>
+              </a:rPr>
+              <a:t>120 jobs/min</a:t>
+            </a:r>
+          </a:p>
+        </p:txBody>
+      </p:sp>
+      <p:sp>
+        <p:nvSpPr>
+          <p:cNvPr id="160" name="R5L"/>
+          <p:cNvSpPr/>
+          <p:nvPr/>
+        </p:nvSpPr>
+        <p:spPr>
+          <a:xfrm>
+            <a:off x="274320" y="2650000"/>
+            <a:ext cx="3900000" cy="245000"/>
+          </a:xfrm>
+          <a:prstGeom prst="rect">
+            <a:avLst/>
+          </a:prstGeom>
+          <a:solidFill>
+            <a:srgbClr val="F5F1E8"/>
+          </a:solidFill>
+          <a:ln w="12700">
+            <a:solidFill>
+              <a:srgbClr val="C9B991"/>
+            </a:solidFill>
+          </a:ln>
+        </p:spPr>
+        <p:txBody>
+          <a:bodyPr wrap="square" lIns="137160" tIns="18288" rIns="45720" bIns="18288" anchor="ctr"/>
+          <a:lstStyle/>
+          <a:p>
+            <a:pPr algn="l">
+              <a:buNone/>
+            </a:pPr>
+            <a:r>
+              <a:rPr lang="en-US" sz="1400" b="0" i="0" dirty="0">
+                <a:solidFill>
+                  <a:srgbClr val="5C4826"/>
+                </a:solidFill>
+              </a:rPr>
+              <a:t>New operational components</a:t>
+            </a:r>
+          </a:p>
+        </p:txBody>
+      </p:sp>
+      <p:sp>
+        <p:nvSpPr>
+          <p:cNvPr id="161" name="R5A"/>
+          <p:cNvSpPr/>
+          <p:nvPr/>
+        </p:nvSpPr>
+        <p:spPr>
+          <a:xfrm>
+            <a:off x="4174320" y="2650000"/>
+            <a:ext cx="2347680" cy="245000"/>
+          </a:xfrm>
+          <a:prstGeom prst="rect">
+            <a:avLst/>
+          </a:prstGeom>
+          <a:solidFill>
+            <a:srgbClr val="FBF8F2"/>
+          </a:solidFill>
+          <a:ln w="12700">
+            <a:solidFill>
+              <a:srgbClr val="C9B991"/>
+            </a:solidFill>
+          </a:ln>
+        </p:spPr>
+        <p:txBody>
+          <a:bodyPr wrap="square" lIns="45720" tIns="18288" rIns="45720" bIns="18288" anchor="ctr"/>
+          <a:lstStyle/>
+          <a:p>
+            <a:pPr algn="ctr">
+              <a:buNone/>
+            </a:pPr>
+            <a:r>
+              <a:rPr lang="en-US" sz="1400" b="1" i="0" dirty="0">
+                <a:solidFill>
+                  <a:srgbClr val="5C4826"/>
+                </a:solidFill>
+              </a:rPr>
+              <a:t>0</a:t>
+            </a:r>
+          </a:p>
+        </p:txBody>
+      </p:sp>
+      <p:sp>
+        <p:nvSpPr>
+          <p:cNvPr id="162" name="R5B"/>
+          <p:cNvSpPr/>
+          <p:nvPr/>
+        </p:nvSpPr>
+        <p:spPr>
+          <a:xfrm>
+            <a:off x="6522000" y="2650000"/>
+            <a:ext cx="2347680" cy="245000"/>
+          </a:xfrm>
+          <a:prstGeom prst="rect">
+            <a:avLst/>
+          </a:prstGeom>
+          <a:solidFill>
+            <a:srgbClr val="FBF8F2"/>
+          </a:solidFill>
+          <a:ln w="12700">
+            <a:solidFill>
+              <a:srgbClr val="C9B991"/>
+            </a:solidFill>
+          </a:ln>
+        </p:spPr>
+        <p:txBody>
+          <a:bodyPr wrap="square" lIns="45720" tIns="18288" rIns="45720" bIns="18288" anchor="ctr"/>
+          <a:lstStyle/>
+          <a:p>
+            <a:pPr algn="ctr">
+              <a:buNone/>
+            </a:pPr>
+            <a:r>
+              <a:rPr lang="en-US" sz="1400" b="1" i="0" dirty="0">
+                <a:solidFill>
+                  <a:srgbClr val="5C4826"/>
+                </a:solidFill>
+              </a:rPr>
+              <a:t>3</a:t>
+            </a:r>
+          </a:p>
+        </p:txBody>
+      </p:sp>
+      <p:sp>
+        <p:nvSpPr>
+          <p:cNvPr id="170" name="DecisionContext"/>
+          <p:cNvSpPr/>
+          <p:nvPr/>
+        </p:nvSpPr>
+        <p:spPr>
+          <a:xfrm>
+            <a:off x="274320" y="3025000"/>
+            <a:ext cx="8595360" cy="860000"/>
+          </a:xfrm>
+          <a:prstGeom prst="rect">
+            <a:avLst/>
+          </a:prstGeom>
+          <a:solidFill>
+            <a:srgbClr val="E8F0F7"/>
+          </a:solidFill>
+          <a:ln w="25400">
+            <a:solidFill>
+              <a:srgbClr val="5B87AD"/>
+            </a:solidFill>
+          </a:ln>
+        </p:spPr>
+        <p:txBody>
+          <a:bodyPr wrap="square" lIns="137160" tIns="27432" rIns="137160" bIns="27432" anchor="ctr"/>
+          <a:lstStyle/>
+          <a:p>
+            <a:pPr algn="l">
+              <a:lnSpc>
+                <a:spcPts val="1560"/>
+              </a:lnSpc>
+              <a:buNone/>
+            </a:pPr>
+            <a:r>
+              <a:rPr lang="en-US" sz="1300" b="1" i="0" dirty="0">
+                <a:solidFill>
+                  <a:srgbClr val="1F4E71"/>
+                </a:solidFill>
+              </a:rPr>
+              <a:t>DECISION CONTEXT</a:t>
+            </a:r>
+          </a:p>
+          <a:p>
+            <a:pPr algn="l">
+              <a:lnSpc>
+                <a:spcPts val="1600"/>
+              </a:lnSpc>
+              <a:spcBef>
+                <a:spcPts val="200"/>
+              </a:spcBef>
+              <a:buNone/>
+            </a:pPr>
+            <a:r>
+              <a:rPr lang="en-US" sz="1400" b="0" i="0" dirty="0">
+                <a:solidFill>
+                  <a:srgbClr val="5C4826"/>
+                </a:solidFill>
+              </a:rPr>
+              <a:t>Expected launch traffic is 20–50 jobs/min, with substantial uncertainty.</a:t>
+            </a:r>
+          </a:p>
+          <a:p>
+            <a:pPr algn="l">
+              <a:lnSpc>
+                <a:spcPts val="1600"/>
+              </a:lnSpc>
+              <a:buNone/>
+            </a:pPr>
+            <a:r>
+              <a:rPr lang="en-US" sz="1400" b="0" i="0" dirty="0">
+                <a:solidFill>
+                  <a:srgbClr val="5C4826"/>
+                </a:solidFill>
+              </a:rPr>
+              <a:t>A customer is waiting for the feature. Each day spent gathering more evidence delays delivery by one day.</a:t>
+            </a:r>
+          </a:p>
+          <a:p>
+            <a:pPr algn="l">
+              <a:lnSpc>
+                <a:spcPts val="1600"/>
+              </a:lnSpc>
+              <a:buNone/>
+            </a:pPr>
+            <a:r>
+              <a:rPr lang="en-US" sz="1400" b="1" i="0" dirty="0">
+                <a:solidFill>
+                  <a:srgbClr val="5C4826"/>
+                </a:solidFill>
+              </a:rPr>
+              <a:t>The team must decide what to do today.</a:t>
+            </a:r>
+          </a:p>
+        </p:txBody>
+      </p:sp>
+      <p:sp>
+        <p:nvSpPr>
+          <p:cNvPr id="180" name="DecideBadge"/>
+          <p:cNvSpPr/>
+          <p:nvPr/>
+        </p:nvSpPr>
+        <p:spPr>
+          <a:xfrm>
+            <a:off x="274320" y="4000000"/>
+            <a:ext cx="2560320" cy="290000"/>
+          </a:xfrm>
+          <a:prstGeom prst="roundRect">
+            <a:avLst/>
+          </a:prstGeom>
+          <a:solidFill>
+            <a:srgbClr val="FBF8F2"/>
+          </a:solidFill>
+          <a:ln w="15875">
+            <a:solidFill>
+              <a:srgbClr val="8E6F3E"/>
+            </a:solidFill>
+          </a:ln>
+        </p:spPr>
+        <p:txBody>
+          <a:bodyPr wrap="square" lIns="45720" tIns="9144" rIns="45720" bIns="9144" anchor="ctr"/>
+          <a:lstStyle/>
+          <a:p>
+            <a:pPr algn="ctr">
+              <a:buNone/>
+            </a:pPr>
+            <a:r>
+              <a:rPr lang="en-US" sz="1400" b="1" i="0" dirty="0">
+                <a:solidFill>
+                  <a:srgbClr val="8E6F3E"/>
+                </a:solidFill>
+              </a:rPr>
+              <a:t>MAKE THE DECISION</a:t>
+            </a:r>
+          </a:p>
+        </p:txBody>
+      </p:sp>
+      <p:sp>
+        <p:nvSpPr>
+          <p:cNvPr id="181" name="DecideNote"/>
+          <p:cNvSpPr txBox="1"/>
+          <p:nvPr/>
+        </p:nvSpPr>
+        <p:spPr>
+          <a:xfrm>
+            <a:off x="2980000" y="4000000"/>
+            <a:ext cx="3200000" cy="290000"/>
+          </a:xfrm>
+          <a:prstGeom prst="rect">
+            <a:avLst/>
+          </a:prstGeom>
+          <a:noFill/>
+          <a:ln>
+            <a:noFill/>
+          </a:ln>
+        </p:spPr>
+        <p:txBody>
+          <a:bodyPr wrap="square" lIns="0" tIns="0" rIns="0" bIns="0" anchor="ctr"/>
+          <a:lstStyle/>
+          <a:p>
+            <a:pPr algn="l">
+              <a:buNone/>
+            </a:pPr>
+            <a:r>
+              <a:rPr lang="en-US" sz="1400" b="0" i="0" dirty="0">
+                <a:solidFill>
+                  <a:srgbClr val="5C4826"/>
+                </a:solidFill>
+              </a:rPr>
+              <a:t>You have 10 minutes.</a:t>
+            </a:r>
+          </a:p>
+        </p:txBody>
+      </p:sp>
+      <p:sp>
+        <p:nvSpPr>
+          <p:cNvPr id="210" name="FooterBand"/>
+          <p:cNvSpPr/>
+          <p:nvPr/>
+        </p:nvSpPr>
+        <p:spPr>
+          <a:xfrm>
+            <a:off x="274320" y="5900000"/>
+            <a:ext cx="8595360" cy="555664"/>
           </a:xfrm>
           <a:prstGeom prst="rect">
             <a:avLst/>
@@ -18979,13 +19916,239 @@
           </a:ln>
         </p:spPr>
         <p:txBody>
-          <a:bodyPr wrap="square" lIns="91440" tIns="45720" rIns="91440" bIns="45720" anchor="ctr"/>
-          <a:lstStyle/>
-          <a:p>
-            <a:endParaRPr/>
-          </a:p>
-        </p:txBody>
-      </p:sp>
+          <a:bodyPr wrap="square" lIns="91440" tIns="27432" rIns="91440" bIns="27432" anchor="ctr"/>
+          <a:lstStyle/>
+          <a:p>
+            <a:pPr algn="ctr">
+              <a:buNone/>
+            </a:pPr>
+            <a:r>
+              <a:rPr lang="en-US" sz="1600" b="1" i="0" dirty="0">
+                <a:solidFill>
+                  <a:srgbClr val="FFFFFF"/>
+                </a:solidFill>
+              </a:rPr>
+              <a:t>You cannot answer “it depends” without saying what it depends on.</a:t>
+            </a:r>
+          </a:p>
+        </p:txBody>
+      </p:sp>
+      <p:sp>
+        <p:nvSpPr>
+          <p:cNvPr id="190" name="Questions"/>
+          <p:cNvSpPr txBox="1"/>
+          <p:nvPr/>
+        </p:nvSpPr>
+        <p:spPr>
+          <a:xfrm>
+            <a:off x="274320" y="4400000"/>
+            <a:ext cx="6000000" cy="1330000"/>
+          </a:xfrm>
+          <a:prstGeom prst="rect">
+            <a:avLst/>
+          </a:prstGeom>
+          <a:noFill/>
+          <a:ln>
+            <a:noFill/>
+          </a:ln>
+        </p:spPr>
+        <p:txBody>
+          <a:bodyPr wrap="square" lIns="0" tIns="0" rIns="0" bIns="0" anchor="t"/>
+          <a:lstStyle/>
+          <a:p>
+            <a:pPr marL="274320" indent="-274320" algn="l">
+              <a:lnSpc>
+                <a:spcPts val="1560"/>
+              </a:lnSpc>
+              <a:spcBef>
+                <a:spcPts val="250"/>
+              </a:spcBef>
+              <a:buNone/>
+            </a:pPr>
+            <a:r>
+              <a:rPr lang="en-US" sz="1300" b="1" i="0" dirty="0">
+                <a:solidFill>
+                  <a:srgbClr val="8E6F3E"/>
+                </a:solidFill>
+              </a:rPr>
+              <a:t xml:space="preserve">1  </a:t>
+            </a:r>
+            <a:r>
+              <a:rPr lang="en-US" sz="1300" b="0" i="0" dirty="0">
+                <a:solidFill>
+                  <a:srgbClr val="5C4826"/>
+                </a:solidFill>
+              </a:rPr>
+              <a:t>What consequential properties matter?</a:t>
+            </a:r>
+          </a:p>
+          <a:p>
+            <a:pPr marL="274320" indent="-274320" algn="l">
+              <a:lnSpc>
+                <a:spcPts val="1560"/>
+              </a:lnSpc>
+              <a:spcBef>
+                <a:spcPts val="250"/>
+              </a:spcBef>
+              <a:buNone/>
+            </a:pPr>
+            <a:r>
+              <a:rPr lang="en-US" sz="1300" b="1" i="0" dirty="0">
+                <a:solidFill>
+                  <a:srgbClr val="8E6F3E"/>
+                </a:solidFill>
+              </a:rPr>
+              <a:t xml:space="preserve">2  </a:t>
+            </a:r>
+            <a:r>
+              <a:rPr lang="en-US" sz="1300" b="0" i="0" dirty="0">
+                <a:solidFill>
+                  <a:srgbClr val="5C4826"/>
+                </a:solidFill>
+              </a:rPr>
+              <a:t>What do these measurements support? What do they not tell you?</a:t>
+            </a:r>
+          </a:p>
+          <a:p>
+            <a:pPr marL="274320" indent="-274320" algn="l">
+              <a:lnSpc>
+                <a:spcPts val="1560"/>
+              </a:lnSpc>
+              <a:spcBef>
+                <a:spcPts val="250"/>
+              </a:spcBef>
+              <a:buNone/>
+            </a:pPr>
+            <a:r>
+              <a:rPr lang="en-US" sz="1300" b="1" i="0" dirty="0">
+                <a:solidFill>
+                  <a:srgbClr val="8E6F3E"/>
+                </a:solidFill>
+              </a:rPr>
+              <a:t xml:space="preserve">3  </a:t>
+            </a:r>
+            <a:r>
+              <a:rPr lang="en-US" sz="1300" b="0" i="0" dirty="0">
+                <a:solidFill>
+                  <a:srgbClr val="5C4826"/>
+                </a:solidFill>
+              </a:rPr>
+              <a:t>What unresolved uncertainty is most capable of changing your decision?</a:t>
+            </a:r>
+          </a:p>
+          <a:p>
+            <a:pPr marL="274320" indent="-274320" algn="l">
+              <a:lnSpc>
+                <a:spcPts val="1560"/>
+              </a:lnSpc>
+              <a:spcBef>
+                <a:spcPts val="250"/>
+              </a:spcBef>
+              <a:buNone/>
+            </a:pPr>
+            <a:r>
+              <a:rPr lang="en-US" sz="1300" b="1" i="0" dirty="0">
+                <a:solidFill>
+                  <a:srgbClr val="8E6F3E"/>
+                </a:solidFill>
+              </a:rPr>
+              <a:t xml:space="preserve">4  </a:t>
+            </a:r>
+            <a:r>
+              <a:rPr lang="en-US" sz="1300" b="0" i="0" dirty="0">
+                <a:solidFill>
+                  <a:srgbClr val="5C4826"/>
+                </a:solidFill>
+              </a:rPr>
+              <a:t>What observation would most reduce that uncertainty?</a:t>
+            </a:r>
+          </a:p>
+          <a:p>
+            <a:pPr marL="274320" indent="-274320" algn="l">
+              <a:lnSpc>
+                <a:spcPts val="1560"/>
+              </a:lnSpc>
+              <a:spcBef>
+                <a:spcPts val="250"/>
+              </a:spcBef>
+              <a:buNone/>
+            </a:pPr>
+            <a:r>
+              <a:rPr lang="en-US" sz="1300" b="1" i="0" dirty="0">
+                <a:solidFill>
+                  <a:srgbClr val="8E6F3E"/>
+                </a:solidFill>
+              </a:rPr>
+              <a:t xml:space="preserve">5  </a:t>
+            </a:r>
+            <a:r>
+              <a:rPr lang="en-US" sz="1300" b="0" i="0" dirty="0">
+                <a:solidFill>
+                  <a:srgbClr val="5C4826"/>
+                </a:solidFill>
+              </a:rPr>
+              <a:t>Is obtaining that information worth its cost or delay? Why?</a:t>
+            </a:r>
+          </a:p>
+          <a:p>
+            <a:pPr marL="274320" indent="-274320" algn="l">
+              <a:lnSpc>
+                <a:spcPts val="1560"/>
+              </a:lnSpc>
+              <a:spcBef>
+                <a:spcPts val="250"/>
+              </a:spcBef>
+              <a:buNone/>
+            </a:pPr>
+            <a:r>
+              <a:rPr lang="en-US" sz="1300" b="1" i="0" dirty="0">
+                <a:solidFill>
+                  <a:srgbClr val="8E6F3E"/>
+                </a:solidFill>
+              </a:rPr>
+              <a:t xml:space="preserve">6  </a:t>
+            </a:r>
+            <a:r>
+              <a:rPr lang="en-US" sz="1300" b="1" i="0" dirty="0">
+                <a:solidFill>
+                  <a:srgbClr val="5C4826"/>
+                </a:solidFill>
+              </a:rPr>
+              <a:t>What should the team do? Defend the decision.</a:t>
+            </a:r>
+          </a:p>
+        </p:txBody>
+      </p:sp>
+      <p:pic>
+        <p:nvPicPr>
+          <p:cNvPr id="4" name="Picture 3">
+            <a:extLst>
+              <a:ext uri="{FF2B5EF4-FFF2-40B4-BE49-F238E27FC236}">
+                <a16:creationId xmlns:a16="http://schemas.microsoft.com/office/drawing/2014/main" id="{5F99D84E-2A70-7702-D8EF-78BCD9DA4EA6}"/>
+              </a:ext>
+            </a:extLst>
+          </p:cNvPr>
+          <p:cNvPicPr>
+            <a:picLocks noChangeAspect="1"/>
+          </p:cNvPicPr>
+          <p:nvPr/>
+        </p:nvPicPr>
+        <p:blipFill>
+          <a:blip r:embed="rId3"/>
+          <a:stretch>
+            <a:fillRect/>
+          </a:stretch>
+        </p:blipFill>
+        <p:spPr>
+          <a:xfrm>
+            <a:off x="6380000" y="4090000"/>
+            <a:ext cx="1560115" cy="1606001"/>
+          </a:xfrm>
+          <a:prstGeom prst="rect">
+            <a:avLst/>
+          </a:prstGeom>
+        </p:spPr>
+      </p:pic>
     </p:spTree>
   </p:cSld>
   <p:clrMapOvr>
@@ -18995,6 +20158,157 @@
 </file>
 
 <file path=ppt/slides/slide28.xml><?xml version="1.0" encoding="utf-8"?>
+<p:sld xmlns:a="http://schemas.openxmlformats.org/drawingml/2006/main" xmlns:r="http://schemas.openxmlformats.org/officeDocument/2006/relationships" xmlns:p="http://schemas.openxmlformats.org/presentationml/2006/main">
+  <p:cSld>
+    <p:spTree>
+      <p:nvGrpSpPr>
+        <p:cNvPr id="1" name=""/>
+        <p:cNvGrpSpPr/>
+        <p:nvPr/>
+      </p:nvGrpSpPr>
+      <p:grpSpPr>
+        <a:xfrm>
+          <a:off x="0" y="0"/>
+          <a:ext cx="0" cy="0"/>
+          <a:chOff x="0" y="0"/>
+          <a:chExt cx="0" cy="0"/>
+        </a:xfrm>
+      </p:grpSpPr>
+      <p:sp>
+        <p:nvSpPr>
+          <p:cNvPr id="2" name="Title 1"/>
+          <p:cNvSpPr>
+            <a:spLocks noGrp="1"/>
+          </p:cNvSpPr>
+          <p:nvPr>
+            <p:ph type="title"/>
+          </p:nvPr>
+        </p:nvSpPr>
+        <p:spPr>
+          <a:xfrm>
+            <a:off x="685800" y="2240280"/>
+            <a:ext cx="7772400" cy="914400"/>
+          </a:xfrm>
+        </p:spPr>
+        <p:txBody>
+          <a:bodyPr>
+            <a:normAutofit/>
+          </a:bodyPr>
+          <a:lstStyle/>
+          <a:p>
+            <a:pPr algn="ctr">
+              <a:buNone/>
+              <a:defRPr b="0"/>
+            </a:pPr>
+            <a:r>
+              <a:rPr lang="en-US" sz="3600" b="0" i="0" dirty="0">
+                <a:solidFill>
+                  <a:srgbClr val="000000"/>
+                </a:solidFill>
+              </a:rPr>
+              <a:t>From measurement to action</a:t>
+            </a:r>
+          </a:p>
+        </p:txBody>
+      </p:sp>
+      <p:sp>
+        <p:nvSpPr>
+          <p:cNvPr id="100" name="SectionLabel"/>
+          <p:cNvSpPr txBox="1"/>
+          <p:nvPr/>
+        </p:nvSpPr>
+        <p:spPr>
+          <a:xfrm>
+            <a:off x="685800" y="1737360"/>
+            <a:ext cx="7772400" cy="356616"/>
+          </a:xfrm>
+          <a:prstGeom prst="rect">
+            <a:avLst/>
+          </a:prstGeom>
+          <a:noFill/>
+          <a:ln>
+            <a:noFill/>
+          </a:ln>
+        </p:spPr>
+        <p:txBody>
+          <a:bodyPr wrap="square" lIns="0" tIns="0" rIns="0" bIns="0" anchor="t"/>
+          <a:lstStyle/>
+          <a:p>
+            <a:pPr algn="ctr">
+              <a:buNone/>
+            </a:pPr>
+            <a:r>
+              <a:rPr lang="en-US" sz="2200" b="1" i="0" dirty="0">
+                <a:solidFill>
+                  <a:srgbClr val="8E6F3E"/>
+                </a:solidFill>
+              </a:rPr>
+              <a:t>SECTION 4</a:t>
+            </a:r>
+          </a:p>
+        </p:txBody>
+      </p:sp>
+      <p:sp>
+        <p:nvSpPr>
+          <p:cNvPr id="3" name="Slide Number Placeholder 3"/>
+          <p:cNvSpPr>
+            <a:spLocks noGrp="1"/>
+          </p:cNvSpPr>
+          <p:nvPr>
+            <p:ph type="sldNum" sz="quarter" idx="4"/>
+          </p:nvPr>
+        </p:nvSpPr>
+        <p:spPr/>
+        <p:txBody>
+          <a:bodyPr/>
+          <a:lstStyle/>
+          <a:p>
+            <a:fld id="{B7EB45DA-9A0D-DC49-8E02-F30A5DDC21C3}" type="slidenum">
+              <a:rPr lang="en-US" smtClean="0"/>
+              <a:t>28</a:t>
+            </a:fld>
+            <a:endParaRPr lang="en-US"/>
+          </a:p>
+        </p:txBody>
+      </p:sp>
+      <p:sp>
+        <p:nvSpPr>
+          <p:cNvPr id="101" name="Rule"/>
+          <p:cNvSpPr/>
+          <p:nvPr/>
+        </p:nvSpPr>
+        <p:spPr>
+          <a:xfrm>
+            <a:off x="3429000" y="3383280"/>
+            <a:ext cx="2286000" cy="51206"/>
+          </a:xfrm>
+          <a:prstGeom prst="rect">
+            <a:avLst/>
+          </a:prstGeom>
+          <a:solidFill>
+            <a:srgbClr val="8E6F3E"/>
+          </a:solidFill>
+          <a:ln>
+            <a:noFill/>
+          </a:ln>
+        </p:spPr>
+        <p:txBody>
+          <a:bodyPr wrap="square" lIns="91440" tIns="45720" rIns="91440" bIns="45720" anchor="ctr"/>
+          <a:lstStyle/>
+          <a:p>
+            <a:endParaRPr/>
+          </a:p>
+        </p:txBody>
+      </p:sp>
+    </p:spTree>
+  </p:cSld>
+  <p:clrMapOvr>
+    <a:masterClrMapping/>
+  </p:clrMapOvr>
+</p:sld>
+</file>
+
+<file path=ppt/slides/slide29.xml><?xml version="1.0" encoding="utf-8"?>
 <p:sld xmlns:a="http://schemas.openxmlformats.org/drawingml/2006/main" xmlns:r="http://schemas.openxmlformats.org/officeDocument/2006/relationships" xmlns:p="http://schemas.openxmlformats.org/presentationml/2006/main">
   <p:cSld>
     <p:spTree>
@@ -21545,7 +22859,366 @@
 </p:sld>
 </file>
 
-<file path=ppt/slides/slide29.xml><?xml version="1.0" encoding="utf-8"?>
+<file path=ppt/slides/slide3.xml><?xml version="1.0" encoding="utf-8"?>
+<p:sld xmlns:a="http://schemas.openxmlformats.org/drawingml/2006/main" xmlns:r="http://schemas.openxmlformats.org/officeDocument/2006/relationships" xmlns:p="http://schemas.openxmlformats.org/presentationml/2006/main">
+  <p:cSld>
+    <p:spTree>
+      <p:nvGrpSpPr>
+        <p:cNvPr id="1" name=""/>
+        <p:cNvGrpSpPr/>
+        <p:nvPr/>
+      </p:nvGrpSpPr>
+      <p:grpSpPr>
+        <a:xfrm>
+          <a:off x="0" y="0"/>
+          <a:ext cx="0" cy="0"/>
+          <a:chOff x="0" y="0"/>
+          <a:chExt cx="0" cy="0"/>
+        </a:xfrm>
+      </p:grpSpPr>
+      <p:sp>
+        <p:nvSpPr>
+          <p:cNvPr id="2" name="Title 1"/>
+          <p:cNvSpPr>
+            <a:spLocks noGrp="1"/>
+          </p:cNvSpPr>
+          <p:nvPr>
+            <p:ph type="title"/>
+          </p:nvPr>
+        </p:nvSpPr>
+        <p:spPr>
+          <a:xfrm>
+            <a:off x="277148" y="118428"/>
+            <a:ext cx="8590000" cy="638175"/>
+          </a:xfrm>
+        </p:spPr>
+        <p:txBody>
+          <a:bodyPr>
+            <a:normAutofit fontScale="90000"/>
+          </a:bodyPr>
+          <a:lstStyle/>
+          <a:p>
+            <a:pPr>
+              <a:buNone/>
+              <a:defRPr b="0"/>
+            </a:pPr>
+            <a:r>
+              <a:rPr lang="en-US" sz="2400" b="0" i="0" dirty="0">
+                <a:solidFill>
+                  <a:srgbClr val="000000"/>
+                </a:solidFill>
+              </a:rPr>
+              <a:t>We must decide before we know</a:t>
+            </a:r>
+          </a:p>
+        </p:txBody>
+      </p:sp>
+      <p:sp>
+        <p:nvSpPr>
+          <p:cNvPr id="3" name="Slide Number Placeholder 3"/>
+          <p:cNvSpPr>
+            <a:spLocks noGrp="1"/>
+          </p:cNvSpPr>
+          <p:nvPr>
+            <p:ph type="sldNum" sz="quarter" idx="4"/>
+          </p:nvPr>
+        </p:nvSpPr>
+        <p:spPr/>
+        <p:txBody>
+          <a:bodyPr/>
+          <a:lstStyle/>
+          <a:p>
+            <a:fld id="{B7EB45DA-9A0D-DC49-8E02-F30A5DDC21C3}" type="slidenum">
+              <a:rPr lang="en-US" smtClean="0"/>
+              <a:t>3</a:t>
+            </a:fld>
+            <a:endParaRPr lang="en-US"/>
+          </a:p>
+        </p:txBody>
+      </p:sp>
+      <p:sp>
+        <p:nvSpPr>
+          <p:cNvPr id="100" name="Decision"/>
+          <p:cNvSpPr/>
+          <p:nvPr/>
+        </p:nvSpPr>
+        <p:spPr>
+          <a:xfrm>
+            <a:off x="822960" y="2331720"/>
+            <a:ext cx="2011680" cy="822960"/>
+          </a:xfrm>
+          <a:prstGeom prst="rect">
+            <a:avLst/>
+          </a:prstGeom>
+          <a:solidFill>
+            <a:srgbClr val="F5F1E8"/>
+          </a:solidFill>
+          <a:ln w="12700">
+            <a:solidFill>
+              <a:srgbClr val="C9B991"/>
+            </a:solidFill>
+          </a:ln>
+        </p:spPr>
+        <p:txBody>
+          <a:bodyPr wrap="square" lIns="91440" tIns="45720" rIns="91440" bIns="45720" anchor="ctr"/>
+          <a:lstStyle/>
+          <a:p>
+            <a:pPr algn="ctr">
+              <a:buNone/>
+            </a:pPr>
+            <a:r>
+              <a:rPr lang="en-US" sz="2000" b="1" i="0" dirty="0">
+                <a:solidFill>
+                  <a:srgbClr val="5C4826"/>
+                </a:solidFill>
+              </a:rPr>
+              <a:t>DECISION</a:t>
+            </a:r>
+          </a:p>
+        </p:txBody>
+      </p:sp>
+      <p:cxnSp>
+        <p:nvCxnSpPr>
+          <p:cNvPr id="101" name="C101"/>
+          <p:cNvCxnSpPr/>
+          <p:nvPr/>
+        </p:nvCxnSpPr>
+        <p:spPr>
+          <a:xfrm>
+            <a:off x="3017520" y="2743200"/>
+            <a:ext cx="3108960" cy="0"/>
+          </a:xfrm>
+          <a:prstGeom prst="straightConnector1">
+            <a:avLst/>
+          </a:prstGeom>
+          <a:ln w="44450">
+            <a:solidFill>
+              <a:srgbClr val="8E6F3E"/>
+            </a:solidFill>
+            <a:tailEnd type="triangle" w="med" len="med"/>
+          </a:ln>
+        </p:spPr>
+      </p:cxnSp>
+      <p:sp>
+        <p:nvSpPr>
+          <p:cNvPr id="102" name="Qmark"/>
+          <p:cNvSpPr txBox="1"/>
+          <p:nvPr/>
+        </p:nvSpPr>
+        <p:spPr>
+          <a:xfrm>
+            <a:off x="4160520" y="1874520"/>
+            <a:ext cx="822960" cy="685800"/>
+          </a:xfrm>
+          <a:prstGeom prst="rect">
+            <a:avLst/>
+          </a:prstGeom>
+          <a:noFill/>
+          <a:ln>
+            <a:noFill/>
+          </a:ln>
+        </p:spPr>
+        <p:txBody>
+          <a:bodyPr wrap="square" lIns="0" tIns="0" rIns="0" bIns="0" anchor="t"/>
+          <a:lstStyle/>
+          <a:p>
+            <a:pPr algn="ctr">
+              <a:buNone/>
+            </a:pPr>
+            <a:r>
+              <a:rPr lang="en-US" sz="4400" b="1" i="0" dirty="0">
+                <a:solidFill>
+                  <a:srgbClr val="8E6F3E"/>
+                </a:solidFill>
+              </a:rPr>
+              <a:t>?</a:t>
+            </a:r>
+          </a:p>
+        </p:txBody>
+      </p:sp>
+      <p:sp>
+        <p:nvSpPr>
+          <p:cNvPr id="103" name="Outcome"/>
+          <p:cNvSpPr/>
+          <p:nvPr/>
+        </p:nvSpPr>
+        <p:spPr>
+          <a:xfrm>
+            <a:off x="6309360" y="2331720"/>
+            <a:ext cx="2011680" cy="822960"/>
+          </a:xfrm>
+          <a:prstGeom prst="rect">
+            <a:avLst/>
+          </a:prstGeom>
+          <a:solidFill>
+            <a:srgbClr val="FBF8F2"/>
+          </a:solidFill>
+          <a:ln w="12700">
+            <a:solidFill>
+              <a:srgbClr val="C9B991"/>
+            </a:solidFill>
+            <a:prstDash val="dash"/>
+          </a:ln>
+        </p:spPr>
+        <p:txBody>
+          <a:bodyPr wrap="square" lIns="91440" tIns="45720" rIns="91440" bIns="45720" anchor="ctr"/>
+          <a:lstStyle/>
+          <a:p>
+            <a:pPr algn="ctr">
+              <a:buNone/>
+            </a:pPr>
+            <a:r>
+              <a:rPr lang="en-US" sz="2000" b="1" i="0" dirty="0">
+                <a:solidFill>
+                  <a:srgbClr val="555960"/>
+                </a:solidFill>
+              </a:rPr>
+              <a:t>OUTCOME</a:t>
+            </a:r>
+          </a:p>
+        </p:txBody>
+      </p:sp>
+      <p:sp>
+        <p:nvSpPr>
+          <p:cNvPr id="104" name="Under"/>
+          <p:cNvSpPr txBox="1"/>
+          <p:nvPr/>
+        </p:nvSpPr>
+        <p:spPr>
+          <a:xfrm>
+            <a:off x="2468880" y="3703320"/>
+            <a:ext cx="4206240" cy="1325880"/>
+          </a:xfrm>
+          <a:prstGeom prst="rect">
+            <a:avLst/>
+          </a:prstGeom>
+          <a:noFill/>
+          <a:ln>
+            <a:noFill/>
+          </a:ln>
+        </p:spPr>
+        <p:txBody>
+          <a:bodyPr wrap="square" lIns="0" tIns="0" rIns="0" bIns="0" anchor="t"/>
+          <a:lstStyle/>
+          <a:p>
+            <a:pPr algn="ctr">
+              <a:buNone/>
+            </a:pPr>
+            <a:r>
+              <a:rPr lang="en-US" sz="2000" dirty="0">
+                <a:solidFill>
+                  <a:srgbClr val="555960"/>
+                </a:solidFill>
+              </a:rPr>
+              <a:t>m</a:t>
+            </a:r>
+            <a:r>
+              <a:rPr lang="en-US" sz="2000" b="0" i="0" dirty="0">
+                <a:solidFill>
+                  <a:srgbClr val="555960"/>
+                </a:solidFill>
+              </a:rPr>
+              <a:t>odels are incomplete</a:t>
+            </a:r>
+          </a:p>
+          <a:p>
+            <a:pPr algn="ctr">
+              <a:spcBef>
+                <a:spcPts val="160"/>
+              </a:spcBef>
+              <a:buNone/>
+            </a:pPr>
+            <a:r>
+              <a:rPr lang="en-US" sz="2000" b="0" i="0" dirty="0">
+                <a:solidFill>
+                  <a:srgbClr val="555960"/>
+                </a:solidFill>
+              </a:rPr>
+              <a:t>evidence is finite</a:t>
+            </a:r>
+          </a:p>
+          <a:p>
+            <a:pPr algn="ctr">
+              <a:spcBef>
+                <a:spcPts val="160"/>
+              </a:spcBef>
+              <a:buNone/>
+            </a:pPr>
+            <a:r>
+              <a:rPr lang="en-US" sz="2000" b="0" i="0" dirty="0">
+                <a:solidFill>
+                  <a:srgbClr val="555960"/>
+                </a:solidFill>
+              </a:rPr>
+              <a:t xml:space="preserve">outcomes </a:t>
+            </a:r>
+            <a:r>
+              <a:rPr lang="en-US" sz="2000" dirty="0">
+                <a:solidFill>
+                  <a:srgbClr val="555960"/>
+                </a:solidFill>
+              </a:rPr>
+              <a:t xml:space="preserve">are a </a:t>
+            </a:r>
+            <a:r>
+              <a:rPr lang="en-US" sz="2000" b="0" i="0" dirty="0">
+                <a:solidFill>
+                  <a:srgbClr val="555960"/>
+                </a:solidFill>
+              </a:rPr>
+              <a:t>future state</a:t>
+            </a:r>
+          </a:p>
+        </p:txBody>
+      </p:sp>
+      <p:sp>
+        <p:nvSpPr>
+          <p:cNvPr id="105" name="FooterBand"/>
+          <p:cNvSpPr/>
+          <p:nvPr/>
+        </p:nvSpPr>
+        <p:spPr>
+          <a:xfrm>
+            <a:off x="274320" y="5852160"/>
+            <a:ext cx="8595360" cy="566928"/>
+          </a:xfrm>
+          <a:prstGeom prst="rect">
+            <a:avLst/>
+          </a:prstGeom>
+          <a:solidFill>
+            <a:srgbClr val="8E6F3E"/>
+          </a:solidFill>
+          <a:ln>
+            <a:noFill/>
+          </a:ln>
+        </p:spPr>
+        <p:txBody>
+          <a:bodyPr wrap="square" lIns="91440" tIns="45720" rIns="91440" bIns="45720" anchor="ctr"/>
+          <a:lstStyle/>
+          <a:p>
+            <a:pPr algn="ctr">
+              <a:buNone/>
+            </a:pPr>
+            <a:r>
+              <a:rPr lang="en-US" sz="2000" b="1" i="0" dirty="0">
+                <a:solidFill>
+                  <a:srgbClr val="FFFFFF"/>
+                </a:solidFill>
+              </a:rPr>
+              <a:t>The action must occur before its consequences can be observed.</a:t>
+            </a:r>
+          </a:p>
+        </p:txBody>
+      </p:sp>
+    </p:spTree>
+  </p:cSld>
+  <p:clrMapOvr>
+    <a:masterClrMapping/>
+  </p:clrMapOvr>
+</p:sld>
+</file>
+
+<file path=ppt/slides/slide30.xml><?xml version="1.0" encoding="utf-8"?>
 <p:sld xmlns:a="http://schemas.openxmlformats.org/drawingml/2006/main" xmlns:r="http://schemas.openxmlformats.org/officeDocument/2006/relationships" xmlns:p="http://schemas.openxmlformats.org/presentationml/2006/main">
   <p:cSld>
     <p:spTree>
@@ -22148,827 +23821,6 @@
 </p:sld>
 </file>
 
-<file path=ppt/slides/slide3.xml><?xml version="1.0" encoding="utf-8"?>
-<p:sld xmlns:a="http://schemas.openxmlformats.org/drawingml/2006/main" xmlns:r="http://schemas.openxmlformats.org/officeDocument/2006/relationships" xmlns:p="http://schemas.openxmlformats.org/presentationml/2006/main">
-  <p:cSld>
-    <p:spTree>
-      <p:nvGrpSpPr>
-        <p:cNvPr id="1" name=""/>
-        <p:cNvGrpSpPr/>
-        <p:nvPr/>
-      </p:nvGrpSpPr>
-      <p:grpSpPr>
-        <a:xfrm>
-          <a:off x="0" y="0"/>
-          <a:ext cx="0" cy="0"/>
-          <a:chOff x="0" y="0"/>
-          <a:chExt cx="0" cy="0"/>
-        </a:xfrm>
-      </p:grpSpPr>
-      <p:sp>
-        <p:nvSpPr>
-          <p:cNvPr id="2" name="Title 1"/>
-          <p:cNvSpPr>
-            <a:spLocks noGrp="1"/>
-          </p:cNvSpPr>
-          <p:nvPr>
-            <p:ph type="title"/>
-          </p:nvPr>
-        </p:nvSpPr>
-        <p:spPr>
-          <a:xfrm>
-            <a:off x="277148" y="118428"/>
-            <a:ext cx="8590000" cy="638175"/>
-          </a:xfrm>
-        </p:spPr>
-        <p:txBody>
-          <a:bodyPr>
-            <a:normAutofit fontScale="90000"/>
-          </a:bodyPr>
-          <a:lstStyle/>
-          <a:p>
-            <a:pPr>
-              <a:buNone/>
-              <a:defRPr b="0"/>
-            </a:pPr>
-            <a:r>
-              <a:rPr lang="en-US" sz="2400" b="0" i="0" dirty="0">
-                <a:solidFill>
-                  <a:srgbClr val="000000"/>
-                </a:solidFill>
-              </a:rPr>
-              <a:t>We must decide before we know</a:t>
-            </a:r>
-          </a:p>
-        </p:txBody>
-      </p:sp>
-      <p:sp>
-        <p:nvSpPr>
-          <p:cNvPr id="3" name="Slide Number Placeholder 3"/>
-          <p:cNvSpPr>
-            <a:spLocks noGrp="1"/>
-          </p:cNvSpPr>
-          <p:nvPr>
-            <p:ph type="sldNum" sz="quarter" idx="4"/>
-          </p:nvPr>
-        </p:nvSpPr>
-        <p:spPr/>
-        <p:txBody>
-          <a:bodyPr/>
-          <a:lstStyle/>
-          <a:p>
-            <a:fld id="{B7EB45DA-9A0D-DC49-8E02-F30A5DDC21C3}" type="slidenum">
-              <a:rPr lang="en-US" smtClean="0"/>
-              <a:t>3</a:t>
-            </a:fld>
-            <a:endParaRPr lang="en-US"/>
-          </a:p>
-        </p:txBody>
-      </p:sp>
-      <p:sp>
-        <p:nvSpPr>
-          <p:cNvPr id="100" name="Decision"/>
-          <p:cNvSpPr/>
-          <p:nvPr/>
-        </p:nvSpPr>
-        <p:spPr>
-          <a:xfrm>
-            <a:off x="822960" y="2331720"/>
-            <a:ext cx="2011680" cy="822960"/>
-          </a:xfrm>
-          <a:prstGeom prst="rect">
-            <a:avLst/>
-          </a:prstGeom>
-          <a:solidFill>
-            <a:srgbClr val="F5F1E8"/>
-          </a:solidFill>
-          <a:ln w="12700">
-            <a:solidFill>
-              <a:srgbClr val="C9B991"/>
-            </a:solidFill>
-          </a:ln>
-        </p:spPr>
-        <p:txBody>
-          <a:bodyPr wrap="square" lIns="91440" tIns="45720" rIns="91440" bIns="45720" anchor="ctr"/>
-          <a:lstStyle/>
-          <a:p>
-            <a:pPr algn="ctr">
-              <a:buNone/>
-            </a:pPr>
-            <a:r>
-              <a:rPr lang="en-US" sz="2000" b="1" i="0" dirty="0">
-                <a:solidFill>
-                  <a:srgbClr val="5C4826"/>
-                </a:solidFill>
-              </a:rPr>
-              <a:t>DECISION</a:t>
-            </a:r>
-          </a:p>
-        </p:txBody>
-      </p:sp>
-      <p:cxnSp>
-        <p:nvCxnSpPr>
-          <p:cNvPr id="101" name="C101"/>
-          <p:cNvCxnSpPr/>
-          <p:nvPr/>
-        </p:nvCxnSpPr>
-        <p:spPr>
-          <a:xfrm>
-            <a:off x="3017520" y="2743200"/>
-            <a:ext cx="3108960" cy="0"/>
-          </a:xfrm>
-          <a:prstGeom prst="straightConnector1">
-            <a:avLst/>
-          </a:prstGeom>
-          <a:ln w="44450">
-            <a:solidFill>
-              <a:srgbClr val="8E6F3E"/>
-            </a:solidFill>
-            <a:tailEnd type="triangle" w="med" len="med"/>
-          </a:ln>
-        </p:spPr>
-      </p:cxnSp>
-      <p:sp>
-        <p:nvSpPr>
-          <p:cNvPr id="102" name="Qmark"/>
-          <p:cNvSpPr txBox="1"/>
-          <p:nvPr/>
-        </p:nvSpPr>
-        <p:spPr>
-          <a:xfrm>
-            <a:off x="4160520" y="1874520"/>
-            <a:ext cx="822960" cy="685800"/>
-          </a:xfrm>
-          <a:prstGeom prst="rect">
-            <a:avLst/>
-          </a:prstGeom>
-          <a:noFill/>
-          <a:ln>
-            <a:noFill/>
-          </a:ln>
-        </p:spPr>
-        <p:txBody>
-          <a:bodyPr wrap="square" lIns="0" tIns="0" rIns="0" bIns="0" anchor="t"/>
-          <a:lstStyle/>
-          <a:p>
-            <a:pPr algn="ctr">
-              <a:buNone/>
-            </a:pPr>
-            <a:r>
-              <a:rPr lang="en-US" sz="4400" b="1" i="0" dirty="0">
-                <a:solidFill>
-                  <a:srgbClr val="8E6F3E"/>
-                </a:solidFill>
-              </a:rPr>
-              <a:t>?</a:t>
-            </a:r>
-          </a:p>
-        </p:txBody>
-      </p:sp>
-      <p:sp>
-        <p:nvSpPr>
-          <p:cNvPr id="103" name="Outcome"/>
-          <p:cNvSpPr/>
-          <p:nvPr/>
-        </p:nvSpPr>
-        <p:spPr>
-          <a:xfrm>
-            <a:off x="6309360" y="2331720"/>
-            <a:ext cx="2011680" cy="822960"/>
-          </a:xfrm>
-          <a:prstGeom prst="rect">
-            <a:avLst/>
-          </a:prstGeom>
-          <a:solidFill>
-            <a:srgbClr val="FBF8F2"/>
-          </a:solidFill>
-          <a:ln w="12700">
-            <a:solidFill>
-              <a:srgbClr val="C9B991"/>
-            </a:solidFill>
-            <a:prstDash val="dash"/>
-          </a:ln>
-        </p:spPr>
-        <p:txBody>
-          <a:bodyPr wrap="square" lIns="91440" tIns="45720" rIns="91440" bIns="45720" anchor="ctr"/>
-          <a:lstStyle/>
-          <a:p>
-            <a:pPr algn="ctr">
-              <a:buNone/>
-            </a:pPr>
-            <a:r>
-              <a:rPr lang="en-US" sz="2000" b="1" i="0" dirty="0">
-                <a:solidFill>
-                  <a:srgbClr val="555960"/>
-                </a:solidFill>
-              </a:rPr>
-              <a:t>OUTCOME</a:t>
-            </a:r>
-          </a:p>
-        </p:txBody>
-      </p:sp>
-      <p:sp>
-        <p:nvSpPr>
-          <p:cNvPr id="104" name="Under"/>
-          <p:cNvSpPr txBox="1"/>
-          <p:nvPr/>
-        </p:nvSpPr>
-        <p:spPr>
-          <a:xfrm>
-            <a:off x="2468880" y="3703320"/>
-            <a:ext cx="4206240" cy="1325880"/>
-          </a:xfrm>
-          <a:prstGeom prst="rect">
-            <a:avLst/>
-          </a:prstGeom>
-          <a:noFill/>
-          <a:ln>
-            <a:noFill/>
-          </a:ln>
-        </p:spPr>
-        <p:txBody>
-          <a:bodyPr wrap="square" lIns="0" tIns="0" rIns="0" bIns="0" anchor="t"/>
-          <a:lstStyle/>
-          <a:p>
-            <a:pPr algn="ctr">
-              <a:buNone/>
-            </a:pPr>
-            <a:r>
-              <a:rPr lang="en-US" sz="2000" dirty="0">
-                <a:solidFill>
-                  <a:srgbClr val="555960"/>
-                </a:solidFill>
-              </a:rPr>
-              <a:t>m</a:t>
-            </a:r>
-            <a:r>
-              <a:rPr lang="en-US" sz="2000" b="0" i="0" dirty="0">
-                <a:solidFill>
-                  <a:srgbClr val="555960"/>
-                </a:solidFill>
-              </a:rPr>
-              <a:t>odels are incomplete</a:t>
-            </a:r>
-          </a:p>
-          <a:p>
-            <a:pPr algn="ctr">
-              <a:spcBef>
-                <a:spcPts val="160"/>
-              </a:spcBef>
-              <a:buNone/>
-            </a:pPr>
-            <a:r>
-              <a:rPr lang="en-US" sz="2000" b="0" i="0" dirty="0">
-                <a:solidFill>
-                  <a:srgbClr val="555960"/>
-                </a:solidFill>
-              </a:rPr>
-              <a:t>evidence is finite</a:t>
-            </a:r>
-          </a:p>
-          <a:p>
-            <a:pPr algn="ctr">
-              <a:spcBef>
-                <a:spcPts val="160"/>
-              </a:spcBef>
-              <a:buNone/>
-            </a:pPr>
-            <a:r>
-              <a:rPr lang="en-US" sz="2000" b="0" i="0" dirty="0">
-                <a:solidFill>
-                  <a:srgbClr val="555960"/>
-                </a:solidFill>
-              </a:rPr>
-              <a:t xml:space="preserve">outcomes </a:t>
-            </a:r>
-            <a:r>
-              <a:rPr lang="en-US" sz="2000" dirty="0">
-                <a:solidFill>
-                  <a:srgbClr val="555960"/>
-                </a:solidFill>
-              </a:rPr>
-              <a:t xml:space="preserve">are a </a:t>
-            </a:r>
-            <a:r>
-              <a:rPr lang="en-US" sz="2000" b="0" i="0" dirty="0">
-                <a:solidFill>
-                  <a:srgbClr val="555960"/>
-                </a:solidFill>
-              </a:rPr>
-              <a:t>future state</a:t>
-            </a:r>
-          </a:p>
-        </p:txBody>
-      </p:sp>
-      <p:sp>
-        <p:nvSpPr>
-          <p:cNvPr id="105" name="FooterBand"/>
-          <p:cNvSpPr/>
-          <p:nvPr/>
-        </p:nvSpPr>
-        <p:spPr>
-          <a:xfrm>
-            <a:off x="274320" y="5852160"/>
-            <a:ext cx="8595360" cy="566928"/>
-          </a:xfrm>
-          <a:prstGeom prst="rect">
-            <a:avLst/>
-          </a:prstGeom>
-          <a:solidFill>
-            <a:srgbClr val="8E6F3E"/>
-          </a:solidFill>
-          <a:ln>
-            <a:noFill/>
-          </a:ln>
-        </p:spPr>
-        <p:txBody>
-          <a:bodyPr wrap="square" lIns="91440" tIns="45720" rIns="91440" bIns="45720" anchor="ctr"/>
-          <a:lstStyle/>
-          <a:p>
-            <a:pPr algn="ctr">
-              <a:buNone/>
-            </a:pPr>
-            <a:r>
-              <a:rPr lang="en-US" sz="2000" b="1" i="0" dirty="0">
-                <a:solidFill>
-                  <a:srgbClr val="FFFFFF"/>
-                </a:solidFill>
-              </a:rPr>
-              <a:t>The action must occur before its consequences can be observed.</a:t>
-            </a:r>
-          </a:p>
-        </p:txBody>
-      </p:sp>
-    </p:spTree>
-  </p:cSld>
-  <p:clrMapOvr>
-    <a:masterClrMapping/>
-  </p:clrMapOvr>
-</p:sld>
-</file>
-
-<file path=ppt/slides/slide30.xml><?xml version="1.0" encoding="utf-8"?>
-<p:sld xmlns:a="http://schemas.openxmlformats.org/drawingml/2006/main" xmlns:r="http://schemas.openxmlformats.org/officeDocument/2006/relationships" xmlns:p="http://schemas.openxmlformats.org/presentationml/2006/main">
-  <p:cSld>
-    <p:spTree>
-      <p:nvGrpSpPr>
-        <p:cNvPr id="1" name=""/>
-        <p:cNvGrpSpPr/>
-        <p:nvPr/>
-      </p:nvGrpSpPr>
-      <p:grpSpPr>
-        <a:xfrm>
-          <a:off x="0" y="0"/>
-          <a:ext cx="0" cy="0"/>
-          <a:chOff x="0" y="0"/>
-          <a:chExt cx="0" cy="0"/>
-        </a:xfrm>
-      </p:grpSpPr>
-      <p:sp>
-        <p:nvSpPr>
-          <p:cNvPr id="2" name="Title 1"/>
-          <p:cNvSpPr>
-            <a:spLocks noGrp="1"/>
-          </p:cNvSpPr>
-          <p:nvPr>
-            <p:ph type="title"/>
-          </p:nvPr>
-        </p:nvSpPr>
-        <p:spPr>
-          <a:xfrm>
-            <a:off x="277148" y="118428"/>
-            <a:ext cx="8590000" cy="638175"/>
-          </a:xfrm>
-        </p:spPr>
-        <p:txBody>
-          <a:bodyPr>
-            <a:normAutofit fontScale="90000"/>
-          </a:bodyPr>
-          <a:lstStyle/>
-          <a:p>
-            <a:pPr>
-              <a:buNone/>
-              <a:defRPr b="0"/>
-            </a:pPr>
-            <a:r>
-              <a:rPr lang="en-US" sz="2400" b="0" i="0" dirty="0">
-                <a:solidFill>
-                  <a:srgbClr val="000000"/>
-                </a:solidFill>
-              </a:rPr>
-              <a:t>What should we do?</a:t>
-            </a:r>
-          </a:p>
-        </p:txBody>
-      </p:sp>
-      <p:sp>
-        <p:nvSpPr>
-          <p:cNvPr id="3" name="Slide Number Placeholder 3"/>
-          <p:cNvSpPr>
-            <a:spLocks noGrp="1"/>
-          </p:cNvSpPr>
-          <p:nvPr>
-            <p:ph type="sldNum" sz="quarter" idx="4"/>
-          </p:nvPr>
-        </p:nvSpPr>
-        <p:spPr/>
-        <p:txBody>
-          <a:bodyPr/>
-          <a:lstStyle/>
-          <a:p>
-            <a:fld id="{B7EB45DA-9A0D-DC49-8E02-F30A5DDC21C3}" type="slidenum">
-              <a:rPr lang="en-US" smtClean="0"/>
-              <a:t>31</a:t>
-            </a:fld>
-            <a:endParaRPr lang="en-US"/>
-          </a:p>
-        </p:txBody>
-      </p:sp>
-      <p:sp>
-        <p:nvSpPr>
-          <p:cNvPr id="100" name="BigQ"/>
-          <p:cNvSpPr txBox="1"/>
-          <p:nvPr/>
-        </p:nvSpPr>
-        <p:spPr>
-          <a:xfrm>
-            <a:off x="274320" y="960120"/>
-            <a:ext cx="8595360" cy="731520"/>
-          </a:xfrm>
-          <a:prstGeom prst="rect">
-            <a:avLst/>
-          </a:prstGeom>
-          <a:noFill/>
-          <a:ln>
-            <a:noFill/>
-          </a:ln>
-        </p:spPr>
-        <p:txBody>
-          <a:bodyPr wrap="square" lIns="0" tIns="0" rIns="0" bIns="0" anchor="t"/>
-          <a:lstStyle/>
-          <a:p>
-            <a:pPr algn="ctr">
-              <a:buNone/>
-            </a:pPr>
-            <a:r>
-              <a:rPr lang="en-US" sz="3200" b="0" i="0" dirty="0">
-                <a:solidFill>
-                  <a:srgbClr val="000000"/>
-                </a:solidFill>
-              </a:rPr>
-              <a:t>Given what we know, what should we do?</a:t>
-            </a:r>
-          </a:p>
-        </p:txBody>
-      </p:sp>
-      <p:sp>
-        <p:nvSpPr>
-          <p:cNvPr id="108" name="Ital"/>
-          <p:cNvSpPr txBox="1"/>
-          <p:nvPr/>
-        </p:nvSpPr>
-        <p:spPr>
-          <a:xfrm>
-            <a:off x="274320" y="4069080"/>
-            <a:ext cx="8595360" cy="777240"/>
-          </a:xfrm>
-          <a:prstGeom prst="rect">
-            <a:avLst/>
-          </a:prstGeom>
-          <a:noFill/>
-          <a:ln>
-            <a:noFill/>
-          </a:ln>
-        </p:spPr>
-        <p:txBody>
-          <a:bodyPr wrap="square" lIns="0" tIns="0" rIns="0" bIns="0" anchor="t"/>
-          <a:lstStyle/>
-          <a:p>
-            <a:pPr algn="ctr">
-              <a:buNone/>
-            </a:pPr>
-            <a:r>
-              <a:rPr lang="en-US" sz="2000" b="0" i="1" dirty="0">
-                <a:solidFill>
-                  <a:srgbClr val="000000"/>
-                </a:solidFill>
-              </a:rPr>
-              <a:t>Evidence is valuable insofar as it changes the justification for one of these.</a:t>
-            </a:r>
-          </a:p>
-        </p:txBody>
-      </p:sp>
-      <p:sp>
-        <p:nvSpPr>
-          <p:cNvPr id="109" name="A0"/>
-          <p:cNvSpPr/>
-          <p:nvPr/>
-        </p:nvSpPr>
-        <p:spPr>
-          <a:xfrm>
-            <a:off x="274320" y="2651760"/>
-            <a:ext cx="1609344" cy="1005840"/>
-          </a:xfrm>
-          <a:prstGeom prst="rect">
-            <a:avLst/>
-          </a:prstGeom>
-          <a:solidFill>
-            <a:srgbClr val="F5F1E8"/>
-          </a:solidFill>
-          <a:ln w="12700">
-            <a:solidFill>
-              <a:srgbClr val="C9B991"/>
-            </a:solidFill>
-          </a:ln>
-          <a:effectLst/>
-        </p:spPr>
-        <p:style>
-          <a:lnRef idx="1">
-            <a:schemeClr val="accent1"/>
-          </a:lnRef>
-          <a:fillRef idx="3">
-            <a:schemeClr val="accent1"/>
-          </a:fillRef>
-          <a:effectRef idx="2">
-            <a:schemeClr val="accent1"/>
-          </a:effectRef>
-          <a:fontRef idx="minor">
-            <a:schemeClr val="lt1"/>
-          </a:fontRef>
-        </p:style>
-        <p:txBody>
-          <a:bodyPr wrap="square" lIns="27432" tIns="22860" rIns="27432" bIns="22860" rtlCol="0" anchor="ctr"/>
-          <a:lstStyle/>
-          <a:p>
-            <a:pPr algn="ctr"/>
-            <a:r>
-              <a:rPr sz="2000" b="1" i="0">
-                <a:solidFill>
-                  <a:srgbClr val="5C4826"/>
-                </a:solidFill>
-              </a:rPr>
-              <a:t>DELIVER</a:t>
-            </a:r>
-          </a:p>
-        </p:txBody>
-      </p:sp>
-      <p:sp>
-        <p:nvSpPr>
-          <p:cNvPr id="110" name="A1"/>
-          <p:cNvSpPr/>
-          <p:nvPr/>
-        </p:nvSpPr>
-        <p:spPr>
-          <a:xfrm>
-            <a:off x="2020824" y="2651760"/>
-            <a:ext cx="1609344" cy="1005840"/>
-          </a:xfrm>
-          <a:prstGeom prst="rect">
-            <a:avLst/>
-          </a:prstGeom>
-          <a:solidFill>
-            <a:srgbClr val="F5F1E8"/>
-          </a:solidFill>
-          <a:ln w="12700">
-            <a:solidFill>
-              <a:srgbClr val="C9B991"/>
-            </a:solidFill>
-          </a:ln>
-          <a:effectLst/>
-        </p:spPr>
-        <p:style>
-          <a:lnRef idx="1">
-            <a:schemeClr val="accent1"/>
-          </a:lnRef>
-          <a:fillRef idx="3">
-            <a:schemeClr val="accent1"/>
-          </a:fillRef>
-          <a:effectRef idx="2">
-            <a:schemeClr val="accent1"/>
-          </a:effectRef>
-          <a:fontRef idx="minor">
-            <a:schemeClr val="lt1"/>
-          </a:fontRef>
-        </p:style>
-        <p:txBody>
-          <a:bodyPr wrap="square" lIns="27432" tIns="22860" rIns="27432" bIns="22860" rtlCol="0" anchor="ctr"/>
-          <a:lstStyle/>
-          <a:p>
-            <a:pPr algn="ctr"/>
-            <a:r>
-              <a:rPr sz="2000" b="1" i="0">
-                <a:solidFill>
-                  <a:srgbClr val="5C4826"/>
-                </a:solidFill>
-              </a:rPr>
-              <a:t>GATHER</a:t>
-            </a:r>
-          </a:p>
-          <a:p>
-            <a:pPr algn="ctr"/>
-            <a:r>
-              <a:rPr sz="2000" b="1" i="0">
-                <a:solidFill>
-                  <a:srgbClr val="5C4826"/>
-                </a:solidFill>
-              </a:rPr>
-              <a:t>MORE</a:t>
-            </a:r>
-          </a:p>
-          <a:p>
-            <a:pPr algn="ctr"/>
-            <a:r>
-              <a:rPr sz="2000" b="1" i="0">
-                <a:solidFill>
-                  <a:srgbClr val="5C4826"/>
-                </a:solidFill>
-              </a:rPr>
-              <a:t>EVIDENCE</a:t>
-            </a:r>
-          </a:p>
-        </p:txBody>
-      </p:sp>
-      <p:sp>
-        <p:nvSpPr>
-          <p:cNvPr id="111" name="A2"/>
-          <p:cNvSpPr/>
-          <p:nvPr/>
-        </p:nvSpPr>
-        <p:spPr>
-          <a:xfrm>
-            <a:off x="3767328" y="2651760"/>
-            <a:ext cx="1609344" cy="1005840"/>
-          </a:xfrm>
-          <a:prstGeom prst="rect">
-            <a:avLst/>
-          </a:prstGeom>
-          <a:solidFill>
-            <a:srgbClr val="F5F1E8"/>
-          </a:solidFill>
-          <a:ln w="12700">
-            <a:solidFill>
-              <a:srgbClr val="C9B991"/>
-            </a:solidFill>
-          </a:ln>
-          <a:effectLst/>
-        </p:spPr>
-        <p:style>
-          <a:lnRef idx="1">
-            <a:schemeClr val="accent1"/>
-          </a:lnRef>
-          <a:fillRef idx="3">
-            <a:schemeClr val="accent1"/>
-          </a:fillRef>
-          <a:effectRef idx="2">
-            <a:schemeClr val="accent1"/>
-          </a:effectRef>
-          <a:fontRef idx="minor">
-            <a:schemeClr val="lt1"/>
-          </a:fontRef>
-        </p:style>
-        <p:txBody>
-          <a:bodyPr wrap="square" lIns="27432" tIns="22860" rIns="27432" bIns="22860" rtlCol="0" anchor="ctr"/>
-          <a:lstStyle/>
-          <a:p>
-            <a:pPr algn="ctr"/>
-            <a:r>
-              <a:rPr sz="2000" b="1" i="0">
-                <a:solidFill>
-                  <a:srgbClr val="5C4826"/>
-                </a:solidFill>
-              </a:rPr>
-              <a:t>CHANGE</a:t>
-            </a:r>
-          </a:p>
-        </p:txBody>
-      </p:sp>
-      <p:sp>
-        <p:nvSpPr>
-          <p:cNvPr id="112" name="A3"/>
-          <p:cNvSpPr/>
-          <p:nvPr/>
-        </p:nvSpPr>
-        <p:spPr>
-          <a:xfrm>
-            <a:off x="5513832" y="2651760"/>
-            <a:ext cx="1609344" cy="1005840"/>
-          </a:xfrm>
-          <a:prstGeom prst="rect">
-            <a:avLst/>
-          </a:prstGeom>
-          <a:solidFill>
-            <a:srgbClr val="F5F1E8"/>
-          </a:solidFill>
-          <a:ln w="12700">
-            <a:solidFill>
-              <a:srgbClr val="C9B991"/>
-            </a:solidFill>
-          </a:ln>
-          <a:effectLst/>
-        </p:spPr>
-        <p:style>
-          <a:lnRef idx="1">
-            <a:schemeClr val="accent1"/>
-          </a:lnRef>
-          <a:fillRef idx="3">
-            <a:schemeClr val="accent1"/>
-          </a:fillRef>
-          <a:effectRef idx="2">
-            <a:schemeClr val="accent1"/>
-          </a:effectRef>
-          <a:fontRef idx="minor">
-            <a:schemeClr val="lt1"/>
-          </a:fontRef>
-        </p:style>
-        <p:txBody>
-          <a:bodyPr wrap="square" lIns="27432" tIns="22860" rIns="27432" bIns="22860" rtlCol="0" anchor="ctr"/>
-          <a:lstStyle/>
-          <a:p>
-            <a:pPr algn="ctr"/>
-            <a:r>
-              <a:rPr sz="2000" b="1" i="0">
-                <a:solidFill>
-                  <a:srgbClr val="5C4826"/>
-                </a:solidFill>
-              </a:rPr>
-              <a:t>REVISIT</a:t>
-            </a:r>
-          </a:p>
-          <a:p>
-            <a:pPr algn="ctr"/>
-            <a:r>
-              <a:rPr sz="2000" b="1" i="0">
-                <a:solidFill>
-                  <a:srgbClr val="5C4826"/>
-                </a:solidFill>
-              </a:rPr>
-              <a:t>UPSTREAM</a:t>
-            </a:r>
-          </a:p>
-        </p:txBody>
-      </p:sp>
-      <p:sp>
-        <p:nvSpPr>
-          <p:cNvPr id="113" name="A4"/>
-          <p:cNvSpPr/>
-          <p:nvPr/>
-        </p:nvSpPr>
-        <p:spPr>
-          <a:xfrm>
-            <a:off x="7260336" y="2651760"/>
-            <a:ext cx="1609344" cy="1005840"/>
-          </a:xfrm>
-          <a:prstGeom prst="rect">
-            <a:avLst/>
-          </a:prstGeom>
-          <a:solidFill>
-            <a:srgbClr val="F5F1E8"/>
-          </a:solidFill>
-          <a:ln w="12700">
-            <a:solidFill>
-              <a:srgbClr val="C9B991"/>
-            </a:solidFill>
-          </a:ln>
-          <a:effectLst/>
-        </p:spPr>
-        <p:style>
-          <a:lnRef idx="1">
-            <a:schemeClr val="accent1"/>
-          </a:lnRef>
-          <a:fillRef idx="3">
-            <a:schemeClr val="accent1"/>
-          </a:fillRef>
-          <a:effectRef idx="2">
-            <a:schemeClr val="accent1"/>
-          </a:effectRef>
-          <a:fontRef idx="minor">
-            <a:schemeClr val="lt1"/>
-          </a:fontRef>
-        </p:style>
-        <p:txBody>
-          <a:bodyPr wrap="square" lIns="27432" tIns="22860" rIns="27432" bIns="22860" rtlCol="0" anchor="ctr"/>
-          <a:lstStyle/>
-          <a:p>
-            <a:pPr algn="ctr"/>
-            <a:r>
-              <a:rPr sz="2000" b="1" i="0">
-                <a:solidFill>
-                  <a:srgbClr val="5C4826"/>
-                </a:solidFill>
-              </a:rPr>
-              <a:t>REFUSE</a:t>
-            </a:r>
-          </a:p>
-        </p:txBody>
-      </p:sp>
-    </p:spTree>
-  </p:cSld>
-  <p:clrMapOvr>
-    <a:masterClrMapping/>
-  </p:clrMapOvr>
-</p:sld>
-</file>
-
 <file path=ppt/slides/slide31.xml><?xml version="1.0" encoding="utf-8"?>
 <p:sld xmlns:a="http://schemas.openxmlformats.org/drawingml/2006/main" xmlns:r="http://schemas.openxmlformats.org/officeDocument/2006/relationships" xmlns:p="http://schemas.openxmlformats.org/presentationml/2006/main">
   <p:cSld>
@@ -23018,7 +23870,7 @@
                   <a:srgbClr val="000000"/>
                 </a:solidFill>
               </a:rPr>
-              <a:t>Before the decision · After the outcome</a:t>
+              <a:t>What should we do?</a:t>
             </a:r>
           </a:p>
         </p:txBody>
@@ -23040,7 +23892,7 @@
           <a:p>
             <a:fld id="{B7EB45DA-9A0D-DC49-8E02-F30A5DDC21C3}" type="slidenum">
               <a:rPr lang="en-US" smtClean="0"/>
-              <a:t>32</a:t>
+              <a:t>31</a:t>
             </a:fld>
             <a:endParaRPr lang="en-US"/>
           </a:p>
@@ -23048,160 +23900,14 @@
       </p:sp>
       <p:sp>
         <p:nvSpPr>
-          <p:cNvPr id="100" name="Before"/>
-          <p:cNvSpPr/>
-          <p:nvPr/>
-        </p:nvSpPr>
-        <p:spPr>
-          <a:xfrm>
-            <a:off x="310896" y="932688"/>
-            <a:ext cx="3959352" cy="1188720"/>
-          </a:xfrm>
-          <a:prstGeom prst="rect">
-            <a:avLst/>
-          </a:prstGeom>
-          <a:solidFill>
-            <a:srgbClr val="F5F1E8"/>
-          </a:solidFill>
-          <a:ln w="12700">
-            <a:solidFill>
-              <a:srgbClr val="C9B991"/>
-            </a:solidFill>
-          </a:ln>
-        </p:spPr>
-        <p:txBody>
-          <a:bodyPr wrap="square" lIns="45720" tIns="18000" rIns="45720" bIns="18000" anchor="ctr"/>
-          <a:lstStyle/>
-          <a:p>
-            <a:pPr algn="ctr">
-              <a:buNone/>
-            </a:pPr>
-            <a:r>
-              <a:rPr lang="en-US" sz="2000" b="1" i="0" dirty="0">
-                <a:solidFill>
-                  <a:srgbClr val="8E6F3E"/>
-                </a:solidFill>
-              </a:rPr>
-              <a:t>BEFORE</a:t>
-            </a:r>
-          </a:p>
-          <a:p>
-            <a:pPr algn="ctr">
-              <a:spcBef>
-                <a:spcPts val="100"/>
-              </a:spcBef>
-              <a:buNone/>
-            </a:pPr>
-            <a:r>
-              <a:rPr lang="en-US" sz="2000" b="0" i="0" dirty="0">
-                <a:solidFill>
-                  <a:srgbClr val="5C4826"/>
-                </a:solidFill>
-              </a:rPr>
-              <a:t>Given what we know,</a:t>
-            </a:r>
-          </a:p>
-          <a:p>
-            <a:pPr algn="ctr">
-              <a:spcBef>
-                <a:spcPts val="60"/>
-              </a:spcBef>
-              <a:buNone/>
-            </a:pPr>
-            <a:r>
-              <a:rPr lang="en-US" sz="2000" b="0" i="0" dirty="0">
-                <a:solidFill>
-                  <a:srgbClr val="5C4826"/>
-                </a:solidFill>
-              </a:rPr>
-              <a:t>what should we do?</a:t>
-            </a:r>
-          </a:p>
-        </p:txBody>
-      </p:sp>
-      <p:sp>
-        <p:nvSpPr>
-          <p:cNvPr id="101" name="After"/>
-          <p:cNvSpPr/>
-          <p:nvPr/>
-        </p:nvSpPr>
-        <p:spPr>
-          <a:xfrm>
-            <a:off x="4873752" y="932688"/>
-            <a:ext cx="3959352" cy="1188720"/>
-          </a:xfrm>
-          <a:prstGeom prst="rect">
-            <a:avLst/>
-          </a:prstGeom>
-          <a:solidFill>
-            <a:srgbClr val="F5F1E8"/>
-          </a:solidFill>
-          <a:ln w="12700">
-            <a:solidFill>
-              <a:srgbClr val="C9B991"/>
-            </a:solidFill>
-          </a:ln>
-        </p:spPr>
-        <p:txBody>
-          <a:bodyPr wrap="square" lIns="45720" tIns="18000" rIns="45720" bIns="18000" anchor="ctr"/>
-          <a:lstStyle/>
-          <a:p>
-            <a:pPr algn="ctr">
-              <a:buNone/>
-            </a:pPr>
-            <a:r>
-              <a:rPr lang="en-US" sz="2000" b="1" i="0" dirty="0">
-                <a:solidFill>
-                  <a:srgbClr val="8E6F3E"/>
-                </a:solidFill>
-              </a:rPr>
-              <a:t>AFTER</a:t>
-            </a:r>
-          </a:p>
-          <a:p>
-            <a:pPr algn="ctr">
-              <a:spcBef>
-                <a:spcPts val="100"/>
-              </a:spcBef>
-              <a:buNone/>
-            </a:pPr>
-            <a:r>
-              <a:rPr lang="en-US" sz="2000" b="0" i="0" dirty="0">
-                <a:solidFill>
-                  <a:srgbClr val="5C4826"/>
-                </a:solidFill>
-              </a:rPr>
-              <a:t>Given what happened,</a:t>
-            </a:r>
-          </a:p>
-          <a:p>
-            <a:pPr algn="ctr">
-              <a:spcBef>
-                <a:spcPts val="60"/>
-              </a:spcBef>
-              <a:buNone/>
-            </a:pPr>
-            <a:r>
-              <a:rPr lang="en-US" sz="2000" b="0" i="0" dirty="0">
-                <a:solidFill>
-                  <a:srgbClr val="5C4826"/>
-                </a:solidFill>
-              </a:rPr>
-              <a:t>what should we now believe?</a:t>
-            </a:r>
-          </a:p>
-        </p:txBody>
-      </p:sp>
-      <p:sp>
-        <p:nvSpPr>
-          <p:cNvPr id="123" name="Foreshadow"/>
+          <p:cNvPr id="100" name="BigQ"/>
           <p:cNvSpPr txBox="1"/>
           <p:nvPr/>
         </p:nvSpPr>
         <p:spPr>
           <a:xfrm>
-            <a:off x="274320" y="4617720"/>
-            <a:ext cx="8595360" cy="457200"/>
+            <a:off x="274320" y="960120"/>
+            <a:ext cx="8595360" cy="731520"/>
           </a:xfrm>
           <a:prstGeom prst="rect">
             <a:avLst/>
@@ -23219,26 +23925,63 @@
               <a:buNone/>
             </a:pPr>
             <a:r>
+              <a:rPr lang="en-US" sz="3200" b="0" i="0" dirty="0">
+                <a:solidFill>
+                  <a:srgbClr val="000000"/>
+                </a:solidFill>
+              </a:rPr>
+              <a:t>Given what we know, what should we do?</a:t>
+            </a:r>
+          </a:p>
+        </p:txBody>
+      </p:sp>
+      <p:sp>
+        <p:nvSpPr>
+          <p:cNvPr id="108" name="Ital"/>
+          <p:cNvSpPr txBox="1"/>
+          <p:nvPr/>
+        </p:nvSpPr>
+        <p:spPr>
+          <a:xfrm>
+            <a:off x="274320" y="4069080"/>
+            <a:ext cx="8595360" cy="777240"/>
+          </a:xfrm>
+          <a:prstGeom prst="rect">
+            <a:avLst/>
+          </a:prstGeom>
+          <a:noFill/>
+          <a:ln>
+            <a:noFill/>
+          </a:ln>
+        </p:spPr>
+        <p:txBody>
+          <a:bodyPr wrap="square" lIns="0" tIns="0" rIns="0" bIns="0" anchor="t"/>
+          <a:lstStyle/>
+          <a:p>
+            <a:pPr algn="ctr">
+              <a:buNone/>
+            </a:pPr>
+            <a:r>
               <a:rPr lang="en-US" sz="2000" b="0" i="1" dirty="0">
                 <a:solidFill>
-                  <a:srgbClr val="555960"/>
-                </a:solidFill>
-              </a:rPr>
-              <a:t>When the outcome surprises us: which model should change?</a:t>
-            </a:r>
-          </a:p>
-        </p:txBody>
-      </p:sp>
-      <p:sp>
-        <p:nvSpPr>
-          <p:cNvPr id="124" name="Chain0"/>
+                  <a:srgbClr val="000000"/>
+                </a:solidFill>
+              </a:rPr>
+              <a:t>Evidence is valuable insofar as it changes the justification for one of these.</a:t>
+            </a:r>
+          </a:p>
+        </p:txBody>
+      </p:sp>
+      <p:sp>
+        <p:nvSpPr>
+          <p:cNvPr id="109" name="A0"/>
           <p:cNvSpPr/>
           <p:nvPr/>
         </p:nvSpPr>
         <p:spPr>
           <a:xfrm>
-            <a:off x="208346" y="2697480"/>
-            <a:ext cx="1216152" cy="566928"/>
+            <a:off x="274320" y="2651760"/>
+            <a:ext cx="1609344" cy="1005840"/>
           </a:xfrm>
           <a:prstGeom prst="rect">
             <a:avLst/>
@@ -23268,7 +24011,7 @@
           </a:fontRef>
         </p:style>
         <p:txBody>
-          <a:bodyPr wrap="square" lIns="18288" tIns="18288" rIns="18288" bIns="18288" rtlCol="0" anchor="ctr"/>
+          <a:bodyPr wrap="square" lIns="27432" tIns="22860" rIns="27432" bIns="22860" rtlCol="0" anchor="ctr"/>
           <a:lstStyle/>
           <a:p>
             <a:pPr algn="ctr"/>
@@ -23278,58 +24021,21 @@
                   <a:srgbClr val="5C4826"/>
                 </a:solidFill>
               </a:rPr>
-              <a:t>DECISION</a:t>
-            </a:r>
-          </a:p>
-        </p:txBody>
-      </p:sp>
-      <p:cxnSp>
-        <p:nvCxnSpPr>
-          <p:cNvPr id="125" name="C29_0"/>
-          <p:cNvCxnSpPr/>
-          <p:nvPr/>
-        </p:nvCxnSpPr>
-        <p:spPr>
-          <a:xfrm>
-            <a:off x="1424498" y="2980944"/>
-            <a:ext cx="91440" cy="0"/>
-          </a:xfrm>
-          <a:prstGeom prst="line">
-            <a:avLst/>
-          </a:prstGeom>
-          <a:ln w="19050">
-            <a:solidFill>
-              <a:srgbClr val="8E6F3E"/>
-            </a:solidFill>
-            <a:tailEnd type="triangle" w="med" len="med"/>
-          </a:ln>
-          <a:effectLst/>
-        </p:spPr>
-        <p:style>
-          <a:lnRef idx="2">
-            <a:schemeClr val="accent1"/>
-          </a:lnRef>
-          <a:fillRef idx="0">
-            <a:schemeClr val="accent1"/>
-          </a:fillRef>
-          <a:effectRef idx="1">
-            <a:schemeClr val="accent1"/>
-          </a:effectRef>
-          <a:fontRef idx="minor">
-            <a:schemeClr val="tx1"/>
-          </a:fontRef>
-        </p:style>
-      </p:cxnSp>
-      <p:sp>
-        <p:nvSpPr>
-          <p:cNvPr id="126" name="Chain1"/>
+              <a:t>DELIVER</a:t>
+            </a:r>
+          </a:p>
+        </p:txBody>
+      </p:sp>
+      <p:sp>
+        <p:nvSpPr>
+          <p:cNvPr id="110" name="A1"/>
           <p:cNvSpPr/>
           <p:nvPr/>
         </p:nvSpPr>
         <p:spPr>
           <a:xfrm>
-            <a:off x="1515938" y="2697480"/>
-            <a:ext cx="927100" cy="566928"/>
+            <a:off x="2020824" y="2651760"/>
+            <a:ext cx="1609344" cy="1005840"/>
           </a:xfrm>
           <a:prstGeom prst="rect">
             <a:avLst/>
@@ -23359,7 +24065,7 @@
           </a:fontRef>
         </p:style>
         <p:txBody>
-          <a:bodyPr wrap="square" lIns="18288" tIns="18288" rIns="18288" bIns="18288" rtlCol="0" anchor="ctr"/>
+          <a:bodyPr wrap="square" lIns="27432" tIns="22860" rIns="27432" bIns="22860" rtlCol="0" anchor="ctr"/>
           <a:lstStyle/>
           <a:p>
             <a:pPr algn="ctr"/>
@@ -23369,58 +24075,43 @@
                   <a:srgbClr val="5C4826"/>
                 </a:solidFill>
               </a:rPr>
-              <a:t>MODEL</a:t>
-            </a:r>
-          </a:p>
-        </p:txBody>
-      </p:sp>
-      <p:cxnSp>
-        <p:nvCxnSpPr>
-          <p:cNvPr id="127" name="C29_1"/>
-          <p:cNvCxnSpPr/>
-          <p:nvPr/>
-        </p:nvCxnSpPr>
-        <p:spPr>
-          <a:xfrm>
-            <a:off x="2443038" y="2980944"/>
-            <a:ext cx="91440" cy="0"/>
-          </a:xfrm>
-          <a:prstGeom prst="line">
-            <a:avLst/>
-          </a:prstGeom>
-          <a:ln w="19050">
-            <a:solidFill>
-              <a:srgbClr val="8E6F3E"/>
-            </a:solidFill>
-            <a:tailEnd type="triangle" w="med" len="med"/>
-          </a:ln>
-          <a:effectLst/>
-        </p:spPr>
-        <p:style>
-          <a:lnRef idx="2">
-            <a:schemeClr val="accent1"/>
-          </a:lnRef>
-          <a:fillRef idx="0">
-            <a:schemeClr val="accent1"/>
-          </a:fillRef>
-          <a:effectRef idx="1">
-            <a:schemeClr val="accent1"/>
-          </a:effectRef>
-          <a:fontRef idx="minor">
-            <a:schemeClr val="tx1"/>
-          </a:fontRef>
-        </p:style>
-      </p:cxnSp>
-      <p:sp>
-        <p:nvSpPr>
-          <p:cNvPr id="128" name="Chain2"/>
+              <a:t>GATHER</a:t>
+            </a:r>
+          </a:p>
+          <a:p>
+            <a:pPr algn="ctr"/>
+            <a:r>
+              <a:rPr sz="2000" b="1" i="0">
+                <a:solidFill>
+                  <a:srgbClr val="5C4826"/>
+                </a:solidFill>
+              </a:rPr>
+              <a:t>MORE</a:t>
+            </a:r>
+          </a:p>
+          <a:p>
+            <a:pPr algn="ctr"/>
+            <a:r>
+              <a:rPr sz="2000" b="1" i="0">
+                <a:solidFill>
+                  <a:srgbClr val="5C4826"/>
+                </a:solidFill>
+              </a:rPr>
+              <a:t>EVIDENCE</a:t>
+            </a:r>
+          </a:p>
+        </p:txBody>
+      </p:sp>
+      <p:sp>
+        <p:nvSpPr>
+          <p:cNvPr id="111" name="A2"/>
           <p:cNvSpPr/>
           <p:nvPr/>
         </p:nvSpPr>
         <p:spPr>
           <a:xfrm>
-            <a:off x="2534478" y="2697480"/>
-            <a:ext cx="1216152" cy="566928"/>
+            <a:off x="3767328" y="2651760"/>
+            <a:ext cx="1609344" cy="1005840"/>
           </a:xfrm>
           <a:prstGeom prst="rect">
             <a:avLst/>
@@ -23450,7 +24141,7 @@
           </a:fontRef>
         </p:style>
         <p:txBody>
-          <a:bodyPr wrap="square" lIns="18288" tIns="18288" rIns="18288" bIns="18288" rtlCol="0" anchor="ctr"/>
+          <a:bodyPr wrap="square" lIns="27432" tIns="22860" rIns="27432" bIns="22860" rtlCol="0" anchor="ctr"/>
           <a:lstStyle/>
           <a:p>
             <a:pPr algn="ctr"/>
@@ -23460,58 +24151,21 @@
                   <a:srgbClr val="5C4826"/>
                 </a:solidFill>
               </a:rPr>
-              <a:t>EVIDENCE</a:t>
-            </a:r>
-          </a:p>
-        </p:txBody>
-      </p:sp>
-      <p:cxnSp>
-        <p:nvCxnSpPr>
-          <p:cNvPr id="129" name="C29_2"/>
-          <p:cNvCxnSpPr/>
-          <p:nvPr/>
-        </p:nvCxnSpPr>
-        <p:spPr>
-          <a:xfrm>
-            <a:off x="3750630" y="2980944"/>
-            <a:ext cx="91440" cy="0"/>
-          </a:xfrm>
-          <a:prstGeom prst="line">
-            <a:avLst/>
-          </a:prstGeom>
-          <a:ln w="19050">
-            <a:solidFill>
-              <a:srgbClr val="8E6F3E"/>
-            </a:solidFill>
-            <a:tailEnd type="triangle" w="med" len="med"/>
-          </a:ln>
-          <a:effectLst/>
-        </p:spPr>
-        <p:style>
-          <a:lnRef idx="2">
-            <a:schemeClr val="accent1"/>
-          </a:lnRef>
-          <a:fillRef idx="0">
-            <a:schemeClr val="accent1"/>
-          </a:fillRef>
-          <a:effectRef idx="1">
-            <a:schemeClr val="accent1"/>
-          </a:effectRef>
-          <a:fontRef idx="minor">
-            <a:schemeClr val="tx1"/>
-          </a:fontRef>
-        </p:style>
-      </p:cxnSp>
-      <p:sp>
-        <p:nvSpPr>
-          <p:cNvPr id="130" name="Chain3"/>
+              <a:t>CHANGE</a:t>
+            </a:r>
+          </a:p>
+        </p:txBody>
+      </p:sp>
+      <p:sp>
+        <p:nvSpPr>
+          <p:cNvPr id="112" name="A3"/>
           <p:cNvSpPr/>
           <p:nvPr/>
         </p:nvSpPr>
         <p:spPr>
           <a:xfrm>
-            <a:off x="3842070" y="2697480"/>
-            <a:ext cx="1350000" cy="566928"/>
+            <a:off x="5513832" y="2651760"/>
+            <a:ext cx="1609344" cy="1005840"/>
           </a:xfrm>
           <a:prstGeom prst="rect">
             <a:avLst/>
@@ -23541,7 +24195,7 @@
           </a:fontRef>
         </p:style>
         <p:txBody>
-          <a:bodyPr wrap="square" lIns="18288" tIns="18288" rIns="18288" bIns="18288" rtlCol="0" anchor="ctr"/>
+          <a:bodyPr wrap="square" lIns="27432" tIns="22860" rIns="27432" bIns="22860" rtlCol="0" anchor="ctr"/>
           <a:lstStyle/>
           <a:p>
             <a:pPr algn="ctr"/>
@@ -23551,58 +24205,32 @@
                   <a:srgbClr val="5C4826"/>
                 </a:solidFill>
               </a:rPr>
-              <a:t>JUDGMENT</a:t>
-            </a:r>
-          </a:p>
-        </p:txBody>
-      </p:sp>
-      <p:cxnSp>
-        <p:nvCxnSpPr>
-          <p:cNvPr id="131" name="C29_3"/>
-          <p:cNvCxnSpPr/>
-          <p:nvPr/>
-        </p:nvCxnSpPr>
-        <p:spPr>
-          <a:xfrm>
-            <a:off x="5192070" y="2980944"/>
-            <a:ext cx="91440" cy="0"/>
-          </a:xfrm>
-          <a:prstGeom prst="line">
-            <a:avLst/>
-          </a:prstGeom>
-          <a:ln w="19050">
-            <a:solidFill>
-              <a:srgbClr val="8E6F3E"/>
-            </a:solidFill>
-            <a:tailEnd type="triangle" w="med" len="med"/>
-          </a:ln>
-          <a:effectLst/>
-        </p:spPr>
-        <p:style>
-          <a:lnRef idx="2">
-            <a:schemeClr val="accent1"/>
-          </a:lnRef>
-          <a:fillRef idx="0">
-            <a:schemeClr val="accent1"/>
-          </a:fillRef>
-          <a:effectRef idx="1">
-            <a:schemeClr val="accent1"/>
-          </a:effectRef>
-          <a:fontRef idx="minor">
-            <a:schemeClr val="tx1"/>
-          </a:fontRef>
-        </p:style>
-      </p:cxnSp>
-      <p:sp>
-        <p:nvSpPr>
-          <p:cNvPr id="132" name="Chain4"/>
+              <a:t>REVISIT</a:t>
+            </a:r>
+          </a:p>
+          <a:p>
+            <a:pPr algn="ctr"/>
+            <a:r>
+              <a:rPr sz="2000" b="1" i="0">
+                <a:solidFill>
+                  <a:srgbClr val="5C4826"/>
+                </a:solidFill>
+              </a:rPr>
+              <a:t>UPSTREAM</a:t>
+            </a:r>
+          </a:p>
+        </p:txBody>
+      </p:sp>
+      <p:sp>
+        <p:nvSpPr>
+          <p:cNvPr id="113" name="A4"/>
           <p:cNvSpPr/>
           <p:nvPr/>
         </p:nvSpPr>
         <p:spPr>
           <a:xfrm>
-            <a:off x="5283510" y="2697480"/>
-            <a:ext cx="1023112" cy="566928"/>
+            <a:off x="7260336" y="2651760"/>
+            <a:ext cx="1609344" cy="1005840"/>
           </a:xfrm>
           <a:prstGeom prst="rect">
             <a:avLst/>
@@ -23632,7 +24260,7 @@
           </a:fontRef>
         </p:style>
         <p:txBody>
-          <a:bodyPr wrap="square" lIns="18288" tIns="18288" rIns="18288" bIns="18288" rtlCol="0" anchor="ctr"/>
+          <a:bodyPr wrap="square" lIns="27432" tIns="22860" rIns="27432" bIns="22860" rtlCol="0" anchor="ctr"/>
           <a:lstStyle/>
           <a:p>
             <a:pPr algn="ctr"/>
@@ -23642,343 +24270,7 @@
                   <a:srgbClr val="5C4826"/>
                 </a:solidFill>
               </a:rPr>
-              <a:t>ACTION</a:t>
-            </a:r>
-          </a:p>
-        </p:txBody>
-      </p:sp>
-      <p:cxnSp>
-        <p:nvCxnSpPr>
-          <p:cNvPr id="133" name="C29_4"/>
-          <p:cNvCxnSpPr/>
-          <p:nvPr/>
-        </p:nvCxnSpPr>
-        <p:spPr>
-          <a:xfrm>
-            <a:off x="6306622" y="2980944"/>
-            <a:ext cx="91440" cy="0"/>
-          </a:xfrm>
-          <a:prstGeom prst="line">
-            <a:avLst/>
-          </a:prstGeom>
-          <a:ln w="19050">
-            <a:solidFill>
-              <a:srgbClr val="8E6F3E"/>
-            </a:solidFill>
-            <a:tailEnd type="triangle" w="med" len="med"/>
-          </a:ln>
-          <a:effectLst/>
-        </p:spPr>
-        <p:style>
-          <a:lnRef idx="2">
-            <a:schemeClr val="accent1"/>
-          </a:lnRef>
-          <a:fillRef idx="0">
-            <a:schemeClr val="accent1"/>
-          </a:fillRef>
-          <a:effectRef idx="1">
-            <a:schemeClr val="accent1"/>
-          </a:effectRef>
-          <a:fontRef idx="minor">
-            <a:schemeClr val="tx1"/>
-          </a:fontRef>
-        </p:style>
-      </p:cxnSp>
-      <p:sp>
-        <p:nvSpPr>
-          <p:cNvPr id="134" name="Chain5"/>
-          <p:cNvSpPr/>
-          <p:nvPr/>
-        </p:nvSpPr>
-        <p:spPr>
-          <a:xfrm>
-            <a:off x="6398062" y="2697480"/>
-            <a:ext cx="1230000" cy="566928"/>
-          </a:xfrm>
-          <a:prstGeom prst="rect">
-            <a:avLst/>
-          </a:prstGeom>
-          <a:solidFill>
-            <a:srgbClr val="F5F1E8"/>
-          </a:solidFill>
-          <a:ln w="12700">
-            <a:solidFill>
-              <a:srgbClr val="C9B991"/>
-            </a:solidFill>
-          </a:ln>
-          <a:effectLst/>
-        </p:spPr>
-        <p:style>
-          <a:lnRef idx="1">
-            <a:schemeClr val="accent1"/>
-          </a:lnRef>
-          <a:fillRef idx="3">
-            <a:schemeClr val="accent1"/>
-          </a:fillRef>
-          <a:effectRef idx="2">
-            <a:schemeClr val="accent1"/>
-          </a:effectRef>
-          <a:fontRef idx="minor">
-            <a:schemeClr val="lt1"/>
-          </a:fontRef>
-        </p:style>
-        <p:txBody>
-          <a:bodyPr wrap="square" lIns="18288" tIns="18288" rIns="18288" bIns="18288" rtlCol="0" anchor="ctr"/>
-          <a:lstStyle/>
-          <a:p>
-            <a:pPr algn="ctr"/>
-            <a:r>
-              <a:rPr sz="2000" b="1" i="0">
-                <a:solidFill>
-                  <a:srgbClr val="5C4826"/>
-                </a:solidFill>
-              </a:rPr>
-              <a:t>OUTCOME</a:t>
-            </a:r>
-          </a:p>
-        </p:txBody>
-      </p:sp>
-      <p:cxnSp>
-        <p:nvCxnSpPr>
-          <p:cNvPr id="135" name="C29_5"/>
-          <p:cNvCxnSpPr/>
-          <p:nvPr/>
-        </p:nvCxnSpPr>
-        <p:spPr>
-          <a:xfrm>
-            <a:off x="7628062" y="2980944"/>
-            <a:ext cx="91440" cy="0"/>
-          </a:xfrm>
-          <a:prstGeom prst="line">
-            <a:avLst/>
-          </a:prstGeom>
-          <a:ln w="19050">
-            <a:solidFill>
-              <a:srgbClr val="8E6F3E"/>
-            </a:solidFill>
-            <a:tailEnd type="triangle" w="med" len="med"/>
-          </a:ln>
-          <a:effectLst/>
-        </p:spPr>
-        <p:style>
-          <a:lnRef idx="2">
-            <a:schemeClr val="accent1"/>
-          </a:lnRef>
-          <a:fillRef idx="0">
-            <a:schemeClr val="accent1"/>
-          </a:fillRef>
-          <a:effectRef idx="1">
-            <a:schemeClr val="accent1"/>
-          </a:effectRef>
-          <a:fontRef idx="minor">
-            <a:schemeClr val="tx1"/>
-          </a:fontRef>
-        </p:style>
-      </p:cxnSp>
-      <p:sp>
-        <p:nvSpPr>
-          <p:cNvPr id="136" name="Chain6"/>
-          <p:cNvSpPr/>
-          <p:nvPr/>
-        </p:nvSpPr>
-        <p:spPr>
-          <a:xfrm>
-            <a:off x="7719502" y="2697480"/>
-            <a:ext cx="1216152" cy="566928"/>
-          </a:xfrm>
-          <a:prstGeom prst="rect">
-            <a:avLst/>
-          </a:prstGeom>
-          <a:solidFill>
-            <a:srgbClr val="F5F1E8"/>
-          </a:solidFill>
-          <a:ln w="12700">
-            <a:solidFill>
-              <a:srgbClr val="C9B991"/>
-            </a:solidFill>
-          </a:ln>
-          <a:effectLst/>
-        </p:spPr>
-        <p:style>
-          <a:lnRef idx="1">
-            <a:schemeClr val="accent1"/>
-          </a:lnRef>
-          <a:fillRef idx="3">
-            <a:schemeClr val="accent1"/>
-          </a:fillRef>
-          <a:effectRef idx="2">
-            <a:schemeClr val="accent1"/>
-          </a:effectRef>
-          <a:fontRef idx="minor">
-            <a:schemeClr val="lt1"/>
-          </a:fontRef>
-        </p:style>
-        <p:txBody>
-          <a:bodyPr wrap="square" lIns="18288" tIns="18288" rIns="18288" bIns="18288" rtlCol="0" anchor="ctr"/>
-          <a:lstStyle/>
-          <a:p>
-            <a:pPr algn="ctr"/>
-            <a:r>
-              <a:rPr sz="2000" b="1" i="0">
-                <a:solidFill>
-                  <a:srgbClr val="5C4826"/>
-                </a:solidFill>
-              </a:rPr>
-              <a:t>NEW</a:t>
-            </a:r>
-          </a:p>
-          <a:p>
-            <a:pPr algn="ctr"/>
-            <a:r>
-              <a:rPr sz="2000" b="1" i="0">
-                <a:solidFill>
-                  <a:srgbClr val="5C4826"/>
-                </a:solidFill>
-              </a:rPr>
-              <a:t>EVIDENCE</a:t>
-            </a:r>
-          </a:p>
-        </p:txBody>
-      </p:sp>
-      <p:cxnSp>
-        <p:nvCxnSpPr>
-          <p:cNvPr id="137" name="SegDown"/>
-          <p:cNvCxnSpPr/>
-          <p:nvPr/>
-        </p:nvCxnSpPr>
-        <p:spPr>
-          <a:xfrm>
-            <a:off x="8327578" y="3264408"/>
-            <a:ext cx="0" cy="667512"/>
-          </a:xfrm>
-          <a:prstGeom prst="line">
-            <a:avLst/>
-          </a:prstGeom>
-          <a:ln w="19050">
-            <a:solidFill>
-              <a:srgbClr val="8E6F3E"/>
-            </a:solidFill>
-          </a:ln>
-          <a:effectLst/>
-        </p:spPr>
-        <p:style>
-          <a:lnRef idx="2">
-            <a:schemeClr val="accent1"/>
-          </a:lnRef>
-          <a:fillRef idx="0">
-            <a:schemeClr val="accent1"/>
-          </a:fillRef>
-          <a:effectRef idx="1">
-            <a:schemeClr val="accent1"/>
-          </a:effectRef>
-          <a:fontRef idx="minor">
-            <a:schemeClr val="tx1"/>
-          </a:fontRef>
-        </p:style>
-      </p:cxnSp>
-      <p:cxnSp>
-        <p:nvCxnSpPr>
-          <p:cNvPr id="138" name="SegAcross"/>
-          <p:cNvCxnSpPr/>
-          <p:nvPr/>
-        </p:nvCxnSpPr>
-        <p:spPr>
-          <a:xfrm>
-            <a:off x="1979488" y="3931920"/>
-            <a:ext cx="6348090" cy="0"/>
-          </a:xfrm>
-          <a:prstGeom prst="line">
-            <a:avLst/>
-          </a:prstGeom>
-          <a:ln w="19050">
-            <a:solidFill>
-              <a:srgbClr val="8E6F3E"/>
-            </a:solidFill>
-          </a:ln>
-          <a:effectLst/>
-        </p:spPr>
-        <p:style>
-          <a:lnRef idx="2">
-            <a:schemeClr val="accent1"/>
-          </a:lnRef>
-          <a:fillRef idx="0">
-            <a:schemeClr val="accent1"/>
-          </a:fillRef>
-          <a:effectRef idx="1">
-            <a:schemeClr val="accent1"/>
-          </a:effectRef>
-          <a:fontRef idx="minor">
-            <a:schemeClr val="tx1"/>
-          </a:fontRef>
-        </p:style>
-      </p:cxnSp>
-      <p:cxnSp>
-        <p:nvCxnSpPr>
-          <p:cNvPr id="139" name="SegUp"/>
-          <p:cNvCxnSpPr/>
-          <p:nvPr/>
-        </p:nvCxnSpPr>
-        <p:spPr>
-          <a:xfrm>
-            <a:off x="1979488" y="3264408"/>
-            <a:ext cx="0" cy="667512"/>
-          </a:xfrm>
-          <a:prstGeom prst="line">
-            <a:avLst/>
-          </a:prstGeom>
-          <a:ln w="19050">
-            <a:solidFill>
-              <a:srgbClr val="8E6F3E"/>
-            </a:solidFill>
-            <a:headEnd type="triangle" w="med" len="med"/>
-          </a:ln>
-          <a:effectLst/>
-        </p:spPr>
-        <p:style>
-          <a:lnRef idx="2">
-            <a:schemeClr val="accent1"/>
-          </a:lnRef>
-          <a:fillRef idx="0">
-            <a:schemeClr val="accent1"/>
-          </a:fillRef>
-          <a:effectRef idx="1">
-            <a:schemeClr val="accent1"/>
-          </a:effectRef>
-          <a:fontRef idx="minor">
-            <a:schemeClr val="tx1"/>
-          </a:fontRef>
-        </p:style>
-      </p:cxnSp>
-      <p:sp>
-        <p:nvSpPr>
-          <p:cNvPr id="140" name="LoopLbl"/>
-          <p:cNvSpPr txBox="1"/>
-          <p:nvPr/>
-        </p:nvSpPr>
-        <p:spPr>
-          <a:xfrm>
-            <a:off x="4056253" y="4023360"/>
-            <a:ext cx="2194560" cy="365760"/>
-          </a:xfrm>
-          <a:prstGeom prst="rect">
-            <a:avLst/>
-          </a:prstGeom>
-          <a:noFill/>
-        </p:spPr>
-        <p:txBody>
-          <a:bodyPr wrap="square" lIns="0" tIns="0" rIns="0" bIns="0" anchor="ctr">
-            <a:spAutoFit/>
-          </a:bodyPr>
-          <a:lstStyle/>
-          <a:p>
-            <a:pPr algn="ctr"/>
-            <a:r>
-              <a:rPr sz="2000" b="0" i="1">
-                <a:solidFill>
-                  <a:srgbClr val="8E6F3E"/>
-                </a:solidFill>
-              </a:rPr>
-              <a:t>the loop continues</a:t>
+              <a:t>REFUSE</a:t>
             </a:r>
           </a:p>
         </p:txBody>
@@ -24040,7 +24332,7 @@
                   <a:srgbClr val="000000"/>
                 </a:solidFill>
               </a:rPr>
-              <a:t>Engineering is informed control</a:t>
+              <a:t>Before the decision · After the outcome</a:t>
             </a:r>
           </a:p>
         </p:txBody>
@@ -24062,7 +24354,7 @@
           <a:p>
             <a:fld id="{B7EB45DA-9A0D-DC49-8E02-F30A5DDC21C3}" type="slidenum">
               <a:rPr lang="en-US" smtClean="0"/>
-              <a:t>33</a:t>
+              <a:t>32</a:t>
             </a:fld>
             <a:endParaRPr lang="en-US"/>
           </a:p>
@@ -24070,174 +24362,14 @@
       </p:sp>
       <p:sp>
         <p:nvSpPr>
-          <p:cNvPr id="100" name="Day1"/>
-          <p:cNvSpPr txBox="1"/>
-          <p:nvPr/>
-        </p:nvSpPr>
-        <p:spPr>
-          <a:xfrm>
-            <a:off x="274320" y="1234440"/>
-            <a:ext cx="8595360" cy="329184"/>
-          </a:xfrm>
-          <a:prstGeom prst="rect">
-            <a:avLst/>
-          </a:prstGeom>
-          <a:noFill/>
-          <a:ln>
-            <a:noFill/>
-          </a:ln>
-        </p:spPr>
-        <p:txBody>
-          <a:bodyPr wrap="square" lIns="0" tIns="0" rIns="0" bIns="0" anchor="t"/>
-          <a:lstStyle/>
-          <a:p>
-            <a:pPr algn="ctr">
-              <a:buNone/>
-            </a:pPr>
-            <a:r>
-              <a:rPr lang="en-US" sz="2000" b="1" i="0" dirty="0">
-                <a:solidFill>
-                  <a:srgbClr val="8E6F3E"/>
-                </a:solidFill>
-              </a:rPr>
-              <a:t>FROM DAY 1</a:t>
-            </a:r>
-          </a:p>
-        </p:txBody>
-      </p:sp>
-      <p:sp>
-        <p:nvSpPr>
-          <p:cNvPr id="101" name="Def"/>
+          <p:cNvPr id="100" name="Before"/>
           <p:cNvSpPr/>
           <p:nvPr/>
         </p:nvSpPr>
         <p:spPr>
           <a:xfrm>
-            <a:off x="685800" y="1691640"/>
-            <a:ext cx="7772400" cy="868680"/>
-          </a:xfrm>
-          <a:prstGeom prst="rect">
-            <a:avLst/>
-          </a:prstGeom>
-          <a:solidFill>
-            <a:srgbClr val="E8F0F7"/>
-          </a:solidFill>
-          <a:ln w="12700">
-            <a:solidFill>
-              <a:srgbClr val="A9C4DB"/>
-            </a:solidFill>
-          </a:ln>
-        </p:spPr>
-        <p:txBody>
-          <a:bodyPr wrap="square" lIns="91440" tIns="45720" rIns="91440" bIns="45720" anchor="ctr"/>
-          <a:lstStyle/>
-          <a:p>
-            <a:pPr algn="ctr">
-              <a:buNone/>
-            </a:pPr>
-            <a:r>
-              <a:rPr lang="en-US" sz="2000" b="0" i="0" dirty="0">
-                <a:solidFill>
-                  <a:srgbClr val="5C4826"/>
-                </a:solidFill>
-              </a:rPr>
-              <a:t xml:space="preserve">Engineering is the discipline of exercising </a:t>
-            </a:r>
-          </a:p>
-          <a:p>
-            <a:pPr algn="ctr">
-              <a:buNone/>
-            </a:pPr>
-            <a:r>
-              <a:rPr lang="en-US" sz="2000" b="0" i="0" dirty="0">
-                <a:solidFill>
-                  <a:srgbClr val="5C4826"/>
-                </a:solidFill>
-              </a:rPr>
-              <a:t>informed control over consequential systems.</a:t>
-            </a:r>
-          </a:p>
-        </p:txBody>
-      </p:sp>
-      <p:sp>
-        <p:nvSpPr>
-          <p:cNvPr id="102" name="Close"/>
-          <p:cNvSpPr txBox="1"/>
-          <p:nvPr/>
-        </p:nvSpPr>
-        <p:spPr>
-          <a:xfrm>
-            <a:off x="685800" y="3108960"/>
-            <a:ext cx="7772400" cy="1041010"/>
-          </a:xfrm>
-          <a:prstGeom prst="rect">
-            <a:avLst/>
-          </a:prstGeom>
-          <a:noFill/>
-          <a:ln>
-            <a:noFill/>
-          </a:ln>
-        </p:spPr>
-        <p:txBody>
-          <a:bodyPr wrap="square" lIns="0" tIns="0" rIns="0" bIns="0" anchor="t"/>
-          <a:lstStyle/>
-          <a:p>
-            <a:pPr algn="ctr">
-              <a:buNone/>
-            </a:pPr>
-            <a:r>
-              <a:rPr lang="en-US" sz="2000" b="0" i="0" dirty="0">
-                <a:solidFill>
-                  <a:srgbClr val="555960"/>
-                </a:solidFill>
-              </a:rPr>
-              <a:t>Metrics make selected properties of reality observable.</a:t>
-            </a:r>
-          </a:p>
-          <a:p>
-            <a:pPr algn="ctr">
-              <a:spcBef>
-                <a:spcPts val="160"/>
-              </a:spcBef>
-              <a:buNone/>
-            </a:pPr>
-            <a:r>
-              <a:rPr lang="en-US" sz="2000" b="0" i="0" dirty="0">
-                <a:solidFill>
-                  <a:srgbClr val="555960"/>
-                </a:solidFill>
-              </a:rPr>
-              <a:t xml:space="preserve">Engineering judgment determines what </a:t>
-            </a:r>
-          </a:p>
-          <a:p>
-            <a:pPr algn="ctr">
-              <a:spcBef>
-                <a:spcPts val="160"/>
-              </a:spcBef>
-              <a:buNone/>
-            </a:pPr>
-            <a:r>
-              <a:rPr lang="en-US" sz="2000" b="0" i="0" dirty="0">
-                <a:solidFill>
-                  <a:srgbClr val="555960"/>
-                </a:solidFill>
-              </a:rPr>
-              <a:t>those observations mean for the decision.</a:t>
-            </a:r>
-          </a:p>
-        </p:txBody>
-      </p:sp>
-      <p:sp>
-        <p:nvSpPr>
-          <p:cNvPr id="103" name="Chain0"/>
-          <p:cNvSpPr/>
-          <p:nvPr/>
-        </p:nvSpPr>
-        <p:spPr>
-          <a:xfrm>
-            <a:off x="996696" y="4572000"/>
-            <a:ext cx="1298448" cy="603504"/>
+            <a:off x="310896" y="932688"/>
+            <a:ext cx="3959352" cy="1188720"/>
           </a:xfrm>
           <a:prstGeom prst="rect">
             <a:avLst/>
@@ -24252,7 +24384,7 @@
           </a:ln>
         </p:spPr>
         <p:txBody>
-          <a:bodyPr wrap="square" lIns="27432" tIns="22860" rIns="27432" bIns="22860" anchor="ctr"/>
+          <a:bodyPr wrap="square" lIns="45720" tIns="18000" rIns="45720" bIns="18000" anchor="ctr"/>
           <a:lstStyle/>
           <a:p>
             <a:pPr algn="ctr">
@@ -24261,46 +24393,56 @@
             <a:r>
               <a:rPr lang="en-US" sz="2000" b="1" i="0" dirty="0">
                 <a:solidFill>
+                  <a:srgbClr val="8E6F3E"/>
+                </a:solidFill>
+              </a:rPr>
+              <a:t>BEFORE</a:t>
+            </a:r>
+          </a:p>
+          <a:p>
+            <a:pPr algn="ctr">
+              <a:spcBef>
+                <a:spcPts val="100"/>
+              </a:spcBef>
+              <a:buNone/>
+            </a:pPr>
+            <a:r>
+              <a:rPr lang="en-US" sz="2000" b="0" i="0" dirty="0">
+                <a:solidFill>
                   <a:srgbClr val="5C4826"/>
                 </a:solidFill>
               </a:rPr>
-              <a:t>MODEL</a:t>
-            </a:r>
-          </a:p>
-        </p:txBody>
-      </p:sp>
-      <p:cxnSp>
-        <p:nvCxnSpPr>
-          <p:cNvPr id="104" name="C104"/>
-          <p:cNvCxnSpPr/>
-          <p:nvPr/>
-        </p:nvCxnSpPr>
-        <p:spPr>
-          <a:xfrm>
-            <a:off x="2295144" y="4873752"/>
-            <a:ext cx="164592" cy="0"/>
-          </a:xfrm>
-          <a:prstGeom prst="straightConnector1">
-            <a:avLst/>
-          </a:prstGeom>
-          <a:ln w="19050">
-            <a:solidFill>
-              <a:srgbClr val="8E6F3E"/>
-            </a:solidFill>
-            <a:tailEnd type="triangle" w="med" len="med"/>
-          </a:ln>
-        </p:spPr>
-      </p:cxnSp>
-      <p:sp>
-        <p:nvSpPr>
-          <p:cNvPr id="105" name="Chain1"/>
+              <a:t>Given what we know,</a:t>
+            </a:r>
+          </a:p>
+          <a:p>
+            <a:pPr algn="ctr">
+              <a:spcBef>
+                <a:spcPts val="60"/>
+              </a:spcBef>
+              <a:buNone/>
+            </a:pPr>
+            <a:r>
+              <a:rPr lang="en-US" sz="2000" b="0" i="0" dirty="0">
+                <a:solidFill>
+                  <a:srgbClr val="5C4826"/>
+                </a:solidFill>
+              </a:rPr>
+              <a:t>what should we do?</a:t>
+            </a:r>
+          </a:p>
+        </p:txBody>
+      </p:sp>
+      <p:sp>
+        <p:nvSpPr>
+          <p:cNvPr id="101" name="After"/>
           <p:cNvSpPr/>
           <p:nvPr/>
         </p:nvSpPr>
         <p:spPr>
           <a:xfrm>
-            <a:off x="2459736" y="4572000"/>
-            <a:ext cx="1298448" cy="603504"/>
+            <a:off x="4873752" y="932688"/>
+            <a:ext cx="3959352" cy="1188720"/>
           </a:xfrm>
           <a:prstGeom prst="rect">
             <a:avLst/>
@@ -24315,7 +24457,7 @@
           </a:ln>
         </p:spPr>
         <p:txBody>
-          <a:bodyPr wrap="square" lIns="27432" tIns="22860" rIns="27432" bIns="22860" anchor="ctr"/>
+          <a:bodyPr wrap="square" lIns="45720" tIns="18000" rIns="45720" bIns="18000" anchor="ctr"/>
           <a:lstStyle/>
           <a:p>
             <a:pPr algn="ctr">
@@ -24324,46 +24466,93 @@
             <a:r>
               <a:rPr lang="en-US" sz="2000" b="1" i="0" dirty="0">
                 <a:solidFill>
+                  <a:srgbClr val="8E6F3E"/>
+                </a:solidFill>
+              </a:rPr>
+              <a:t>AFTER</a:t>
+            </a:r>
+          </a:p>
+          <a:p>
+            <a:pPr algn="ctr">
+              <a:spcBef>
+                <a:spcPts val="100"/>
+              </a:spcBef>
+              <a:buNone/>
+            </a:pPr>
+            <a:r>
+              <a:rPr lang="en-US" sz="2000" b="0" i="0" dirty="0">
+                <a:solidFill>
                   <a:srgbClr val="5C4826"/>
                 </a:solidFill>
               </a:rPr>
-              <a:t>OBSERVE</a:t>
-            </a:r>
-          </a:p>
-        </p:txBody>
-      </p:sp>
-      <p:cxnSp>
-        <p:nvCxnSpPr>
-          <p:cNvPr id="106" name="C106"/>
-          <p:cNvCxnSpPr/>
-          <p:nvPr/>
-        </p:nvCxnSpPr>
-        <p:spPr>
-          <a:xfrm>
-            <a:off x="3758184" y="4873752"/>
-            <a:ext cx="164592" cy="0"/>
-          </a:xfrm>
-          <a:prstGeom prst="straightConnector1">
-            <a:avLst/>
-          </a:prstGeom>
-          <a:ln w="19050">
-            <a:solidFill>
-              <a:srgbClr val="8E6F3E"/>
-            </a:solidFill>
-            <a:tailEnd type="triangle" w="med" len="med"/>
+              <a:t>Given what happened,</a:t>
+            </a:r>
+          </a:p>
+          <a:p>
+            <a:pPr algn="ctr">
+              <a:spcBef>
+                <a:spcPts val="60"/>
+              </a:spcBef>
+              <a:buNone/>
+            </a:pPr>
+            <a:r>
+              <a:rPr lang="en-US" sz="2000" b="0" i="0" dirty="0">
+                <a:solidFill>
+                  <a:srgbClr val="5C4826"/>
+                </a:solidFill>
+              </a:rPr>
+              <a:t>what should we now believe?</a:t>
+            </a:r>
+          </a:p>
+        </p:txBody>
+      </p:sp>
+      <p:sp>
+        <p:nvSpPr>
+          <p:cNvPr id="123" name="Foreshadow"/>
+          <p:cNvSpPr txBox="1"/>
+          <p:nvPr/>
+        </p:nvSpPr>
+        <p:spPr>
+          <a:xfrm>
+            <a:off x="274320" y="4617720"/>
+            <a:ext cx="8595360" cy="457200"/>
+          </a:xfrm>
+          <a:prstGeom prst="rect">
+            <a:avLst/>
+          </a:prstGeom>
+          <a:noFill/>
+          <a:ln>
+            <a:noFill/>
           </a:ln>
         </p:spPr>
-      </p:cxnSp>
-      <p:sp>
-        <p:nvSpPr>
-          <p:cNvPr id="107" name="Chain2"/>
+        <p:txBody>
+          <a:bodyPr wrap="square" lIns="0" tIns="0" rIns="0" bIns="0" anchor="t"/>
+          <a:lstStyle/>
+          <a:p>
+            <a:pPr algn="ctr">
+              <a:buNone/>
+            </a:pPr>
+            <a:r>
+              <a:rPr lang="en-US" sz="2000" b="0" i="1" dirty="0">
+                <a:solidFill>
+                  <a:srgbClr val="555960"/>
+                </a:solidFill>
+              </a:rPr>
+              <a:t>When the outcome surprises us: which model should change?</a:t>
+            </a:r>
+          </a:p>
+        </p:txBody>
+      </p:sp>
+      <p:sp>
+        <p:nvSpPr>
+          <p:cNvPr id="124" name="Chain0"/>
           <p:cNvSpPr/>
           <p:nvPr/>
         </p:nvSpPr>
         <p:spPr>
           <a:xfrm>
-            <a:off x="3922776" y="4572000"/>
-            <a:ext cx="1298448" cy="603504"/>
+            <a:off x="208346" y="2697480"/>
+            <a:ext cx="1216152" cy="566928"/>
           </a:xfrm>
           <a:prstGeom prst="rect">
             <a:avLst/>
@@ -24376,37 +24565,50 @@
               <a:srgbClr val="C9B991"/>
             </a:solidFill>
           </a:ln>
-        </p:spPr>
-        <p:txBody>
-          <a:bodyPr wrap="square" lIns="27432" tIns="22860" rIns="27432" bIns="22860" anchor="ctr"/>
-          <a:lstStyle/>
-          <a:p>
-            <a:pPr algn="ctr">
-              <a:buNone/>
-            </a:pPr>
-            <a:r>
-              <a:rPr lang="en-US" sz="2000" b="1" i="0" dirty="0">
+          <a:effectLst/>
+        </p:spPr>
+        <p:style>
+          <a:lnRef idx="1">
+            <a:schemeClr val="accent1"/>
+          </a:lnRef>
+          <a:fillRef idx="3">
+            <a:schemeClr val="accent1"/>
+          </a:fillRef>
+          <a:effectRef idx="2">
+            <a:schemeClr val="accent1"/>
+          </a:effectRef>
+          <a:fontRef idx="minor">
+            <a:schemeClr val="lt1"/>
+          </a:fontRef>
+        </p:style>
+        <p:txBody>
+          <a:bodyPr wrap="square" lIns="18288" tIns="18288" rIns="18288" bIns="18288" rtlCol="0" anchor="ctr"/>
+          <a:lstStyle/>
+          <a:p>
+            <a:pPr algn="ctr"/>
+            <a:r>
+              <a:rPr sz="2000" b="1" i="0">
                 <a:solidFill>
                   <a:srgbClr val="5C4826"/>
                 </a:solidFill>
               </a:rPr>
-              <a:t>JUDGE</a:t>
+              <a:t>DECISION</a:t>
             </a:r>
           </a:p>
         </p:txBody>
       </p:sp>
       <p:cxnSp>
         <p:nvCxnSpPr>
-          <p:cNvPr id="108" name="C108"/>
+          <p:cNvPr id="125" name="C29_0"/>
           <p:cNvCxnSpPr/>
           <p:nvPr/>
         </p:nvCxnSpPr>
         <p:spPr>
           <a:xfrm>
-            <a:off x="5221224" y="4873752"/>
-            <a:ext cx="164592" cy="0"/>
-          </a:xfrm>
-          <a:prstGeom prst="straightConnector1">
+            <a:off x="1424498" y="2980944"/>
+            <a:ext cx="91440" cy="0"/>
+          </a:xfrm>
+          <a:prstGeom prst="line">
             <a:avLst/>
           </a:prstGeom>
           <a:ln w="19050">
@@ -24415,18 +24617,33 @@
             </a:solidFill>
             <a:tailEnd type="triangle" w="med" len="med"/>
           </a:ln>
-        </p:spPr>
+          <a:effectLst/>
+        </p:spPr>
+        <p:style>
+          <a:lnRef idx="2">
+            <a:schemeClr val="accent1"/>
+          </a:lnRef>
+          <a:fillRef idx="0">
+            <a:schemeClr val="accent1"/>
+          </a:fillRef>
+          <a:effectRef idx="1">
+            <a:schemeClr val="accent1"/>
+          </a:effectRef>
+          <a:fontRef idx="minor">
+            <a:schemeClr val="tx1"/>
+          </a:fontRef>
+        </p:style>
       </p:cxnSp>
       <p:sp>
         <p:nvSpPr>
-          <p:cNvPr id="109" name="Chain3"/>
+          <p:cNvPr id="126" name="Chain1"/>
           <p:cNvSpPr/>
           <p:nvPr/>
         </p:nvSpPr>
         <p:spPr>
           <a:xfrm>
-            <a:off x="5385816" y="4572000"/>
-            <a:ext cx="1298448" cy="603504"/>
+            <a:off x="1515938" y="2697480"/>
+            <a:ext cx="927100" cy="566928"/>
           </a:xfrm>
           <a:prstGeom prst="rect">
             <a:avLst/>
@@ -24439,37 +24656,50 @@
               <a:srgbClr val="C9B991"/>
             </a:solidFill>
           </a:ln>
-        </p:spPr>
-        <p:txBody>
-          <a:bodyPr wrap="square" lIns="27432" tIns="22860" rIns="27432" bIns="22860" anchor="ctr"/>
-          <a:lstStyle/>
-          <a:p>
-            <a:pPr algn="ctr">
-              <a:buNone/>
-            </a:pPr>
-            <a:r>
-              <a:rPr lang="en-US" sz="2000" b="1" i="0" dirty="0">
+          <a:effectLst/>
+        </p:spPr>
+        <p:style>
+          <a:lnRef idx="1">
+            <a:schemeClr val="accent1"/>
+          </a:lnRef>
+          <a:fillRef idx="3">
+            <a:schemeClr val="accent1"/>
+          </a:fillRef>
+          <a:effectRef idx="2">
+            <a:schemeClr val="accent1"/>
+          </a:effectRef>
+          <a:fontRef idx="minor">
+            <a:schemeClr val="lt1"/>
+          </a:fontRef>
+        </p:style>
+        <p:txBody>
+          <a:bodyPr wrap="square" lIns="18288" tIns="18288" rIns="18288" bIns="18288" rtlCol="0" anchor="ctr"/>
+          <a:lstStyle/>
+          <a:p>
+            <a:pPr algn="ctr"/>
+            <a:r>
+              <a:rPr sz="2000" b="1" i="0">
                 <a:solidFill>
                   <a:srgbClr val="5C4826"/>
                 </a:solidFill>
               </a:rPr>
-              <a:t>ACT</a:t>
+              <a:t>MODEL</a:t>
             </a:r>
           </a:p>
         </p:txBody>
       </p:sp>
       <p:cxnSp>
         <p:nvCxnSpPr>
-          <p:cNvPr id="110" name="C110"/>
+          <p:cNvPr id="127" name="C29_1"/>
           <p:cNvCxnSpPr/>
           <p:nvPr/>
         </p:nvCxnSpPr>
         <p:spPr>
           <a:xfrm>
-            <a:off x="6684264" y="4873752"/>
-            <a:ext cx="164592" cy="0"/>
-          </a:xfrm>
-          <a:prstGeom prst="straightConnector1">
+            <a:off x="2443038" y="2980944"/>
+            <a:ext cx="91440" cy="0"/>
+          </a:xfrm>
+          <a:prstGeom prst="line">
             <a:avLst/>
           </a:prstGeom>
           <a:ln w="19050">
@@ -24478,18 +24708,33 @@
             </a:solidFill>
             <a:tailEnd type="triangle" w="med" len="med"/>
           </a:ln>
-        </p:spPr>
+          <a:effectLst/>
+        </p:spPr>
+        <p:style>
+          <a:lnRef idx="2">
+            <a:schemeClr val="accent1"/>
+          </a:lnRef>
+          <a:fillRef idx="0">
+            <a:schemeClr val="accent1"/>
+          </a:fillRef>
+          <a:effectRef idx="1">
+            <a:schemeClr val="accent1"/>
+          </a:effectRef>
+          <a:fontRef idx="minor">
+            <a:schemeClr val="tx1"/>
+          </a:fontRef>
+        </p:style>
       </p:cxnSp>
       <p:sp>
         <p:nvSpPr>
-          <p:cNvPr id="111" name="Chain4"/>
+          <p:cNvPr id="128" name="Chain2"/>
           <p:cNvSpPr/>
           <p:nvPr/>
         </p:nvSpPr>
         <p:spPr>
           <a:xfrm>
-            <a:off x="6848856" y="4572000"/>
-            <a:ext cx="1298448" cy="603504"/>
+            <a:off x="2534478" y="2697480"/>
+            <a:ext cx="1216152" cy="566928"/>
           </a:xfrm>
           <a:prstGeom prst="rect">
             <a:avLst/>
@@ -24502,21 +24747,552 @@
               <a:srgbClr val="C9B991"/>
             </a:solidFill>
           </a:ln>
-        </p:spPr>
-        <p:txBody>
-          <a:bodyPr wrap="square" lIns="27432" tIns="22860" rIns="27432" bIns="22860" anchor="ctr"/>
-          <a:lstStyle/>
-          <a:p>
-            <a:pPr algn="ctr">
-              <a:buNone/>
-            </a:pPr>
-            <a:r>
-              <a:rPr lang="en-US" sz="2000" b="1" i="0" dirty="0">
+          <a:effectLst/>
+        </p:spPr>
+        <p:style>
+          <a:lnRef idx="1">
+            <a:schemeClr val="accent1"/>
+          </a:lnRef>
+          <a:fillRef idx="3">
+            <a:schemeClr val="accent1"/>
+          </a:fillRef>
+          <a:effectRef idx="2">
+            <a:schemeClr val="accent1"/>
+          </a:effectRef>
+          <a:fontRef idx="minor">
+            <a:schemeClr val="lt1"/>
+          </a:fontRef>
+        </p:style>
+        <p:txBody>
+          <a:bodyPr wrap="square" lIns="18288" tIns="18288" rIns="18288" bIns="18288" rtlCol="0" anchor="ctr"/>
+          <a:lstStyle/>
+          <a:p>
+            <a:pPr algn="ctr"/>
+            <a:r>
+              <a:rPr sz="2000" b="1" i="0">
                 <a:solidFill>
                   <a:srgbClr val="5C4826"/>
                 </a:solidFill>
               </a:rPr>
-              <a:t>LEARN</a:t>
+              <a:t>EVIDENCE</a:t>
+            </a:r>
+          </a:p>
+        </p:txBody>
+      </p:sp>
+      <p:cxnSp>
+        <p:nvCxnSpPr>
+          <p:cNvPr id="129" name="C29_2"/>
+          <p:cNvCxnSpPr/>
+          <p:nvPr/>
+        </p:nvCxnSpPr>
+        <p:spPr>
+          <a:xfrm>
+            <a:off x="3750630" y="2980944"/>
+            <a:ext cx="91440" cy="0"/>
+          </a:xfrm>
+          <a:prstGeom prst="line">
+            <a:avLst/>
+          </a:prstGeom>
+          <a:ln w="19050">
+            <a:solidFill>
+              <a:srgbClr val="8E6F3E"/>
+            </a:solidFill>
+            <a:tailEnd type="triangle" w="med" len="med"/>
+          </a:ln>
+          <a:effectLst/>
+        </p:spPr>
+        <p:style>
+          <a:lnRef idx="2">
+            <a:schemeClr val="accent1"/>
+          </a:lnRef>
+          <a:fillRef idx="0">
+            <a:schemeClr val="accent1"/>
+          </a:fillRef>
+          <a:effectRef idx="1">
+            <a:schemeClr val="accent1"/>
+          </a:effectRef>
+          <a:fontRef idx="minor">
+            <a:schemeClr val="tx1"/>
+          </a:fontRef>
+        </p:style>
+      </p:cxnSp>
+      <p:sp>
+        <p:nvSpPr>
+          <p:cNvPr id="130" name="Chain3"/>
+          <p:cNvSpPr/>
+          <p:nvPr/>
+        </p:nvSpPr>
+        <p:spPr>
+          <a:xfrm>
+            <a:off x="3842070" y="2697480"/>
+            <a:ext cx="1350000" cy="566928"/>
+          </a:xfrm>
+          <a:prstGeom prst="rect">
+            <a:avLst/>
+          </a:prstGeom>
+          <a:solidFill>
+            <a:srgbClr val="F5F1E8"/>
+          </a:solidFill>
+          <a:ln w="12700">
+            <a:solidFill>
+              <a:srgbClr val="C9B991"/>
+            </a:solidFill>
+          </a:ln>
+          <a:effectLst/>
+        </p:spPr>
+        <p:style>
+          <a:lnRef idx="1">
+            <a:schemeClr val="accent1"/>
+          </a:lnRef>
+          <a:fillRef idx="3">
+            <a:schemeClr val="accent1"/>
+          </a:fillRef>
+          <a:effectRef idx="2">
+            <a:schemeClr val="accent1"/>
+          </a:effectRef>
+          <a:fontRef idx="minor">
+            <a:schemeClr val="lt1"/>
+          </a:fontRef>
+        </p:style>
+        <p:txBody>
+          <a:bodyPr wrap="square" lIns="18288" tIns="18288" rIns="18288" bIns="18288" rtlCol="0" anchor="ctr"/>
+          <a:lstStyle/>
+          <a:p>
+            <a:pPr algn="ctr"/>
+            <a:r>
+              <a:rPr sz="2000" b="1" i="0">
+                <a:solidFill>
+                  <a:srgbClr val="5C4826"/>
+                </a:solidFill>
+              </a:rPr>
+              <a:t>JUDGMENT</a:t>
+            </a:r>
+          </a:p>
+        </p:txBody>
+      </p:sp>
+      <p:cxnSp>
+        <p:nvCxnSpPr>
+          <p:cNvPr id="131" name="C29_3"/>
+          <p:cNvCxnSpPr/>
+          <p:nvPr/>
+        </p:nvCxnSpPr>
+        <p:spPr>
+          <a:xfrm>
+            <a:off x="5192070" y="2980944"/>
+            <a:ext cx="91440" cy="0"/>
+          </a:xfrm>
+          <a:prstGeom prst="line">
+            <a:avLst/>
+          </a:prstGeom>
+          <a:ln w="19050">
+            <a:solidFill>
+              <a:srgbClr val="8E6F3E"/>
+            </a:solidFill>
+            <a:tailEnd type="triangle" w="med" len="med"/>
+          </a:ln>
+          <a:effectLst/>
+        </p:spPr>
+        <p:style>
+          <a:lnRef idx="2">
+            <a:schemeClr val="accent1"/>
+          </a:lnRef>
+          <a:fillRef idx="0">
+            <a:schemeClr val="accent1"/>
+          </a:fillRef>
+          <a:effectRef idx="1">
+            <a:schemeClr val="accent1"/>
+          </a:effectRef>
+          <a:fontRef idx="minor">
+            <a:schemeClr val="tx1"/>
+          </a:fontRef>
+        </p:style>
+      </p:cxnSp>
+      <p:sp>
+        <p:nvSpPr>
+          <p:cNvPr id="132" name="Chain4"/>
+          <p:cNvSpPr/>
+          <p:nvPr/>
+        </p:nvSpPr>
+        <p:spPr>
+          <a:xfrm>
+            <a:off x="5283510" y="2697480"/>
+            <a:ext cx="1023112" cy="566928"/>
+          </a:xfrm>
+          <a:prstGeom prst="rect">
+            <a:avLst/>
+          </a:prstGeom>
+          <a:solidFill>
+            <a:srgbClr val="F5F1E8"/>
+          </a:solidFill>
+          <a:ln w="12700">
+            <a:solidFill>
+              <a:srgbClr val="C9B991"/>
+            </a:solidFill>
+          </a:ln>
+          <a:effectLst/>
+        </p:spPr>
+        <p:style>
+          <a:lnRef idx="1">
+            <a:schemeClr val="accent1"/>
+          </a:lnRef>
+          <a:fillRef idx="3">
+            <a:schemeClr val="accent1"/>
+          </a:fillRef>
+          <a:effectRef idx="2">
+            <a:schemeClr val="accent1"/>
+          </a:effectRef>
+          <a:fontRef idx="minor">
+            <a:schemeClr val="lt1"/>
+          </a:fontRef>
+        </p:style>
+        <p:txBody>
+          <a:bodyPr wrap="square" lIns="18288" tIns="18288" rIns="18288" bIns="18288" rtlCol="0" anchor="ctr"/>
+          <a:lstStyle/>
+          <a:p>
+            <a:pPr algn="ctr"/>
+            <a:r>
+              <a:rPr sz="2000" b="1" i="0">
+                <a:solidFill>
+                  <a:srgbClr val="5C4826"/>
+                </a:solidFill>
+              </a:rPr>
+              <a:t>ACTION</a:t>
+            </a:r>
+          </a:p>
+        </p:txBody>
+      </p:sp>
+      <p:cxnSp>
+        <p:nvCxnSpPr>
+          <p:cNvPr id="133" name="C29_4"/>
+          <p:cNvCxnSpPr/>
+          <p:nvPr/>
+        </p:nvCxnSpPr>
+        <p:spPr>
+          <a:xfrm>
+            <a:off x="6306622" y="2980944"/>
+            <a:ext cx="91440" cy="0"/>
+          </a:xfrm>
+          <a:prstGeom prst="line">
+            <a:avLst/>
+          </a:prstGeom>
+          <a:ln w="19050">
+            <a:solidFill>
+              <a:srgbClr val="8E6F3E"/>
+            </a:solidFill>
+            <a:tailEnd type="triangle" w="med" len="med"/>
+          </a:ln>
+          <a:effectLst/>
+        </p:spPr>
+        <p:style>
+          <a:lnRef idx="2">
+            <a:schemeClr val="accent1"/>
+          </a:lnRef>
+          <a:fillRef idx="0">
+            <a:schemeClr val="accent1"/>
+          </a:fillRef>
+          <a:effectRef idx="1">
+            <a:schemeClr val="accent1"/>
+          </a:effectRef>
+          <a:fontRef idx="minor">
+            <a:schemeClr val="tx1"/>
+          </a:fontRef>
+        </p:style>
+      </p:cxnSp>
+      <p:sp>
+        <p:nvSpPr>
+          <p:cNvPr id="134" name="Chain5"/>
+          <p:cNvSpPr/>
+          <p:nvPr/>
+        </p:nvSpPr>
+        <p:spPr>
+          <a:xfrm>
+            <a:off x="6398062" y="2697480"/>
+            <a:ext cx="1230000" cy="566928"/>
+          </a:xfrm>
+          <a:prstGeom prst="rect">
+            <a:avLst/>
+          </a:prstGeom>
+          <a:solidFill>
+            <a:srgbClr val="F5F1E8"/>
+          </a:solidFill>
+          <a:ln w="12700">
+            <a:solidFill>
+              <a:srgbClr val="C9B991"/>
+            </a:solidFill>
+          </a:ln>
+          <a:effectLst/>
+        </p:spPr>
+        <p:style>
+          <a:lnRef idx="1">
+            <a:schemeClr val="accent1"/>
+          </a:lnRef>
+          <a:fillRef idx="3">
+            <a:schemeClr val="accent1"/>
+          </a:fillRef>
+          <a:effectRef idx="2">
+            <a:schemeClr val="accent1"/>
+          </a:effectRef>
+          <a:fontRef idx="minor">
+            <a:schemeClr val="lt1"/>
+          </a:fontRef>
+        </p:style>
+        <p:txBody>
+          <a:bodyPr wrap="square" lIns="18288" tIns="18288" rIns="18288" bIns="18288" rtlCol="0" anchor="ctr"/>
+          <a:lstStyle/>
+          <a:p>
+            <a:pPr algn="ctr"/>
+            <a:r>
+              <a:rPr sz="2000" b="1" i="0">
+                <a:solidFill>
+                  <a:srgbClr val="5C4826"/>
+                </a:solidFill>
+              </a:rPr>
+              <a:t>OUTCOME</a:t>
+            </a:r>
+          </a:p>
+        </p:txBody>
+      </p:sp>
+      <p:cxnSp>
+        <p:nvCxnSpPr>
+          <p:cNvPr id="135" name="C29_5"/>
+          <p:cNvCxnSpPr/>
+          <p:nvPr/>
+        </p:nvCxnSpPr>
+        <p:spPr>
+          <a:xfrm>
+            <a:off x="7628062" y="2980944"/>
+            <a:ext cx="91440" cy="0"/>
+          </a:xfrm>
+          <a:prstGeom prst="line">
+            <a:avLst/>
+          </a:prstGeom>
+          <a:ln w="19050">
+            <a:solidFill>
+              <a:srgbClr val="8E6F3E"/>
+            </a:solidFill>
+            <a:tailEnd type="triangle" w="med" len="med"/>
+          </a:ln>
+          <a:effectLst/>
+        </p:spPr>
+        <p:style>
+          <a:lnRef idx="2">
+            <a:schemeClr val="accent1"/>
+          </a:lnRef>
+          <a:fillRef idx="0">
+            <a:schemeClr val="accent1"/>
+          </a:fillRef>
+          <a:effectRef idx="1">
+            <a:schemeClr val="accent1"/>
+          </a:effectRef>
+          <a:fontRef idx="minor">
+            <a:schemeClr val="tx1"/>
+          </a:fontRef>
+        </p:style>
+      </p:cxnSp>
+      <p:sp>
+        <p:nvSpPr>
+          <p:cNvPr id="136" name="Chain6"/>
+          <p:cNvSpPr/>
+          <p:nvPr/>
+        </p:nvSpPr>
+        <p:spPr>
+          <a:xfrm>
+            <a:off x="7719502" y="2697480"/>
+            <a:ext cx="1216152" cy="566928"/>
+          </a:xfrm>
+          <a:prstGeom prst="rect">
+            <a:avLst/>
+          </a:prstGeom>
+          <a:solidFill>
+            <a:srgbClr val="F5F1E8"/>
+          </a:solidFill>
+          <a:ln w="12700">
+            <a:solidFill>
+              <a:srgbClr val="C9B991"/>
+            </a:solidFill>
+          </a:ln>
+          <a:effectLst/>
+        </p:spPr>
+        <p:style>
+          <a:lnRef idx="1">
+            <a:schemeClr val="accent1"/>
+          </a:lnRef>
+          <a:fillRef idx="3">
+            <a:schemeClr val="accent1"/>
+          </a:fillRef>
+          <a:effectRef idx="2">
+            <a:schemeClr val="accent1"/>
+          </a:effectRef>
+          <a:fontRef idx="minor">
+            <a:schemeClr val="lt1"/>
+          </a:fontRef>
+        </p:style>
+        <p:txBody>
+          <a:bodyPr wrap="square" lIns="18288" tIns="18288" rIns="18288" bIns="18288" rtlCol="0" anchor="ctr"/>
+          <a:lstStyle/>
+          <a:p>
+            <a:pPr algn="ctr"/>
+            <a:r>
+              <a:rPr sz="2000" b="1" i="0">
+                <a:solidFill>
+                  <a:srgbClr val="5C4826"/>
+                </a:solidFill>
+              </a:rPr>
+              <a:t>NEW</a:t>
+            </a:r>
+          </a:p>
+          <a:p>
+            <a:pPr algn="ctr"/>
+            <a:r>
+              <a:rPr sz="2000" b="1" i="0">
+                <a:solidFill>
+                  <a:srgbClr val="5C4826"/>
+                </a:solidFill>
+              </a:rPr>
+              <a:t>EVIDENCE</a:t>
+            </a:r>
+          </a:p>
+        </p:txBody>
+      </p:sp>
+      <p:cxnSp>
+        <p:nvCxnSpPr>
+          <p:cNvPr id="137" name="SegDown"/>
+          <p:cNvCxnSpPr/>
+          <p:nvPr/>
+        </p:nvCxnSpPr>
+        <p:spPr>
+          <a:xfrm>
+            <a:off x="8327578" y="3264408"/>
+            <a:ext cx="0" cy="667512"/>
+          </a:xfrm>
+          <a:prstGeom prst="line">
+            <a:avLst/>
+          </a:prstGeom>
+          <a:ln w="19050">
+            <a:solidFill>
+              <a:srgbClr val="8E6F3E"/>
+            </a:solidFill>
+          </a:ln>
+          <a:effectLst/>
+        </p:spPr>
+        <p:style>
+          <a:lnRef idx="2">
+            <a:schemeClr val="accent1"/>
+          </a:lnRef>
+          <a:fillRef idx="0">
+            <a:schemeClr val="accent1"/>
+          </a:fillRef>
+          <a:effectRef idx="1">
+            <a:schemeClr val="accent1"/>
+          </a:effectRef>
+          <a:fontRef idx="minor">
+            <a:schemeClr val="tx1"/>
+          </a:fontRef>
+        </p:style>
+      </p:cxnSp>
+      <p:cxnSp>
+        <p:nvCxnSpPr>
+          <p:cNvPr id="138" name="SegAcross"/>
+          <p:cNvCxnSpPr/>
+          <p:nvPr/>
+        </p:nvCxnSpPr>
+        <p:spPr>
+          <a:xfrm>
+            <a:off x="1979488" y="3931920"/>
+            <a:ext cx="6348090" cy="0"/>
+          </a:xfrm>
+          <a:prstGeom prst="line">
+            <a:avLst/>
+          </a:prstGeom>
+          <a:ln w="19050">
+            <a:solidFill>
+              <a:srgbClr val="8E6F3E"/>
+            </a:solidFill>
+          </a:ln>
+          <a:effectLst/>
+        </p:spPr>
+        <p:style>
+          <a:lnRef idx="2">
+            <a:schemeClr val="accent1"/>
+          </a:lnRef>
+          <a:fillRef idx="0">
+            <a:schemeClr val="accent1"/>
+          </a:fillRef>
+          <a:effectRef idx="1">
+            <a:schemeClr val="accent1"/>
+          </a:effectRef>
+          <a:fontRef idx="minor">
+            <a:schemeClr val="tx1"/>
+          </a:fontRef>
+        </p:style>
+      </p:cxnSp>
+      <p:cxnSp>
+        <p:nvCxnSpPr>
+          <p:cNvPr id="139" name="SegUp"/>
+          <p:cNvCxnSpPr/>
+          <p:nvPr/>
+        </p:nvCxnSpPr>
+        <p:spPr>
+          <a:xfrm>
+            <a:off x="1979488" y="3264408"/>
+            <a:ext cx="0" cy="667512"/>
+          </a:xfrm>
+          <a:prstGeom prst="line">
+            <a:avLst/>
+          </a:prstGeom>
+          <a:ln w="19050">
+            <a:solidFill>
+              <a:srgbClr val="8E6F3E"/>
+            </a:solidFill>
+            <a:headEnd type="triangle" w="med" len="med"/>
+          </a:ln>
+          <a:effectLst/>
+        </p:spPr>
+        <p:style>
+          <a:lnRef idx="2">
+            <a:schemeClr val="accent1"/>
+          </a:lnRef>
+          <a:fillRef idx="0">
+            <a:schemeClr val="accent1"/>
+          </a:fillRef>
+          <a:effectRef idx="1">
+            <a:schemeClr val="accent1"/>
+          </a:effectRef>
+          <a:fontRef idx="minor">
+            <a:schemeClr val="tx1"/>
+          </a:fontRef>
+        </p:style>
+      </p:cxnSp>
+      <p:sp>
+        <p:nvSpPr>
+          <p:cNvPr id="140" name="LoopLbl"/>
+          <p:cNvSpPr txBox="1"/>
+          <p:nvPr/>
+        </p:nvSpPr>
+        <p:spPr>
+          <a:xfrm>
+            <a:off x="4056253" y="4023360"/>
+            <a:ext cx="2194560" cy="365760"/>
+          </a:xfrm>
+          <a:prstGeom prst="rect">
+            <a:avLst/>
+          </a:prstGeom>
+          <a:noFill/>
+        </p:spPr>
+        <p:txBody>
+          <a:bodyPr wrap="square" lIns="0" tIns="0" rIns="0" bIns="0" anchor="ctr">
+            <a:spAutoFit/>
+          </a:bodyPr>
+          <a:lstStyle/>
+          <a:p>
+            <a:pPr algn="ctr"/>
+            <a:r>
+              <a:rPr sz="2000" b="0" i="1">
+                <a:solidFill>
+                  <a:srgbClr val="8E6F3E"/>
+                </a:solidFill>
+              </a:rPr>
+              <a:t>the loop continues</a:t>
             </a:r>
           </a:p>
         </p:txBody>
@@ -24559,7 +25335,7 @@
         <p:spPr>
           <a:xfrm>
             <a:off x="277148" y="118428"/>
-            <a:ext cx="5150000" cy="638175"/>
+            <a:ext cx="8590000" cy="638175"/>
           </a:xfrm>
         </p:spPr>
         <p:txBody>
@@ -24578,7 +25354,7 @@
                   <a:srgbClr val="000000"/>
                 </a:solidFill>
               </a:rPr>
-              <a:t>You have to choose</a:t>
+              <a:t>Engineering is informed control</a:t>
             </a:r>
           </a:p>
         </p:txBody>
@@ -24600,7 +25376,7 @@
           <a:p>
             <a:fld id="{B7EB45DA-9A0D-DC49-8E02-F30A5DDC21C3}" type="slidenum">
               <a:rPr lang="en-US" smtClean="0"/>
-              <a:t>27</a:t>
+              <a:t>33</a:t>
             </a:fld>
             <a:endParaRPr lang="en-US"/>
           </a:p>
@@ -24608,55 +25384,14 @@
       </p:sp>
       <p:sp>
         <p:nvSpPr>
-          <p:cNvPr id="100" name="KickerBadge"/>
-          <p:cNvSpPr/>
-          <p:nvPr/>
-        </p:nvSpPr>
-        <p:spPr>
-          <a:xfrm>
-            <a:off x="5620000" y="205000"/>
-            <a:ext cx="3249680" cy="470000"/>
-          </a:xfrm>
-          <a:prstGeom prst="roundRect">
-            <a:avLst/>
-          </a:prstGeom>
-          <a:solidFill>
-            <a:srgbClr val="FBF8F2"/>
-          </a:solidFill>
-          <a:ln w="15875">
-            <a:solidFill>
-              <a:srgbClr val="8E6F3E"/>
-            </a:solidFill>
-          </a:ln>
-        </p:spPr>
-        <p:txBody>
-          <a:bodyPr wrap="square" lIns="91440" tIns="27432" rIns="91440" bIns="27432" anchor="ctr"/>
-          <a:lstStyle/>
-          <a:p>
-            <a:pPr algn="ctr">
-              <a:buNone/>
-            </a:pPr>
-            <a:r>
-              <a:rPr lang="en-US" sz="1500" b="1" i="0" dirty="0">
-                <a:solidFill>
-                  <a:srgbClr val="8E6F3E"/>
-                </a:solidFill>
-              </a:rPr>
-              <a:t>TEAM ACTIVITY  ·  10 MINUTES</a:t>
-            </a:r>
-          </a:p>
-        </p:txBody>
-      </p:sp>
-      <p:sp>
-        <p:nvSpPr>
-          <p:cNvPr id="101" name="Premise"/>
+          <p:cNvPr id="100" name="Day1"/>
           <p:cNvSpPr txBox="1"/>
           <p:nvPr/>
         </p:nvSpPr>
         <p:spPr>
           <a:xfrm>
-            <a:off x="274320" y="770000"/>
-            <a:ext cx="8595360" cy="300000"/>
+            <a:off x="274320" y="1234440"/>
+            <a:ext cx="8595360" cy="329184"/>
           </a:xfrm>
           <a:prstGeom prst="rect">
             <a:avLst/>
@@ -24667,60 +25402,60 @@
           </a:ln>
         </p:spPr>
         <p:txBody>
-          <a:bodyPr wrap="square" lIns="0" tIns="0" rIns="0" bIns="0" anchor="ctr"/>
-          <a:lstStyle/>
-          <a:p>
-            <a:pPr algn="l">
+          <a:bodyPr wrap="square" lIns="0" tIns="0" rIns="0" bIns="0" anchor="t"/>
+          <a:lstStyle/>
+          <a:p>
+            <a:pPr algn="ctr">
               <a:buNone/>
             </a:pPr>
             <a:r>
-              <a:rPr lang="en-US" sz="1400" b="0" i="0" dirty="0">
-                <a:solidFill>
-                  <a:srgbClr val="5C4826"/>
-                </a:solidFill>
-              </a:rPr>
-              <a:t>Your team is adding a document-processing operation to a production service. Two designs are viable:</a:t>
-            </a:r>
-          </a:p>
-        </p:txBody>
-      </p:sp>
-      <p:sp>
-        <p:nvSpPr>
-          <p:cNvPr id="110" name="HdrA"/>
+              <a:rPr lang="en-US" sz="2000" b="1" i="0" dirty="0">
+                <a:solidFill>
+                  <a:srgbClr val="8E6F3E"/>
+                </a:solidFill>
+              </a:rPr>
+              <a:t>FROM DAY 1</a:t>
+            </a:r>
+          </a:p>
+        </p:txBody>
+      </p:sp>
+      <p:sp>
+        <p:nvSpPr>
+          <p:cNvPr id="101" name="Def"/>
           <p:cNvSpPr/>
           <p:nvPr/>
         </p:nvSpPr>
         <p:spPr>
           <a:xfrm>
-            <a:off x="4174320" y="1140000"/>
-            <a:ext cx="2347680" cy="460000"/>
+            <a:off x="685800" y="1691640"/>
+            <a:ext cx="7772400" cy="868680"/>
           </a:xfrm>
           <a:prstGeom prst="rect">
             <a:avLst/>
           </a:prstGeom>
           <a:solidFill>
-            <a:srgbClr val="8E6F3E"/>
+            <a:srgbClr val="E8F0F7"/>
           </a:solidFill>
           <a:ln w="12700">
             <a:solidFill>
-              <a:srgbClr val="8E6F3E"/>
+              <a:srgbClr val="A9C4DB"/>
             </a:solidFill>
           </a:ln>
         </p:spPr>
         <p:txBody>
-          <a:bodyPr wrap="square" lIns="45720" tIns="27432" rIns="45720" bIns="27432" anchor="ctr"/>
+          <a:bodyPr wrap="square" lIns="91440" tIns="45720" rIns="91440" bIns="45720" anchor="ctr"/>
           <a:lstStyle/>
           <a:p>
             <a:pPr algn="ctr">
               <a:buNone/>
             </a:pPr>
             <a:r>
-              <a:rPr lang="en-US" sz="1600" b="1" i="0" dirty="0">
-                <a:solidFill>
-                  <a:srgbClr val="FFFFFF"/>
-                </a:solidFill>
-              </a:rPr>
-              <a:t>A</a:t>
+              <a:rPr lang="en-US" sz="2000" b="0" i="0" dirty="0">
+                <a:solidFill>
+                  <a:srgbClr val="5C4826"/>
+                </a:solidFill>
+              </a:rPr>
+              <a:t xml:space="preserve">Engineering is the discipline of exercising </a:t>
             </a:r>
           </a:p>
           <a:p>
@@ -24728,80 +25463,95 @@
               <a:buNone/>
             </a:pPr>
             <a:r>
-              <a:rPr lang="en-US" sz="1300" b="1" i="0" dirty="0">
-                <a:solidFill>
-                  <a:srgbClr val="FFFFFF"/>
-                </a:solidFill>
-              </a:rPr>
-              <a:t>Process synchronously</a:t>
-            </a:r>
-          </a:p>
-        </p:txBody>
-      </p:sp>
-      <p:sp>
-        <p:nvSpPr>
-          <p:cNvPr id="111" name="HdrB"/>
+              <a:rPr lang="en-US" sz="2000" b="0" i="0" dirty="0">
+                <a:solidFill>
+                  <a:srgbClr val="5C4826"/>
+                </a:solidFill>
+              </a:rPr>
+              <a:t>informed control over consequential systems.</a:t>
+            </a:r>
+          </a:p>
+        </p:txBody>
+      </p:sp>
+      <p:sp>
+        <p:nvSpPr>
+          <p:cNvPr id="102" name="Close"/>
+          <p:cNvSpPr txBox="1"/>
+          <p:nvPr/>
+        </p:nvSpPr>
+        <p:spPr>
+          <a:xfrm>
+            <a:off x="685800" y="3108960"/>
+            <a:ext cx="7772400" cy="1041010"/>
+          </a:xfrm>
+          <a:prstGeom prst="rect">
+            <a:avLst/>
+          </a:prstGeom>
+          <a:noFill/>
+          <a:ln>
+            <a:noFill/>
+          </a:ln>
+        </p:spPr>
+        <p:txBody>
+          <a:bodyPr wrap="square" lIns="0" tIns="0" rIns="0" bIns="0" anchor="t"/>
+          <a:lstStyle/>
+          <a:p>
+            <a:pPr algn="ctr">
+              <a:buNone/>
+            </a:pPr>
+            <a:r>
+              <a:rPr lang="en-US" sz="2000" b="0" i="0" dirty="0">
+                <a:solidFill>
+                  <a:srgbClr val="555960"/>
+                </a:solidFill>
+              </a:rPr>
+              <a:t>Metrics make selected properties of reality observable.</a:t>
+            </a:r>
+          </a:p>
+          <a:p>
+            <a:pPr algn="ctr">
+              <a:spcBef>
+                <a:spcPts val="160"/>
+              </a:spcBef>
+              <a:buNone/>
+            </a:pPr>
+            <a:r>
+              <a:rPr lang="en-US" sz="2000" b="0" i="0" dirty="0">
+                <a:solidFill>
+                  <a:srgbClr val="555960"/>
+                </a:solidFill>
+              </a:rPr>
+              <a:t xml:space="preserve">Engineering judgment determines what </a:t>
+            </a:r>
+          </a:p>
+          <a:p>
+            <a:pPr algn="ctr">
+              <a:spcBef>
+                <a:spcPts val="160"/>
+              </a:spcBef>
+              <a:buNone/>
+            </a:pPr>
+            <a:r>
+              <a:rPr lang="en-US" sz="2000" b="0" i="0" dirty="0">
+                <a:solidFill>
+                  <a:srgbClr val="555960"/>
+                </a:solidFill>
+              </a:rPr>
+              <a:t>those observations mean for the decision.</a:t>
+            </a:r>
+          </a:p>
+        </p:txBody>
+      </p:sp>
+      <p:sp>
+        <p:nvSpPr>
+          <p:cNvPr id="103" name="Chain0"/>
           <p:cNvSpPr/>
           <p:nvPr/>
         </p:nvSpPr>
         <p:spPr>
           <a:xfrm>
-            <a:off x="6522000" y="1140000"/>
-            <a:ext cx="2347680" cy="460000"/>
-          </a:xfrm>
-          <a:prstGeom prst="rect">
-            <a:avLst/>
-          </a:prstGeom>
-          <a:solidFill>
-            <a:srgbClr val="8E6F3E"/>
-          </a:solidFill>
-          <a:ln w="12700">
-            <a:solidFill>
-              <a:srgbClr val="8E6F3E"/>
-            </a:solidFill>
-          </a:ln>
-        </p:spPr>
-        <p:txBody>
-          <a:bodyPr wrap="square" lIns="45720" tIns="27432" rIns="45720" bIns="27432" anchor="ctr"/>
-          <a:lstStyle/>
-          <a:p>
-            <a:pPr algn="ctr">
-              <a:buNone/>
-            </a:pPr>
-            <a:r>
-              <a:rPr lang="en-US" sz="1600" b="1" i="0" dirty="0">
-                <a:solidFill>
-                  <a:srgbClr val="FFFFFF"/>
-                </a:solidFill>
-              </a:rPr>
-              <a:t>B</a:t>
-            </a:r>
-          </a:p>
-          <a:p>
-            <a:pPr algn="ctr">
-              <a:buNone/>
-            </a:pPr>
-            <a:r>
-              <a:rPr lang="en-US" sz="1300" b="1" i="0" dirty="0">
-                <a:solidFill>
-                  <a:srgbClr val="FFFFFF"/>
-                </a:solidFill>
-              </a:rPr>
-              <a:t>Queue the work</a:t>
-            </a:r>
-          </a:p>
-        </p:txBody>
-      </p:sp>
-      <p:sp>
-        <p:nvSpPr>
-          <p:cNvPr id="120" name="R1L"/>
-          <p:cNvSpPr/>
-          <p:nvPr/>
-        </p:nvSpPr>
-        <p:spPr>
-          <a:xfrm>
-            <a:off x="274320" y="1600000"/>
-            <a:ext cx="3900000" cy="300000"/>
+            <a:off x="996696" y="4572000"/>
+            <a:ext cx="1298448" cy="603504"/>
           </a:xfrm>
           <a:prstGeom prst="rect">
             <a:avLst/>
@@ -24816,115 +25566,55 @@
           </a:ln>
         </p:spPr>
         <p:txBody>
-          <a:bodyPr wrap="square" lIns="137160" tIns="18288" rIns="45720" bIns="18288" anchor="ctr"/>
-          <a:lstStyle/>
-          <a:p>
-            <a:pPr algn="l">
+          <a:bodyPr wrap="square" lIns="27432" tIns="22860" rIns="27432" bIns="22860" anchor="ctr"/>
+          <a:lstStyle/>
+          <a:p>
+            <a:pPr algn="ctr">
               <a:buNone/>
             </a:pPr>
             <a:r>
-              <a:rPr lang="en-US" sz="1400" b="0" i="0" dirty="0">
+              <a:rPr lang="en-US" sz="2000" b="1" i="0" dirty="0">
                 <a:solidFill>
                   <a:srgbClr val="5C4826"/>
                 </a:solidFill>
               </a:rPr>
-              <a:t>Implementation effort</a:t>
-            </a:r>
-          </a:p>
-        </p:txBody>
-      </p:sp>
-      <p:sp>
-        <p:nvSpPr>
-          <p:cNvPr id="121" name="R1A"/>
+              <a:t>MODEL</a:t>
+            </a:r>
+          </a:p>
+        </p:txBody>
+      </p:sp>
+      <p:cxnSp>
+        <p:nvCxnSpPr>
+          <p:cNvPr id="104" name="C104"/>
+          <p:cNvCxnSpPr/>
+          <p:nvPr/>
+        </p:nvCxnSpPr>
+        <p:spPr>
+          <a:xfrm>
+            <a:off x="2295144" y="4873752"/>
+            <a:ext cx="164592" cy="0"/>
+          </a:xfrm>
+          <a:prstGeom prst="straightConnector1">
+            <a:avLst/>
+          </a:prstGeom>
+          <a:ln w="19050">
+            <a:solidFill>
+              <a:srgbClr val="8E6F3E"/>
+            </a:solidFill>
+            <a:tailEnd type="triangle" w="med" len="med"/>
+          </a:ln>
+        </p:spPr>
+      </p:cxnSp>
+      <p:sp>
+        <p:nvSpPr>
+          <p:cNvPr id="105" name="Chain1"/>
           <p:cNvSpPr/>
           <p:nvPr/>
         </p:nvSpPr>
         <p:spPr>
           <a:xfrm>
-            <a:off x="4174320" y="1600000"/>
-            <a:ext cx="2347680" cy="300000"/>
-          </a:xfrm>
-          <a:prstGeom prst="rect">
-            <a:avLst/>
-          </a:prstGeom>
-          <a:solidFill>
-            <a:srgbClr val="FBF8F2"/>
-          </a:solidFill>
-          <a:ln w="12700">
-            <a:solidFill>
-              <a:srgbClr val="C9B991"/>
-            </a:solidFill>
-          </a:ln>
-        </p:spPr>
-        <p:txBody>
-          <a:bodyPr wrap="square" lIns="45720" tIns="18288" rIns="45720" bIns="18288" anchor="ctr"/>
-          <a:lstStyle/>
-          <a:p>
-            <a:pPr algn="ctr">
-              <a:buNone/>
-            </a:pPr>
-            <a:r>
-              <a:rPr lang="en-US" sz="1400" b="1" i="0" dirty="0">
-                <a:solidFill>
-                  <a:srgbClr val="5C4826"/>
-                </a:solidFill>
-              </a:rPr>
-              <a:t>2 engineer-days</a:t>
-            </a:r>
-          </a:p>
-        </p:txBody>
-      </p:sp>
-      <p:sp>
-        <p:nvSpPr>
-          <p:cNvPr id="122" name="R1B"/>
-          <p:cNvSpPr/>
-          <p:nvPr/>
-        </p:nvSpPr>
-        <p:spPr>
-          <a:xfrm>
-            <a:off x="6522000" y="1600000"/>
-            <a:ext cx="2347680" cy="300000"/>
-          </a:xfrm>
-          <a:prstGeom prst="rect">
-            <a:avLst/>
-          </a:prstGeom>
-          <a:solidFill>
-            <a:srgbClr val="FBF8F2"/>
-          </a:solidFill>
-          <a:ln w="12700">
-            <a:solidFill>
-              <a:srgbClr val="C9B991"/>
-            </a:solidFill>
-          </a:ln>
-        </p:spPr>
-        <p:txBody>
-          <a:bodyPr wrap="square" lIns="45720" tIns="18288" rIns="45720" bIns="18288" anchor="ctr"/>
-          <a:lstStyle/>
-          <a:p>
-            <a:pPr algn="ctr">
-              <a:buNone/>
-            </a:pPr>
-            <a:r>
-              <a:rPr lang="en-US" sz="1400" b="1" i="0" dirty="0">
-                <a:solidFill>
-                  <a:srgbClr val="5C4826"/>
-                </a:solidFill>
-              </a:rPr>
-              <a:t>7 engineer-days</a:t>
-            </a:r>
-          </a:p>
-        </p:txBody>
-      </p:sp>
-      <p:sp>
-        <p:nvSpPr>
-          <p:cNvPr id="130" name="R2L"/>
-          <p:cNvSpPr/>
-          <p:nvPr/>
-        </p:nvSpPr>
-        <p:spPr>
-          <a:xfrm>
-            <a:off x="274320" y="1900000"/>
-            <a:ext cx="3900000" cy="300000"/>
+            <a:off x="2459736" y="4572000"/>
+            <a:ext cx="1298448" cy="603504"/>
           </a:xfrm>
           <a:prstGeom prst="rect">
             <a:avLst/>
@@ -24939,115 +25629,55 @@
           </a:ln>
         </p:spPr>
         <p:txBody>
-          <a:bodyPr wrap="square" lIns="137160" tIns="18288" rIns="45720" bIns="18288" anchor="ctr"/>
-          <a:lstStyle/>
-          <a:p>
-            <a:pPr algn="l">
+          <a:bodyPr wrap="square" lIns="27432" tIns="22860" rIns="27432" bIns="22860" anchor="ctr"/>
+          <a:lstStyle/>
+          <a:p>
+            <a:pPr algn="ctr">
               <a:buNone/>
             </a:pPr>
             <a:r>
-              <a:rPr lang="en-US" sz="1400" b="0" i="0" dirty="0">
+              <a:rPr lang="en-US" sz="2000" b="1" i="0" dirty="0">
                 <a:solidFill>
                   <a:srgbClr val="5C4826"/>
                 </a:solidFill>
               </a:rPr>
-              <a:t>Typical completion time</a:t>
-            </a:r>
-          </a:p>
-        </p:txBody>
-      </p:sp>
-      <p:sp>
-        <p:nvSpPr>
-          <p:cNvPr id="131" name="R2A"/>
+              <a:t>OBSERVE</a:t>
+            </a:r>
+          </a:p>
+        </p:txBody>
+      </p:sp>
+      <p:cxnSp>
+        <p:nvCxnSpPr>
+          <p:cNvPr id="106" name="C106"/>
+          <p:cNvCxnSpPr/>
+          <p:nvPr/>
+        </p:nvCxnSpPr>
+        <p:spPr>
+          <a:xfrm>
+            <a:off x="3758184" y="4873752"/>
+            <a:ext cx="164592" cy="0"/>
+          </a:xfrm>
+          <a:prstGeom prst="straightConnector1">
+            <a:avLst/>
+          </a:prstGeom>
+          <a:ln w="19050">
+            <a:solidFill>
+              <a:srgbClr val="8E6F3E"/>
+            </a:solidFill>
+            <a:tailEnd type="triangle" w="med" len="med"/>
+          </a:ln>
+        </p:spPr>
+      </p:cxnSp>
+      <p:sp>
+        <p:nvSpPr>
+          <p:cNvPr id="107" name="Chain2"/>
           <p:cNvSpPr/>
           <p:nvPr/>
         </p:nvSpPr>
         <p:spPr>
           <a:xfrm>
-            <a:off x="4174320" y="1900000"/>
-            <a:ext cx="2347680" cy="300000"/>
-          </a:xfrm>
-          <a:prstGeom prst="rect">
-            <a:avLst/>
-          </a:prstGeom>
-          <a:solidFill>
-            <a:srgbClr val="FBF8F2"/>
-          </a:solidFill>
-          <a:ln w="12700">
-            <a:solidFill>
-              <a:srgbClr val="C9B991"/>
-            </a:solidFill>
-          </a:ln>
-        </p:spPr>
-        <p:txBody>
-          <a:bodyPr wrap="square" lIns="45720" tIns="18288" rIns="45720" bIns="18288" anchor="ctr"/>
-          <a:lstStyle/>
-          <a:p>
-            <a:pPr algn="ctr">
-              <a:buNone/>
-            </a:pPr>
-            <a:r>
-              <a:rPr lang="en-US" sz="1400" b="1" i="0" dirty="0">
-                <a:solidFill>
-                  <a:srgbClr val="5C4826"/>
-                </a:solidFill>
-              </a:rPr>
-              <a:t>4 s</a:t>
-            </a:r>
-          </a:p>
-        </p:txBody>
-      </p:sp>
-      <p:sp>
-        <p:nvSpPr>
-          <p:cNvPr id="132" name="R2B"/>
-          <p:cNvSpPr/>
-          <p:nvPr/>
-        </p:nvSpPr>
-        <p:spPr>
-          <a:xfrm>
-            <a:off x="6522000" y="1900000"/>
-            <a:ext cx="2347680" cy="300000"/>
-          </a:xfrm>
-          <a:prstGeom prst="rect">
-            <a:avLst/>
-          </a:prstGeom>
-          <a:solidFill>
-            <a:srgbClr val="FBF8F2"/>
-          </a:solidFill>
-          <a:ln w="12700">
-            <a:solidFill>
-              <a:srgbClr val="C9B991"/>
-            </a:solidFill>
-          </a:ln>
-        </p:spPr>
-        <p:txBody>
-          <a:bodyPr wrap="square" lIns="45720" tIns="18288" rIns="45720" bIns="18288" anchor="ctr"/>
-          <a:lstStyle/>
-          <a:p>
-            <a:pPr algn="ctr">
-              <a:buNone/>
-            </a:pPr>
-            <a:r>
-              <a:rPr lang="en-US" sz="1400" b="1" i="0" dirty="0">
-                <a:solidFill>
-                  <a:srgbClr val="5C4826"/>
-                </a:solidFill>
-              </a:rPr>
-              <a:t>9 s</a:t>
-            </a:r>
-          </a:p>
-        </p:txBody>
-      </p:sp>
-      <p:sp>
-        <p:nvSpPr>
-          <p:cNvPr id="140" name="R3L"/>
-          <p:cNvSpPr/>
-          <p:nvPr/>
-        </p:nvSpPr>
-        <p:spPr>
-          <a:xfrm>
-            <a:off x="274320" y="2200000"/>
-            <a:ext cx="3900000" cy="300000"/>
+            <a:off x="3922776" y="4572000"/>
+            <a:ext cx="1298448" cy="603504"/>
           </a:xfrm>
           <a:prstGeom prst="rect">
             <a:avLst/>
@@ -25062,115 +25692,55 @@
           </a:ln>
         </p:spPr>
         <p:txBody>
-          <a:bodyPr wrap="square" lIns="137160" tIns="18288" rIns="45720" bIns="18288" anchor="ctr"/>
-          <a:lstStyle/>
-          <a:p>
-            <a:pPr algn="l">
+          <a:bodyPr wrap="square" lIns="27432" tIns="22860" rIns="27432" bIns="22860" anchor="ctr"/>
+          <a:lstStyle/>
+          <a:p>
+            <a:pPr algn="ctr">
               <a:buNone/>
             </a:pPr>
             <a:r>
-              <a:rPr lang="en-US" sz="1400" b="0" i="0" dirty="0">
+              <a:rPr lang="en-US" sz="2000" b="1" i="0" dirty="0">
                 <a:solidFill>
                   <a:srgbClr val="5C4826"/>
                 </a:solidFill>
               </a:rPr>
-              <a:t>Failed jobs recovered automatically</a:t>
-            </a:r>
-          </a:p>
-        </p:txBody>
-      </p:sp>
-      <p:sp>
-        <p:nvSpPr>
-          <p:cNvPr id="141" name="R3A"/>
+              <a:t>JUDGE</a:t>
+            </a:r>
+          </a:p>
+        </p:txBody>
+      </p:sp>
+      <p:cxnSp>
+        <p:nvCxnSpPr>
+          <p:cNvPr id="108" name="C108"/>
+          <p:cNvCxnSpPr/>
+          <p:nvPr/>
+        </p:nvCxnSpPr>
+        <p:spPr>
+          <a:xfrm>
+            <a:off x="5221224" y="4873752"/>
+            <a:ext cx="164592" cy="0"/>
+          </a:xfrm>
+          <a:prstGeom prst="straightConnector1">
+            <a:avLst/>
+          </a:prstGeom>
+          <a:ln w="19050">
+            <a:solidFill>
+              <a:srgbClr val="8E6F3E"/>
+            </a:solidFill>
+            <a:tailEnd type="triangle" w="med" len="med"/>
+          </a:ln>
+        </p:spPr>
+      </p:cxnSp>
+      <p:sp>
+        <p:nvSpPr>
+          <p:cNvPr id="109" name="Chain3"/>
           <p:cNvSpPr/>
           <p:nvPr/>
         </p:nvSpPr>
         <p:spPr>
           <a:xfrm>
-            <a:off x="4174320" y="2200000"/>
-            <a:ext cx="2347680" cy="300000"/>
-          </a:xfrm>
-          <a:prstGeom prst="rect">
-            <a:avLst/>
-          </a:prstGeom>
-          <a:solidFill>
-            <a:srgbClr val="FBF8F2"/>
-          </a:solidFill>
-          <a:ln w="12700">
-            <a:solidFill>
-              <a:srgbClr val="C9B991"/>
-            </a:solidFill>
-          </a:ln>
-        </p:spPr>
-        <p:txBody>
-          <a:bodyPr wrap="square" lIns="45720" tIns="18288" rIns="45720" bIns="18288" anchor="ctr"/>
-          <a:lstStyle/>
-          <a:p>
-            <a:pPr algn="ctr">
-              <a:buNone/>
-            </a:pPr>
-            <a:r>
-              <a:rPr lang="en-US" sz="1400" b="1" i="0" dirty="0">
-                <a:solidFill>
-                  <a:srgbClr val="5C4826"/>
-                </a:solidFill>
-              </a:rPr>
-              <a:t>No</a:t>
-            </a:r>
-          </a:p>
-        </p:txBody>
-      </p:sp>
-      <p:sp>
-        <p:nvSpPr>
-          <p:cNvPr id="142" name="R3B"/>
-          <p:cNvSpPr/>
-          <p:nvPr/>
-        </p:nvSpPr>
-        <p:spPr>
-          <a:xfrm>
-            <a:off x="6522000" y="2200000"/>
-            <a:ext cx="2347680" cy="300000"/>
-          </a:xfrm>
-          <a:prstGeom prst="rect">
-            <a:avLst/>
-          </a:prstGeom>
-          <a:solidFill>
-            <a:srgbClr val="FBF8F2"/>
-          </a:solidFill>
-          <a:ln w="12700">
-            <a:solidFill>
-              <a:srgbClr val="C9B991"/>
-            </a:solidFill>
-          </a:ln>
-        </p:spPr>
-        <p:txBody>
-          <a:bodyPr wrap="square" lIns="45720" tIns="18288" rIns="45720" bIns="18288" anchor="ctr"/>
-          <a:lstStyle/>
-          <a:p>
-            <a:pPr algn="ctr">
-              <a:buNone/>
-            </a:pPr>
-            <a:r>
-              <a:rPr lang="en-US" sz="1400" b="1" i="0" dirty="0">
-                <a:solidFill>
-                  <a:srgbClr val="5C4826"/>
-                </a:solidFill>
-              </a:rPr>
-              <a:t>Yes</a:t>
-            </a:r>
-          </a:p>
-        </p:txBody>
-      </p:sp>
-      <p:sp>
-        <p:nvSpPr>
-          <p:cNvPr id="150" name="R4L"/>
-          <p:cNvSpPr/>
-          <p:nvPr/>
-        </p:nvSpPr>
-        <p:spPr>
-          <a:xfrm>
-            <a:off x="274320" y="2500000"/>
-            <a:ext cx="3900000" cy="300000"/>
+            <a:off x="5385816" y="4572000"/>
+            <a:ext cx="1298448" cy="603504"/>
           </a:xfrm>
           <a:prstGeom prst="rect">
             <a:avLst/>
@@ -25185,115 +25755,55 @@
           </a:ln>
         </p:spPr>
         <p:txBody>
-          <a:bodyPr wrap="square" lIns="137160" tIns="18288" rIns="45720" bIns="18288" anchor="ctr"/>
-          <a:lstStyle/>
-          <a:p>
-            <a:pPr algn="l">
+          <a:bodyPr wrap="square" lIns="27432" tIns="22860" rIns="27432" bIns="22860" anchor="ctr"/>
+          <a:lstStyle/>
+          <a:p>
+            <a:pPr algn="ctr">
               <a:buNone/>
             </a:pPr>
             <a:r>
-              <a:rPr lang="en-US" sz="1400" b="0" i="0" dirty="0">
+              <a:rPr lang="en-US" sz="2000" b="1" i="0" dirty="0">
                 <a:solidFill>
                   <a:srgbClr val="5C4826"/>
                 </a:solidFill>
               </a:rPr>
-              <a:t>Peak load handled in experiment</a:t>
-            </a:r>
-          </a:p>
-        </p:txBody>
-      </p:sp>
-      <p:sp>
-        <p:nvSpPr>
-          <p:cNvPr id="151" name="R4A"/>
+              <a:t>ACT</a:t>
+            </a:r>
+          </a:p>
+        </p:txBody>
+      </p:sp>
+      <p:cxnSp>
+        <p:nvCxnSpPr>
+          <p:cNvPr id="110" name="C110"/>
+          <p:cNvCxnSpPr/>
+          <p:nvPr/>
+        </p:nvCxnSpPr>
+        <p:spPr>
+          <a:xfrm>
+            <a:off x="6684264" y="4873752"/>
+            <a:ext cx="164592" cy="0"/>
+          </a:xfrm>
+          <a:prstGeom prst="straightConnector1">
+            <a:avLst/>
+          </a:prstGeom>
+          <a:ln w="19050">
+            <a:solidFill>
+              <a:srgbClr val="8E6F3E"/>
+            </a:solidFill>
+            <a:tailEnd type="triangle" w="med" len="med"/>
+          </a:ln>
+        </p:spPr>
+      </p:cxnSp>
+      <p:sp>
+        <p:nvSpPr>
+          <p:cNvPr id="111" name="Chain4"/>
           <p:cNvSpPr/>
           <p:nvPr/>
         </p:nvSpPr>
         <p:spPr>
           <a:xfrm>
-            <a:off x="4174320" y="2500000"/>
-            <a:ext cx="2347680" cy="300000"/>
-          </a:xfrm>
-          <a:prstGeom prst="rect">
-            <a:avLst/>
-          </a:prstGeom>
-          <a:solidFill>
-            <a:srgbClr val="FBF8F2"/>
-          </a:solidFill>
-          <a:ln w="12700">
-            <a:solidFill>
-              <a:srgbClr val="C9B991"/>
-            </a:solidFill>
-          </a:ln>
-        </p:spPr>
-        <p:txBody>
-          <a:bodyPr wrap="square" lIns="45720" tIns="18288" rIns="45720" bIns="18288" anchor="ctr"/>
-          <a:lstStyle/>
-          <a:p>
-            <a:pPr algn="ctr">
-              <a:buNone/>
-            </a:pPr>
-            <a:r>
-              <a:rPr lang="en-US" sz="1400" b="1" i="0" dirty="0">
-                <a:solidFill>
-                  <a:srgbClr val="5C4826"/>
-                </a:solidFill>
-              </a:rPr>
-              <a:t>35 jobs/min</a:t>
-            </a:r>
-          </a:p>
-        </p:txBody>
-      </p:sp>
-      <p:sp>
-        <p:nvSpPr>
-          <p:cNvPr id="152" name="R4B"/>
-          <p:cNvSpPr/>
-          <p:nvPr/>
-        </p:nvSpPr>
-        <p:spPr>
-          <a:xfrm>
-            <a:off x="6522000" y="2500000"/>
-            <a:ext cx="2347680" cy="300000"/>
-          </a:xfrm>
-          <a:prstGeom prst="rect">
-            <a:avLst/>
-          </a:prstGeom>
-          <a:solidFill>
-            <a:srgbClr val="FBF8F2"/>
-          </a:solidFill>
-          <a:ln w="12700">
-            <a:solidFill>
-              <a:srgbClr val="C9B991"/>
-            </a:solidFill>
-          </a:ln>
-        </p:spPr>
-        <p:txBody>
-          <a:bodyPr wrap="square" lIns="45720" tIns="18288" rIns="45720" bIns="18288" anchor="ctr"/>
-          <a:lstStyle/>
-          <a:p>
-            <a:pPr algn="ctr">
-              <a:buNone/>
-            </a:pPr>
-            <a:r>
-              <a:rPr lang="en-US" sz="1400" b="1" i="0" dirty="0">
-                <a:solidFill>
-                  <a:srgbClr val="5C4826"/>
-                </a:solidFill>
-              </a:rPr>
-              <a:t>120 jobs/min</a:t>
-            </a:r>
-          </a:p>
-        </p:txBody>
-      </p:sp>
-      <p:sp>
-        <p:nvSpPr>
-          <p:cNvPr id="160" name="R5L"/>
-          <p:cNvSpPr/>
-          <p:nvPr/>
-        </p:nvSpPr>
-        <p:spPr>
-          <a:xfrm>
-            <a:off x="274320" y="2800000"/>
-            <a:ext cx="3900000" cy="300000"/>
+            <a:off x="6848856" y="4572000"/>
+            <a:ext cx="1298448" cy="603504"/>
           </a:xfrm>
           <a:prstGeom prst="rect">
             <a:avLst/>
@@ -25308,556 +25818,19 @@
           </a:ln>
         </p:spPr>
         <p:txBody>
-          <a:bodyPr wrap="square" lIns="137160" tIns="18288" rIns="45720" bIns="18288" anchor="ctr"/>
-          <a:lstStyle/>
-          <a:p>
-            <a:pPr algn="l">
+          <a:bodyPr wrap="square" lIns="27432" tIns="22860" rIns="27432" bIns="22860" anchor="ctr"/>
+          <a:lstStyle/>
+          <a:p>
+            <a:pPr algn="ctr">
               <a:buNone/>
             </a:pPr>
             <a:r>
-              <a:rPr lang="en-US" sz="1400" b="0" i="0" dirty="0">
+              <a:rPr lang="en-US" sz="2000" b="1" i="0" dirty="0">
                 <a:solidFill>
                   <a:srgbClr val="5C4826"/>
                 </a:solidFill>
               </a:rPr>
-              <a:t>New operational components</a:t>
-            </a:r>
-          </a:p>
-        </p:txBody>
-      </p:sp>
-      <p:sp>
-        <p:nvSpPr>
-          <p:cNvPr id="161" name="R5A"/>
-          <p:cNvSpPr/>
-          <p:nvPr/>
-        </p:nvSpPr>
-        <p:spPr>
-          <a:xfrm>
-            <a:off x="4174320" y="2800000"/>
-            <a:ext cx="2347680" cy="300000"/>
-          </a:xfrm>
-          <a:prstGeom prst="rect">
-            <a:avLst/>
-          </a:prstGeom>
-          <a:solidFill>
-            <a:srgbClr val="FBF8F2"/>
-          </a:solidFill>
-          <a:ln w="12700">
-            <a:solidFill>
-              <a:srgbClr val="C9B991"/>
-            </a:solidFill>
-          </a:ln>
-        </p:spPr>
-        <p:txBody>
-          <a:bodyPr wrap="square" lIns="45720" tIns="18288" rIns="45720" bIns="18288" anchor="ctr"/>
-          <a:lstStyle/>
-          <a:p>
-            <a:pPr algn="ctr">
-              <a:buNone/>
-            </a:pPr>
-            <a:r>
-              <a:rPr lang="en-US" sz="1400" b="1" i="0" dirty="0">
-                <a:solidFill>
-                  <a:srgbClr val="5C4826"/>
-                </a:solidFill>
-              </a:rPr>
-              <a:t>0</a:t>
-            </a:r>
-          </a:p>
-        </p:txBody>
-      </p:sp>
-      <p:sp>
-        <p:nvSpPr>
-          <p:cNvPr id="162" name="R5B"/>
-          <p:cNvSpPr/>
-          <p:nvPr/>
-        </p:nvSpPr>
-        <p:spPr>
-          <a:xfrm>
-            <a:off x="6522000" y="2800000"/>
-            <a:ext cx="2347680" cy="300000"/>
-          </a:xfrm>
-          <a:prstGeom prst="rect">
-            <a:avLst/>
-          </a:prstGeom>
-          <a:solidFill>
-            <a:srgbClr val="FBF8F2"/>
-          </a:solidFill>
-          <a:ln w="12700">
-            <a:solidFill>
-              <a:srgbClr val="C9B991"/>
-            </a:solidFill>
-          </a:ln>
-        </p:spPr>
-        <p:txBody>
-          <a:bodyPr wrap="square" lIns="45720" tIns="18288" rIns="45720" bIns="18288" anchor="ctr"/>
-          <a:lstStyle/>
-          <a:p>
-            <a:pPr algn="ctr">
-              <a:buNone/>
-            </a:pPr>
-            <a:r>
-              <a:rPr lang="en-US" sz="1400" b="1" i="0" dirty="0">
-                <a:solidFill>
-                  <a:srgbClr val="5C4826"/>
-                </a:solidFill>
-              </a:rPr>
-              <a:t>3</a:t>
-            </a:r>
-          </a:p>
-        </p:txBody>
-      </p:sp>
-      <p:sp>
-        <p:nvSpPr>
-          <p:cNvPr id="170" name="Constraints"/>
-          <p:cNvSpPr/>
-          <p:nvPr/>
-        </p:nvSpPr>
-        <p:spPr>
-          <a:xfrm>
-            <a:off x="274320" y="3200000"/>
-            <a:ext cx="8595360" cy="500000"/>
-          </a:xfrm>
-          <a:prstGeom prst="rect">
-            <a:avLst/>
-          </a:prstGeom>
-          <a:solidFill>
-            <a:srgbClr val="E8F0F7"/>
-          </a:solidFill>
-          <a:ln w="12700">
-            <a:solidFill>
-              <a:srgbClr val="A9C4DB"/>
-            </a:solidFill>
-          </a:ln>
-        </p:spPr>
-        <p:txBody>
-          <a:bodyPr wrap="square" lIns="137160" tIns="18288" rIns="137160" bIns="18288" anchor="ctr"/>
-          <a:lstStyle/>
-          <a:p>
-            <a:pPr algn="l">
-              <a:buNone/>
-            </a:pPr>
-            <a:r>
-              <a:rPr lang="en-US" sz="1400" b="1" i="0" dirty="0">
-                <a:solidFill>
-                  <a:srgbClr val="5C4826"/>
-                </a:solidFill>
-              </a:rPr>
-              <a:t>Expected launch traffic: 20–50 jobs/min, with substantial uncertainty.</a:t>
-            </a:r>
-          </a:p>
-          <a:p>
-            <a:pPr algn="l">
-              <a:buNone/>
-            </a:pPr>
-            <a:r>
-              <a:rPr lang="en-US" sz="1400" b="0" i="0" dirty="0">
-                <a:solidFill>
-                  <a:srgbClr val="5C4826"/>
-                </a:solidFill>
-              </a:rPr>
-              <a:t>A customer is waiting for the feature. You must choose A or B today.</a:t>
-            </a:r>
-          </a:p>
-        </p:txBody>
-      </p:sp>
-      <p:sp>
-        <p:nvSpPr>
-          <p:cNvPr id="180" name="DecideBadge"/>
-          <p:cNvSpPr/>
-          <p:nvPr/>
-        </p:nvSpPr>
-        <p:spPr>
-          <a:xfrm>
-            <a:off x="274320" y="3810000"/>
-            <a:ext cx="2560320" cy="300000"/>
-          </a:xfrm>
-          <a:prstGeom prst="roundRect">
-            <a:avLst/>
-          </a:prstGeom>
-          <a:solidFill>
-            <a:srgbClr val="FBF8F2"/>
-          </a:solidFill>
-          <a:ln w="15875">
-            <a:solidFill>
-              <a:srgbClr val="8E6F3E"/>
-            </a:solidFill>
-          </a:ln>
-        </p:spPr>
-        <p:txBody>
-          <a:bodyPr wrap="square" lIns="45720" tIns="9144" rIns="45720" bIns="9144" anchor="ctr"/>
-          <a:lstStyle/>
-          <a:p>
-            <a:pPr algn="ctr">
-              <a:buNone/>
-            </a:pPr>
-            <a:r>
-              <a:rPr lang="en-US" sz="1400" b="1" i="0" dirty="0">
-                <a:solidFill>
-                  <a:srgbClr val="8E6F3E"/>
-                </a:solidFill>
-              </a:rPr>
-              <a:t>MAKE THE DECISION</a:t>
-            </a:r>
-          </a:p>
-        </p:txBody>
-      </p:sp>
-      <p:sp>
-        <p:nvSpPr>
-          <p:cNvPr id="181" name="DecideNote"/>
-          <p:cNvSpPr txBox="1"/>
-          <p:nvPr/>
-        </p:nvSpPr>
-        <p:spPr>
-          <a:xfrm>
-            <a:off x="2980000" y="3810000"/>
-            <a:ext cx="3200000" cy="300000"/>
-          </a:xfrm>
-          <a:prstGeom prst="rect">
-            <a:avLst/>
-          </a:prstGeom>
-          <a:noFill/>
-          <a:ln>
-            <a:noFill/>
-          </a:ln>
-        </p:spPr>
-        <p:txBody>
-          <a:bodyPr wrap="square" lIns="0" tIns="0" rIns="0" bIns="0" anchor="ctr"/>
-          <a:lstStyle/>
-          <a:p>
-            <a:pPr algn="l">
-              <a:buNone/>
-            </a:pPr>
-            <a:r>
-              <a:rPr lang="en-US" sz="1400" b="0" i="0" dirty="0">
-                <a:solidFill>
-                  <a:srgbClr val="5C4826"/>
-                </a:solidFill>
-              </a:rPr>
-              <a:t>You have 10 minutes.</a:t>
-            </a:r>
-          </a:p>
-        </p:txBody>
-      </p:sp>
-      <p:sp>
-        <p:nvSpPr>
-          <p:cNvPr id="190" name="Questions"/>
-          <p:cNvSpPr txBox="1"/>
-          <p:nvPr/>
-        </p:nvSpPr>
-        <p:spPr>
-          <a:xfrm>
-            <a:off x="274320" y="4180000"/>
-            <a:ext cx="6000000" cy="1606000"/>
-          </a:xfrm>
-          <a:prstGeom prst="rect">
-            <a:avLst/>
-          </a:prstGeom>
-          <a:noFill/>
-          <a:ln>
-            <a:noFill/>
-          </a:ln>
-        </p:spPr>
-        <p:txBody>
-          <a:bodyPr wrap="square" lIns="0" tIns="0" rIns="0" bIns="0" anchor="t"/>
-          <a:lstStyle/>
-          <a:p>
-            <a:pPr marL="274320" indent="-274320" algn="l">
-              <a:lnSpc>
-                <a:spcPts val="1560"/>
-              </a:lnSpc>
-              <a:spcBef>
-                <a:spcPts val="600"/>
-              </a:spcBef>
-              <a:buNone/>
-            </a:pPr>
-            <a:r>
-              <a:rPr lang="en-US" sz="1300" b="1" i="0" dirty="0">
-                <a:solidFill>
-                  <a:srgbClr val="8E6F3E"/>
-                </a:solidFill>
-              </a:rPr>
-              <a:t xml:space="preserve">1  </a:t>
-            </a:r>
-            <a:r>
-              <a:rPr lang="en-US" sz="1300" b="0" i="0" dirty="0">
-                <a:solidFill>
-                  <a:srgbClr val="5C4826"/>
-                </a:solidFill>
-              </a:rPr>
-              <a:t>What properties actually matter to this decision?</a:t>
-            </a:r>
-          </a:p>
-          <a:p>
-            <a:pPr marL="274320" indent="-274320" algn="l">
-              <a:lnSpc>
-                <a:spcPts val="1560"/>
-              </a:lnSpc>
-              <a:spcBef>
-                <a:spcPts val="600"/>
-              </a:spcBef>
-              <a:buNone/>
-            </a:pPr>
-            <a:r>
-              <a:rPr lang="en-US" sz="1300" b="1" i="0" dirty="0">
-                <a:solidFill>
-                  <a:srgbClr val="8E6F3E"/>
-                </a:solidFill>
-              </a:rPr>
-              <a:t xml:space="preserve">2  </a:t>
-            </a:r>
-            <a:r>
-              <a:rPr lang="en-US" sz="1300" b="0" i="0" dirty="0">
-                <a:solidFill>
-                  <a:srgbClr val="5C4826"/>
-                </a:solidFill>
-              </a:rPr>
-              <a:t>What do these measurements tell you about them?</a:t>
-            </a:r>
-          </a:p>
-          <a:p>
-            <a:pPr marL="274320" indent="-274320" algn="l">
-              <a:lnSpc>
-                <a:spcPts val="1560"/>
-              </a:lnSpc>
-              <a:spcBef>
-                <a:spcPts val="600"/>
-              </a:spcBef>
-              <a:buNone/>
-            </a:pPr>
-            <a:r>
-              <a:rPr lang="en-US" sz="1300" b="1" i="0" dirty="0">
-                <a:solidFill>
-                  <a:srgbClr val="8E6F3E"/>
-                </a:solidFill>
-              </a:rPr>
-              <a:t xml:space="preserve">3  </a:t>
-            </a:r>
-            <a:r>
-              <a:rPr lang="en-US" sz="1300" b="0" i="0" dirty="0">
-                <a:solidFill>
-                  <a:srgbClr val="5C4826"/>
-                </a:solidFill>
-              </a:rPr>
-              <a:t>What important thing is not measured?</a:t>
-            </a:r>
-          </a:p>
-          <a:p>
-            <a:pPr marL="274320" indent="-274320" algn="l">
-              <a:lnSpc>
-                <a:spcPts val="1560"/>
-              </a:lnSpc>
-              <a:spcBef>
-                <a:spcPts val="600"/>
-              </a:spcBef>
-              <a:buNone/>
-            </a:pPr>
-            <a:r>
-              <a:rPr lang="en-US" sz="1300" b="1" i="0" dirty="0">
-                <a:solidFill>
-                  <a:srgbClr val="8E6F3E"/>
-                </a:solidFill>
-              </a:rPr>
-              <a:t xml:space="preserve">4  </a:t>
-            </a:r>
-            <a:r>
-              <a:rPr lang="en-US" sz="1300" b="0" i="0" dirty="0">
-                <a:solidFill>
-                  <a:srgbClr val="5C4826"/>
-                </a:solidFill>
-              </a:rPr>
-              <a:t>Which uncertainty could plausibly change your choice?</a:t>
-            </a:r>
-          </a:p>
-          <a:p>
-            <a:pPr marL="274320" indent="-274320" algn="l">
-              <a:lnSpc>
-                <a:spcPts val="1560"/>
-              </a:lnSpc>
-              <a:spcBef>
-                <a:spcPts val="600"/>
-              </a:spcBef>
-              <a:buNone/>
-            </a:pPr>
-            <a:r>
-              <a:rPr lang="en-US" sz="1300" b="1" i="0" dirty="0">
-                <a:solidFill>
-                  <a:srgbClr val="8E6F3E"/>
-                </a:solidFill>
-              </a:rPr>
-              <a:t xml:space="preserve">5  </a:t>
-            </a:r>
-            <a:r>
-              <a:rPr lang="en-US" sz="1300" b="0" i="0" dirty="0">
-                <a:solidFill>
-                  <a:srgbClr val="5C4826"/>
-                </a:solidFill>
-              </a:rPr>
-              <a:t>Would you spend time obtaining more information? If so, what information?</a:t>
-            </a:r>
-          </a:p>
-          <a:p>
-            <a:pPr marL="274320" indent="-274320" algn="l">
-              <a:lnSpc>
-                <a:spcPts val="1560"/>
-              </a:lnSpc>
-              <a:spcBef>
-                <a:spcPts val="600"/>
-              </a:spcBef>
-              <a:buNone/>
-            </a:pPr>
-            <a:r>
-              <a:rPr lang="en-US" sz="1300" b="1" i="0" dirty="0">
-                <a:solidFill>
-                  <a:srgbClr val="8E6F3E"/>
-                </a:solidFill>
-              </a:rPr>
-              <a:t xml:space="preserve">6  </a:t>
-            </a:r>
-            <a:r>
-              <a:rPr lang="en-US" sz="1300" b="1" i="0" dirty="0">
-                <a:solidFill>
-                  <a:srgbClr val="5C4826"/>
-                </a:solidFill>
-              </a:rPr>
-              <a:t>Choose A or B. Defend the choice.</a:t>
-            </a:r>
-          </a:p>
-        </p:txBody>
-      </p:sp>
-      <p:sp>
-        <p:nvSpPr>
-          <p:cNvPr id="200" name="DeliverableBox"/>
-          <p:cNvSpPr/>
-          <p:nvPr/>
-        </p:nvSpPr>
-        <p:spPr>
-          <a:xfrm>
-            <a:off x="6424320" y="4180000"/>
-            <a:ext cx="2445360" cy="1606000"/>
-          </a:xfrm>
-          <a:prstGeom prst="rect">
-            <a:avLst/>
-          </a:prstGeom>
-          <a:solidFill>
-            <a:srgbClr val="FBF8F2"/>
-          </a:solidFill>
-          <a:ln w="15875">
-            <a:solidFill>
-              <a:srgbClr val="8E6F3E"/>
-            </a:solidFill>
-          </a:ln>
-        </p:spPr>
-        <p:txBody>
-          <a:bodyPr wrap="square" lIns="114300" tIns="45720" rIns="114300" bIns="45720" anchor="t"/>
-          <a:lstStyle/>
-          <a:p>
-            <a:pPr algn="l">
-              <a:buNone/>
-            </a:pPr>
-            <a:r>
-              <a:rPr lang="en-US" sz="1300" b="1" i="0" dirty="0">
-                <a:solidFill>
-                  <a:srgbClr val="8E6F3E"/>
-                </a:solidFill>
-              </a:rPr>
-              <a:t>YOUR DELIVERABLE</a:t>
-            </a:r>
-          </a:p>
-          <a:p>
-            <a:pPr algn="l">
-              <a:lnSpc>
-                <a:spcPts val="1620"/>
-              </a:lnSpc>
-              <a:spcBef>
-                <a:spcPts val="700"/>
-              </a:spcBef>
-              <a:buNone/>
-            </a:pPr>
-            <a:r>
-              <a:rPr lang="en-US" sz="1300" b="0" i="0" dirty="0">
-                <a:solidFill>
-                  <a:srgbClr val="5C4826"/>
-                </a:solidFill>
-              </a:rPr>
-              <a:t>We choose ___ because ___.</a:t>
-            </a:r>
-          </a:p>
-          <a:p>
-            <a:pPr algn="l">
-              <a:lnSpc>
-                <a:spcPts val="1620"/>
-              </a:lnSpc>
-              <a:spcBef>
-                <a:spcPts val="700"/>
-              </a:spcBef>
-              <a:buNone/>
-            </a:pPr>
-            <a:r>
-              <a:rPr lang="en-US" sz="1300" b="0" i="0" dirty="0">
-                <a:solidFill>
-                  <a:srgbClr val="5C4826"/>
-                </a:solidFill>
-              </a:rPr>
-              <a:t>The most important unresolved uncertainty is ___.</a:t>
-            </a:r>
-          </a:p>
-          <a:p>
-            <a:pPr algn="l">
-              <a:lnSpc>
-                <a:spcPts val="1620"/>
-              </a:lnSpc>
-              <a:spcBef>
-                <a:spcPts val="700"/>
-              </a:spcBef>
-              <a:buNone/>
-            </a:pPr>
-            <a:r>
-              <a:rPr lang="en-US" sz="1300" b="0" i="0" dirty="0">
-                <a:solidFill>
-                  <a:srgbClr val="5C4826"/>
-                </a:solidFill>
-              </a:rPr>
-              <a:t>We would change our decision if we learned ___.</a:t>
-            </a:r>
-          </a:p>
-        </p:txBody>
-      </p:sp>
-      <p:sp>
-        <p:nvSpPr>
-          <p:cNvPr id="210" name="FooterBand"/>
-          <p:cNvSpPr/>
-          <p:nvPr/>
-        </p:nvSpPr>
-        <p:spPr>
-          <a:xfrm>
-            <a:off x="274320" y="5900000"/>
-            <a:ext cx="8595360" cy="555664"/>
-          </a:xfrm>
-          <a:prstGeom prst="rect">
-            <a:avLst/>
-          </a:prstGeom>
-          <a:solidFill>
-            <a:srgbClr val="8E6F3E"/>
-          </a:solidFill>
-          <a:ln>
-            <a:noFill/>
-          </a:ln>
-        </p:spPr>
-        <p:txBody>
-          <a:bodyPr wrap="square" lIns="91440" tIns="27432" rIns="91440" bIns="27432" anchor="ctr"/>
-          <a:lstStyle/>
-          <a:p>
-            <a:pPr algn="ctr">
-              <a:buNone/>
-            </a:pPr>
-            <a:r>
-              <a:rPr lang="en-US" sz="1600" b="1" i="0" dirty="0">
-                <a:solidFill>
-                  <a:srgbClr val="FFFFFF"/>
-                </a:solidFill>
-              </a:rPr>
-              <a:t>You cannot answer “it depends” without saying what it depends on.</a:t>
+              <a:t>LEARN</a:t>
             </a:r>
           </a:p>
         </p:txBody>

--- a/course/lectures/act-1-foundations/09-engineering-decision-making-and-metrics/1-9-Engineering-Decision-Making-and-Metrics.pptx
+++ b/course/lectures/act-1-foundations/09-engineering-decision-making-and-metrics/1-9-Engineering-Decision-Making-and-Metrics.pptx
@@ -2069,8 +2069,12 @@
           </a:p>
           <a:p>
             <a:r>
+              <a:rPr b="1" dirty="0"/>
+              <a:t xml:space="preserve">Purpose. </a:t>
+            </a:r>
+            <a:r>
               <a:rPr dirty="0"/>
-              <a:t>Setup: teams of 3–5. Do not interpret the evidence for them. Their task is not to discover the instructor’s preferred action; it is to make and defend a decision. Point out the deliverable: they must fill every blank. The sentence forces evidence to bear on a claim rather than merely reporting a number.</a:t>
+              <a:t>This activity integrates the lecture so far. Students must move from a consequential property, through measurements and evidence, to an engineering action under uncertainty. The objective is not to identify a uniquely correct design. More than one decision can be defensible.</a:t>
             </a:r>
           </a:p>
           <a:p>
@@ -2078,8 +2082,12 @@
           </a:p>
           <a:p>
             <a:r>
+              <a:rPr b="1" dirty="0"/>
+              <a:t xml:space="preserve">Set up the case. </a:t>
+            </a:r>
+            <a:r>
               <a:rPr dirty="0"/>
-              <a:t>Circulate. When a team answers quickly, push on the justification: Which properties did you decide matter, and why those? What is not in the table that should be? What does “20–50 jobs/min with substantial uncertainty” do to A’s demonstrated 35? Are you asking for more information because it has decision value, or because more evidence feels safer?</a:t>
+              <a:t>Teams of 3–5. Tell students that both designs are viable. A is cheaper to implement, faster for a typical job, and operationally simpler. B has demonstrated substantially greater peak throughput and automatic recovery, but costs more engineering effort, increases typical completion time, and introduces operational machinery. Expected traffic overlaps A’s demonstrated peak capacity, but the expected workload itself is uncertain. Do not interpret the evidence for them; their task is not to discover the instructor’s preferred action, it is to make and defend a decision.</a:t>
             </a:r>
           </a:p>
           <a:p>
@@ -2087,8 +2095,28 @@
           </a:p>
           <a:p>
             <a:r>
+              <a:rPr b="1" dirty="0"/>
+              <a:t xml:space="preserve">The deliverable is on the form, not the slide. </a:t>
+            </a:r>
+            <a:r>
               <a:rPr dirty="0"/>
-              <a:t>Do not tell teams which action is correct. Both are defensible. A team may reasonably choose A because observed demand sits mostly within its capacity, it is cheap, and migration remains possible. Another may reasonably choose B because the upper end of expected demand exceeds A’s demonstrated capacity and automatic recovery is consequential.</a:t>
+              <a:t xml:space="preserve">Every team completes three sentences: “We will ___ because ___.” “The most important unresolved uncertainty is ___.” “We would change our decision if we learned ___.” Require every blank to be filled — the sentences force evidence to bear on a claim rather than merely reporting a number. Note the wording: </a:t>
+            </a:r>
+            <a:r>
+              <a:rPr i="1" dirty="0"/>
+              <a:t>we will</a:t>
+            </a:r>
+            <a:r>
+              <a:rPr dirty="0"/>
+              <a:t xml:space="preserve">, not </a:t>
+            </a:r>
+            <a:r>
+              <a:rPr i="1" dirty="0"/>
+              <a:t>we choose</a:t>
+            </a:r>
+            <a:r>
+              <a:rPr dirty="0"/>
+              <a:t>, because gathering evidence is an admissible answer.</a:t>
             </a:r>
           </a:p>
           <a:p>
@@ -2096,8 +2124,103 @@
           </a:p>
           <a:p>
             <a:r>
+              <a:rPr b="1" dirty="0"/>
+              <a:t xml:space="preserve">Emphasize what the table does not establish. </a:t>
+            </a:r>
+            <a:r>
               <a:rPr dirty="0"/>
-              <a:t xml:space="preserve">Comparison: ask for one team choosing A and one choosing B. Put their deliverables against each other. The interesting question is not </a:t>
+              <a:t>“35 jobs/min” is the peak load A handled in an experiment. It is not a statement that A fails at 36 jobs/min. Likewise, 20–50 jobs/min is an uncertain expectation, not a workload specification. Do not let students silently convert measurements into guarantees.</a:t>
+            </a:r>
+          </a:p>
+          <a:p>
+            <a:endParaRPr dirty="0"/>
+          </a:p>
+          <a:p>
+            <a:r>
+              <a:rPr b="1" dirty="0"/>
+              <a:t xml:space="preserve">Make delay real. </a:t>
+            </a:r>
+            <a:r>
+              <a:rPr dirty="0"/>
+              <a:t>The customer is waiting. Every day the team spends gathering more evidence delays delivery by one day. Gathering evidence is therefore an engineering action with a cost, not a free preliminary step. Students may nevertheless decide that delaying delivery is justified.</a:t>
+            </a:r>
+          </a:p>
+          <a:p>
+            <a:endParaRPr dirty="0"/>
+          </a:p>
+          <a:p>
+            <a:r>
+              <a:rPr b="1" dirty="0"/>
+              <a:t xml:space="preserve">Do not force A or B. </a:t>
+            </a:r>
+            <a:r>
+              <a:rPr dirty="0"/>
+              <a:t>A team’s action may be to choose A, choose B, gather more evidence, reformulate the alternatives, revisit an upstream assumption, or refuse the proposed change. If they choose to gather evidence, require them to say exactly what they would observe and why that observation could change the decision.</a:t>
+            </a:r>
+          </a:p>
+          <a:p>
+            <a:endParaRPr dirty="0"/>
+          </a:p>
+          <a:p>
+            <a:r>
+              <a:rPr b="1" dirty="0"/>
+              <a:t xml:space="preserve">Push on vague requests for evidence. </a:t>
+            </a:r>
+            <a:r>
+              <a:rPr dirty="0"/>
+              <a:t>If a team says “we need more data,” ask: What observation? Which uncertainty does it reduce? What would you do differently depending on the result? If they cannot answer those questions, they have not justified buying the information.</a:t>
+            </a:r>
+          </a:p>
+          <a:p>
+            <a:endParaRPr dirty="0"/>
+          </a:p>
+          <a:p>
+            <a:r>
+              <a:rPr b="1" dirty="0"/>
+              <a:t xml:space="preserve">Push on properties. </a:t>
+            </a:r>
+            <a:r>
+              <a:rPr dirty="0"/>
+              <a:t>Students may reasonably care about responsiveness, throughput/capacity, reliability/recovery, implementation effort, operational complexity, or time to customer value. They should not merely enumerate all of these. Ask which are consequential for this decision and why.</a:t>
+            </a:r>
+          </a:p>
+          <a:p>
+            <a:endParaRPr dirty="0"/>
+          </a:p>
+          <a:p>
+            <a:r>
+              <a:rPr b="1" dirty="0"/>
+              <a:t xml:space="preserve">Push on metrics. </a:t>
+            </a:r>
+            <a:r>
+              <a:rPr dirty="0"/>
+              <a:t>“Typical completion time” is deliberately underspecified. What does typical mean? Under what workload? Likewise, experimentally handled peak load is evidence only under the experimental conditions. This connects directly to the earlier point that metrics have meaning relative to property, conditions, and decision.</a:t>
+            </a:r>
+          </a:p>
+          <a:p>
+            <a:endParaRPr dirty="0"/>
+          </a:p>
+          <a:p>
+            <a:r>
+              <a:rPr b="1" dirty="0"/>
+              <a:t xml:space="preserve">Look for the central tension. </a:t>
+            </a:r>
+            <a:r>
+              <a:rPr dirty="0"/>
+              <a:t>Expected traffic of 20–50 jobs/min overlaps A’s demonstrated 35 jobs/min. That should make workload/capacity uncertainty salient, but do not tell students that this must be their decisive uncertainty. A team could reasonably regard failure/recovery behavior, customer latency, or operational complexity as more consequential.</a:t>
+            </a:r>
+          </a:p>
+          <a:p>
+            <a:endParaRPr dirty="0"/>
+          </a:p>
+          <a:p>
+            <a:r>
+              <a:rPr b="1" dirty="0"/>
+              <a:t xml:space="preserve">Debrief. </a:t>
+            </a:r>
+            <a:r>
+              <a:rPr dirty="0"/>
+              <a:t xml:space="preserve">Ask two teams that made different decisions to defend them from the same evidence. Put their deliverables against each other. The interesting question is not </a:t>
             </a:r>
             <a:r>
               <a:rPr i="1" dirty="0"/>
@@ -2111,6 +2234,10 @@
               <a:rPr i="1" dirty="0"/>
               <a:t>what model of the decision did each team construct?</a:t>
             </a:r>
+            <a:r>
+              <a:rPr dirty="0"/>
+              <a:t xml:space="preserve"> Transition: “You all received exactly the same observations. Why did you make different decisions?” Use the disagreement to introduce the next section: evidence does not mechanically determine action. Consequence, uncertainty, reversibility, and the cost of further information affect what action is justified.</a:t>
+            </a:r>
           </a:p>
           <a:p>
             <a:endParaRPr dirty="0"/>
@@ -2118,16 +2245,7 @@
           <a:p>
             <a:r>
               <a:rPr dirty="0"/>
-              <a:t>Transition: “You all received exactly the same observations. Why did you make different decisions?”</a:t>
-            </a:r>
-          </a:p>
-          <a:p>
-            <a:endParaRPr dirty="0"/>
-          </a:p>
-          <a:p>
-            <a:r>
-              <a:rPr dirty="0"/>
-              <a:t>- Drive the debrief toward: different properties selected → different importance assigned → different uncertainty tolerated → different action. The next slide gives that experience its name.</a:t>
+              <a:t>- Drive the debrief toward: different properties selected → different importance assigned → different uncertainty tolerated → different action. The section that follows gives that experience its name: slide 28 opens it, and the naming happens on slides 29–30.</a:t>
             </a:r>
           </a:p>
           <a:p>

--- a/course/lectures/act-1-foundations/09-engineering-decision-making-and-metrics/1-9-Engineering-Decision-Making-and-Metrics.pptx
+++ b/course/lectures/act-1-foundations/09-engineering-decision-making-and-metrics/1-9-Engineering-Decision-Making-and-Metrics.pptx
@@ -531,7 +531,7 @@
           <a:p>
             <a:r>
               <a:rPr dirty="0"/>
-              <a:t xml:space="preserve">0.5 minutes — </a:t>
+              <a:t>0.5 minutes — </a:t>
             </a:r>
             <a:r>
               <a:rPr i="1" dirty="0"/>
@@ -597,7 +597,7 @@
           <a:p>
             <a:r>
               <a:rPr dirty="0"/>
-              <a:t xml:space="preserve">1.5 minutes — </a:t>
+              <a:t>1.5 minutes — </a:t>
             </a:r>
             <a:r>
               <a:rPr i="1" dirty="0"/>
@@ -681,7 +681,7 @@
           <a:p>
             <a:r>
               <a:rPr dirty="0"/>
-              <a:t xml:space="preserve">0.3 minutes — </a:t>
+              <a:t>0.3 minutes — </a:t>
             </a:r>
             <a:r>
               <a:rPr i="1" dirty="0"/>
@@ -830,7 +830,7 @@
           <a:p>
             <a:r>
               <a:rPr dirty="0"/>
-              <a:t xml:space="preserve">- Responsiveness is abstract; p99-under-workload-W is the chosen observable aspect; 420 </a:t>
+              <a:t>- Responsiveness is abstract; p99-under-workload-W is the chosen observable aspect; 420 </a:t>
             </a:r>
             <a:r>
               <a:rPr dirty="0" err="1"/>
@@ -838,7 +838,7 @@
             </a:r>
             <a:r>
               <a:rPr dirty="0"/>
-              <a:t xml:space="preserve"> is what applying it produced.</a:t>
+              <a:t> is what applying it produced.</a:t>
             </a:r>
           </a:p>
           <a:p>
@@ -903,7 +903,7 @@
           <a:p>
             <a:r>
               <a:rPr dirty="0"/>
-              <a:t xml:space="preserve">2 minutes — </a:t>
+              <a:t>2 minutes — </a:t>
             </a:r>
             <a:r>
               <a:rPr i="1" dirty="0"/>
@@ -981,7 +981,7 @@
           <a:p>
             <a:r>
               <a:rPr dirty="0"/>
-              <a:t xml:space="preserve">2 minutes — TPS: students generate the conditions that give 420 </a:t>
+              <a:t>2 minutes — TPS: students generate the conditions that give 420 </a:t>
             </a:r>
             <a:r>
               <a:rPr dirty="0" err="1"/>
@@ -989,7 +989,7 @@
             </a:r>
             <a:r>
               <a:rPr dirty="0"/>
-              <a:t xml:space="preserve"> meaning.</a:t>
+              <a:t> meaning.</a:t>
             </a:r>
           </a:p>
           <a:p>
@@ -998,7 +998,7 @@
           <a:p>
             <a:r>
               <a:rPr dirty="0"/>
-              <a:t xml:space="preserve">- Let '420 </a:t>
+              <a:t>- Let '420 </a:t>
             </a:r>
             <a:r>
               <a:rPr dirty="0" err="1"/>
@@ -1006,7 +1006,7 @@
             </a:r>
             <a:r>
               <a:rPr dirty="0"/>
-              <a:t xml:space="preserve"> sit alone for a beat; run the think-pair-share on the prompt before revealing anything.</a:t>
+              <a:t> sit alone for a beat; run the think-pair-share on the prompt before revealing anything.</a:t>
             </a:r>
           </a:p>
           <a:p>
@@ -1018,7 +1018,7 @@
           <a:p>
             <a:r>
               <a:rPr dirty="0"/>
-              <a:t xml:space="preserve">- The final click is the deliverable form: p99 = 420 </a:t>
+              <a:t>- The final click is the deliverable form: p99 = 420 </a:t>
             </a:r>
             <a:r>
               <a:rPr dirty="0" err="1"/>
@@ -1026,13 +1026,13 @@
             </a:r>
             <a:r>
               <a:rPr dirty="0"/>
-              <a:t xml:space="preserve"> · end-to-end · workload W · configuration C · interval T.</a:t>
+              <a:t> · end-to-end · workload W · configuration C · interval T.</a:t>
             </a:r>
           </a:p>
           <a:p>
             <a:r>
               <a:rPr dirty="0"/>
-              <a:t xml:space="preserve">- Then stop. The students should experience the move from '420 </a:t>
+              <a:t>- Then stop. The students should experience the move from '420 </a:t>
             </a:r>
             <a:r>
               <a:rPr dirty="0" err="1"/>
@@ -1040,7 +1040,7 @@
             </a:r>
             <a:r>
               <a:rPr dirty="0"/>
-              <a:t xml:space="preserve"> is a fact' to '420 </a:t>
+              <a:t> is a fact' to '420 </a:t>
             </a:r>
             <a:r>
               <a:rPr dirty="0" err="1"/>
@@ -1048,7 +1048,7 @@
             </a:r>
             <a:r>
               <a:rPr dirty="0"/>
-              <a:t xml:space="preserve"> is an observation parameterized by conditions.'</a:t>
+              <a:t> is an observation parameterized by conditions.'</a:t>
             </a:r>
           </a:p>
           <a:p>
@@ -1217,7 +1217,7 @@
           <a:p>
             <a:r>
               <a:rPr dirty="0"/>
-              <a:t xml:space="preserve">1.5 minutes — </a:t>
+              <a:t>1.5 minutes — </a:t>
             </a:r>
             <a:r>
               <a:rPr i="1" dirty="0"/>
@@ -1363,7 +1363,7 @@
           <a:p>
             <a:r>
               <a:rPr dirty="0"/>
-              <a:t xml:space="preserve">2 minutes — </a:t>
+              <a:t>2 minutes — </a:t>
             </a:r>
             <a:r>
               <a:rPr i="1" dirty="0"/>
@@ -1542,7 +1542,7 @@
           <a:p>
             <a:r>
               <a:rPr dirty="0"/>
-              <a:t xml:space="preserve">5 minutes — </a:t>
+              <a:t>5 minutes — </a:t>
             </a:r>
             <a:r>
               <a:rPr i="1" dirty="0"/>
@@ -1608,7 +1608,7 @@
           <a:p>
             <a:r>
               <a:rPr dirty="0"/>
-              <a:t xml:space="preserve">0.3 minutes — </a:t>
+              <a:t>0.3 minutes — </a:t>
             </a:r>
             <a:r>
               <a:rPr i="1" dirty="0"/>
@@ -1668,7 +1668,7 @@
           <a:p>
             <a:r>
               <a:rPr dirty="0"/>
-              <a:t xml:space="preserve">2.5 minutes — </a:t>
+              <a:t>2.5 minutes — </a:t>
             </a:r>
             <a:r>
               <a:rPr i="1" dirty="0"/>
@@ -1740,7 +1740,7 @@
           <a:p>
             <a:r>
               <a:rPr dirty="0"/>
-              <a:t xml:space="preserve">2 minutes — </a:t>
+              <a:t>2 minutes — </a:t>
             </a:r>
             <a:r>
               <a:rPr i="1" dirty="0"/>
@@ -1824,7 +1824,7 @@
           <a:p>
             <a:r>
               <a:rPr dirty="0"/>
-              <a:t xml:space="preserve">2.5 minutes — </a:t>
+              <a:t>2.5 minutes — </a:t>
             </a:r>
             <a:r>
               <a:rPr i="1" dirty="0"/>
@@ -1982,7 +1982,7 @@
           <a:p>
             <a:r>
               <a:rPr dirty="0"/>
-              <a:t xml:space="preserve">1 minute — </a:t>
+              <a:t>1 minute — </a:t>
             </a:r>
             <a:r>
               <a:rPr i="1" dirty="0"/>
@@ -2057,7 +2057,7 @@
           <a:p>
             <a:r>
               <a:rPr dirty="0"/>
-              <a:t xml:space="preserve">10 minutes — </a:t>
+              <a:t>10 minutes — </a:t>
             </a:r>
             <a:r>
               <a:rPr i="1" dirty="0"/>
@@ -2070,7 +2070,7 @@
           <a:p>
             <a:r>
               <a:rPr b="1" dirty="0"/>
-              <a:t xml:space="preserve">Purpose. </a:t>
+              <a:t>Purpose. </a:t>
             </a:r>
             <a:r>
               <a:rPr dirty="0"/>
@@ -2083,7 +2083,7 @@
           <a:p>
             <a:r>
               <a:rPr b="1" dirty="0"/>
-              <a:t xml:space="preserve">Set up the case. </a:t>
+              <a:t>Set up the case. </a:t>
             </a:r>
             <a:r>
               <a:rPr dirty="0"/>
@@ -2096,11 +2096,11 @@
           <a:p>
             <a:r>
               <a:rPr b="1" dirty="0"/>
-              <a:t xml:space="preserve">The deliverable is on the form, not the slide. </a:t>
+              <a:t>The deliverable is on the form, not the slide. </a:t>
             </a:r>
             <a:r>
               <a:rPr dirty="0"/>
-              <a:t xml:space="preserve">Every team completes three sentences: “We will ___ because ___.” “The most important unresolved uncertainty is ___.” “We would change our decision if we learned ___.” Require every blank to be filled — the sentences force evidence to bear on a claim rather than merely reporting a number. Note the wording: </a:t>
+              <a:t>Every team completes three sentences: “We will ___ because ___.” “The most important unresolved uncertainty is ___.” “We would change our decision if we learned ___.” Require every blank to be filled — the sentences force evidence to bear on a claim rather than merely reporting a number. Note the wording: </a:t>
             </a:r>
             <a:r>
               <a:rPr i="1" dirty="0"/>
@@ -2108,7 +2108,7 @@
             </a:r>
             <a:r>
               <a:rPr dirty="0"/>
-              <a:t xml:space="preserve">, not </a:t>
+              <a:t>, not </a:t>
             </a:r>
             <a:r>
               <a:rPr i="1" dirty="0"/>
@@ -2125,7 +2125,7 @@
           <a:p>
             <a:r>
               <a:rPr b="1" dirty="0"/>
-              <a:t xml:space="preserve">Emphasize what the table does not establish. </a:t>
+              <a:t>Emphasize what the table does not establish. </a:t>
             </a:r>
             <a:r>
               <a:rPr dirty="0"/>
@@ -2138,7 +2138,7 @@
           <a:p>
             <a:r>
               <a:rPr b="1" dirty="0"/>
-              <a:t xml:space="preserve">Make delay real. </a:t>
+              <a:t>Make delay real. </a:t>
             </a:r>
             <a:r>
               <a:rPr dirty="0"/>
@@ -2151,7 +2151,7 @@
           <a:p>
             <a:r>
               <a:rPr b="1" dirty="0"/>
-              <a:t xml:space="preserve">Do not force A or B. </a:t>
+              <a:t>Do not force A or B. </a:t>
             </a:r>
             <a:r>
               <a:rPr dirty="0"/>
@@ -2164,7 +2164,7 @@
           <a:p>
             <a:r>
               <a:rPr b="1" dirty="0"/>
-              <a:t xml:space="preserve">Push on vague requests for evidence. </a:t>
+              <a:t>Push on vague requests for evidence. </a:t>
             </a:r>
             <a:r>
               <a:rPr dirty="0"/>
@@ -2177,7 +2177,7 @@
           <a:p>
             <a:r>
               <a:rPr b="1" dirty="0"/>
-              <a:t xml:space="preserve">Push on properties. </a:t>
+              <a:t>Push on properties. </a:t>
             </a:r>
             <a:r>
               <a:rPr dirty="0"/>
@@ -2190,7 +2190,7 @@
           <a:p>
             <a:r>
               <a:rPr b="1" dirty="0"/>
-              <a:t xml:space="preserve">Push on metrics. </a:t>
+              <a:t>Push on metrics. </a:t>
             </a:r>
             <a:r>
               <a:rPr dirty="0"/>
@@ -2203,7 +2203,7 @@
           <a:p>
             <a:r>
               <a:rPr b="1" dirty="0"/>
-              <a:t xml:space="preserve">Look for the central tension. </a:t>
+              <a:t>Look for the central tension. </a:t>
             </a:r>
             <a:r>
               <a:rPr dirty="0"/>
@@ -2216,11 +2216,11 @@
           <a:p>
             <a:r>
               <a:rPr b="1" dirty="0"/>
-              <a:t xml:space="preserve">Debrief. </a:t>
+              <a:t>Debrief. </a:t>
             </a:r>
             <a:r>
               <a:rPr dirty="0"/>
-              <a:t xml:space="preserve">Ask two teams that made different decisions to defend them from the same evidence. Put their deliverables against each other. The interesting question is not </a:t>
+              <a:t>Ask two teams that made different decisions to defend them from the same evidence. Put their deliverables against each other. The interesting question is not </a:t>
             </a:r>
             <a:r>
               <a:rPr i="1" dirty="0"/>
@@ -2228,7 +2228,7 @@
             </a:r>
             <a:r>
               <a:rPr dirty="0"/>
-              <a:t xml:space="preserve"> but </a:t>
+              <a:t> but </a:t>
             </a:r>
             <a:r>
               <a:rPr i="1" dirty="0"/>
@@ -2236,7 +2236,7 @@
             </a:r>
             <a:r>
               <a:rPr dirty="0"/>
-              <a:t xml:space="preserve"> Transition: “You all received exactly the same observations. Why did you make different decisions?” Use the disagreement to introduce the next section: evidence does not mechanically determine action. Consequence, uncertainty, reversibility, and the cost of further information affect what action is justified.</a:t>
+              <a:t> Transition: “You all received exactly the same observations. Why did you make different decisions?” Use the disagreement to introduce the next section: evidence does not mechanically determine action. Consequence, uncertainty, reversibility, and the cost of further information affect what action is justified.</a:t>
             </a:r>
           </a:p>
           <a:p>
@@ -2310,7 +2310,7 @@
           <a:p>
             <a:r>
               <a:rPr dirty="0"/>
-              <a:t xml:space="preserve">0.25 minutes — </a:t>
+              <a:t>0.25 minutes — </a:t>
             </a:r>
             <a:r>
               <a:rPr i="1" dirty="0"/>
@@ -2445,7 +2445,7 @@
           <a:p>
             <a:r>
               <a:rPr dirty="0"/>
-              <a:t xml:space="preserve">1 minute — </a:t>
+              <a:t>1 minute — </a:t>
             </a:r>
             <a:r>
               <a:rPr i="1" dirty="0"/>
@@ -2651,7 +2651,7 @@
           <a:p>
             <a:r>
               <a:rPr dirty="0"/>
-              <a:t xml:space="preserve">2 minutes — </a:t>
+              <a:t>2 minutes — </a:t>
             </a:r>
             <a:r>
               <a:rPr i="1" dirty="0"/>
@@ -2717,7 +2717,7 @@
           <a:p>
             <a:r>
               <a:rPr dirty="0"/>
-              <a:t xml:space="preserve">1.5 minutes — </a:t>
+              <a:t>1.5 minutes — </a:t>
             </a:r>
             <a:r>
               <a:rPr i="1" dirty="0"/>
@@ -2783,7 +2783,7 @@
           <a:p>
             <a:r>
               <a:rPr dirty="0"/>
-              <a:t xml:space="preserve">2 minutes — </a:t>
+              <a:t>2 minutes — </a:t>
             </a:r>
             <a:r>
               <a:rPr i="1" dirty="0"/>
@@ -2867,7 +2867,7 @@
           <a:p>
             <a:r>
               <a:rPr dirty="0"/>
-              <a:t xml:space="preserve">0.3 minutes — </a:t>
+              <a:t>0.3 minutes — </a:t>
             </a:r>
             <a:r>
               <a:rPr i="1" dirty="0"/>
@@ -2927,7 +2927,7 @@
           <a:p>
             <a:r>
               <a:rPr dirty="0"/>
-              <a:t xml:space="preserve">1.5 minutes — </a:t>
+              <a:t>1.5 minutes — </a:t>
             </a:r>
             <a:r>
               <a:rPr i="1" dirty="0"/>
@@ -5770,7 +5770,7 @@
             </a:r>
             <a:r>
               <a:rPr lang="en-US" b="1" u="none" dirty="0"/>
-              <a:t xml:space="preserve">		Details</a:t>
+              <a:t>		Details</a:t>
             </a:r>
           </a:p>
           <a:p>
@@ -5947,7 +5947,7 @@
             </a:r>
             <a:r>
               <a:rPr lang="en-US" b="1" u="none" dirty="0"/>
-              <a:t xml:space="preserve">		Details</a:t>
+              <a:t>		Details</a:t>
             </a:r>
           </a:p>
           <a:p>
@@ -7358,7 +7358,7 @@
                   <a:srgbClr val="000000"/>
                 </a:solidFill>
               </a:rPr>
-              <a:t>What do we need to know?</a:t>
+              <a:t>Recap: What do we need to know?</a:t>
             </a:r>
           </a:p>
         </p:txBody>
@@ -7459,7 +7459,7 @@
                   <a:srgbClr val="8E6F3E"/>
                 </a:solidFill>
               </a:rPr>
-              <a:t xml:space="preserve">1   </a:t>
+              <a:t>1   </a:t>
             </a:r>
             <a:r>
               <a:rPr lang="en-US" sz="2000" b="1" i="0" dirty="0">
@@ -7475,7 +7475,7 @@
                   <a:srgbClr val="9A9A9A"/>
                 </a:solidFill>
               </a:rPr>
-              <a:t xml:space="preserve"> — </a:t>
+              <a:t> — </a:t>
             </a:r>
             <a:r>
               <a:rPr lang="en-US" sz="2000" b="0" i="0" dirty="0">
@@ -7524,7 +7524,7 @@
                   <a:srgbClr val="8E6F3E"/>
                 </a:solidFill>
               </a:rPr>
-              <a:t xml:space="preserve">2   </a:t>
+              <a:t>2   </a:t>
             </a:r>
             <a:r>
               <a:rPr lang="en-US" sz="2000" b="1" i="0" dirty="0">
@@ -7540,7 +7540,7 @@
                   <a:srgbClr val="9A9A9A"/>
                 </a:solidFill>
               </a:rPr>
-              <a:t xml:space="preserve"> — </a:t>
+              <a:t> — </a:t>
             </a:r>
             <a:r>
               <a:rPr lang="en-US" sz="2000" b="0" i="0" dirty="0">
@@ -7589,7 +7589,7 @@
                   <a:srgbClr val="8E6F3E"/>
                 </a:solidFill>
               </a:rPr>
-              <a:t xml:space="preserve">3   </a:t>
+              <a:t>3   </a:t>
             </a:r>
             <a:r>
               <a:rPr lang="en-US" sz="2000" b="1" i="0" dirty="0">
@@ -7605,7 +7605,7 @@
                   <a:srgbClr val="9A9A9A"/>
                 </a:solidFill>
               </a:rPr>
-              <a:t xml:space="preserve"> — </a:t>
+              <a:t> — </a:t>
             </a:r>
             <a:r>
               <a:rPr lang="en-US" sz="2000" b="0" i="0" dirty="0">
@@ -7654,7 +7654,7 @@
                   <a:srgbClr val="8E6F3E"/>
                 </a:solidFill>
               </a:rPr>
-              <a:t xml:space="preserve">4   </a:t>
+              <a:t>4   </a:t>
             </a:r>
             <a:r>
               <a:rPr lang="en-US" sz="2000" b="1" i="0" dirty="0">
@@ -7670,7 +7670,7 @@
                   <a:srgbClr val="9A9A9A"/>
                 </a:solidFill>
               </a:rPr>
-              <a:t xml:space="preserve"> — </a:t>
+              <a:t> — </a:t>
             </a:r>
             <a:r>
               <a:rPr lang="en-US" sz="2000" b="0" i="0" dirty="0">
@@ -7719,7 +7719,7 @@
                   <a:srgbClr val="8E6F3E"/>
                 </a:solidFill>
               </a:rPr>
-              <a:t xml:space="preserve">5   </a:t>
+              <a:t>5   </a:t>
             </a:r>
             <a:r>
               <a:rPr lang="en-US" sz="2000" b="1" i="0" dirty="0">
@@ -7735,7 +7735,7 @@
                   <a:srgbClr val="9A9A9A"/>
                 </a:solidFill>
               </a:rPr>
-              <a:t xml:space="preserve"> — </a:t>
+              <a:t> — </a:t>
             </a:r>
             <a:r>
               <a:rPr lang="en-US" sz="2000" b="0" i="0" dirty="0">
@@ -8438,7 +8438,23 @@
                   <a:srgbClr val="5C4826"/>
                 </a:solidFill>
               </a:rPr>
-              <a:t>A metric specifies how observations bear on some aspect of a property.</a:t>
+              <a:t>A </a:t>
+            </a:r>
+            <a:r>
+              <a:rPr lang="en-US" sz="2800" b="1" i="1" u="sng" dirty="0">
+                <a:solidFill>
+                  <a:srgbClr val="5C4826"/>
+                </a:solidFill>
+              </a:rPr>
+              <a:t>metric</a:t>
+            </a:r>
+            <a:r>
+              <a:rPr lang="en-US" sz="2000" b="0" i="0" dirty="0">
+                <a:solidFill>
+                  <a:srgbClr val="5C4826"/>
+                </a:solidFill>
+              </a:rPr>
+              <a:t> specifies how observations bear on some aspect of a property.</a:t>
             </a:r>
           </a:p>
         </p:txBody>
@@ -8477,7 +8493,23 @@
                   <a:srgbClr val="FFFFFF"/>
                 </a:solidFill>
               </a:rPr>
-              <a:t>The metric holds the modeling choice. The measurement supplies values.</a:t>
+              <a:t>The metric holds the modeling choice. The </a:t>
+            </a:r>
+            <a:r>
+              <a:rPr lang="en-US" sz="2800" i="1" dirty="0">
+                <a:solidFill>
+                  <a:srgbClr val="FFFFFF"/>
+                </a:solidFill>
+              </a:rPr>
+              <a:t>measurement</a:t>
+            </a:r>
+            <a:r>
+              <a:rPr lang="en-US" sz="2000" b="1" i="0" dirty="0">
+                <a:solidFill>
+                  <a:srgbClr val="FFFFFF"/>
+                </a:solidFill>
+              </a:rPr>
+              <a:t> supplies values.</a:t>
             </a:r>
           </a:p>
         </p:txBody>
@@ -9153,6 +9185,88 @@
           </a:p>
         </p:txBody>
       </p:sp>
+      <p:cxnSp>
+        <p:nvCxnSpPr>
+          <p:cNvPr id="5" name="Straight Arrow Connector 4">
+            <a:extLst>
+              <a:ext uri="{FF2B5EF4-FFF2-40B4-BE49-F238E27FC236}">
+                <a16:creationId xmlns:a16="http://schemas.microsoft.com/office/drawing/2014/main" id="{8A498575-94F6-0398-0B77-252F532EEB5C}"/>
+              </a:ext>
+            </a:extLst>
+          </p:cNvPr>
+          <p:cNvCxnSpPr/>
+          <p:nvPr/>
+        </p:nvCxnSpPr>
+        <p:spPr>
+          <a:xfrm flipV="1">
+            <a:off x="1538100" y="1874520"/>
+            <a:ext cx="1366020" cy="1865377"/>
+          </a:xfrm>
+          <a:prstGeom prst="straightConnector1">
+            <a:avLst/>
+          </a:prstGeom>
+          <a:ln w="76200">
+            <a:headEnd type="triangle" w="med" len="med"/>
+            <a:tailEnd type="none" w="med" len="med"/>
+          </a:ln>
+        </p:spPr>
+        <p:style>
+          <a:lnRef idx="1">
+            <a:schemeClr val="accent1"/>
+          </a:lnRef>
+          <a:fillRef idx="0">
+            <a:schemeClr val="accent1"/>
+          </a:fillRef>
+          <a:effectRef idx="0">
+            <a:schemeClr val="accent1"/>
+          </a:effectRef>
+          <a:fontRef idx="minor">
+            <a:schemeClr val="tx1"/>
+          </a:fontRef>
+        </p:style>
+      </p:cxnSp>
+      <p:cxnSp>
+        <p:nvCxnSpPr>
+          <p:cNvPr id="6" name="Straight Arrow Connector 5">
+            <a:extLst>
+              <a:ext uri="{FF2B5EF4-FFF2-40B4-BE49-F238E27FC236}">
+                <a16:creationId xmlns:a16="http://schemas.microsoft.com/office/drawing/2014/main" id="{91BF9832-74DE-440A-0EFC-FED2CE059935}"/>
+              </a:ext>
+            </a:extLst>
+          </p:cNvPr>
+          <p:cNvCxnSpPr>
+            <a:cxnSpLocks/>
+          </p:cNvCxnSpPr>
+          <p:nvPr/>
+        </p:nvCxnSpPr>
+        <p:spPr>
+          <a:xfrm flipH="1" flipV="1">
+            <a:off x="4694520" y="1874520"/>
+            <a:ext cx="825747" cy="3977640"/>
+          </a:xfrm>
+          <a:prstGeom prst="straightConnector1">
+            <a:avLst/>
+          </a:prstGeom>
+          <a:ln w="76200">
+            <a:headEnd type="triangle" w="med" len="med"/>
+            <a:tailEnd type="none" w="med" len="med"/>
+          </a:ln>
+        </p:spPr>
+        <p:style>
+          <a:lnRef idx="1">
+            <a:schemeClr val="accent1"/>
+          </a:lnRef>
+          <a:fillRef idx="0">
+            <a:schemeClr val="accent1"/>
+          </a:fillRef>
+          <a:effectRef idx="0">
+            <a:schemeClr val="accent1"/>
+          </a:effectRef>
+          <a:fontRef idx="minor">
+            <a:schemeClr val="tx1"/>
+          </a:fontRef>
+        </p:style>
+      </p:cxnSp>
     </p:spTree>
   </p:cSld>
   <p:clrMapOvr>
@@ -9179,7 +9293,7 @@
                             </p:stCondLst>
                             <p:childTnLst>
                               <p:par>
-                                <p:cTn id="5" presetID="1" presetClass="entr" presetSubtype="0" fill="hold" grpId="0" nodeType="clickEffect">
+                                <p:cTn id="5" presetID="1" presetClass="entr" presetSubtype="0" fill="hold" nodeType="clickEffect">
                                   <p:stCondLst>
                                     <p:cond delay="0"/>
                                   </p:stCondLst>
@@ -9192,7 +9306,106 @@
                                           </p:stCondLst>
                                         </p:cTn>
                                         <p:tgtEl>
+                                          <p:spTgt spid="5"/>
+                                        </p:tgtEl>
+                                        <p:attrNameLst>
+                                          <p:attrName>style.visibility</p:attrName>
+                                        </p:attrNameLst>
+                                      </p:cBhvr>
+                                      <p:to>
+                                        <p:strVal val="visible"/>
+                                      </p:to>
+                                    </p:set>
+                                  </p:childTnLst>
+                                </p:cTn>
+                              </p:par>
+                              <p:par>
+                                <p:cTn id="7" presetID="1" presetClass="entr" presetSubtype="0" fill="hold" grpId="0" nodeType="withEffect">
+                                  <p:stCondLst>
+                                    <p:cond delay="0"/>
+                                  </p:stCondLst>
+                                  <p:childTnLst>
+                                    <p:set>
+                                      <p:cBhvr>
+                                        <p:cTn id="8" dur="1" fill="hold">
+                                          <p:stCondLst>
+                                            <p:cond delay="0"/>
+                                          </p:stCondLst>
+                                        </p:cTn>
+                                        <p:tgtEl>
+                                          <p:spTgt spid="114"/>
+                                        </p:tgtEl>
+                                        <p:attrNameLst>
+                                          <p:attrName>style.visibility</p:attrName>
+                                        </p:attrNameLst>
+                                      </p:cBhvr>
+                                      <p:to>
+                                        <p:strVal val="visible"/>
+                                      </p:to>
+                                    </p:set>
+                                  </p:childTnLst>
+                                </p:cTn>
+                              </p:par>
+                            </p:childTnLst>
+                          </p:cTn>
+                        </p:par>
+                      </p:childTnLst>
+                    </p:cTn>
+                  </p:par>
+                  <p:par>
+                    <p:cTn id="9" fill="hold">
+                      <p:stCondLst>
+                        <p:cond delay="indefinite"/>
+                      </p:stCondLst>
+                      <p:childTnLst>
+                        <p:par>
+                          <p:cTn id="10" fill="hold">
+                            <p:stCondLst>
+                              <p:cond delay="0"/>
+                            </p:stCondLst>
+                            <p:childTnLst>
+                              <p:par>
+                                <p:cTn id="11" presetID="1" presetClass="entr" presetSubtype="0" fill="hold" grpId="0" nodeType="clickEffect">
+                                  <p:stCondLst>
+                                    <p:cond delay="0"/>
+                                  </p:stCondLst>
+                                  <p:childTnLst>
+                                    <p:set>
+                                      <p:cBhvr>
+                                        <p:cTn id="12" dur="1" fill="hold">
+                                          <p:stCondLst>
+                                            <p:cond delay="0"/>
+                                          </p:stCondLst>
+                                        </p:cTn>
+                                        <p:tgtEl>
                                           <p:spTgt spid="116"/>
+                                        </p:tgtEl>
+                                        <p:attrNameLst>
+                                          <p:attrName>style.visibility</p:attrName>
+                                        </p:attrNameLst>
+                                      </p:cBhvr>
+                                      <p:to>
+                                        <p:strVal val="visible"/>
+                                      </p:to>
+                                    </p:set>
+                                  </p:childTnLst>
+                                </p:cTn>
+                              </p:par>
+                              <p:par>
+                                <p:cTn id="13" presetID="1" presetClass="entr" presetSubtype="0" fill="hold" nodeType="withEffect">
+                                  <p:stCondLst>
+                                    <p:cond delay="0"/>
+                                  </p:stCondLst>
+                                  <p:childTnLst>
+                                    <p:set>
+                                      <p:cBhvr>
+                                        <p:cTn id="14" dur="1" fill="hold">
+                                          <p:stCondLst>
+                                            <p:cond delay="0"/>
+                                          </p:stCondLst>
+                                        </p:cTn>
+                                        <p:tgtEl>
+                                          <p:spTgt spid="6"/>
                                         </p:tgtEl>
                                         <p:attrNameLst>
                                           <p:attrName>style.visibility</p:attrName>
@@ -9233,6 +9446,7 @@
       </p:par>
     </p:tnLst>
     <p:bldLst>
+      <p:bldP spid="114" grpId="0" animBg="1"/>
       <p:bldP spid="116" grpId="0" animBg="1"/>
     </p:bldLst>
   </p:timing>
@@ -9972,7 +10186,7 @@
                   <a:srgbClr val="5C4826"/>
                 </a:solidFill>
               </a:rPr>
-              <a:t xml:space="preserve">service = 180 ms </a:t>
+              <a:t>service = 180 ms </a:t>
             </a:r>
             <a:r>
               <a:rPr lang="en-US" sz="2000" b="0" i="1" dirty="0">
@@ -9996,7 +10210,7 @@
                   <a:srgbClr val="5C4826"/>
                 </a:solidFill>
               </a:rPr>
-              <a:t xml:space="preserve">queueing = 130 ms </a:t>
+              <a:t>queueing = 130 ms </a:t>
             </a:r>
             <a:r>
               <a:rPr lang="en-US" sz="2000" b="0" i="1" dirty="0">
@@ -10020,7 +10234,7 @@
                   <a:srgbClr val="5C4826"/>
                 </a:solidFill>
               </a:rPr>
-              <a:t xml:space="preserve">communication = 90 ms </a:t>
+              <a:t>communication = 90 ms </a:t>
             </a:r>
             <a:r>
               <a:rPr lang="en-US" sz="2000" b="0" i="1" dirty="0">
@@ -10522,7 +10736,7 @@
                   <a:srgbClr val="9A9A9A"/>
                 </a:solidFill>
               </a:rPr>
-              <a:t xml:space="preserve">  ·  </a:t>
+              <a:t>  ·  </a:t>
             </a:r>
             <a:r>
               <a:rPr sz="2000" b="1" i="0">
@@ -10538,7 +10752,7 @@
                   <a:srgbClr val="9A9A9A"/>
                 </a:solidFill>
               </a:rPr>
-              <a:t xml:space="preserve">  ·  </a:t>
+              <a:t>  ·  </a:t>
             </a:r>
             <a:r>
               <a:rPr sz="2000" b="1" i="0">
@@ -13594,7 +13808,7 @@
                   <a:srgbClr val="8E6F3E"/>
                 </a:solidFill>
               </a:rPr>
-              <a:t xml:space="preserve">INDIRECT </a:t>
+              <a:t>INDIRECT </a:t>
             </a:r>
             <a:r>
               <a:rPr lang="en-US" sz="2000" b="1" dirty="0">
@@ -14479,7 +14693,7 @@
                   <a:srgbClr val="9A9A9A"/>
                 </a:solidFill>
               </a:rPr>
-              <a:t xml:space="preserve">  →  </a:t>
+              <a:t>  →  </a:t>
             </a:r>
             <a:r>
               <a:rPr lang="en-US" sz="2000" b="0" i="0" dirty="0">
@@ -14536,7 +14750,7 @@
                   <a:srgbClr val="9A9A9A"/>
                 </a:solidFill>
               </a:rPr>
-              <a:t xml:space="preserve">  →  </a:t>
+              <a:t>  →  </a:t>
             </a:r>
             <a:r>
               <a:rPr lang="en-US" sz="2000" b="0" i="0" dirty="0">
@@ -14593,7 +14807,7 @@
                   <a:srgbClr val="9A9A9A"/>
                 </a:solidFill>
               </a:rPr>
-              <a:t xml:space="preserve">  →  </a:t>
+              <a:t>  →  </a:t>
             </a:r>
             <a:r>
               <a:rPr lang="en-US" sz="2000" b="0" i="0" dirty="0">
@@ -17039,7 +17253,7 @@
                   <a:srgbClr val="9A9A9A"/>
                 </a:solidFill>
               </a:rPr>
-              <a:t xml:space="preserve">  ·  </a:t>
+              <a:t>  ·  </a:t>
             </a:r>
             <a:r>
               <a:rPr lang="en-US" sz="2000" b="1" i="0" dirty="0">
@@ -17055,7 +17269,7 @@
                   <a:srgbClr val="9A9A9A"/>
                 </a:solidFill>
               </a:rPr>
-              <a:t xml:space="preserve">  ·  </a:t>
+              <a:t>  ·  </a:t>
             </a:r>
             <a:r>
               <a:rPr lang="en-US" sz="2000" b="1" i="0" dirty="0">
@@ -17737,7 +17951,7 @@
                   <a:srgbClr val="5C4826"/>
                 </a:solidFill>
               </a:rPr>
-              <a:t xml:space="preserve">commits </a:t>
+              <a:t>commits </a:t>
             </a:r>
             <a:r>
               <a:rPr lang="en-US" sz="2000" dirty="0">
@@ -17746,7 +17960,7 @@
                 </a:solidFill>
                 <a:sym typeface="Wingdings" pitchFamily="2" charset="2"/>
               </a:rPr>
-              <a:t xml:space="preserve"> </a:t>
+              <a:t> </a:t>
             </a:r>
             <a:r>
               <a:rPr lang="en-US" sz="2000" b="0" i="0" dirty="0">
@@ -17799,7 +18013,7 @@
                   <a:srgbClr val="555960"/>
                 </a:solidFill>
               </a:rPr>
-              <a:t xml:space="preserve">Surrogation: </a:t>
+              <a:t>Surrogation: </a:t>
             </a:r>
             <a:r>
               <a:rPr lang="en-US" sz="2000" b="0" i="1" dirty="0">
@@ -17807,7 +18021,7 @@
                   <a:srgbClr val="555960"/>
                 </a:solidFill>
               </a:rPr>
-              <a:t xml:space="preserve">we begin treating commits as though they </a:t>
+              <a:t>we begin treating commits as though they </a:t>
             </a:r>
           </a:p>
           <a:p>
@@ -17831,7 +18045,7 @@
                   <a:srgbClr val="555960"/>
                 </a:solidFill>
               </a:rPr>
-              <a:t xml:space="preserve"> useful output</a:t>
+              <a:t> useful output</a:t>
             </a:r>
           </a:p>
         </p:txBody>
@@ -17907,7 +18121,7 @@
                   <a:srgbClr val="5C4826"/>
                 </a:solidFill>
               </a:rPr>
-              <a:t xml:space="preserve">Target: increase </a:t>
+              <a:t>Target: increase </a:t>
             </a:r>
             <a:endParaRPr lang="en-US" sz="2000" b="1" dirty="0">
               <a:solidFill>
@@ -17942,7 +18156,7 @@
                   <a:srgbClr val="5C4826"/>
                 </a:solidFill>
               </a:rPr>
-              <a:t xml:space="preserve">; </a:t>
+              <a:t>; </a:t>
             </a:r>
             <a:r>
               <a:rPr sz="2000" b="0" i="0" dirty="0">
@@ -17976,7 +18190,7 @@
                   <a:srgbClr val="555960"/>
                 </a:solidFill>
               </a:rPr>
-              <a:t xml:space="preserve">Goodhart: </a:t>
+              <a:t>Goodhart: </a:t>
             </a:r>
             <a:r>
               <a:rPr lang="en-US" sz="2000" b="0" i="1" dirty="0">
@@ -17984,7 +18198,7 @@
                   <a:srgbClr val="555960"/>
                 </a:solidFill>
               </a:rPr>
-              <a:t xml:space="preserve">once commits become </a:t>
+              <a:t>once commits become </a:t>
             </a:r>
           </a:p>
           <a:p>
@@ -17997,7 +18211,7 @@
                   <a:srgbClr val="555960"/>
                 </a:solidFill>
               </a:rPr>
-              <a:t xml:space="preserve">the target, the empirical </a:t>
+              <a:t>the target, the empirical </a:t>
             </a:r>
           </a:p>
           <a:p>
@@ -18654,7 +18868,7 @@
                   <a:srgbClr val="5C4826"/>
                 </a:solidFill>
               </a:rPr>
-              <a:t xml:space="preserve">A metric acquires meaning through the property, </a:t>
+              <a:t>A metric acquires meaning through the property, </a:t>
             </a:r>
           </a:p>
           <a:p>
@@ -18793,7 +19007,7 @@
                   <a:srgbClr val="8E6F3E"/>
                 </a:solidFill>
               </a:rPr>
-              <a:t xml:space="preserve">1    </a:t>
+              <a:t>1    </a:t>
             </a:r>
             <a:r>
               <a:rPr lang="en-US" sz="2400" b="0" i="0" dirty="0">
@@ -18842,7 +19056,7 @@
                   <a:srgbClr val="8E6F3E"/>
                 </a:solidFill>
               </a:rPr>
-              <a:t xml:space="preserve">2    </a:t>
+              <a:t>2    </a:t>
             </a:r>
             <a:r>
               <a:rPr lang="en-US" sz="2400" b="0" i="0" dirty="0">
@@ -18891,7 +19105,7 @@
                   <a:srgbClr val="8E6F3E"/>
                 </a:solidFill>
               </a:rPr>
-              <a:t xml:space="preserve">3    </a:t>
+              <a:t>3    </a:t>
             </a:r>
             <a:r>
               <a:rPr lang="en-US" sz="2400" b="0" i="0" dirty="0">
@@ -18940,7 +19154,7 @@
                   <a:srgbClr val="8E6F3E"/>
                 </a:solidFill>
               </a:rPr>
-              <a:t xml:space="preserve">4    </a:t>
+              <a:t>4    </a:t>
             </a:r>
             <a:r>
               <a:rPr lang="en-US" sz="2400" b="0" i="0" dirty="0">
@@ -20089,7 +20303,7 @@
                   <a:srgbClr val="8E6F3E"/>
                 </a:solidFill>
               </a:rPr>
-              <a:t xml:space="preserve">1  </a:t>
+              <a:t>1  </a:t>
             </a:r>
             <a:r>
               <a:rPr lang="en-US" sz="1300" b="0" i="0" dirty="0">
@@ -20116,7 +20330,7 @@
                   <a:srgbClr val="8E6F3E"/>
                 </a:solidFill>
               </a:rPr>
-              <a:t xml:space="preserve">2  </a:t>
+              <a:t>2  </a:t>
             </a:r>
             <a:r>
               <a:rPr lang="en-US" sz="1300" b="0" i="0" dirty="0">
@@ -20143,7 +20357,7 @@
                   <a:srgbClr val="8E6F3E"/>
                 </a:solidFill>
               </a:rPr>
-              <a:t xml:space="preserve">3  </a:t>
+              <a:t>3  </a:t>
             </a:r>
             <a:r>
               <a:rPr lang="en-US" sz="1300" b="0" i="0" dirty="0">
@@ -20170,7 +20384,7 @@
                   <a:srgbClr val="8E6F3E"/>
                 </a:solidFill>
               </a:rPr>
-              <a:t xml:space="preserve">4  </a:t>
+              <a:t>4  </a:t>
             </a:r>
             <a:r>
               <a:rPr lang="en-US" sz="1300" b="0" i="0" dirty="0">
@@ -20197,7 +20411,7 @@
                   <a:srgbClr val="8E6F3E"/>
                 </a:solidFill>
               </a:rPr>
-              <a:t xml:space="preserve">5  </a:t>
+              <a:t>5  </a:t>
             </a:r>
             <a:r>
               <a:rPr lang="en-US" sz="1300" b="0" i="0" dirty="0">
@@ -20224,7 +20438,7 @@
                   <a:srgbClr val="8E6F3E"/>
                 </a:solidFill>
               </a:rPr>
-              <a:t xml:space="preserve">6  </a:t>
+              <a:t>6  </a:t>
             </a:r>
             <a:r>
               <a:rPr lang="en-US" sz="1300" b="1" i="0" dirty="0">
@@ -23268,7 +23482,7 @@
                   <a:srgbClr val="555960"/>
                 </a:solidFill>
               </a:rPr>
-              <a:t xml:space="preserve">outcomes </a:t>
+              <a:t>outcomes </a:t>
             </a:r>
             <a:r>
               <a:rPr lang="en-US" sz="2000" dirty="0">
@@ -23276,7 +23490,7 @@
                   <a:srgbClr val="555960"/>
                 </a:solidFill>
               </a:rPr>
-              <a:t xml:space="preserve">are a </a:t>
+              <a:t>are a </a:t>
             </a:r>
             <a:r>
               <a:rPr lang="en-US" sz="2000" b="0" i="0" dirty="0">
@@ -23457,7 +23671,7 @@
                   <a:srgbClr val="5C4826"/>
                 </a:solidFill>
               </a:rPr>
-              <a:t xml:space="preserve"> against a bound of </a:t>
+              <a:t> against a bound of </a:t>
             </a:r>
             <a:r>
               <a:rPr lang="en-US" sz="2000" b="1" i="0" dirty="0">
@@ -23543,7 +23757,7 @@
                   <a:srgbClr val="5C4826"/>
                 </a:solidFill>
               </a:rPr>
-              <a:t xml:space="preserve">What happens if </a:t>
+              <a:t>What happens if </a:t>
             </a:r>
             <a:endParaRPr lang="en-US" sz="2000" dirty="0">
               <a:solidFill>
@@ -23717,7 +23931,7 @@
                   <a:srgbClr val="5C4826"/>
                 </a:solidFill>
               </a:rPr>
-              <a:t xml:space="preserve">Can consequences </a:t>
+              <a:t>Can consequences </a:t>
             </a:r>
           </a:p>
           <a:p>
@@ -23765,7 +23979,7 @@
                   <a:srgbClr val="555960"/>
                 </a:solidFill>
               </a:rPr>
-              <a:t xml:space="preserve">The same margin may be comfortable in a game </a:t>
+              <a:t>The same margin may be comfortable in a game </a:t>
             </a:r>
             <a:endParaRPr lang="en-US" sz="2000" b="0" i="1" dirty="0">
               <a:solidFill>
@@ -25573,7 +25787,7 @@
                   <a:srgbClr val="5C4826"/>
                 </a:solidFill>
               </a:rPr>
-              <a:t xml:space="preserve">Engineering is the discipline of exercising </a:t>
+              <a:t>Engineering is the discipline of exercising </a:t>
             </a:r>
           </a:p>
           <a:p>
@@ -25639,7 +25853,7 @@
                   <a:srgbClr val="555960"/>
                 </a:solidFill>
               </a:rPr>
-              <a:t xml:space="preserve">Engineering judgment determines what </a:t>
+              <a:t>Engineering judgment determines what </a:t>
             </a:r>
           </a:p>
           <a:p>
@@ -26074,7 +26288,7 @@
                   <a:srgbClr val="5C4826"/>
                 </a:solidFill>
               </a:rPr>
-              <a:t xml:space="preserve">A good engineering decision is the decision </a:t>
+              <a:t>A good engineering decision is the decision </a:t>
             </a:r>
             <a:r>
               <a:rPr lang="en-US" sz="2000" b="1" i="0" dirty="0">
@@ -26082,7 +26296,7 @@
                   <a:srgbClr val="5C4826"/>
                 </a:solidFill>
               </a:rPr>
-              <a:t xml:space="preserve">best justified </a:t>
+              <a:t>best justified </a:t>
             </a:r>
           </a:p>
           <a:p>
@@ -26201,7 +26415,7 @@
                   <a:srgbClr val="9A9A9A"/>
                 </a:solidFill>
               </a:rPr>
-              <a:t xml:space="preserve">  ·  </a:t>
+              <a:t>  ·  </a:t>
             </a:r>
             <a:r>
               <a:rPr lang="en-US" sz="2000" b="1" i="0" dirty="0">
@@ -26217,7 +26431,7 @@
                   <a:srgbClr val="9A9A9A"/>
                 </a:solidFill>
               </a:rPr>
-              <a:t xml:space="preserve">  ·  </a:t>
+              <a:t>  ·  </a:t>
             </a:r>
             <a:r>
               <a:rPr lang="en-US" sz="2000" b="1" i="0" dirty="0">
@@ -26299,7 +26513,7 @@
                   <a:srgbClr val="000000"/>
                 </a:solidFill>
               </a:rPr>
-              <a:t xml:space="preserve">No. </a:t>
+              <a:t>No. </a:t>
             </a:r>
             <a:r>
               <a:rPr lang="en-US" sz="2000" i="1" dirty="0">
@@ -26574,15 +26788,87 @@
                                   </p:childTnLst>
                                 </p:cTn>
                               </p:par>
+                            </p:childTnLst>
+                          </p:cTn>
+                        </p:par>
+                      </p:childTnLst>
+                    </p:cTn>
+                  </p:par>
+                  <p:par>
+                    <p:cTn id="11" fill="hold">
+                      <p:stCondLst>
+                        <p:cond delay="indefinite"/>
+                      </p:stCondLst>
+                      <p:childTnLst>
+                        <p:par>
+                          <p:cTn id="12" fill="hold">
+                            <p:stCondLst>
+                              <p:cond delay="0"/>
+                            </p:stCondLst>
+                            <p:childTnLst>
                               <p:par>
-                                <p:cTn id="11" presetID="10" presetClass="entr" presetSubtype="0" fill="hold" nodeType="withEffect">
+                                <p:cTn id="13" presetID="1" presetClass="entr" presetSubtype="0" fill="hold" grpId="0" nodeType="clickEffect">
                                   <p:stCondLst>
                                     <p:cond delay="0"/>
                                   </p:stCondLst>
                                   <p:childTnLst>
                                     <p:set>
                                       <p:cBhvr>
-                                        <p:cTn id="12" dur="1" fill="hold">
+                                        <p:cTn id="14" dur="1" fill="hold">
+                                          <p:stCondLst>
+                                            <p:cond delay="0"/>
+                                          </p:stCondLst>
+                                        </p:cTn>
+                                        <p:tgtEl>
+                                          <p:spTgt spid="107"/>
+                                        </p:tgtEl>
+                                        <p:attrNameLst>
+                                          <p:attrName>style.visibility</p:attrName>
+                                        </p:attrNameLst>
+                                      </p:cBhvr>
+                                      <p:to>
+                                        <p:strVal val="visible"/>
+                                      </p:to>
+                                    </p:set>
+                                  </p:childTnLst>
+                                </p:cTn>
+                              </p:par>
+                              <p:par>
+                                <p:cTn id="15" presetID="1" presetClass="entr" presetSubtype="0" fill="hold" grpId="0" nodeType="withEffect">
+                                  <p:stCondLst>
+                                    <p:cond delay="0"/>
+                                  </p:stCondLst>
+                                  <p:childTnLst>
+                                    <p:set>
+                                      <p:cBhvr>
+                                        <p:cTn id="16" dur="1" fill="hold">
+                                          <p:stCondLst>
+                                            <p:cond delay="0"/>
+                                          </p:stCondLst>
+                                        </p:cTn>
+                                        <p:tgtEl>
+                                          <p:spTgt spid="106"/>
+                                        </p:tgtEl>
+                                        <p:attrNameLst>
+                                          <p:attrName>style.visibility</p:attrName>
+                                        </p:attrNameLst>
+                                      </p:cBhvr>
+                                      <p:to>
+                                        <p:strVal val="visible"/>
+                                      </p:to>
+                                    </p:set>
+                                  </p:childTnLst>
+                                </p:cTn>
+                              </p:par>
+                              <p:par>
+                                <p:cTn id="17" presetID="1" presetClass="entr" presetSubtype="0" fill="hold" grpId="0" nodeType="withEffect">
+                                  <p:stCondLst>
+                                    <p:cond delay="0"/>
+                                  </p:stCondLst>
+                                  <p:childTnLst>
+                                    <p:set>
+                                      <p:cBhvr>
+                                        <p:cTn id="18" dur="1" fill="hold">
                                           <p:stCondLst>
                                             <p:cond delay="0"/>
                                           </p:stCondLst>
@@ -26598,84 +26884,6 @@
                                         <p:strVal val="visible"/>
                                       </p:to>
                                     </p:set>
-                                    <p:animEffect transition="in" filter="fade">
-                                      <p:cBhvr>
-                                        <p:cTn id="13" dur="500"/>
-                                        <p:tgtEl>
-                                          <p:spTgt spid="105"/>
-                                        </p:tgtEl>
-                                      </p:cBhvr>
-                                    </p:animEffect>
-                                  </p:childTnLst>
-                                </p:cTn>
-                              </p:par>
-                              <p:par>
-                                <p:cTn id="14" presetID="10" presetClass="entr" presetSubtype="0" fill="hold" nodeType="withEffect">
-                                  <p:stCondLst>
-                                    <p:cond delay="0"/>
-                                  </p:stCondLst>
-                                  <p:childTnLst>
-                                    <p:set>
-                                      <p:cBhvr>
-                                        <p:cTn id="15" dur="1" fill="hold">
-                                          <p:stCondLst>
-                                            <p:cond delay="0"/>
-                                          </p:stCondLst>
-                                        </p:cTn>
-                                        <p:tgtEl>
-                                          <p:spTgt spid="106"/>
-                                        </p:tgtEl>
-                                        <p:attrNameLst>
-                                          <p:attrName>style.visibility</p:attrName>
-                                        </p:attrNameLst>
-                                      </p:cBhvr>
-                                      <p:to>
-                                        <p:strVal val="visible"/>
-                                      </p:to>
-                                    </p:set>
-                                    <p:animEffect transition="in" filter="fade">
-                                      <p:cBhvr>
-                                        <p:cTn id="16" dur="500"/>
-                                        <p:tgtEl>
-                                          <p:spTgt spid="106"/>
-                                        </p:tgtEl>
-                                      </p:cBhvr>
-                                    </p:animEffect>
-                                  </p:childTnLst>
-                                </p:cTn>
-                              </p:par>
-                              <p:par>
-                                <p:cTn id="17" presetID="10" presetClass="entr" presetSubtype="0" fill="hold" nodeType="withEffect">
-                                  <p:stCondLst>
-                                    <p:cond delay="0"/>
-                                  </p:stCondLst>
-                                  <p:childTnLst>
-                                    <p:set>
-                                      <p:cBhvr>
-                                        <p:cTn id="18" dur="1" fill="hold">
-                                          <p:stCondLst>
-                                            <p:cond delay="0"/>
-                                          </p:stCondLst>
-                                        </p:cTn>
-                                        <p:tgtEl>
-                                          <p:spTgt spid="107"/>
-                                        </p:tgtEl>
-                                        <p:attrNameLst>
-                                          <p:attrName>style.visibility</p:attrName>
-                                        </p:attrNameLst>
-                                      </p:cBhvr>
-                                      <p:to>
-                                        <p:strVal val="visible"/>
-                                      </p:to>
-                                    </p:set>
-                                    <p:animEffect transition="in" filter="fade">
-                                      <p:cBhvr>
-                                        <p:cTn id="19" dur="500"/>
-                                        <p:tgtEl>
-                                          <p:spTgt spid="107"/>
-                                        </p:tgtEl>
-                                      </p:cBhvr>
-                                    </p:animEffect>
                                   </p:childTnLst>
                                 </p:cTn>
                               </p:par>
@@ -26706,6 +26914,11 @@
         </p:cTn>
       </p:par>
     </p:tnLst>
+    <p:bldLst>
+      <p:bldP spid="106" grpId="0" animBg="1"/>
+      <p:bldP spid="107" grpId="0"/>
+      <p:bldP spid="105" grpId="0" animBg="1"/>
+    </p:bldLst>
   </p:timing>
 </p:sld>
 </file>
@@ -27256,7 +27469,7 @@
                   <a:srgbClr val="5C4826"/>
                 </a:solidFill>
               </a:rPr>
-              <a:t xml:space="preserve">A model identifies relationships we believe matter, </a:t>
+              <a:t>A model identifies relationships we believe matter, </a:t>
             </a:r>
           </a:p>
           <a:p>
@@ -27277,7 +27490,7 @@
                   <a:srgbClr val="5C4826"/>
                 </a:solidFill>
               </a:rPr>
-              <a:t xml:space="preserve"> their consequences can be fully observed.</a:t>
+              <a:t> their consequences can be fully observed.</a:t>
             </a:r>
           </a:p>
         </p:txBody>
@@ -27410,9 +27623,6 @@
                     <p:cTn id="3" fill="hold">
                       <p:stCondLst>
                         <p:cond delay="indefinite"/>
-                        <p:cond evt="onBegin" delay="0">
-                          <p:tn val="2"/>
-                        </p:cond>
                       </p:stCondLst>
                       <p:childTnLst>
                         <p:par>
@@ -27422,7 +27632,7 @@
                             </p:stCondLst>
                             <p:childTnLst>
                               <p:par>
-                                <p:cTn id="5" presetID="10" presetClass="entr" presetSubtype="0" fill="hold" nodeType="withEffect">
+                                <p:cTn id="5" presetID="1" presetClass="entr" presetSubtype="0" fill="hold" grpId="0" nodeType="clickEffect">
                                   <p:stCondLst>
                                     <p:cond delay="0"/>
                                   </p:stCondLst>
@@ -27430,6 +27640,33 @@
                                     <p:set>
                                       <p:cBhvr>
                                         <p:cTn id="6" dur="1" fill="hold">
+                                          <p:stCondLst>
+                                            <p:cond delay="0"/>
+                                          </p:stCondLst>
+                                        </p:cTn>
+                                        <p:tgtEl>
+                                          <p:spTgt spid="107"/>
+                                        </p:tgtEl>
+                                        <p:attrNameLst>
+                                          <p:attrName>style.visibility</p:attrName>
+                                        </p:attrNameLst>
+                                      </p:cBhvr>
+                                      <p:to>
+                                        <p:strVal val="visible"/>
+                                      </p:to>
+                                    </p:set>
+                                  </p:childTnLst>
+                                </p:cTn>
+                              </p:par>
+                              <p:par>
+                                <p:cTn id="7" presetID="1" presetClass="entr" presetSubtype="0" fill="hold" grpId="0" nodeType="withEffect">
+                                  <p:stCondLst>
+                                    <p:cond delay="0"/>
+                                  </p:stCondLst>
+                                  <p:childTnLst>
+                                    <p:set>
+                                      <p:cBhvr>
+                                        <p:cTn id="8" dur="1" fill="hold">
                                           <p:stCondLst>
                                             <p:cond delay="0"/>
                                           </p:stCondLst>
@@ -27445,14 +27682,6 @@
                                         <p:strVal val="visible"/>
                                       </p:to>
                                     </p:set>
-                                    <p:animEffect transition="in" filter="fade">
-                                      <p:cBhvr>
-                                        <p:cTn id="7" dur="500"/>
-                                        <p:tgtEl>
-                                          <p:spTgt spid="4"/>
-                                        </p:tgtEl>
-                                      </p:cBhvr>
-                                    </p:animEffect>
                                   </p:childTnLst>
                                 </p:cTn>
                               </p:par>
@@ -27483,6 +27712,10 @@
         </p:cTn>
       </p:par>
     </p:tnLst>
+    <p:bldLst>
+      <p:bldP spid="107" grpId="0"/>
+      <p:bldP spid="4" grpId="0" animBg="1"/>
+    </p:bldLst>
   </p:timing>
 </p:sld>
 </file>
@@ -28225,8 +28458,8 @@
         </p:nvSpPr>
         <p:spPr>
           <a:xfrm>
-            <a:off x="3474720" y="5852160"/>
-            <a:ext cx="5394960" cy="640080"/>
+            <a:off x="3474720" y="6018311"/>
+            <a:ext cx="5394960" cy="307777"/>
           </a:xfrm>
           <a:prstGeom prst="rect">
             <a:avLst/>
@@ -28256,21 +28489,21 @@
               </a:rPr>
               <a:t>,</a:t>
             </a:r>
-            <a:endParaRPr sz="2000" b="0" i="0" dirty="0">
-              <a:solidFill>
-                <a:srgbClr val="555960"/>
-              </a:solidFill>
-            </a:endParaRPr>
-          </a:p>
-          <a:p>
-            <a:pPr algn="l"/>
+            <a:r>
+              <a:rPr lang="en-US" sz="2000" dirty="0">
+                <a:solidFill>
+                  <a:srgbClr val="555960"/>
+                </a:solidFill>
+              </a:rPr>
+              <a:t> </a:t>
+            </a:r>
             <a:r>
               <a:rPr sz="2000" b="0" i="0" dirty="0">
                 <a:solidFill>
                   <a:srgbClr val="555960"/>
                 </a:solidFill>
               </a:rPr>
-              <a:t>not from the evidence alone</a:t>
+              <a:t>not evidence</a:t>
             </a:r>
           </a:p>
         </p:txBody>
@@ -30619,7 +30852,7 @@
                                           </p:stCondLst>
                                         </p:cTn>
                                         <p:tgtEl>
-                                          <p:spTgt spid="19"/>
+                                          <p:spTgt spid="40"/>
                                         </p:tgtEl>
                                         <p:attrNameLst>
                                           <p:attrName>style.visibility</p:attrName>
@@ -30633,59 +30866,6 @@
                                       <p:cBhvr>
                                         <p:cTn id="53" dur="500"/>
                                         <p:tgtEl>
-                                          <p:spTgt spid="19"/>
-                                        </p:tgtEl>
-                                      </p:cBhvr>
-                                    </p:animEffect>
-                                  </p:childTnLst>
-                                </p:cTn>
-                              </p:par>
-                            </p:childTnLst>
-                          </p:cTn>
-                        </p:par>
-                      </p:childTnLst>
-                    </p:cTn>
-                  </p:par>
-                  <p:par>
-                    <p:cTn id="54" fill="hold">
-                      <p:stCondLst>
-                        <p:cond delay="indefinite"/>
-                      </p:stCondLst>
-                      <p:childTnLst>
-                        <p:par>
-                          <p:cTn id="55" fill="hold">
-                            <p:stCondLst>
-                              <p:cond delay="0"/>
-                            </p:stCondLst>
-                            <p:childTnLst>
-                              <p:par>
-                                <p:cTn id="56" presetID="10" presetClass="entr" presetSubtype="0" fill="hold" nodeType="clickEffect">
-                                  <p:stCondLst>
-                                    <p:cond delay="0"/>
-                                  </p:stCondLst>
-                                  <p:childTnLst>
-                                    <p:set>
-                                      <p:cBhvr>
-                                        <p:cTn id="57" dur="1" fill="hold">
-                                          <p:stCondLst>
-                                            <p:cond delay="0"/>
-                                          </p:stCondLst>
-                                        </p:cTn>
-                                        <p:tgtEl>
-                                          <p:spTgt spid="40"/>
-                                        </p:tgtEl>
-                                        <p:attrNameLst>
-                                          <p:attrName>style.visibility</p:attrName>
-                                        </p:attrNameLst>
-                                      </p:cBhvr>
-                                      <p:to>
-                                        <p:strVal val="visible"/>
-                                      </p:to>
-                                    </p:set>
-                                    <p:animEffect transition="in" filter="fade">
-                                      <p:cBhvr>
-                                        <p:cTn id="58" dur="500"/>
-                                        <p:tgtEl>
                                           <p:spTgt spid="40"/>
                                         </p:tgtEl>
                                       </p:cBhvr>
@@ -30694,14 +30874,14 @@
                                 </p:cTn>
                               </p:par>
                               <p:par>
-                                <p:cTn id="59" presetID="10" presetClass="entr" presetSubtype="0" fill="hold" nodeType="withEffect">
+                                <p:cTn id="54" presetID="10" presetClass="entr" presetSubtype="0" fill="hold" nodeType="withEffect">
                                   <p:stCondLst>
                                     <p:cond delay="0"/>
                                   </p:stCondLst>
                                   <p:childTnLst>
                                     <p:set>
                                       <p:cBhvr>
-                                        <p:cTn id="60" dur="1" fill="hold">
+                                        <p:cTn id="55" dur="1" fill="hold">
                                           <p:stCondLst>
                                             <p:cond delay="0"/>
                                           </p:stCondLst>
@@ -30719,7 +30899,7 @@
                                     </p:set>
                                     <p:animEffect transition="in" filter="fade">
                                       <p:cBhvr>
-                                        <p:cTn id="61" dur="500"/>
+                                        <p:cTn id="56" dur="500"/>
                                         <p:tgtEl>
                                           <p:spTgt spid="43"/>
                                         </p:tgtEl>
@@ -30729,14 +30909,14 @@
                                 </p:cTn>
                               </p:par>
                               <p:par>
-                                <p:cTn id="62" presetID="10" presetClass="entr" presetSubtype="0" fill="hold" nodeType="withEffect">
+                                <p:cTn id="57" presetID="10" presetClass="entr" presetSubtype="0" fill="hold" nodeType="withEffect">
                                   <p:stCondLst>
                                     <p:cond delay="0"/>
                                   </p:stCondLst>
                                   <p:childTnLst>
                                     <p:set>
                                       <p:cBhvr>
-                                        <p:cTn id="63" dur="1" fill="hold">
+                                        <p:cTn id="58" dur="1" fill="hold">
                                           <p:stCondLst>
                                             <p:cond delay="0"/>
                                           </p:stCondLst>
@@ -30754,7 +30934,7 @@
                                     </p:set>
                                     <p:animEffect transition="in" filter="fade">
                                       <p:cBhvr>
-                                        <p:cTn id="64" dur="500"/>
+                                        <p:cTn id="59" dur="500"/>
                                         <p:tgtEl>
                                           <p:spTgt spid="42"/>
                                         </p:tgtEl>
@@ -30764,14 +30944,14 @@
                                 </p:cTn>
                               </p:par>
                               <p:par>
-                                <p:cTn id="65" presetID="10" presetClass="entr" presetSubtype="0" fill="hold" nodeType="withEffect">
+                                <p:cTn id="60" presetID="10" presetClass="entr" presetSubtype="0" fill="hold" nodeType="withEffect">
                                   <p:stCondLst>
                                     <p:cond delay="0"/>
                                   </p:stCondLst>
                                   <p:childTnLst>
                                     <p:set>
                                       <p:cBhvr>
-                                        <p:cTn id="66" dur="1" fill="hold">
+                                        <p:cTn id="61" dur="1" fill="hold">
                                           <p:stCondLst>
                                             <p:cond delay="0"/>
                                           </p:stCondLst>
@@ -30789,9 +30969,44 @@
                                     </p:set>
                                     <p:animEffect transition="in" filter="fade">
                                       <p:cBhvr>
-                                        <p:cTn id="67" dur="500"/>
+                                        <p:cTn id="62" dur="500"/>
                                         <p:tgtEl>
                                           <p:spTgt spid="41"/>
+                                        </p:tgtEl>
+                                      </p:cBhvr>
+                                    </p:animEffect>
+                                  </p:childTnLst>
+                                </p:cTn>
+                              </p:par>
+                              <p:par>
+                                <p:cTn id="63" presetID="10" presetClass="entr" presetSubtype="0" fill="hold" nodeType="withEffect">
+                                  <p:stCondLst>
+                                    <p:cond delay="0"/>
+                                  </p:stCondLst>
+                                  <p:childTnLst>
+                                    <p:set>
+                                      <p:cBhvr>
+                                        <p:cTn id="64" dur="1" fill="hold">
+                                          <p:stCondLst>
+                                            <p:cond delay="0"/>
+                                          </p:stCondLst>
+                                        </p:cTn>
+                                        <p:tgtEl>
+                                          <p:spTgt spid="19"/>
+                                        </p:tgtEl>
+                                        <p:attrNameLst>
+                                          <p:attrName>style.visibility</p:attrName>
+                                        </p:attrNameLst>
+                                      </p:cBhvr>
+                                      <p:to>
+                                        <p:strVal val="visible"/>
+                                      </p:to>
+                                    </p:set>
+                                    <p:animEffect transition="in" filter="fade">
+                                      <p:cBhvr>
+                                        <p:cTn id="65" dur="500"/>
+                                        <p:tgtEl>
+                                          <p:spTgt spid="19"/>
                                         </p:tgtEl>
                                       </p:cBhvr>
                                     </p:animEffect>
@@ -30955,7 +31170,7 @@
                   <a:srgbClr val="8E6F3E"/>
                 </a:solidFill>
               </a:rPr>
-              <a:t xml:space="preserve">DECISION      </a:t>
+              <a:t>DECISION      </a:t>
             </a:r>
             <a:r>
               <a:rPr sz="2000" b="0" i="0">
@@ -31046,7 +31261,7 @@
           <a:p>
             <a:pPr algn="l"/>
             <a:r>
-              <a:rPr sz="2000" b="1" i="0">
+              <a:rPr sz="2000" b="1" i="0" dirty="0">
                 <a:solidFill>
                   <a:srgbClr val="5C4826"/>
                 </a:solidFill>
@@ -31055,9 +31270,12 @@
             </a:r>
           </a:p>
           <a:p>
-            <a:pPr algn="l"/>
-            <a:r>
-              <a:rPr sz="2000" b="0" i="0">
+            <a:pPr marL="342900" indent="-225425" algn="l">
+              <a:buFont typeface="Arial" panose="020B0604020202020204" pitchFamily="34" charset="0"/>
+              <a:buChar char="•"/>
+            </a:pPr>
+            <a:r>
+              <a:rPr sz="2000" b="0" i="0" dirty="0">
                 <a:solidFill>
                   <a:srgbClr val="5C4826"/>
                 </a:solidFill>
@@ -31066,9 +31284,12 @@
             </a:r>
           </a:p>
           <a:p>
-            <a:pPr algn="l"/>
-            <a:r>
-              <a:rPr sz="2000" b="0" i="0">
+            <a:pPr marL="342900" indent="-225425" algn="l">
+              <a:buFont typeface="Arial" panose="020B0604020202020204" pitchFamily="34" charset="0"/>
+              <a:buChar char="•"/>
+            </a:pPr>
+            <a:r>
+              <a:rPr sz="2000" b="0" i="0" dirty="0">
                 <a:solidFill>
                   <a:srgbClr val="5C4826"/>
                 </a:solidFill>
@@ -31122,7 +31343,7 @@
           <a:p>
             <a:pPr algn="l"/>
             <a:r>
-              <a:rPr sz="2000" b="1" i="0">
+              <a:rPr sz="2000" b="1" i="0" dirty="0">
                 <a:solidFill>
                   <a:srgbClr val="5C4826"/>
                 </a:solidFill>
@@ -31131,9 +31352,12 @@
             </a:r>
           </a:p>
           <a:p>
-            <a:pPr algn="l"/>
-            <a:r>
-              <a:rPr sz="2000" b="0" i="0">
+            <a:pPr marL="342900" indent="-157163" algn="l">
+              <a:buFont typeface="Arial" panose="020B0604020202020204" pitchFamily="34" charset="0"/>
+              <a:buChar char="•"/>
+            </a:pPr>
+            <a:r>
+              <a:rPr sz="2000" b="0" i="0" dirty="0">
                 <a:solidFill>
                   <a:srgbClr val="5C4826"/>
                 </a:solidFill>
@@ -31142,9 +31366,12 @@
             </a:r>
           </a:p>
           <a:p>
-            <a:pPr algn="l"/>
-            <a:r>
-              <a:rPr sz="2000" b="0" i="0">
+            <a:pPr marL="342900" indent="-157163" algn="l">
+              <a:buFont typeface="Arial" panose="020B0604020202020204" pitchFamily="34" charset="0"/>
+              <a:buChar char="•"/>
+            </a:pPr>
+            <a:r>
+              <a:rPr sz="2000" b="0" i="0" dirty="0">
                 <a:solidFill>
                   <a:srgbClr val="5C4826"/>
                 </a:solidFill>
@@ -31183,7 +31410,7 @@
                   <a:srgbClr val="8E6F3E"/>
                 </a:solidFill>
               </a:rPr>
-              <a:t xml:space="preserve">KNOWN      </a:t>
+              <a:t>KNOWN      </a:t>
             </a:r>
             <a:r>
               <a:rPr sz="2000" b="0" i="0">
@@ -31225,7 +31452,7 @@
                   <a:srgbClr val="8E6F3E"/>
                 </a:solidFill>
               </a:rPr>
-              <a:t xml:space="preserve">UNCERTAIN      </a:t>
+              <a:t>UNCERTAIN      </a:t>
             </a:r>
             <a:r>
               <a:rPr sz="2000" b="0" i="0">
@@ -31336,13 +31563,26 @@
           <a:p>
             <a:pPr algn="ctr"/>
             <a:r>
-              <a:rPr sz="2000" b="0" i="0">
+              <a:rPr sz="2000" b="0" i="0" dirty="0">
                 <a:solidFill>
                   <a:srgbClr val="5C4826"/>
                 </a:solidFill>
               </a:rPr>
-              <a:t>Run both under a representative workload; compare the latency distributions.</a:t>
-            </a:r>
+              <a:t>Run both under a representative workload; compare the latency distributions</a:t>
+            </a:r>
+            <a:r>
+              <a:rPr lang="en-US" sz="2000" b="0" i="0" dirty="0">
+                <a:solidFill>
+                  <a:srgbClr val="5C4826"/>
+                </a:solidFill>
+              </a:rPr>
+              <a:t>?</a:t>
+            </a:r>
+            <a:endParaRPr sz="2000" b="0" i="0" dirty="0">
+              <a:solidFill>
+                <a:srgbClr val="5C4826"/>
+              </a:solidFill>
+            </a:endParaRPr>
           </a:p>
         </p:txBody>
       </p:sp>

--- a/course/lectures/act-1-foundations/09-engineering-decision-making-and-metrics/1-9-Engineering-Decision-Making-and-Metrics.pptx
+++ b/course/lectures/act-1-foundations/09-engineering-decision-making-and-metrics/1-9-Engineering-Decision-Making-and-Metrics.pptx
@@ -6722,33 +6722,73 @@
       </p:grpSpPr>
       <p:sp>
         <p:nvSpPr>
-          <p:cNvPr id="2" name="Title 2"/>
-          <p:cNvSpPr>
-            <a:spLocks noGrp="1"/>
+          <p:cNvPr id="2" name="Title 2">
+            <a:extLst>
+              <a:ext uri="{FF2B5EF4-FFF2-40B4-BE49-F238E27FC236}">
+                <a16:creationId xmlns:a16="http://schemas.microsoft.com/office/drawing/2014/main" id="{DD7291C3-5AE9-477A-3F39-34A06A62D99C}"/>
+              </a:ext>
+            </a:extLst>
+          </p:cNvPr>
+          <p:cNvSpPr txBox="1">
+            <a:spLocks/>
           </p:cNvSpPr>
-          <p:nvPr>
-            <p:ph type="ctrTitle"/>
-          </p:nvPr>
-        </p:nvSpPr>
-        <p:spPr>
-          <a:xfrm>
-            <a:off x="439339" y="565150"/>
-            <a:ext cx="8265319" cy="700000"/>
-          </a:xfrm>
-        </p:spPr>
-        <p:txBody>
-          <a:bodyPr>
+          <p:nvPr/>
+        </p:nvSpPr>
+        <p:spPr bwMode="black">
+          <a:xfrm>
+            <a:off x="439339" y="565149"/>
+            <a:ext cx="8265319" cy="1195411"/>
+          </a:xfrm>
+          <a:prstGeom prst="rect">
+            <a:avLst/>
+          </a:prstGeom>
+          <a:solidFill>
+            <a:srgbClr val="FFFFFF"/>
+          </a:solidFill>
+          <a:ln w="31750" cap="sq">
+            <a:noFill/>
+            <a:miter lim="800000"/>
+          </a:ln>
+        </p:spPr>
+        <p:txBody>
+          <a:bodyPr vert="horz" lIns="182880" tIns="182880" rIns="182880" bIns="182880" rtlCol="0" anchor="ctr">
             <a:normAutofit/>
           </a:bodyPr>
-          <a:lstStyle/>
-          <a:p>
-            <a:pPr>
-              <a:defRPr b="0"/>
-            </a:pPr>
-            <a:r>
-              <a:rPr lang="en-US" sz="2000" b="0" i="1" dirty="0"/>
-              <a:t>ECE 30861/46100: Software Engineering</a:t>
-            </a:r>
+          <a:lstStyle>
+            <a:lvl1pPr algn="ctr" defTabSz="914400" rtl="0" eaLnBrk="1" latinLnBrk="0" hangingPunct="1">
+              <a:lnSpc>
+                <a:spcPct val="90000"/>
+              </a:lnSpc>
+              <a:spcBef>
+                <a:spcPct val="0"/>
+              </a:spcBef>
+              <a:buNone/>
+              <a:defRPr sz="3600" kern="1200" cap="none" spc="200" baseline="0">
+                <a:solidFill>
+                  <a:srgbClr val="000000"/>
+                </a:solidFill>
+                <a:latin typeface="Calibri" panose="020F0502020204030204" pitchFamily="34" charset="0"/>
+                <a:ea typeface="+mj-ea"/>
+                <a:cs typeface="Calibri" panose="020F0502020204030204" pitchFamily="34" charset="0"/>
+              </a:defRPr>
+            </a:lvl1pPr>
+          </a:lstStyle>
+          <a:p>
+            <a:r>
+              <a:rPr lang="en-US" sz="2000" i="1" dirty="0"/>
+              <a:t>Software Engineering</a:t>
+            </a:r>
+            <a:br>
+              <a:rPr lang="en-US" sz="2000" i="1" dirty="0"/>
+            </a:br>
+            <a:br>
+              <a:rPr lang="en-US" sz="2000" i="1" dirty="0"/>
+            </a:br>
+            <a:r>
+              <a:rPr lang="en-US" sz="1600" i="1" dirty="0"/>
+              <a:t>ECE 30861 / CSCI 45000</a:t>
+            </a:r>
+            <a:endParaRPr lang="en-US" sz="2000" i="1" dirty="0"/>
           </a:p>
         </p:txBody>
       </p:sp>

--- a/course/lectures/act-1-foundations/09-engineering-decision-making-and-metrics/1-9-Engineering-Decision-Making-and-Metrics.pptx
+++ b/course/lectures/act-1-foundations/09-engineering-decision-making-and-metrics/1-9-Engineering-Decision-Making-and-Metrics.pptx
@@ -3431,49 +3431,32 @@
       </p:sp>
       <p:pic>
         <p:nvPicPr>
-          <p:cNvPr id="1026" name="Picture 2" descr="Electrical and Computer Engineering Black and Gold Co-Brand Logo">
+          <p:cNvPr id="1026" name="Purdue CoBrand">
             <a:extLst>
               <a:ext uri="{FF2B5EF4-FFF2-40B4-BE49-F238E27FC236}">
-                <a16:creationId xmlns:a16="http://schemas.microsoft.com/office/drawing/2014/main" id="{DA2A365A-4E3B-2A48-8812-990B2A2EE92D}"/>
+                <a16:creationId xmlns:a16="http://schemas.microsoft.com/office/drawing/2014/main" id="{BCBD89D8-43BD-5D41-99C6-91B0B6A51904}"/>
               </a:ext>
             </a:extLst>
           </p:cNvPr>
           <p:cNvPicPr>
-            <a:picLocks noChangeAspect="1" noChangeArrowheads="1"/>
+            <a:picLocks noChangeAspect="1"/>
           </p:cNvPicPr>
           <p:nvPr userDrawn="1"/>
         </p:nvPicPr>
         <p:blipFill>
-          <a:blip r:embed="rId2">
-            <a:extLst>
-              <a:ext uri="{28A0092B-C50C-407E-A947-70E740481C1C}">
-                <a14:useLocalDpi xmlns:a14="http://schemas.microsoft.com/office/drawing/2010/main" val="0"/>
-              </a:ext>
-            </a:extLst>
-          </a:blip>
-          <a:srcRect/>
+          <a:blip r:embed="rId2"/>
           <a:stretch>
             <a:fillRect/>
           </a:stretch>
         </p:blipFill>
-        <p:spPr bwMode="auto">
-          <a:xfrm>
-            <a:off x="3876158" y="5721845"/>
-            <a:ext cx="1264684" cy="999630"/>
+        <p:spPr>
+          <a:xfrm>
+            <a:off x="2097131" y="5715964"/>
+            <a:ext cx="5091026" cy="542584"/>
           </a:xfrm>
           <a:prstGeom prst="rect">
             <a:avLst/>
           </a:prstGeom>
-          <a:noFill/>
-          <a:extLst>
-            <a:ext uri="{909E8E84-426E-40DD-AFC4-6F175D3DCCD1}">
-              <a14:hiddenFill xmlns:a14="http://schemas.microsoft.com/office/drawing/2010/main">
-                <a:solidFill>
-                  <a:srgbClr val="FFFFFF"/>
-                </a:solidFill>
-              </a14:hiddenFill>
-            </a:ext>
-          </a:extLst>
         </p:spPr>
       </p:pic>
     </p:spTree>
